--- a/downloads/presentations/modules/pol-310.pptx
+++ b/downloads/presentations/modules/pol-310.pptx
@@ -3527,13 +3527,11 @@
             </a:avLst>
           </a:prstGeom>
           <a:solidFill>
-            <a:srgbClr val="FFFFFF">
-              <a:alpha val="88000"/>
-            </a:srgbClr>
+            <a:srgbClr val="FFFFFF"/>
           </a:solidFill>
           <a:ln w="12700">
             <a:solidFill>
-              <a:srgbClr val="D6E8F2"/>
+              <a:srgbClr val="B9D7E6"/>
             </a:solidFill>
             <a:prstDash val="solid"/>
           </a:ln>
@@ -3541,190 +3539,112 @@
       </p:sp>
       <p:sp>
         <p:nvSpPr>
-          <p:cNvPr id="14" name="Shape 12"/>
-          <p:cNvSpPr/>
-          <p:nvPr/>
-        </p:nvSpPr>
-        <p:spPr>
-          <a:xfrm>
-            <a:off x="7891272" y="3108960"/>
-            <a:ext cx="566928" cy="566928"/>
-          </a:xfrm>
-          <a:prstGeom prst="ellipse">
-            <a:avLst/>
-          </a:prstGeom>
-          <a:solidFill>
-            <a:srgbClr val="0068B7"/>
-          </a:solidFill>
-          <a:ln w="12700">
-            <a:solidFill>
-              <a:srgbClr val="0068B7"/>
-            </a:solidFill>
-            <a:prstDash val="solid"/>
-          </a:ln>
-        </p:spPr>
-      </p:sp>
-      <p:sp>
-        <p:nvSpPr>
-          <p:cNvPr id="15" name="Shape 13"/>
-          <p:cNvSpPr/>
-          <p:nvPr/>
-        </p:nvSpPr>
-        <p:spPr>
-          <a:xfrm>
-            <a:off x="10287000" y="3108960"/>
-            <a:ext cx="566928" cy="566928"/>
-          </a:xfrm>
-          <a:prstGeom prst="ellipse">
-            <a:avLst/>
-          </a:prstGeom>
-          <a:solidFill>
-            <a:srgbClr val="2F8A28"/>
-          </a:solidFill>
-          <a:ln w="12700">
-            <a:solidFill>
-              <a:srgbClr val="2F8A28"/>
-            </a:solidFill>
-            <a:prstDash val="solid"/>
-          </a:ln>
-        </p:spPr>
+          <p:cNvPr id="14" name="Text 12"/>
+          <p:cNvSpPr/>
+          <p:nvPr/>
+        </p:nvSpPr>
+        <p:spPr>
+          <a:xfrm>
+            <a:off x="7799832" y="2935224"/>
+            <a:ext cx="3145536" cy="256032"/>
+          </a:xfrm>
+          <a:prstGeom prst="rect">
+            <a:avLst/>
+          </a:prstGeom>
+          <a:noFill/>
+          <a:ln/>
+        </p:spPr>
+        <p:txBody>
+          <a:bodyPr wrap="square" lIns="0" tIns="0" rIns="0" bIns="0" rtlCol="0" anchor="ctr"/>
+          <a:lstStyle/>
+          <a:p>
+            <a:pPr indent="0" marL="0">
+              <a:buNone/>
+            </a:pPr>
+            <a:r>
+              <a:rPr lang="en-US" sz="1300" b="1" dirty="0">
+                <a:solidFill>
+                  <a:srgbClr val="0068B7"/>
+                </a:solidFill>
+                <a:latin typeface="Aptos" pitchFamily="34" charset="0"/>
+                <a:ea typeface="Aptos" pitchFamily="34" charset="-122"/>
+                <a:cs typeface="Aptos" pitchFamily="34" charset="-120"/>
+              </a:rPr>
+              <a:t>Concept checkpoints</a:t>
+            </a:r>
+            <a:endParaRPr lang="en-US" sz="1300" dirty="0"/>
+          </a:p>
+        </p:txBody>
+      </p:sp>
+      <p:sp>
+        <p:nvSpPr>
+          <p:cNvPr id="15" name="Text 13"/>
+          <p:cNvSpPr/>
+          <p:nvPr/>
+        </p:nvSpPr>
+        <p:spPr>
+          <a:xfrm>
+            <a:off x="7818120" y="3300984"/>
+            <a:ext cx="3090672" cy="877824"/>
+          </a:xfrm>
+          <a:prstGeom prst="rect">
+            <a:avLst/>
+          </a:prstGeom>
+          <a:noFill/>
+          <a:ln/>
+        </p:spPr>
+        <p:txBody>
+          <a:bodyPr wrap="square" lIns="254" tIns="254" rIns="254" bIns="254" rtlCol="0" anchor="t">
+            <a:normAutofit/>
+          </a:bodyPr>
+          <a:lstStyle/>
+          <a:p>
+            <a:r>
+              <a:rPr lang="en-US" sz="1380" dirty="0">
+                <a:solidFill>
+                  <a:srgbClr val="17364A"/>
+                </a:solidFill>
+                <a:latin typeface="Aptos" pitchFamily="34" charset="0"/>
+                <a:ea typeface="Aptos" pitchFamily="34" charset="-122"/>
+                <a:cs typeface="Aptos" pitchFamily="34" charset="-120"/>
+              </a:rPr>
+              <a:t>A public health agency is preparing to use AI in a workflow related to creating,.</a:t>
+            </a:r>
+            <a:endParaRPr lang="en-US" sz="1380" dirty="0"/>
+          </a:p>
+          <a:p>
+            <a:r>
+              <a:rPr lang="en-US" sz="1380" dirty="0">
+                <a:solidFill>
+                  <a:srgbClr val="17364A"/>
+                </a:solidFill>
+                <a:latin typeface="Aptos" pitchFamily="34" charset="0"/>
+                <a:ea typeface="Aptos" pitchFamily="34" charset="-122"/>
+                <a:cs typeface="Aptos" pitchFamily="34" charset="-120"/>
+              </a:rPr>
+              <a:t>The project team initially treats the tool as a helpful efficiency aid, but governance.</a:t>
+            </a:r>
+            <a:endParaRPr lang="en-US" sz="1380" dirty="0"/>
+          </a:p>
+          <a:p>
+            <a:r>
+              <a:rPr lang="en-US" sz="1380" dirty="0">
+                <a:solidFill>
+                  <a:srgbClr val="17364A"/>
+                </a:solidFill>
+                <a:latin typeface="Aptos" pitchFamily="34" charset="0"/>
+                <a:ea typeface="Aptos" pitchFamily="34" charset="-122"/>
+                <a:cs typeface="Aptos" pitchFamily="34" charset="-120"/>
+              </a:rPr>
+              <a:t>The agency responds by creating a clear artifact that defines intended use, prohibited.</a:t>
+            </a:r>
+            <a:endParaRPr lang="en-US" sz="1380" dirty="0"/>
+          </a:p>
+        </p:txBody>
       </p:sp>
       <p:sp>
         <p:nvSpPr>
           <p:cNvPr id="16" name="Shape 14"/>
-          <p:cNvSpPr/>
-          <p:nvPr/>
-        </p:nvSpPr>
-        <p:spPr>
-          <a:xfrm>
-            <a:off x="9089136" y="3456432"/>
-            <a:ext cx="566928" cy="566928"/>
-          </a:xfrm>
-          <a:prstGeom prst="ellipse">
-            <a:avLst/>
-          </a:prstGeom>
-          <a:solidFill>
-            <a:srgbClr val="6A4CA3"/>
-          </a:solidFill>
-          <a:ln w="12700">
-            <a:solidFill>
-              <a:srgbClr val="6A4CA3"/>
-            </a:solidFill>
-            <a:prstDash val="solid"/>
-          </a:ln>
-        </p:spPr>
-      </p:sp>
-      <p:sp>
-        <p:nvSpPr>
-          <p:cNvPr id="17" name="Shape 15"/>
-          <p:cNvSpPr/>
-          <p:nvPr/>
-        </p:nvSpPr>
-        <p:spPr>
-          <a:xfrm>
-            <a:off x="8385048" y="3419856"/>
-            <a:ext cx="1975104" cy="0"/>
-          </a:xfrm>
-          <a:prstGeom prst="line">
-            <a:avLst/>
-          </a:prstGeom>
-          <a:noFill/>
-          <a:ln w="25400">
-            <a:solidFill>
-              <a:srgbClr val="8ABBD8"/>
-            </a:solidFill>
-            <a:prstDash val="solid"/>
-          </a:ln>
-        </p:spPr>
-      </p:sp>
-      <p:sp>
-        <p:nvSpPr>
-          <p:cNvPr id="18" name="Shape 16"/>
-          <p:cNvSpPr/>
-          <p:nvPr/>
-        </p:nvSpPr>
-        <p:spPr>
-          <a:xfrm>
-            <a:off x="8202168" y="3630168"/>
-            <a:ext cx="1170432" cy="118872"/>
-          </a:xfrm>
-          <a:prstGeom prst="line">
-            <a:avLst/>
-          </a:prstGeom>
-          <a:noFill/>
-          <a:ln w="25400">
-            <a:solidFill>
-              <a:srgbClr val="8ABBD8"/>
-            </a:solidFill>
-            <a:prstDash val="solid"/>
-          </a:ln>
-        </p:spPr>
-      </p:sp>
-      <p:sp>
-        <p:nvSpPr>
-          <p:cNvPr id="19" name="Shape 17"/>
-          <p:cNvSpPr/>
-          <p:nvPr/>
-        </p:nvSpPr>
-        <p:spPr>
-          <a:xfrm>
-            <a:off x="10543032" y="3630168"/>
-            <a:ext cx="-1170432" cy="118872"/>
-          </a:xfrm>
-          <a:prstGeom prst="line">
-            <a:avLst/>
-          </a:prstGeom>
-          <a:noFill/>
-          <a:ln w="25400">
-            <a:solidFill>
-              <a:srgbClr val="8ABBD8"/>
-            </a:solidFill>
-            <a:prstDash val="solid"/>
-          </a:ln>
-        </p:spPr>
-      </p:sp>
-      <p:sp>
-        <p:nvSpPr>
-          <p:cNvPr id="20" name="Text 18"/>
-          <p:cNvSpPr/>
-          <p:nvPr/>
-        </p:nvSpPr>
-        <p:spPr>
-          <a:xfrm>
-            <a:off x="7863840" y="4069080"/>
-            <a:ext cx="3017520" cy="164592"/>
-          </a:xfrm>
-          <a:prstGeom prst="rect">
-            <a:avLst/>
-          </a:prstGeom>
-          <a:noFill/>
-          <a:ln/>
-        </p:spPr>
-        <p:txBody>
-          <a:bodyPr wrap="square" lIns="0" tIns="0" rIns="0" bIns="0" rtlCol="0" anchor="ctr"/>
-          <a:lstStyle/>
-          <a:p>
-            <a:pPr algn="ctr" indent="0" marL="0">
-              <a:buNone/>
-            </a:pPr>
-            <a:r>
-              <a:rPr lang="en-US" sz="900" b="1" dirty="0">
-                <a:solidFill>
-                  <a:srgbClr val="003A63"/>
-                </a:solidFill>
-                <a:latin typeface="Aptos" pitchFamily="34" charset="0"/>
-                <a:ea typeface="Aptos" pitchFamily="34" charset="-122"/>
-                <a:cs typeface="Aptos" pitchFamily="34" charset="-120"/>
-              </a:rPr>
-              <a:t>Decision rights</a:t>
-            </a:r>
-            <a:endParaRPr lang="en-US" sz="900" dirty="0"/>
-          </a:p>
-        </p:txBody>
-      </p:sp>
-      <p:sp>
-        <p:nvSpPr>
-          <p:cNvPr id="21" name="Shape 19"/>
           <p:cNvSpPr/>
           <p:nvPr/>
         </p:nvSpPr>
@@ -3751,7 +3671,7 @@
       </p:sp>
       <p:sp>
         <p:nvSpPr>
-          <p:cNvPr id="22" name="Text 20"/>
+          <p:cNvPr id="17" name="Text 15"/>
           <p:cNvSpPr/>
           <p:nvPr/>
         </p:nvSpPr>
@@ -3790,7 +3710,7 @@
       </p:sp>
       <p:sp>
         <p:nvSpPr>
-          <p:cNvPr id="23" name="Text 21"/>
+          <p:cNvPr id="18" name="Text 16"/>
           <p:cNvSpPr/>
           <p:nvPr/>
         </p:nvSpPr>
@@ -4298,13 +4218,11 @@
             </a:avLst>
           </a:prstGeom>
           <a:solidFill>
-            <a:srgbClr val="FFFFFF">
-              <a:alpha val="88000"/>
-            </a:srgbClr>
+            <a:srgbClr val="FFFFFF"/>
           </a:solidFill>
           <a:ln w="12700">
             <a:solidFill>
-              <a:srgbClr val="D6E8F2"/>
+              <a:srgbClr val="B9D7E6"/>
             </a:solidFill>
             <a:prstDash val="solid"/>
           </a:ln>
@@ -4312,190 +4230,112 @@
       </p:sp>
       <p:sp>
         <p:nvSpPr>
-          <p:cNvPr id="14" name="Shape 12"/>
-          <p:cNvSpPr/>
-          <p:nvPr/>
-        </p:nvSpPr>
-        <p:spPr>
-          <a:xfrm>
-            <a:off x="7891272" y="3108960"/>
-            <a:ext cx="566928" cy="566928"/>
-          </a:xfrm>
-          <a:prstGeom prst="ellipse">
-            <a:avLst/>
-          </a:prstGeom>
-          <a:solidFill>
-            <a:srgbClr val="0068B7"/>
-          </a:solidFill>
-          <a:ln w="12700">
-            <a:solidFill>
-              <a:srgbClr val="0068B7"/>
-            </a:solidFill>
-            <a:prstDash val="solid"/>
-          </a:ln>
-        </p:spPr>
-      </p:sp>
-      <p:sp>
-        <p:nvSpPr>
-          <p:cNvPr id="15" name="Shape 13"/>
-          <p:cNvSpPr/>
-          <p:nvPr/>
-        </p:nvSpPr>
-        <p:spPr>
-          <a:xfrm>
-            <a:off x="10287000" y="3108960"/>
-            <a:ext cx="566928" cy="566928"/>
-          </a:xfrm>
-          <a:prstGeom prst="ellipse">
-            <a:avLst/>
-          </a:prstGeom>
-          <a:solidFill>
-            <a:srgbClr val="2F8A28"/>
-          </a:solidFill>
-          <a:ln w="12700">
-            <a:solidFill>
-              <a:srgbClr val="2F8A28"/>
-            </a:solidFill>
-            <a:prstDash val="solid"/>
-          </a:ln>
-        </p:spPr>
+          <p:cNvPr id="14" name="Text 12"/>
+          <p:cNvSpPr/>
+          <p:nvPr/>
+        </p:nvSpPr>
+        <p:spPr>
+          <a:xfrm>
+            <a:off x="7799832" y="2935224"/>
+            <a:ext cx="3145536" cy="256032"/>
+          </a:xfrm>
+          <a:prstGeom prst="rect">
+            <a:avLst/>
+          </a:prstGeom>
+          <a:noFill/>
+          <a:ln/>
+        </p:spPr>
+        <p:txBody>
+          <a:bodyPr wrap="square" lIns="0" tIns="0" rIns="0" bIns="0" rtlCol="0" anchor="ctr"/>
+          <a:lstStyle/>
+          <a:p>
+            <a:pPr indent="0" marL="0">
+              <a:buNone/>
+            </a:pPr>
+            <a:r>
+              <a:rPr lang="en-US" sz="1300" b="1" dirty="0">
+                <a:solidFill>
+                  <a:srgbClr val="0068B7"/>
+                </a:solidFill>
+                <a:latin typeface="Aptos" pitchFamily="34" charset="0"/>
+                <a:ea typeface="Aptos" pitchFamily="34" charset="-122"/>
+                <a:cs typeface="Aptos" pitchFamily="34" charset="-120"/>
+              </a:rPr>
+              <a:t>Concept checkpoints</a:t>
+            </a:r>
+            <a:endParaRPr lang="en-US" sz="1300" dirty="0"/>
+          </a:p>
+        </p:txBody>
+      </p:sp>
+      <p:sp>
+        <p:nvSpPr>
+          <p:cNvPr id="15" name="Text 13"/>
+          <p:cNvSpPr/>
+          <p:nvPr/>
+        </p:nvSpPr>
+        <p:spPr>
+          <a:xfrm>
+            <a:off x="7818120" y="3300984"/>
+            <a:ext cx="3090672" cy="877824"/>
+          </a:xfrm>
+          <a:prstGeom prst="rect">
+            <a:avLst/>
+          </a:prstGeom>
+          <a:noFill/>
+          <a:ln/>
+        </p:spPr>
+        <p:txBody>
+          <a:bodyPr wrap="square" lIns="254" tIns="254" rIns="254" bIns="254" rtlCol="0" anchor="t">
+            <a:normAutofit/>
+          </a:bodyPr>
+          <a:lstStyle/>
+          <a:p>
+            <a:r>
+              <a:rPr lang="en-US" sz="1380" dirty="0">
+                <a:solidFill>
+                  <a:srgbClr val="17364A"/>
+                </a:solidFill>
+                <a:latin typeface="Aptos" pitchFamily="34" charset="0"/>
+                <a:ea typeface="Aptos" pitchFamily="34" charset="-122"/>
+                <a:cs typeface="Aptos" pitchFamily="34" charset="-120"/>
+              </a:rPr>
+              <a:t>Staff should identify who is affected, what data are used, what AI output is produced, who.</a:t>
+            </a:r>
+            <a:endParaRPr lang="en-US" sz="1380" dirty="0"/>
+          </a:p>
+          <a:p>
+            <a:r>
+              <a:rPr lang="en-US" sz="1380" dirty="0">
+                <a:solidFill>
+                  <a:srgbClr val="17364A"/>
+                </a:solidFill>
+                <a:latin typeface="Aptos" pitchFamily="34" charset="0"/>
+                <a:ea typeface="Aptos" pitchFamily="34" charset="-122"/>
+                <a:cs typeface="Aptos" pitchFamily="34" charset="-120"/>
+              </a:rPr>
+              <a:t>The second step is to assign responsibilities.</a:t>
+            </a:r>
+            <a:endParaRPr lang="en-US" sz="1380" dirty="0"/>
+          </a:p>
+          <a:p>
+            <a:r>
+              <a:rPr lang="en-US" sz="1380" dirty="0">
+                <a:solidFill>
+                  <a:srgbClr val="17364A"/>
+                </a:solidFill>
+                <a:latin typeface="Aptos" pitchFamily="34" charset="0"/>
+                <a:ea typeface="Aptos" pitchFamily="34" charset="-122"/>
+                <a:cs typeface="Aptos" pitchFamily="34" charset="-120"/>
+              </a:rPr>
+              <a:t>AI-supported workflows often cross program, IT, legal, privacy, communications,.</a:t>
+            </a:r>
+            <a:endParaRPr lang="en-US" sz="1380" dirty="0"/>
+          </a:p>
+        </p:txBody>
       </p:sp>
       <p:sp>
         <p:nvSpPr>
           <p:cNvPr id="16" name="Shape 14"/>
-          <p:cNvSpPr/>
-          <p:nvPr/>
-        </p:nvSpPr>
-        <p:spPr>
-          <a:xfrm>
-            <a:off x="9089136" y="3456432"/>
-            <a:ext cx="566928" cy="566928"/>
-          </a:xfrm>
-          <a:prstGeom prst="ellipse">
-            <a:avLst/>
-          </a:prstGeom>
-          <a:solidFill>
-            <a:srgbClr val="6A4CA3"/>
-          </a:solidFill>
-          <a:ln w="12700">
-            <a:solidFill>
-              <a:srgbClr val="6A4CA3"/>
-            </a:solidFill>
-            <a:prstDash val="solid"/>
-          </a:ln>
-        </p:spPr>
-      </p:sp>
-      <p:sp>
-        <p:nvSpPr>
-          <p:cNvPr id="17" name="Shape 15"/>
-          <p:cNvSpPr/>
-          <p:nvPr/>
-        </p:nvSpPr>
-        <p:spPr>
-          <a:xfrm>
-            <a:off x="8385048" y="3419856"/>
-            <a:ext cx="1975104" cy="0"/>
-          </a:xfrm>
-          <a:prstGeom prst="line">
-            <a:avLst/>
-          </a:prstGeom>
-          <a:noFill/>
-          <a:ln w="25400">
-            <a:solidFill>
-              <a:srgbClr val="8ABBD8"/>
-            </a:solidFill>
-            <a:prstDash val="solid"/>
-          </a:ln>
-        </p:spPr>
-      </p:sp>
-      <p:sp>
-        <p:nvSpPr>
-          <p:cNvPr id="18" name="Shape 16"/>
-          <p:cNvSpPr/>
-          <p:nvPr/>
-        </p:nvSpPr>
-        <p:spPr>
-          <a:xfrm>
-            <a:off x="8202168" y="3630168"/>
-            <a:ext cx="1170432" cy="118872"/>
-          </a:xfrm>
-          <a:prstGeom prst="line">
-            <a:avLst/>
-          </a:prstGeom>
-          <a:noFill/>
-          <a:ln w="25400">
-            <a:solidFill>
-              <a:srgbClr val="8ABBD8"/>
-            </a:solidFill>
-            <a:prstDash val="solid"/>
-          </a:ln>
-        </p:spPr>
-      </p:sp>
-      <p:sp>
-        <p:nvSpPr>
-          <p:cNvPr id="19" name="Shape 17"/>
-          <p:cNvSpPr/>
-          <p:nvPr/>
-        </p:nvSpPr>
-        <p:spPr>
-          <a:xfrm>
-            <a:off x="10543032" y="3630168"/>
-            <a:ext cx="-1170432" cy="118872"/>
-          </a:xfrm>
-          <a:prstGeom prst="line">
-            <a:avLst/>
-          </a:prstGeom>
-          <a:noFill/>
-          <a:ln w="25400">
-            <a:solidFill>
-              <a:srgbClr val="8ABBD8"/>
-            </a:solidFill>
-            <a:prstDash val="solid"/>
-          </a:ln>
-        </p:spPr>
-      </p:sp>
-      <p:sp>
-        <p:nvSpPr>
-          <p:cNvPr id="20" name="Text 18"/>
-          <p:cNvSpPr/>
-          <p:nvPr/>
-        </p:nvSpPr>
-        <p:spPr>
-          <a:xfrm>
-            <a:off x="7863840" y="4069080"/>
-            <a:ext cx="3017520" cy="164592"/>
-          </a:xfrm>
-          <a:prstGeom prst="rect">
-            <a:avLst/>
-          </a:prstGeom>
-          <a:noFill/>
-          <a:ln/>
-        </p:spPr>
-        <p:txBody>
-          <a:bodyPr wrap="square" lIns="0" tIns="0" rIns="0" bIns="0" rtlCol="0" anchor="ctr"/>
-          <a:lstStyle/>
-          <a:p>
-            <a:pPr algn="ctr" indent="0" marL="0">
-              <a:buNone/>
-            </a:pPr>
-            <a:r>
-              <a:rPr lang="en-US" sz="900" b="1" dirty="0">
-                <a:solidFill>
-                  <a:srgbClr val="003A63"/>
-                </a:solidFill>
-                <a:latin typeface="Aptos" pitchFamily="34" charset="0"/>
-                <a:ea typeface="Aptos" pitchFamily="34" charset="-122"/>
-                <a:cs typeface="Aptos" pitchFamily="34" charset="-120"/>
-              </a:rPr>
-              <a:t>Decision rights</a:t>
-            </a:r>
-            <a:endParaRPr lang="en-US" sz="900" dirty="0"/>
-          </a:p>
-        </p:txBody>
-      </p:sp>
-      <p:sp>
-        <p:nvSpPr>
-          <p:cNvPr id="21" name="Shape 19"/>
           <p:cNvSpPr/>
           <p:nvPr/>
         </p:nvSpPr>
@@ -4522,7 +4362,7 @@
       </p:sp>
       <p:sp>
         <p:nvSpPr>
-          <p:cNvPr id="22" name="Text 20"/>
+          <p:cNvPr id="17" name="Text 15"/>
           <p:cNvSpPr/>
           <p:nvPr/>
         </p:nvSpPr>
@@ -4561,7 +4401,7 @@
       </p:sp>
       <p:sp>
         <p:nvSpPr>
-          <p:cNvPr id="23" name="Text 21"/>
+          <p:cNvPr id="18" name="Text 16"/>
           <p:cNvSpPr/>
           <p:nvPr/>
         </p:nvSpPr>
@@ -5069,13 +4909,11 @@
             </a:avLst>
           </a:prstGeom>
           <a:solidFill>
-            <a:srgbClr val="FFFFFF">
-              <a:alpha val="88000"/>
-            </a:srgbClr>
+            <a:srgbClr val="FFFFFF"/>
           </a:solidFill>
           <a:ln w="12700">
             <a:solidFill>
-              <a:srgbClr val="D6E8F2"/>
+              <a:srgbClr val="B9D7E6"/>
             </a:solidFill>
             <a:prstDash val="solid"/>
           </a:ln>
@@ -5083,190 +4921,112 @@
       </p:sp>
       <p:sp>
         <p:nvSpPr>
-          <p:cNvPr id="14" name="Shape 12"/>
-          <p:cNvSpPr/>
-          <p:nvPr/>
-        </p:nvSpPr>
-        <p:spPr>
-          <a:xfrm>
-            <a:off x="7891272" y="3108960"/>
-            <a:ext cx="566928" cy="566928"/>
-          </a:xfrm>
-          <a:prstGeom prst="ellipse">
-            <a:avLst/>
-          </a:prstGeom>
-          <a:solidFill>
-            <a:srgbClr val="0068B7"/>
-          </a:solidFill>
-          <a:ln w="12700">
-            <a:solidFill>
-              <a:srgbClr val="0068B7"/>
-            </a:solidFill>
-            <a:prstDash val="solid"/>
-          </a:ln>
-        </p:spPr>
-      </p:sp>
-      <p:sp>
-        <p:nvSpPr>
-          <p:cNvPr id="15" name="Shape 13"/>
-          <p:cNvSpPr/>
-          <p:nvPr/>
-        </p:nvSpPr>
-        <p:spPr>
-          <a:xfrm>
-            <a:off x="10287000" y="3108960"/>
-            <a:ext cx="566928" cy="566928"/>
-          </a:xfrm>
-          <a:prstGeom prst="ellipse">
-            <a:avLst/>
-          </a:prstGeom>
-          <a:solidFill>
-            <a:srgbClr val="2F8A28"/>
-          </a:solidFill>
-          <a:ln w="12700">
-            <a:solidFill>
-              <a:srgbClr val="2F8A28"/>
-            </a:solidFill>
-            <a:prstDash val="solid"/>
-          </a:ln>
-        </p:spPr>
+          <p:cNvPr id="14" name="Text 12"/>
+          <p:cNvSpPr/>
+          <p:nvPr/>
+        </p:nvSpPr>
+        <p:spPr>
+          <a:xfrm>
+            <a:off x="7799832" y="2935224"/>
+            <a:ext cx="3145536" cy="256032"/>
+          </a:xfrm>
+          <a:prstGeom prst="rect">
+            <a:avLst/>
+          </a:prstGeom>
+          <a:noFill/>
+          <a:ln/>
+        </p:spPr>
+        <p:txBody>
+          <a:bodyPr wrap="square" lIns="0" tIns="0" rIns="0" bIns="0" rtlCol="0" anchor="ctr"/>
+          <a:lstStyle/>
+          <a:p>
+            <a:pPr indent="0" marL="0">
+              <a:buNone/>
+            </a:pPr>
+            <a:r>
+              <a:rPr lang="en-US" sz="1300" b="1" dirty="0">
+                <a:solidFill>
+                  <a:srgbClr val="0068B7"/>
+                </a:solidFill>
+                <a:latin typeface="Aptos" pitchFamily="34" charset="0"/>
+                <a:ea typeface="Aptos" pitchFamily="34" charset="-122"/>
+                <a:cs typeface="Aptos" pitchFamily="34" charset="-120"/>
+              </a:rPr>
+              <a:t>Concept checkpoints</a:t>
+            </a:r>
+            <a:endParaRPr lang="en-US" sz="1300" dirty="0"/>
+          </a:p>
+        </p:txBody>
+      </p:sp>
+      <p:sp>
+        <p:nvSpPr>
+          <p:cNvPr id="15" name="Text 13"/>
+          <p:cNvSpPr/>
+          <p:nvPr/>
+        </p:nvSpPr>
+        <p:spPr>
+          <a:xfrm>
+            <a:off x="7818120" y="3300984"/>
+            <a:ext cx="3090672" cy="877824"/>
+          </a:xfrm>
+          <a:prstGeom prst="rect">
+            <a:avLst/>
+          </a:prstGeom>
+          <a:noFill/>
+          <a:ln/>
+        </p:spPr>
+        <p:txBody>
+          <a:bodyPr wrap="square" lIns="254" tIns="254" rIns="254" bIns="254" rtlCol="0" anchor="t">
+            <a:normAutofit/>
+          </a:bodyPr>
+          <a:lstStyle/>
+          <a:p>
+            <a:r>
+              <a:rPr lang="en-US" sz="1380" dirty="0">
+                <a:solidFill>
+                  <a:srgbClr val="17364A"/>
+                </a:solidFill>
+                <a:latin typeface="Aptos" pitchFamily="34" charset="0"/>
+                <a:ea typeface="Aptos" pitchFamily="34" charset="-122"/>
+                <a:cs typeface="Aptos" pitchFamily="34" charset="-120"/>
+              </a:rPr>
+              <a:t>Another failure mode is unclear ownership.</a:t>
+            </a:r>
+            <a:endParaRPr lang="en-US" sz="1380" dirty="0"/>
+          </a:p>
+          <a:p>
+            <a:r>
+              <a:rPr lang="en-US" sz="1380" dirty="0">
+                <a:solidFill>
+                  <a:srgbClr val="17364A"/>
+                </a:solidFill>
+                <a:latin typeface="Aptos" pitchFamily="34" charset="0"/>
+                <a:ea typeface="Aptos" pitchFamily="34" charset="-122"/>
+                <a:cs typeface="Aptos" pitchFamily="34" charset="-120"/>
+              </a:rPr>
+              <a:t>When everyone is responsible in general, no one may be responsible in practice.</a:t>
+            </a:r>
+            <a:endParaRPr lang="en-US" sz="1380" dirty="0"/>
+          </a:p>
+          <a:p>
+            <a:r>
+              <a:rPr lang="en-US" sz="1380" dirty="0">
+                <a:solidFill>
+                  <a:srgbClr val="17364A"/>
+                </a:solidFill>
+                <a:latin typeface="Aptos" pitchFamily="34" charset="0"/>
+                <a:ea typeface="Aptos" pitchFamily="34" charset="-122"/>
+                <a:cs typeface="Aptos" pitchFamily="34" charset="-120"/>
+              </a:rPr>
+              <a:t>A guardrail is to assign an accountability owner and name escalation pathways.</a:t>
+            </a:r>
+            <a:endParaRPr lang="en-US" sz="1380" dirty="0"/>
+          </a:p>
+        </p:txBody>
       </p:sp>
       <p:sp>
         <p:nvSpPr>
           <p:cNvPr id="16" name="Shape 14"/>
-          <p:cNvSpPr/>
-          <p:nvPr/>
-        </p:nvSpPr>
-        <p:spPr>
-          <a:xfrm>
-            <a:off x="9089136" y="3456432"/>
-            <a:ext cx="566928" cy="566928"/>
-          </a:xfrm>
-          <a:prstGeom prst="ellipse">
-            <a:avLst/>
-          </a:prstGeom>
-          <a:solidFill>
-            <a:srgbClr val="6A4CA3"/>
-          </a:solidFill>
-          <a:ln w="12700">
-            <a:solidFill>
-              <a:srgbClr val="6A4CA3"/>
-            </a:solidFill>
-            <a:prstDash val="solid"/>
-          </a:ln>
-        </p:spPr>
-      </p:sp>
-      <p:sp>
-        <p:nvSpPr>
-          <p:cNvPr id="17" name="Shape 15"/>
-          <p:cNvSpPr/>
-          <p:nvPr/>
-        </p:nvSpPr>
-        <p:spPr>
-          <a:xfrm>
-            <a:off x="8385048" y="3419856"/>
-            <a:ext cx="1975104" cy="0"/>
-          </a:xfrm>
-          <a:prstGeom prst="line">
-            <a:avLst/>
-          </a:prstGeom>
-          <a:noFill/>
-          <a:ln w="25400">
-            <a:solidFill>
-              <a:srgbClr val="8ABBD8"/>
-            </a:solidFill>
-            <a:prstDash val="solid"/>
-          </a:ln>
-        </p:spPr>
-      </p:sp>
-      <p:sp>
-        <p:nvSpPr>
-          <p:cNvPr id="18" name="Shape 16"/>
-          <p:cNvSpPr/>
-          <p:nvPr/>
-        </p:nvSpPr>
-        <p:spPr>
-          <a:xfrm>
-            <a:off x="8202168" y="3630168"/>
-            <a:ext cx="1170432" cy="118872"/>
-          </a:xfrm>
-          <a:prstGeom prst="line">
-            <a:avLst/>
-          </a:prstGeom>
-          <a:noFill/>
-          <a:ln w="25400">
-            <a:solidFill>
-              <a:srgbClr val="8ABBD8"/>
-            </a:solidFill>
-            <a:prstDash val="solid"/>
-          </a:ln>
-        </p:spPr>
-      </p:sp>
-      <p:sp>
-        <p:nvSpPr>
-          <p:cNvPr id="19" name="Shape 17"/>
-          <p:cNvSpPr/>
-          <p:nvPr/>
-        </p:nvSpPr>
-        <p:spPr>
-          <a:xfrm>
-            <a:off x="10543032" y="3630168"/>
-            <a:ext cx="-1170432" cy="118872"/>
-          </a:xfrm>
-          <a:prstGeom prst="line">
-            <a:avLst/>
-          </a:prstGeom>
-          <a:noFill/>
-          <a:ln w="25400">
-            <a:solidFill>
-              <a:srgbClr val="8ABBD8"/>
-            </a:solidFill>
-            <a:prstDash val="solid"/>
-          </a:ln>
-        </p:spPr>
-      </p:sp>
-      <p:sp>
-        <p:nvSpPr>
-          <p:cNvPr id="20" name="Text 18"/>
-          <p:cNvSpPr/>
-          <p:nvPr/>
-        </p:nvSpPr>
-        <p:spPr>
-          <a:xfrm>
-            <a:off x="7863840" y="4069080"/>
-            <a:ext cx="3017520" cy="164592"/>
-          </a:xfrm>
-          <a:prstGeom prst="rect">
-            <a:avLst/>
-          </a:prstGeom>
-          <a:noFill/>
-          <a:ln/>
-        </p:spPr>
-        <p:txBody>
-          <a:bodyPr wrap="square" lIns="0" tIns="0" rIns="0" bIns="0" rtlCol="0" anchor="ctr"/>
-          <a:lstStyle/>
-          <a:p>
-            <a:pPr algn="ctr" indent="0" marL="0">
-              <a:buNone/>
-            </a:pPr>
-            <a:r>
-              <a:rPr lang="en-US" sz="900" b="1" dirty="0">
-                <a:solidFill>
-                  <a:srgbClr val="003A63"/>
-                </a:solidFill>
-                <a:latin typeface="Aptos" pitchFamily="34" charset="0"/>
-                <a:ea typeface="Aptos" pitchFamily="34" charset="-122"/>
-                <a:cs typeface="Aptos" pitchFamily="34" charset="-120"/>
-              </a:rPr>
-              <a:t>Decision rights</a:t>
-            </a:r>
-            <a:endParaRPr lang="en-US" sz="900" dirty="0"/>
-          </a:p>
-        </p:txBody>
-      </p:sp>
-      <p:sp>
-        <p:nvSpPr>
-          <p:cNvPr id="21" name="Shape 19"/>
           <p:cNvSpPr/>
           <p:nvPr/>
         </p:nvSpPr>
@@ -5293,7 +5053,7 @@
       </p:sp>
       <p:sp>
         <p:nvSpPr>
-          <p:cNvPr id="22" name="Text 20"/>
+          <p:cNvPr id="17" name="Text 15"/>
           <p:cNvSpPr/>
           <p:nvPr/>
         </p:nvSpPr>
@@ -5332,7 +5092,7 @@
       </p:sp>
       <p:sp>
         <p:nvSpPr>
-          <p:cNvPr id="23" name="Text 21"/>
+          <p:cNvPr id="18" name="Text 16"/>
           <p:cNvSpPr/>
           <p:nvPr/>
         </p:nvSpPr>
@@ -5826,13 +5586,11 @@
             </a:avLst>
           </a:prstGeom>
           <a:solidFill>
-            <a:srgbClr val="FFFFFF">
-              <a:alpha val="88000"/>
-            </a:srgbClr>
+            <a:srgbClr val="FFFFFF"/>
           </a:solidFill>
           <a:ln w="12700">
             <a:solidFill>
-              <a:srgbClr val="D6E8F2"/>
+              <a:srgbClr val="B9D7E6"/>
             </a:solidFill>
             <a:prstDash val="solid"/>
           </a:ln>
@@ -5840,190 +5598,98 @@
       </p:sp>
       <p:sp>
         <p:nvSpPr>
-          <p:cNvPr id="14" name="Shape 12"/>
-          <p:cNvSpPr/>
-          <p:nvPr/>
-        </p:nvSpPr>
-        <p:spPr>
-          <a:xfrm>
-            <a:off x="7891272" y="3108960"/>
-            <a:ext cx="566928" cy="566928"/>
-          </a:xfrm>
-          <a:prstGeom prst="ellipse">
-            <a:avLst/>
-          </a:prstGeom>
-          <a:solidFill>
-            <a:srgbClr val="0068B7"/>
-          </a:solidFill>
-          <a:ln w="12700">
-            <a:solidFill>
-              <a:srgbClr val="0068B7"/>
-            </a:solidFill>
-            <a:prstDash val="solid"/>
-          </a:ln>
-        </p:spPr>
-      </p:sp>
-      <p:sp>
-        <p:nvSpPr>
-          <p:cNvPr id="15" name="Shape 13"/>
-          <p:cNvSpPr/>
-          <p:nvPr/>
-        </p:nvSpPr>
-        <p:spPr>
-          <a:xfrm>
-            <a:off x="10287000" y="3108960"/>
-            <a:ext cx="566928" cy="566928"/>
-          </a:xfrm>
-          <a:prstGeom prst="ellipse">
-            <a:avLst/>
-          </a:prstGeom>
-          <a:solidFill>
-            <a:srgbClr val="2F8A28"/>
-          </a:solidFill>
-          <a:ln w="12700">
-            <a:solidFill>
-              <a:srgbClr val="2F8A28"/>
-            </a:solidFill>
-            <a:prstDash val="solid"/>
-          </a:ln>
-        </p:spPr>
+          <p:cNvPr id="14" name="Text 12"/>
+          <p:cNvSpPr/>
+          <p:nvPr/>
+        </p:nvSpPr>
+        <p:spPr>
+          <a:xfrm>
+            <a:off x="7799832" y="2935224"/>
+            <a:ext cx="3145536" cy="256032"/>
+          </a:xfrm>
+          <a:prstGeom prst="rect">
+            <a:avLst/>
+          </a:prstGeom>
+          <a:noFill/>
+          <a:ln/>
+        </p:spPr>
+        <p:txBody>
+          <a:bodyPr wrap="square" lIns="0" tIns="0" rIns="0" bIns="0" rtlCol="0" anchor="ctr"/>
+          <a:lstStyle/>
+          <a:p>
+            <a:pPr indent="0" marL="0">
+              <a:buNone/>
+            </a:pPr>
+            <a:r>
+              <a:rPr lang="en-US" sz="1300" b="1" dirty="0">
+                <a:solidFill>
+                  <a:srgbClr val="0068B7"/>
+                </a:solidFill>
+                <a:latin typeface="Aptos" pitchFamily="34" charset="0"/>
+                <a:ea typeface="Aptos" pitchFamily="34" charset="-122"/>
+                <a:cs typeface="Aptos" pitchFamily="34" charset="-120"/>
+              </a:rPr>
+              <a:t>Concept checkpoints</a:t>
+            </a:r>
+            <a:endParaRPr lang="en-US" sz="1300" dirty="0"/>
+          </a:p>
+        </p:txBody>
+      </p:sp>
+      <p:sp>
+        <p:nvSpPr>
+          <p:cNvPr id="15" name="Text 13"/>
+          <p:cNvSpPr/>
+          <p:nvPr/>
+        </p:nvSpPr>
+        <p:spPr>
+          <a:xfrm>
+            <a:off x="7818120" y="3300984"/>
+            <a:ext cx="3090672" cy="877824"/>
+          </a:xfrm>
+          <a:prstGeom prst="rect">
+            <a:avLst/>
+          </a:prstGeom>
+          <a:noFill/>
+          <a:ln/>
+        </p:spPr>
+        <p:txBody>
+          <a:bodyPr wrap="square" lIns="254" tIns="254" rIns="254" bIns="254" rtlCol="0" anchor="t">
+            <a:normAutofit/>
+          </a:bodyPr>
+          <a:lstStyle/>
+          <a:p>
+            <a:r>
+              <a:rPr lang="en-US" sz="1380" dirty="0">
+                <a:solidFill>
+                  <a:srgbClr val="17364A"/>
+                </a:solidFill>
+                <a:latin typeface="Aptos" pitchFamily="34" charset="0"/>
+                <a:ea typeface="Aptos" pitchFamily="34" charset="-122"/>
+                <a:cs typeface="Aptos" pitchFamily="34" charset="-120"/>
+              </a:rPr>
+              <a:t>This topic applies across generative AI, predictive analytics, NLP, RAG, automation, and.</a:t>
+            </a:r>
+            <a:endParaRPr lang="en-US" sz="1380" dirty="0"/>
+          </a:p>
+          <a:p>
+            <a:r>
+              <a:rPr lang="en-US" sz="1380" dirty="0">
+                <a:solidFill>
+                  <a:srgbClr val="17364A"/>
+                </a:solidFill>
+                <a:latin typeface="Aptos" pitchFamily="34" charset="0"/>
+                <a:ea typeface="Aptos" pitchFamily="34" charset="-122"/>
+                <a:cs typeface="Aptos" pitchFamily="34" charset="-120"/>
+              </a:rPr>
+              <a:t>The more sensitive the data, the more consequential the output, or the more automated the.</a:t>
+            </a:r>
+            <a:endParaRPr lang="en-US" sz="1380" dirty="0"/>
+          </a:p>
+        </p:txBody>
       </p:sp>
       <p:sp>
         <p:nvSpPr>
           <p:cNvPr id="16" name="Shape 14"/>
-          <p:cNvSpPr/>
-          <p:nvPr/>
-        </p:nvSpPr>
-        <p:spPr>
-          <a:xfrm>
-            <a:off x="9089136" y="3456432"/>
-            <a:ext cx="566928" cy="566928"/>
-          </a:xfrm>
-          <a:prstGeom prst="ellipse">
-            <a:avLst/>
-          </a:prstGeom>
-          <a:solidFill>
-            <a:srgbClr val="6A4CA3"/>
-          </a:solidFill>
-          <a:ln w="12700">
-            <a:solidFill>
-              <a:srgbClr val="6A4CA3"/>
-            </a:solidFill>
-            <a:prstDash val="solid"/>
-          </a:ln>
-        </p:spPr>
-      </p:sp>
-      <p:sp>
-        <p:nvSpPr>
-          <p:cNvPr id="17" name="Shape 15"/>
-          <p:cNvSpPr/>
-          <p:nvPr/>
-        </p:nvSpPr>
-        <p:spPr>
-          <a:xfrm>
-            <a:off x="8385048" y="3419856"/>
-            <a:ext cx="1975104" cy="0"/>
-          </a:xfrm>
-          <a:prstGeom prst="line">
-            <a:avLst/>
-          </a:prstGeom>
-          <a:noFill/>
-          <a:ln w="25400">
-            <a:solidFill>
-              <a:srgbClr val="8ABBD8"/>
-            </a:solidFill>
-            <a:prstDash val="solid"/>
-          </a:ln>
-        </p:spPr>
-      </p:sp>
-      <p:sp>
-        <p:nvSpPr>
-          <p:cNvPr id="18" name="Shape 16"/>
-          <p:cNvSpPr/>
-          <p:nvPr/>
-        </p:nvSpPr>
-        <p:spPr>
-          <a:xfrm>
-            <a:off x="8202168" y="3630168"/>
-            <a:ext cx="1170432" cy="118872"/>
-          </a:xfrm>
-          <a:prstGeom prst="line">
-            <a:avLst/>
-          </a:prstGeom>
-          <a:noFill/>
-          <a:ln w="25400">
-            <a:solidFill>
-              <a:srgbClr val="8ABBD8"/>
-            </a:solidFill>
-            <a:prstDash val="solid"/>
-          </a:ln>
-        </p:spPr>
-      </p:sp>
-      <p:sp>
-        <p:nvSpPr>
-          <p:cNvPr id="19" name="Shape 17"/>
-          <p:cNvSpPr/>
-          <p:nvPr/>
-        </p:nvSpPr>
-        <p:spPr>
-          <a:xfrm>
-            <a:off x="10543032" y="3630168"/>
-            <a:ext cx="-1170432" cy="118872"/>
-          </a:xfrm>
-          <a:prstGeom prst="line">
-            <a:avLst/>
-          </a:prstGeom>
-          <a:noFill/>
-          <a:ln w="25400">
-            <a:solidFill>
-              <a:srgbClr val="8ABBD8"/>
-            </a:solidFill>
-            <a:prstDash val="solid"/>
-          </a:ln>
-        </p:spPr>
-      </p:sp>
-      <p:sp>
-        <p:nvSpPr>
-          <p:cNvPr id="20" name="Text 18"/>
-          <p:cNvSpPr/>
-          <p:nvPr/>
-        </p:nvSpPr>
-        <p:spPr>
-          <a:xfrm>
-            <a:off x="7863840" y="4069080"/>
-            <a:ext cx="3017520" cy="164592"/>
-          </a:xfrm>
-          <a:prstGeom prst="rect">
-            <a:avLst/>
-          </a:prstGeom>
-          <a:noFill/>
-          <a:ln/>
-        </p:spPr>
-        <p:txBody>
-          <a:bodyPr wrap="square" lIns="0" tIns="0" rIns="0" bIns="0" rtlCol="0" anchor="ctr"/>
-          <a:lstStyle/>
-          <a:p>
-            <a:pPr algn="ctr" indent="0" marL="0">
-              <a:buNone/>
-            </a:pPr>
-            <a:r>
-              <a:rPr lang="en-US" sz="900" b="1" dirty="0">
-                <a:solidFill>
-                  <a:srgbClr val="003A63"/>
-                </a:solidFill>
-                <a:latin typeface="Aptos" pitchFamily="34" charset="0"/>
-                <a:ea typeface="Aptos" pitchFamily="34" charset="-122"/>
-                <a:cs typeface="Aptos" pitchFamily="34" charset="-120"/>
-              </a:rPr>
-              <a:t>Decision rights</a:t>
-            </a:r>
-            <a:endParaRPr lang="en-US" sz="900" dirty="0"/>
-          </a:p>
-        </p:txBody>
-      </p:sp>
-      <p:sp>
-        <p:nvSpPr>
-          <p:cNvPr id="21" name="Shape 19"/>
           <p:cNvSpPr/>
           <p:nvPr/>
         </p:nvSpPr>
@@ -6050,7 +5716,7 @@
       </p:sp>
       <p:sp>
         <p:nvSpPr>
-          <p:cNvPr id="22" name="Text 20"/>
+          <p:cNvPr id="17" name="Text 15"/>
           <p:cNvSpPr/>
           <p:nvPr/>
         </p:nvSpPr>
@@ -6089,7 +5755,7 @@
       </p:sp>
       <p:sp>
         <p:nvSpPr>
-          <p:cNvPr id="23" name="Text 21"/>
+          <p:cNvPr id="18" name="Text 16"/>
           <p:cNvSpPr/>
           <p:nvPr/>
         </p:nvSpPr>
@@ -6597,13 +6263,11 @@
             </a:avLst>
           </a:prstGeom>
           <a:solidFill>
-            <a:srgbClr val="FFFFFF">
-              <a:alpha val="88000"/>
-            </a:srgbClr>
+            <a:srgbClr val="FFFFFF"/>
           </a:solidFill>
           <a:ln w="12700">
             <a:solidFill>
-              <a:srgbClr val="D6E8F2"/>
+              <a:srgbClr val="B9D7E6"/>
             </a:solidFill>
             <a:prstDash val="solid"/>
           </a:ln>
@@ -6611,190 +6275,112 @@
       </p:sp>
       <p:sp>
         <p:nvSpPr>
-          <p:cNvPr id="14" name="Shape 12"/>
-          <p:cNvSpPr/>
-          <p:nvPr/>
-        </p:nvSpPr>
-        <p:spPr>
-          <a:xfrm>
-            <a:off x="7891272" y="3108960"/>
-            <a:ext cx="566928" cy="566928"/>
-          </a:xfrm>
-          <a:prstGeom prst="ellipse">
-            <a:avLst/>
-          </a:prstGeom>
-          <a:solidFill>
-            <a:srgbClr val="0068B7"/>
-          </a:solidFill>
-          <a:ln w="12700">
-            <a:solidFill>
-              <a:srgbClr val="0068B7"/>
-            </a:solidFill>
-            <a:prstDash val="solid"/>
-          </a:ln>
-        </p:spPr>
-      </p:sp>
-      <p:sp>
-        <p:nvSpPr>
-          <p:cNvPr id="15" name="Shape 13"/>
-          <p:cNvSpPr/>
-          <p:nvPr/>
-        </p:nvSpPr>
-        <p:spPr>
-          <a:xfrm>
-            <a:off x="10287000" y="3108960"/>
-            <a:ext cx="566928" cy="566928"/>
-          </a:xfrm>
-          <a:prstGeom prst="ellipse">
-            <a:avLst/>
-          </a:prstGeom>
-          <a:solidFill>
-            <a:srgbClr val="2F8A28"/>
-          </a:solidFill>
-          <a:ln w="12700">
-            <a:solidFill>
-              <a:srgbClr val="2F8A28"/>
-            </a:solidFill>
-            <a:prstDash val="solid"/>
-          </a:ln>
-        </p:spPr>
+          <p:cNvPr id="14" name="Text 12"/>
+          <p:cNvSpPr/>
+          <p:nvPr/>
+        </p:nvSpPr>
+        <p:spPr>
+          <a:xfrm>
+            <a:off x="7799832" y="2935224"/>
+            <a:ext cx="3145536" cy="256032"/>
+          </a:xfrm>
+          <a:prstGeom prst="rect">
+            <a:avLst/>
+          </a:prstGeom>
+          <a:noFill/>
+          <a:ln/>
+        </p:spPr>
+        <p:txBody>
+          <a:bodyPr wrap="square" lIns="0" tIns="0" rIns="0" bIns="0" rtlCol="0" anchor="ctr"/>
+          <a:lstStyle/>
+          <a:p>
+            <a:pPr indent="0" marL="0">
+              <a:buNone/>
+            </a:pPr>
+            <a:r>
+              <a:rPr lang="en-US" sz="1300" b="1" dirty="0">
+                <a:solidFill>
+                  <a:srgbClr val="0068B7"/>
+                </a:solidFill>
+                <a:latin typeface="Aptos" pitchFamily="34" charset="0"/>
+                <a:ea typeface="Aptos" pitchFamily="34" charset="-122"/>
+                <a:cs typeface="Aptos" pitchFamily="34" charset="-120"/>
+              </a:rPr>
+              <a:t>Concept checkpoints</a:t>
+            </a:r>
+            <a:endParaRPr lang="en-US" sz="1300" dirty="0"/>
+          </a:p>
+        </p:txBody>
+      </p:sp>
+      <p:sp>
+        <p:nvSpPr>
+          <p:cNvPr id="15" name="Text 13"/>
+          <p:cNvSpPr/>
+          <p:nvPr/>
+        </p:nvSpPr>
+        <p:spPr>
+          <a:xfrm>
+            <a:off x="7818120" y="3300984"/>
+            <a:ext cx="3090672" cy="877824"/>
+          </a:xfrm>
+          <a:prstGeom prst="rect">
+            <a:avLst/>
+          </a:prstGeom>
+          <a:noFill/>
+          <a:ln/>
+        </p:spPr>
+        <p:txBody>
+          <a:bodyPr wrap="square" lIns="254" tIns="254" rIns="254" bIns="254" rtlCol="0" anchor="t">
+            <a:normAutofit/>
+          </a:bodyPr>
+          <a:lstStyle/>
+          <a:p>
+            <a:r>
+              <a:rPr lang="en-US" sz="1380" dirty="0">
+                <a:solidFill>
+                  <a:srgbClr val="17364A"/>
+                </a:solidFill>
+                <a:latin typeface="Aptos" pitchFamily="34" charset="0"/>
+                <a:ea typeface="Aptos" pitchFamily="34" charset="-122"/>
+                <a:cs typeface="Aptos" pitchFamily="34" charset="-120"/>
+              </a:rPr>
+              <a:t>What public health decision or workflow does this topic affect?</a:t>
+            </a:r>
+            <a:endParaRPr lang="en-US" sz="1380" dirty="0"/>
+          </a:p>
+          <a:p>
+            <a:r>
+              <a:rPr lang="en-US" sz="1380" dirty="0">
+                <a:solidFill>
+                  <a:srgbClr val="17364A"/>
+                </a:solidFill>
+                <a:latin typeface="Aptos" pitchFamily="34" charset="0"/>
+                <a:ea typeface="Aptos" pitchFamily="34" charset="-122"/>
+                <a:cs typeface="Aptos" pitchFamily="34" charset="-120"/>
+              </a:rPr>
+              <a:t>Who has authority to approve or pause the work?</a:t>
+            </a:r>
+            <a:endParaRPr lang="en-US" sz="1380" dirty="0"/>
+          </a:p>
+          <a:p>
+            <a:r>
+              <a:rPr lang="en-US" sz="1380" dirty="0">
+                <a:solidFill>
+                  <a:srgbClr val="17364A"/>
+                </a:solidFill>
+                <a:latin typeface="Aptos" pitchFamily="34" charset="0"/>
+                <a:ea typeface="Aptos" pitchFamily="34" charset="-122"/>
+                <a:cs typeface="Aptos" pitchFamily="34" charset="-120"/>
+              </a:rPr>
+              <a:t>What evidence would show that the workflow is responsible and effective?</a:t>
+            </a:r>
+            <a:endParaRPr lang="en-US" sz="1380" dirty="0"/>
+          </a:p>
+        </p:txBody>
       </p:sp>
       <p:sp>
         <p:nvSpPr>
           <p:cNvPr id="16" name="Shape 14"/>
-          <p:cNvSpPr/>
-          <p:nvPr/>
-        </p:nvSpPr>
-        <p:spPr>
-          <a:xfrm>
-            <a:off x="9089136" y="3456432"/>
-            <a:ext cx="566928" cy="566928"/>
-          </a:xfrm>
-          <a:prstGeom prst="ellipse">
-            <a:avLst/>
-          </a:prstGeom>
-          <a:solidFill>
-            <a:srgbClr val="6A4CA3"/>
-          </a:solidFill>
-          <a:ln w="12700">
-            <a:solidFill>
-              <a:srgbClr val="6A4CA3"/>
-            </a:solidFill>
-            <a:prstDash val="solid"/>
-          </a:ln>
-        </p:spPr>
-      </p:sp>
-      <p:sp>
-        <p:nvSpPr>
-          <p:cNvPr id="17" name="Shape 15"/>
-          <p:cNvSpPr/>
-          <p:nvPr/>
-        </p:nvSpPr>
-        <p:spPr>
-          <a:xfrm>
-            <a:off x="8385048" y="3419856"/>
-            <a:ext cx="1975104" cy="0"/>
-          </a:xfrm>
-          <a:prstGeom prst="line">
-            <a:avLst/>
-          </a:prstGeom>
-          <a:noFill/>
-          <a:ln w="25400">
-            <a:solidFill>
-              <a:srgbClr val="8ABBD8"/>
-            </a:solidFill>
-            <a:prstDash val="solid"/>
-          </a:ln>
-        </p:spPr>
-      </p:sp>
-      <p:sp>
-        <p:nvSpPr>
-          <p:cNvPr id="18" name="Shape 16"/>
-          <p:cNvSpPr/>
-          <p:nvPr/>
-        </p:nvSpPr>
-        <p:spPr>
-          <a:xfrm>
-            <a:off x="8202168" y="3630168"/>
-            <a:ext cx="1170432" cy="118872"/>
-          </a:xfrm>
-          <a:prstGeom prst="line">
-            <a:avLst/>
-          </a:prstGeom>
-          <a:noFill/>
-          <a:ln w="25400">
-            <a:solidFill>
-              <a:srgbClr val="8ABBD8"/>
-            </a:solidFill>
-            <a:prstDash val="solid"/>
-          </a:ln>
-        </p:spPr>
-      </p:sp>
-      <p:sp>
-        <p:nvSpPr>
-          <p:cNvPr id="19" name="Shape 17"/>
-          <p:cNvSpPr/>
-          <p:nvPr/>
-        </p:nvSpPr>
-        <p:spPr>
-          <a:xfrm>
-            <a:off x="10543032" y="3630168"/>
-            <a:ext cx="-1170432" cy="118872"/>
-          </a:xfrm>
-          <a:prstGeom prst="line">
-            <a:avLst/>
-          </a:prstGeom>
-          <a:noFill/>
-          <a:ln w="25400">
-            <a:solidFill>
-              <a:srgbClr val="8ABBD8"/>
-            </a:solidFill>
-            <a:prstDash val="solid"/>
-          </a:ln>
-        </p:spPr>
-      </p:sp>
-      <p:sp>
-        <p:nvSpPr>
-          <p:cNvPr id="20" name="Text 18"/>
-          <p:cNvSpPr/>
-          <p:nvPr/>
-        </p:nvSpPr>
-        <p:spPr>
-          <a:xfrm>
-            <a:off x="7863840" y="4069080"/>
-            <a:ext cx="3017520" cy="164592"/>
-          </a:xfrm>
-          <a:prstGeom prst="rect">
-            <a:avLst/>
-          </a:prstGeom>
-          <a:noFill/>
-          <a:ln/>
-        </p:spPr>
-        <p:txBody>
-          <a:bodyPr wrap="square" lIns="0" tIns="0" rIns="0" bIns="0" rtlCol="0" anchor="ctr"/>
-          <a:lstStyle/>
-          <a:p>
-            <a:pPr algn="ctr" indent="0" marL="0">
-              <a:buNone/>
-            </a:pPr>
-            <a:r>
-              <a:rPr lang="en-US" sz="900" b="1" dirty="0">
-                <a:solidFill>
-                  <a:srgbClr val="003A63"/>
-                </a:solidFill>
-                <a:latin typeface="Aptos" pitchFamily="34" charset="0"/>
-                <a:ea typeface="Aptos" pitchFamily="34" charset="-122"/>
-                <a:cs typeface="Aptos" pitchFamily="34" charset="-120"/>
-              </a:rPr>
-              <a:t>Decision rights</a:t>
-            </a:r>
-            <a:endParaRPr lang="en-US" sz="900" dirty="0"/>
-          </a:p>
-        </p:txBody>
-      </p:sp>
-      <p:sp>
-        <p:nvSpPr>
-          <p:cNvPr id="21" name="Shape 19"/>
           <p:cNvSpPr/>
           <p:nvPr/>
         </p:nvSpPr>
@@ -6821,7 +6407,7 @@
       </p:sp>
       <p:sp>
         <p:nvSpPr>
-          <p:cNvPr id="22" name="Text 20"/>
+          <p:cNvPr id="17" name="Text 15"/>
           <p:cNvSpPr/>
           <p:nvPr/>
         </p:nvSpPr>
@@ -6860,7 +6446,7 @@
       </p:sp>
       <p:sp>
         <p:nvSpPr>
-          <p:cNvPr id="23" name="Text 21"/>
+          <p:cNvPr id="18" name="Text 16"/>
           <p:cNvSpPr/>
           <p:nvPr/>
         </p:nvSpPr>
@@ -7354,13 +6940,11 @@
             </a:avLst>
           </a:prstGeom>
           <a:solidFill>
-            <a:srgbClr val="FFFFFF">
-              <a:alpha val="88000"/>
-            </a:srgbClr>
+            <a:srgbClr val="FFFFFF"/>
           </a:solidFill>
           <a:ln w="12700">
             <a:solidFill>
-              <a:srgbClr val="D6E8F2"/>
+              <a:srgbClr val="B9D7E6"/>
             </a:solidFill>
             <a:prstDash val="solid"/>
           </a:ln>
@@ -7368,190 +6952,98 @@
       </p:sp>
       <p:sp>
         <p:nvSpPr>
-          <p:cNvPr id="14" name="Shape 12"/>
-          <p:cNvSpPr/>
-          <p:nvPr/>
-        </p:nvSpPr>
-        <p:spPr>
-          <a:xfrm>
-            <a:off x="7891272" y="3108960"/>
-            <a:ext cx="566928" cy="566928"/>
-          </a:xfrm>
-          <a:prstGeom prst="ellipse">
-            <a:avLst/>
-          </a:prstGeom>
-          <a:solidFill>
-            <a:srgbClr val="0068B7"/>
-          </a:solidFill>
-          <a:ln w="12700">
-            <a:solidFill>
-              <a:srgbClr val="0068B7"/>
-            </a:solidFill>
-            <a:prstDash val="solid"/>
-          </a:ln>
-        </p:spPr>
-      </p:sp>
-      <p:sp>
-        <p:nvSpPr>
-          <p:cNvPr id="15" name="Shape 13"/>
-          <p:cNvSpPr/>
-          <p:nvPr/>
-        </p:nvSpPr>
-        <p:spPr>
-          <a:xfrm>
-            <a:off x="10287000" y="3108960"/>
-            <a:ext cx="566928" cy="566928"/>
-          </a:xfrm>
-          <a:prstGeom prst="ellipse">
-            <a:avLst/>
-          </a:prstGeom>
-          <a:solidFill>
-            <a:srgbClr val="2F8A28"/>
-          </a:solidFill>
-          <a:ln w="12700">
-            <a:solidFill>
-              <a:srgbClr val="2F8A28"/>
-            </a:solidFill>
-            <a:prstDash val="solid"/>
-          </a:ln>
-        </p:spPr>
+          <p:cNvPr id="14" name="Text 12"/>
+          <p:cNvSpPr/>
+          <p:nvPr/>
+        </p:nvSpPr>
+        <p:spPr>
+          <a:xfrm>
+            <a:off x="7799832" y="2935224"/>
+            <a:ext cx="3145536" cy="256032"/>
+          </a:xfrm>
+          <a:prstGeom prst="rect">
+            <a:avLst/>
+          </a:prstGeom>
+          <a:noFill/>
+          <a:ln/>
+        </p:spPr>
+        <p:txBody>
+          <a:bodyPr wrap="square" lIns="0" tIns="0" rIns="0" bIns="0" rtlCol="0" anchor="ctr"/>
+          <a:lstStyle/>
+          <a:p>
+            <a:pPr indent="0" marL="0">
+              <a:buNone/>
+            </a:pPr>
+            <a:r>
+              <a:rPr lang="en-US" sz="1300" b="1" dirty="0">
+                <a:solidFill>
+                  <a:srgbClr val="0068B7"/>
+                </a:solidFill>
+                <a:latin typeface="Aptos" pitchFamily="34" charset="0"/>
+                <a:ea typeface="Aptos" pitchFamily="34" charset="-122"/>
+                <a:cs typeface="Aptos" pitchFamily="34" charset="-120"/>
+              </a:rPr>
+              <a:t>Concept checkpoints</a:t>
+            </a:r>
+            <a:endParaRPr lang="en-US" sz="1300" dirty="0"/>
+          </a:p>
+        </p:txBody>
+      </p:sp>
+      <p:sp>
+        <p:nvSpPr>
+          <p:cNvPr id="15" name="Text 13"/>
+          <p:cNvSpPr/>
+          <p:nvPr/>
+        </p:nvSpPr>
+        <p:spPr>
+          <a:xfrm>
+            <a:off x="7818120" y="3300984"/>
+            <a:ext cx="3090672" cy="877824"/>
+          </a:xfrm>
+          <a:prstGeom prst="rect">
+            <a:avLst/>
+          </a:prstGeom>
+          <a:noFill/>
+          <a:ln/>
+        </p:spPr>
+        <p:txBody>
+          <a:bodyPr wrap="square" lIns="254" tIns="254" rIns="254" bIns="254" rtlCol="0" anchor="t">
+            <a:normAutofit/>
+          </a:bodyPr>
+          <a:lstStyle/>
+          <a:p>
+            <a:r>
+              <a:rPr lang="en-US" sz="1380" dirty="0">
+                <a:solidFill>
+                  <a:srgbClr val="17364A"/>
+                </a:solidFill>
+                <a:latin typeface="Aptos" pitchFamily="34" charset="0"/>
+                <a:ea typeface="Aptos" pitchFamily="34" charset="-122"/>
+                <a:cs typeface="Aptos" pitchFamily="34" charset="-120"/>
+              </a:rPr>
+              <a:t>What equity, privacy, legal, security, or public trust risks require review?</a:t>
+            </a:r>
+            <a:endParaRPr lang="en-US" sz="1380" dirty="0"/>
+          </a:p>
+          <a:p>
+            <a:r>
+              <a:rPr lang="en-US" sz="1380" dirty="0">
+                <a:solidFill>
+                  <a:srgbClr val="17364A"/>
+                </a:solidFill>
+                <a:latin typeface="Aptos" pitchFamily="34" charset="0"/>
+                <a:ea typeface="Aptos" pitchFamily="34" charset="-122"/>
+                <a:cs typeface="Aptos" pitchFamily="34" charset="-120"/>
+              </a:rPr>
+              <a:t>How will the agency know when the workflow needs to be revised?</a:t>
+            </a:r>
+            <a:endParaRPr lang="en-US" sz="1380" dirty="0"/>
+          </a:p>
+        </p:txBody>
       </p:sp>
       <p:sp>
         <p:nvSpPr>
           <p:cNvPr id="16" name="Shape 14"/>
-          <p:cNvSpPr/>
-          <p:nvPr/>
-        </p:nvSpPr>
-        <p:spPr>
-          <a:xfrm>
-            <a:off x="9089136" y="3456432"/>
-            <a:ext cx="566928" cy="566928"/>
-          </a:xfrm>
-          <a:prstGeom prst="ellipse">
-            <a:avLst/>
-          </a:prstGeom>
-          <a:solidFill>
-            <a:srgbClr val="6A4CA3"/>
-          </a:solidFill>
-          <a:ln w="12700">
-            <a:solidFill>
-              <a:srgbClr val="6A4CA3"/>
-            </a:solidFill>
-            <a:prstDash val="solid"/>
-          </a:ln>
-        </p:spPr>
-      </p:sp>
-      <p:sp>
-        <p:nvSpPr>
-          <p:cNvPr id="17" name="Shape 15"/>
-          <p:cNvSpPr/>
-          <p:nvPr/>
-        </p:nvSpPr>
-        <p:spPr>
-          <a:xfrm>
-            <a:off x="8385048" y="3419856"/>
-            <a:ext cx="1975104" cy="0"/>
-          </a:xfrm>
-          <a:prstGeom prst="line">
-            <a:avLst/>
-          </a:prstGeom>
-          <a:noFill/>
-          <a:ln w="25400">
-            <a:solidFill>
-              <a:srgbClr val="8ABBD8"/>
-            </a:solidFill>
-            <a:prstDash val="solid"/>
-          </a:ln>
-        </p:spPr>
-      </p:sp>
-      <p:sp>
-        <p:nvSpPr>
-          <p:cNvPr id="18" name="Shape 16"/>
-          <p:cNvSpPr/>
-          <p:nvPr/>
-        </p:nvSpPr>
-        <p:spPr>
-          <a:xfrm>
-            <a:off x="8202168" y="3630168"/>
-            <a:ext cx="1170432" cy="118872"/>
-          </a:xfrm>
-          <a:prstGeom prst="line">
-            <a:avLst/>
-          </a:prstGeom>
-          <a:noFill/>
-          <a:ln w="25400">
-            <a:solidFill>
-              <a:srgbClr val="8ABBD8"/>
-            </a:solidFill>
-            <a:prstDash val="solid"/>
-          </a:ln>
-        </p:spPr>
-      </p:sp>
-      <p:sp>
-        <p:nvSpPr>
-          <p:cNvPr id="19" name="Shape 17"/>
-          <p:cNvSpPr/>
-          <p:nvPr/>
-        </p:nvSpPr>
-        <p:spPr>
-          <a:xfrm>
-            <a:off x="10543032" y="3630168"/>
-            <a:ext cx="-1170432" cy="118872"/>
-          </a:xfrm>
-          <a:prstGeom prst="line">
-            <a:avLst/>
-          </a:prstGeom>
-          <a:noFill/>
-          <a:ln w="25400">
-            <a:solidFill>
-              <a:srgbClr val="8ABBD8"/>
-            </a:solidFill>
-            <a:prstDash val="solid"/>
-          </a:ln>
-        </p:spPr>
-      </p:sp>
-      <p:sp>
-        <p:nvSpPr>
-          <p:cNvPr id="20" name="Text 18"/>
-          <p:cNvSpPr/>
-          <p:nvPr/>
-        </p:nvSpPr>
-        <p:spPr>
-          <a:xfrm>
-            <a:off x="7863840" y="4069080"/>
-            <a:ext cx="3017520" cy="164592"/>
-          </a:xfrm>
-          <a:prstGeom prst="rect">
-            <a:avLst/>
-          </a:prstGeom>
-          <a:noFill/>
-          <a:ln/>
-        </p:spPr>
-        <p:txBody>
-          <a:bodyPr wrap="square" lIns="0" tIns="0" rIns="0" bIns="0" rtlCol="0" anchor="ctr"/>
-          <a:lstStyle/>
-          <a:p>
-            <a:pPr algn="ctr" indent="0" marL="0">
-              <a:buNone/>
-            </a:pPr>
-            <a:r>
-              <a:rPr lang="en-US" sz="900" b="1" dirty="0">
-                <a:solidFill>
-                  <a:srgbClr val="003A63"/>
-                </a:solidFill>
-                <a:latin typeface="Aptos" pitchFamily="34" charset="0"/>
-                <a:ea typeface="Aptos" pitchFamily="34" charset="-122"/>
-                <a:cs typeface="Aptos" pitchFamily="34" charset="-120"/>
-              </a:rPr>
-              <a:t>Decision rights</a:t>
-            </a:r>
-            <a:endParaRPr lang="en-US" sz="900" dirty="0"/>
-          </a:p>
-        </p:txBody>
-      </p:sp>
-      <p:sp>
-        <p:nvSpPr>
-          <p:cNvPr id="21" name="Shape 19"/>
           <p:cNvSpPr/>
           <p:nvPr/>
         </p:nvSpPr>
@@ -7578,7 +7070,7 @@
       </p:sp>
       <p:sp>
         <p:nvSpPr>
-          <p:cNvPr id="22" name="Text 20"/>
+          <p:cNvPr id="17" name="Text 15"/>
           <p:cNvSpPr/>
           <p:nvPr/>
         </p:nvSpPr>
@@ -7617,7 +7109,7 @@
       </p:sp>
       <p:sp>
         <p:nvSpPr>
-          <p:cNvPr id="23" name="Text 21"/>
+          <p:cNvPr id="18" name="Text 16"/>
           <p:cNvSpPr/>
           <p:nvPr/>
         </p:nvSpPr>
@@ -8111,13 +7603,11 @@
             </a:avLst>
           </a:prstGeom>
           <a:solidFill>
-            <a:srgbClr val="FFFFFF">
-              <a:alpha val="88000"/>
-            </a:srgbClr>
+            <a:srgbClr val="FFFFFF"/>
           </a:solidFill>
           <a:ln w="12700">
             <a:solidFill>
-              <a:srgbClr val="D6E8F2"/>
+              <a:srgbClr val="B9D7E6"/>
             </a:solidFill>
             <a:prstDash val="solid"/>
           </a:ln>
@@ -8125,190 +7615,98 @@
       </p:sp>
       <p:sp>
         <p:nvSpPr>
-          <p:cNvPr id="14" name="Shape 12"/>
-          <p:cNvSpPr/>
-          <p:nvPr/>
-        </p:nvSpPr>
-        <p:spPr>
-          <a:xfrm>
-            <a:off x="7891272" y="3108960"/>
-            <a:ext cx="566928" cy="566928"/>
-          </a:xfrm>
-          <a:prstGeom prst="ellipse">
-            <a:avLst/>
-          </a:prstGeom>
-          <a:solidFill>
-            <a:srgbClr val="0068B7"/>
-          </a:solidFill>
-          <a:ln w="12700">
-            <a:solidFill>
-              <a:srgbClr val="0068B7"/>
-            </a:solidFill>
-            <a:prstDash val="solid"/>
-          </a:ln>
-        </p:spPr>
-      </p:sp>
-      <p:sp>
-        <p:nvSpPr>
-          <p:cNvPr id="15" name="Shape 13"/>
-          <p:cNvSpPr/>
-          <p:nvPr/>
-        </p:nvSpPr>
-        <p:spPr>
-          <a:xfrm>
-            <a:off x="10287000" y="3108960"/>
-            <a:ext cx="566928" cy="566928"/>
-          </a:xfrm>
-          <a:prstGeom prst="ellipse">
-            <a:avLst/>
-          </a:prstGeom>
-          <a:solidFill>
-            <a:srgbClr val="2F8A28"/>
-          </a:solidFill>
-          <a:ln w="12700">
-            <a:solidFill>
-              <a:srgbClr val="2F8A28"/>
-            </a:solidFill>
-            <a:prstDash val="solid"/>
-          </a:ln>
-        </p:spPr>
+          <p:cNvPr id="14" name="Text 12"/>
+          <p:cNvSpPr/>
+          <p:nvPr/>
+        </p:nvSpPr>
+        <p:spPr>
+          <a:xfrm>
+            <a:off x="7799832" y="2935224"/>
+            <a:ext cx="3145536" cy="256032"/>
+          </a:xfrm>
+          <a:prstGeom prst="rect">
+            <a:avLst/>
+          </a:prstGeom>
+          <a:noFill/>
+          <a:ln/>
+        </p:spPr>
+        <p:txBody>
+          <a:bodyPr wrap="square" lIns="0" tIns="0" rIns="0" bIns="0" rtlCol="0" anchor="ctr"/>
+          <a:lstStyle/>
+          <a:p>
+            <a:pPr indent="0" marL="0">
+              <a:buNone/>
+            </a:pPr>
+            <a:r>
+              <a:rPr lang="en-US" sz="1300" b="1" dirty="0">
+                <a:solidFill>
+                  <a:srgbClr val="0068B7"/>
+                </a:solidFill>
+                <a:latin typeface="Aptos" pitchFamily="34" charset="0"/>
+                <a:ea typeface="Aptos" pitchFamily="34" charset="-122"/>
+                <a:cs typeface="Aptos" pitchFamily="34" charset="-120"/>
+              </a:rPr>
+              <a:t>Concept checkpoints</a:t>
+            </a:r>
+            <a:endParaRPr lang="en-US" sz="1300" dirty="0"/>
+          </a:p>
+        </p:txBody>
+      </p:sp>
+      <p:sp>
+        <p:nvSpPr>
+          <p:cNvPr id="15" name="Text 13"/>
+          <p:cNvSpPr/>
+          <p:nvPr/>
+        </p:nvSpPr>
+        <p:spPr>
+          <a:xfrm>
+            <a:off x="7818120" y="3300984"/>
+            <a:ext cx="3090672" cy="877824"/>
+          </a:xfrm>
+          <a:prstGeom prst="rect">
+            <a:avLst/>
+          </a:prstGeom>
+          <a:noFill/>
+          <a:ln/>
+        </p:spPr>
+        <p:txBody>
+          <a:bodyPr wrap="square" lIns="254" tIns="254" rIns="254" bIns="254" rtlCol="0" anchor="t">
+            <a:normAutofit/>
+          </a:bodyPr>
+          <a:lstStyle/>
+          <a:p>
+            <a:r>
+              <a:rPr lang="en-US" sz="1380" dirty="0">
+                <a:solidFill>
+                  <a:srgbClr val="17364A"/>
+                </a:solidFill>
+                <a:latin typeface="Aptos" pitchFamily="34" charset="0"/>
+                <a:ea typeface="Aptos" pitchFamily="34" charset="-122"/>
+                <a:cs typeface="Aptos" pitchFamily="34" charset="-120"/>
+              </a:rPr>
+              <a:t>Create a practical ai policy development and approval workflow artifact for one.</a:t>
+            </a:r>
+            <a:endParaRPr lang="en-US" sz="1380" dirty="0"/>
+          </a:p>
+          <a:p>
+            <a:r>
+              <a:rPr lang="en-US" sz="1380" dirty="0">
+                <a:solidFill>
+                  <a:srgbClr val="17364A"/>
+                </a:solidFill>
+                <a:latin typeface="Aptos" pitchFamily="34" charset="0"/>
+                <a:ea typeface="Aptos" pitchFamily="34" charset="-122"/>
+                <a:cs typeface="Aptos" pitchFamily="34" charset="-120"/>
+              </a:rPr>
+              <a:t>The artifact should define the use case, affected roles, review criteria, safeguards,.</a:t>
+            </a:r>
+            <a:endParaRPr lang="en-US" sz="1380" dirty="0"/>
+          </a:p>
+        </p:txBody>
       </p:sp>
       <p:sp>
         <p:nvSpPr>
           <p:cNvPr id="16" name="Shape 14"/>
-          <p:cNvSpPr/>
-          <p:nvPr/>
-        </p:nvSpPr>
-        <p:spPr>
-          <a:xfrm>
-            <a:off x="9089136" y="3456432"/>
-            <a:ext cx="566928" cy="566928"/>
-          </a:xfrm>
-          <a:prstGeom prst="ellipse">
-            <a:avLst/>
-          </a:prstGeom>
-          <a:solidFill>
-            <a:srgbClr val="6A4CA3"/>
-          </a:solidFill>
-          <a:ln w="12700">
-            <a:solidFill>
-              <a:srgbClr val="6A4CA3"/>
-            </a:solidFill>
-            <a:prstDash val="solid"/>
-          </a:ln>
-        </p:spPr>
-      </p:sp>
-      <p:sp>
-        <p:nvSpPr>
-          <p:cNvPr id="17" name="Shape 15"/>
-          <p:cNvSpPr/>
-          <p:nvPr/>
-        </p:nvSpPr>
-        <p:spPr>
-          <a:xfrm>
-            <a:off x="8385048" y="3419856"/>
-            <a:ext cx="1975104" cy="0"/>
-          </a:xfrm>
-          <a:prstGeom prst="line">
-            <a:avLst/>
-          </a:prstGeom>
-          <a:noFill/>
-          <a:ln w="25400">
-            <a:solidFill>
-              <a:srgbClr val="8ABBD8"/>
-            </a:solidFill>
-            <a:prstDash val="solid"/>
-          </a:ln>
-        </p:spPr>
-      </p:sp>
-      <p:sp>
-        <p:nvSpPr>
-          <p:cNvPr id="18" name="Shape 16"/>
-          <p:cNvSpPr/>
-          <p:nvPr/>
-        </p:nvSpPr>
-        <p:spPr>
-          <a:xfrm>
-            <a:off x="8202168" y="3630168"/>
-            <a:ext cx="1170432" cy="118872"/>
-          </a:xfrm>
-          <a:prstGeom prst="line">
-            <a:avLst/>
-          </a:prstGeom>
-          <a:noFill/>
-          <a:ln w="25400">
-            <a:solidFill>
-              <a:srgbClr val="8ABBD8"/>
-            </a:solidFill>
-            <a:prstDash val="solid"/>
-          </a:ln>
-        </p:spPr>
-      </p:sp>
-      <p:sp>
-        <p:nvSpPr>
-          <p:cNvPr id="19" name="Shape 17"/>
-          <p:cNvSpPr/>
-          <p:nvPr/>
-        </p:nvSpPr>
-        <p:spPr>
-          <a:xfrm>
-            <a:off x="10543032" y="3630168"/>
-            <a:ext cx="-1170432" cy="118872"/>
-          </a:xfrm>
-          <a:prstGeom prst="line">
-            <a:avLst/>
-          </a:prstGeom>
-          <a:noFill/>
-          <a:ln w="25400">
-            <a:solidFill>
-              <a:srgbClr val="8ABBD8"/>
-            </a:solidFill>
-            <a:prstDash val="solid"/>
-          </a:ln>
-        </p:spPr>
-      </p:sp>
-      <p:sp>
-        <p:nvSpPr>
-          <p:cNvPr id="20" name="Text 18"/>
-          <p:cNvSpPr/>
-          <p:nvPr/>
-        </p:nvSpPr>
-        <p:spPr>
-          <a:xfrm>
-            <a:off x="7863840" y="4069080"/>
-            <a:ext cx="3017520" cy="164592"/>
-          </a:xfrm>
-          <a:prstGeom prst="rect">
-            <a:avLst/>
-          </a:prstGeom>
-          <a:noFill/>
-          <a:ln/>
-        </p:spPr>
-        <p:txBody>
-          <a:bodyPr wrap="square" lIns="0" tIns="0" rIns="0" bIns="0" rtlCol="0" anchor="ctr"/>
-          <a:lstStyle/>
-          <a:p>
-            <a:pPr algn="ctr" indent="0" marL="0">
-              <a:buNone/>
-            </a:pPr>
-            <a:r>
-              <a:rPr lang="en-US" sz="900" b="1" dirty="0">
-                <a:solidFill>
-                  <a:srgbClr val="003A63"/>
-                </a:solidFill>
-                <a:latin typeface="Aptos" pitchFamily="34" charset="0"/>
-                <a:ea typeface="Aptos" pitchFamily="34" charset="-122"/>
-                <a:cs typeface="Aptos" pitchFamily="34" charset="-120"/>
-              </a:rPr>
-              <a:t>Decision rights</a:t>
-            </a:r>
-            <a:endParaRPr lang="en-US" sz="900" dirty="0"/>
-          </a:p>
-        </p:txBody>
-      </p:sp>
-      <p:sp>
-        <p:nvSpPr>
-          <p:cNvPr id="21" name="Shape 19"/>
           <p:cNvSpPr/>
           <p:nvPr/>
         </p:nvSpPr>
@@ -8335,7 +7733,7 @@
       </p:sp>
       <p:sp>
         <p:nvSpPr>
-          <p:cNvPr id="22" name="Text 20"/>
+          <p:cNvPr id="17" name="Text 15"/>
           <p:cNvSpPr/>
           <p:nvPr/>
         </p:nvSpPr>
@@ -8374,7 +7772,7 @@
       </p:sp>
       <p:sp>
         <p:nvSpPr>
-          <p:cNvPr id="23" name="Text 21"/>
+          <p:cNvPr id="18" name="Text 16"/>
           <p:cNvSpPr/>
           <p:nvPr/>
         </p:nvSpPr>
@@ -8882,13 +8280,11 @@
             </a:avLst>
           </a:prstGeom>
           <a:solidFill>
-            <a:srgbClr val="FFFFFF">
-              <a:alpha val="88000"/>
-            </a:srgbClr>
+            <a:srgbClr val="FFFFFF"/>
           </a:solidFill>
           <a:ln w="12700">
             <a:solidFill>
-              <a:srgbClr val="D6E8F2"/>
+              <a:srgbClr val="B9D7E6"/>
             </a:solidFill>
             <a:prstDash val="solid"/>
           </a:ln>
@@ -8896,190 +8292,112 @@
       </p:sp>
       <p:sp>
         <p:nvSpPr>
-          <p:cNvPr id="14" name="Shape 12"/>
-          <p:cNvSpPr/>
-          <p:nvPr/>
-        </p:nvSpPr>
-        <p:spPr>
-          <a:xfrm>
-            <a:off x="7891272" y="3108960"/>
-            <a:ext cx="566928" cy="566928"/>
-          </a:xfrm>
-          <a:prstGeom prst="ellipse">
-            <a:avLst/>
-          </a:prstGeom>
-          <a:solidFill>
-            <a:srgbClr val="0068B7"/>
-          </a:solidFill>
-          <a:ln w="12700">
-            <a:solidFill>
-              <a:srgbClr val="0068B7"/>
-            </a:solidFill>
-            <a:prstDash val="solid"/>
-          </a:ln>
-        </p:spPr>
-      </p:sp>
-      <p:sp>
-        <p:nvSpPr>
-          <p:cNvPr id="15" name="Shape 13"/>
-          <p:cNvSpPr/>
-          <p:nvPr/>
-        </p:nvSpPr>
-        <p:spPr>
-          <a:xfrm>
-            <a:off x="10287000" y="3108960"/>
-            <a:ext cx="566928" cy="566928"/>
-          </a:xfrm>
-          <a:prstGeom prst="ellipse">
-            <a:avLst/>
-          </a:prstGeom>
-          <a:solidFill>
-            <a:srgbClr val="2F8A28"/>
-          </a:solidFill>
-          <a:ln w="12700">
-            <a:solidFill>
-              <a:srgbClr val="2F8A28"/>
-            </a:solidFill>
-            <a:prstDash val="solid"/>
-          </a:ln>
-        </p:spPr>
+          <p:cNvPr id="14" name="Text 12"/>
+          <p:cNvSpPr/>
+          <p:nvPr/>
+        </p:nvSpPr>
+        <p:spPr>
+          <a:xfrm>
+            <a:off x="7799832" y="2935224"/>
+            <a:ext cx="3145536" cy="256032"/>
+          </a:xfrm>
+          <a:prstGeom prst="rect">
+            <a:avLst/>
+          </a:prstGeom>
+          <a:noFill/>
+          <a:ln/>
+        </p:spPr>
+        <p:txBody>
+          <a:bodyPr wrap="square" lIns="0" tIns="0" rIns="0" bIns="0" rtlCol="0" anchor="ctr"/>
+          <a:lstStyle/>
+          <a:p>
+            <a:pPr indent="0" marL="0">
+              <a:buNone/>
+            </a:pPr>
+            <a:r>
+              <a:rPr lang="en-US" sz="1300" b="1" dirty="0">
+                <a:solidFill>
+                  <a:srgbClr val="0068B7"/>
+                </a:solidFill>
+                <a:latin typeface="Aptos" pitchFamily="34" charset="0"/>
+                <a:ea typeface="Aptos" pitchFamily="34" charset="-122"/>
+                <a:cs typeface="Aptos" pitchFamily="34" charset="-120"/>
+              </a:rPr>
+              <a:t>Concept checkpoints</a:t>
+            </a:r>
+            <a:endParaRPr lang="en-US" sz="1300" dirty="0"/>
+          </a:p>
+        </p:txBody>
+      </p:sp>
+      <p:sp>
+        <p:nvSpPr>
+          <p:cNvPr id="15" name="Text 13"/>
+          <p:cNvSpPr/>
+          <p:nvPr/>
+        </p:nvSpPr>
+        <p:spPr>
+          <a:xfrm>
+            <a:off x="7818120" y="3300984"/>
+            <a:ext cx="3090672" cy="877824"/>
+          </a:xfrm>
+          <a:prstGeom prst="rect">
+            <a:avLst/>
+          </a:prstGeom>
+          <a:noFill/>
+          <a:ln/>
+        </p:spPr>
+        <p:txBody>
+          <a:bodyPr wrap="square" lIns="254" tIns="254" rIns="254" bIns="254" rtlCol="0" anchor="t">
+            <a:normAutofit/>
+          </a:bodyPr>
+          <a:lstStyle/>
+          <a:p>
+            <a:r>
+              <a:rPr lang="en-US" sz="1380" dirty="0">
+                <a:solidFill>
+                  <a:srgbClr val="17364A"/>
+                </a:solidFill>
+                <a:latin typeface="Aptos" pitchFamily="34" charset="0"/>
+                <a:ea typeface="Aptos" pitchFamily="34" charset="-122"/>
+                <a:cs typeface="Aptos" pitchFamily="34" charset="-120"/>
+              </a:rPr>
+              <a:t>AI Policy Development and Approval Workflow artifact</a:t>
+            </a:r>
+            <a:endParaRPr lang="en-US" sz="1380" dirty="0"/>
+          </a:p>
+          <a:p>
+            <a:r>
+              <a:rPr lang="en-US" sz="1380" dirty="0">
+                <a:solidFill>
+                  <a:srgbClr val="17364A"/>
+                </a:solidFill>
+                <a:latin typeface="Aptos" pitchFamily="34" charset="0"/>
+                <a:ea typeface="Aptos" pitchFamily="34" charset="-122"/>
+                <a:cs typeface="Aptos" pitchFamily="34" charset="-120"/>
+              </a:rPr>
+              <a:t>Role and responsibility table</a:t>
+            </a:r>
+            <a:endParaRPr lang="en-US" sz="1380" dirty="0"/>
+          </a:p>
+          <a:p>
+            <a:r>
+              <a:rPr lang="en-US" sz="1380" dirty="0">
+                <a:solidFill>
+                  <a:srgbClr val="17364A"/>
+                </a:solidFill>
+                <a:latin typeface="Aptos" pitchFamily="34" charset="0"/>
+                <a:ea typeface="Aptos" pitchFamily="34" charset="-122"/>
+                <a:cs typeface="Aptos" pitchFamily="34" charset="-120"/>
+              </a:rPr>
+              <a:t>Risk and safeguard summary</a:t>
+            </a:r>
+            <a:endParaRPr lang="en-US" sz="1380" dirty="0"/>
+          </a:p>
+        </p:txBody>
       </p:sp>
       <p:sp>
         <p:nvSpPr>
           <p:cNvPr id="16" name="Shape 14"/>
-          <p:cNvSpPr/>
-          <p:nvPr/>
-        </p:nvSpPr>
-        <p:spPr>
-          <a:xfrm>
-            <a:off x="9089136" y="3456432"/>
-            <a:ext cx="566928" cy="566928"/>
-          </a:xfrm>
-          <a:prstGeom prst="ellipse">
-            <a:avLst/>
-          </a:prstGeom>
-          <a:solidFill>
-            <a:srgbClr val="6A4CA3"/>
-          </a:solidFill>
-          <a:ln w="12700">
-            <a:solidFill>
-              <a:srgbClr val="6A4CA3"/>
-            </a:solidFill>
-            <a:prstDash val="solid"/>
-          </a:ln>
-        </p:spPr>
-      </p:sp>
-      <p:sp>
-        <p:nvSpPr>
-          <p:cNvPr id="17" name="Shape 15"/>
-          <p:cNvSpPr/>
-          <p:nvPr/>
-        </p:nvSpPr>
-        <p:spPr>
-          <a:xfrm>
-            <a:off x="8385048" y="3419856"/>
-            <a:ext cx="1975104" cy="0"/>
-          </a:xfrm>
-          <a:prstGeom prst="line">
-            <a:avLst/>
-          </a:prstGeom>
-          <a:noFill/>
-          <a:ln w="25400">
-            <a:solidFill>
-              <a:srgbClr val="8ABBD8"/>
-            </a:solidFill>
-            <a:prstDash val="solid"/>
-          </a:ln>
-        </p:spPr>
-      </p:sp>
-      <p:sp>
-        <p:nvSpPr>
-          <p:cNvPr id="18" name="Shape 16"/>
-          <p:cNvSpPr/>
-          <p:nvPr/>
-        </p:nvSpPr>
-        <p:spPr>
-          <a:xfrm>
-            <a:off x="8202168" y="3630168"/>
-            <a:ext cx="1170432" cy="118872"/>
-          </a:xfrm>
-          <a:prstGeom prst="line">
-            <a:avLst/>
-          </a:prstGeom>
-          <a:noFill/>
-          <a:ln w="25400">
-            <a:solidFill>
-              <a:srgbClr val="8ABBD8"/>
-            </a:solidFill>
-            <a:prstDash val="solid"/>
-          </a:ln>
-        </p:spPr>
-      </p:sp>
-      <p:sp>
-        <p:nvSpPr>
-          <p:cNvPr id="19" name="Shape 17"/>
-          <p:cNvSpPr/>
-          <p:nvPr/>
-        </p:nvSpPr>
-        <p:spPr>
-          <a:xfrm>
-            <a:off x="10543032" y="3630168"/>
-            <a:ext cx="-1170432" cy="118872"/>
-          </a:xfrm>
-          <a:prstGeom prst="line">
-            <a:avLst/>
-          </a:prstGeom>
-          <a:noFill/>
-          <a:ln w="25400">
-            <a:solidFill>
-              <a:srgbClr val="8ABBD8"/>
-            </a:solidFill>
-            <a:prstDash val="solid"/>
-          </a:ln>
-        </p:spPr>
-      </p:sp>
-      <p:sp>
-        <p:nvSpPr>
-          <p:cNvPr id="20" name="Text 18"/>
-          <p:cNvSpPr/>
-          <p:nvPr/>
-        </p:nvSpPr>
-        <p:spPr>
-          <a:xfrm>
-            <a:off x="7863840" y="4069080"/>
-            <a:ext cx="3017520" cy="164592"/>
-          </a:xfrm>
-          <a:prstGeom prst="rect">
-            <a:avLst/>
-          </a:prstGeom>
-          <a:noFill/>
-          <a:ln/>
-        </p:spPr>
-        <p:txBody>
-          <a:bodyPr wrap="square" lIns="0" tIns="0" rIns="0" bIns="0" rtlCol="0" anchor="ctr"/>
-          <a:lstStyle/>
-          <a:p>
-            <a:pPr algn="ctr" indent="0" marL="0">
-              <a:buNone/>
-            </a:pPr>
-            <a:r>
-              <a:rPr lang="en-US" sz="900" b="1" dirty="0">
-                <a:solidFill>
-                  <a:srgbClr val="003A63"/>
-                </a:solidFill>
-                <a:latin typeface="Aptos" pitchFamily="34" charset="0"/>
-                <a:ea typeface="Aptos" pitchFamily="34" charset="-122"/>
-                <a:cs typeface="Aptos" pitchFamily="34" charset="-120"/>
-              </a:rPr>
-              <a:t>Decision rights</a:t>
-            </a:r>
-            <a:endParaRPr lang="en-US" sz="900" dirty="0"/>
-          </a:p>
-        </p:txBody>
-      </p:sp>
-      <p:sp>
-        <p:nvSpPr>
-          <p:cNvPr id="21" name="Shape 19"/>
           <p:cNvSpPr/>
           <p:nvPr/>
         </p:nvSpPr>
@@ -9106,7 +8424,7 @@
       </p:sp>
       <p:sp>
         <p:nvSpPr>
-          <p:cNvPr id="22" name="Text 20"/>
+          <p:cNvPr id="17" name="Text 15"/>
           <p:cNvSpPr/>
           <p:nvPr/>
         </p:nvSpPr>
@@ -9145,7 +8463,7 @@
       </p:sp>
       <p:sp>
         <p:nvSpPr>
-          <p:cNvPr id="23" name="Text 21"/>
+          <p:cNvPr id="18" name="Text 16"/>
           <p:cNvSpPr/>
           <p:nvPr/>
         </p:nvSpPr>
@@ -9639,13 +8957,11 @@
             </a:avLst>
           </a:prstGeom>
           <a:solidFill>
-            <a:srgbClr val="FFFFFF">
-              <a:alpha val="88000"/>
-            </a:srgbClr>
+            <a:srgbClr val="FFFFFF"/>
           </a:solidFill>
           <a:ln w="12700">
             <a:solidFill>
-              <a:srgbClr val="D6E8F2"/>
+              <a:srgbClr val="B9D7E6"/>
             </a:solidFill>
             <a:prstDash val="solid"/>
           </a:ln>
@@ -9653,190 +8969,98 @@
       </p:sp>
       <p:sp>
         <p:nvSpPr>
-          <p:cNvPr id="14" name="Shape 12"/>
-          <p:cNvSpPr/>
-          <p:nvPr/>
-        </p:nvSpPr>
-        <p:spPr>
-          <a:xfrm>
-            <a:off x="7891272" y="3108960"/>
-            <a:ext cx="566928" cy="566928"/>
-          </a:xfrm>
-          <a:prstGeom prst="ellipse">
-            <a:avLst/>
-          </a:prstGeom>
-          <a:solidFill>
-            <a:srgbClr val="0068B7"/>
-          </a:solidFill>
-          <a:ln w="12700">
-            <a:solidFill>
-              <a:srgbClr val="0068B7"/>
-            </a:solidFill>
-            <a:prstDash val="solid"/>
-          </a:ln>
-        </p:spPr>
-      </p:sp>
-      <p:sp>
-        <p:nvSpPr>
-          <p:cNvPr id="15" name="Shape 13"/>
-          <p:cNvSpPr/>
-          <p:nvPr/>
-        </p:nvSpPr>
-        <p:spPr>
-          <a:xfrm>
-            <a:off x="10287000" y="3108960"/>
-            <a:ext cx="566928" cy="566928"/>
-          </a:xfrm>
-          <a:prstGeom prst="ellipse">
-            <a:avLst/>
-          </a:prstGeom>
-          <a:solidFill>
-            <a:srgbClr val="2F8A28"/>
-          </a:solidFill>
-          <a:ln w="12700">
-            <a:solidFill>
-              <a:srgbClr val="2F8A28"/>
-            </a:solidFill>
-            <a:prstDash val="solid"/>
-          </a:ln>
-        </p:spPr>
+          <p:cNvPr id="14" name="Text 12"/>
+          <p:cNvSpPr/>
+          <p:nvPr/>
+        </p:nvSpPr>
+        <p:spPr>
+          <a:xfrm>
+            <a:off x="7799832" y="2935224"/>
+            <a:ext cx="3145536" cy="256032"/>
+          </a:xfrm>
+          <a:prstGeom prst="rect">
+            <a:avLst/>
+          </a:prstGeom>
+          <a:noFill/>
+          <a:ln/>
+        </p:spPr>
+        <p:txBody>
+          <a:bodyPr wrap="square" lIns="0" tIns="0" rIns="0" bIns="0" rtlCol="0" anchor="ctr"/>
+          <a:lstStyle/>
+          <a:p>
+            <a:pPr indent="0" marL="0">
+              <a:buNone/>
+            </a:pPr>
+            <a:r>
+              <a:rPr lang="en-US" sz="1300" b="1" dirty="0">
+                <a:solidFill>
+                  <a:srgbClr val="0068B7"/>
+                </a:solidFill>
+                <a:latin typeface="Aptos" pitchFamily="34" charset="0"/>
+                <a:ea typeface="Aptos" pitchFamily="34" charset="-122"/>
+                <a:cs typeface="Aptos" pitchFamily="34" charset="-120"/>
+              </a:rPr>
+              <a:t>Concept checkpoints</a:t>
+            </a:r>
+            <a:endParaRPr lang="en-US" sz="1300" dirty="0"/>
+          </a:p>
+        </p:txBody>
+      </p:sp>
+      <p:sp>
+        <p:nvSpPr>
+          <p:cNvPr id="15" name="Text 13"/>
+          <p:cNvSpPr/>
+          <p:nvPr/>
+        </p:nvSpPr>
+        <p:spPr>
+          <a:xfrm>
+            <a:off x="7818120" y="3300984"/>
+            <a:ext cx="3090672" cy="877824"/>
+          </a:xfrm>
+          <a:prstGeom prst="rect">
+            <a:avLst/>
+          </a:prstGeom>
+          <a:noFill/>
+          <a:ln/>
+        </p:spPr>
+        <p:txBody>
+          <a:bodyPr wrap="square" lIns="254" tIns="254" rIns="254" bIns="254" rtlCol="0" anchor="t">
+            <a:normAutofit/>
+          </a:bodyPr>
+          <a:lstStyle/>
+          <a:p>
+            <a:r>
+              <a:rPr lang="en-US" sz="1380" dirty="0">
+                <a:solidFill>
+                  <a:srgbClr val="17364A"/>
+                </a:solidFill>
+                <a:latin typeface="Aptos" pitchFamily="34" charset="0"/>
+                <a:ea typeface="Aptos" pitchFamily="34" charset="-122"/>
+                <a:cs typeface="Aptos" pitchFamily="34" charset="-120"/>
+              </a:rPr>
+              <a:t>Escalation and monitoring plan</a:t>
+            </a:r>
+            <a:endParaRPr lang="en-US" sz="1380" dirty="0"/>
+          </a:p>
+          <a:p>
+            <a:r>
+              <a:rPr lang="en-US" sz="1380" dirty="0">
+                <a:solidFill>
+                  <a:srgbClr val="17364A"/>
+                </a:solidFill>
+                <a:latin typeface="Aptos" pitchFamily="34" charset="0"/>
+                <a:ea typeface="Aptos" pitchFamily="34" charset="-122"/>
+                <a:cs typeface="Aptos" pitchFamily="34" charset="-120"/>
+              </a:rPr>
+              <a:t>Approval or review note</a:t>
+            </a:r>
+            <a:endParaRPr lang="en-US" sz="1380" dirty="0"/>
+          </a:p>
+        </p:txBody>
       </p:sp>
       <p:sp>
         <p:nvSpPr>
           <p:cNvPr id="16" name="Shape 14"/>
-          <p:cNvSpPr/>
-          <p:nvPr/>
-        </p:nvSpPr>
-        <p:spPr>
-          <a:xfrm>
-            <a:off x="9089136" y="3456432"/>
-            <a:ext cx="566928" cy="566928"/>
-          </a:xfrm>
-          <a:prstGeom prst="ellipse">
-            <a:avLst/>
-          </a:prstGeom>
-          <a:solidFill>
-            <a:srgbClr val="6A4CA3"/>
-          </a:solidFill>
-          <a:ln w="12700">
-            <a:solidFill>
-              <a:srgbClr val="6A4CA3"/>
-            </a:solidFill>
-            <a:prstDash val="solid"/>
-          </a:ln>
-        </p:spPr>
-      </p:sp>
-      <p:sp>
-        <p:nvSpPr>
-          <p:cNvPr id="17" name="Shape 15"/>
-          <p:cNvSpPr/>
-          <p:nvPr/>
-        </p:nvSpPr>
-        <p:spPr>
-          <a:xfrm>
-            <a:off x="8385048" y="3419856"/>
-            <a:ext cx="1975104" cy="0"/>
-          </a:xfrm>
-          <a:prstGeom prst="line">
-            <a:avLst/>
-          </a:prstGeom>
-          <a:noFill/>
-          <a:ln w="25400">
-            <a:solidFill>
-              <a:srgbClr val="8ABBD8"/>
-            </a:solidFill>
-            <a:prstDash val="solid"/>
-          </a:ln>
-        </p:spPr>
-      </p:sp>
-      <p:sp>
-        <p:nvSpPr>
-          <p:cNvPr id="18" name="Shape 16"/>
-          <p:cNvSpPr/>
-          <p:nvPr/>
-        </p:nvSpPr>
-        <p:spPr>
-          <a:xfrm>
-            <a:off x="8202168" y="3630168"/>
-            <a:ext cx="1170432" cy="118872"/>
-          </a:xfrm>
-          <a:prstGeom prst="line">
-            <a:avLst/>
-          </a:prstGeom>
-          <a:noFill/>
-          <a:ln w="25400">
-            <a:solidFill>
-              <a:srgbClr val="8ABBD8"/>
-            </a:solidFill>
-            <a:prstDash val="solid"/>
-          </a:ln>
-        </p:spPr>
-      </p:sp>
-      <p:sp>
-        <p:nvSpPr>
-          <p:cNvPr id="19" name="Shape 17"/>
-          <p:cNvSpPr/>
-          <p:nvPr/>
-        </p:nvSpPr>
-        <p:spPr>
-          <a:xfrm>
-            <a:off x="10543032" y="3630168"/>
-            <a:ext cx="-1170432" cy="118872"/>
-          </a:xfrm>
-          <a:prstGeom prst="line">
-            <a:avLst/>
-          </a:prstGeom>
-          <a:noFill/>
-          <a:ln w="25400">
-            <a:solidFill>
-              <a:srgbClr val="8ABBD8"/>
-            </a:solidFill>
-            <a:prstDash val="solid"/>
-          </a:ln>
-        </p:spPr>
-      </p:sp>
-      <p:sp>
-        <p:nvSpPr>
-          <p:cNvPr id="20" name="Text 18"/>
-          <p:cNvSpPr/>
-          <p:nvPr/>
-        </p:nvSpPr>
-        <p:spPr>
-          <a:xfrm>
-            <a:off x="7863840" y="4069080"/>
-            <a:ext cx="3017520" cy="164592"/>
-          </a:xfrm>
-          <a:prstGeom prst="rect">
-            <a:avLst/>
-          </a:prstGeom>
-          <a:noFill/>
-          <a:ln/>
-        </p:spPr>
-        <p:txBody>
-          <a:bodyPr wrap="square" lIns="0" tIns="0" rIns="0" bIns="0" rtlCol="0" anchor="ctr"/>
-          <a:lstStyle/>
-          <a:p>
-            <a:pPr algn="ctr" indent="0" marL="0">
-              <a:buNone/>
-            </a:pPr>
-            <a:r>
-              <a:rPr lang="en-US" sz="900" b="1" dirty="0">
-                <a:solidFill>
-                  <a:srgbClr val="003A63"/>
-                </a:solidFill>
-                <a:latin typeface="Aptos" pitchFamily="34" charset="0"/>
-                <a:ea typeface="Aptos" pitchFamily="34" charset="-122"/>
-                <a:cs typeface="Aptos" pitchFamily="34" charset="-120"/>
-              </a:rPr>
-              <a:t>Decision rights</a:t>
-            </a:r>
-            <a:endParaRPr lang="en-US" sz="900" dirty="0"/>
-          </a:p>
-        </p:txBody>
-      </p:sp>
-      <p:sp>
-        <p:nvSpPr>
-          <p:cNvPr id="21" name="Shape 19"/>
           <p:cNvSpPr/>
           <p:nvPr/>
         </p:nvSpPr>
@@ -9863,7 +9087,7 @@
       </p:sp>
       <p:sp>
         <p:nvSpPr>
-          <p:cNvPr id="22" name="Text 20"/>
+          <p:cNvPr id="17" name="Text 15"/>
           <p:cNvSpPr/>
           <p:nvPr/>
         </p:nvSpPr>
@@ -9902,7 +9126,7 @@
       </p:sp>
       <p:sp>
         <p:nvSpPr>
-          <p:cNvPr id="23" name="Text 21"/>
+          <p:cNvPr id="18" name="Text 16"/>
           <p:cNvSpPr/>
           <p:nvPr/>
         </p:nvSpPr>
@@ -10410,13 +9634,11 @@
             </a:avLst>
           </a:prstGeom>
           <a:solidFill>
-            <a:srgbClr val="FFFFFF">
-              <a:alpha val="88000"/>
-            </a:srgbClr>
+            <a:srgbClr val="FFFFFF"/>
           </a:solidFill>
           <a:ln w="12700">
             <a:solidFill>
-              <a:srgbClr val="D6E8F2"/>
+              <a:srgbClr val="B9D7E6"/>
             </a:solidFill>
             <a:prstDash val="solid"/>
           </a:ln>
@@ -10424,190 +9646,98 @@
       </p:sp>
       <p:sp>
         <p:nvSpPr>
-          <p:cNvPr id="14" name="Shape 12"/>
-          <p:cNvSpPr/>
-          <p:nvPr/>
-        </p:nvSpPr>
-        <p:spPr>
-          <a:xfrm>
-            <a:off x="7891272" y="3108960"/>
-            <a:ext cx="566928" cy="566928"/>
-          </a:xfrm>
-          <a:prstGeom prst="ellipse">
-            <a:avLst/>
-          </a:prstGeom>
-          <a:solidFill>
-            <a:srgbClr val="0068B7"/>
-          </a:solidFill>
-          <a:ln w="12700">
-            <a:solidFill>
-              <a:srgbClr val="0068B7"/>
-            </a:solidFill>
-            <a:prstDash val="solid"/>
-          </a:ln>
-        </p:spPr>
-      </p:sp>
-      <p:sp>
-        <p:nvSpPr>
-          <p:cNvPr id="15" name="Shape 13"/>
-          <p:cNvSpPr/>
-          <p:nvPr/>
-        </p:nvSpPr>
-        <p:spPr>
-          <a:xfrm>
-            <a:off x="10287000" y="3108960"/>
-            <a:ext cx="566928" cy="566928"/>
-          </a:xfrm>
-          <a:prstGeom prst="ellipse">
-            <a:avLst/>
-          </a:prstGeom>
-          <a:solidFill>
-            <a:srgbClr val="2F8A28"/>
-          </a:solidFill>
-          <a:ln w="12700">
-            <a:solidFill>
-              <a:srgbClr val="2F8A28"/>
-            </a:solidFill>
-            <a:prstDash val="solid"/>
-          </a:ln>
-        </p:spPr>
+          <p:cNvPr id="14" name="Text 12"/>
+          <p:cNvSpPr/>
+          <p:nvPr/>
+        </p:nvSpPr>
+        <p:spPr>
+          <a:xfrm>
+            <a:off x="7799832" y="2935224"/>
+            <a:ext cx="3145536" cy="256032"/>
+          </a:xfrm>
+          <a:prstGeom prst="rect">
+            <a:avLst/>
+          </a:prstGeom>
+          <a:noFill/>
+          <a:ln/>
+        </p:spPr>
+        <p:txBody>
+          <a:bodyPr wrap="square" lIns="0" tIns="0" rIns="0" bIns="0" rtlCol="0" anchor="ctr"/>
+          <a:lstStyle/>
+          <a:p>
+            <a:pPr indent="0" marL="0">
+              <a:buNone/>
+            </a:pPr>
+            <a:r>
+              <a:rPr lang="en-US" sz="1300" b="1" dirty="0">
+                <a:solidFill>
+                  <a:srgbClr val="0068B7"/>
+                </a:solidFill>
+                <a:latin typeface="Aptos" pitchFamily="34" charset="0"/>
+                <a:ea typeface="Aptos" pitchFamily="34" charset="-122"/>
+                <a:cs typeface="Aptos" pitchFamily="34" charset="-120"/>
+              </a:rPr>
+              <a:t>Concept checkpoints</a:t>
+            </a:r>
+            <a:endParaRPr lang="en-US" sz="1300" dirty="0"/>
+          </a:p>
+        </p:txBody>
+      </p:sp>
+      <p:sp>
+        <p:nvSpPr>
+          <p:cNvPr id="15" name="Text 13"/>
+          <p:cNvSpPr/>
+          <p:nvPr/>
+        </p:nvSpPr>
+        <p:spPr>
+          <a:xfrm>
+            <a:off x="7818120" y="3300984"/>
+            <a:ext cx="3090672" cy="877824"/>
+          </a:xfrm>
+          <a:prstGeom prst="rect">
+            <a:avLst/>
+          </a:prstGeom>
+          <a:noFill/>
+          <a:ln/>
+        </p:spPr>
+        <p:txBody>
+          <a:bodyPr wrap="square" lIns="254" tIns="254" rIns="254" bIns="254" rtlCol="0" anchor="t">
+            <a:normAutofit/>
+          </a:bodyPr>
+          <a:lstStyle/>
+          <a:p>
+            <a:r>
+              <a:rPr lang="en-US" sz="1380" dirty="0">
+                <a:solidFill>
+                  <a:srgbClr val="17364A"/>
+                </a:solidFill>
+                <a:latin typeface="Aptos" pitchFamily="34" charset="0"/>
+                <a:ea typeface="Aptos" pitchFamily="34" charset="-122"/>
+                <a:cs typeface="Aptos" pitchFamily="34" charset="-120"/>
+              </a:rPr>
+              <a:t>Escalation and monitoring plan</a:t>
+            </a:r>
+            <a:endParaRPr lang="en-US" sz="1380" dirty="0"/>
+          </a:p>
+          <a:p>
+            <a:r>
+              <a:rPr lang="en-US" sz="1380" dirty="0">
+                <a:solidFill>
+                  <a:srgbClr val="17364A"/>
+                </a:solidFill>
+                <a:latin typeface="Aptos" pitchFamily="34" charset="0"/>
+                <a:ea typeface="Aptos" pitchFamily="34" charset="-122"/>
+                <a:cs typeface="Aptos" pitchFamily="34" charset="-120"/>
+              </a:rPr>
+              <a:t>Approval or review note</a:t>
+            </a:r>
+            <a:endParaRPr lang="en-US" sz="1380" dirty="0"/>
+          </a:p>
+        </p:txBody>
       </p:sp>
       <p:sp>
         <p:nvSpPr>
           <p:cNvPr id="16" name="Shape 14"/>
-          <p:cNvSpPr/>
-          <p:nvPr/>
-        </p:nvSpPr>
-        <p:spPr>
-          <a:xfrm>
-            <a:off x="9089136" y="3456432"/>
-            <a:ext cx="566928" cy="566928"/>
-          </a:xfrm>
-          <a:prstGeom prst="ellipse">
-            <a:avLst/>
-          </a:prstGeom>
-          <a:solidFill>
-            <a:srgbClr val="6A4CA3"/>
-          </a:solidFill>
-          <a:ln w="12700">
-            <a:solidFill>
-              <a:srgbClr val="6A4CA3"/>
-            </a:solidFill>
-            <a:prstDash val="solid"/>
-          </a:ln>
-        </p:spPr>
-      </p:sp>
-      <p:sp>
-        <p:nvSpPr>
-          <p:cNvPr id="17" name="Shape 15"/>
-          <p:cNvSpPr/>
-          <p:nvPr/>
-        </p:nvSpPr>
-        <p:spPr>
-          <a:xfrm>
-            <a:off x="8385048" y="3419856"/>
-            <a:ext cx="1975104" cy="0"/>
-          </a:xfrm>
-          <a:prstGeom prst="line">
-            <a:avLst/>
-          </a:prstGeom>
-          <a:noFill/>
-          <a:ln w="25400">
-            <a:solidFill>
-              <a:srgbClr val="8ABBD8"/>
-            </a:solidFill>
-            <a:prstDash val="solid"/>
-          </a:ln>
-        </p:spPr>
-      </p:sp>
-      <p:sp>
-        <p:nvSpPr>
-          <p:cNvPr id="18" name="Shape 16"/>
-          <p:cNvSpPr/>
-          <p:nvPr/>
-        </p:nvSpPr>
-        <p:spPr>
-          <a:xfrm>
-            <a:off x="8202168" y="3630168"/>
-            <a:ext cx="1170432" cy="118872"/>
-          </a:xfrm>
-          <a:prstGeom prst="line">
-            <a:avLst/>
-          </a:prstGeom>
-          <a:noFill/>
-          <a:ln w="25400">
-            <a:solidFill>
-              <a:srgbClr val="8ABBD8"/>
-            </a:solidFill>
-            <a:prstDash val="solid"/>
-          </a:ln>
-        </p:spPr>
-      </p:sp>
-      <p:sp>
-        <p:nvSpPr>
-          <p:cNvPr id="19" name="Shape 17"/>
-          <p:cNvSpPr/>
-          <p:nvPr/>
-        </p:nvSpPr>
-        <p:spPr>
-          <a:xfrm>
-            <a:off x="10543032" y="3630168"/>
-            <a:ext cx="-1170432" cy="118872"/>
-          </a:xfrm>
-          <a:prstGeom prst="line">
-            <a:avLst/>
-          </a:prstGeom>
-          <a:noFill/>
-          <a:ln w="25400">
-            <a:solidFill>
-              <a:srgbClr val="8ABBD8"/>
-            </a:solidFill>
-            <a:prstDash val="solid"/>
-          </a:ln>
-        </p:spPr>
-      </p:sp>
-      <p:sp>
-        <p:nvSpPr>
-          <p:cNvPr id="20" name="Text 18"/>
-          <p:cNvSpPr/>
-          <p:nvPr/>
-        </p:nvSpPr>
-        <p:spPr>
-          <a:xfrm>
-            <a:off x="7863840" y="4069080"/>
-            <a:ext cx="3017520" cy="164592"/>
-          </a:xfrm>
-          <a:prstGeom prst="rect">
-            <a:avLst/>
-          </a:prstGeom>
-          <a:noFill/>
-          <a:ln/>
-        </p:spPr>
-        <p:txBody>
-          <a:bodyPr wrap="square" lIns="0" tIns="0" rIns="0" bIns="0" rtlCol="0" anchor="ctr"/>
-          <a:lstStyle/>
-          <a:p>
-            <a:pPr algn="ctr" indent="0" marL="0">
-              <a:buNone/>
-            </a:pPr>
-            <a:r>
-              <a:rPr lang="en-US" sz="900" b="1" dirty="0">
-                <a:solidFill>
-                  <a:srgbClr val="003A63"/>
-                </a:solidFill>
-                <a:latin typeface="Aptos" pitchFamily="34" charset="0"/>
-                <a:ea typeface="Aptos" pitchFamily="34" charset="-122"/>
-                <a:cs typeface="Aptos" pitchFamily="34" charset="-120"/>
-              </a:rPr>
-              <a:t>Decision rights</a:t>
-            </a:r>
-            <a:endParaRPr lang="en-US" sz="900" dirty="0"/>
-          </a:p>
-        </p:txBody>
-      </p:sp>
-      <p:sp>
-        <p:nvSpPr>
-          <p:cNvPr id="21" name="Shape 19"/>
           <p:cNvSpPr/>
           <p:nvPr/>
         </p:nvSpPr>
@@ -10634,7 +9764,7 @@
       </p:sp>
       <p:sp>
         <p:nvSpPr>
-          <p:cNvPr id="22" name="Text 20"/>
+          <p:cNvPr id="17" name="Text 15"/>
           <p:cNvSpPr/>
           <p:nvPr/>
         </p:nvSpPr>
@@ -10673,7 +9803,7 @@
       </p:sp>
       <p:sp>
         <p:nvSpPr>
-          <p:cNvPr id="23" name="Text 21"/>
+          <p:cNvPr id="18" name="Text 16"/>
           <p:cNvSpPr/>
           <p:nvPr/>
         </p:nvSpPr>
@@ -11206,20 +10336,20 @@
         </p:nvSpPr>
         <p:spPr>
           <a:xfrm>
-            <a:off x="7635240" y="3730752"/>
-            <a:ext cx="1033272" cy="749808"/>
+            <a:off x="7909560" y="3675888"/>
+            <a:ext cx="3154680" cy="1691640"/>
           </a:xfrm>
           <a:prstGeom prst="roundRect">
             <a:avLst>
-              <a:gd name="adj" fmla="val 14634"/>
+              <a:gd name="adj" fmla="val 6486"/>
             </a:avLst>
           </a:prstGeom>
           <a:solidFill>
-            <a:srgbClr val="0068B7"/>
+            <a:srgbClr val="FFFFFF"/>
           </a:solidFill>
           <a:ln w="12700">
             <a:solidFill>
-              <a:srgbClr val="0068B7"/>
+              <a:srgbClr val="B9D7E6"/>
             </a:solidFill>
             <a:prstDash val="solid"/>
           </a:ln>
@@ -11233,172 +10363,100 @@
         </p:nvSpPr>
         <p:spPr>
           <a:xfrm>
-            <a:off x="7708392" y="3922776"/>
-            <a:ext cx="886968" cy="310896"/>
-          </a:xfrm>
-          <a:prstGeom prst="rect">
-            <a:avLst/>
-          </a:prstGeom>
-          <a:noFill/>
-          <a:ln/>
-        </p:spPr>
-        <p:txBody>
-          <a:bodyPr wrap="square" lIns="0" tIns="0" rIns="0" bIns="0" rtlCol="0" anchor="ctr">
+            <a:off x="8074152" y="3822192"/>
+            <a:ext cx="2825496" cy="256032"/>
+          </a:xfrm>
+          <a:prstGeom prst="rect">
+            <a:avLst/>
+          </a:prstGeom>
+          <a:noFill/>
+          <a:ln/>
+        </p:spPr>
+        <p:txBody>
+          <a:bodyPr wrap="square" lIns="0" tIns="0" rIns="0" bIns="0" rtlCol="0" anchor="ctr"/>
+          <a:lstStyle/>
+          <a:p>
+            <a:pPr indent="0" marL="0">
+              <a:buNone/>
+            </a:pPr>
+            <a:r>
+              <a:rPr lang="en-US" sz="1300" b="1" dirty="0">
+                <a:solidFill>
+                  <a:srgbClr val="0068B7"/>
+                </a:solidFill>
+                <a:latin typeface="Aptos" pitchFamily="34" charset="0"/>
+                <a:ea typeface="Aptos" pitchFamily="34" charset="-122"/>
+                <a:cs typeface="Aptos" pitchFamily="34" charset="-120"/>
+              </a:rPr>
+              <a:t>Learning sequence</a:t>
+            </a:r>
+            <a:endParaRPr lang="en-US" sz="1300" dirty="0"/>
+          </a:p>
+        </p:txBody>
+      </p:sp>
+      <p:sp>
+        <p:nvSpPr>
+          <p:cNvPr id="15" name="Text 13"/>
+          <p:cNvSpPr/>
+          <p:nvPr/>
+        </p:nvSpPr>
+        <p:spPr>
+          <a:xfrm>
+            <a:off x="8092440" y="4187952"/>
+            <a:ext cx="2770632" cy="1033272"/>
+          </a:xfrm>
+          <a:prstGeom prst="rect">
+            <a:avLst/>
+          </a:prstGeom>
+          <a:noFill/>
+          <a:ln/>
+        </p:spPr>
+        <p:txBody>
+          <a:bodyPr wrap="square" lIns="254" tIns="254" rIns="254" bIns="254" rtlCol="0" anchor="t">
             <a:normAutofit/>
           </a:bodyPr>
           <a:lstStyle/>
           <a:p>
-            <a:pPr algn="ctr" indent="0" marL="0">
-              <a:buNone/>
-            </a:pPr>
-            <a:r>
-              <a:rPr lang="en-US" sz="1500" b="1" dirty="0">
-                <a:solidFill>
-                  <a:srgbClr val="FFFFFF"/>
-                </a:solidFill>
-                <a:latin typeface="Aptos" pitchFamily="34" charset="0"/>
-                <a:ea typeface="Aptos" pitchFamily="34" charset="-122"/>
-                <a:cs typeface="Aptos" pitchFamily="34" charset="-120"/>
-              </a:rPr>
-              <a:t>Learn</a:t>
-            </a:r>
-            <a:endParaRPr lang="en-US" sz="1500" dirty="0"/>
-          </a:p>
-        </p:txBody>
-      </p:sp>
-      <p:sp>
-        <p:nvSpPr>
-          <p:cNvPr id="15" name="Shape 13"/>
-          <p:cNvSpPr/>
-          <p:nvPr/>
-        </p:nvSpPr>
-        <p:spPr>
-          <a:xfrm>
-            <a:off x="8924544" y="3730752"/>
-            <a:ext cx="1033272" cy="749808"/>
-          </a:xfrm>
-          <a:prstGeom prst="roundRect">
-            <a:avLst>
-              <a:gd name="adj" fmla="val 14634"/>
-            </a:avLst>
-          </a:prstGeom>
-          <a:solidFill>
-            <a:srgbClr val="2F8A28"/>
-          </a:solidFill>
-          <a:ln w="12700">
-            <a:solidFill>
-              <a:srgbClr val="2F8A28"/>
-            </a:solidFill>
-            <a:prstDash val="solid"/>
-          </a:ln>
-        </p:spPr>
-      </p:sp>
-      <p:sp>
-        <p:nvSpPr>
-          <p:cNvPr id="16" name="Text 14"/>
-          <p:cNvSpPr/>
-          <p:nvPr/>
-        </p:nvSpPr>
-        <p:spPr>
-          <a:xfrm>
-            <a:off x="8997696" y="3922776"/>
-            <a:ext cx="886968" cy="310896"/>
-          </a:xfrm>
-          <a:prstGeom prst="rect">
-            <a:avLst/>
-          </a:prstGeom>
-          <a:noFill/>
-          <a:ln/>
-        </p:spPr>
-        <p:txBody>
-          <a:bodyPr wrap="square" lIns="0" tIns="0" rIns="0" bIns="0" rtlCol="0" anchor="ctr">
-            <a:normAutofit/>
-          </a:bodyPr>
-          <a:lstStyle/>
-          <a:p>
-            <a:pPr algn="ctr" indent="0" marL="0">
-              <a:buNone/>
-            </a:pPr>
-            <a:r>
-              <a:rPr lang="en-US" sz="1500" b="1" dirty="0">
-                <a:solidFill>
-                  <a:srgbClr val="FFFFFF"/>
-                </a:solidFill>
-                <a:latin typeface="Aptos" pitchFamily="34" charset="0"/>
-                <a:ea typeface="Aptos" pitchFamily="34" charset="-122"/>
-                <a:cs typeface="Aptos" pitchFamily="34" charset="-120"/>
-              </a:rPr>
-              <a:t>Apply</a:t>
-            </a:r>
-            <a:endParaRPr lang="en-US" sz="1500" dirty="0"/>
-          </a:p>
-        </p:txBody>
-      </p:sp>
-      <p:sp>
-        <p:nvSpPr>
-          <p:cNvPr id="17" name="Shape 15"/>
-          <p:cNvSpPr/>
-          <p:nvPr/>
-        </p:nvSpPr>
-        <p:spPr>
-          <a:xfrm>
-            <a:off x="10213848" y="3730752"/>
-            <a:ext cx="1033272" cy="749808"/>
-          </a:xfrm>
-          <a:prstGeom prst="roundRect">
-            <a:avLst>
-              <a:gd name="adj" fmla="val 14634"/>
-            </a:avLst>
-          </a:prstGeom>
-          <a:solidFill>
-            <a:srgbClr val="6A4CA3"/>
-          </a:solidFill>
-          <a:ln w="12700">
-            <a:solidFill>
-              <a:srgbClr val="6A4CA3"/>
-            </a:solidFill>
-            <a:prstDash val="solid"/>
-          </a:ln>
-        </p:spPr>
-      </p:sp>
-      <p:sp>
-        <p:nvSpPr>
-          <p:cNvPr id="18" name="Text 16"/>
-          <p:cNvSpPr/>
-          <p:nvPr/>
-        </p:nvSpPr>
-        <p:spPr>
-          <a:xfrm>
-            <a:off x="10287000" y="3922776"/>
-            <a:ext cx="886968" cy="310896"/>
-          </a:xfrm>
-          <a:prstGeom prst="rect">
-            <a:avLst/>
-          </a:prstGeom>
-          <a:noFill/>
-          <a:ln/>
-        </p:spPr>
-        <p:txBody>
-          <a:bodyPr wrap="square" lIns="0" tIns="0" rIns="0" bIns="0" rtlCol="0" anchor="ctr">
-            <a:normAutofit/>
-          </a:bodyPr>
-          <a:lstStyle/>
-          <a:p>
-            <a:pPr algn="ctr" indent="0" marL="0">
-              <a:buNone/>
-            </a:pPr>
-            <a:r>
-              <a:rPr lang="en-US" sz="1500" b="1" dirty="0">
-                <a:solidFill>
-                  <a:srgbClr val="FFFFFF"/>
-                </a:solidFill>
-                <a:latin typeface="Aptos" pitchFamily="34" charset="0"/>
-                <a:ea typeface="Aptos" pitchFamily="34" charset="-122"/>
-                <a:cs typeface="Aptos" pitchFamily="34" charset="-120"/>
-              </a:rPr>
-              <a:t>Document</a:t>
-            </a:r>
-            <a:endParaRPr lang="en-US" sz="1500" dirty="0"/>
+            <a:r>
+              <a:rPr lang="en-US" sz="1380" dirty="0">
+                <a:solidFill>
+                  <a:srgbClr val="17364A"/>
+                </a:solidFill>
+                <a:latin typeface="Aptos" pitchFamily="34" charset="0"/>
+                <a:ea typeface="Aptos" pitchFamily="34" charset="-122"/>
+                <a:cs typeface="Aptos" pitchFamily="34" charset="-120"/>
+              </a:rPr>
+              <a:t>Read the module for shared vocabulary and context.</a:t>
+            </a:r>
+            <a:endParaRPr lang="en-US" sz="1380" dirty="0"/>
+          </a:p>
+          <a:p>
+            <a:r>
+              <a:rPr lang="en-US" sz="1380" dirty="0">
+                <a:solidFill>
+                  <a:srgbClr val="17364A"/>
+                </a:solidFill>
+                <a:latin typeface="Aptos" pitchFamily="34" charset="0"/>
+                <a:ea typeface="Aptos" pitchFamily="34" charset="-122"/>
+                <a:cs typeface="Aptos" pitchFamily="34" charset="-120"/>
+              </a:rPr>
+              <a:t>Complete the practical exercise to apply the concept.</a:t>
+            </a:r>
+            <a:endParaRPr lang="en-US" sz="1380" dirty="0"/>
+          </a:p>
+          <a:p>
+            <a:r>
+              <a:rPr lang="en-US" sz="1380" dirty="0">
+                <a:solidFill>
+                  <a:srgbClr val="17364A"/>
+                </a:solidFill>
+                <a:latin typeface="Aptos" pitchFamily="34" charset="0"/>
+                <a:ea typeface="Aptos" pitchFamily="34" charset="-122"/>
+                <a:cs typeface="Aptos" pitchFamily="34" charset="-120"/>
+              </a:rPr>
+              <a:t>Use the notes and references for deeper review.</a:t>
+            </a:r>
+            <a:endParaRPr lang="en-US" sz="1380" dirty="0"/>
           </a:p>
         </p:txBody>
       </p:sp>
@@ -11871,13 +10929,11 @@
             </a:avLst>
           </a:prstGeom>
           <a:solidFill>
-            <a:srgbClr val="FFFFFF">
-              <a:alpha val="88000"/>
-            </a:srgbClr>
+            <a:srgbClr val="FFFFFF"/>
           </a:solidFill>
           <a:ln w="12700">
             <a:solidFill>
-              <a:srgbClr val="D6E8F2"/>
+              <a:srgbClr val="B9D7E6"/>
             </a:solidFill>
             <a:prstDash val="solid"/>
           </a:ln>
@@ -11885,190 +10941,112 @@
       </p:sp>
       <p:sp>
         <p:nvSpPr>
-          <p:cNvPr id="14" name="Shape 12"/>
-          <p:cNvSpPr/>
-          <p:nvPr/>
-        </p:nvSpPr>
-        <p:spPr>
-          <a:xfrm>
-            <a:off x="7891272" y="3108960"/>
-            <a:ext cx="566928" cy="566928"/>
-          </a:xfrm>
-          <a:prstGeom prst="ellipse">
-            <a:avLst/>
-          </a:prstGeom>
-          <a:solidFill>
-            <a:srgbClr val="0068B7"/>
-          </a:solidFill>
-          <a:ln w="12700">
-            <a:solidFill>
-              <a:srgbClr val="0068B7"/>
-            </a:solidFill>
-            <a:prstDash val="solid"/>
-          </a:ln>
-        </p:spPr>
-      </p:sp>
-      <p:sp>
-        <p:nvSpPr>
-          <p:cNvPr id="15" name="Shape 13"/>
-          <p:cNvSpPr/>
-          <p:nvPr/>
-        </p:nvSpPr>
-        <p:spPr>
-          <a:xfrm>
-            <a:off x="10287000" y="3108960"/>
-            <a:ext cx="566928" cy="566928"/>
-          </a:xfrm>
-          <a:prstGeom prst="ellipse">
-            <a:avLst/>
-          </a:prstGeom>
-          <a:solidFill>
-            <a:srgbClr val="2F8A28"/>
-          </a:solidFill>
-          <a:ln w="12700">
-            <a:solidFill>
-              <a:srgbClr val="2F8A28"/>
-            </a:solidFill>
-            <a:prstDash val="solid"/>
-          </a:ln>
-        </p:spPr>
+          <p:cNvPr id="14" name="Text 12"/>
+          <p:cNvSpPr/>
+          <p:nvPr/>
+        </p:nvSpPr>
+        <p:spPr>
+          <a:xfrm>
+            <a:off x="7799832" y="2935224"/>
+            <a:ext cx="3145536" cy="256032"/>
+          </a:xfrm>
+          <a:prstGeom prst="rect">
+            <a:avLst/>
+          </a:prstGeom>
+          <a:noFill/>
+          <a:ln/>
+        </p:spPr>
+        <p:txBody>
+          <a:bodyPr wrap="square" lIns="0" tIns="0" rIns="0" bIns="0" rtlCol="0" anchor="ctr"/>
+          <a:lstStyle/>
+          <a:p>
+            <a:pPr indent="0" marL="0">
+              <a:buNone/>
+            </a:pPr>
+            <a:r>
+              <a:rPr lang="en-US" sz="1300" b="1" dirty="0">
+                <a:solidFill>
+                  <a:srgbClr val="0068B7"/>
+                </a:solidFill>
+                <a:latin typeface="Aptos" pitchFamily="34" charset="0"/>
+                <a:ea typeface="Aptos" pitchFamily="34" charset="-122"/>
+                <a:cs typeface="Aptos" pitchFamily="34" charset="-120"/>
+              </a:rPr>
+              <a:t>Concept checkpoints</a:t>
+            </a:r>
+            <a:endParaRPr lang="en-US" sz="1300" dirty="0"/>
+          </a:p>
+        </p:txBody>
+      </p:sp>
+      <p:sp>
+        <p:nvSpPr>
+          <p:cNvPr id="15" name="Text 13"/>
+          <p:cNvSpPr/>
+          <p:nvPr/>
+        </p:nvSpPr>
+        <p:spPr>
+          <a:xfrm>
+            <a:off x="7818120" y="3300984"/>
+            <a:ext cx="3090672" cy="877824"/>
+          </a:xfrm>
+          <a:prstGeom prst="rect">
+            <a:avLst/>
+          </a:prstGeom>
+          <a:noFill/>
+          <a:ln/>
+        </p:spPr>
+        <p:txBody>
+          <a:bodyPr wrap="square" lIns="254" tIns="254" rIns="254" bIns="254" rtlCol="0" anchor="t">
+            <a:normAutofit/>
+          </a:bodyPr>
+          <a:lstStyle/>
+          <a:p>
+            <a:r>
+              <a:rPr lang="en-US" sz="1380" dirty="0">
+                <a:solidFill>
+                  <a:srgbClr val="17364A"/>
+                </a:solidFill>
+                <a:latin typeface="Aptos" pitchFamily="34" charset="0"/>
+                <a:ea typeface="Aptos" pitchFamily="34" charset="-122"/>
+                <a:cs typeface="Aptos" pitchFamily="34" charset="-120"/>
+              </a:rPr>
+              <a:t>1.</a:t>
+            </a:r>
+            <a:endParaRPr lang="en-US" sz="1380" dirty="0"/>
+          </a:p>
+          <a:p>
+            <a:r>
+              <a:rPr lang="en-US" sz="1380" dirty="0">
+                <a:solidFill>
+                  <a:srgbClr val="17364A"/>
+                </a:solidFill>
+                <a:latin typeface="Aptos" pitchFamily="34" charset="0"/>
+                <a:ea typeface="Aptos" pitchFamily="34" charset="-122"/>
+                <a:cs typeface="Aptos" pitchFamily="34" charset="-120"/>
+              </a:rPr>
+              <a:t>What is the strongest evidence that ai policy development and approval workflow has been.</a:t>
+            </a:r>
+            <a:endParaRPr lang="en-US" sz="1380" dirty="0"/>
+          </a:p>
+          <a:p>
+            <a:r>
+              <a:rPr lang="en-US" sz="1380" dirty="0">
+                <a:solidFill>
+                  <a:srgbClr val="17364A"/>
+                </a:solidFill>
+                <a:latin typeface="Aptos" pitchFamily="34" charset="0"/>
+                <a:ea typeface="Aptos" pitchFamily="34" charset="-122"/>
+                <a:cs typeface="Aptos" pitchFamily="34" charset="-120"/>
+              </a:rPr>
+              <a:t>2.</a:t>
+            </a:r>
+            <a:endParaRPr lang="en-US" sz="1380" dirty="0"/>
+          </a:p>
+        </p:txBody>
       </p:sp>
       <p:sp>
         <p:nvSpPr>
           <p:cNvPr id="16" name="Shape 14"/>
-          <p:cNvSpPr/>
-          <p:nvPr/>
-        </p:nvSpPr>
-        <p:spPr>
-          <a:xfrm>
-            <a:off x="9089136" y="3456432"/>
-            <a:ext cx="566928" cy="566928"/>
-          </a:xfrm>
-          <a:prstGeom prst="ellipse">
-            <a:avLst/>
-          </a:prstGeom>
-          <a:solidFill>
-            <a:srgbClr val="6A4CA3"/>
-          </a:solidFill>
-          <a:ln w="12700">
-            <a:solidFill>
-              <a:srgbClr val="6A4CA3"/>
-            </a:solidFill>
-            <a:prstDash val="solid"/>
-          </a:ln>
-        </p:spPr>
-      </p:sp>
-      <p:sp>
-        <p:nvSpPr>
-          <p:cNvPr id="17" name="Shape 15"/>
-          <p:cNvSpPr/>
-          <p:nvPr/>
-        </p:nvSpPr>
-        <p:spPr>
-          <a:xfrm>
-            <a:off x="8385048" y="3419856"/>
-            <a:ext cx="1975104" cy="0"/>
-          </a:xfrm>
-          <a:prstGeom prst="line">
-            <a:avLst/>
-          </a:prstGeom>
-          <a:noFill/>
-          <a:ln w="25400">
-            <a:solidFill>
-              <a:srgbClr val="8ABBD8"/>
-            </a:solidFill>
-            <a:prstDash val="solid"/>
-          </a:ln>
-        </p:spPr>
-      </p:sp>
-      <p:sp>
-        <p:nvSpPr>
-          <p:cNvPr id="18" name="Shape 16"/>
-          <p:cNvSpPr/>
-          <p:nvPr/>
-        </p:nvSpPr>
-        <p:spPr>
-          <a:xfrm>
-            <a:off x="8202168" y="3630168"/>
-            <a:ext cx="1170432" cy="118872"/>
-          </a:xfrm>
-          <a:prstGeom prst="line">
-            <a:avLst/>
-          </a:prstGeom>
-          <a:noFill/>
-          <a:ln w="25400">
-            <a:solidFill>
-              <a:srgbClr val="8ABBD8"/>
-            </a:solidFill>
-            <a:prstDash val="solid"/>
-          </a:ln>
-        </p:spPr>
-      </p:sp>
-      <p:sp>
-        <p:nvSpPr>
-          <p:cNvPr id="19" name="Shape 17"/>
-          <p:cNvSpPr/>
-          <p:nvPr/>
-        </p:nvSpPr>
-        <p:spPr>
-          <a:xfrm>
-            <a:off x="10543032" y="3630168"/>
-            <a:ext cx="-1170432" cy="118872"/>
-          </a:xfrm>
-          <a:prstGeom prst="line">
-            <a:avLst/>
-          </a:prstGeom>
-          <a:noFill/>
-          <a:ln w="25400">
-            <a:solidFill>
-              <a:srgbClr val="8ABBD8"/>
-            </a:solidFill>
-            <a:prstDash val="solid"/>
-          </a:ln>
-        </p:spPr>
-      </p:sp>
-      <p:sp>
-        <p:nvSpPr>
-          <p:cNvPr id="20" name="Text 18"/>
-          <p:cNvSpPr/>
-          <p:nvPr/>
-        </p:nvSpPr>
-        <p:spPr>
-          <a:xfrm>
-            <a:off x="7863840" y="4069080"/>
-            <a:ext cx="3017520" cy="164592"/>
-          </a:xfrm>
-          <a:prstGeom prst="rect">
-            <a:avLst/>
-          </a:prstGeom>
-          <a:noFill/>
-          <a:ln/>
-        </p:spPr>
-        <p:txBody>
-          <a:bodyPr wrap="square" lIns="0" tIns="0" rIns="0" bIns="0" rtlCol="0" anchor="ctr"/>
-          <a:lstStyle/>
-          <a:p>
-            <a:pPr algn="ctr" indent="0" marL="0">
-              <a:buNone/>
-            </a:pPr>
-            <a:r>
-              <a:rPr lang="en-US" sz="900" b="1" dirty="0">
-                <a:solidFill>
-                  <a:srgbClr val="003A63"/>
-                </a:solidFill>
-                <a:latin typeface="Aptos" pitchFamily="34" charset="0"/>
-                <a:ea typeface="Aptos" pitchFamily="34" charset="-122"/>
-                <a:cs typeface="Aptos" pitchFamily="34" charset="-120"/>
-              </a:rPr>
-              <a:t>Decision rights</a:t>
-            </a:r>
-            <a:endParaRPr lang="en-US" sz="900" dirty="0"/>
-          </a:p>
-        </p:txBody>
-      </p:sp>
-      <p:sp>
-        <p:nvSpPr>
-          <p:cNvPr id="21" name="Shape 19"/>
           <p:cNvSpPr/>
           <p:nvPr/>
         </p:nvSpPr>
@@ -12095,7 +11073,7 @@
       </p:sp>
       <p:sp>
         <p:nvSpPr>
-          <p:cNvPr id="22" name="Text 20"/>
+          <p:cNvPr id="17" name="Text 15"/>
           <p:cNvSpPr/>
           <p:nvPr/>
         </p:nvSpPr>
@@ -12134,7 +11112,7 @@
       </p:sp>
       <p:sp>
         <p:nvSpPr>
-          <p:cNvPr id="23" name="Text 21"/>
+          <p:cNvPr id="18" name="Text 16"/>
           <p:cNvSpPr/>
           <p:nvPr/>
         </p:nvSpPr>
@@ -12642,13 +11620,11 @@
             </a:avLst>
           </a:prstGeom>
           <a:solidFill>
-            <a:srgbClr val="FFFFFF">
-              <a:alpha val="88000"/>
-            </a:srgbClr>
+            <a:srgbClr val="FFFFFF"/>
           </a:solidFill>
           <a:ln w="12700">
             <a:solidFill>
-              <a:srgbClr val="D6E8F2"/>
+              <a:srgbClr val="B9D7E6"/>
             </a:solidFill>
             <a:prstDash val="solid"/>
           </a:ln>
@@ -12656,190 +11632,98 @@
       </p:sp>
       <p:sp>
         <p:nvSpPr>
-          <p:cNvPr id="14" name="Shape 12"/>
-          <p:cNvSpPr/>
-          <p:nvPr/>
-        </p:nvSpPr>
-        <p:spPr>
-          <a:xfrm>
-            <a:off x="7891272" y="3108960"/>
-            <a:ext cx="566928" cy="566928"/>
-          </a:xfrm>
-          <a:prstGeom prst="ellipse">
-            <a:avLst/>
-          </a:prstGeom>
-          <a:solidFill>
-            <a:srgbClr val="0068B7"/>
-          </a:solidFill>
-          <a:ln w="12700">
-            <a:solidFill>
-              <a:srgbClr val="0068B7"/>
-            </a:solidFill>
-            <a:prstDash val="solid"/>
-          </a:ln>
-        </p:spPr>
-      </p:sp>
-      <p:sp>
-        <p:nvSpPr>
-          <p:cNvPr id="15" name="Shape 13"/>
-          <p:cNvSpPr/>
-          <p:nvPr/>
-        </p:nvSpPr>
-        <p:spPr>
-          <a:xfrm>
-            <a:off x="10287000" y="3108960"/>
-            <a:ext cx="566928" cy="566928"/>
-          </a:xfrm>
-          <a:prstGeom prst="ellipse">
-            <a:avLst/>
-          </a:prstGeom>
-          <a:solidFill>
-            <a:srgbClr val="2F8A28"/>
-          </a:solidFill>
-          <a:ln w="12700">
-            <a:solidFill>
-              <a:srgbClr val="2F8A28"/>
-            </a:solidFill>
-            <a:prstDash val="solid"/>
-          </a:ln>
-        </p:spPr>
+          <p:cNvPr id="14" name="Text 12"/>
+          <p:cNvSpPr/>
+          <p:nvPr/>
+        </p:nvSpPr>
+        <p:spPr>
+          <a:xfrm>
+            <a:off x="7799832" y="2935224"/>
+            <a:ext cx="3145536" cy="256032"/>
+          </a:xfrm>
+          <a:prstGeom prst="rect">
+            <a:avLst/>
+          </a:prstGeom>
+          <a:noFill/>
+          <a:ln/>
+        </p:spPr>
+        <p:txBody>
+          <a:bodyPr wrap="square" lIns="0" tIns="0" rIns="0" bIns="0" rtlCol="0" anchor="ctr"/>
+          <a:lstStyle/>
+          <a:p>
+            <a:pPr indent="0" marL="0">
+              <a:buNone/>
+            </a:pPr>
+            <a:r>
+              <a:rPr lang="en-US" sz="1300" b="1" dirty="0">
+                <a:solidFill>
+                  <a:srgbClr val="0068B7"/>
+                </a:solidFill>
+                <a:latin typeface="Aptos" pitchFamily="34" charset="0"/>
+                <a:ea typeface="Aptos" pitchFamily="34" charset="-122"/>
+                <a:cs typeface="Aptos" pitchFamily="34" charset="-120"/>
+              </a:rPr>
+              <a:t>Concept checkpoints</a:t>
+            </a:r>
+            <a:endParaRPr lang="en-US" sz="1300" dirty="0"/>
+          </a:p>
+        </p:txBody>
+      </p:sp>
+      <p:sp>
+        <p:nvSpPr>
+          <p:cNvPr id="15" name="Text 13"/>
+          <p:cNvSpPr/>
+          <p:nvPr/>
+        </p:nvSpPr>
+        <p:spPr>
+          <a:xfrm>
+            <a:off x="7818120" y="3300984"/>
+            <a:ext cx="3090672" cy="877824"/>
+          </a:xfrm>
+          <a:prstGeom prst="rect">
+            <a:avLst/>
+          </a:prstGeom>
+          <a:noFill/>
+          <a:ln/>
+        </p:spPr>
+        <p:txBody>
+          <a:bodyPr wrap="square" lIns="254" tIns="254" rIns="254" bIns="254" rtlCol="0" anchor="t">
+            <a:normAutofit/>
+          </a:bodyPr>
+          <a:lstStyle/>
+          <a:p>
+            <a:r>
+              <a:rPr lang="en-US" sz="1380" dirty="0">
+                <a:solidFill>
+                  <a:srgbClr val="17364A"/>
+                </a:solidFill>
+                <a:latin typeface="Aptos" pitchFamily="34" charset="0"/>
+                <a:ea typeface="Aptos" pitchFamily="34" charset="-122"/>
+                <a:cs typeface="Aptos" pitchFamily="34" charset="-120"/>
+              </a:rPr>
+              <a:t>OWASP Top 10 for Large Language Model Applications:.</a:t>
+            </a:r>
+            <a:endParaRPr lang="en-US" sz="1380" dirty="0"/>
+          </a:p>
+          <a:p>
+            <a:r>
+              <a:rPr lang="en-US" sz="1380" dirty="0">
+                <a:solidFill>
+                  <a:srgbClr val="17364A"/>
+                </a:solidFill>
+                <a:latin typeface="Aptos" pitchFamily="34" charset="0"/>
+                <a:ea typeface="Aptos" pitchFamily="34" charset="-122"/>
+                <a:cs typeface="Aptos" pitchFamily="34" charset="-120"/>
+              </a:rPr>
+              <a:t>ONC health IT, interoperability, and information blocking resources:.</a:t>
+            </a:r>
+            <a:endParaRPr lang="en-US" sz="1380" dirty="0"/>
+          </a:p>
+        </p:txBody>
       </p:sp>
       <p:sp>
         <p:nvSpPr>
           <p:cNvPr id="16" name="Shape 14"/>
-          <p:cNvSpPr/>
-          <p:nvPr/>
-        </p:nvSpPr>
-        <p:spPr>
-          <a:xfrm>
-            <a:off x="9089136" y="3456432"/>
-            <a:ext cx="566928" cy="566928"/>
-          </a:xfrm>
-          <a:prstGeom prst="ellipse">
-            <a:avLst/>
-          </a:prstGeom>
-          <a:solidFill>
-            <a:srgbClr val="6A4CA3"/>
-          </a:solidFill>
-          <a:ln w="12700">
-            <a:solidFill>
-              <a:srgbClr val="6A4CA3"/>
-            </a:solidFill>
-            <a:prstDash val="solid"/>
-          </a:ln>
-        </p:spPr>
-      </p:sp>
-      <p:sp>
-        <p:nvSpPr>
-          <p:cNvPr id="17" name="Shape 15"/>
-          <p:cNvSpPr/>
-          <p:nvPr/>
-        </p:nvSpPr>
-        <p:spPr>
-          <a:xfrm>
-            <a:off x="8385048" y="3419856"/>
-            <a:ext cx="1975104" cy="0"/>
-          </a:xfrm>
-          <a:prstGeom prst="line">
-            <a:avLst/>
-          </a:prstGeom>
-          <a:noFill/>
-          <a:ln w="25400">
-            <a:solidFill>
-              <a:srgbClr val="8ABBD8"/>
-            </a:solidFill>
-            <a:prstDash val="solid"/>
-          </a:ln>
-        </p:spPr>
-      </p:sp>
-      <p:sp>
-        <p:nvSpPr>
-          <p:cNvPr id="18" name="Shape 16"/>
-          <p:cNvSpPr/>
-          <p:nvPr/>
-        </p:nvSpPr>
-        <p:spPr>
-          <a:xfrm>
-            <a:off x="8202168" y="3630168"/>
-            <a:ext cx="1170432" cy="118872"/>
-          </a:xfrm>
-          <a:prstGeom prst="line">
-            <a:avLst/>
-          </a:prstGeom>
-          <a:noFill/>
-          <a:ln w="25400">
-            <a:solidFill>
-              <a:srgbClr val="8ABBD8"/>
-            </a:solidFill>
-            <a:prstDash val="solid"/>
-          </a:ln>
-        </p:spPr>
-      </p:sp>
-      <p:sp>
-        <p:nvSpPr>
-          <p:cNvPr id="19" name="Shape 17"/>
-          <p:cNvSpPr/>
-          <p:nvPr/>
-        </p:nvSpPr>
-        <p:spPr>
-          <a:xfrm>
-            <a:off x="10543032" y="3630168"/>
-            <a:ext cx="-1170432" cy="118872"/>
-          </a:xfrm>
-          <a:prstGeom prst="line">
-            <a:avLst/>
-          </a:prstGeom>
-          <a:noFill/>
-          <a:ln w="25400">
-            <a:solidFill>
-              <a:srgbClr val="8ABBD8"/>
-            </a:solidFill>
-            <a:prstDash val="solid"/>
-          </a:ln>
-        </p:spPr>
-      </p:sp>
-      <p:sp>
-        <p:nvSpPr>
-          <p:cNvPr id="20" name="Text 18"/>
-          <p:cNvSpPr/>
-          <p:nvPr/>
-        </p:nvSpPr>
-        <p:spPr>
-          <a:xfrm>
-            <a:off x="7863840" y="4069080"/>
-            <a:ext cx="3017520" cy="164592"/>
-          </a:xfrm>
-          <a:prstGeom prst="rect">
-            <a:avLst/>
-          </a:prstGeom>
-          <a:noFill/>
-          <a:ln/>
-        </p:spPr>
-        <p:txBody>
-          <a:bodyPr wrap="square" lIns="0" tIns="0" rIns="0" bIns="0" rtlCol="0" anchor="ctr"/>
-          <a:lstStyle/>
-          <a:p>
-            <a:pPr algn="ctr" indent="0" marL="0">
-              <a:buNone/>
-            </a:pPr>
-            <a:r>
-              <a:rPr lang="en-US" sz="900" b="1" dirty="0">
-                <a:solidFill>
-                  <a:srgbClr val="003A63"/>
-                </a:solidFill>
-                <a:latin typeface="Aptos" pitchFamily="34" charset="0"/>
-                <a:ea typeface="Aptos" pitchFamily="34" charset="-122"/>
-                <a:cs typeface="Aptos" pitchFamily="34" charset="-120"/>
-              </a:rPr>
-              <a:t>Decision rights</a:t>
-            </a:r>
-            <a:endParaRPr lang="en-US" sz="900" dirty="0"/>
-          </a:p>
-        </p:txBody>
-      </p:sp>
-      <p:sp>
-        <p:nvSpPr>
-          <p:cNvPr id="21" name="Shape 19"/>
           <p:cNvSpPr/>
           <p:nvPr/>
         </p:nvSpPr>
@@ -12866,7 +11750,7 @@
       </p:sp>
       <p:sp>
         <p:nvSpPr>
-          <p:cNvPr id="22" name="Text 20"/>
+          <p:cNvPr id="17" name="Text 15"/>
           <p:cNvSpPr/>
           <p:nvPr/>
         </p:nvSpPr>
@@ -12905,7 +11789,7 @@
       </p:sp>
       <p:sp>
         <p:nvSpPr>
-          <p:cNvPr id="23" name="Text 21"/>
+          <p:cNvPr id="18" name="Text 16"/>
           <p:cNvSpPr/>
           <p:nvPr/>
         </p:nvSpPr>
@@ -13385,13 +12269,11 @@
             </a:avLst>
           </a:prstGeom>
           <a:solidFill>
-            <a:srgbClr val="FFFFFF">
-              <a:alpha val="88000"/>
-            </a:srgbClr>
+            <a:srgbClr val="FFFFFF"/>
           </a:solidFill>
           <a:ln w="12700">
             <a:solidFill>
-              <a:srgbClr val="D6E8F2"/>
+              <a:srgbClr val="B9D7E6"/>
             </a:solidFill>
             <a:prstDash val="solid"/>
           </a:ln>
@@ -13399,190 +12281,84 @@
       </p:sp>
       <p:sp>
         <p:nvSpPr>
-          <p:cNvPr id="14" name="Shape 12"/>
-          <p:cNvSpPr/>
-          <p:nvPr/>
-        </p:nvSpPr>
-        <p:spPr>
-          <a:xfrm>
-            <a:off x="7891272" y="3108960"/>
-            <a:ext cx="566928" cy="566928"/>
-          </a:xfrm>
-          <a:prstGeom prst="ellipse">
-            <a:avLst/>
-          </a:prstGeom>
-          <a:solidFill>
-            <a:srgbClr val="0068B7"/>
-          </a:solidFill>
-          <a:ln w="12700">
-            <a:solidFill>
-              <a:srgbClr val="0068B7"/>
-            </a:solidFill>
-            <a:prstDash val="solid"/>
-          </a:ln>
-        </p:spPr>
-      </p:sp>
-      <p:sp>
-        <p:nvSpPr>
-          <p:cNvPr id="15" name="Shape 13"/>
-          <p:cNvSpPr/>
-          <p:nvPr/>
-        </p:nvSpPr>
-        <p:spPr>
-          <a:xfrm>
-            <a:off x="10287000" y="3108960"/>
-            <a:ext cx="566928" cy="566928"/>
-          </a:xfrm>
-          <a:prstGeom prst="ellipse">
-            <a:avLst/>
-          </a:prstGeom>
-          <a:solidFill>
-            <a:srgbClr val="2F8A28"/>
-          </a:solidFill>
-          <a:ln w="12700">
-            <a:solidFill>
-              <a:srgbClr val="2F8A28"/>
-            </a:solidFill>
-            <a:prstDash val="solid"/>
-          </a:ln>
-        </p:spPr>
+          <p:cNvPr id="14" name="Text 12"/>
+          <p:cNvSpPr/>
+          <p:nvPr/>
+        </p:nvSpPr>
+        <p:spPr>
+          <a:xfrm>
+            <a:off x="7799832" y="2935224"/>
+            <a:ext cx="3145536" cy="256032"/>
+          </a:xfrm>
+          <a:prstGeom prst="rect">
+            <a:avLst/>
+          </a:prstGeom>
+          <a:noFill/>
+          <a:ln/>
+        </p:spPr>
+        <p:txBody>
+          <a:bodyPr wrap="square" lIns="0" tIns="0" rIns="0" bIns="0" rtlCol="0" anchor="ctr"/>
+          <a:lstStyle/>
+          <a:p>
+            <a:pPr indent="0" marL="0">
+              <a:buNone/>
+            </a:pPr>
+            <a:r>
+              <a:rPr lang="en-US" sz="1300" b="1" dirty="0">
+                <a:solidFill>
+                  <a:srgbClr val="0068B7"/>
+                </a:solidFill>
+                <a:latin typeface="Aptos" pitchFamily="34" charset="0"/>
+                <a:ea typeface="Aptos" pitchFamily="34" charset="-122"/>
+                <a:cs typeface="Aptos" pitchFamily="34" charset="-120"/>
+              </a:rPr>
+              <a:t>Concept checkpoints</a:t>
+            </a:r>
+            <a:endParaRPr lang="en-US" sz="1300" dirty="0"/>
+          </a:p>
+        </p:txBody>
+      </p:sp>
+      <p:sp>
+        <p:nvSpPr>
+          <p:cNvPr id="15" name="Text 13"/>
+          <p:cNvSpPr/>
+          <p:nvPr/>
+        </p:nvSpPr>
+        <p:spPr>
+          <a:xfrm>
+            <a:off x="7818120" y="3300984"/>
+            <a:ext cx="3090672" cy="877824"/>
+          </a:xfrm>
+          <a:prstGeom prst="rect">
+            <a:avLst/>
+          </a:prstGeom>
+          <a:noFill/>
+          <a:ln/>
+        </p:spPr>
+        <p:txBody>
+          <a:bodyPr wrap="square" lIns="254" tIns="254" rIns="254" bIns="254" rtlCol="0" anchor="t">
+            <a:normAutofit/>
+          </a:bodyPr>
+          <a:lstStyle/>
+          <a:p>
+            <a:r>
+              <a:rPr lang="en-US" sz="1380" dirty="0">
+                <a:solidFill>
+                  <a:srgbClr val="17364A"/>
+                </a:solidFill>
+                <a:latin typeface="Aptos" pitchFamily="34" charset="0"/>
+                <a:ea typeface="Aptos" pitchFamily="34" charset="-122"/>
+                <a:cs typeface="Aptos" pitchFamily="34" charset="-120"/>
+              </a:rPr>
+              <a:t>Agency policies for privacy, public records, cybersecurity, procurement, civil rights,.</a:t>
+            </a:r>
+            <a:endParaRPr lang="en-US" sz="1380" dirty="0"/>
+          </a:p>
+        </p:txBody>
       </p:sp>
       <p:sp>
         <p:nvSpPr>
           <p:cNvPr id="16" name="Shape 14"/>
-          <p:cNvSpPr/>
-          <p:nvPr/>
-        </p:nvSpPr>
-        <p:spPr>
-          <a:xfrm>
-            <a:off x="9089136" y="3456432"/>
-            <a:ext cx="566928" cy="566928"/>
-          </a:xfrm>
-          <a:prstGeom prst="ellipse">
-            <a:avLst/>
-          </a:prstGeom>
-          <a:solidFill>
-            <a:srgbClr val="6A4CA3"/>
-          </a:solidFill>
-          <a:ln w="12700">
-            <a:solidFill>
-              <a:srgbClr val="6A4CA3"/>
-            </a:solidFill>
-            <a:prstDash val="solid"/>
-          </a:ln>
-        </p:spPr>
-      </p:sp>
-      <p:sp>
-        <p:nvSpPr>
-          <p:cNvPr id="17" name="Shape 15"/>
-          <p:cNvSpPr/>
-          <p:nvPr/>
-        </p:nvSpPr>
-        <p:spPr>
-          <a:xfrm>
-            <a:off x="8385048" y="3419856"/>
-            <a:ext cx="1975104" cy="0"/>
-          </a:xfrm>
-          <a:prstGeom prst="line">
-            <a:avLst/>
-          </a:prstGeom>
-          <a:noFill/>
-          <a:ln w="25400">
-            <a:solidFill>
-              <a:srgbClr val="8ABBD8"/>
-            </a:solidFill>
-            <a:prstDash val="solid"/>
-          </a:ln>
-        </p:spPr>
-      </p:sp>
-      <p:sp>
-        <p:nvSpPr>
-          <p:cNvPr id="18" name="Shape 16"/>
-          <p:cNvSpPr/>
-          <p:nvPr/>
-        </p:nvSpPr>
-        <p:spPr>
-          <a:xfrm>
-            <a:off x="8202168" y="3630168"/>
-            <a:ext cx="1170432" cy="118872"/>
-          </a:xfrm>
-          <a:prstGeom prst="line">
-            <a:avLst/>
-          </a:prstGeom>
-          <a:noFill/>
-          <a:ln w="25400">
-            <a:solidFill>
-              <a:srgbClr val="8ABBD8"/>
-            </a:solidFill>
-            <a:prstDash val="solid"/>
-          </a:ln>
-        </p:spPr>
-      </p:sp>
-      <p:sp>
-        <p:nvSpPr>
-          <p:cNvPr id="19" name="Shape 17"/>
-          <p:cNvSpPr/>
-          <p:nvPr/>
-        </p:nvSpPr>
-        <p:spPr>
-          <a:xfrm>
-            <a:off x="10543032" y="3630168"/>
-            <a:ext cx="-1170432" cy="118872"/>
-          </a:xfrm>
-          <a:prstGeom prst="line">
-            <a:avLst/>
-          </a:prstGeom>
-          <a:noFill/>
-          <a:ln w="25400">
-            <a:solidFill>
-              <a:srgbClr val="8ABBD8"/>
-            </a:solidFill>
-            <a:prstDash val="solid"/>
-          </a:ln>
-        </p:spPr>
-      </p:sp>
-      <p:sp>
-        <p:nvSpPr>
-          <p:cNvPr id="20" name="Text 18"/>
-          <p:cNvSpPr/>
-          <p:nvPr/>
-        </p:nvSpPr>
-        <p:spPr>
-          <a:xfrm>
-            <a:off x="7863840" y="4069080"/>
-            <a:ext cx="3017520" cy="164592"/>
-          </a:xfrm>
-          <a:prstGeom prst="rect">
-            <a:avLst/>
-          </a:prstGeom>
-          <a:noFill/>
-          <a:ln/>
-        </p:spPr>
-        <p:txBody>
-          <a:bodyPr wrap="square" lIns="0" tIns="0" rIns="0" bIns="0" rtlCol="0" anchor="ctr"/>
-          <a:lstStyle/>
-          <a:p>
-            <a:pPr algn="ctr" indent="0" marL="0">
-              <a:buNone/>
-            </a:pPr>
-            <a:r>
-              <a:rPr lang="en-US" sz="900" b="1" dirty="0">
-                <a:solidFill>
-                  <a:srgbClr val="003A63"/>
-                </a:solidFill>
-                <a:latin typeface="Aptos" pitchFamily="34" charset="0"/>
-                <a:ea typeface="Aptos" pitchFamily="34" charset="-122"/>
-                <a:cs typeface="Aptos" pitchFamily="34" charset="-120"/>
-              </a:rPr>
-              <a:t>Decision rights</a:t>
-            </a:r>
-            <a:endParaRPr lang="en-US" sz="900" dirty="0"/>
-          </a:p>
-        </p:txBody>
-      </p:sp>
-      <p:sp>
-        <p:nvSpPr>
-          <p:cNvPr id="21" name="Shape 19"/>
           <p:cNvSpPr/>
           <p:nvPr/>
         </p:nvSpPr>
@@ -13609,7 +12385,7 @@
       </p:sp>
       <p:sp>
         <p:nvSpPr>
-          <p:cNvPr id="22" name="Text 20"/>
+          <p:cNvPr id="17" name="Text 15"/>
           <p:cNvSpPr/>
           <p:nvPr/>
         </p:nvSpPr>
@@ -13648,7 +12424,7 @@
       </p:sp>
       <p:sp>
         <p:nvSpPr>
-          <p:cNvPr id="23" name="Text 21"/>
+          <p:cNvPr id="18" name="Text 16"/>
           <p:cNvSpPr/>
           <p:nvPr/>
         </p:nvSpPr>
@@ -14161,20 +12937,20 @@
         </p:nvSpPr>
         <p:spPr>
           <a:xfrm>
-            <a:off x="7818120" y="3977640"/>
-            <a:ext cx="972312" cy="749808"/>
+            <a:off x="8046720" y="3794760"/>
+            <a:ext cx="3063240" cy="1600200"/>
           </a:xfrm>
           <a:prstGeom prst="roundRect">
             <a:avLst>
-              <a:gd name="adj" fmla="val 14634"/>
+              <a:gd name="adj" fmla="val 6857"/>
             </a:avLst>
           </a:prstGeom>
           <a:solidFill>
-            <a:srgbClr val="0068B7"/>
+            <a:srgbClr val="FFFFFF"/>
           </a:solidFill>
           <a:ln w="12700">
             <a:solidFill>
-              <a:srgbClr val="0068B7"/>
+              <a:srgbClr val="B9D7E6"/>
             </a:solidFill>
             <a:prstDash val="solid"/>
           </a:ln>
@@ -14188,172 +12964,100 @@
         </p:nvSpPr>
         <p:spPr>
           <a:xfrm>
-            <a:off x="7891272" y="4169664"/>
-            <a:ext cx="826008" cy="310896"/>
-          </a:xfrm>
-          <a:prstGeom prst="rect">
-            <a:avLst/>
-          </a:prstGeom>
-          <a:noFill/>
-          <a:ln/>
-        </p:spPr>
-        <p:txBody>
-          <a:bodyPr wrap="square" lIns="0" tIns="0" rIns="0" bIns="0" rtlCol="0" anchor="ctr">
+            <a:off x="8211312" y="3941064"/>
+            <a:ext cx="2734056" cy="256032"/>
+          </a:xfrm>
+          <a:prstGeom prst="rect">
+            <a:avLst/>
+          </a:prstGeom>
+          <a:noFill/>
+          <a:ln/>
+        </p:spPr>
+        <p:txBody>
+          <a:bodyPr wrap="square" lIns="0" tIns="0" rIns="0" bIns="0" rtlCol="0" anchor="ctr"/>
+          <a:lstStyle/>
+          <a:p>
+            <a:pPr indent="0" marL="0">
+              <a:buNone/>
+            </a:pPr>
+            <a:r>
+              <a:rPr lang="en-US" sz="1300" b="1" dirty="0">
+                <a:solidFill>
+                  <a:srgbClr val="0068B7"/>
+                </a:solidFill>
+                <a:latin typeface="Aptos" pitchFamily="34" charset="0"/>
+                <a:ea typeface="Aptos" pitchFamily="34" charset="-122"/>
+                <a:cs typeface="Aptos" pitchFamily="34" charset="-120"/>
+              </a:rPr>
+              <a:t>Use the play links to</a:t>
+            </a:r>
+            <a:endParaRPr lang="en-US" sz="1300" dirty="0"/>
+          </a:p>
+        </p:txBody>
+      </p:sp>
+      <p:sp>
+        <p:nvSpPr>
+          <p:cNvPr id="15" name="Text 13"/>
+          <p:cNvSpPr/>
+          <p:nvPr/>
+        </p:nvSpPr>
+        <p:spPr>
+          <a:xfrm>
+            <a:off x="8229600" y="4306824"/>
+            <a:ext cx="2679192" cy="941832"/>
+          </a:xfrm>
+          <a:prstGeom prst="rect">
+            <a:avLst/>
+          </a:prstGeom>
+          <a:noFill/>
+          <a:ln/>
+        </p:spPr>
+        <p:txBody>
+          <a:bodyPr wrap="square" lIns="254" tIns="254" rIns="254" bIns="254" rtlCol="0" anchor="t">
             <a:normAutofit/>
           </a:bodyPr>
           <a:lstStyle/>
           <a:p>
-            <a:pPr algn="ctr" indent="0" marL="0">
-              <a:buNone/>
-            </a:pPr>
-            <a:r>
-              <a:rPr lang="en-US" sz="1500" b="1" dirty="0">
-                <a:solidFill>
-                  <a:srgbClr val="FFFFFF"/>
-                </a:solidFill>
-                <a:latin typeface="Aptos" pitchFamily="34" charset="0"/>
-                <a:ea typeface="Aptos" pitchFamily="34" charset="-122"/>
-                <a:cs typeface="Aptos" pitchFamily="34" charset="-120"/>
-              </a:rPr>
-              <a:t>Lesson</a:t>
-            </a:r>
-            <a:endParaRPr lang="en-US" sz="1500" dirty="0"/>
-          </a:p>
-        </p:txBody>
-      </p:sp>
-      <p:sp>
-        <p:nvSpPr>
-          <p:cNvPr id="15" name="Shape 13"/>
-          <p:cNvSpPr/>
-          <p:nvPr/>
-        </p:nvSpPr>
-        <p:spPr>
-          <a:xfrm>
-            <a:off x="9046464" y="3977640"/>
-            <a:ext cx="972312" cy="749808"/>
-          </a:xfrm>
-          <a:prstGeom prst="roundRect">
-            <a:avLst>
-              <a:gd name="adj" fmla="val 14634"/>
-            </a:avLst>
-          </a:prstGeom>
-          <a:solidFill>
-            <a:srgbClr val="2F8A28"/>
-          </a:solidFill>
-          <a:ln w="12700">
-            <a:solidFill>
-              <a:srgbClr val="2F8A28"/>
-            </a:solidFill>
-            <a:prstDash val="solid"/>
-          </a:ln>
-        </p:spPr>
-      </p:sp>
-      <p:sp>
-        <p:nvSpPr>
-          <p:cNvPr id="16" name="Text 14"/>
-          <p:cNvSpPr/>
-          <p:nvPr/>
-        </p:nvSpPr>
-        <p:spPr>
-          <a:xfrm>
-            <a:off x="9119616" y="4169664"/>
-            <a:ext cx="826008" cy="310896"/>
-          </a:xfrm>
-          <a:prstGeom prst="rect">
-            <a:avLst/>
-          </a:prstGeom>
-          <a:noFill/>
-          <a:ln/>
-        </p:spPr>
-        <p:txBody>
-          <a:bodyPr wrap="square" lIns="0" tIns="0" rIns="0" bIns="0" rtlCol="0" anchor="ctr">
-            <a:normAutofit/>
-          </a:bodyPr>
-          <a:lstStyle/>
-          <a:p>
-            <a:pPr algn="ctr" indent="0" marL="0">
-              <a:buNone/>
-            </a:pPr>
-            <a:r>
-              <a:rPr lang="en-US" sz="1500" b="1" dirty="0">
-                <a:solidFill>
-                  <a:srgbClr val="FFFFFF"/>
-                </a:solidFill>
-                <a:latin typeface="Aptos" pitchFamily="34" charset="0"/>
-                <a:ea typeface="Aptos" pitchFamily="34" charset="-122"/>
-                <a:cs typeface="Aptos" pitchFamily="34" charset="-120"/>
-              </a:rPr>
-              <a:t>Plays</a:t>
-            </a:r>
-            <a:endParaRPr lang="en-US" sz="1500" dirty="0"/>
-          </a:p>
-        </p:txBody>
-      </p:sp>
-      <p:sp>
-        <p:nvSpPr>
-          <p:cNvPr id="17" name="Shape 15"/>
-          <p:cNvSpPr/>
-          <p:nvPr/>
-        </p:nvSpPr>
-        <p:spPr>
-          <a:xfrm>
-            <a:off x="10274808" y="3977640"/>
-            <a:ext cx="972312" cy="749808"/>
-          </a:xfrm>
-          <a:prstGeom prst="roundRect">
-            <a:avLst>
-              <a:gd name="adj" fmla="val 14634"/>
-            </a:avLst>
-          </a:prstGeom>
-          <a:solidFill>
-            <a:srgbClr val="6A4CA3"/>
-          </a:solidFill>
-          <a:ln w="12700">
-            <a:solidFill>
-              <a:srgbClr val="6A4CA3"/>
-            </a:solidFill>
-            <a:prstDash val="solid"/>
-          </a:ln>
-        </p:spPr>
-      </p:sp>
-      <p:sp>
-        <p:nvSpPr>
-          <p:cNvPr id="18" name="Text 16"/>
-          <p:cNvSpPr/>
-          <p:nvPr/>
-        </p:nvSpPr>
-        <p:spPr>
-          <a:xfrm>
-            <a:off x="10347960" y="4169664"/>
-            <a:ext cx="826008" cy="310896"/>
-          </a:xfrm>
-          <a:prstGeom prst="rect">
-            <a:avLst/>
-          </a:prstGeom>
-          <a:noFill/>
-          <a:ln/>
-        </p:spPr>
-        <p:txBody>
-          <a:bodyPr wrap="square" lIns="0" tIns="0" rIns="0" bIns="0" rtlCol="0" anchor="ctr">
-            <a:normAutofit/>
-          </a:bodyPr>
-          <a:lstStyle/>
-          <a:p>
-            <a:pPr algn="ctr" indent="0" marL="0">
-              <a:buNone/>
-            </a:pPr>
-            <a:r>
-              <a:rPr lang="en-US" sz="1500" b="1" dirty="0">
-                <a:solidFill>
-                  <a:srgbClr val="FFFFFF"/>
-                </a:solidFill>
-                <a:latin typeface="Aptos" pitchFamily="34" charset="0"/>
-                <a:ea typeface="Aptos" pitchFamily="34" charset="-122"/>
-                <a:cs typeface="Aptos" pitchFamily="34" charset="-120"/>
-              </a:rPr>
-              <a:t>Action</a:t>
-            </a:r>
-            <a:endParaRPr lang="en-US" sz="1500" dirty="0"/>
+            <a:r>
+              <a:rPr lang="en-US" sz="1380" dirty="0">
+                <a:solidFill>
+                  <a:srgbClr val="17364A"/>
+                </a:solidFill>
+                <a:latin typeface="Aptos" pitchFamily="34" charset="0"/>
+                <a:ea typeface="Aptos" pitchFamily="34" charset="-122"/>
+                <a:cs typeface="Aptos" pitchFamily="34" charset="-120"/>
+              </a:rPr>
+              <a:t>Locate the decision point in the playbook sequence.</a:t>
+            </a:r>
+            <a:endParaRPr lang="en-US" sz="1380" dirty="0"/>
+          </a:p>
+          <a:p>
+            <a:r>
+              <a:rPr lang="en-US" sz="1380" dirty="0">
+                <a:solidFill>
+                  <a:srgbClr val="17364A"/>
+                </a:solidFill>
+                <a:latin typeface="Aptos" pitchFamily="34" charset="0"/>
+                <a:ea typeface="Aptos" pitchFamily="34" charset="-122"/>
+                <a:cs typeface="Aptos" pitchFamily="34" charset="-120"/>
+              </a:rPr>
+              <a:t>Identify who should participate in the work.</a:t>
+            </a:r>
+            <a:endParaRPr lang="en-US" sz="1380" dirty="0"/>
+          </a:p>
+          <a:p>
+            <a:r>
+              <a:rPr lang="en-US" sz="1380" dirty="0">
+                <a:solidFill>
+                  <a:srgbClr val="17364A"/>
+                </a:solidFill>
+                <a:latin typeface="Aptos" pitchFamily="34" charset="0"/>
+                <a:ea typeface="Aptos" pitchFamily="34" charset="-122"/>
+                <a:cs typeface="Aptos" pitchFamily="34" charset="-120"/>
+              </a:rPr>
+              <a:t>Document the review, approval, or implementation step.</a:t>
+            </a:r>
+            <a:endParaRPr lang="en-US" sz="1380" dirty="0"/>
           </a:p>
         </p:txBody>
       </p:sp>
@@ -14831,20 +13535,20 @@
         </p:nvSpPr>
         <p:spPr>
           <a:xfrm>
-            <a:off x="7818120" y="3977640"/>
-            <a:ext cx="972312" cy="749808"/>
+            <a:off x="8046720" y="3794760"/>
+            <a:ext cx="3063240" cy="1600200"/>
           </a:xfrm>
           <a:prstGeom prst="roundRect">
             <a:avLst>
-              <a:gd name="adj" fmla="val 14634"/>
+              <a:gd name="adj" fmla="val 6857"/>
             </a:avLst>
           </a:prstGeom>
           <a:solidFill>
-            <a:srgbClr val="0068B7"/>
+            <a:srgbClr val="FFFFFF"/>
           </a:solidFill>
           <a:ln w="12700">
             <a:solidFill>
-              <a:srgbClr val="0068B7"/>
+              <a:srgbClr val="B9D7E6"/>
             </a:solidFill>
             <a:prstDash val="solid"/>
           </a:ln>
@@ -14858,172 +13562,100 @@
         </p:nvSpPr>
         <p:spPr>
           <a:xfrm>
-            <a:off x="7891272" y="4169664"/>
-            <a:ext cx="826008" cy="310896"/>
-          </a:xfrm>
-          <a:prstGeom prst="rect">
-            <a:avLst/>
-          </a:prstGeom>
-          <a:noFill/>
-          <a:ln/>
-        </p:spPr>
-        <p:txBody>
-          <a:bodyPr wrap="square" lIns="0" tIns="0" rIns="0" bIns="0" rtlCol="0" anchor="ctr">
+            <a:off x="8211312" y="3941064"/>
+            <a:ext cx="2734056" cy="256032"/>
+          </a:xfrm>
+          <a:prstGeom prst="rect">
+            <a:avLst/>
+          </a:prstGeom>
+          <a:noFill/>
+          <a:ln/>
+        </p:spPr>
+        <p:txBody>
+          <a:bodyPr wrap="square" lIns="0" tIns="0" rIns="0" bIns="0" rtlCol="0" anchor="ctr"/>
+          <a:lstStyle/>
+          <a:p>
+            <a:pPr indent="0" marL="0">
+              <a:buNone/>
+            </a:pPr>
+            <a:r>
+              <a:rPr lang="en-US" sz="1300" b="1" dirty="0">
+                <a:solidFill>
+                  <a:srgbClr val="0068B7"/>
+                </a:solidFill>
+                <a:latin typeface="Aptos" pitchFamily="34" charset="0"/>
+                <a:ea typeface="Aptos" pitchFamily="34" charset="-122"/>
+                <a:cs typeface="Aptos" pitchFamily="34" charset="-120"/>
+              </a:rPr>
+              <a:t>Tool selection cues</a:t>
+            </a:r>
+            <a:endParaRPr lang="en-US" sz="1300" dirty="0"/>
+          </a:p>
+        </p:txBody>
+      </p:sp>
+      <p:sp>
+        <p:nvSpPr>
+          <p:cNvPr id="15" name="Text 13"/>
+          <p:cNvSpPr/>
+          <p:nvPr/>
+        </p:nvSpPr>
+        <p:spPr>
+          <a:xfrm>
+            <a:off x="8229600" y="4306824"/>
+            <a:ext cx="2679192" cy="941832"/>
+          </a:xfrm>
+          <a:prstGeom prst="rect">
+            <a:avLst/>
+          </a:prstGeom>
+          <a:noFill/>
+          <a:ln/>
+        </p:spPr>
+        <p:txBody>
+          <a:bodyPr wrap="square" lIns="254" tIns="254" rIns="254" bIns="254" rtlCol="0" anchor="t">
             <a:normAutofit/>
           </a:bodyPr>
           <a:lstStyle/>
           <a:p>
-            <a:pPr algn="ctr" indent="0" marL="0">
-              <a:buNone/>
-            </a:pPr>
-            <a:r>
-              <a:rPr lang="en-US" sz="1500" b="1" dirty="0">
-                <a:solidFill>
-                  <a:srgbClr val="FFFFFF"/>
-                </a:solidFill>
-                <a:latin typeface="Aptos" pitchFamily="34" charset="0"/>
-                <a:ea typeface="Aptos" pitchFamily="34" charset="-122"/>
-                <a:cs typeface="Aptos" pitchFamily="34" charset="-120"/>
-              </a:rPr>
-              <a:t>Concept</a:t>
-            </a:r>
-            <a:endParaRPr lang="en-US" sz="1500" dirty="0"/>
-          </a:p>
-        </p:txBody>
-      </p:sp>
-      <p:sp>
-        <p:nvSpPr>
-          <p:cNvPr id="15" name="Shape 13"/>
-          <p:cNvSpPr/>
-          <p:nvPr/>
-        </p:nvSpPr>
-        <p:spPr>
-          <a:xfrm>
-            <a:off x="9046464" y="3977640"/>
-            <a:ext cx="972312" cy="749808"/>
-          </a:xfrm>
-          <a:prstGeom prst="roundRect">
-            <a:avLst>
-              <a:gd name="adj" fmla="val 14634"/>
-            </a:avLst>
-          </a:prstGeom>
-          <a:solidFill>
-            <a:srgbClr val="2F8A28"/>
-          </a:solidFill>
-          <a:ln w="12700">
-            <a:solidFill>
-              <a:srgbClr val="2F8A28"/>
-            </a:solidFill>
-            <a:prstDash val="solid"/>
-          </a:ln>
-        </p:spPr>
-      </p:sp>
-      <p:sp>
-        <p:nvSpPr>
-          <p:cNvPr id="16" name="Text 14"/>
-          <p:cNvSpPr/>
-          <p:nvPr/>
-        </p:nvSpPr>
-        <p:spPr>
-          <a:xfrm>
-            <a:off x="9119616" y="4169664"/>
-            <a:ext cx="826008" cy="310896"/>
-          </a:xfrm>
-          <a:prstGeom prst="rect">
-            <a:avLst/>
-          </a:prstGeom>
-          <a:noFill/>
-          <a:ln/>
-        </p:spPr>
-        <p:txBody>
-          <a:bodyPr wrap="square" lIns="0" tIns="0" rIns="0" bIns="0" rtlCol="0" anchor="ctr">
-            <a:normAutofit/>
-          </a:bodyPr>
-          <a:lstStyle/>
-          <a:p>
-            <a:pPr algn="ctr" indent="0" marL="0">
-              <a:buNone/>
-            </a:pPr>
-            <a:r>
-              <a:rPr lang="en-US" sz="1500" b="1" dirty="0">
-                <a:solidFill>
-                  <a:srgbClr val="FFFFFF"/>
-                </a:solidFill>
-                <a:latin typeface="Aptos" pitchFamily="34" charset="0"/>
-                <a:ea typeface="Aptos" pitchFamily="34" charset="-122"/>
-                <a:cs typeface="Aptos" pitchFamily="34" charset="-120"/>
-              </a:rPr>
-              <a:t>Tool</a:t>
-            </a:r>
-            <a:endParaRPr lang="en-US" sz="1500" dirty="0"/>
-          </a:p>
-        </p:txBody>
-      </p:sp>
-      <p:sp>
-        <p:nvSpPr>
-          <p:cNvPr id="17" name="Shape 15"/>
-          <p:cNvSpPr/>
-          <p:nvPr/>
-        </p:nvSpPr>
-        <p:spPr>
-          <a:xfrm>
-            <a:off x="10274808" y="3977640"/>
-            <a:ext cx="972312" cy="749808"/>
-          </a:xfrm>
-          <a:prstGeom prst="roundRect">
-            <a:avLst>
-              <a:gd name="adj" fmla="val 14634"/>
-            </a:avLst>
-          </a:prstGeom>
-          <a:solidFill>
-            <a:srgbClr val="D69A2D"/>
-          </a:solidFill>
-          <a:ln w="12700">
-            <a:solidFill>
-              <a:srgbClr val="D69A2D"/>
-            </a:solidFill>
-            <a:prstDash val="solid"/>
-          </a:ln>
-        </p:spPr>
-      </p:sp>
-      <p:sp>
-        <p:nvSpPr>
-          <p:cNvPr id="18" name="Text 16"/>
-          <p:cNvSpPr/>
-          <p:nvPr/>
-        </p:nvSpPr>
-        <p:spPr>
-          <a:xfrm>
-            <a:off x="10347960" y="4169664"/>
-            <a:ext cx="826008" cy="310896"/>
-          </a:xfrm>
-          <a:prstGeom prst="rect">
-            <a:avLst/>
-          </a:prstGeom>
-          <a:noFill/>
-          <a:ln/>
-        </p:spPr>
-        <p:txBody>
-          <a:bodyPr wrap="square" lIns="0" tIns="0" rIns="0" bIns="0" rtlCol="0" anchor="ctr">
-            <a:normAutofit/>
-          </a:bodyPr>
-          <a:lstStyle/>
-          <a:p>
-            <a:pPr algn="ctr" indent="0" marL="0">
-              <a:buNone/>
-            </a:pPr>
-            <a:r>
-              <a:rPr lang="en-US" sz="1500" b="1" dirty="0">
-                <a:solidFill>
-                  <a:srgbClr val="FFFFFF"/>
-                </a:solidFill>
-                <a:latin typeface="Aptos" pitchFamily="34" charset="0"/>
-                <a:ea typeface="Aptos" pitchFamily="34" charset="-122"/>
-                <a:cs typeface="Aptos" pitchFamily="34" charset="-120"/>
-              </a:rPr>
-              <a:t>Artifact</a:t>
-            </a:r>
-            <a:endParaRPr lang="en-US" sz="1500" dirty="0"/>
+            <a:r>
+              <a:rPr lang="en-US" sz="1380" dirty="0">
+                <a:solidFill>
+                  <a:srgbClr val="17364A"/>
+                </a:solidFill>
+                <a:latin typeface="Aptos" pitchFamily="34" charset="0"/>
+                <a:ea typeface="Aptos" pitchFamily="34" charset="-122"/>
+                <a:cs typeface="Aptos" pitchFamily="34" charset="-120"/>
+              </a:rPr>
+              <a:t>Use a tool when no comparable local process exists.</a:t>
+            </a:r>
+            <a:endParaRPr lang="en-US" sz="1380" dirty="0"/>
+          </a:p>
+          <a:p>
+            <a:r>
+              <a:rPr lang="en-US" sz="1380" dirty="0">
+                <a:solidFill>
+                  <a:srgbClr val="17364A"/>
+                </a:solidFill>
+                <a:latin typeface="Aptos" pitchFamily="34" charset="0"/>
+                <a:ea typeface="Aptos" pitchFamily="34" charset="-122"/>
+                <a:cs typeface="Aptos" pitchFamily="34" charset="-120"/>
+              </a:rPr>
+              <a:t>Adapt existing department templates when they already fit the purpose.</a:t>
+            </a:r>
+            <a:endParaRPr lang="en-US" sz="1380" dirty="0"/>
+          </a:p>
+          <a:p>
+            <a:r>
+              <a:rPr lang="en-US" sz="1380" dirty="0">
+                <a:solidFill>
+                  <a:srgbClr val="17364A"/>
+                </a:solidFill>
+                <a:latin typeface="Aptos" pitchFamily="34" charset="0"/>
+                <a:ea typeface="Aptos" pitchFamily="34" charset="-122"/>
+                <a:cs typeface="Aptos" pitchFamily="34" charset="-120"/>
+              </a:rPr>
+              <a:t>Save the completed artifact as evidence of the decision.</a:t>
+            </a:r>
+            <a:endParaRPr lang="en-US" sz="1380" dirty="0"/>
           </a:p>
         </p:txBody>
       </p:sp>
@@ -15496,13 +14128,11 @@
             </a:avLst>
           </a:prstGeom>
           <a:solidFill>
-            <a:srgbClr val="FFFFFF">
-              <a:alpha val="88000"/>
-            </a:srgbClr>
+            <a:srgbClr val="FFFFFF"/>
           </a:solidFill>
           <a:ln w="12700">
             <a:solidFill>
-              <a:srgbClr val="D6E8F2"/>
+              <a:srgbClr val="B9D7E6"/>
             </a:solidFill>
             <a:prstDash val="solid"/>
           </a:ln>
@@ -15510,190 +14140,98 @@
       </p:sp>
       <p:sp>
         <p:nvSpPr>
-          <p:cNvPr id="14" name="Shape 12"/>
-          <p:cNvSpPr/>
-          <p:nvPr/>
-        </p:nvSpPr>
-        <p:spPr>
-          <a:xfrm>
-            <a:off x="7891272" y="3108960"/>
-            <a:ext cx="566928" cy="566928"/>
-          </a:xfrm>
-          <a:prstGeom prst="ellipse">
-            <a:avLst/>
-          </a:prstGeom>
-          <a:solidFill>
-            <a:srgbClr val="0068B7"/>
-          </a:solidFill>
-          <a:ln w="12700">
-            <a:solidFill>
-              <a:srgbClr val="0068B7"/>
-            </a:solidFill>
-            <a:prstDash val="solid"/>
-          </a:ln>
-        </p:spPr>
-      </p:sp>
-      <p:sp>
-        <p:nvSpPr>
-          <p:cNvPr id="15" name="Shape 13"/>
-          <p:cNvSpPr/>
-          <p:nvPr/>
-        </p:nvSpPr>
-        <p:spPr>
-          <a:xfrm>
-            <a:off x="10287000" y="3108960"/>
-            <a:ext cx="566928" cy="566928"/>
-          </a:xfrm>
-          <a:prstGeom prst="ellipse">
-            <a:avLst/>
-          </a:prstGeom>
-          <a:solidFill>
-            <a:srgbClr val="2F8A28"/>
-          </a:solidFill>
-          <a:ln w="12700">
-            <a:solidFill>
-              <a:srgbClr val="2F8A28"/>
-            </a:solidFill>
-            <a:prstDash val="solid"/>
-          </a:ln>
-        </p:spPr>
+          <p:cNvPr id="14" name="Text 12"/>
+          <p:cNvSpPr/>
+          <p:nvPr/>
+        </p:nvSpPr>
+        <p:spPr>
+          <a:xfrm>
+            <a:off x="7799832" y="2935224"/>
+            <a:ext cx="3145536" cy="256032"/>
+          </a:xfrm>
+          <a:prstGeom prst="rect">
+            <a:avLst/>
+          </a:prstGeom>
+          <a:noFill/>
+          <a:ln/>
+        </p:spPr>
+        <p:txBody>
+          <a:bodyPr wrap="square" lIns="0" tIns="0" rIns="0" bIns="0" rtlCol="0" anchor="ctr"/>
+          <a:lstStyle/>
+          <a:p>
+            <a:pPr indent="0" marL="0">
+              <a:buNone/>
+            </a:pPr>
+            <a:r>
+              <a:rPr lang="en-US" sz="1300" b="1" dirty="0">
+                <a:solidFill>
+                  <a:srgbClr val="0068B7"/>
+                </a:solidFill>
+                <a:latin typeface="Aptos" pitchFamily="34" charset="0"/>
+                <a:ea typeface="Aptos" pitchFamily="34" charset="-122"/>
+                <a:cs typeface="Aptos" pitchFamily="34" charset="-120"/>
+              </a:rPr>
+              <a:t>Concept checkpoints</a:t>
+            </a:r>
+            <a:endParaRPr lang="en-US" sz="1300" dirty="0"/>
+          </a:p>
+        </p:txBody>
+      </p:sp>
+      <p:sp>
+        <p:nvSpPr>
+          <p:cNvPr id="15" name="Text 13"/>
+          <p:cNvSpPr/>
+          <p:nvPr/>
+        </p:nvSpPr>
+        <p:spPr>
+          <a:xfrm>
+            <a:off x="7818120" y="3300984"/>
+            <a:ext cx="3090672" cy="877824"/>
+          </a:xfrm>
+          <a:prstGeom prst="rect">
+            <a:avLst/>
+          </a:prstGeom>
+          <a:noFill/>
+          <a:ln/>
+        </p:spPr>
+        <p:txBody>
+          <a:bodyPr wrap="square" lIns="254" tIns="254" rIns="254" bIns="254" rtlCol="0" anchor="t">
+            <a:normAutofit/>
+          </a:bodyPr>
+          <a:lstStyle/>
+          <a:p>
+            <a:r>
+              <a:rPr lang="en-US" sz="1380" dirty="0">
+                <a:solidFill>
+                  <a:srgbClr val="17364A"/>
+                </a:solidFill>
+                <a:latin typeface="Aptos" pitchFamily="34" charset="0"/>
+                <a:ea typeface="Aptos" pitchFamily="34" charset="-122"/>
+                <a:cs typeface="Aptos" pitchFamily="34" charset="-120"/>
+              </a:rPr>
+              <a:t>Recognize equity, privacy, security, legal, operational, and public trust implications.</a:t>
+            </a:r>
+            <a:endParaRPr lang="en-US" sz="1380" dirty="0"/>
+          </a:p>
+          <a:p>
+            <a:r>
+              <a:rPr lang="en-US" sz="1380" dirty="0">
+                <a:solidFill>
+                  <a:srgbClr val="17364A"/>
+                </a:solidFill>
+                <a:latin typeface="Aptos" pitchFamily="34" charset="0"/>
+                <a:ea typeface="Aptos" pitchFamily="34" charset="-122"/>
+                <a:cs typeface="Aptos" pitchFamily="34" charset="-120"/>
+              </a:rPr>
+              <a:t>Produce a practical artifact that supports readiness, governance, implementation,.</a:t>
+            </a:r>
+            <a:endParaRPr lang="en-US" sz="1380" dirty="0"/>
+          </a:p>
+        </p:txBody>
       </p:sp>
       <p:sp>
         <p:nvSpPr>
           <p:cNvPr id="16" name="Shape 14"/>
-          <p:cNvSpPr/>
-          <p:nvPr/>
-        </p:nvSpPr>
-        <p:spPr>
-          <a:xfrm>
-            <a:off x="9089136" y="3456432"/>
-            <a:ext cx="566928" cy="566928"/>
-          </a:xfrm>
-          <a:prstGeom prst="ellipse">
-            <a:avLst/>
-          </a:prstGeom>
-          <a:solidFill>
-            <a:srgbClr val="6A4CA3"/>
-          </a:solidFill>
-          <a:ln w="12700">
-            <a:solidFill>
-              <a:srgbClr val="6A4CA3"/>
-            </a:solidFill>
-            <a:prstDash val="solid"/>
-          </a:ln>
-        </p:spPr>
-      </p:sp>
-      <p:sp>
-        <p:nvSpPr>
-          <p:cNvPr id="17" name="Shape 15"/>
-          <p:cNvSpPr/>
-          <p:nvPr/>
-        </p:nvSpPr>
-        <p:spPr>
-          <a:xfrm>
-            <a:off x="8385048" y="3419856"/>
-            <a:ext cx="1975104" cy="0"/>
-          </a:xfrm>
-          <a:prstGeom prst="line">
-            <a:avLst/>
-          </a:prstGeom>
-          <a:noFill/>
-          <a:ln w="25400">
-            <a:solidFill>
-              <a:srgbClr val="8ABBD8"/>
-            </a:solidFill>
-            <a:prstDash val="solid"/>
-          </a:ln>
-        </p:spPr>
-      </p:sp>
-      <p:sp>
-        <p:nvSpPr>
-          <p:cNvPr id="18" name="Shape 16"/>
-          <p:cNvSpPr/>
-          <p:nvPr/>
-        </p:nvSpPr>
-        <p:spPr>
-          <a:xfrm>
-            <a:off x="8202168" y="3630168"/>
-            <a:ext cx="1170432" cy="118872"/>
-          </a:xfrm>
-          <a:prstGeom prst="line">
-            <a:avLst/>
-          </a:prstGeom>
-          <a:noFill/>
-          <a:ln w="25400">
-            <a:solidFill>
-              <a:srgbClr val="8ABBD8"/>
-            </a:solidFill>
-            <a:prstDash val="solid"/>
-          </a:ln>
-        </p:spPr>
-      </p:sp>
-      <p:sp>
-        <p:nvSpPr>
-          <p:cNvPr id="19" name="Shape 17"/>
-          <p:cNvSpPr/>
-          <p:nvPr/>
-        </p:nvSpPr>
-        <p:spPr>
-          <a:xfrm>
-            <a:off x="10543032" y="3630168"/>
-            <a:ext cx="-1170432" cy="118872"/>
-          </a:xfrm>
-          <a:prstGeom prst="line">
-            <a:avLst/>
-          </a:prstGeom>
-          <a:noFill/>
-          <a:ln w="25400">
-            <a:solidFill>
-              <a:srgbClr val="8ABBD8"/>
-            </a:solidFill>
-            <a:prstDash val="solid"/>
-          </a:ln>
-        </p:spPr>
-      </p:sp>
-      <p:sp>
-        <p:nvSpPr>
-          <p:cNvPr id="20" name="Text 18"/>
-          <p:cNvSpPr/>
-          <p:nvPr/>
-        </p:nvSpPr>
-        <p:spPr>
-          <a:xfrm>
-            <a:off x="7863840" y="4069080"/>
-            <a:ext cx="3017520" cy="164592"/>
-          </a:xfrm>
-          <a:prstGeom prst="rect">
-            <a:avLst/>
-          </a:prstGeom>
-          <a:noFill/>
-          <a:ln/>
-        </p:spPr>
-        <p:txBody>
-          <a:bodyPr wrap="square" lIns="0" tIns="0" rIns="0" bIns="0" rtlCol="0" anchor="ctr"/>
-          <a:lstStyle/>
-          <a:p>
-            <a:pPr algn="ctr" indent="0" marL="0">
-              <a:buNone/>
-            </a:pPr>
-            <a:r>
-              <a:rPr lang="en-US" sz="900" b="1" dirty="0">
-                <a:solidFill>
-                  <a:srgbClr val="003A63"/>
-                </a:solidFill>
-                <a:latin typeface="Aptos" pitchFamily="34" charset="0"/>
-                <a:ea typeface="Aptos" pitchFamily="34" charset="-122"/>
-                <a:cs typeface="Aptos" pitchFamily="34" charset="-120"/>
-              </a:rPr>
-              <a:t>Decision rights</a:t>
-            </a:r>
-            <a:endParaRPr lang="en-US" sz="900" dirty="0"/>
-          </a:p>
-        </p:txBody>
-      </p:sp>
-      <p:sp>
-        <p:nvSpPr>
-          <p:cNvPr id="21" name="Shape 19"/>
           <p:cNvSpPr/>
           <p:nvPr/>
         </p:nvSpPr>
@@ -15720,7 +14258,7 @@
       </p:sp>
       <p:sp>
         <p:nvSpPr>
-          <p:cNvPr id="22" name="Text 20"/>
+          <p:cNvPr id="17" name="Text 15"/>
           <p:cNvSpPr/>
           <p:nvPr/>
         </p:nvSpPr>
@@ -15759,7 +14297,7 @@
       </p:sp>
       <p:sp>
         <p:nvSpPr>
-          <p:cNvPr id="23" name="Text 21"/>
+          <p:cNvPr id="18" name="Text 16"/>
           <p:cNvSpPr/>
           <p:nvPr/>
         </p:nvSpPr>
@@ -16267,13 +14805,11 @@
             </a:avLst>
           </a:prstGeom>
           <a:solidFill>
-            <a:srgbClr val="FFFFFF">
-              <a:alpha val="88000"/>
-            </a:srgbClr>
+            <a:srgbClr val="FFFFFF"/>
           </a:solidFill>
           <a:ln w="12700">
             <a:solidFill>
-              <a:srgbClr val="D6E8F2"/>
+              <a:srgbClr val="B9D7E6"/>
             </a:solidFill>
             <a:prstDash val="solid"/>
           </a:ln>
@@ -16281,190 +14817,112 @@
       </p:sp>
       <p:sp>
         <p:nvSpPr>
-          <p:cNvPr id="14" name="Shape 12"/>
-          <p:cNvSpPr/>
-          <p:nvPr/>
-        </p:nvSpPr>
-        <p:spPr>
-          <a:xfrm>
-            <a:off x="7891272" y="3108960"/>
-            <a:ext cx="566928" cy="566928"/>
-          </a:xfrm>
-          <a:prstGeom prst="ellipse">
-            <a:avLst/>
-          </a:prstGeom>
-          <a:solidFill>
-            <a:srgbClr val="0068B7"/>
-          </a:solidFill>
-          <a:ln w="12700">
-            <a:solidFill>
-              <a:srgbClr val="0068B7"/>
-            </a:solidFill>
-            <a:prstDash val="solid"/>
-          </a:ln>
-        </p:spPr>
-      </p:sp>
-      <p:sp>
-        <p:nvSpPr>
-          <p:cNvPr id="15" name="Shape 13"/>
-          <p:cNvSpPr/>
-          <p:nvPr/>
-        </p:nvSpPr>
-        <p:spPr>
-          <a:xfrm>
-            <a:off x="10287000" y="3108960"/>
-            <a:ext cx="566928" cy="566928"/>
-          </a:xfrm>
-          <a:prstGeom prst="ellipse">
-            <a:avLst/>
-          </a:prstGeom>
-          <a:solidFill>
-            <a:srgbClr val="2F8A28"/>
-          </a:solidFill>
-          <a:ln w="12700">
-            <a:solidFill>
-              <a:srgbClr val="2F8A28"/>
-            </a:solidFill>
-            <a:prstDash val="solid"/>
-          </a:ln>
-        </p:spPr>
+          <p:cNvPr id="14" name="Text 12"/>
+          <p:cNvSpPr/>
+          <p:nvPr/>
+        </p:nvSpPr>
+        <p:spPr>
+          <a:xfrm>
+            <a:off x="7799832" y="2935224"/>
+            <a:ext cx="3145536" cy="256032"/>
+          </a:xfrm>
+          <a:prstGeom prst="rect">
+            <a:avLst/>
+          </a:prstGeom>
+          <a:noFill/>
+          <a:ln/>
+        </p:spPr>
+        <p:txBody>
+          <a:bodyPr wrap="square" lIns="0" tIns="0" rIns="0" bIns="0" rtlCol="0" anchor="ctr"/>
+          <a:lstStyle/>
+          <a:p>
+            <a:pPr indent="0" marL="0">
+              <a:buNone/>
+            </a:pPr>
+            <a:r>
+              <a:rPr lang="en-US" sz="1300" b="1" dirty="0">
+                <a:solidFill>
+                  <a:srgbClr val="0068B7"/>
+                </a:solidFill>
+                <a:latin typeface="Aptos" pitchFamily="34" charset="0"/>
+                <a:ea typeface="Aptos" pitchFamily="34" charset="-122"/>
+                <a:cs typeface="Aptos" pitchFamily="34" charset="-120"/>
+              </a:rPr>
+              <a:t>Concept checkpoints</a:t>
+            </a:r>
+            <a:endParaRPr lang="en-US" sz="1300" dirty="0"/>
+          </a:p>
+        </p:txBody>
+      </p:sp>
+      <p:sp>
+        <p:nvSpPr>
+          <p:cNvPr id="15" name="Text 13"/>
+          <p:cNvSpPr/>
+          <p:nvPr/>
+        </p:nvSpPr>
+        <p:spPr>
+          <a:xfrm>
+            <a:off x="7818120" y="3300984"/>
+            <a:ext cx="3090672" cy="877824"/>
+          </a:xfrm>
+          <a:prstGeom prst="rect">
+            <a:avLst/>
+          </a:prstGeom>
+          <a:noFill/>
+          <a:ln/>
+        </p:spPr>
+        <p:txBody>
+          <a:bodyPr wrap="square" lIns="254" tIns="254" rIns="254" bIns="254" rtlCol="0" anchor="t">
+            <a:normAutofit/>
+          </a:bodyPr>
+          <a:lstStyle/>
+          <a:p>
+            <a:r>
+              <a:rPr lang="en-US" sz="1380" dirty="0">
+                <a:solidFill>
+                  <a:srgbClr val="17364A"/>
+                </a:solidFill>
+                <a:latin typeface="Aptos" pitchFamily="34" charset="0"/>
+                <a:ea typeface="Aptos" pitchFamily="34" charset="-122"/>
+                <a:cs typeface="Aptos" pitchFamily="34" charset="-120"/>
+              </a:rPr>
+              <a:t>It is designed for public health staff who must translate responsible AI principles into.</a:t>
+            </a:r>
+            <a:endParaRPr lang="en-US" sz="1380" dirty="0"/>
+          </a:p>
+          <a:p>
+            <a:r>
+              <a:rPr lang="en-US" sz="1380" dirty="0">
+                <a:solidFill>
+                  <a:srgbClr val="17364A"/>
+                </a:solidFill>
+                <a:latin typeface="Aptos" pitchFamily="34" charset="0"/>
+                <a:ea typeface="Aptos" pitchFamily="34" charset="-122"/>
+                <a:cs typeface="Aptos" pitchFamily="34" charset="-120"/>
+              </a:rPr>
+              <a:t>The module helps learners move beyond general awareness by producing a practical artifact.</a:t>
+            </a:r>
+            <a:endParaRPr lang="en-US" sz="1380" dirty="0"/>
+          </a:p>
+          <a:p>
+            <a:r>
+              <a:rPr lang="en-US" sz="1380" dirty="0">
+                <a:solidFill>
+                  <a:srgbClr val="17364A"/>
+                </a:solidFill>
+                <a:latin typeface="Aptos" pitchFamily="34" charset="0"/>
+                <a:ea typeface="Aptos" pitchFamily="34" charset="-122"/>
+                <a:cs typeface="Aptos" pitchFamily="34" charset="-120"/>
+              </a:rPr>
+              <a:t>It emphasizes paragraph-based reasoning, defined responsibilities, and documentation that.</a:t>
+            </a:r>
+            <a:endParaRPr lang="en-US" sz="1380" dirty="0"/>
+          </a:p>
+        </p:txBody>
       </p:sp>
       <p:sp>
         <p:nvSpPr>
           <p:cNvPr id="16" name="Shape 14"/>
-          <p:cNvSpPr/>
-          <p:nvPr/>
-        </p:nvSpPr>
-        <p:spPr>
-          <a:xfrm>
-            <a:off x="9089136" y="3456432"/>
-            <a:ext cx="566928" cy="566928"/>
-          </a:xfrm>
-          <a:prstGeom prst="ellipse">
-            <a:avLst/>
-          </a:prstGeom>
-          <a:solidFill>
-            <a:srgbClr val="6A4CA3"/>
-          </a:solidFill>
-          <a:ln w="12700">
-            <a:solidFill>
-              <a:srgbClr val="6A4CA3"/>
-            </a:solidFill>
-            <a:prstDash val="solid"/>
-          </a:ln>
-        </p:spPr>
-      </p:sp>
-      <p:sp>
-        <p:nvSpPr>
-          <p:cNvPr id="17" name="Shape 15"/>
-          <p:cNvSpPr/>
-          <p:nvPr/>
-        </p:nvSpPr>
-        <p:spPr>
-          <a:xfrm>
-            <a:off x="8385048" y="3419856"/>
-            <a:ext cx="1975104" cy="0"/>
-          </a:xfrm>
-          <a:prstGeom prst="line">
-            <a:avLst/>
-          </a:prstGeom>
-          <a:noFill/>
-          <a:ln w="25400">
-            <a:solidFill>
-              <a:srgbClr val="8ABBD8"/>
-            </a:solidFill>
-            <a:prstDash val="solid"/>
-          </a:ln>
-        </p:spPr>
-      </p:sp>
-      <p:sp>
-        <p:nvSpPr>
-          <p:cNvPr id="18" name="Shape 16"/>
-          <p:cNvSpPr/>
-          <p:nvPr/>
-        </p:nvSpPr>
-        <p:spPr>
-          <a:xfrm>
-            <a:off x="8202168" y="3630168"/>
-            <a:ext cx="1170432" cy="118872"/>
-          </a:xfrm>
-          <a:prstGeom prst="line">
-            <a:avLst/>
-          </a:prstGeom>
-          <a:noFill/>
-          <a:ln w="25400">
-            <a:solidFill>
-              <a:srgbClr val="8ABBD8"/>
-            </a:solidFill>
-            <a:prstDash val="solid"/>
-          </a:ln>
-        </p:spPr>
-      </p:sp>
-      <p:sp>
-        <p:nvSpPr>
-          <p:cNvPr id="19" name="Shape 17"/>
-          <p:cNvSpPr/>
-          <p:nvPr/>
-        </p:nvSpPr>
-        <p:spPr>
-          <a:xfrm>
-            <a:off x="10543032" y="3630168"/>
-            <a:ext cx="-1170432" cy="118872"/>
-          </a:xfrm>
-          <a:prstGeom prst="line">
-            <a:avLst/>
-          </a:prstGeom>
-          <a:noFill/>
-          <a:ln w="25400">
-            <a:solidFill>
-              <a:srgbClr val="8ABBD8"/>
-            </a:solidFill>
-            <a:prstDash val="solid"/>
-          </a:ln>
-        </p:spPr>
-      </p:sp>
-      <p:sp>
-        <p:nvSpPr>
-          <p:cNvPr id="20" name="Text 18"/>
-          <p:cNvSpPr/>
-          <p:nvPr/>
-        </p:nvSpPr>
-        <p:spPr>
-          <a:xfrm>
-            <a:off x="7863840" y="4069080"/>
-            <a:ext cx="3017520" cy="164592"/>
-          </a:xfrm>
-          <a:prstGeom prst="rect">
-            <a:avLst/>
-          </a:prstGeom>
-          <a:noFill/>
-          <a:ln/>
-        </p:spPr>
-        <p:txBody>
-          <a:bodyPr wrap="square" lIns="0" tIns="0" rIns="0" bIns="0" rtlCol="0" anchor="ctr"/>
-          <a:lstStyle/>
-          <a:p>
-            <a:pPr algn="ctr" indent="0" marL="0">
-              <a:buNone/>
-            </a:pPr>
-            <a:r>
-              <a:rPr lang="en-US" sz="900" b="1" dirty="0">
-                <a:solidFill>
-                  <a:srgbClr val="003A63"/>
-                </a:solidFill>
-                <a:latin typeface="Aptos" pitchFamily="34" charset="0"/>
-                <a:ea typeface="Aptos" pitchFamily="34" charset="-122"/>
-                <a:cs typeface="Aptos" pitchFamily="34" charset="-120"/>
-              </a:rPr>
-              <a:t>Decision rights</a:t>
-            </a:r>
-            <a:endParaRPr lang="en-US" sz="900" dirty="0"/>
-          </a:p>
-        </p:txBody>
-      </p:sp>
-      <p:sp>
-        <p:nvSpPr>
-          <p:cNvPr id="21" name="Shape 19"/>
           <p:cNvSpPr/>
           <p:nvPr/>
         </p:nvSpPr>
@@ -16491,7 +14949,7 @@
       </p:sp>
       <p:sp>
         <p:nvSpPr>
-          <p:cNvPr id="22" name="Text 20"/>
+          <p:cNvPr id="17" name="Text 15"/>
           <p:cNvSpPr/>
           <p:nvPr/>
         </p:nvSpPr>
@@ -16530,7 +14988,7 @@
       </p:sp>
       <p:sp>
         <p:nvSpPr>
-          <p:cNvPr id="23" name="Text 21"/>
+          <p:cNvPr id="18" name="Text 16"/>
           <p:cNvSpPr/>
           <p:nvPr/>
         </p:nvSpPr>
@@ -17038,13 +15496,11 @@
             </a:avLst>
           </a:prstGeom>
           <a:solidFill>
-            <a:srgbClr val="FFFFFF">
-              <a:alpha val="88000"/>
-            </a:srgbClr>
+            <a:srgbClr val="FFFFFF"/>
           </a:solidFill>
           <a:ln w="12700">
             <a:solidFill>
-              <a:srgbClr val="D6E8F2"/>
+              <a:srgbClr val="B9D7E6"/>
             </a:solidFill>
             <a:prstDash val="solid"/>
           </a:ln>
@@ -17052,190 +15508,112 @@
       </p:sp>
       <p:sp>
         <p:nvSpPr>
-          <p:cNvPr id="14" name="Shape 12"/>
-          <p:cNvSpPr/>
-          <p:nvPr/>
-        </p:nvSpPr>
-        <p:spPr>
-          <a:xfrm>
-            <a:off x="7891272" y="3108960"/>
-            <a:ext cx="566928" cy="566928"/>
-          </a:xfrm>
-          <a:prstGeom prst="ellipse">
-            <a:avLst/>
-          </a:prstGeom>
-          <a:solidFill>
-            <a:srgbClr val="0068B7"/>
-          </a:solidFill>
-          <a:ln w="12700">
-            <a:solidFill>
-              <a:srgbClr val="0068B7"/>
-            </a:solidFill>
-            <a:prstDash val="solid"/>
-          </a:ln>
-        </p:spPr>
-      </p:sp>
-      <p:sp>
-        <p:nvSpPr>
-          <p:cNvPr id="15" name="Shape 13"/>
-          <p:cNvSpPr/>
-          <p:nvPr/>
-        </p:nvSpPr>
-        <p:spPr>
-          <a:xfrm>
-            <a:off x="10287000" y="3108960"/>
-            <a:ext cx="566928" cy="566928"/>
-          </a:xfrm>
-          <a:prstGeom prst="ellipse">
-            <a:avLst/>
-          </a:prstGeom>
-          <a:solidFill>
-            <a:srgbClr val="2F8A28"/>
-          </a:solidFill>
-          <a:ln w="12700">
-            <a:solidFill>
-              <a:srgbClr val="2F8A28"/>
-            </a:solidFill>
-            <a:prstDash val="solid"/>
-          </a:ln>
-        </p:spPr>
+          <p:cNvPr id="14" name="Text 12"/>
+          <p:cNvSpPr/>
+          <p:nvPr/>
+        </p:nvSpPr>
+        <p:spPr>
+          <a:xfrm>
+            <a:off x="7799832" y="2935224"/>
+            <a:ext cx="3145536" cy="256032"/>
+          </a:xfrm>
+          <a:prstGeom prst="rect">
+            <a:avLst/>
+          </a:prstGeom>
+          <a:noFill/>
+          <a:ln/>
+        </p:spPr>
+        <p:txBody>
+          <a:bodyPr wrap="square" lIns="0" tIns="0" rIns="0" bIns="0" rtlCol="0" anchor="ctr"/>
+          <a:lstStyle/>
+          <a:p>
+            <a:pPr indent="0" marL="0">
+              <a:buNone/>
+            </a:pPr>
+            <a:r>
+              <a:rPr lang="en-US" sz="1300" b="1" dirty="0">
+                <a:solidFill>
+                  <a:srgbClr val="0068B7"/>
+                </a:solidFill>
+                <a:latin typeface="Aptos" pitchFamily="34" charset="0"/>
+                <a:ea typeface="Aptos" pitchFamily="34" charset="-122"/>
+                <a:cs typeface="Aptos" pitchFamily="34" charset="-120"/>
+              </a:rPr>
+              <a:t>Concept checkpoints</a:t>
+            </a:r>
+            <a:endParaRPr lang="en-US" sz="1300" dirty="0"/>
+          </a:p>
+        </p:txBody>
+      </p:sp>
+      <p:sp>
+        <p:nvSpPr>
+          <p:cNvPr id="15" name="Text 13"/>
+          <p:cNvSpPr/>
+          <p:nvPr/>
+        </p:nvSpPr>
+        <p:spPr>
+          <a:xfrm>
+            <a:off x="7818120" y="3300984"/>
+            <a:ext cx="3090672" cy="877824"/>
+          </a:xfrm>
+          <a:prstGeom prst="rect">
+            <a:avLst/>
+          </a:prstGeom>
+          <a:noFill/>
+          <a:ln/>
+        </p:spPr>
+        <p:txBody>
+          <a:bodyPr wrap="square" lIns="254" tIns="254" rIns="254" bIns="254" rtlCol="0" anchor="t">
+            <a:normAutofit/>
+          </a:bodyPr>
+          <a:lstStyle/>
+          <a:p>
+            <a:r>
+              <a:rPr lang="en-US" sz="1380" dirty="0">
+                <a:solidFill>
+                  <a:srgbClr val="17364A"/>
+                </a:solidFill>
+                <a:latin typeface="Aptos" pitchFamily="34" charset="0"/>
+                <a:ea typeface="Aptos" pitchFamily="34" charset="-122"/>
+                <a:cs typeface="Aptos" pitchFamily="34" charset="-120"/>
+              </a:rPr>
+              <a:t>Decision right: The authority to approve, deny, modify, pause, or escalate an AI use case.</a:t>
+            </a:r>
+            <a:endParaRPr lang="en-US" sz="1380" dirty="0"/>
+          </a:p>
+          <a:p>
+            <a:r>
+              <a:rPr lang="en-US" sz="1380" dirty="0">
+                <a:solidFill>
+                  <a:srgbClr val="17364A"/>
+                </a:solidFill>
+                <a:latin typeface="Aptos" pitchFamily="34" charset="0"/>
+                <a:ea typeface="Aptos" pitchFamily="34" charset="-122"/>
+                <a:cs typeface="Aptos" pitchFamily="34" charset="-120"/>
+              </a:rPr>
+              <a:t>Evidence artifact: A document, log, checklist, test result, approval record, or review.</a:t>
+            </a:r>
+            <a:endParaRPr lang="en-US" sz="1380" dirty="0"/>
+          </a:p>
+          <a:p>
+            <a:r>
+              <a:rPr lang="en-US" sz="1380" dirty="0">
+                <a:solidFill>
+                  <a:srgbClr val="17364A"/>
+                </a:solidFill>
+                <a:latin typeface="Aptos" pitchFamily="34" charset="0"/>
+                <a:ea typeface="Aptos" pitchFamily="34" charset="-122"/>
+                <a:cs typeface="Aptos" pitchFamily="34" charset="-120"/>
+              </a:rPr>
+              <a:t>Accountability owner: The person or role responsible for ensuring that an AI use case is.</a:t>
+            </a:r>
+            <a:endParaRPr lang="en-US" sz="1380" dirty="0"/>
+          </a:p>
+        </p:txBody>
       </p:sp>
       <p:sp>
         <p:nvSpPr>
           <p:cNvPr id="16" name="Shape 14"/>
-          <p:cNvSpPr/>
-          <p:nvPr/>
-        </p:nvSpPr>
-        <p:spPr>
-          <a:xfrm>
-            <a:off x="9089136" y="3456432"/>
-            <a:ext cx="566928" cy="566928"/>
-          </a:xfrm>
-          <a:prstGeom prst="ellipse">
-            <a:avLst/>
-          </a:prstGeom>
-          <a:solidFill>
-            <a:srgbClr val="6A4CA3"/>
-          </a:solidFill>
-          <a:ln w="12700">
-            <a:solidFill>
-              <a:srgbClr val="6A4CA3"/>
-            </a:solidFill>
-            <a:prstDash val="solid"/>
-          </a:ln>
-        </p:spPr>
-      </p:sp>
-      <p:sp>
-        <p:nvSpPr>
-          <p:cNvPr id="17" name="Shape 15"/>
-          <p:cNvSpPr/>
-          <p:nvPr/>
-        </p:nvSpPr>
-        <p:spPr>
-          <a:xfrm>
-            <a:off x="8385048" y="3419856"/>
-            <a:ext cx="1975104" cy="0"/>
-          </a:xfrm>
-          <a:prstGeom prst="line">
-            <a:avLst/>
-          </a:prstGeom>
-          <a:noFill/>
-          <a:ln w="25400">
-            <a:solidFill>
-              <a:srgbClr val="8ABBD8"/>
-            </a:solidFill>
-            <a:prstDash val="solid"/>
-          </a:ln>
-        </p:spPr>
-      </p:sp>
-      <p:sp>
-        <p:nvSpPr>
-          <p:cNvPr id="18" name="Shape 16"/>
-          <p:cNvSpPr/>
-          <p:nvPr/>
-        </p:nvSpPr>
-        <p:spPr>
-          <a:xfrm>
-            <a:off x="8202168" y="3630168"/>
-            <a:ext cx="1170432" cy="118872"/>
-          </a:xfrm>
-          <a:prstGeom prst="line">
-            <a:avLst/>
-          </a:prstGeom>
-          <a:noFill/>
-          <a:ln w="25400">
-            <a:solidFill>
-              <a:srgbClr val="8ABBD8"/>
-            </a:solidFill>
-            <a:prstDash val="solid"/>
-          </a:ln>
-        </p:spPr>
-      </p:sp>
-      <p:sp>
-        <p:nvSpPr>
-          <p:cNvPr id="19" name="Shape 17"/>
-          <p:cNvSpPr/>
-          <p:nvPr/>
-        </p:nvSpPr>
-        <p:spPr>
-          <a:xfrm>
-            <a:off x="10543032" y="3630168"/>
-            <a:ext cx="-1170432" cy="118872"/>
-          </a:xfrm>
-          <a:prstGeom prst="line">
-            <a:avLst/>
-          </a:prstGeom>
-          <a:noFill/>
-          <a:ln w="25400">
-            <a:solidFill>
-              <a:srgbClr val="8ABBD8"/>
-            </a:solidFill>
-            <a:prstDash val="solid"/>
-          </a:ln>
-        </p:spPr>
-      </p:sp>
-      <p:sp>
-        <p:nvSpPr>
-          <p:cNvPr id="20" name="Text 18"/>
-          <p:cNvSpPr/>
-          <p:nvPr/>
-        </p:nvSpPr>
-        <p:spPr>
-          <a:xfrm>
-            <a:off x="7863840" y="4069080"/>
-            <a:ext cx="3017520" cy="164592"/>
-          </a:xfrm>
-          <a:prstGeom prst="rect">
-            <a:avLst/>
-          </a:prstGeom>
-          <a:noFill/>
-          <a:ln/>
-        </p:spPr>
-        <p:txBody>
-          <a:bodyPr wrap="square" lIns="0" tIns="0" rIns="0" bIns="0" rtlCol="0" anchor="ctr"/>
-          <a:lstStyle/>
-          <a:p>
-            <a:pPr algn="ctr" indent="0" marL="0">
-              <a:buNone/>
-            </a:pPr>
-            <a:r>
-              <a:rPr lang="en-US" sz="900" b="1" dirty="0">
-                <a:solidFill>
-                  <a:srgbClr val="003A63"/>
-                </a:solidFill>
-                <a:latin typeface="Aptos" pitchFamily="34" charset="0"/>
-                <a:ea typeface="Aptos" pitchFamily="34" charset="-122"/>
-                <a:cs typeface="Aptos" pitchFamily="34" charset="-120"/>
-              </a:rPr>
-              <a:t>Decision rights</a:t>
-            </a:r>
-            <a:endParaRPr lang="en-US" sz="900" dirty="0"/>
-          </a:p>
-        </p:txBody>
-      </p:sp>
-      <p:sp>
-        <p:nvSpPr>
-          <p:cNvPr id="21" name="Shape 19"/>
           <p:cNvSpPr/>
           <p:nvPr/>
         </p:nvSpPr>
@@ -17262,7 +15640,7 @@
       </p:sp>
       <p:sp>
         <p:nvSpPr>
-          <p:cNvPr id="22" name="Text 20"/>
+          <p:cNvPr id="17" name="Text 15"/>
           <p:cNvSpPr/>
           <p:nvPr/>
         </p:nvSpPr>
@@ -17301,7 +15679,7 @@
       </p:sp>
       <p:sp>
         <p:nvSpPr>
-          <p:cNvPr id="23" name="Text 21"/>
+          <p:cNvPr id="18" name="Text 16"/>
           <p:cNvSpPr/>
           <p:nvPr/>
         </p:nvSpPr>
@@ -17809,13 +16187,11 @@
             </a:avLst>
           </a:prstGeom>
           <a:solidFill>
-            <a:srgbClr val="FFFFFF">
-              <a:alpha val="88000"/>
-            </a:srgbClr>
+            <a:srgbClr val="FFFFFF"/>
           </a:solidFill>
           <a:ln w="12700">
             <a:solidFill>
-              <a:srgbClr val="D6E8F2"/>
+              <a:srgbClr val="B9D7E6"/>
             </a:solidFill>
             <a:prstDash val="solid"/>
           </a:ln>
@@ -17823,190 +16199,112 @@
       </p:sp>
       <p:sp>
         <p:nvSpPr>
-          <p:cNvPr id="14" name="Shape 12"/>
-          <p:cNvSpPr/>
-          <p:nvPr/>
-        </p:nvSpPr>
-        <p:spPr>
-          <a:xfrm>
-            <a:off x="7891272" y="3108960"/>
-            <a:ext cx="566928" cy="566928"/>
-          </a:xfrm>
-          <a:prstGeom prst="ellipse">
-            <a:avLst/>
-          </a:prstGeom>
-          <a:solidFill>
-            <a:srgbClr val="0068B7"/>
-          </a:solidFill>
-          <a:ln w="12700">
-            <a:solidFill>
-              <a:srgbClr val="0068B7"/>
-            </a:solidFill>
-            <a:prstDash val="solid"/>
-          </a:ln>
-        </p:spPr>
-      </p:sp>
-      <p:sp>
-        <p:nvSpPr>
-          <p:cNvPr id="15" name="Shape 13"/>
-          <p:cNvSpPr/>
-          <p:nvPr/>
-        </p:nvSpPr>
-        <p:spPr>
-          <a:xfrm>
-            <a:off x="10287000" y="3108960"/>
-            <a:ext cx="566928" cy="566928"/>
-          </a:xfrm>
-          <a:prstGeom prst="ellipse">
-            <a:avLst/>
-          </a:prstGeom>
-          <a:solidFill>
-            <a:srgbClr val="2F8A28"/>
-          </a:solidFill>
-          <a:ln w="12700">
-            <a:solidFill>
-              <a:srgbClr val="2F8A28"/>
-            </a:solidFill>
-            <a:prstDash val="solid"/>
-          </a:ln>
-        </p:spPr>
+          <p:cNvPr id="14" name="Text 12"/>
+          <p:cNvSpPr/>
+          <p:nvPr/>
+        </p:nvSpPr>
+        <p:spPr>
+          <a:xfrm>
+            <a:off x="7799832" y="2935224"/>
+            <a:ext cx="3145536" cy="256032"/>
+          </a:xfrm>
+          <a:prstGeom prst="rect">
+            <a:avLst/>
+          </a:prstGeom>
+          <a:noFill/>
+          <a:ln/>
+        </p:spPr>
+        <p:txBody>
+          <a:bodyPr wrap="square" lIns="0" tIns="0" rIns="0" bIns="0" rtlCol="0" anchor="ctr"/>
+          <a:lstStyle/>
+          <a:p>
+            <a:pPr indent="0" marL="0">
+              <a:buNone/>
+            </a:pPr>
+            <a:r>
+              <a:rPr lang="en-US" sz="1300" b="1" dirty="0">
+                <a:solidFill>
+                  <a:srgbClr val="0068B7"/>
+                </a:solidFill>
+                <a:latin typeface="Aptos" pitchFamily="34" charset="0"/>
+                <a:ea typeface="Aptos" pitchFamily="34" charset="-122"/>
+                <a:cs typeface="Aptos" pitchFamily="34" charset="-120"/>
+              </a:rPr>
+              <a:t>Concept checkpoints</a:t>
+            </a:r>
+            <a:endParaRPr lang="en-US" sz="1300" dirty="0"/>
+          </a:p>
+        </p:txBody>
+      </p:sp>
+      <p:sp>
+        <p:nvSpPr>
+          <p:cNvPr id="15" name="Text 13"/>
+          <p:cNvSpPr/>
+          <p:nvPr/>
+        </p:nvSpPr>
+        <p:spPr>
+          <a:xfrm>
+            <a:off x="7818120" y="3300984"/>
+            <a:ext cx="3090672" cy="877824"/>
+          </a:xfrm>
+          <a:prstGeom prst="rect">
+            <a:avLst/>
+          </a:prstGeom>
+          <a:noFill/>
+          <a:ln/>
+        </p:spPr>
+        <p:txBody>
+          <a:bodyPr wrap="square" lIns="254" tIns="254" rIns="254" bIns="254" rtlCol="0" anchor="t">
+            <a:normAutofit/>
+          </a:bodyPr>
+          <a:lstStyle/>
+          <a:p>
+            <a:r>
+              <a:rPr lang="en-US" sz="1380" dirty="0">
+                <a:solidFill>
+                  <a:srgbClr val="17364A"/>
+                </a:solidFill>
+                <a:latin typeface="Aptos" pitchFamily="34" charset="0"/>
+                <a:ea typeface="Aptos" pitchFamily="34" charset="-122"/>
+                <a:cs typeface="Aptos" pitchFamily="34" charset="-120"/>
+              </a:rPr>
+              <a:t>It is not legal advice and does not replace review by agency legal counsel, privacy.</a:t>
+            </a:r>
+            <a:endParaRPr lang="en-US" sz="1380" dirty="0"/>
+          </a:p>
+          <a:p>
+            <a:r>
+              <a:rPr lang="en-US" sz="1380" dirty="0">
+                <a:solidFill>
+                  <a:srgbClr val="17364A"/>
+                </a:solidFill>
+                <a:latin typeface="Aptos" pitchFamily="34" charset="0"/>
+                <a:ea typeface="Aptos" pitchFamily="34" charset="-122"/>
+                <a:cs typeface="Aptos" pitchFamily="34" charset="-120"/>
+              </a:rPr>
+              <a:t>Requirements may vary by state, locality, territory, Tribe, agency, funding source,.</a:t>
+            </a:r>
+            <a:endParaRPr lang="en-US" sz="1380" dirty="0"/>
+          </a:p>
+          <a:p>
+            <a:r>
+              <a:rPr lang="en-US" sz="1380" dirty="0">
+                <a:solidFill>
+                  <a:srgbClr val="17364A"/>
+                </a:solidFill>
+                <a:latin typeface="Aptos" pitchFamily="34" charset="0"/>
+                <a:ea typeface="Aptos" pitchFamily="34" charset="-122"/>
+                <a:cs typeface="Aptos" pitchFamily="34" charset="-120"/>
+              </a:rPr>
+              <a:t>Learners should use this module to identify the issues that require review and should.</a:t>
+            </a:r>
+            <a:endParaRPr lang="en-US" sz="1380" dirty="0"/>
+          </a:p>
+        </p:txBody>
       </p:sp>
       <p:sp>
         <p:nvSpPr>
           <p:cNvPr id="16" name="Shape 14"/>
-          <p:cNvSpPr/>
-          <p:nvPr/>
-        </p:nvSpPr>
-        <p:spPr>
-          <a:xfrm>
-            <a:off x="9089136" y="3456432"/>
-            <a:ext cx="566928" cy="566928"/>
-          </a:xfrm>
-          <a:prstGeom prst="ellipse">
-            <a:avLst/>
-          </a:prstGeom>
-          <a:solidFill>
-            <a:srgbClr val="6A4CA3"/>
-          </a:solidFill>
-          <a:ln w="12700">
-            <a:solidFill>
-              <a:srgbClr val="6A4CA3"/>
-            </a:solidFill>
-            <a:prstDash val="solid"/>
-          </a:ln>
-        </p:spPr>
-      </p:sp>
-      <p:sp>
-        <p:nvSpPr>
-          <p:cNvPr id="17" name="Shape 15"/>
-          <p:cNvSpPr/>
-          <p:nvPr/>
-        </p:nvSpPr>
-        <p:spPr>
-          <a:xfrm>
-            <a:off x="8385048" y="3419856"/>
-            <a:ext cx="1975104" cy="0"/>
-          </a:xfrm>
-          <a:prstGeom prst="line">
-            <a:avLst/>
-          </a:prstGeom>
-          <a:noFill/>
-          <a:ln w="25400">
-            <a:solidFill>
-              <a:srgbClr val="8ABBD8"/>
-            </a:solidFill>
-            <a:prstDash val="solid"/>
-          </a:ln>
-        </p:spPr>
-      </p:sp>
-      <p:sp>
-        <p:nvSpPr>
-          <p:cNvPr id="18" name="Shape 16"/>
-          <p:cNvSpPr/>
-          <p:nvPr/>
-        </p:nvSpPr>
-        <p:spPr>
-          <a:xfrm>
-            <a:off x="8202168" y="3630168"/>
-            <a:ext cx="1170432" cy="118872"/>
-          </a:xfrm>
-          <a:prstGeom prst="line">
-            <a:avLst/>
-          </a:prstGeom>
-          <a:noFill/>
-          <a:ln w="25400">
-            <a:solidFill>
-              <a:srgbClr val="8ABBD8"/>
-            </a:solidFill>
-            <a:prstDash val="solid"/>
-          </a:ln>
-        </p:spPr>
-      </p:sp>
-      <p:sp>
-        <p:nvSpPr>
-          <p:cNvPr id="19" name="Shape 17"/>
-          <p:cNvSpPr/>
-          <p:nvPr/>
-        </p:nvSpPr>
-        <p:spPr>
-          <a:xfrm>
-            <a:off x="10543032" y="3630168"/>
-            <a:ext cx="-1170432" cy="118872"/>
-          </a:xfrm>
-          <a:prstGeom prst="line">
-            <a:avLst/>
-          </a:prstGeom>
-          <a:noFill/>
-          <a:ln w="25400">
-            <a:solidFill>
-              <a:srgbClr val="8ABBD8"/>
-            </a:solidFill>
-            <a:prstDash val="solid"/>
-          </a:ln>
-        </p:spPr>
-      </p:sp>
-      <p:sp>
-        <p:nvSpPr>
-          <p:cNvPr id="20" name="Text 18"/>
-          <p:cNvSpPr/>
-          <p:nvPr/>
-        </p:nvSpPr>
-        <p:spPr>
-          <a:xfrm>
-            <a:off x="7863840" y="4069080"/>
-            <a:ext cx="3017520" cy="164592"/>
-          </a:xfrm>
-          <a:prstGeom prst="rect">
-            <a:avLst/>
-          </a:prstGeom>
-          <a:noFill/>
-          <a:ln/>
-        </p:spPr>
-        <p:txBody>
-          <a:bodyPr wrap="square" lIns="0" tIns="0" rIns="0" bIns="0" rtlCol="0" anchor="ctr"/>
-          <a:lstStyle/>
-          <a:p>
-            <a:pPr algn="ctr" indent="0" marL="0">
-              <a:buNone/>
-            </a:pPr>
-            <a:r>
-              <a:rPr lang="en-US" sz="900" b="1" dirty="0">
-                <a:solidFill>
-                  <a:srgbClr val="003A63"/>
-                </a:solidFill>
-                <a:latin typeface="Aptos" pitchFamily="34" charset="0"/>
-                <a:ea typeface="Aptos" pitchFamily="34" charset="-122"/>
-                <a:cs typeface="Aptos" pitchFamily="34" charset="-120"/>
-              </a:rPr>
-              <a:t>Decision rights</a:t>
-            </a:r>
-            <a:endParaRPr lang="en-US" sz="900" dirty="0"/>
-          </a:p>
-        </p:txBody>
-      </p:sp>
-      <p:sp>
-        <p:nvSpPr>
-          <p:cNvPr id="21" name="Shape 19"/>
           <p:cNvSpPr/>
           <p:nvPr/>
         </p:nvSpPr>
@@ -18033,7 +16331,7 @@
       </p:sp>
       <p:sp>
         <p:nvSpPr>
-          <p:cNvPr id="22" name="Text 20"/>
+          <p:cNvPr id="17" name="Text 15"/>
           <p:cNvSpPr/>
           <p:nvPr/>
         </p:nvSpPr>
@@ -18072,7 +16370,7 @@
       </p:sp>
       <p:sp>
         <p:nvSpPr>
-          <p:cNvPr id="23" name="Text 21"/>
+          <p:cNvPr id="18" name="Text 16"/>
           <p:cNvSpPr/>
           <p:nvPr/>
         </p:nvSpPr>
@@ -18580,13 +16878,11 @@
             </a:avLst>
           </a:prstGeom>
           <a:solidFill>
-            <a:srgbClr val="FFFFFF">
-              <a:alpha val="88000"/>
-            </a:srgbClr>
+            <a:srgbClr val="FFFFFF"/>
           </a:solidFill>
           <a:ln w="12700">
             <a:solidFill>
-              <a:srgbClr val="D6E8F2"/>
+              <a:srgbClr val="B9D7E6"/>
             </a:solidFill>
             <a:prstDash val="solid"/>
           </a:ln>
@@ -18594,190 +16890,112 @@
       </p:sp>
       <p:sp>
         <p:nvSpPr>
-          <p:cNvPr id="14" name="Shape 12"/>
-          <p:cNvSpPr/>
-          <p:nvPr/>
-        </p:nvSpPr>
-        <p:spPr>
-          <a:xfrm>
-            <a:off x="7891272" y="3108960"/>
-            <a:ext cx="566928" cy="566928"/>
-          </a:xfrm>
-          <a:prstGeom prst="ellipse">
-            <a:avLst/>
-          </a:prstGeom>
-          <a:solidFill>
-            <a:srgbClr val="0068B7"/>
-          </a:solidFill>
-          <a:ln w="12700">
-            <a:solidFill>
-              <a:srgbClr val="0068B7"/>
-            </a:solidFill>
-            <a:prstDash val="solid"/>
-          </a:ln>
-        </p:spPr>
-      </p:sp>
-      <p:sp>
-        <p:nvSpPr>
-          <p:cNvPr id="15" name="Shape 13"/>
-          <p:cNvSpPr/>
-          <p:nvPr/>
-        </p:nvSpPr>
-        <p:spPr>
-          <a:xfrm>
-            <a:off x="10287000" y="3108960"/>
-            <a:ext cx="566928" cy="566928"/>
-          </a:xfrm>
-          <a:prstGeom prst="ellipse">
-            <a:avLst/>
-          </a:prstGeom>
-          <a:solidFill>
-            <a:srgbClr val="2F8A28"/>
-          </a:solidFill>
-          <a:ln w="12700">
-            <a:solidFill>
-              <a:srgbClr val="2F8A28"/>
-            </a:solidFill>
-            <a:prstDash val="solid"/>
-          </a:ln>
-        </p:spPr>
+          <p:cNvPr id="14" name="Text 12"/>
+          <p:cNvSpPr/>
+          <p:nvPr/>
+        </p:nvSpPr>
+        <p:spPr>
+          <a:xfrm>
+            <a:off x="7799832" y="2935224"/>
+            <a:ext cx="3145536" cy="256032"/>
+          </a:xfrm>
+          <a:prstGeom prst="rect">
+            <a:avLst/>
+          </a:prstGeom>
+          <a:noFill/>
+          <a:ln/>
+        </p:spPr>
+        <p:txBody>
+          <a:bodyPr wrap="square" lIns="0" tIns="0" rIns="0" bIns="0" rtlCol="0" anchor="ctr"/>
+          <a:lstStyle/>
+          <a:p>
+            <a:pPr indent="0" marL="0">
+              <a:buNone/>
+            </a:pPr>
+            <a:r>
+              <a:rPr lang="en-US" sz="1300" b="1" dirty="0">
+                <a:solidFill>
+                  <a:srgbClr val="0068B7"/>
+                </a:solidFill>
+                <a:latin typeface="Aptos" pitchFamily="34" charset="0"/>
+                <a:ea typeface="Aptos" pitchFamily="34" charset="-122"/>
+                <a:cs typeface="Aptos" pitchFamily="34" charset="-120"/>
+              </a:rPr>
+              <a:t>Concept checkpoints</a:t>
+            </a:r>
+            <a:endParaRPr lang="en-US" sz="1300" dirty="0"/>
+          </a:p>
+        </p:txBody>
+      </p:sp>
+      <p:sp>
+        <p:nvSpPr>
+          <p:cNvPr id="15" name="Text 13"/>
+          <p:cNvSpPr/>
+          <p:nvPr/>
+        </p:nvSpPr>
+        <p:spPr>
+          <a:xfrm>
+            <a:off x="7818120" y="3300984"/>
+            <a:ext cx="3090672" cy="877824"/>
+          </a:xfrm>
+          <a:prstGeom prst="rect">
+            <a:avLst/>
+          </a:prstGeom>
+          <a:noFill/>
+          <a:ln/>
+        </p:spPr>
+        <p:txBody>
+          <a:bodyPr wrap="square" lIns="254" tIns="254" rIns="254" bIns="254" rtlCol="0" anchor="t">
+            <a:normAutofit/>
+          </a:bodyPr>
+          <a:lstStyle/>
+          <a:p>
+            <a:r>
+              <a:rPr lang="en-US" sz="1380" dirty="0">
+                <a:solidFill>
+                  <a:srgbClr val="17364A"/>
+                </a:solidFill>
+                <a:latin typeface="Aptos" pitchFamily="34" charset="0"/>
+                <a:ea typeface="Aptos" pitchFamily="34" charset="-122"/>
+                <a:cs typeface="Aptos" pitchFamily="34" charset="-120"/>
+              </a:rPr>
+              <a:t>AI Policy Development and Approval Workflow matters because AI adoption changes how public.</a:t>
+            </a:r>
+            <a:endParaRPr lang="en-US" sz="1380" dirty="0"/>
+          </a:p>
+          <a:p>
+            <a:r>
+              <a:rPr lang="en-US" sz="1380" dirty="0">
+                <a:solidFill>
+                  <a:srgbClr val="17364A"/>
+                </a:solidFill>
+                <a:latin typeface="Aptos" pitchFamily="34" charset="0"/>
+                <a:ea typeface="Aptos" pitchFamily="34" charset="-122"/>
+                <a:cs typeface="Aptos" pitchFamily="34" charset="-120"/>
+              </a:rPr>
+              <a:t>Without a structured approach, staff may rely on informal practices, vendor assurances, or.</a:t>
+            </a:r>
+            <a:endParaRPr lang="en-US" sz="1380" dirty="0"/>
+          </a:p>
+          <a:p>
+            <a:r>
+              <a:rPr lang="en-US" sz="1380" dirty="0">
+                <a:solidFill>
+                  <a:srgbClr val="17364A"/>
+                </a:solidFill>
+                <a:latin typeface="Aptos" pitchFamily="34" charset="0"/>
+                <a:ea typeface="Aptos" pitchFamily="34" charset="-122"/>
+                <a:cs typeface="Aptos" pitchFamily="34" charset="-120"/>
+              </a:rPr>
+              <a:t>Public health agencies operate under legal authorities, public accountability, resource.</a:t>
+            </a:r>
+            <a:endParaRPr lang="en-US" sz="1380" dirty="0"/>
+          </a:p>
+        </p:txBody>
       </p:sp>
       <p:sp>
         <p:nvSpPr>
           <p:cNvPr id="16" name="Shape 14"/>
-          <p:cNvSpPr/>
-          <p:nvPr/>
-        </p:nvSpPr>
-        <p:spPr>
-          <a:xfrm>
-            <a:off x="9089136" y="3456432"/>
-            <a:ext cx="566928" cy="566928"/>
-          </a:xfrm>
-          <a:prstGeom prst="ellipse">
-            <a:avLst/>
-          </a:prstGeom>
-          <a:solidFill>
-            <a:srgbClr val="6A4CA3"/>
-          </a:solidFill>
-          <a:ln w="12700">
-            <a:solidFill>
-              <a:srgbClr val="6A4CA3"/>
-            </a:solidFill>
-            <a:prstDash val="solid"/>
-          </a:ln>
-        </p:spPr>
-      </p:sp>
-      <p:sp>
-        <p:nvSpPr>
-          <p:cNvPr id="17" name="Shape 15"/>
-          <p:cNvSpPr/>
-          <p:nvPr/>
-        </p:nvSpPr>
-        <p:spPr>
-          <a:xfrm>
-            <a:off x="8385048" y="3419856"/>
-            <a:ext cx="1975104" cy="0"/>
-          </a:xfrm>
-          <a:prstGeom prst="line">
-            <a:avLst/>
-          </a:prstGeom>
-          <a:noFill/>
-          <a:ln w="25400">
-            <a:solidFill>
-              <a:srgbClr val="8ABBD8"/>
-            </a:solidFill>
-            <a:prstDash val="solid"/>
-          </a:ln>
-        </p:spPr>
-      </p:sp>
-      <p:sp>
-        <p:nvSpPr>
-          <p:cNvPr id="18" name="Shape 16"/>
-          <p:cNvSpPr/>
-          <p:nvPr/>
-        </p:nvSpPr>
-        <p:spPr>
-          <a:xfrm>
-            <a:off x="8202168" y="3630168"/>
-            <a:ext cx="1170432" cy="118872"/>
-          </a:xfrm>
-          <a:prstGeom prst="line">
-            <a:avLst/>
-          </a:prstGeom>
-          <a:noFill/>
-          <a:ln w="25400">
-            <a:solidFill>
-              <a:srgbClr val="8ABBD8"/>
-            </a:solidFill>
-            <a:prstDash val="solid"/>
-          </a:ln>
-        </p:spPr>
-      </p:sp>
-      <p:sp>
-        <p:nvSpPr>
-          <p:cNvPr id="19" name="Shape 17"/>
-          <p:cNvSpPr/>
-          <p:nvPr/>
-        </p:nvSpPr>
-        <p:spPr>
-          <a:xfrm>
-            <a:off x="10543032" y="3630168"/>
-            <a:ext cx="-1170432" cy="118872"/>
-          </a:xfrm>
-          <a:prstGeom prst="line">
-            <a:avLst/>
-          </a:prstGeom>
-          <a:noFill/>
-          <a:ln w="25400">
-            <a:solidFill>
-              <a:srgbClr val="8ABBD8"/>
-            </a:solidFill>
-            <a:prstDash val="solid"/>
-          </a:ln>
-        </p:spPr>
-      </p:sp>
-      <p:sp>
-        <p:nvSpPr>
-          <p:cNvPr id="20" name="Text 18"/>
-          <p:cNvSpPr/>
-          <p:nvPr/>
-        </p:nvSpPr>
-        <p:spPr>
-          <a:xfrm>
-            <a:off x="7863840" y="4069080"/>
-            <a:ext cx="3017520" cy="164592"/>
-          </a:xfrm>
-          <a:prstGeom prst="rect">
-            <a:avLst/>
-          </a:prstGeom>
-          <a:noFill/>
-          <a:ln/>
-        </p:spPr>
-        <p:txBody>
-          <a:bodyPr wrap="square" lIns="0" tIns="0" rIns="0" bIns="0" rtlCol="0" anchor="ctr"/>
-          <a:lstStyle/>
-          <a:p>
-            <a:pPr algn="ctr" indent="0" marL="0">
-              <a:buNone/>
-            </a:pPr>
-            <a:r>
-              <a:rPr lang="en-US" sz="900" b="1" dirty="0">
-                <a:solidFill>
-                  <a:srgbClr val="003A63"/>
-                </a:solidFill>
-                <a:latin typeface="Aptos" pitchFamily="34" charset="0"/>
-                <a:ea typeface="Aptos" pitchFamily="34" charset="-122"/>
-                <a:cs typeface="Aptos" pitchFamily="34" charset="-120"/>
-              </a:rPr>
-              <a:t>Decision rights</a:t>
-            </a:r>
-            <a:endParaRPr lang="en-US" sz="900" dirty="0"/>
-          </a:p>
-        </p:txBody>
-      </p:sp>
-      <p:sp>
-        <p:nvSpPr>
-          <p:cNvPr id="21" name="Shape 19"/>
           <p:cNvSpPr/>
           <p:nvPr/>
         </p:nvSpPr>
@@ -18804,7 +17022,7 @@
       </p:sp>
       <p:sp>
         <p:nvSpPr>
-          <p:cNvPr id="22" name="Text 20"/>
+          <p:cNvPr id="17" name="Text 15"/>
           <p:cNvSpPr/>
           <p:nvPr/>
         </p:nvSpPr>
@@ -18843,7 +17061,7 @@
       </p:sp>
       <p:sp>
         <p:nvSpPr>
-          <p:cNvPr id="23" name="Text 21"/>
+          <p:cNvPr id="18" name="Text 16"/>
           <p:cNvSpPr/>
           <p:nvPr/>
         </p:nvSpPr>

--- a/downloads/presentations/modules/pol-310.pptx
+++ b/downloads/presentations/modules/pol-310.pptx
@@ -3355,49 +3355,58 @@
           <a:ln/>
         </p:spPr>
         <p:txBody>
-          <a:bodyPr wrap="square" lIns="635" tIns="635" rIns="635" bIns="635" rtlCol="0" anchor="t">
+          <a:bodyPr wrap="square" lIns="1016" tIns="1016" rIns="1016" bIns="1016" rtlCol="0" anchor="t">
             <a:normAutofit/>
           </a:bodyPr>
           <a:lstStyle/>
           <a:p>
+            <a:pPr indent="0" marL="0">
+              <a:buNone/>
+            </a:pPr>
             <a:r>
               <a:rPr lang="en-US" sz="2100" dirty="0">
                 <a:solidFill>
-                  <a:srgbClr val="17364A"/>
-                </a:solidFill>
-                <a:latin typeface="Aptos" pitchFamily="34" charset="0"/>
-                <a:ea typeface="Aptos" pitchFamily="34" charset="-122"/>
-                <a:cs typeface="Aptos" pitchFamily="34" charset="-120"/>
-              </a:rPr>
-              <a:t>A public health agency is preparing to use AI in a workflow related to creating, approving,.</a:t>
+                  <a:srgbClr val="003A63"/>
+                </a:solidFill>
+                <a:latin typeface="Aptos" pitchFamily="34" charset="0"/>
+                <a:ea typeface="Aptos" pitchFamily="34" charset="-122"/>
+                <a:cs typeface="Aptos" pitchFamily="34" charset="-120"/>
+              </a:rPr>
+              <a:t>• A public health agency is preparing to use AI in a workflow related to creating, approving,.</a:t>
             </a:r>
             <a:endParaRPr lang="en-US" sz="2100" dirty="0"/>
           </a:p>
           <a:p>
+            <a:pPr indent="0" marL="0">
+              <a:buNone/>
+            </a:pPr>
             <a:r>
               <a:rPr lang="en-US" sz="2100" dirty="0">
                 <a:solidFill>
-                  <a:srgbClr val="17364A"/>
-                </a:solidFill>
-                <a:latin typeface="Aptos" pitchFamily="34" charset="0"/>
-                <a:ea typeface="Aptos" pitchFamily="34" charset="-122"/>
-                <a:cs typeface="Aptos" pitchFamily="34" charset="-120"/>
-              </a:rPr>
-              <a:t>The project team initially treats the tool as a helpful efficiency aid, but governance reviewers.</a:t>
+                  <a:srgbClr val="003A63"/>
+                </a:solidFill>
+                <a:latin typeface="Aptos" pitchFamily="34" charset="0"/>
+                <a:ea typeface="Aptos" pitchFamily="34" charset="-122"/>
+                <a:cs typeface="Aptos" pitchFamily="34" charset="-120"/>
+              </a:rPr>
+              <a:t>• The project team initially treats the tool as a helpful efficiency aid, but governance.</a:t>
             </a:r>
             <a:endParaRPr lang="en-US" sz="2100" dirty="0"/>
           </a:p>
           <a:p>
+            <a:pPr indent="0" marL="0">
+              <a:buNone/>
+            </a:pPr>
             <a:r>
               <a:rPr lang="en-US" sz="2100" dirty="0">
                 <a:solidFill>
-                  <a:srgbClr val="17364A"/>
-                </a:solidFill>
-                <a:latin typeface="Aptos" pitchFamily="34" charset="0"/>
-                <a:ea typeface="Aptos" pitchFamily="34" charset="-122"/>
-                <a:cs typeface="Aptos" pitchFamily="34" charset="-120"/>
-              </a:rPr>
-              <a:t>The agency responds by creating a clear artifact that defines intended use, prohibited use, responsible.</a:t>
+                  <a:srgbClr val="003A63"/>
+                </a:solidFill>
+                <a:latin typeface="Aptos" pitchFamily="34" charset="0"/>
+                <a:ea typeface="Aptos" pitchFamily="34" charset="-122"/>
+                <a:cs typeface="Aptos" pitchFamily="34" charset="-120"/>
+              </a:rPr>
+              <a:t>• The agency responds by creating a clear artifact that defines intended use, prohibited use,.</a:t>
             </a:r>
             <a:endParaRPr lang="en-US" sz="2100" dirty="0"/>
           </a:p>
@@ -3477,17 +3486,17 @@
         </p:nvSpPr>
         <p:spPr>
           <a:xfrm>
-            <a:off x="7799832" y="1828800"/>
-            <a:ext cx="3145536" cy="685800"/>
-          </a:xfrm>
-          <a:prstGeom prst="rect">
-            <a:avLst/>
-          </a:prstGeom>
-          <a:noFill/>
-          <a:ln/>
-        </p:spPr>
-        <p:txBody>
-          <a:bodyPr wrap="square" lIns="0" tIns="0" rIns="0" bIns="0" rtlCol="0" anchor="t">
+            <a:off x="7799832" y="1801368"/>
+            <a:ext cx="3145536" cy="758952"/>
+          </a:xfrm>
+          <a:prstGeom prst="rect">
+            <a:avLst/>
+          </a:prstGeom>
+          <a:noFill/>
+          <a:ln/>
+        </p:spPr>
+        <p:txBody>
+          <a:bodyPr wrap="square" lIns="254" tIns="254" rIns="254" bIns="254" rtlCol="0" anchor="t">
             <a:normAutofit/>
           </a:bodyPr>
           <a:lstStyle/>
@@ -3496,7 +3505,7 @@
               <a:buNone/>
             </a:pPr>
             <a:r>
-              <a:rPr lang="en-US" sz="1550" dirty="0">
+              <a:rPr lang="en-US" sz="1320" dirty="0">
                 <a:solidFill>
                   <a:srgbClr val="17364A"/>
                 </a:solidFill>
@@ -3506,7 +3515,7 @@
               </a:rPr>
               <a:t>A public health agency is preparing to use AI in a workflow related to creating, approving,.</a:t>
             </a:r>
-            <a:endParaRPr lang="en-US" sz="1550" dirty="0"/>
+            <a:endParaRPr lang="en-US" sz="1320" dirty="0"/>
           </a:p>
         </p:txBody>
       </p:sp>
@@ -3594,13 +3603,16 @@
           <a:ln/>
         </p:spPr>
         <p:txBody>
-          <a:bodyPr wrap="square" lIns="254" tIns="254" rIns="254" bIns="254" rtlCol="0" anchor="t">
+          <a:bodyPr wrap="square" lIns="508" tIns="508" rIns="508" bIns="508" rtlCol="0" anchor="t">
             <a:normAutofit/>
           </a:bodyPr>
           <a:lstStyle/>
           <a:p>
-            <a:r>
-              <a:rPr lang="en-US" sz="1380" dirty="0">
+            <a:pPr indent="0" marL="0">
+              <a:buNone/>
+            </a:pPr>
+            <a:r>
+              <a:rPr lang="en-US" sz="1220" dirty="0">
                 <a:solidFill>
                   <a:srgbClr val="17364A"/>
                 </a:solidFill>
@@ -3608,13 +3620,16 @@
                 <a:ea typeface="Aptos" pitchFamily="34" charset="-122"/>
                 <a:cs typeface="Aptos" pitchFamily="34" charset="-120"/>
               </a:rPr>
-              <a:t>A public health agency is preparing to use AI in a workflow related to creating,.</a:t>
-            </a:r>
-            <a:endParaRPr lang="en-US" sz="1380" dirty="0"/>
-          </a:p>
-          <a:p>
-            <a:r>
-              <a:rPr lang="en-US" sz="1380" dirty="0">
+              <a:t>A public health agency is preparing to use AI in a workflow.</a:t>
+            </a:r>
+            <a:endParaRPr lang="en-US" sz="1220" dirty="0"/>
+          </a:p>
+          <a:p>
+            <a:pPr indent="0" marL="0">
+              <a:buNone/>
+            </a:pPr>
+            <a:r>
+              <a:rPr lang="en-US" sz="1220" dirty="0">
                 <a:solidFill>
                   <a:srgbClr val="17364A"/>
                 </a:solidFill>
@@ -3622,13 +3637,16 @@
                 <a:ea typeface="Aptos" pitchFamily="34" charset="-122"/>
                 <a:cs typeface="Aptos" pitchFamily="34" charset="-120"/>
               </a:rPr>
-              <a:t>The project team initially treats the tool as a helpful efficiency aid, but governance.</a:t>
-            </a:r>
-            <a:endParaRPr lang="en-US" sz="1380" dirty="0"/>
-          </a:p>
-          <a:p>
-            <a:r>
-              <a:rPr lang="en-US" sz="1380" dirty="0">
+              <a:t>The project team initially treats the tool as a helpful efficiency.</a:t>
+            </a:r>
+            <a:endParaRPr lang="en-US" sz="1220" dirty="0"/>
+          </a:p>
+          <a:p>
+            <a:pPr indent="0" marL="0">
+              <a:buNone/>
+            </a:pPr>
+            <a:r>
+              <a:rPr lang="en-US" sz="1220" dirty="0">
                 <a:solidFill>
                   <a:srgbClr val="17364A"/>
                 </a:solidFill>
@@ -3636,9 +3654,9 @@
                 <a:ea typeface="Aptos" pitchFamily="34" charset="-122"/>
                 <a:cs typeface="Aptos" pitchFamily="34" charset="-120"/>
               </a:rPr>
-              <a:t>The agency responds by creating a clear artifact that defines intended use, prohibited.</a:t>
-            </a:r>
-            <a:endParaRPr lang="en-US" sz="1380" dirty="0"/>
+              <a:t>The agency responds by creating a clear artifact that defines.</a:t>
+            </a:r>
+            <a:endParaRPr lang="en-US" sz="1220" dirty="0"/>
           </a:p>
         </p:txBody>
       </p:sp>
@@ -3716,17 +3734,17 @@
         </p:nvSpPr>
         <p:spPr>
           <a:xfrm>
-            <a:off x="7799832" y="5001768"/>
-            <a:ext cx="3145536" cy="502920"/>
-          </a:xfrm>
-          <a:prstGeom prst="rect">
-            <a:avLst/>
-          </a:prstGeom>
-          <a:noFill/>
-          <a:ln/>
-        </p:spPr>
-        <p:txBody>
-          <a:bodyPr wrap="square" lIns="0" tIns="0" rIns="0" bIns="0" rtlCol="0" anchor="t">
+            <a:off x="7799832" y="4974336"/>
+            <a:ext cx="3145536" cy="576072"/>
+          </a:xfrm>
+          <a:prstGeom prst="rect">
+            <a:avLst/>
+          </a:prstGeom>
+          <a:noFill/>
+          <a:ln/>
+        </p:spPr>
+        <p:txBody>
+          <a:bodyPr wrap="square" lIns="254" tIns="254" rIns="254" bIns="254" rtlCol="0" anchor="t">
             <a:normAutofit/>
           </a:bodyPr>
           <a:lstStyle/>
@@ -3735,7 +3753,7 @@
               <a:buNone/>
             </a:pPr>
             <a:r>
-              <a:rPr lang="en-US" sz="1550" dirty="0">
+              <a:rPr lang="en-US" sz="1320" dirty="0">
                 <a:solidFill>
                   <a:srgbClr val="17364A"/>
                 </a:solidFill>
@@ -3743,9 +3761,9 @@
                 <a:ea typeface="Aptos" pitchFamily="34" charset="-122"/>
                 <a:cs typeface="Aptos" pitchFamily="34" charset="-120"/>
               </a:rPr>
-              <a:t>Translate this concept into clear decision rights, review steps, documentation expectations, and escalation paths before an AI-supported workflow is approved.</a:t>
-            </a:r>
-            <a:endParaRPr lang="en-US" sz="1550" dirty="0"/>
+              <a:t>Translate this concept into clear decision rights, review steps, documentation expectations, and escalation paths before.</a:t>
+            </a:r>
+            <a:endParaRPr lang="en-US" sz="1320" dirty="0"/>
           </a:p>
         </p:txBody>
       </p:sp>
@@ -4046,49 +4064,58 @@
           <a:ln/>
         </p:spPr>
         <p:txBody>
-          <a:bodyPr wrap="square" lIns="635" tIns="635" rIns="635" bIns="635" rtlCol="0" anchor="t">
+          <a:bodyPr wrap="square" lIns="1016" tIns="1016" rIns="1016" bIns="1016" rtlCol="0" anchor="t">
             <a:normAutofit/>
           </a:bodyPr>
           <a:lstStyle/>
           <a:p>
+            <a:pPr indent="0" marL="0">
+              <a:buNone/>
+            </a:pPr>
             <a:r>
               <a:rPr lang="en-US" sz="2100" dirty="0">
                 <a:solidFill>
-                  <a:srgbClr val="17364A"/>
-                </a:solidFill>
-                <a:latin typeface="Aptos" pitchFamily="34" charset="0"/>
-                <a:ea typeface="Aptos" pitchFamily="34" charset="-122"/>
-                <a:cs typeface="Aptos" pitchFamily="34" charset="-120"/>
-              </a:rPr>
-              <a:t>The first step in this topic is to define the decision or workflow clearly.</a:t>
+                  <a:srgbClr val="003A63"/>
+                </a:solidFill>
+                <a:latin typeface="Aptos" pitchFamily="34" charset="0"/>
+                <a:ea typeface="Aptos" pitchFamily="34" charset="-122"/>
+                <a:cs typeface="Aptos" pitchFamily="34" charset="-120"/>
+              </a:rPr>
+              <a:t>• The first step in this topic is to define the decision or workflow clearly.</a:t>
             </a:r>
             <a:endParaRPr lang="en-US" sz="2100" dirty="0"/>
           </a:p>
           <a:p>
+            <a:pPr indent="0" marL="0">
+              <a:buNone/>
+            </a:pPr>
             <a:r>
               <a:rPr lang="en-US" sz="2100" dirty="0">
                 <a:solidFill>
-                  <a:srgbClr val="17364A"/>
-                </a:solidFill>
-                <a:latin typeface="Aptos" pitchFamily="34" charset="0"/>
-                <a:ea typeface="Aptos" pitchFamily="34" charset="-122"/>
-                <a:cs typeface="Aptos" pitchFamily="34" charset="-120"/>
-              </a:rPr>
-              <a:t>Staff should identify who is affected, what data are used, what AI output is produced, who reviews the.</a:t>
+                  <a:srgbClr val="003A63"/>
+                </a:solidFill>
+                <a:latin typeface="Aptos" pitchFamily="34" charset="0"/>
+                <a:ea typeface="Aptos" pitchFamily="34" charset="-122"/>
+                <a:cs typeface="Aptos" pitchFamily="34" charset="-120"/>
+              </a:rPr>
+              <a:t>• Staff should identify who is affected, what data are used, what AI output is produced, who.</a:t>
             </a:r>
             <a:endParaRPr lang="en-US" sz="2100" dirty="0"/>
           </a:p>
           <a:p>
+            <a:pPr indent="0" marL="0">
+              <a:buNone/>
+            </a:pPr>
             <a:r>
               <a:rPr lang="en-US" sz="2100" dirty="0">
                 <a:solidFill>
-                  <a:srgbClr val="17364A"/>
-                </a:solidFill>
-                <a:latin typeface="Aptos" pitchFamily="34" charset="0"/>
-                <a:ea typeface="Aptos" pitchFamily="34" charset="-122"/>
-                <a:cs typeface="Aptos" pitchFamily="34" charset="-120"/>
-              </a:rPr>
-              <a:t>This prevents the module from becoming abstract and anchors the work in public health practice.</a:t>
+                  <a:srgbClr val="003A63"/>
+                </a:solidFill>
+                <a:latin typeface="Aptos" pitchFamily="34" charset="0"/>
+                <a:ea typeface="Aptos" pitchFamily="34" charset="-122"/>
+                <a:cs typeface="Aptos" pitchFamily="34" charset="-120"/>
+              </a:rPr>
+              <a:t>• This prevents the module from becoming abstract and anchors the work in public health practice.</a:t>
             </a:r>
             <a:endParaRPr lang="en-US" sz="2100" dirty="0"/>
           </a:p>
@@ -4168,17 +4195,17 @@
         </p:nvSpPr>
         <p:spPr>
           <a:xfrm>
-            <a:off x="7799832" y="1828800"/>
-            <a:ext cx="3145536" cy="685800"/>
-          </a:xfrm>
-          <a:prstGeom prst="rect">
-            <a:avLst/>
-          </a:prstGeom>
-          <a:noFill/>
-          <a:ln/>
-        </p:spPr>
-        <p:txBody>
-          <a:bodyPr wrap="square" lIns="0" tIns="0" rIns="0" bIns="0" rtlCol="0" anchor="t">
+            <a:off x="7799832" y="1801368"/>
+            <a:ext cx="3145536" cy="758952"/>
+          </a:xfrm>
+          <a:prstGeom prst="rect">
+            <a:avLst/>
+          </a:prstGeom>
+          <a:noFill/>
+          <a:ln/>
+        </p:spPr>
+        <p:txBody>
+          <a:bodyPr wrap="square" lIns="254" tIns="254" rIns="254" bIns="254" rtlCol="0" anchor="t">
             <a:normAutofit/>
           </a:bodyPr>
           <a:lstStyle/>
@@ -4187,7 +4214,7 @@
               <a:buNone/>
             </a:pPr>
             <a:r>
-              <a:rPr lang="en-US" sz="1550" dirty="0">
+              <a:rPr lang="en-US" sz="1320" dirty="0">
                 <a:solidFill>
                   <a:srgbClr val="17364A"/>
                 </a:solidFill>
@@ -4197,7 +4224,7 @@
               </a:rPr>
               <a:t>The first step in this topic is to define the decision or workflow clearly.</a:t>
             </a:r>
-            <a:endParaRPr lang="en-US" sz="1550" dirty="0"/>
+            <a:endParaRPr lang="en-US" sz="1320" dirty="0"/>
           </a:p>
         </p:txBody>
       </p:sp>
@@ -4285,13 +4312,16 @@
           <a:ln/>
         </p:spPr>
         <p:txBody>
-          <a:bodyPr wrap="square" lIns="254" tIns="254" rIns="254" bIns="254" rtlCol="0" anchor="t">
+          <a:bodyPr wrap="square" lIns="508" tIns="508" rIns="508" bIns="508" rtlCol="0" anchor="t">
             <a:normAutofit/>
           </a:bodyPr>
           <a:lstStyle/>
           <a:p>
-            <a:r>
-              <a:rPr lang="en-US" sz="1380" dirty="0">
+            <a:pPr indent="0" marL="0">
+              <a:buNone/>
+            </a:pPr>
+            <a:r>
+              <a:rPr lang="en-US" sz="1220" dirty="0">
                 <a:solidFill>
                   <a:srgbClr val="17364A"/>
                 </a:solidFill>
@@ -4299,13 +4329,16 @@
                 <a:ea typeface="Aptos" pitchFamily="34" charset="-122"/>
                 <a:cs typeface="Aptos" pitchFamily="34" charset="-120"/>
               </a:rPr>
-              <a:t>Staff should identify who is affected, what data are used, what AI output is produced, who.</a:t>
-            </a:r>
-            <a:endParaRPr lang="en-US" sz="1380" dirty="0"/>
-          </a:p>
-          <a:p>
-            <a:r>
-              <a:rPr lang="en-US" sz="1380" dirty="0">
+              <a:t>Staff should identify who is affected, what data are used, what AI.</a:t>
+            </a:r>
+            <a:endParaRPr lang="en-US" sz="1220" dirty="0"/>
+          </a:p>
+          <a:p>
+            <a:pPr indent="0" marL="0">
+              <a:buNone/>
+            </a:pPr>
+            <a:r>
+              <a:rPr lang="en-US" sz="1220" dirty="0">
                 <a:solidFill>
                   <a:srgbClr val="17364A"/>
                 </a:solidFill>
@@ -4315,11 +4348,14 @@
               </a:rPr>
               <a:t>The second step is to assign responsibilities.</a:t>
             </a:r>
-            <a:endParaRPr lang="en-US" sz="1380" dirty="0"/>
-          </a:p>
-          <a:p>
-            <a:r>
-              <a:rPr lang="en-US" sz="1380" dirty="0">
+            <a:endParaRPr lang="en-US" sz="1220" dirty="0"/>
+          </a:p>
+          <a:p>
+            <a:pPr indent="0" marL="0">
+              <a:buNone/>
+            </a:pPr>
+            <a:r>
+              <a:rPr lang="en-US" sz="1220" dirty="0">
                 <a:solidFill>
                   <a:srgbClr val="17364A"/>
                 </a:solidFill>
@@ -4327,9 +4363,9 @@
                 <a:ea typeface="Aptos" pitchFamily="34" charset="-122"/>
                 <a:cs typeface="Aptos" pitchFamily="34" charset="-120"/>
               </a:rPr>
-              <a:t>AI-supported workflows often cross program, IT, legal, privacy, communications,.</a:t>
-            </a:r>
-            <a:endParaRPr lang="en-US" sz="1380" dirty="0"/>
+              <a:t>AI-supported workflows often cross program, IT, legal, privacy,.</a:t>
+            </a:r>
+            <a:endParaRPr lang="en-US" sz="1220" dirty="0"/>
           </a:p>
         </p:txBody>
       </p:sp>
@@ -4407,17 +4443,17 @@
         </p:nvSpPr>
         <p:spPr>
           <a:xfrm>
-            <a:off x="7799832" y="5001768"/>
-            <a:ext cx="3145536" cy="502920"/>
-          </a:xfrm>
-          <a:prstGeom prst="rect">
-            <a:avLst/>
-          </a:prstGeom>
-          <a:noFill/>
-          <a:ln/>
-        </p:spPr>
-        <p:txBody>
-          <a:bodyPr wrap="square" lIns="0" tIns="0" rIns="0" bIns="0" rtlCol="0" anchor="t">
+            <a:off x="7799832" y="4974336"/>
+            <a:ext cx="3145536" cy="576072"/>
+          </a:xfrm>
+          <a:prstGeom prst="rect">
+            <a:avLst/>
+          </a:prstGeom>
+          <a:noFill/>
+          <a:ln/>
+        </p:spPr>
+        <p:txBody>
+          <a:bodyPr wrap="square" lIns="254" tIns="254" rIns="254" bIns="254" rtlCol="0" anchor="t">
             <a:normAutofit/>
           </a:bodyPr>
           <a:lstStyle/>
@@ -4426,7 +4462,7 @@
               <a:buNone/>
             </a:pPr>
             <a:r>
-              <a:rPr lang="en-US" sz="1550" dirty="0">
+              <a:rPr lang="en-US" sz="1320" dirty="0">
                 <a:solidFill>
                   <a:srgbClr val="17364A"/>
                 </a:solidFill>
@@ -4434,9 +4470,9 @@
                 <a:ea typeface="Aptos" pitchFamily="34" charset="-122"/>
                 <a:cs typeface="Aptos" pitchFamily="34" charset="-120"/>
               </a:rPr>
-              <a:t>Translate this concept into clear decision rights, review steps, documentation expectations, and escalation paths before an AI-supported workflow is approved.</a:t>
-            </a:r>
-            <a:endParaRPr lang="en-US" sz="1550" dirty="0"/>
+              <a:t>Translate this concept into clear decision rights, review steps, documentation expectations, and escalation paths before.</a:t>
+            </a:r>
+            <a:endParaRPr lang="en-US" sz="1320" dirty="0"/>
           </a:p>
         </p:txBody>
       </p:sp>
@@ -4737,49 +4773,58 @@
           <a:ln/>
         </p:spPr>
         <p:txBody>
-          <a:bodyPr wrap="square" lIns="635" tIns="635" rIns="635" bIns="635" rtlCol="0" anchor="t">
+          <a:bodyPr wrap="square" lIns="1016" tIns="1016" rIns="1016" bIns="1016" rtlCol="0" anchor="t">
             <a:normAutofit/>
           </a:bodyPr>
           <a:lstStyle/>
           <a:p>
+            <a:pPr indent="0" marL="0">
+              <a:buNone/>
+            </a:pPr>
             <a:r>
               <a:rPr lang="en-US" sz="2100" dirty="0">
                 <a:solidFill>
-                  <a:srgbClr val="17364A"/>
-                </a:solidFill>
-                <a:latin typeface="Aptos" pitchFamily="34" charset="0"/>
-                <a:ea typeface="Aptos" pitchFamily="34" charset="-122"/>
-                <a:cs typeface="Aptos" pitchFamily="34" charset="-120"/>
-              </a:rPr>
-              <a:t>A common failure mode is treating the topic as a one-time checklist.</a:t>
+                  <a:srgbClr val="003A63"/>
+                </a:solidFill>
+                <a:latin typeface="Aptos" pitchFamily="34" charset="0"/>
+                <a:ea typeface="Aptos" pitchFamily="34" charset="-122"/>
+                <a:cs typeface="Aptos" pitchFamily="34" charset="-120"/>
+              </a:rPr>
+              <a:t>• A common failure mode is treating the topic as a one-time checklist.</a:t>
             </a:r>
             <a:endParaRPr lang="en-US" sz="2100" dirty="0"/>
           </a:p>
           <a:p>
+            <a:pPr indent="0" marL="0">
+              <a:buNone/>
+            </a:pPr>
             <a:r>
               <a:rPr lang="en-US" sz="2100" dirty="0">
                 <a:solidFill>
-                  <a:srgbClr val="17364A"/>
-                </a:solidFill>
-                <a:latin typeface="Aptos" pitchFamily="34" charset="0"/>
-                <a:ea typeface="Aptos" pitchFamily="34" charset="-122"/>
-                <a:cs typeface="Aptos" pitchFamily="34" charset="-120"/>
-              </a:rPr>
-              <a:t>AI risks can change when data sources, models, vendors, policies, users, or public expectations change.</a:t>
+                  <a:srgbClr val="003A63"/>
+                </a:solidFill>
+                <a:latin typeface="Aptos" pitchFamily="34" charset="0"/>
+                <a:ea typeface="Aptos" pitchFamily="34" charset="-122"/>
+                <a:cs typeface="Aptos" pitchFamily="34" charset="-120"/>
+              </a:rPr>
+              <a:t>• AI risks can change when data sources, models, vendors, policies, users, or public.</a:t>
             </a:r>
             <a:endParaRPr lang="en-US" sz="2100" dirty="0"/>
           </a:p>
           <a:p>
+            <a:pPr indent="0" marL="0">
+              <a:buNone/>
+            </a:pPr>
             <a:r>
               <a:rPr lang="en-US" sz="2100" dirty="0">
                 <a:solidFill>
-                  <a:srgbClr val="17364A"/>
-                </a:solidFill>
-                <a:latin typeface="Aptos" pitchFamily="34" charset="0"/>
-                <a:ea typeface="Aptos" pitchFamily="34" charset="-122"/>
-                <a:cs typeface="Aptos" pitchFamily="34" charset="-120"/>
-              </a:rPr>
-              <a:t>A guardrail is to define review intervals and change triggers.</a:t>
+                  <a:srgbClr val="003A63"/>
+                </a:solidFill>
+                <a:latin typeface="Aptos" pitchFamily="34" charset="0"/>
+                <a:ea typeface="Aptos" pitchFamily="34" charset="-122"/>
+                <a:cs typeface="Aptos" pitchFamily="34" charset="-120"/>
+              </a:rPr>
+              <a:t>• A guardrail is to define review intervals and change triggers.</a:t>
             </a:r>
             <a:endParaRPr lang="en-US" sz="2100" dirty="0"/>
           </a:p>
@@ -4859,17 +4904,17 @@
         </p:nvSpPr>
         <p:spPr>
           <a:xfrm>
-            <a:off x="7799832" y="1828800"/>
-            <a:ext cx="3145536" cy="685800"/>
-          </a:xfrm>
-          <a:prstGeom prst="rect">
-            <a:avLst/>
-          </a:prstGeom>
-          <a:noFill/>
-          <a:ln/>
-        </p:spPr>
-        <p:txBody>
-          <a:bodyPr wrap="square" lIns="0" tIns="0" rIns="0" bIns="0" rtlCol="0" anchor="t">
+            <a:off x="7799832" y="1801368"/>
+            <a:ext cx="3145536" cy="758952"/>
+          </a:xfrm>
+          <a:prstGeom prst="rect">
+            <a:avLst/>
+          </a:prstGeom>
+          <a:noFill/>
+          <a:ln/>
+        </p:spPr>
+        <p:txBody>
+          <a:bodyPr wrap="square" lIns="254" tIns="254" rIns="254" bIns="254" rtlCol="0" anchor="t">
             <a:normAutofit/>
           </a:bodyPr>
           <a:lstStyle/>
@@ -4878,7 +4923,7 @@
               <a:buNone/>
             </a:pPr>
             <a:r>
-              <a:rPr lang="en-US" sz="1550" dirty="0">
+              <a:rPr lang="en-US" sz="1320" dirty="0">
                 <a:solidFill>
                   <a:srgbClr val="17364A"/>
                 </a:solidFill>
@@ -4888,7 +4933,7 @@
               </a:rPr>
               <a:t>A common failure mode is treating the topic as a one-time checklist.</a:t>
             </a:r>
-            <a:endParaRPr lang="en-US" sz="1550" dirty="0"/>
+            <a:endParaRPr lang="en-US" sz="1320" dirty="0"/>
           </a:p>
         </p:txBody>
       </p:sp>
@@ -4976,13 +5021,16 @@
           <a:ln/>
         </p:spPr>
         <p:txBody>
-          <a:bodyPr wrap="square" lIns="254" tIns="254" rIns="254" bIns="254" rtlCol="0" anchor="t">
+          <a:bodyPr wrap="square" lIns="508" tIns="508" rIns="508" bIns="508" rtlCol="0" anchor="t">
             <a:normAutofit/>
           </a:bodyPr>
           <a:lstStyle/>
           <a:p>
-            <a:r>
-              <a:rPr lang="en-US" sz="1380" dirty="0">
+            <a:pPr indent="0" marL="0">
+              <a:buNone/>
+            </a:pPr>
+            <a:r>
+              <a:rPr lang="en-US" sz="1220" dirty="0">
                 <a:solidFill>
                   <a:srgbClr val="17364A"/>
                 </a:solidFill>
@@ -4992,11 +5040,14 @@
               </a:rPr>
               <a:t>Another failure mode is unclear ownership.</a:t>
             </a:r>
-            <a:endParaRPr lang="en-US" sz="1380" dirty="0"/>
-          </a:p>
-          <a:p>
-            <a:r>
-              <a:rPr lang="en-US" sz="1380" dirty="0">
+            <a:endParaRPr lang="en-US" sz="1220" dirty="0"/>
+          </a:p>
+          <a:p>
+            <a:pPr indent="0" marL="0">
+              <a:buNone/>
+            </a:pPr>
+            <a:r>
+              <a:rPr lang="en-US" sz="1220" dirty="0">
                 <a:solidFill>
                   <a:srgbClr val="17364A"/>
                 </a:solidFill>
@@ -5004,13 +5055,16 @@
                 <a:ea typeface="Aptos" pitchFamily="34" charset="-122"/>
                 <a:cs typeface="Aptos" pitchFamily="34" charset="-120"/>
               </a:rPr>
-              <a:t>When everyone is responsible in general, no one may be responsible in practice.</a:t>
-            </a:r>
-            <a:endParaRPr lang="en-US" sz="1380" dirty="0"/>
-          </a:p>
-          <a:p>
-            <a:r>
-              <a:rPr lang="en-US" sz="1380" dirty="0">
+              <a:t>When everyone is responsible in general, no one may be responsible.</a:t>
+            </a:r>
+            <a:endParaRPr lang="en-US" sz="1220" dirty="0"/>
+          </a:p>
+          <a:p>
+            <a:pPr indent="0" marL="0">
+              <a:buNone/>
+            </a:pPr>
+            <a:r>
+              <a:rPr lang="en-US" sz="1220" dirty="0">
                 <a:solidFill>
                   <a:srgbClr val="17364A"/>
                 </a:solidFill>
@@ -5018,9 +5072,9 @@
                 <a:ea typeface="Aptos" pitchFamily="34" charset="-122"/>
                 <a:cs typeface="Aptos" pitchFamily="34" charset="-120"/>
               </a:rPr>
-              <a:t>A guardrail is to assign an accountability owner and name escalation pathways.</a:t>
-            </a:r>
-            <a:endParaRPr lang="en-US" sz="1380" dirty="0"/>
+              <a:t>A guardrail is to assign an accountability owner and name.</a:t>
+            </a:r>
+            <a:endParaRPr lang="en-US" sz="1220" dirty="0"/>
           </a:p>
         </p:txBody>
       </p:sp>
@@ -5098,17 +5152,17 @@
         </p:nvSpPr>
         <p:spPr>
           <a:xfrm>
-            <a:off x="7799832" y="5001768"/>
-            <a:ext cx="3145536" cy="502920"/>
-          </a:xfrm>
-          <a:prstGeom prst="rect">
-            <a:avLst/>
-          </a:prstGeom>
-          <a:noFill/>
-          <a:ln/>
-        </p:spPr>
-        <p:txBody>
-          <a:bodyPr wrap="square" lIns="0" tIns="0" rIns="0" bIns="0" rtlCol="0" anchor="t">
+            <a:off x="7799832" y="4974336"/>
+            <a:ext cx="3145536" cy="576072"/>
+          </a:xfrm>
+          <a:prstGeom prst="rect">
+            <a:avLst/>
+          </a:prstGeom>
+          <a:noFill/>
+          <a:ln/>
+        </p:spPr>
+        <p:txBody>
+          <a:bodyPr wrap="square" lIns="254" tIns="254" rIns="254" bIns="254" rtlCol="0" anchor="t">
             <a:normAutofit/>
           </a:bodyPr>
           <a:lstStyle/>
@@ -5117,7 +5171,7 @@
               <a:buNone/>
             </a:pPr>
             <a:r>
-              <a:rPr lang="en-US" sz="1550" dirty="0">
+              <a:rPr lang="en-US" sz="1320" dirty="0">
                 <a:solidFill>
                   <a:srgbClr val="17364A"/>
                 </a:solidFill>
@@ -5125,9 +5179,9 @@
                 <a:ea typeface="Aptos" pitchFamily="34" charset="-122"/>
                 <a:cs typeface="Aptos" pitchFamily="34" charset="-120"/>
               </a:rPr>
-              <a:t>Translate this concept into clear decision rights, review steps, documentation expectations, and escalation paths before an AI-supported workflow is approved.</a:t>
-            </a:r>
-            <a:endParaRPr lang="en-US" sz="1550" dirty="0"/>
+              <a:t>Translate this concept into clear decision rights, review steps, documentation expectations, and escalation paths before.</a:t>
+            </a:r>
+            <a:endParaRPr lang="en-US" sz="1320" dirty="0"/>
           </a:p>
         </p:txBody>
       </p:sp>
@@ -5428,35 +5482,41 @@
           <a:ln/>
         </p:spPr>
         <p:txBody>
-          <a:bodyPr wrap="square" lIns="635" tIns="635" rIns="635" bIns="635" rtlCol="0" anchor="t">
+          <a:bodyPr wrap="square" lIns="1016" tIns="1016" rIns="1016" bIns="1016" rtlCol="0" anchor="t">
             <a:normAutofit/>
           </a:bodyPr>
           <a:lstStyle/>
           <a:p>
+            <a:pPr indent="0" marL="0">
+              <a:buNone/>
+            </a:pPr>
             <a:r>
               <a:rPr lang="en-US" sz="2100" dirty="0">
                 <a:solidFill>
-                  <a:srgbClr val="17364A"/>
-                </a:solidFill>
-                <a:latin typeface="Aptos" pitchFamily="34" charset="0"/>
-                <a:ea typeface="Aptos" pitchFamily="34" charset="-122"/>
-                <a:cs typeface="Aptos" pitchFamily="34" charset="-120"/>
-              </a:rPr>
-              <a:t>This topic applies across generative AI, predictive analytics, NLP, RAG, automation, and agentic.</a:t>
+                  <a:srgbClr val="003A63"/>
+                </a:solidFill>
+                <a:latin typeface="Aptos" pitchFamily="34" charset="0"/>
+                <a:ea typeface="Aptos" pitchFamily="34" charset="-122"/>
+                <a:cs typeface="Aptos" pitchFamily="34" charset="-120"/>
+              </a:rPr>
+              <a:t>• This topic applies across generative AI, predictive analytics, NLP, RAG, automation, and.</a:t>
             </a:r>
             <a:endParaRPr lang="en-US" sz="2100" dirty="0"/>
           </a:p>
           <a:p>
+            <a:pPr indent="0" marL="0">
+              <a:buNone/>
+            </a:pPr>
             <a:r>
               <a:rPr lang="en-US" sz="2100" dirty="0">
                 <a:solidFill>
-                  <a:srgbClr val="17364A"/>
-                </a:solidFill>
-                <a:latin typeface="Aptos" pitchFamily="34" charset="0"/>
-                <a:ea typeface="Aptos" pitchFamily="34" charset="-122"/>
-                <a:cs typeface="Aptos" pitchFamily="34" charset="-120"/>
-              </a:rPr>
-              <a:t>The more sensitive the data, the more consequential the output, or the more automated the action, the.</a:t>
+                  <a:srgbClr val="003A63"/>
+                </a:solidFill>
+                <a:latin typeface="Aptos" pitchFamily="34" charset="0"/>
+                <a:ea typeface="Aptos" pitchFamily="34" charset="-122"/>
+                <a:cs typeface="Aptos" pitchFamily="34" charset="-120"/>
+              </a:rPr>
+              <a:t>• The more sensitive the data, the more consequential the output, or the more automated the.</a:t>
             </a:r>
             <a:endParaRPr lang="en-US" sz="2100" dirty="0"/>
           </a:p>
@@ -5536,17 +5596,17 @@
         </p:nvSpPr>
         <p:spPr>
           <a:xfrm>
-            <a:off x="7799832" y="1828800"/>
-            <a:ext cx="3145536" cy="685800"/>
-          </a:xfrm>
-          <a:prstGeom prst="rect">
-            <a:avLst/>
-          </a:prstGeom>
-          <a:noFill/>
-          <a:ln/>
-        </p:spPr>
-        <p:txBody>
-          <a:bodyPr wrap="square" lIns="0" tIns="0" rIns="0" bIns="0" rtlCol="0" anchor="t">
+            <a:off x="7799832" y="1801368"/>
+            <a:ext cx="3145536" cy="758952"/>
+          </a:xfrm>
+          <a:prstGeom prst="rect">
+            <a:avLst/>
+          </a:prstGeom>
+          <a:noFill/>
+          <a:ln/>
+        </p:spPr>
+        <p:txBody>
+          <a:bodyPr wrap="square" lIns="254" tIns="254" rIns="254" bIns="254" rtlCol="0" anchor="t">
             <a:normAutofit/>
           </a:bodyPr>
           <a:lstStyle/>
@@ -5555,7 +5615,7 @@
               <a:buNone/>
             </a:pPr>
             <a:r>
-              <a:rPr lang="en-US" sz="1550" dirty="0">
+              <a:rPr lang="en-US" sz="1320" dirty="0">
                 <a:solidFill>
                   <a:srgbClr val="17364A"/>
                 </a:solidFill>
@@ -5565,7 +5625,7 @@
               </a:rPr>
               <a:t>This topic applies across generative AI, predictive analytics, NLP, RAG, automation, and agentic.</a:t>
             </a:r>
-            <a:endParaRPr lang="en-US" sz="1550" dirty="0"/>
+            <a:endParaRPr lang="en-US" sz="1320" dirty="0"/>
           </a:p>
         </p:txBody>
       </p:sp>
@@ -5653,13 +5713,16 @@
           <a:ln/>
         </p:spPr>
         <p:txBody>
-          <a:bodyPr wrap="square" lIns="254" tIns="254" rIns="254" bIns="254" rtlCol="0" anchor="t">
+          <a:bodyPr wrap="square" lIns="508" tIns="508" rIns="508" bIns="508" rtlCol="0" anchor="t">
             <a:normAutofit/>
           </a:bodyPr>
           <a:lstStyle/>
           <a:p>
-            <a:r>
-              <a:rPr lang="en-US" sz="1380" dirty="0">
+            <a:pPr indent="0" marL="0">
+              <a:buNone/>
+            </a:pPr>
+            <a:r>
+              <a:rPr lang="en-US" sz="1220" dirty="0">
                 <a:solidFill>
                   <a:srgbClr val="17364A"/>
                 </a:solidFill>
@@ -5667,13 +5730,16 @@
                 <a:ea typeface="Aptos" pitchFamily="34" charset="-122"/>
                 <a:cs typeface="Aptos" pitchFamily="34" charset="-120"/>
               </a:rPr>
-              <a:t>This topic applies across generative AI, predictive analytics, NLP, RAG, automation, and.</a:t>
-            </a:r>
-            <a:endParaRPr lang="en-US" sz="1380" dirty="0"/>
-          </a:p>
-          <a:p>
-            <a:r>
-              <a:rPr lang="en-US" sz="1380" dirty="0">
+              <a:t>This topic applies across generative AI, predictive analytics,.</a:t>
+            </a:r>
+            <a:endParaRPr lang="en-US" sz="1220" dirty="0"/>
+          </a:p>
+          <a:p>
+            <a:pPr indent="0" marL="0">
+              <a:buNone/>
+            </a:pPr>
+            <a:r>
+              <a:rPr lang="en-US" sz="1220" dirty="0">
                 <a:solidFill>
                   <a:srgbClr val="17364A"/>
                 </a:solidFill>
@@ -5681,9 +5747,9 @@
                 <a:ea typeface="Aptos" pitchFamily="34" charset="-122"/>
                 <a:cs typeface="Aptos" pitchFamily="34" charset="-120"/>
               </a:rPr>
-              <a:t>The more sensitive the data, the more consequential the output, or the more automated the.</a:t>
-            </a:r>
-            <a:endParaRPr lang="en-US" sz="1380" dirty="0"/>
+              <a:t>The more sensitive the data, the more consequential the output, or.</a:t>
+            </a:r>
+            <a:endParaRPr lang="en-US" sz="1220" dirty="0"/>
           </a:p>
         </p:txBody>
       </p:sp>
@@ -5761,17 +5827,17 @@
         </p:nvSpPr>
         <p:spPr>
           <a:xfrm>
-            <a:off x="7799832" y="5001768"/>
-            <a:ext cx="3145536" cy="502920"/>
-          </a:xfrm>
-          <a:prstGeom prst="rect">
-            <a:avLst/>
-          </a:prstGeom>
-          <a:noFill/>
-          <a:ln/>
-        </p:spPr>
-        <p:txBody>
-          <a:bodyPr wrap="square" lIns="0" tIns="0" rIns="0" bIns="0" rtlCol="0" anchor="t">
+            <a:off x="7799832" y="4974336"/>
+            <a:ext cx="3145536" cy="576072"/>
+          </a:xfrm>
+          <a:prstGeom prst="rect">
+            <a:avLst/>
+          </a:prstGeom>
+          <a:noFill/>
+          <a:ln/>
+        </p:spPr>
+        <p:txBody>
+          <a:bodyPr wrap="square" lIns="254" tIns="254" rIns="254" bIns="254" rtlCol="0" anchor="t">
             <a:normAutofit/>
           </a:bodyPr>
           <a:lstStyle/>
@@ -5780,7 +5846,7 @@
               <a:buNone/>
             </a:pPr>
             <a:r>
-              <a:rPr lang="en-US" sz="1550" dirty="0">
+              <a:rPr lang="en-US" sz="1320" dirty="0">
                 <a:solidFill>
                   <a:srgbClr val="17364A"/>
                 </a:solidFill>
@@ -5788,9 +5854,9 @@
                 <a:ea typeface="Aptos" pitchFamily="34" charset="-122"/>
                 <a:cs typeface="Aptos" pitchFamily="34" charset="-120"/>
               </a:rPr>
-              <a:t>Translate this concept into clear decision rights, review steps, documentation expectations, and escalation paths before an AI-supported workflow is approved.</a:t>
-            </a:r>
-            <a:endParaRPr lang="en-US" sz="1550" dirty="0"/>
+              <a:t>Translate this concept into clear decision rights, review steps, documentation expectations, and escalation paths before.</a:t>
+            </a:r>
+            <a:endParaRPr lang="en-US" sz="1320" dirty="0"/>
           </a:p>
         </p:txBody>
       </p:sp>
@@ -6091,49 +6157,58 @@
           <a:ln/>
         </p:spPr>
         <p:txBody>
-          <a:bodyPr wrap="square" lIns="635" tIns="635" rIns="635" bIns="635" rtlCol="0" anchor="t">
+          <a:bodyPr wrap="square" lIns="1016" tIns="1016" rIns="1016" bIns="1016" rtlCol="0" anchor="t">
             <a:normAutofit/>
           </a:bodyPr>
           <a:lstStyle/>
           <a:p>
+            <a:pPr indent="0" marL="0">
+              <a:buNone/>
+            </a:pPr>
             <a:r>
               <a:rPr lang="en-US" sz="2100" dirty="0">
                 <a:solidFill>
-                  <a:srgbClr val="17364A"/>
-                </a:solidFill>
-                <a:latin typeface="Aptos" pitchFamily="34" charset="0"/>
-                <a:ea typeface="Aptos" pitchFamily="34" charset="-122"/>
-                <a:cs typeface="Aptos" pitchFamily="34" charset="-120"/>
-              </a:rPr>
-              <a:t>What public health decision or workflow does this topic affect?</a:t>
+                  <a:srgbClr val="003A63"/>
+                </a:solidFill>
+                <a:latin typeface="Aptos" pitchFamily="34" charset="0"/>
+                <a:ea typeface="Aptos" pitchFamily="34" charset="-122"/>
+                <a:cs typeface="Aptos" pitchFamily="34" charset="-120"/>
+              </a:rPr>
+              <a:t>• What public health decision or workflow does this topic affect?</a:t>
             </a:r>
             <a:endParaRPr lang="en-US" sz="2100" dirty="0"/>
           </a:p>
           <a:p>
+            <a:pPr indent="0" marL="0">
+              <a:buNone/>
+            </a:pPr>
             <a:r>
               <a:rPr lang="en-US" sz="2100" dirty="0">
                 <a:solidFill>
-                  <a:srgbClr val="17364A"/>
-                </a:solidFill>
-                <a:latin typeface="Aptos" pitchFamily="34" charset="0"/>
-                <a:ea typeface="Aptos" pitchFamily="34" charset="-122"/>
-                <a:cs typeface="Aptos" pitchFamily="34" charset="-120"/>
-              </a:rPr>
-              <a:t>Who has authority to approve or pause the work?</a:t>
+                  <a:srgbClr val="003A63"/>
+                </a:solidFill>
+                <a:latin typeface="Aptos" pitchFamily="34" charset="0"/>
+                <a:ea typeface="Aptos" pitchFamily="34" charset="-122"/>
+                <a:cs typeface="Aptos" pitchFamily="34" charset="-120"/>
+              </a:rPr>
+              <a:t>• Who has authority to approve or pause the work?</a:t>
             </a:r>
             <a:endParaRPr lang="en-US" sz="2100" dirty="0"/>
           </a:p>
           <a:p>
+            <a:pPr indent="0" marL="0">
+              <a:buNone/>
+            </a:pPr>
             <a:r>
               <a:rPr lang="en-US" sz="2100" dirty="0">
                 <a:solidFill>
-                  <a:srgbClr val="17364A"/>
-                </a:solidFill>
-                <a:latin typeface="Aptos" pitchFamily="34" charset="0"/>
-                <a:ea typeface="Aptos" pitchFamily="34" charset="-122"/>
-                <a:cs typeface="Aptos" pitchFamily="34" charset="-120"/>
-              </a:rPr>
-              <a:t>What evidence would show that the workflow is responsible and effective?</a:t>
+                  <a:srgbClr val="003A63"/>
+                </a:solidFill>
+                <a:latin typeface="Aptos" pitchFamily="34" charset="0"/>
+                <a:ea typeface="Aptos" pitchFamily="34" charset="-122"/>
+                <a:cs typeface="Aptos" pitchFamily="34" charset="-120"/>
+              </a:rPr>
+              <a:t>• What evidence would show that the workflow is responsible and effective?</a:t>
             </a:r>
             <a:endParaRPr lang="en-US" sz="2100" dirty="0"/>
           </a:p>
@@ -6213,17 +6288,17 @@
         </p:nvSpPr>
         <p:spPr>
           <a:xfrm>
-            <a:off x="7799832" y="1828800"/>
-            <a:ext cx="3145536" cy="685800"/>
-          </a:xfrm>
-          <a:prstGeom prst="rect">
-            <a:avLst/>
-          </a:prstGeom>
-          <a:noFill/>
-          <a:ln/>
-        </p:spPr>
-        <p:txBody>
-          <a:bodyPr wrap="square" lIns="0" tIns="0" rIns="0" bIns="0" rtlCol="0" anchor="t">
+            <a:off x="7799832" y="1801368"/>
+            <a:ext cx="3145536" cy="758952"/>
+          </a:xfrm>
+          <a:prstGeom prst="rect">
+            <a:avLst/>
+          </a:prstGeom>
+          <a:noFill/>
+          <a:ln/>
+        </p:spPr>
+        <p:txBody>
+          <a:bodyPr wrap="square" lIns="254" tIns="254" rIns="254" bIns="254" rtlCol="0" anchor="t">
             <a:normAutofit/>
           </a:bodyPr>
           <a:lstStyle/>
@@ -6232,7 +6307,7 @@
               <a:buNone/>
             </a:pPr>
             <a:r>
-              <a:rPr lang="en-US" sz="1550" dirty="0">
+              <a:rPr lang="en-US" sz="1320" dirty="0">
                 <a:solidFill>
                   <a:srgbClr val="17364A"/>
                 </a:solidFill>
@@ -6242,7 +6317,7 @@
               </a:rPr>
               <a:t>What public health decision or workflow does this topic affect?</a:t>
             </a:r>
-            <a:endParaRPr lang="en-US" sz="1550" dirty="0"/>
+            <a:endParaRPr lang="en-US" sz="1320" dirty="0"/>
           </a:p>
         </p:txBody>
       </p:sp>
@@ -6330,13 +6405,16 @@
           <a:ln/>
         </p:spPr>
         <p:txBody>
-          <a:bodyPr wrap="square" lIns="254" tIns="254" rIns="254" bIns="254" rtlCol="0" anchor="t">
+          <a:bodyPr wrap="square" lIns="508" tIns="508" rIns="508" bIns="508" rtlCol="0" anchor="t">
             <a:normAutofit/>
           </a:bodyPr>
           <a:lstStyle/>
           <a:p>
-            <a:r>
-              <a:rPr lang="en-US" sz="1380" dirty="0">
+            <a:pPr indent="0" marL="0">
+              <a:buNone/>
+            </a:pPr>
+            <a:r>
+              <a:rPr lang="en-US" sz="1220" dirty="0">
                 <a:solidFill>
                   <a:srgbClr val="17364A"/>
                 </a:solidFill>
@@ -6346,11 +6424,14 @@
               </a:rPr>
               <a:t>What public health decision or workflow does this topic affect?</a:t>
             </a:r>
-            <a:endParaRPr lang="en-US" sz="1380" dirty="0"/>
-          </a:p>
-          <a:p>
-            <a:r>
-              <a:rPr lang="en-US" sz="1380" dirty="0">
+            <a:endParaRPr lang="en-US" sz="1220" dirty="0"/>
+          </a:p>
+          <a:p>
+            <a:pPr indent="0" marL="0">
+              <a:buNone/>
+            </a:pPr>
+            <a:r>
+              <a:rPr lang="en-US" sz="1220" dirty="0">
                 <a:solidFill>
                   <a:srgbClr val="17364A"/>
                 </a:solidFill>
@@ -6360,11 +6441,14 @@
               </a:rPr>
               <a:t>Who has authority to approve or pause the work?</a:t>
             </a:r>
-            <a:endParaRPr lang="en-US" sz="1380" dirty="0"/>
-          </a:p>
-          <a:p>
-            <a:r>
-              <a:rPr lang="en-US" sz="1380" dirty="0">
+            <a:endParaRPr lang="en-US" sz="1220" dirty="0"/>
+          </a:p>
+          <a:p>
+            <a:pPr indent="0" marL="0">
+              <a:buNone/>
+            </a:pPr>
+            <a:r>
+              <a:rPr lang="en-US" sz="1220" dirty="0">
                 <a:solidFill>
                   <a:srgbClr val="17364A"/>
                 </a:solidFill>
@@ -6372,9 +6456,9 @@
                 <a:ea typeface="Aptos" pitchFamily="34" charset="-122"/>
                 <a:cs typeface="Aptos" pitchFamily="34" charset="-120"/>
               </a:rPr>
-              <a:t>What evidence would show that the workflow is responsible and effective?</a:t>
-            </a:r>
-            <a:endParaRPr lang="en-US" sz="1380" dirty="0"/>
+              <a:t>What evidence would show that the workflow is responsible and.</a:t>
+            </a:r>
+            <a:endParaRPr lang="en-US" sz="1220" dirty="0"/>
           </a:p>
         </p:txBody>
       </p:sp>
@@ -6452,17 +6536,17 @@
         </p:nvSpPr>
         <p:spPr>
           <a:xfrm>
-            <a:off x="7799832" y="5001768"/>
-            <a:ext cx="3145536" cy="502920"/>
-          </a:xfrm>
-          <a:prstGeom prst="rect">
-            <a:avLst/>
-          </a:prstGeom>
-          <a:noFill/>
-          <a:ln/>
-        </p:spPr>
-        <p:txBody>
-          <a:bodyPr wrap="square" lIns="0" tIns="0" rIns="0" bIns="0" rtlCol="0" anchor="t">
+            <a:off x="7799832" y="4974336"/>
+            <a:ext cx="3145536" cy="576072"/>
+          </a:xfrm>
+          <a:prstGeom prst="rect">
+            <a:avLst/>
+          </a:prstGeom>
+          <a:noFill/>
+          <a:ln/>
+        </p:spPr>
+        <p:txBody>
+          <a:bodyPr wrap="square" lIns="254" tIns="254" rIns="254" bIns="254" rtlCol="0" anchor="t">
             <a:normAutofit/>
           </a:bodyPr>
           <a:lstStyle/>
@@ -6471,7 +6555,7 @@
               <a:buNone/>
             </a:pPr>
             <a:r>
-              <a:rPr lang="en-US" sz="1550" dirty="0">
+              <a:rPr lang="en-US" sz="1320" dirty="0">
                 <a:solidFill>
                   <a:srgbClr val="17364A"/>
                 </a:solidFill>
@@ -6479,9 +6563,9 @@
                 <a:ea typeface="Aptos" pitchFamily="34" charset="-122"/>
                 <a:cs typeface="Aptos" pitchFamily="34" charset="-120"/>
               </a:rPr>
-              <a:t>Translate this concept into clear decision rights, review steps, documentation expectations, and escalation paths before an AI-supported workflow is approved.</a:t>
-            </a:r>
-            <a:endParaRPr lang="en-US" sz="1550" dirty="0"/>
+              <a:t>Translate this concept into clear decision rights, review steps, documentation expectations, and escalation paths before.</a:t>
+            </a:r>
+            <a:endParaRPr lang="en-US" sz="1320" dirty="0"/>
           </a:p>
         </p:txBody>
       </p:sp>
@@ -6782,35 +6866,41 @@
           <a:ln/>
         </p:spPr>
         <p:txBody>
-          <a:bodyPr wrap="square" lIns="635" tIns="635" rIns="635" bIns="635" rtlCol="0" anchor="t">
+          <a:bodyPr wrap="square" lIns="1016" tIns="1016" rIns="1016" bIns="1016" rtlCol="0" anchor="t">
             <a:normAutofit/>
           </a:bodyPr>
           <a:lstStyle/>
           <a:p>
+            <a:pPr indent="0" marL="0">
+              <a:buNone/>
+            </a:pPr>
             <a:r>
               <a:rPr lang="en-US" sz="2100" dirty="0">
                 <a:solidFill>
-                  <a:srgbClr val="17364A"/>
-                </a:solidFill>
-                <a:latin typeface="Aptos" pitchFamily="34" charset="0"/>
-                <a:ea typeface="Aptos" pitchFamily="34" charset="-122"/>
-                <a:cs typeface="Aptos" pitchFamily="34" charset="-120"/>
-              </a:rPr>
-              <a:t>What equity, privacy, legal, security, or public trust risks require review?</a:t>
+                  <a:srgbClr val="003A63"/>
+                </a:solidFill>
+                <a:latin typeface="Aptos" pitchFamily="34" charset="0"/>
+                <a:ea typeface="Aptos" pitchFamily="34" charset="-122"/>
+                <a:cs typeface="Aptos" pitchFamily="34" charset="-120"/>
+              </a:rPr>
+              <a:t>• What equity, privacy, legal, security, or public trust risks require review?</a:t>
             </a:r>
             <a:endParaRPr lang="en-US" sz="2100" dirty="0"/>
           </a:p>
           <a:p>
+            <a:pPr indent="0" marL="0">
+              <a:buNone/>
+            </a:pPr>
             <a:r>
               <a:rPr lang="en-US" sz="2100" dirty="0">
                 <a:solidFill>
-                  <a:srgbClr val="17364A"/>
-                </a:solidFill>
-                <a:latin typeface="Aptos" pitchFamily="34" charset="0"/>
-                <a:ea typeface="Aptos" pitchFamily="34" charset="-122"/>
-                <a:cs typeface="Aptos" pitchFamily="34" charset="-120"/>
-              </a:rPr>
-              <a:t>How will the agency know when the workflow needs to be revised?</a:t>
+                  <a:srgbClr val="003A63"/>
+                </a:solidFill>
+                <a:latin typeface="Aptos" pitchFamily="34" charset="0"/>
+                <a:ea typeface="Aptos" pitchFamily="34" charset="-122"/>
+                <a:cs typeface="Aptos" pitchFamily="34" charset="-120"/>
+              </a:rPr>
+              <a:t>• How will the agency know when the workflow needs to be revised?</a:t>
             </a:r>
             <a:endParaRPr lang="en-US" sz="2100" dirty="0"/>
           </a:p>
@@ -6890,17 +6980,17 @@
         </p:nvSpPr>
         <p:spPr>
           <a:xfrm>
-            <a:off x="7799832" y="1828800"/>
-            <a:ext cx="3145536" cy="685800"/>
-          </a:xfrm>
-          <a:prstGeom prst="rect">
-            <a:avLst/>
-          </a:prstGeom>
-          <a:noFill/>
-          <a:ln/>
-        </p:spPr>
-        <p:txBody>
-          <a:bodyPr wrap="square" lIns="0" tIns="0" rIns="0" bIns="0" rtlCol="0" anchor="t">
+            <a:off x="7799832" y="1801368"/>
+            <a:ext cx="3145536" cy="758952"/>
+          </a:xfrm>
+          <a:prstGeom prst="rect">
+            <a:avLst/>
+          </a:prstGeom>
+          <a:noFill/>
+          <a:ln/>
+        </p:spPr>
+        <p:txBody>
+          <a:bodyPr wrap="square" lIns="254" tIns="254" rIns="254" bIns="254" rtlCol="0" anchor="t">
             <a:normAutofit/>
           </a:bodyPr>
           <a:lstStyle/>
@@ -6909,7 +6999,7 @@
               <a:buNone/>
             </a:pPr>
             <a:r>
-              <a:rPr lang="en-US" sz="1550" dirty="0">
+              <a:rPr lang="en-US" sz="1320" dirty="0">
                 <a:solidFill>
                   <a:srgbClr val="17364A"/>
                 </a:solidFill>
@@ -6919,7 +7009,7 @@
               </a:rPr>
               <a:t>What equity, privacy, legal, security, or public trust risks require review?</a:t>
             </a:r>
-            <a:endParaRPr lang="en-US" sz="1550" dirty="0"/>
+            <a:endParaRPr lang="en-US" sz="1320" dirty="0"/>
           </a:p>
         </p:txBody>
       </p:sp>
@@ -7007,13 +7097,16 @@
           <a:ln/>
         </p:spPr>
         <p:txBody>
-          <a:bodyPr wrap="square" lIns="254" tIns="254" rIns="254" bIns="254" rtlCol="0" anchor="t">
+          <a:bodyPr wrap="square" lIns="508" tIns="508" rIns="508" bIns="508" rtlCol="0" anchor="t">
             <a:normAutofit/>
           </a:bodyPr>
           <a:lstStyle/>
           <a:p>
-            <a:r>
-              <a:rPr lang="en-US" sz="1380" dirty="0">
+            <a:pPr indent="0" marL="0">
+              <a:buNone/>
+            </a:pPr>
+            <a:r>
+              <a:rPr lang="en-US" sz="1220" dirty="0">
                 <a:solidFill>
                   <a:srgbClr val="17364A"/>
                 </a:solidFill>
@@ -7021,13 +7114,16 @@
                 <a:ea typeface="Aptos" pitchFamily="34" charset="-122"/>
                 <a:cs typeface="Aptos" pitchFamily="34" charset="-120"/>
               </a:rPr>
-              <a:t>What equity, privacy, legal, security, or public trust risks require review?</a:t>
-            </a:r>
-            <a:endParaRPr lang="en-US" sz="1380" dirty="0"/>
-          </a:p>
-          <a:p>
-            <a:r>
-              <a:rPr lang="en-US" sz="1380" dirty="0">
+              <a:t>What equity, privacy, legal, security, or public trust risks.</a:t>
+            </a:r>
+            <a:endParaRPr lang="en-US" sz="1220" dirty="0"/>
+          </a:p>
+          <a:p>
+            <a:pPr indent="0" marL="0">
+              <a:buNone/>
+            </a:pPr>
+            <a:r>
+              <a:rPr lang="en-US" sz="1220" dirty="0">
                 <a:solidFill>
                   <a:srgbClr val="17364A"/>
                 </a:solidFill>
@@ -7037,7 +7133,7 @@
               </a:rPr>
               <a:t>How will the agency know when the workflow needs to be revised?</a:t>
             </a:r>
-            <a:endParaRPr lang="en-US" sz="1380" dirty="0"/>
+            <a:endParaRPr lang="en-US" sz="1220" dirty="0"/>
           </a:p>
         </p:txBody>
       </p:sp>
@@ -7115,17 +7211,17 @@
         </p:nvSpPr>
         <p:spPr>
           <a:xfrm>
-            <a:off x="7799832" y="5001768"/>
-            <a:ext cx="3145536" cy="502920"/>
-          </a:xfrm>
-          <a:prstGeom prst="rect">
-            <a:avLst/>
-          </a:prstGeom>
-          <a:noFill/>
-          <a:ln/>
-        </p:spPr>
-        <p:txBody>
-          <a:bodyPr wrap="square" lIns="0" tIns="0" rIns="0" bIns="0" rtlCol="0" anchor="t">
+            <a:off x="7799832" y="4974336"/>
+            <a:ext cx="3145536" cy="576072"/>
+          </a:xfrm>
+          <a:prstGeom prst="rect">
+            <a:avLst/>
+          </a:prstGeom>
+          <a:noFill/>
+          <a:ln/>
+        </p:spPr>
+        <p:txBody>
+          <a:bodyPr wrap="square" lIns="254" tIns="254" rIns="254" bIns="254" rtlCol="0" anchor="t">
             <a:normAutofit/>
           </a:bodyPr>
           <a:lstStyle/>
@@ -7134,7 +7230,7 @@
               <a:buNone/>
             </a:pPr>
             <a:r>
-              <a:rPr lang="en-US" sz="1550" dirty="0">
+              <a:rPr lang="en-US" sz="1320" dirty="0">
                 <a:solidFill>
                   <a:srgbClr val="17364A"/>
                 </a:solidFill>
@@ -7142,9 +7238,9 @@
                 <a:ea typeface="Aptos" pitchFamily="34" charset="-122"/>
                 <a:cs typeface="Aptos" pitchFamily="34" charset="-120"/>
               </a:rPr>
-              <a:t>Translate this concept into clear decision rights, review steps, documentation expectations, and escalation paths before an AI-supported workflow is approved.</a:t>
-            </a:r>
-            <a:endParaRPr lang="en-US" sz="1550" dirty="0"/>
+              <a:t>Translate this concept into clear decision rights, review steps, documentation expectations, and escalation paths before.</a:t>
+            </a:r>
+            <a:endParaRPr lang="en-US" sz="1320" dirty="0"/>
           </a:p>
         </p:txBody>
       </p:sp>
@@ -7445,35 +7541,41 @@
           <a:ln/>
         </p:spPr>
         <p:txBody>
-          <a:bodyPr wrap="square" lIns="635" tIns="635" rIns="635" bIns="635" rtlCol="0" anchor="t">
+          <a:bodyPr wrap="square" lIns="1016" tIns="1016" rIns="1016" bIns="1016" rtlCol="0" anchor="t">
             <a:normAutofit/>
           </a:bodyPr>
           <a:lstStyle/>
           <a:p>
+            <a:pPr indent="0" marL="0">
+              <a:buNone/>
+            </a:pPr>
             <a:r>
               <a:rPr lang="en-US" sz="2100" dirty="0">
                 <a:solidFill>
-                  <a:srgbClr val="17364A"/>
-                </a:solidFill>
-                <a:latin typeface="Aptos" pitchFamily="34" charset="0"/>
-                <a:ea typeface="Aptos" pitchFamily="34" charset="-122"/>
-                <a:cs typeface="Aptos" pitchFamily="34" charset="-120"/>
-              </a:rPr>
-              <a:t>Create a practical ai policy development and approval workflow artifact for one AI-supported public.</a:t>
+                  <a:srgbClr val="003A63"/>
+                </a:solidFill>
+                <a:latin typeface="Aptos" pitchFamily="34" charset="0"/>
+                <a:ea typeface="Aptos" pitchFamily="34" charset="-122"/>
+                <a:cs typeface="Aptos" pitchFamily="34" charset="-120"/>
+              </a:rPr>
+              <a:t>• Create a practical ai policy development and approval workflow artifact for one AI-supported.</a:t>
             </a:r>
             <a:endParaRPr lang="en-US" sz="2100" dirty="0"/>
           </a:p>
           <a:p>
+            <a:pPr indent="0" marL="0">
+              <a:buNone/>
+            </a:pPr>
             <a:r>
               <a:rPr lang="en-US" sz="2100" dirty="0">
                 <a:solidFill>
-                  <a:srgbClr val="17364A"/>
-                </a:solidFill>
-                <a:latin typeface="Aptos" pitchFamily="34" charset="0"/>
-                <a:ea typeface="Aptos" pitchFamily="34" charset="-122"/>
-                <a:cs typeface="Aptos" pitchFamily="34" charset="-120"/>
-              </a:rPr>
-              <a:t>The artifact should define the use case, affected roles, review criteria, safeguards, documentation.</a:t>
+                  <a:srgbClr val="003A63"/>
+                </a:solidFill>
+                <a:latin typeface="Aptos" pitchFamily="34" charset="0"/>
+                <a:ea typeface="Aptos" pitchFamily="34" charset="-122"/>
+                <a:cs typeface="Aptos" pitchFamily="34" charset="-120"/>
+              </a:rPr>
+              <a:t>• The artifact should define the use case, affected roles, review criteria, safeguards,.</a:t>
             </a:r>
             <a:endParaRPr lang="en-US" sz="2100" dirty="0"/>
           </a:p>
@@ -7553,17 +7655,17 @@
         </p:nvSpPr>
         <p:spPr>
           <a:xfrm>
-            <a:off x="7799832" y="1828800"/>
-            <a:ext cx="3145536" cy="685800"/>
-          </a:xfrm>
-          <a:prstGeom prst="rect">
-            <a:avLst/>
-          </a:prstGeom>
-          <a:noFill/>
-          <a:ln/>
-        </p:spPr>
-        <p:txBody>
-          <a:bodyPr wrap="square" lIns="0" tIns="0" rIns="0" bIns="0" rtlCol="0" anchor="t">
+            <a:off x="7799832" y="1801368"/>
+            <a:ext cx="3145536" cy="758952"/>
+          </a:xfrm>
+          <a:prstGeom prst="rect">
+            <a:avLst/>
+          </a:prstGeom>
+          <a:noFill/>
+          <a:ln/>
+        </p:spPr>
+        <p:txBody>
+          <a:bodyPr wrap="square" lIns="254" tIns="254" rIns="254" bIns="254" rtlCol="0" anchor="t">
             <a:normAutofit/>
           </a:bodyPr>
           <a:lstStyle/>
@@ -7572,7 +7674,7 @@
               <a:buNone/>
             </a:pPr>
             <a:r>
-              <a:rPr lang="en-US" sz="1550" dirty="0">
+              <a:rPr lang="en-US" sz="1320" dirty="0">
                 <a:solidFill>
                   <a:srgbClr val="17364A"/>
                 </a:solidFill>
@@ -7582,7 +7684,7 @@
               </a:rPr>
               <a:t>Create a practical ai policy development and approval workflow artifact for one AI-supported public.</a:t>
             </a:r>
-            <a:endParaRPr lang="en-US" sz="1550" dirty="0"/>
+            <a:endParaRPr lang="en-US" sz="1320" dirty="0"/>
           </a:p>
         </p:txBody>
       </p:sp>
@@ -7670,13 +7772,16 @@
           <a:ln/>
         </p:spPr>
         <p:txBody>
-          <a:bodyPr wrap="square" lIns="254" tIns="254" rIns="254" bIns="254" rtlCol="0" anchor="t">
+          <a:bodyPr wrap="square" lIns="508" tIns="508" rIns="508" bIns="508" rtlCol="0" anchor="t">
             <a:normAutofit/>
           </a:bodyPr>
           <a:lstStyle/>
           <a:p>
-            <a:r>
-              <a:rPr lang="en-US" sz="1380" dirty="0">
+            <a:pPr indent="0" marL="0">
+              <a:buNone/>
+            </a:pPr>
+            <a:r>
+              <a:rPr lang="en-US" sz="1220" dirty="0">
                 <a:solidFill>
                   <a:srgbClr val="17364A"/>
                 </a:solidFill>
@@ -7684,13 +7789,16 @@
                 <a:ea typeface="Aptos" pitchFamily="34" charset="-122"/>
                 <a:cs typeface="Aptos" pitchFamily="34" charset="-120"/>
               </a:rPr>
-              <a:t>Create a practical ai policy development and approval workflow artifact for one.</a:t>
-            </a:r>
-            <a:endParaRPr lang="en-US" sz="1380" dirty="0"/>
-          </a:p>
-          <a:p>
-            <a:r>
-              <a:rPr lang="en-US" sz="1380" dirty="0">
+              <a:t>Create a practical ai policy development and approval workflow.</a:t>
+            </a:r>
+            <a:endParaRPr lang="en-US" sz="1220" dirty="0"/>
+          </a:p>
+          <a:p>
+            <a:pPr indent="0" marL="0">
+              <a:buNone/>
+            </a:pPr>
+            <a:r>
+              <a:rPr lang="en-US" sz="1220" dirty="0">
                 <a:solidFill>
                   <a:srgbClr val="17364A"/>
                 </a:solidFill>
@@ -7698,9 +7806,9 @@
                 <a:ea typeface="Aptos" pitchFamily="34" charset="-122"/>
                 <a:cs typeface="Aptos" pitchFamily="34" charset="-120"/>
               </a:rPr>
-              <a:t>The artifact should define the use case, affected roles, review criteria, safeguards,.</a:t>
-            </a:r>
-            <a:endParaRPr lang="en-US" sz="1380" dirty="0"/>
+              <a:t>The artifact should define the use case, affected roles, review.</a:t>
+            </a:r>
+            <a:endParaRPr lang="en-US" sz="1220" dirty="0"/>
           </a:p>
         </p:txBody>
       </p:sp>
@@ -7778,17 +7886,17 @@
         </p:nvSpPr>
         <p:spPr>
           <a:xfrm>
-            <a:off x="7799832" y="5001768"/>
-            <a:ext cx="3145536" cy="502920"/>
-          </a:xfrm>
-          <a:prstGeom prst="rect">
-            <a:avLst/>
-          </a:prstGeom>
-          <a:noFill/>
-          <a:ln/>
-        </p:spPr>
-        <p:txBody>
-          <a:bodyPr wrap="square" lIns="0" tIns="0" rIns="0" bIns="0" rtlCol="0" anchor="t">
+            <a:off x="7799832" y="4974336"/>
+            <a:ext cx="3145536" cy="576072"/>
+          </a:xfrm>
+          <a:prstGeom prst="rect">
+            <a:avLst/>
+          </a:prstGeom>
+          <a:noFill/>
+          <a:ln/>
+        </p:spPr>
+        <p:txBody>
+          <a:bodyPr wrap="square" lIns="254" tIns="254" rIns="254" bIns="254" rtlCol="0" anchor="t">
             <a:normAutofit/>
           </a:bodyPr>
           <a:lstStyle/>
@@ -7797,7 +7905,7 @@
               <a:buNone/>
             </a:pPr>
             <a:r>
-              <a:rPr lang="en-US" sz="1550" dirty="0">
+              <a:rPr lang="en-US" sz="1320" dirty="0">
                 <a:solidFill>
                   <a:srgbClr val="17364A"/>
                 </a:solidFill>
@@ -7805,9 +7913,9 @@
                 <a:ea typeface="Aptos" pitchFamily="34" charset="-122"/>
                 <a:cs typeface="Aptos" pitchFamily="34" charset="-120"/>
               </a:rPr>
-              <a:t>Use the assignment to test whether you can explain the concept, apply it to a realistic public health situation, and identify what would need review before the work moves forward.</a:t>
-            </a:r>
-            <a:endParaRPr lang="en-US" sz="1550" dirty="0"/>
+              <a:t>Use the assignment to test whether you can explain the concept, apply it to a realistic public health situation, and.</a:t>
+            </a:r>
+            <a:endParaRPr lang="en-US" sz="1320" dirty="0"/>
           </a:p>
         </p:txBody>
       </p:sp>
@@ -8108,49 +8216,58 @@
           <a:ln/>
         </p:spPr>
         <p:txBody>
-          <a:bodyPr wrap="square" lIns="635" tIns="635" rIns="635" bIns="635" rtlCol="0" anchor="t">
+          <a:bodyPr wrap="square" lIns="1016" tIns="1016" rIns="1016" bIns="1016" rtlCol="0" anchor="t">
             <a:normAutofit/>
           </a:bodyPr>
           <a:lstStyle/>
           <a:p>
+            <a:pPr indent="0" marL="0">
+              <a:buNone/>
+            </a:pPr>
             <a:r>
               <a:rPr lang="en-US" sz="2100" dirty="0">
                 <a:solidFill>
-                  <a:srgbClr val="17364A"/>
-                </a:solidFill>
-                <a:latin typeface="Aptos" pitchFamily="34" charset="0"/>
-                <a:ea typeface="Aptos" pitchFamily="34" charset="-122"/>
-                <a:cs typeface="Aptos" pitchFamily="34" charset="-120"/>
-              </a:rPr>
-              <a:t>AI Policy Development and Approval Workflow artifact</a:t>
+                  <a:srgbClr val="003A63"/>
+                </a:solidFill>
+                <a:latin typeface="Aptos" pitchFamily="34" charset="0"/>
+                <a:ea typeface="Aptos" pitchFamily="34" charset="-122"/>
+                <a:cs typeface="Aptos" pitchFamily="34" charset="-120"/>
+              </a:rPr>
+              <a:t>• AI Policy Development and Approval Workflow artifact</a:t>
             </a:r>
             <a:endParaRPr lang="en-US" sz="2100" dirty="0"/>
           </a:p>
           <a:p>
+            <a:pPr indent="0" marL="0">
+              <a:buNone/>
+            </a:pPr>
             <a:r>
               <a:rPr lang="en-US" sz="2100" dirty="0">
                 <a:solidFill>
-                  <a:srgbClr val="17364A"/>
-                </a:solidFill>
-                <a:latin typeface="Aptos" pitchFamily="34" charset="0"/>
-                <a:ea typeface="Aptos" pitchFamily="34" charset="-122"/>
-                <a:cs typeface="Aptos" pitchFamily="34" charset="-120"/>
-              </a:rPr>
-              <a:t>Role and responsibility table</a:t>
+                  <a:srgbClr val="003A63"/>
+                </a:solidFill>
+                <a:latin typeface="Aptos" pitchFamily="34" charset="0"/>
+                <a:ea typeface="Aptos" pitchFamily="34" charset="-122"/>
+                <a:cs typeface="Aptos" pitchFamily="34" charset="-120"/>
+              </a:rPr>
+              <a:t>• Role and responsibility table</a:t>
             </a:r>
             <a:endParaRPr lang="en-US" sz="2100" dirty="0"/>
           </a:p>
           <a:p>
+            <a:pPr indent="0" marL="0">
+              <a:buNone/>
+            </a:pPr>
             <a:r>
               <a:rPr lang="en-US" sz="2100" dirty="0">
                 <a:solidFill>
-                  <a:srgbClr val="17364A"/>
-                </a:solidFill>
-                <a:latin typeface="Aptos" pitchFamily="34" charset="0"/>
-                <a:ea typeface="Aptos" pitchFamily="34" charset="-122"/>
-                <a:cs typeface="Aptos" pitchFamily="34" charset="-120"/>
-              </a:rPr>
-              <a:t>Risk and safeguard summary</a:t>
+                  <a:srgbClr val="003A63"/>
+                </a:solidFill>
+                <a:latin typeface="Aptos" pitchFamily="34" charset="0"/>
+                <a:ea typeface="Aptos" pitchFamily="34" charset="-122"/>
+                <a:cs typeface="Aptos" pitchFamily="34" charset="-120"/>
+              </a:rPr>
+              <a:t>• Risk and safeguard summary</a:t>
             </a:r>
             <a:endParaRPr lang="en-US" sz="2100" dirty="0"/>
           </a:p>
@@ -8230,17 +8347,17 @@
         </p:nvSpPr>
         <p:spPr>
           <a:xfrm>
-            <a:off x="7799832" y="1828800"/>
-            <a:ext cx="3145536" cy="685800"/>
-          </a:xfrm>
-          <a:prstGeom prst="rect">
-            <a:avLst/>
-          </a:prstGeom>
-          <a:noFill/>
-          <a:ln/>
-        </p:spPr>
-        <p:txBody>
-          <a:bodyPr wrap="square" lIns="0" tIns="0" rIns="0" bIns="0" rtlCol="0" anchor="t">
+            <a:off x="7799832" y="1801368"/>
+            <a:ext cx="3145536" cy="758952"/>
+          </a:xfrm>
+          <a:prstGeom prst="rect">
+            <a:avLst/>
+          </a:prstGeom>
+          <a:noFill/>
+          <a:ln/>
+        </p:spPr>
+        <p:txBody>
+          <a:bodyPr wrap="square" lIns="254" tIns="254" rIns="254" bIns="254" rtlCol="0" anchor="t">
             <a:normAutofit/>
           </a:bodyPr>
           <a:lstStyle/>
@@ -8249,7 +8366,7 @@
               <a:buNone/>
             </a:pPr>
             <a:r>
-              <a:rPr lang="en-US" sz="1550" dirty="0">
+              <a:rPr lang="en-US" sz="1320" dirty="0">
                 <a:solidFill>
                   <a:srgbClr val="17364A"/>
                 </a:solidFill>
@@ -8259,7 +8376,7 @@
               </a:rPr>
               <a:t>AI Policy Development and Approval Workflow artifact</a:t>
             </a:r>
-            <a:endParaRPr lang="en-US" sz="1550" dirty="0"/>
+            <a:endParaRPr lang="en-US" sz="1320" dirty="0"/>
           </a:p>
         </p:txBody>
       </p:sp>
@@ -8347,13 +8464,16 @@
           <a:ln/>
         </p:spPr>
         <p:txBody>
-          <a:bodyPr wrap="square" lIns="254" tIns="254" rIns="254" bIns="254" rtlCol="0" anchor="t">
+          <a:bodyPr wrap="square" lIns="508" tIns="508" rIns="508" bIns="508" rtlCol="0" anchor="t">
             <a:normAutofit/>
           </a:bodyPr>
           <a:lstStyle/>
           <a:p>
-            <a:r>
-              <a:rPr lang="en-US" sz="1380" dirty="0">
+            <a:pPr indent="0" marL="0">
+              <a:buNone/>
+            </a:pPr>
+            <a:r>
+              <a:rPr lang="en-US" sz="1220" dirty="0">
                 <a:solidFill>
                   <a:srgbClr val="17364A"/>
                 </a:solidFill>
@@ -8363,11 +8483,14 @@
               </a:rPr>
               <a:t>AI Policy Development and Approval Workflow artifact</a:t>
             </a:r>
-            <a:endParaRPr lang="en-US" sz="1380" dirty="0"/>
-          </a:p>
-          <a:p>
-            <a:r>
-              <a:rPr lang="en-US" sz="1380" dirty="0">
+            <a:endParaRPr lang="en-US" sz="1220" dirty="0"/>
+          </a:p>
+          <a:p>
+            <a:pPr indent="0" marL="0">
+              <a:buNone/>
+            </a:pPr>
+            <a:r>
+              <a:rPr lang="en-US" sz="1220" dirty="0">
                 <a:solidFill>
                   <a:srgbClr val="17364A"/>
                 </a:solidFill>
@@ -8377,11 +8500,14 @@
               </a:rPr>
               <a:t>Role and responsibility table</a:t>
             </a:r>
-            <a:endParaRPr lang="en-US" sz="1380" dirty="0"/>
-          </a:p>
-          <a:p>
-            <a:r>
-              <a:rPr lang="en-US" sz="1380" dirty="0">
+            <a:endParaRPr lang="en-US" sz="1220" dirty="0"/>
+          </a:p>
+          <a:p>
+            <a:pPr indent="0" marL="0">
+              <a:buNone/>
+            </a:pPr>
+            <a:r>
+              <a:rPr lang="en-US" sz="1220" dirty="0">
                 <a:solidFill>
                   <a:srgbClr val="17364A"/>
                 </a:solidFill>
@@ -8391,7 +8517,7 @@
               </a:rPr>
               <a:t>Risk and safeguard summary</a:t>
             </a:r>
-            <a:endParaRPr lang="en-US" sz="1380" dirty="0"/>
+            <a:endParaRPr lang="en-US" sz="1220" dirty="0"/>
           </a:p>
         </p:txBody>
       </p:sp>
@@ -8469,17 +8595,17 @@
         </p:nvSpPr>
         <p:spPr>
           <a:xfrm>
-            <a:off x="7799832" y="5001768"/>
-            <a:ext cx="3145536" cy="502920"/>
-          </a:xfrm>
-          <a:prstGeom prst="rect">
-            <a:avLst/>
-          </a:prstGeom>
-          <a:noFill/>
-          <a:ln/>
-        </p:spPr>
-        <p:txBody>
-          <a:bodyPr wrap="square" lIns="0" tIns="0" rIns="0" bIns="0" rtlCol="0" anchor="t">
+            <a:off x="7799832" y="4974336"/>
+            <a:ext cx="3145536" cy="576072"/>
+          </a:xfrm>
+          <a:prstGeom prst="rect">
+            <a:avLst/>
+          </a:prstGeom>
+          <a:noFill/>
+          <a:ln/>
+        </p:spPr>
+        <p:txBody>
+          <a:bodyPr wrap="square" lIns="254" tIns="254" rIns="254" bIns="254" rtlCol="0" anchor="t">
             <a:normAutofit/>
           </a:bodyPr>
           <a:lstStyle/>
@@ -8488,7 +8614,7 @@
               <a:buNone/>
             </a:pPr>
             <a:r>
-              <a:rPr lang="en-US" sz="1550" dirty="0">
+              <a:rPr lang="en-US" sz="1320" dirty="0">
                 <a:solidFill>
                   <a:srgbClr val="17364A"/>
                 </a:solidFill>
@@ -8496,9 +8622,9 @@
                 <a:ea typeface="Aptos" pitchFamily="34" charset="-122"/>
                 <a:cs typeface="Aptos" pitchFamily="34" charset="-120"/>
               </a:rPr>
-              <a:t>Translate this concept into clear decision rights, review steps, documentation expectations, and escalation paths before an AI-supported workflow is approved.</a:t>
-            </a:r>
-            <a:endParaRPr lang="en-US" sz="1550" dirty="0"/>
+              <a:t>Translate this concept into clear decision rights, review steps, documentation expectations, and escalation paths before.</a:t>
+            </a:r>
+            <a:endParaRPr lang="en-US" sz="1320" dirty="0"/>
           </a:p>
         </p:txBody>
       </p:sp>
@@ -8799,35 +8925,41 @@
           <a:ln/>
         </p:spPr>
         <p:txBody>
-          <a:bodyPr wrap="square" lIns="635" tIns="635" rIns="635" bIns="635" rtlCol="0" anchor="t">
+          <a:bodyPr wrap="square" lIns="1016" tIns="1016" rIns="1016" bIns="1016" rtlCol="0" anchor="t">
             <a:normAutofit/>
           </a:bodyPr>
           <a:lstStyle/>
           <a:p>
+            <a:pPr indent="0" marL="0">
+              <a:buNone/>
+            </a:pPr>
             <a:r>
               <a:rPr lang="en-US" sz="2100" dirty="0">
                 <a:solidFill>
-                  <a:srgbClr val="17364A"/>
-                </a:solidFill>
-                <a:latin typeface="Aptos" pitchFamily="34" charset="0"/>
-                <a:ea typeface="Aptos" pitchFamily="34" charset="-122"/>
-                <a:cs typeface="Aptos" pitchFamily="34" charset="-120"/>
-              </a:rPr>
-              <a:t>Escalation and monitoring plan</a:t>
+                  <a:srgbClr val="003A63"/>
+                </a:solidFill>
+                <a:latin typeface="Aptos" pitchFamily="34" charset="0"/>
+                <a:ea typeface="Aptos" pitchFamily="34" charset="-122"/>
+                <a:cs typeface="Aptos" pitchFamily="34" charset="-120"/>
+              </a:rPr>
+              <a:t>• Escalation and monitoring plan</a:t>
             </a:r>
             <a:endParaRPr lang="en-US" sz="2100" dirty="0"/>
           </a:p>
           <a:p>
+            <a:pPr indent="0" marL="0">
+              <a:buNone/>
+            </a:pPr>
             <a:r>
               <a:rPr lang="en-US" sz="2100" dirty="0">
                 <a:solidFill>
-                  <a:srgbClr val="17364A"/>
-                </a:solidFill>
-                <a:latin typeface="Aptos" pitchFamily="34" charset="0"/>
-                <a:ea typeface="Aptos" pitchFamily="34" charset="-122"/>
-                <a:cs typeface="Aptos" pitchFamily="34" charset="-120"/>
-              </a:rPr>
-              <a:t>Approval or review note</a:t>
+                  <a:srgbClr val="003A63"/>
+                </a:solidFill>
+                <a:latin typeface="Aptos" pitchFamily="34" charset="0"/>
+                <a:ea typeface="Aptos" pitchFamily="34" charset="-122"/>
+                <a:cs typeface="Aptos" pitchFamily="34" charset="-120"/>
+              </a:rPr>
+              <a:t>• Approval or review note</a:t>
             </a:r>
             <a:endParaRPr lang="en-US" sz="2100" dirty="0"/>
           </a:p>
@@ -8907,17 +9039,17 @@
         </p:nvSpPr>
         <p:spPr>
           <a:xfrm>
-            <a:off x="7799832" y="1828800"/>
-            <a:ext cx="3145536" cy="685800"/>
-          </a:xfrm>
-          <a:prstGeom prst="rect">
-            <a:avLst/>
-          </a:prstGeom>
-          <a:noFill/>
-          <a:ln/>
-        </p:spPr>
-        <p:txBody>
-          <a:bodyPr wrap="square" lIns="0" tIns="0" rIns="0" bIns="0" rtlCol="0" anchor="t">
+            <a:off x="7799832" y="1801368"/>
+            <a:ext cx="3145536" cy="758952"/>
+          </a:xfrm>
+          <a:prstGeom prst="rect">
+            <a:avLst/>
+          </a:prstGeom>
+          <a:noFill/>
+          <a:ln/>
+        </p:spPr>
+        <p:txBody>
+          <a:bodyPr wrap="square" lIns="254" tIns="254" rIns="254" bIns="254" rtlCol="0" anchor="t">
             <a:normAutofit/>
           </a:bodyPr>
           <a:lstStyle/>
@@ -8926,7 +9058,7 @@
               <a:buNone/>
             </a:pPr>
             <a:r>
-              <a:rPr lang="en-US" sz="1550" dirty="0">
+              <a:rPr lang="en-US" sz="1320" dirty="0">
                 <a:solidFill>
                   <a:srgbClr val="17364A"/>
                 </a:solidFill>
@@ -8936,7 +9068,7 @@
               </a:rPr>
               <a:t>Escalation and monitoring plan</a:t>
             </a:r>
-            <a:endParaRPr lang="en-US" sz="1550" dirty="0"/>
+            <a:endParaRPr lang="en-US" sz="1320" dirty="0"/>
           </a:p>
         </p:txBody>
       </p:sp>
@@ -9024,13 +9156,16 @@
           <a:ln/>
         </p:spPr>
         <p:txBody>
-          <a:bodyPr wrap="square" lIns="254" tIns="254" rIns="254" bIns="254" rtlCol="0" anchor="t">
+          <a:bodyPr wrap="square" lIns="508" tIns="508" rIns="508" bIns="508" rtlCol="0" anchor="t">
             <a:normAutofit/>
           </a:bodyPr>
           <a:lstStyle/>
           <a:p>
-            <a:r>
-              <a:rPr lang="en-US" sz="1380" dirty="0">
+            <a:pPr indent="0" marL="0">
+              <a:buNone/>
+            </a:pPr>
+            <a:r>
+              <a:rPr lang="en-US" sz="1220" dirty="0">
                 <a:solidFill>
                   <a:srgbClr val="17364A"/>
                 </a:solidFill>
@@ -9040,11 +9175,14 @@
               </a:rPr>
               <a:t>Escalation and monitoring plan</a:t>
             </a:r>
-            <a:endParaRPr lang="en-US" sz="1380" dirty="0"/>
-          </a:p>
-          <a:p>
-            <a:r>
-              <a:rPr lang="en-US" sz="1380" dirty="0">
+            <a:endParaRPr lang="en-US" sz="1220" dirty="0"/>
+          </a:p>
+          <a:p>
+            <a:pPr indent="0" marL="0">
+              <a:buNone/>
+            </a:pPr>
+            <a:r>
+              <a:rPr lang="en-US" sz="1220" dirty="0">
                 <a:solidFill>
                   <a:srgbClr val="17364A"/>
                 </a:solidFill>
@@ -9054,7 +9192,7 @@
               </a:rPr>
               <a:t>Approval or review note</a:t>
             </a:r>
-            <a:endParaRPr lang="en-US" sz="1380" dirty="0"/>
+            <a:endParaRPr lang="en-US" sz="1220" dirty="0"/>
           </a:p>
         </p:txBody>
       </p:sp>
@@ -9132,17 +9270,17 @@
         </p:nvSpPr>
         <p:spPr>
           <a:xfrm>
-            <a:off x="7799832" y="5001768"/>
-            <a:ext cx="3145536" cy="502920"/>
-          </a:xfrm>
-          <a:prstGeom prst="rect">
-            <a:avLst/>
-          </a:prstGeom>
-          <a:noFill/>
-          <a:ln/>
-        </p:spPr>
-        <p:txBody>
-          <a:bodyPr wrap="square" lIns="0" tIns="0" rIns="0" bIns="0" rtlCol="0" anchor="t">
+            <a:off x="7799832" y="4974336"/>
+            <a:ext cx="3145536" cy="576072"/>
+          </a:xfrm>
+          <a:prstGeom prst="rect">
+            <a:avLst/>
+          </a:prstGeom>
+          <a:noFill/>
+          <a:ln/>
+        </p:spPr>
+        <p:txBody>
+          <a:bodyPr wrap="square" lIns="254" tIns="254" rIns="254" bIns="254" rtlCol="0" anchor="t">
             <a:normAutofit/>
           </a:bodyPr>
           <a:lstStyle/>
@@ -9151,7 +9289,7 @@
               <a:buNone/>
             </a:pPr>
             <a:r>
-              <a:rPr lang="en-US" sz="1550" dirty="0">
+              <a:rPr lang="en-US" sz="1320" dirty="0">
                 <a:solidFill>
                   <a:srgbClr val="17364A"/>
                 </a:solidFill>
@@ -9159,9 +9297,9 @@
                 <a:ea typeface="Aptos" pitchFamily="34" charset="-122"/>
                 <a:cs typeface="Aptos" pitchFamily="34" charset="-120"/>
               </a:rPr>
-              <a:t>Translate this concept into clear decision rights, review steps, documentation expectations, and escalation paths before an AI-supported workflow is approved.</a:t>
-            </a:r>
-            <a:endParaRPr lang="en-US" sz="1550" dirty="0"/>
+              <a:t>Translate this concept into clear decision rights, review steps, documentation expectations, and escalation paths before.</a:t>
+            </a:r>
+            <a:endParaRPr lang="en-US" sz="1320" dirty="0"/>
           </a:p>
         </p:txBody>
       </p:sp>
@@ -9462,49 +9600,58 @@
           <a:ln/>
         </p:spPr>
         <p:txBody>
-          <a:bodyPr wrap="square" lIns="635" tIns="635" rIns="635" bIns="635" rtlCol="0" anchor="t">
+          <a:bodyPr wrap="square" lIns="1016" tIns="1016" rIns="1016" bIns="1016" rtlCol="0" anchor="t">
             <a:normAutofit/>
           </a:bodyPr>
           <a:lstStyle/>
           <a:p>
+            <a:pPr indent="0" marL="0">
+              <a:buNone/>
+            </a:pPr>
             <a:r>
               <a:rPr lang="en-US" sz="2100" dirty="0">
                 <a:solidFill>
-                  <a:srgbClr val="17364A"/>
-                </a:solidFill>
-                <a:latin typeface="Aptos" pitchFamily="34" charset="0"/>
-                <a:ea typeface="Aptos" pitchFamily="34" charset="-122"/>
-                <a:cs typeface="Aptos" pitchFamily="34" charset="-120"/>
-              </a:rPr>
-              <a:t>AI Policy Development and Approval Workflow artifact</a:t>
+                  <a:srgbClr val="003A63"/>
+                </a:solidFill>
+                <a:latin typeface="Aptos" pitchFamily="34" charset="0"/>
+                <a:ea typeface="Aptos" pitchFamily="34" charset="-122"/>
+                <a:cs typeface="Aptos" pitchFamily="34" charset="-120"/>
+              </a:rPr>
+              <a:t>• AI Policy Development and Approval Workflow artifact</a:t>
             </a:r>
             <a:endParaRPr lang="en-US" sz="2100" dirty="0"/>
           </a:p>
           <a:p>
+            <a:pPr indent="0" marL="0">
+              <a:buNone/>
+            </a:pPr>
             <a:r>
               <a:rPr lang="en-US" sz="2100" dirty="0">
                 <a:solidFill>
-                  <a:srgbClr val="17364A"/>
-                </a:solidFill>
-                <a:latin typeface="Aptos" pitchFamily="34" charset="0"/>
-                <a:ea typeface="Aptos" pitchFamily="34" charset="-122"/>
-                <a:cs typeface="Aptos" pitchFamily="34" charset="-120"/>
-              </a:rPr>
-              <a:t>Role and responsibility table</a:t>
+                  <a:srgbClr val="003A63"/>
+                </a:solidFill>
+                <a:latin typeface="Aptos" pitchFamily="34" charset="0"/>
+                <a:ea typeface="Aptos" pitchFamily="34" charset="-122"/>
+                <a:cs typeface="Aptos" pitchFamily="34" charset="-120"/>
+              </a:rPr>
+              <a:t>• Role and responsibility table</a:t>
             </a:r>
             <a:endParaRPr lang="en-US" sz="2100" dirty="0"/>
           </a:p>
           <a:p>
+            <a:pPr indent="0" marL="0">
+              <a:buNone/>
+            </a:pPr>
             <a:r>
               <a:rPr lang="en-US" sz="2100" dirty="0">
                 <a:solidFill>
-                  <a:srgbClr val="17364A"/>
-                </a:solidFill>
-                <a:latin typeface="Aptos" pitchFamily="34" charset="0"/>
-                <a:ea typeface="Aptos" pitchFamily="34" charset="-122"/>
-                <a:cs typeface="Aptos" pitchFamily="34" charset="-120"/>
-              </a:rPr>
-              <a:t>Risk and safeguard summary</a:t>
+                  <a:srgbClr val="003A63"/>
+                </a:solidFill>
+                <a:latin typeface="Aptos" pitchFamily="34" charset="0"/>
+                <a:ea typeface="Aptos" pitchFamily="34" charset="-122"/>
+                <a:cs typeface="Aptos" pitchFamily="34" charset="-120"/>
+              </a:rPr>
+              <a:t>• Risk and safeguard summary</a:t>
             </a:r>
             <a:endParaRPr lang="en-US" sz="2100" dirty="0"/>
           </a:p>
@@ -9584,17 +9731,17 @@
         </p:nvSpPr>
         <p:spPr>
           <a:xfrm>
-            <a:off x="7799832" y="1828800"/>
-            <a:ext cx="3145536" cy="685800"/>
-          </a:xfrm>
-          <a:prstGeom prst="rect">
-            <a:avLst/>
-          </a:prstGeom>
-          <a:noFill/>
-          <a:ln/>
-        </p:spPr>
-        <p:txBody>
-          <a:bodyPr wrap="square" lIns="0" tIns="0" rIns="0" bIns="0" rtlCol="0" anchor="t">
+            <a:off x="7799832" y="1801368"/>
+            <a:ext cx="3145536" cy="758952"/>
+          </a:xfrm>
+          <a:prstGeom prst="rect">
+            <a:avLst/>
+          </a:prstGeom>
+          <a:noFill/>
+          <a:ln/>
+        </p:spPr>
+        <p:txBody>
+          <a:bodyPr wrap="square" lIns="254" tIns="254" rIns="254" bIns="254" rtlCol="0" anchor="t">
             <a:normAutofit/>
           </a:bodyPr>
           <a:lstStyle/>
@@ -9603,7 +9750,7 @@
               <a:buNone/>
             </a:pPr>
             <a:r>
-              <a:rPr lang="en-US" sz="1550" dirty="0">
+              <a:rPr lang="en-US" sz="1320" dirty="0">
                 <a:solidFill>
                   <a:srgbClr val="17364A"/>
                 </a:solidFill>
@@ -9613,7 +9760,7 @@
               </a:rPr>
               <a:t>AI Policy Development and Approval Workflow artifact</a:t>
             </a:r>
-            <a:endParaRPr lang="en-US" sz="1550" dirty="0"/>
+            <a:endParaRPr lang="en-US" sz="1320" dirty="0"/>
           </a:p>
         </p:txBody>
       </p:sp>
@@ -9701,13 +9848,16 @@
           <a:ln/>
         </p:spPr>
         <p:txBody>
-          <a:bodyPr wrap="square" lIns="254" tIns="254" rIns="254" bIns="254" rtlCol="0" anchor="t">
+          <a:bodyPr wrap="square" lIns="508" tIns="508" rIns="508" bIns="508" rtlCol="0" anchor="t">
             <a:normAutofit/>
           </a:bodyPr>
           <a:lstStyle/>
           <a:p>
-            <a:r>
-              <a:rPr lang="en-US" sz="1380" dirty="0">
+            <a:pPr indent="0" marL="0">
+              <a:buNone/>
+            </a:pPr>
+            <a:r>
+              <a:rPr lang="en-US" sz="1220" dirty="0">
                 <a:solidFill>
                   <a:srgbClr val="17364A"/>
                 </a:solidFill>
@@ -9717,11 +9867,14 @@
               </a:rPr>
               <a:t>Escalation and monitoring plan</a:t>
             </a:r>
-            <a:endParaRPr lang="en-US" sz="1380" dirty="0"/>
-          </a:p>
-          <a:p>
-            <a:r>
-              <a:rPr lang="en-US" sz="1380" dirty="0">
+            <a:endParaRPr lang="en-US" sz="1220" dirty="0"/>
+          </a:p>
+          <a:p>
+            <a:pPr indent="0" marL="0">
+              <a:buNone/>
+            </a:pPr>
+            <a:r>
+              <a:rPr lang="en-US" sz="1220" dirty="0">
                 <a:solidFill>
                   <a:srgbClr val="17364A"/>
                 </a:solidFill>
@@ -9731,7 +9884,7 @@
               </a:rPr>
               <a:t>Approval or review note</a:t>
             </a:r>
-            <a:endParaRPr lang="en-US" sz="1380" dirty="0"/>
+            <a:endParaRPr lang="en-US" sz="1220" dirty="0"/>
           </a:p>
         </p:txBody>
       </p:sp>
@@ -9809,17 +9962,17 @@
         </p:nvSpPr>
         <p:spPr>
           <a:xfrm>
-            <a:off x="7799832" y="5001768"/>
-            <a:ext cx="3145536" cy="502920"/>
-          </a:xfrm>
-          <a:prstGeom prst="rect">
-            <a:avLst/>
-          </a:prstGeom>
-          <a:noFill/>
-          <a:ln/>
-        </p:spPr>
-        <p:txBody>
-          <a:bodyPr wrap="square" lIns="0" tIns="0" rIns="0" bIns="0" rtlCol="0" anchor="t">
+            <a:off x="7799832" y="4974336"/>
+            <a:ext cx="3145536" cy="576072"/>
+          </a:xfrm>
+          <a:prstGeom prst="rect">
+            <a:avLst/>
+          </a:prstGeom>
+          <a:noFill/>
+          <a:ln/>
+        </p:spPr>
+        <p:txBody>
+          <a:bodyPr wrap="square" lIns="254" tIns="254" rIns="254" bIns="254" rtlCol="0" anchor="t">
             <a:normAutofit/>
           </a:bodyPr>
           <a:lstStyle/>
@@ -9828,7 +9981,7 @@
               <a:buNone/>
             </a:pPr>
             <a:r>
-              <a:rPr lang="en-US" sz="1550" dirty="0">
+              <a:rPr lang="en-US" sz="1320" dirty="0">
                 <a:solidFill>
                   <a:srgbClr val="17364A"/>
                 </a:solidFill>
@@ -9836,9 +9989,9 @@
                 <a:ea typeface="Aptos" pitchFamily="34" charset="-122"/>
                 <a:cs typeface="Aptos" pitchFamily="34" charset="-120"/>
               </a:rPr>
-              <a:t>Use the assignment to test whether you can explain the concept, apply it to a realistic public health situation, and identify what would need review before the work moves forward.</a:t>
-            </a:r>
-            <a:endParaRPr lang="en-US" sz="1550" dirty="0"/>
+              <a:t>Use the assignment to test whether you can explain the concept, apply it to a realistic public health situation, and.</a:t>
+            </a:r>
+            <a:endParaRPr lang="en-US" sz="1320" dirty="0"/>
           </a:p>
         </p:txBody>
       </p:sp>
@@ -10139,49 +10292,58 @@
           <a:ln/>
         </p:spPr>
         <p:txBody>
-          <a:bodyPr wrap="square" lIns="635" tIns="635" rIns="635" bIns="635" rtlCol="0" anchor="t">
+          <a:bodyPr wrap="square" lIns="1016" tIns="1016" rIns="1016" bIns="1016" rtlCol="0" anchor="t">
             <a:normAutofit/>
           </a:bodyPr>
           <a:lstStyle/>
           <a:p>
+            <a:pPr indent="0" marL="0">
+              <a:buNone/>
+            </a:pPr>
             <a:r>
               <a:rPr lang="en-US" sz="2100" dirty="0">
                 <a:solidFill>
-                  <a:srgbClr val="17364A"/>
-                </a:solidFill>
-                <a:latin typeface="Aptos" pitchFamily="34" charset="0"/>
-                <a:ea typeface="Aptos" pitchFamily="34" charset="-122"/>
-                <a:cs typeface="Aptos" pitchFamily="34" charset="-120"/>
-              </a:rPr>
-              <a:t>This module focuses on creating, approving, implementing, and updating internal AI policies.</a:t>
+                  <a:srgbClr val="003A63"/>
+                </a:solidFill>
+                <a:latin typeface="Aptos" pitchFamily="34" charset="0"/>
+                <a:ea typeface="Aptos" pitchFamily="34" charset="-122"/>
+                <a:cs typeface="Aptos" pitchFamily="34" charset="-120"/>
+              </a:rPr>
+              <a:t>• This module focuses on creating, approving, implementing, and updating internal AI policies.</a:t>
             </a:r>
             <a:endParaRPr lang="en-US" sz="2100" dirty="0"/>
           </a:p>
           <a:p>
+            <a:pPr indent="0" marL="0">
+              <a:buNone/>
+            </a:pPr>
             <a:r>
               <a:rPr lang="en-US" sz="2100" dirty="0">
                 <a:solidFill>
-                  <a:srgbClr val="17364A"/>
-                </a:solidFill>
-                <a:latin typeface="Aptos" pitchFamily="34" charset="0"/>
-                <a:ea typeface="Aptos" pitchFamily="34" charset="-122"/>
-                <a:cs typeface="Aptos" pitchFamily="34" charset="-120"/>
-              </a:rPr>
-              <a:t>It is designed for public health staff who must translate responsible AI principles into repeatable decisions,.</a:t>
+                  <a:srgbClr val="003A63"/>
+                </a:solidFill>
+                <a:latin typeface="Aptos" pitchFamily="34" charset="0"/>
+                <a:ea typeface="Aptos" pitchFamily="34" charset="-122"/>
+                <a:cs typeface="Aptos" pitchFamily="34" charset="-120"/>
+              </a:rPr>
+              <a:t>• It is designed for public health staff who must translate responsible AI principles into.</a:t>
             </a:r>
             <a:endParaRPr lang="en-US" sz="2100" dirty="0"/>
           </a:p>
           <a:p>
+            <a:pPr indent="0" marL="0">
+              <a:buNone/>
+            </a:pPr>
             <a:r>
               <a:rPr lang="en-US" sz="2100" dirty="0">
                 <a:solidFill>
-                  <a:srgbClr val="17364A"/>
-                </a:solidFill>
-                <a:latin typeface="Aptos" pitchFamily="34" charset="0"/>
-                <a:ea typeface="Aptos" pitchFamily="34" charset="-122"/>
-                <a:cs typeface="Aptos" pitchFamily="34" charset="-120"/>
-              </a:rPr>
-              <a:t>The module helps learners move beyond general awareness by producing a practical artifact that can be used in.</a:t>
+                  <a:srgbClr val="003A63"/>
+                </a:solidFill>
+                <a:latin typeface="Aptos" pitchFamily="34" charset="0"/>
+                <a:ea typeface="Aptos" pitchFamily="34" charset="-122"/>
+                <a:cs typeface="Aptos" pitchFamily="34" charset="-120"/>
+              </a:rPr>
+              <a:t>• The module helps learners move beyond general awareness by producing a practical artifact that.</a:t>
             </a:r>
             <a:endParaRPr lang="en-US" sz="2100" dirty="0"/>
           </a:p>
@@ -10261,17 +10423,17 @@
         </p:nvSpPr>
         <p:spPr>
           <a:xfrm>
-            <a:off x="8074152" y="1920240"/>
-            <a:ext cx="2825496" cy="1280160"/>
-          </a:xfrm>
-          <a:prstGeom prst="rect">
-            <a:avLst/>
-          </a:prstGeom>
-          <a:noFill/>
-          <a:ln/>
-        </p:spPr>
-        <p:txBody>
-          <a:bodyPr wrap="square" lIns="0" tIns="0" rIns="0" bIns="0" rtlCol="0" anchor="t">
+            <a:off x="8074152" y="1892808"/>
+            <a:ext cx="2825496" cy="1353312"/>
+          </a:xfrm>
+          <a:prstGeom prst="rect">
+            <a:avLst/>
+          </a:prstGeom>
+          <a:noFill/>
+          <a:ln/>
+        </p:spPr>
+        <p:txBody>
+          <a:bodyPr wrap="square" lIns="254" tIns="254" rIns="254" bIns="254" rtlCol="0" anchor="t">
             <a:normAutofit/>
           </a:bodyPr>
           <a:lstStyle/>
@@ -10280,7 +10442,7 @@
               <a:buNone/>
             </a:pPr>
             <a:r>
-              <a:rPr lang="en-US" sz="1550" dirty="0">
+              <a:rPr lang="en-US" sz="1320" dirty="0">
                 <a:solidFill>
                   <a:srgbClr val="17364A"/>
                 </a:solidFill>
@@ -10288,43 +10450,9 @@
                 <a:ea typeface="Aptos" pitchFamily="34" charset="-122"/>
                 <a:cs typeface="Aptos" pitchFamily="34" charset="-120"/>
               </a:rPr>
-              <a:t>Level: intermediate/practitioner</a:t>
-            </a:r>
-            <a:endParaRPr lang="en-US" sz="1550" dirty="0"/>
-          </a:p>
-          <a:p>
-            <a:pPr indent="0" marL="0">
-              <a:buNone/>
-            </a:pPr>
-            <a:r>
-              <a:rPr lang="en-US" sz="1550" dirty="0">
-                <a:solidFill>
-                  <a:srgbClr val="17364A"/>
-                </a:solidFill>
-                <a:latin typeface="Aptos" pitchFamily="34" charset="0"/>
-                <a:ea typeface="Aptos" pitchFamily="34" charset="-122"/>
-                <a:cs typeface="Aptos" pitchFamily="34" charset="-120"/>
-              </a:rPr>
-              <a:t>Primary track: Policy Role-Based Track</a:t>
-            </a:r>
-            <a:endParaRPr lang="en-US" sz="1550" dirty="0"/>
-          </a:p>
-          <a:p>
-            <a:pPr indent="0" marL="0">
-              <a:buNone/>
-            </a:pPr>
-            <a:r>
-              <a:rPr lang="en-US" sz="1550" dirty="0">
-                <a:solidFill>
-                  <a:srgbClr val="17364A"/>
-                </a:solidFill>
-                <a:latin typeface="Aptos" pitchFamily="34" charset="0"/>
-                <a:ea typeface="Aptos" pitchFamily="34" charset="-122"/>
-                <a:cs typeface="Aptos" pitchFamily="34" charset="-120"/>
-              </a:rPr>
-              <a:t>Appears in tracks: governance-security, policy, public-health-executive-leadership</a:t>
-            </a:r>
-            <a:endParaRPr lang="en-US" sz="1550" dirty="0"/>
+              <a:t>Level: intermediate/practitioner Primary track: Policy Role-Based Track Appears in tracks: governance-security, policy,.</a:t>
+            </a:r>
+            <a:endParaRPr lang="en-US" sz="1320" dirty="0"/>
           </a:p>
         </p:txBody>
       </p:sp>
@@ -10412,13 +10540,16 @@
           <a:ln/>
         </p:spPr>
         <p:txBody>
-          <a:bodyPr wrap="square" lIns="254" tIns="254" rIns="254" bIns="254" rtlCol="0" anchor="t">
+          <a:bodyPr wrap="square" lIns="508" tIns="508" rIns="508" bIns="508" rtlCol="0" anchor="t">
             <a:normAutofit/>
           </a:bodyPr>
           <a:lstStyle/>
           <a:p>
-            <a:r>
-              <a:rPr lang="en-US" sz="1380" dirty="0">
+            <a:pPr indent="0" marL="0">
+              <a:buNone/>
+            </a:pPr>
+            <a:r>
+              <a:rPr lang="en-US" sz="1220" dirty="0">
                 <a:solidFill>
                   <a:srgbClr val="17364A"/>
                 </a:solidFill>
@@ -10428,11 +10559,14 @@
               </a:rPr>
               <a:t>Read the module for shared vocabulary and context.</a:t>
             </a:r>
-            <a:endParaRPr lang="en-US" sz="1380" dirty="0"/>
-          </a:p>
-          <a:p>
-            <a:r>
-              <a:rPr lang="en-US" sz="1380" dirty="0">
+            <a:endParaRPr lang="en-US" sz="1220" dirty="0"/>
+          </a:p>
+          <a:p>
+            <a:pPr indent="0" marL="0">
+              <a:buNone/>
+            </a:pPr>
+            <a:r>
+              <a:rPr lang="en-US" sz="1220" dirty="0">
                 <a:solidFill>
                   <a:srgbClr val="17364A"/>
                 </a:solidFill>
@@ -10442,11 +10576,14 @@
               </a:rPr>
               <a:t>Complete the practical exercise to apply the concept.</a:t>
             </a:r>
-            <a:endParaRPr lang="en-US" sz="1380" dirty="0"/>
-          </a:p>
-          <a:p>
-            <a:r>
-              <a:rPr lang="en-US" sz="1380" dirty="0">
+            <a:endParaRPr lang="en-US" sz="1220" dirty="0"/>
+          </a:p>
+          <a:p>
+            <a:pPr indent="0" marL="0">
+              <a:buNone/>
+            </a:pPr>
+            <a:r>
+              <a:rPr lang="en-US" sz="1220" dirty="0">
                 <a:solidFill>
                   <a:srgbClr val="17364A"/>
                 </a:solidFill>
@@ -10456,7 +10593,7 @@
               </a:rPr>
               <a:t>Use the notes and references for deeper review.</a:t>
             </a:r>
-            <a:endParaRPr lang="en-US" sz="1380" dirty="0"/>
+            <a:endParaRPr lang="en-US" sz="1220" dirty="0"/>
           </a:p>
         </p:txBody>
       </p:sp>
@@ -10757,49 +10894,58 @@
           <a:ln/>
         </p:spPr>
         <p:txBody>
-          <a:bodyPr wrap="square" lIns="635" tIns="635" rIns="635" bIns="635" rtlCol="0" anchor="t">
+          <a:bodyPr wrap="square" lIns="1016" tIns="1016" rIns="1016" bIns="1016" rtlCol="0" anchor="t">
             <a:normAutofit/>
           </a:bodyPr>
           <a:lstStyle/>
           <a:p>
+            <a:pPr indent="0" marL="0">
+              <a:buNone/>
+            </a:pPr>
             <a:r>
               <a:rPr lang="en-US" sz="2100" dirty="0">
                 <a:solidFill>
-                  <a:srgbClr val="17364A"/>
-                </a:solidFill>
-                <a:latin typeface="Aptos" pitchFamily="34" charset="0"/>
-                <a:ea typeface="Aptos" pitchFamily="34" charset="-122"/>
-                <a:cs typeface="Aptos" pitchFamily="34" charset="-120"/>
-              </a:rPr>
-              <a:t>1. What is the strongest evidence that ai policy development and approval workflow has been applied.</a:t>
+                  <a:srgbClr val="003A63"/>
+                </a:solidFill>
+                <a:latin typeface="Aptos" pitchFamily="34" charset="0"/>
+                <a:ea typeface="Aptos" pitchFamily="34" charset="-122"/>
+                <a:cs typeface="Aptos" pitchFamily="34" charset="-120"/>
+              </a:rPr>
+              <a:t>• 1. What is the strongest evidence that ai policy development and approval workflow has been.</a:t>
             </a:r>
             <a:endParaRPr lang="en-US" sz="2100" dirty="0"/>
           </a:p>
           <a:p>
+            <a:pPr indent="0" marL="0">
+              <a:buNone/>
+            </a:pPr>
             <a:r>
               <a:rPr lang="en-US" sz="2100" dirty="0">
                 <a:solidFill>
-                  <a:srgbClr val="17364A"/>
-                </a:solidFill>
-                <a:latin typeface="Aptos" pitchFamily="34" charset="0"/>
-                <a:ea typeface="Aptos" pitchFamily="34" charset="-122"/>
-                <a:cs typeface="Aptos" pitchFamily="34" charset="-120"/>
-              </a:rPr>
-              <a:t>2. What is the best reason to assign an accountability owner?</a:t>
+                  <a:srgbClr val="003A63"/>
+                </a:solidFill>
+                <a:latin typeface="Aptos" pitchFamily="34" charset="0"/>
+                <a:ea typeface="Aptos" pitchFamily="34" charset="-122"/>
+                <a:cs typeface="Aptos" pitchFamily="34" charset="-120"/>
+              </a:rPr>
+              <a:t>• 2. What is the best reason to assign an accountability owner?</a:t>
             </a:r>
             <a:endParaRPr lang="en-US" sz="2100" dirty="0"/>
           </a:p>
           <a:p>
+            <a:pPr indent="0" marL="0">
+              <a:buNone/>
+            </a:pPr>
             <a:r>
               <a:rPr lang="en-US" sz="2100" dirty="0">
                 <a:solidFill>
-                  <a:srgbClr val="17364A"/>
-                </a:solidFill>
-                <a:latin typeface="Aptos" pitchFamily="34" charset="0"/>
-                <a:ea typeface="Aptos" pitchFamily="34" charset="-122"/>
-                <a:cs typeface="Aptos" pitchFamily="34" charset="-120"/>
-              </a:rPr>
-              <a:t>3. When should an AI-supported workflow be escalated for review?</a:t>
+                  <a:srgbClr val="003A63"/>
+                </a:solidFill>
+                <a:latin typeface="Aptos" pitchFamily="34" charset="0"/>
+                <a:ea typeface="Aptos" pitchFamily="34" charset="-122"/>
+                <a:cs typeface="Aptos" pitchFamily="34" charset="-120"/>
+              </a:rPr>
+              <a:t>• 3. When should an AI-supported workflow be escalated for review?</a:t>
             </a:r>
             <a:endParaRPr lang="en-US" sz="2100" dirty="0"/>
           </a:p>
@@ -10879,17 +11025,17 @@
         </p:nvSpPr>
         <p:spPr>
           <a:xfrm>
-            <a:off x="7799832" y="1828800"/>
-            <a:ext cx="3145536" cy="685800"/>
-          </a:xfrm>
-          <a:prstGeom prst="rect">
-            <a:avLst/>
-          </a:prstGeom>
-          <a:noFill/>
-          <a:ln/>
-        </p:spPr>
-        <p:txBody>
-          <a:bodyPr wrap="square" lIns="0" tIns="0" rIns="0" bIns="0" rtlCol="0" anchor="t">
+            <a:off x="7799832" y="1801368"/>
+            <a:ext cx="3145536" cy="758952"/>
+          </a:xfrm>
+          <a:prstGeom prst="rect">
+            <a:avLst/>
+          </a:prstGeom>
+          <a:noFill/>
+          <a:ln/>
+        </p:spPr>
+        <p:txBody>
+          <a:bodyPr wrap="square" lIns="254" tIns="254" rIns="254" bIns="254" rtlCol="0" anchor="t">
             <a:normAutofit/>
           </a:bodyPr>
           <a:lstStyle/>
@@ -10898,7 +11044,7 @@
               <a:buNone/>
             </a:pPr>
             <a:r>
-              <a:rPr lang="en-US" sz="1550" dirty="0">
+              <a:rPr lang="en-US" sz="1320" dirty="0">
                 <a:solidFill>
                   <a:srgbClr val="17364A"/>
                 </a:solidFill>
@@ -10908,7 +11054,7 @@
               </a:rPr>
               <a:t>1. What is the strongest evidence that ai policy development and approval workflow has been applied.</a:t>
             </a:r>
-            <a:endParaRPr lang="en-US" sz="1550" dirty="0"/>
+            <a:endParaRPr lang="en-US" sz="1320" dirty="0"/>
           </a:p>
         </p:txBody>
       </p:sp>
@@ -10996,13 +11142,16 @@
           <a:ln/>
         </p:spPr>
         <p:txBody>
-          <a:bodyPr wrap="square" lIns="254" tIns="254" rIns="254" bIns="254" rtlCol="0" anchor="t">
+          <a:bodyPr wrap="square" lIns="508" tIns="508" rIns="508" bIns="508" rtlCol="0" anchor="t">
             <a:normAutofit/>
           </a:bodyPr>
           <a:lstStyle/>
           <a:p>
-            <a:r>
-              <a:rPr lang="en-US" sz="1380" dirty="0">
+            <a:pPr indent="0" marL="0">
+              <a:buNone/>
+            </a:pPr>
+            <a:r>
+              <a:rPr lang="en-US" sz="1220" dirty="0">
                 <a:solidFill>
                   <a:srgbClr val="17364A"/>
                 </a:solidFill>
@@ -11012,11 +11161,14 @@
               </a:rPr>
               <a:t>1.</a:t>
             </a:r>
-            <a:endParaRPr lang="en-US" sz="1380" dirty="0"/>
-          </a:p>
-          <a:p>
-            <a:r>
-              <a:rPr lang="en-US" sz="1380" dirty="0">
+            <a:endParaRPr lang="en-US" sz="1220" dirty="0"/>
+          </a:p>
+          <a:p>
+            <a:pPr indent="0" marL="0">
+              <a:buNone/>
+            </a:pPr>
+            <a:r>
+              <a:rPr lang="en-US" sz="1220" dirty="0">
                 <a:solidFill>
                   <a:srgbClr val="17364A"/>
                 </a:solidFill>
@@ -11024,13 +11176,16 @@
                 <a:ea typeface="Aptos" pitchFamily="34" charset="-122"/>
                 <a:cs typeface="Aptos" pitchFamily="34" charset="-120"/>
               </a:rPr>
-              <a:t>What is the strongest evidence that ai policy development and approval workflow has been.</a:t>
-            </a:r>
-            <a:endParaRPr lang="en-US" sz="1380" dirty="0"/>
-          </a:p>
-          <a:p>
-            <a:r>
-              <a:rPr lang="en-US" sz="1380" dirty="0">
+              <a:t>What is the strongest evidence that ai policy development and.</a:t>
+            </a:r>
+            <a:endParaRPr lang="en-US" sz="1220" dirty="0"/>
+          </a:p>
+          <a:p>
+            <a:pPr indent="0" marL="0">
+              <a:buNone/>
+            </a:pPr>
+            <a:r>
+              <a:rPr lang="en-US" sz="1220" dirty="0">
                 <a:solidFill>
                   <a:srgbClr val="17364A"/>
                 </a:solidFill>
@@ -11040,7 +11195,7 @@
               </a:rPr>
               <a:t>2.</a:t>
             </a:r>
-            <a:endParaRPr lang="en-US" sz="1380" dirty="0"/>
+            <a:endParaRPr lang="en-US" sz="1220" dirty="0"/>
           </a:p>
         </p:txBody>
       </p:sp>
@@ -11118,17 +11273,17 @@
         </p:nvSpPr>
         <p:spPr>
           <a:xfrm>
-            <a:off x="7799832" y="5001768"/>
-            <a:ext cx="3145536" cy="502920"/>
-          </a:xfrm>
-          <a:prstGeom prst="rect">
-            <a:avLst/>
-          </a:prstGeom>
-          <a:noFill/>
-          <a:ln/>
-        </p:spPr>
-        <p:txBody>
-          <a:bodyPr wrap="square" lIns="0" tIns="0" rIns="0" bIns="0" rtlCol="0" anchor="t">
+            <a:off x="7799832" y="4974336"/>
+            <a:ext cx="3145536" cy="576072"/>
+          </a:xfrm>
+          <a:prstGeom prst="rect">
+            <a:avLst/>
+          </a:prstGeom>
+          <a:noFill/>
+          <a:ln/>
+        </p:spPr>
+        <p:txBody>
+          <a:bodyPr wrap="square" lIns="254" tIns="254" rIns="254" bIns="254" rtlCol="0" anchor="t">
             <a:normAutofit/>
           </a:bodyPr>
           <a:lstStyle/>
@@ -11137,7 +11292,7 @@
               <a:buNone/>
             </a:pPr>
             <a:r>
-              <a:rPr lang="en-US" sz="1550" dirty="0">
+              <a:rPr lang="en-US" sz="1320" dirty="0">
                 <a:solidFill>
                   <a:srgbClr val="17364A"/>
                 </a:solidFill>
@@ -11145,9 +11300,9 @@
                 <a:ea typeface="Aptos" pitchFamily="34" charset="-122"/>
                 <a:cs typeface="Aptos" pitchFamily="34" charset="-120"/>
               </a:rPr>
-              <a:t>Use the assignment to test whether you can explain the concept, apply it to a realistic public health situation, and identify what would need review before the work moves forward.</a:t>
-            </a:r>
-            <a:endParaRPr lang="en-US" sz="1550" dirty="0"/>
+              <a:t>Use the assignment to test whether you can explain the concept, apply it to a realistic public health situation, and.</a:t>
+            </a:r>
+            <a:endParaRPr lang="en-US" sz="1320" dirty="0"/>
           </a:p>
         </p:txBody>
       </p:sp>
@@ -11448,49 +11603,58 @@
           <a:ln/>
         </p:spPr>
         <p:txBody>
-          <a:bodyPr wrap="square" lIns="635" tIns="635" rIns="635" bIns="635" rtlCol="0" anchor="t">
+          <a:bodyPr wrap="square" lIns="1016" tIns="1016" rIns="1016" bIns="1016" rtlCol="0" anchor="t">
             <a:normAutofit/>
           </a:bodyPr>
           <a:lstStyle/>
           <a:p>
+            <a:pPr indent="0" marL="0">
+              <a:buNone/>
+            </a:pPr>
             <a:r>
               <a:rPr lang="en-US" sz="2100" dirty="0">
                 <a:solidFill>
-                  <a:srgbClr val="17364A"/>
-                </a:solidFill>
-                <a:latin typeface="Aptos" pitchFamily="34" charset="0"/>
-                <a:ea typeface="Aptos" pitchFamily="34" charset="-122"/>
-                <a:cs typeface="Aptos" pitchFamily="34" charset="-120"/>
-              </a:rPr>
-              <a:t>CDC Public Health Data Strategy and Data Modernization resources:.</a:t>
+                  <a:srgbClr val="003A63"/>
+                </a:solidFill>
+                <a:latin typeface="Aptos" pitchFamily="34" charset="0"/>
+                <a:ea typeface="Aptos" pitchFamily="34" charset="-122"/>
+                <a:cs typeface="Aptos" pitchFamily="34" charset="-120"/>
+              </a:rPr>
+              <a:t>• CDC Public Health Data Strategy and Data Modernization resources:.</a:t>
             </a:r>
             <a:endParaRPr lang="en-US" sz="2100" dirty="0"/>
           </a:p>
           <a:p>
+            <a:pPr indent="0" marL="0">
+              <a:buNone/>
+            </a:pPr>
             <a:r>
               <a:rPr lang="en-US" sz="2100" dirty="0">
                 <a:solidFill>
-                  <a:srgbClr val="17364A"/>
-                </a:solidFill>
-                <a:latin typeface="Aptos" pitchFamily="34" charset="0"/>
-                <a:ea typeface="Aptos" pitchFamily="34" charset="-122"/>
-                <a:cs typeface="Aptos" pitchFamily="34" charset="-120"/>
-              </a:rPr>
-              <a:t>NIST Artificial Intelligence Risk Management Framework and NIST Generative AI Profile:.</a:t>
+                  <a:srgbClr val="003A63"/>
+                </a:solidFill>
+                <a:latin typeface="Aptos" pitchFamily="34" charset="0"/>
+                <a:ea typeface="Aptos" pitchFamily="34" charset="-122"/>
+                <a:cs typeface="Aptos" pitchFamily="34" charset="-120"/>
+              </a:rPr>
+              <a:t>• NIST Artificial Intelligence Risk Management Framework and NIST Generative AI Profile:.</a:t>
             </a:r>
             <a:endParaRPr lang="en-US" sz="2100" dirty="0"/>
           </a:p>
           <a:p>
+            <a:pPr indent="0" marL="0">
+              <a:buNone/>
+            </a:pPr>
             <a:r>
               <a:rPr lang="en-US" sz="2100" dirty="0">
                 <a:solidFill>
-                  <a:srgbClr val="17364A"/>
-                </a:solidFill>
-                <a:latin typeface="Aptos" pitchFamily="34" charset="0"/>
-                <a:ea typeface="Aptos" pitchFamily="34" charset="-122"/>
-                <a:cs typeface="Aptos" pitchFamily="34" charset="-120"/>
-              </a:rPr>
-              <a:t>WHO Ethics and Governance of Artificial Intelligence for Health guidance:.</a:t>
+                  <a:srgbClr val="003A63"/>
+                </a:solidFill>
+                <a:latin typeface="Aptos" pitchFamily="34" charset="0"/>
+                <a:ea typeface="Aptos" pitchFamily="34" charset="-122"/>
+                <a:cs typeface="Aptos" pitchFamily="34" charset="-120"/>
+              </a:rPr>
+              <a:t>• WHO Ethics and Governance of Artificial Intelligence for Health guidance:.</a:t>
             </a:r>
             <a:endParaRPr lang="en-US" sz="2100" dirty="0"/>
           </a:p>
@@ -11570,17 +11734,17 @@
         </p:nvSpPr>
         <p:spPr>
           <a:xfrm>
-            <a:off x="7799832" y="1828800"/>
-            <a:ext cx="3145536" cy="685800"/>
-          </a:xfrm>
-          <a:prstGeom prst="rect">
-            <a:avLst/>
-          </a:prstGeom>
-          <a:noFill/>
-          <a:ln/>
-        </p:spPr>
-        <p:txBody>
-          <a:bodyPr wrap="square" lIns="0" tIns="0" rIns="0" bIns="0" rtlCol="0" anchor="t">
+            <a:off x="7799832" y="1801368"/>
+            <a:ext cx="3145536" cy="758952"/>
+          </a:xfrm>
+          <a:prstGeom prst="rect">
+            <a:avLst/>
+          </a:prstGeom>
+          <a:noFill/>
+          <a:ln/>
+        </p:spPr>
+        <p:txBody>
+          <a:bodyPr wrap="square" lIns="254" tIns="254" rIns="254" bIns="254" rtlCol="0" anchor="t">
             <a:normAutofit/>
           </a:bodyPr>
           <a:lstStyle/>
@@ -11589,7 +11753,7 @@
               <a:buNone/>
             </a:pPr>
             <a:r>
-              <a:rPr lang="en-US" sz="1550" dirty="0">
+              <a:rPr lang="en-US" sz="1320" dirty="0">
                 <a:solidFill>
                   <a:srgbClr val="17364A"/>
                 </a:solidFill>
@@ -11599,7 +11763,7 @@
               </a:rPr>
               <a:t>CDC Public Health Data Strategy and Data Modernization resources:.</a:t>
             </a:r>
-            <a:endParaRPr lang="en-US" sz="1550" dirty="0"/>
+            <a:endParaRPr lang="en-US" sz="1320" dirty="0"/>
           </a:p>
         </p:txBody>
       </p:sp>
@@ -11687,13 +11851,16 @@
           <a:ln/>
         </p:spPr>
         <p:txBody>
-          <a:bodyPr wrap="square" lIns="254" tIns="254" rIns="254" bIns="254" rtlCol="0" anchor="t">
+          <a:bodyPr wrap="square" lIns="508" tIns="508" rIns="508" bIns="508" rtlCol="0" anchor="t">
             <a:normAutofit/>
           </a:bodyPr>
           <a:lstStyle/>
           <a:p>
-            <a:r>
-              <a:rPr lang="en-US" sz="1380" dirty="0">
+            <a:pPr indent="0" marL="0">
+              <a:buNone/>
+            </a:pPr>
+            <a:r>
+              <a:rPr lang="en-US" sz="1220" dirty="0">
                 <a:solidFill>
                   <a:srgbClr val="17364A"/>
                 </a:solidFill>
@@ -11703,11 +11870,14 @@
               </a:rPr>
               <a:t>OWASP Top 10 for Large Language Model Applications:.</a:t>
             </a:r>
-            <a:endParaRPr lang="en-US" sz="1380" dirty="0"/>
-          </a:p>
-          <a:p>
-            <a:r>
-              <a:rPr lang="en-US" sz="1380" dirty="0">
+            <a:endParaRPr lang="en-US" sz="1220" dirty="0"/>
+          </a:p>
+          <a:p>
+            <a:pPr indent="0" marL="0">
+              <a:buNone/>
+            </a:pPr>
+            <a:r>
+              <a:rPr lang="en-US" sz="1220" dirty="0">
                 <a:solidFill>
                   <a:srgbClr val="17364A"/>
                 </a:solidFill>
@@ -11715,9 +11885,9 @@
                 <a:ea typeface="Aptos" pitchFamily="34" charset="-122"/>
                 <a:cs typeface="Aptos" pitchFamily="34" charset="-120"/>
               </a:rPr>
-              <a:t>ONC health IT, interoperability, and information blocking resources:.</a:t>
-            </a:r>
-            <a:endParaRPr lang="en-US" sz="1380" dirty="0"/>
+              <a:t>ONC health IT, interoperability, and information blocking.</a:t>
+            </a:r>
+            <a:endParaRPr lang="en-US" sz="1220" dirty="0"/>
           </a:p>
         </p:txBody>
       </p:sp>
@@ -11795,17 +11965,17 @@
         </p:nvSpPr>
         <p:spPr>
           <a:xfrm>
-            <a:off x="7799832" y="5001768"/>
-            <a:ext cx="3145536" cy="502920"/>
-          </a:xfrm>
-          <a:prstGeom prst="rect">
-            <a:avLst/>
-          </a:prstGeom>
-          <a:noFill/>
-          <a:ln/>
-        </p:spPr>
-        <p:txBody>
-          <a:bodyPr wrap="square" lIns="0" tIns="0" rIns="0" bIns="0" rtlCol="0" anchor="t">
+            <a:off x="7799832" y="4974336"/>
+            <a:ext cx="3145536" cy="576072"/>
+          </a:xfrm>
+          <a:prstGeom prst="rect">
+            <a:avLst/>
+          </a:prstGeom>
+          <a:noFill/>
+          <a:ln/>
+        </p:spPr>
+        <p:txBody>
+          <a:bodyPr wrap="square" lIns="254" tIns="254" rIns="254" bIns="254" rtlCol="0" anchor="t">
             <a:normAutofit/>
           </a:bodyPr>
           <a:lstStyle/>
@@ -11814,7 +11984,7 @@
               <a:buNone/>
             </a:pPr>
             <a:r>
-              <a:rPr lang="en-US" sz="1550" dirty="0">
+              <a:rPr lang="en-US" sz="1320" dirty="0">
                 <a:solidFill>
                   <a:srgbClr val="17364A"/>
                 </a:solidFill>
@@ -11822,9 +11992,9 @@
                 <a:ea typeface="Aptos" pitchFamily="34" charset="-122"/>
                 <a:cs typeface="Aptos" pitchFamily="34" charset="-120"/>
               </a:rPr>
-              <a:t>Translate this concept into clear decision rights, review steps, documentation expectations, and escalation paths before an AI-supported workflow is approved.</a:t>
-            </a:r>
-            <a:endParaRPr lang="en-US" sz="1550" dirty="0"/>
+              <a:t>Translate this concept into clear decision rights, review steps, documentation expectations, and escalation paths before.</a:t>
+            </a:r>
+            <a:endParaRPr lang="en-US" sz="1320" dirty="0"/>
           </a:p>
         </p:txBody>
       </p:sp>
@@ -12125,21 +12295,24 @@
           <a:ln/>
         </p:spPr>
         <p:txBody>
-          <a:bodyPr wrap="square" lIns="635" tIns="635" rIns="635" bIns="635" rtlCol="0" anchor="t">
+          <a:bodyPr wrap="square" lIns="1016" tIns="1016" rIns="1016" bIns="1016" rtlCol="0" anchor="t">
             <a:normAutofit/>
           </a:bodyPr>
           <a:lstStyle/>
           <a:p>
+            <a:pPr indent="0" marL="0">
+              <a:buNone/>
+            </a:pPr>
             <a:r>
               <a:rPr lang="en-US" sz="2100" dirty="0">
                 <a:solidFill>
-                  <a:srgbClr val="17364A"/>
-                </a:solidFill>
-                <a:latin typeface="Aptos" pitchFamily="34" charset="0"/>
-                <a:ea typeface="Aptos" pitchFamily="34" charset="-122"/>
-                <a:cs typeface="Aptos" pitchFamily="34" charset="-120"/>
-              </a:rPr>
-              <a:t>Agency policies for privacy, public records, cybersecurity, procurement, civil rights, accessibility,.</a:t>
+                  <a:srgbClr val="003A63"/>
+                </a:solidFill>
+                <a:latin typeface="Aptos" pitchFamily="34" charset="0"/>
+                <a:ea typeface="Aptos" pitchFamily="34" charset="-122"/>
+                <a:cs typeface="Aptos" pitchFamily="34" charset="-120"/>
+              </a:rPr>
+              <a:t>• Agency policies for privacy, public records, cybersecurity, procurement, civil rights,.</a:t>
             </a:r>
             <a:endParaRPr lang="en-US" sz="2100" dirty="0"/>
           </a:p>
@@ -12219,17 +12392,17 @@
         </p:nvSpPr>
         <p:spPr>
           <a:xfrm>
-            <a:off x="7799832" y="1828800"/>
-            <a:ext cx="3145536" cy="685800"/>
-          </a:xfrm>
-          <a:prstGeom prst="rect">
-            <a:avLst/>
-          </a:prstGeom>
-          <a:noFill/>
-          <a:ln/>
-        </p:spPr>
-        <p:txBody>
-          <a:bodyPr wrap="square" lIns="0" tIns="0" rIns="0" bIns="0" rtlCol="0" anchor="t">
+            <a:off x="7799832" y="1801368"/>
+            <a:ext cx="3145536" cy="758952"/>
+          </a:xfrm>
+          <a:prstGeom prst="rect">
+            <a:avLst/>
+          </a:prstGeom>
+          <a:noFill/>
+          <a:ln/>
+        </p:spPr>
+        <p:txBody>
+          <a:bodyPr wrap="square" lIns="254" tIns="254" rIns="254" bIns="254" rtlCol="0" anchor="t">
             <a:normAutofit/>
           </a:bodyPr>
           <a:lstStyle/>
@@ -12238,7 +12411,7 @@
               <a:buNone/>
             </a:pPr>
             <a:r>
-              <a:rPr lang="en-US" sz="1550" dirty="0">
+              <a:rPr lang="en-US" sz="1320" dirty="0">
                 <a:solidFill>
                   <a:srgbClr val="17364A"/>
                 </a:solidFill>
@@ -12248,7 +12421,7 @@
               </a:rPr>
               <a:t>Agency policies for privacy, public records, cybersecurity, procurement, civil rights, accessibility,.</a:t>
             </a:r>
-            <a:endParaRPr lang="en-US" sz="1550" dirty="0"/>
+            <a:endParaRPr lang="en-US" sz="1320" dirty="0"/>
           </a:p>
         </p:txBody>
       </p:sp>
@@ -12336,13 +12509,16 @@
           <a:ln/>
         </p:spPr>
         <p:txBody>
-          <a:bodyPr wrap="square" lIns="254" tIns="254" rIns="254" bIns="254" rtlCol="0" anchor="t">
+          <a:bodyPr wrap="square" lIns="508" tIns="508" rIns="508" bIns="508" rtlCol="0" anchor="t">
             <a:normAutofit/>
           </a:bodyPr>
           <a:lstStyle/>
           <a:p>
-            <a:r>
-              <a:rPr lang="en-US" sz="1380" dirty="0">
+            <a:pPr indent="0" marL="0">
+              <a:buNone/>
+            </a:pPr>
+            <a:r>
+              <a:rPr lang="en-US" sz="1220" dirty="0">
                 <a:solidFill>
                   <a:srgbClr val="17364A"/>
                 </a:solidFill>
@@ -12350,9 +12526,9 @@
                 <a:ea typeface="Aptos" pitchFamily="34" charset="-122"/>
                 <a:cs typeface="Aptos" pitchFamily="34" charset="-120"/>
               </a:rPr>
-              <a:t>Agency policies for privacy, public records, cybersecurity, procurement, civil rights,.</a:t>
-            </a:r>
-            <a:endParaRPr lang="en-US" sz="1380" dirty="0"/>
+              <a:t>Agency policies for privacy, public records, cybersecurity,.</a:t>
+            </a:r>
+            <a:endParaRPr lang="en-US" sz="1220" dirty="0"/>
           </a:p>
         </p:txBody>
       </p:sp>
@@ -12430,17 +12606,17 @@
         </p:nvSpPr>
         <p:spPr>
           <a:xfrm>
-            <a:off x="7799832" y="5001768"/>
-            <a:ext cx="3145536" cy="502920"/>
-          </a:xfrm>
-          <a:prstGeom prst="rect">
-            <a:avLst/>
-          </a:prstGeom>
-          <a:noFill/>
-          <a:ln/>
-        </p:spPr>
-        <p:txBody>
-          <a:bodyPr wrap="square" lIns="0" tIns="0" rIns="0" bIns="0" rtlCol="0" anchor="t">
+            <a:off x="7799832" y="4974336"/>
+            <a:ext cx="3145536" cy="576072"/>
+          </a:xfrm>
+          <a:prstGeom prst="rect">
+            <a:avLst/>
+          </a:prstGeom>
+          <a:noFill/>
+          <a:ln/>
+        </p:spPr>
+        <p:txBody>
+          <a:bodyPr wrap="square" lIns="254" tIns="254" rIns="254" bIns="254" rtlCol="0" anchor="t">
             <a:normAutofit/>
           </a:bodyPr>
           <a:lstStyle/>
@@ -12449,7 +12625,7 @@
               <a:buNone/>
             </a:pPr>
             <a:r>
-              <a:rPr lang="en-US" sz="1550" dirty="0">
+              <a:rPr lang="en-US" sz="1320" dirty="0">
                 <a:solidFill>
                   <a:srgbClr val="17364A"/>
                 </a:solidFill>
@@ -12457,9 +12633,9 @@
                 <a:ea typeface="Aptos" pitchFamily="34" charset="-122"/>
                 <a:cs typeface="Aptos" pitchFamily="34" charset="-120"/>
               </a:rPr>
-              <a:t>Translate this concept into clear decision rights, review steps, documentation expectations, and escalation paths before an AI-supported workflow is approved.</a:t>
-            </a:r>
-            <a:endParaRPr lang="en-US" sz="1550" dirty="0"/>
+              <a:t>Translate this concept into clear decision rights, review steps, documentation expectations, and escalation paths before.</a:t>
+            </a:r>
+            <a:endParaRPr lang="en-US" sz="1320" dirty="0"/>
           </a:p>
         </p:txBody>
       </p:sp>
@@ -12760,63 +12936,75 @@
           <a:ln/>
         </p:spPr>
         <p:txBody>
-          <a:bodyPr wrap="square" lIns="635" tIns="635" rIns="635" bIns="635" rtlCol="0" anchor="t">
+          <a:bodyPr wrap="square" lIns="1016" tIns="1016" rIns="1016" bIns="1016" rtlCol="0" anchor="t">
             <a:normAutofit/>
           </a:bodyPr>
           <a:lstStyle/>
           <a:p>
+            <a:pPr indent="0" marL="0">
+              <a:buNone/>
+            </a:pPr>
             <a:r>
               <a:rPr lang="en-US" sz="1900" dirty="0">
                 <a:solidFill>
-                  <a:srgbClr val="17364A"/>
-                </a:solidFill>
-                <a:latin typeface="Aptos" pitchFamily="34" charset="0"/>
-                <a:ea typeface="Aptos" pitchFamily="34" charset="-122"/>
-                <a:cs typeface="Aptos" pitchFamily="34" charset="-120"/>
-              </a:rPr>
-              <a:t>Play 11: Build and Deploy AI Solutions - This lesson informs Play 11 by helping learners connect the lesson.</a:t>
+                  <a:srgbClr val="003A63"/>
+                </a:solidFill>
+                <a:latin typeface="Aptos" pitchFamily="34" charset="0"/>
+                <a:ea typeface="Aptos" pitchFamily="34" charset="-122"/>
+                <a:cs typeface="Aptos" pitchFamily="34" charset="-120"/>
+              </a:rPr>
+              <a:t>• Play 11: Build and Deploy AI Solutions - This lesson informs Play 11 by helping learners.</a:t>
             </a:r>
             <a:endParaRPr lang="en-US" sz="1900" dirty="0"/>
           </a:p>
           <a:p>
+            <a:pPr indent="0" marL="0">
+              <a:buNone/>
+            </a:pPr>
             <a:r>
               <a:rPr lang="en-US" sz="1900" dirty="0">
                 <a:solidFill>
-                  <a:srgbClr val="17364A"/>
-                </a:solidFill>
-                <a:latin typeface="Aptos" pitchFamily="34" charset="0"/>
-                <a:ea typeface="Aptos" pitchFamily="34" charset="-122"/>
-                <a:cs typeface="Aptos" pitchFamily="34" charset="-120"/>
-              </a:rPr>
-              <a:t>Play 1: Vision &amp; Guardrails - This lesson informs Play 1 by helping learners connect the lesson topic to.</a:t>
+                  <a:srgbClr val="003A63"/>
+                </a:solidFill>
+                <a:latin typeface="Aptos" pitchFamily="34" charset="0"/>
+                <a:ea typeface="Aptos" pitchFamily="34" charset="-122"/>
+                <a:cs typeface="Aptos" pitchFamily="34" charset="-120"/>
+              </a:rPr>
+              <a:t>• Play 1: Vision &amp; Guardrails - This lesson informs Play 1 by helping learners connect the.</a:t>
             </a:r>
             <a:endParaRPr lang="en-US" sz="1900" dirty="0"/>
           </a:p>
           <a:p>
+            <a:pPr indent="0" marL="0">
+              <a:buNone/>
+            </a:pPr>
             <a:r>
               <a:rPr lang="en-US" sz="1900" dirty="0">
                 <a:solidFill>
-                  <a:srgbClr val="17364A"/>
-                </a:solidFill>
-                <a:latin typeface="Aptos" pitchFamily="34" charset="0"/>
-                <a:ea typeface="Aptos" pitchFamily="34" charset="-122"/>
-                <a:cs typeface="Aptos" pitchFamily="34" charset="-120"/>
-              </a:rPr>
-              <a:t>Play 2: Readiness Assessment - This lesson informs Play 2 by helping learners connect the lesson topic to.</a:t>
+                  <a:srgbClr val="003A63"/>
+                </a:solidFill>
+                <a:latin typeface="Aptos" pitchFamily="34" charset="0"/>
+                <a:ea typeface="Aptos" pitchFamily="34" charset="-122"/>
+                <a:cs typeface="Aptos" pitchFamily="34" charset="-120"/>
+              </a:rPr>
+              <a:t>• Play 2: Readiness Assessment - This lesson informs Play 2 by helping learners connect the.</a:t>
             </a:r>
             <a:endParaRPr lang="en-US" sz="1900" dirty="0"/>
           </a:p>
           <a:p>
+            <a:pPr indent="0" marL="0">
+              <a:buNone/>
+            </a:pPr>
             <a:r>
               <a:rPr lang="en-US" sz="1900" dirty="0">
                 <a:solidFill>
-                  <a:srgbClr val="17364A"/>
-                </a:solidFill>
-                <a:latin typeface="Aptos" pitchFamily="34" charset="0"/>
-                <a:ea typeface="Aptos" pitchFamily="34" charset="-122"/>
-                <a:cs typeface="Aptos" pitchFamily="34" charset="-120"/>
-              </a:rPr>
-              <a:t>Play 3: Establish AI Governance - This lesson informs Play 3 by helping learners connect the lesson topic to.</a:t>
+                  <a:srgbClr val="003A63"/>
+                </a:solidFill>
+                <a:latin typeface="Aptos" pitchFamily="34" charset="0"/>
+                <a:ea typeface="Aptos" pitchFamily="34" charset="-122"/>
+                <a:cs typeface="Aptos" pitchFamily="34" charset="-120"/>
+              </a:rPr>
+              <a:t>• Play 3: Establish AI Governance - This lesson informs Play 3 by helping learners connect the.</a:t>
             </a:r>
             <a:endParaRPr lang="en-US" sz="1900" dirty="0"/>
           </a:p>
@@ -12896,17 +13084,17 @@
         </p:nvSpPr>
         <p:spPr>
           <a:xfrm>
-            <a:off x="8211312" y="1920240"/>
-            <a:ext cx="2734056" cy="1463040"/>
-          </a:xfrm>
-          <a:prstGeom prst="rect">
-            <a:avLst/>
-          </a:prstGeom>
-          <a:noFill/>
-          <a:ln/>
-        </p:spPr>
-        <p:txBody>
-          <a:bodyPr wrap="square" lIns="0" tIns="0" rIns="0" bIns="0" rtlCol="0" anchor="t">
+            <a:off x="8211312" y="1892808"/>
+            <a:ext cx="2734056" cy="1536192"/>
+          </a:xfrm>
+          <a:prstGeom prst="rect">
+            <a:avLst/>
+          </a:prstGeom>
+          <a:noFill/>
+          <a:ln/>
+        </p:spPr>
+        <p:txBody>
+          <a:bodyPr wrap="square" lIns="254" tIns="254" rIns="254" bIns="254" rtlCol="0" anchor="t">
             <a:normAutofit/>
           </a:bodyPr>
           <a:lstStyle/>
@@ -12915,7 +13103,7 @@
               <a:buNone/>
             </a:pPr>
             <a:r>
-              <a:rPr lang="en-US" sz="1550" dirty="0">
+              <a:rPr lang="en-US" sz="1320" dirty="0">
                 <a:solidFill>
                   <a:srgbClr val="17364A"/>
                 </a:solidFill>
@@ -12923,9 +13111,9 @@
                 <a:ea typeface="Aptos" pitchFamily="34" charset="-122"/>
                 <a:cs typeface="Aptos" pitchFamily="34" charset="-120"/>
               </a:rPr>
-              <a:t>Use the related plays to identify decisions, participants, timing, approvals, and documentation needed for responsible implementation.</a:t>
-            </a:r>
-            <a:endParaRPr lang="en-US" sz="1550" dirty="0"/>
+              <a:t>Use the related plays to identify decisions, participants, timing, approvals, and documentation needed for responsible.</a:t>
+            </a:r>
+            <a:endParaRPr lang="en-US" sz="1320" dirty="0"/>
           </a:p>
         </p:txBody>
       </p:sp>
@@ -13013,13 +13201,16 @@
           <a:ln/>
         </p:spPr>
         <p:txBody>
-          <a:bodyPr wrap="square" lIns="254" tIns="254" rIns="254" bIns="254" rtlCol="0" anchor="t">
+          <a:bodyPr wrap="square" lIns="508" tIns="508" rIns="508" bIns="508" rtlCol="0" anchor="t">
             <a:normAutofit/>
           </a:bodyPr>
           <a:lstStyle/>
           <a:p>
-            <a:r>
-              <a:rPr lang="en-US" sz="1380" dirty="0">
+            <a:pPr indent="0" marL="0">
+              <a:buNone/>
+            </a:pPr>
+            <a:r>
+              <a:rPr lang="en-US" sz="1220" dirty="0">
                 <a:solidFill>
                   <a:srgbClr val="17364A"/>
                 </a:solidFill>
@@ -13029,11 +13220,14 @@
               </a:rPr>
               <a:t>Locate the decision point in the playbook sequence.</a:t>
             </a:r>
-            <a:endParaRPr lang="en-US" sz="1380" dirty="0"/>
-          </a:p>
-          <a:p>
-            <a:r>
-              <a:rPr lang="en-US" sz="1380" dirty="0">
+            <a:endParaRPr lang="en-US" sz="1220" dirty="0"/>
+          </a:p>
+          <a:p>
+            <a:pPr indent="0" marL="0">
+              <a:buNone/>
+            </a:pPr>
+            <a:r>
+              <a:rPr lang="en-US" sz="1220" dirty="0">
                 <a:solidFill>
                   <a:srgbClr val="17364A"/>
                 </a:solidFill>
@@ -13043,11 +13237,14 @@
               </a:rPr>
               <a:t>Identify who should participate in the work.</a:t>
             </a:r>
-            <a:endParaRPr lang="en-US" sz="1380" dirty="0"/>
-          </a:p>
-          <a:p>
-            <a:r>
-              <a:rPr lang="en-US" sz="1380" dirty="0">
+            <a:endParaRPr lang="en-US" sz="1220" dirty="0"/>
+          </a:p>
+          <a:p>
+            <a:pPr indent="0" marL="0">
+              <a:buNone/>
+            </a:pPr>
+            <a:r>
+              <a:rPr lang="en-US" sz="1220" dirty="0">
                 <a:solidFill>
                   <a:srgbClr val="17364A"/>
                 </a:solidFill>
@@ -13057,7 +13254,7 @@
               </a:rPr>
               <a:t>Document the review, approval, or implementation step.</a:t>
             </a:r>
-            <a:endParaRPr lang="en-US" sz="1380" dirty="0"/>
+            <a:endParaRPr lang="en-US" sz="1220" dirty="0"/>
           </a:p>
         </p:txBody>
       </p:sp>
@@ -13358,63 +13555,75 @@
           <a:ln/>
         </p:spPr>
         <p:txBody>
-          <a:bodyPr wrap="square" lIns="635" tIns="635" rIns="635" bIns="635" rtlCol="0" anchor="t">
+          <a:bodyPr wrap="square" lIns="1016" tIns="1016" rIns="1016" bIns="1016" rtlCol="0" anchor="t">
             <a:normAutofit/>
           </a:bodyPr>
           <a:lstStyle/>
           <a:p>
+            <a:pPr indent="0" marL="0">
+              <a:buNone/>
+            </a:pPr>
             <a:r>
               <a:rPr lang="en-US" sz="1850" dirty="0">
                 <a:solidFill>
-                  <a:srgbClr val="17364A"/>
-                </a:solidFill>
-                <a:latin typeface="Aptos" pitchFamily="34" charset="0"/>
-                <a:ea typeface="Aptos" pitchFamily="34" charset="-122"/>
-                <a:cs typeface="Aptos" pitchFamily="34" charset="-120"/>
-              </a:rPr>
-              <a:t>Tool 1: AI Vision &amp; Principles Workshop (Workshop) - Use AI Vision &amp; Principles Workshop to translate this.</a:t>
+                  <a:srgbClr val="003A63"/>
+                </a:solidFill>
+                <a:latin typeface="Aptos" pitchFamily="34" charset="0"/>
+                <a:ea typeface="Aptos" pitchFamily="34" charset="-122"/>
+                <a:cs typeface="Aptos" pitchFamily="34" charset="-120"/>
+              </a:rPr>
+              <a:t>• Tool 1: AI Vision &amp; Principles Workshop (Workshop) - Use AI Vision &amp; Principles Workshop to.</a:t>
             </a:r>
             <a:endParaRPr lang="en-US" sz="1850" dirty="0"/>
           </a:p>
           <a:p>
+            <a:pPr indent="0" marL="0">
+              <a:buNone/>
+            </a:pPr>
             <a:r>
               <a:rPr lang="en-US" sz="1850" dirty="0">
                 <a:solidFill>
-                  <a:srgbClr val="17364A"/>
-                </a:solidFill>
-                <a:latin typeface="Aptos" pitchFamily="34" charset="0"/>
-                <a:ea typeface="Aptos" pitchFamily="34" charset="-122"/>
-                <a:cs typeface="Aptos" pitchFamily="34" charset="-120"/>
-              </a:rPr>
-              <a:t>Tool 4: AI Policy Landscape Scan (Worksheet) - Use AI Policy Landscape Scan to translate this lesson into a.</a:t>
+                  <a:srgbClr val="003A63"/>
+                </a:solidFill>
+                <a:latin typeface="Aptos" pitchFamily="34" charset="0"/>
+                <a:ea typeface="Aptos" pitchFamily="34" charset="-122"/>
+                <a:cs typeface="Aptos" pitchFamily="34" charset="-120"/>
+              </a:rPr>
+              <a:t>• Tool 4: AI Policy Landscape Scan (Worksheet) - Use AI Policy Landscape Scan to translate this.</a:t>
             </a:r>
             <a:endParaRPr lang="en-US" sz="1850" dirty="0"/>
           </a:p>
           <a:p>
+            <a:pPr indent="0" marL="0">
+              <a:buNone/>
+            </a:pPr>
             <a:r>
               <a:rPr lang="en-US" sz="1850" dirty="0">
                 <a:solidFill>
-                  <a:srgbClr val="17364A"/>
-                </a:solidFill>
-                <a:latin typeface="Aptos" pitchFamily="34" charset="0"/>
-                <a:ea typeface="Aptos" pitchFamily="34" charset="-122"/>
-                <a:cs typeface="Aptos" pitchFamily="34" charset="-120"/>
-              </a:rPr>
-              <a:t>Tool 5: AI Environmental and Resource Impact Review (Checklist) - Use AI Environmental and Resource Impact.</a:t>
+                  <a:srgbClr val="003A63"/>
+                </a:solidFill>
+                <a:latin typeface="Aptos" pitchFamily="34" charset="0"/>
+                <a:ea typeface="Aptos" pitchFamily="34" charset="-122"/>
+                <a:cs typeface="Aptos" pitchFamily="34" charset="-120"/>
+              </a:rPr>
+              <a:t>• Tool 5: AI Environmental and Resource Impact Review (Checklist) - Use AI Environmental and.</a:t>
             </a:r>
             <a:endParaRPr lang="en-US" sz="1850" dirty="0"/>
           </a:p>
           <a:p>
+            <a:pPr indent="0" marL="0">
+              <a:buNone/>
+            </a:pPr>
             <a:r>
               <a:rPr lang="en-US" sz="1850" dirty="0">
                 <a:solidFill>
-                  <a:srgbClr val="17364A"/>
-                </a:solidFill>
-                <a:latin typeface="Aptos" pitchFamily="34" charset="0"/>
-                <a:ea typeface="Aptos" pitchFamily="34" charset="-122"/>
-                <a:cs typeface="Aptos" pitchFamily="34" charset="-120"/>
-              </a:rPr>
-              <a:t>Tool 6: Human-Centered AI Decision Rule Checklist (Checklist) - Use Human-Centered AI Decision Rule.</a:t>
+                  <a:srgbClr val="003A63"/>
+                </a:solidFill>
+                <a:latin typeface="Aptos" pitchFamily="34" charset="0"/>
+                <a:ea typeface="Aptos" pitchFamily="34" charset="-122"/>
+                <a:cs typeface="Aptos" pitchFamily="34" charset="-120"/>
+              </a:rPr>
+              <a:t>• Tool 6: Human-Centered AI Decision Rule Checklist (Checklist) - Use Human-Centered AI Decision.</a:t>
             </a:r>
             <a:endParaRPr lang="en-US" sz="1850" dirty="0"/>
           </a:p>
@@ -13494,17 +13703,17 @@
         </p:nvSpPr>
         <p:spPr>
           <a:xfrm>
-            <a:off x="8211312" y="1920240"/>
-            <a:ext cx="2734056" cy="1463040"/>
-          </a:xfrm>
-          <a:prstGeom prst="rect">
-            <a:avLst/>
-          </a:prstGeom>
-          <a:noFill/>
-          <a:ln/>
-        </p:spPr>
-        <p:txBody>
-          <a:bodyPr wrap="square" lIns="0" tIns="0" rIns="0" bIns="0" rtlCol="0" anchor="t">
+            <a:off x="8211312" y="1892808"/>
+            <a:ext cx="2734056" cy="1536192"/>
+          </a:xfrm>
+          <a:prstGeom prst="rect">
+            <a:avLst/>
+          </a:prstGeom>
+          <a:noFill/>
+          <a:ln/>
+        </p:spPr>
+        <p:txBody>
+          <a:bodyPr wrap="square" lIns="254" tIns="254" rIns="254" bIns="254" rtlCol="0" anchor="t">
             <a:normAutofit/>
           </a:bodyPr>
           <a:lstStyle/>
@@ -13513,7 +13722,7 @@
               <a:buNone/>
             </a:pPr>
             <a:r>
-              <a:rPr lang="en-US" sz="1550" dirty="0">
+              <a:rPr lang="en-US" sz="1320" dirty="0">
                 <a:solidFill>
                   <a:srgbClr val="17364A"/>
                 </a:solidFill>
@@ -13521,9 +13730,9 @@
                 <a:ea typeface="Aptos" pitchFamily="34" charset="-122"/>
                 <a:cs typeface="Aptos" pitchFamily="34" charset="-120"/>
               </a:rPr>
-              <a:t>Use linked tools when your department needs a structured worksheet, template, checklist, review process, or documentation artifact.</a:t>
-            </a:r>
-            <a:endParaRPr lang="en-US" sz="1550" dirty="0"/>
+              <a:t>Use linked tools when your department needs a structured worksheet, template, checklist, review process, or.</a:t>
+            </a:r>
+            <a:endParaRPr lang="en-US" sz="1320" dirty="0"/>
           </a:p>
         </p:txBody>
       </p:sp>
@@ -13611,13 +13820,16 @@
           <a:ln/>
         </p:spPr>
         <p:txBody>
-          <a:bodyPr wrap="square" lIns="254" tIns="254" rIns="254" bIns="254" rtlCol="0" anchor="t">
+          <a:bodyPr wrap="square" lIns="508" tIns="508" rIns="508" bIns="508" rtlCol="0" anchor="t">
             <a:normAutofit/>
           </a:bodyPr>
           <a:lstStyle/>
           <a:p>
-            <a:r>
-              <a:rPr lang="en-US" sz="1380" dirty="0">
+            <a:pPr indent="0" marL="0">
+              <a:buNone/>
+            </a:pPr>
+            <a:r>
+              <a:rPr lang="en-US" sz="1220" dirty="0">
                 <a:solidFill>
                   <a:srgbClr val="17364A"/>
                 </a:solidFill>
@@ -13627,11 +13839,14 @@
               </a:rPr>
               <a:t>Use a tool when no comparable local process exists.</a:t>
             </a:r>
-            <a:endParaRPr lang="en-US" sz="1380" dirty="0"/>
-          </a:p>
-          <a:p>
-            <a:r>
-              <a:rPr lang="en-US" sz="1380" dirty="0">
+            <a:endParaRPr lang="en-US" sz="1220" dirty="0"/>
+          </a:p>
+          <a:p>
+            <a:pPr indent="0" marL="0">
+              <a:buNone/>
+            </a:pPr>
+            <a:r>
+              <a:rPr lang="en-US" sz="1220" dirty="0">
                 <a:solidFill>
                   <a:srgbClr val="17364A"/>
                 </a:solidFill>
@@ -13639,13 +13854,16 @@
                 <a:ea typeface="Aptos" pitchFamily="34" charset="-122"/>
                 <a:cs typeface="Aptos" pitchFamily="34" charset="-120"/>
               </a:rPr>
-              <a:t>Adapt existing department templates when they already fit the purpose.</a:t>
-            </a:r>
-            <a:endParaRPr lang="en-US" sz="1380" dirty="0"/>
-          </a:p>
-          <a:p>
-            <a:r>
-              <a:rPr lang="en-US" sz="1380" dirty="0">
+              <a:t>Adapt existing department templates when they already fit the.</a:t>
+            </a:r>
+            <a:endParaRPr lang="en-US" sz="1220" dirty="0"/>
+          </a:p>
+          <a:p>
+            <a:pPr indent="0" marL="0">
+              <a:buNone/>
+            </a:pPr>
+            <a:r>
+              <a:rPr lang="en-US" sz="1220" dirty="0">
                 <a:solidFill>
                   <a:srgbClr val="17364A"/>
                 </a:solidFill>
@@ -13655,7 +13873,7 @@
               </a:rPr>
               <a:t>Save the completed artifact as evidence of the decision.</a:t>
             </a:r>
-            <a:endParaRPr lang="en-US" sz="1380" dirty="0"/>
+            <a:endParaRPr lang="en-US" sz="1220" dirty="0"/>
           </a:p>
         </p:txBody>
       </p:sp>
@@ -13956,49 +14174,58 @@
           <a:ln/>
         </p:spPr>
         <p:txBody>
-          <a:bodyPr wrap="square" lIns="635" tIns="635" rIns="635" bIns="635" rtlCol="0" anchor="t">
+          <a:bodyPr wrap="square" lIns="1016" tIns="1016" rIns="1016" bIns="1016" rtlCol="0" anchor="t">
             <a:normAutofit/>
           </a:bodyPr>
           <a:lstStyle/>
           <a:p>
+            <a:pPr indent="0" marL="0">
+              <a:buNone/>
+            </a:pPr>
             <a:r>
               <a:rPr lang="en-US" sz="2100" dirty="0">
                 <a:solidFill>
-                  <a:srgbClr val="17364A"/>
-                </a:solidFill>
-                <a:latin typeface="Aptos" pitchFamily="34" charset="0"/>
-                <a:ea typeface="Aptos" pitchFamily="34" charset="-122"/>
-                <a:cs typeface="Aptos" pitchFamily="34" charset="-120"/>
-              </a:rPr>
-              <a:t>Explain the purpose of ai policy development and approval workflow in public health AI.</a:t>
+                  <a:srgbClr val="003A63"/>
+                </a:solidFill>
+                <a:latin typeface="Aptos" pitchFamily="34" charset="0"/>
+                <a:ea typeface="Aptos" pitchFamily="34" charset="-122"/>
+                <a:cs typeface="Aptos" pitchFamily="34" charset="-120"/>
+              </a:rPr>
+              <a:t>• Explain the purpose of ai policy development and approval workflow in public health AI.</a:t>
             </a:r>
             <a:endParaRPr lang="en-US" sz="2100" dirty="0"/>
           </a:p>
           <a:p>
+            <a:pPr indent="0" marL="0">
+              <a:buNone/>
+            </a:pPr>
             <a:r>
               <a:rPr lang="en-US" sz="2100" dirty="0">
                 <a:solidFill>
-                  <a:srgbClr val="17364A"/>
-                </a:solidFill>
-                <a:latin typeface="Aptos" pitchFamily="34" charset="0"/>
-                <a:ea typeface="Aptos" pitchFamily="34" charset="-122"/>
-                <a:cs typeface="Aptos" pitchFamily="34" charset="-120"/>
-              </a:rPr>
-              <a:t>Identify the roles, decisions, risks, and documentation needed for the topic.</a:t>
+                  <a:srgbClr val="003A63"/>
+                </a:solidFill>
+                <a:latin typeface="Aptos" pitchFamily="34" charset="0"/>
+                <a:ea typeface="Aptos" pitchFamily="34" charset="-122"/>
+                <a:cs typeface="Aptos" pitchFamily="34" charset="-120"/>
+              </a:rPr>
+              <a:t>• Identify the roles, decisions, risks, and documentation needed for the topic.</a:t>
             </a:r>
             <a:endParaRPr lang="en-US" sz="2100" dirty="0"/>
           </a:p>
           <a:p>
+            <a:pPr indent="0" marL="0">
+              <a:buNone/>
+            </a:pPr>
             <a:r>
               <a:rPr lang="en-US" sz="2100" dirty="0">
                 <a:solidFill>
-                  <a:srgbClr val="17364A"/>
-                </a:solidFill>
-                <a:latin typeface="Aptos" pitchFamily="34" charset="0"/>
-                <a:ea typeface="Aptos" pitchFamily="34" charset="-122"/>
-                <a:cs typeface="Aptos" pitchFamily="34" charset="-120"/>
-              </a:rPr>
-              <a:t>Apply the topic to a real or realistic public health workflow or decision.</a:t>
+                  <a:srgbClr val="003A63"/>
+                </a:solidFill>
+                <a:latin typeface="Aptos" pitchFamily="34" charset="0"/>
+                <a:ea typeface="Aptos" pitchFamily="34" charset="-122"/>
+                <a:cs typeface="Aptos" pitchFamily="34" charset="-120"/>
+              </a:rPr>
+              <a:t>• Apply the topic to a real or realistic public health workflow or decision.</a:t>
             </a:r>
             <a:endParaRPr lang="en-US" sz="2100" dirty="0"/>
           </a:p>
@@ -14078,17 +14305,17 @@
         </p:nvSpPr>
         <p:spPr>
           <a:xfrm>
-            <a:off x="7799832" y="1828800"/>
-            <a:ext cx="3145536" cy="685800"/>
-          </a:xfrm>
-          <a:prstGeom prst="rect">
-            <a:avLst/>
-          </a:prstGeom>
-          <a:noFill/>
-          <a:ln/>
-        </p:spPr>
-        <p:txBody>
-          <a:bodyPr wrap="square" lIns="0" tIns="0" rIns="0" bIns="0" rtlCol="0" anchor="t">
+            <a:off x="7799832" y="1801368"/>
+            <a:ext cx="3145536" cy="758952"/>
+          </a:xfrm>
+          <a:prstGeom prst="rect">
+            <a:avLst/>
+          </a:prstGeom>
+          <a:noFill/>
+          <a:ln/>
+        </p:spPr>
+        <p:txBody>
+          <a:bodyPr wrap="square" lIns="254" tIns="254" rIns="254" bIns="254" rtlCol="0" anchor="t">
             <a:normAutofit/>
           </a:bodyPr>
           <a:lstStyle/>
@@ -14097,7 +14324,7 @@
               <a:buNone/>
             </a:pPr>
             <a:r>
-              <a:rPr lang="en-US" sz="1550" dirty="0">
+              <a:rPr lang="en-US" sz="1320" dirty="0">
                 <a:solidFill>
                   <a:srgbClr val="17364A"/>
                 </a:solidFill>
@@ -14107,7 +14334,7 @@
               </a:rPr>
               <a:t>Explain the purpose of ai policy development and approval workflow in public health AI.</a:t>
             </a:r>
-            <a:endParaRPr lang="en-US" sz="1550" dirty="0"/>
+            <a:endParaRPr lang="en-US" sz="1320" dirty="0"/>
           </a:p>
         </p:txBody>
       </p:sp>
@@ -14195,13 +14422,16 @@
           <a:ln/>
         </p:spPr>
         <p:txBody>
-          <a:bodyPr wrap="square" lIns="254" tIns="254" rIns="254" bIns="254" rtlCol="0" anchor="t">
+          <a:bodyPr wrap="square" lIns="508" tIns="508" rIns="508" bIns="508" rtlCol="0" anchor="t">
             <a:normAutofit/>
           </a:bodyPr>
           <a:lstStyle/>
           <a:p>
-            <a:r>
-              <a:rPr lang="en-US" sz="1380" dirty="0">
+            <a:pPr indent="0" marL="0">
+              <a:buNone/>
+            </a:pPr>
+            <a:r>
+              <a:rPr lang="en-US" sz="1220" dirty="0">
                 <a:solidFill>
                   <a:srgbClr val="17364A"/>
                 </a:solidFill>
@@ -14209,13 +14439,16 @@
                 <a:ea typeface="Aptos" pitchFamily="34" charset="-122"/>
                 <a:cs typeface="Aptos" pitchFamily="34" charset="-120"/>
               </a:rPr>
-              <a:t>Recognize equity, privacy, security, legal, operational, and public trust implications.</a:t>
-            </a:r>
-            <a:endParaRPr lang="en-US" sz="1380" dirty="0"/>
-          </a:p>
-          <a:p>
-            <a:r>
-              <a:rPr lang="en-US" sz="1380" dirty="0">
+              <a:t>Recognize equity, privacy, security, legal, operational, and.</a:t>
+            </a:r>
+            <a:endParaRPr lang="en-US" sz="1220" dirty="0"/>
+          </a:p>
+          <a:p>
+            <a:pPr indent="0" marL="0">
+              <a:buNone/>
+            </a:pPr>
+            <a:r>
+              <a:rPr lang="en-US" sz="1220" dirty="0">
                 <a:solidFill>
                   <a:srgbClr val="17364A"/>
                 </a:solidFill>
@@ -14223,9 +14456,9 @@
                 <a:ea typeface="Aptos" pitchFamily="34" charset="-122"/>
                 <a:cs typeface="Aptos" pitchFamily="34" charset="-120"/>
               </a:rPr>
-              <a:t>Produce a practical artifact that supports readiness, governance, implementation,.</a:t>
-            </a:r>
-            <a:endParaRPr lang="en-US" sz="1380" dirty="0"/>
+              <a:t>Produce a practical artifact that supports readiness, governance,.</a:t>
+            </a:r>
+            <a:endParaRPr lang="en-US" sz="1220" dirty="0"/>
           </a:p>
         </p:txBody>
       </p:sp>
@@ -14303,17 +14536,17 @@
         </p:nvSpPr>
         <p:spPr>
           <a:xfrm>
-            <a:off x="7799832" y="5001768"/>
-            <a:ext cx="3145536" cy="502920"/>
-          </a:xfrm>
-          <a:prstGeom prst="rect">
-            <a:avLst/>
-          </a:prstGeom>
-          <a:noFill/>
-          <a:ln/>
-        </p:spPr>
-        <p:txBody>
-          <a:bodyPr wrap="square" lIns="0" tIns="0" rIns="0" bIns="0" rtlCol="0" anchor="t">
+            <a:off x="7799832" y="4974336"/>
+            <a:ext cx="3145536" cy="576072"/>
+          </a:xfrm>
+          <a:prstGeom prst="rect">
+            <a:avLst/>
+          </a:prstGeom>
+          <a:noFill/>
+          <a:ln/>
+        </p:spPr>
+        <p:txBody>
+          <a:bodyPr wrap="square" lIns="254" tIns="254" rIns="254" bIns="254" rtlCol="0" anchor="t">
             <a:normAutofit/>
           </a:bodyPr>
           <a:lstStyle/>
@@ -14322,7 +14555,7 @@
               <a:buNone/>
             </a:pPr>
             <a:r>
-              <a:rPr lang="en-US" sz="1550" dirty="0">
+              <a:rPr lang="en-US" sz="1320" dirty="0">
                 <a:solidFill>
                   <a:srgbClr val="17364A"/>
                 </a:solidFill>
@@ -14330,9 +14563,9 @@
                 <a:ea typeface="Aptos" pitchFamily="34" charset="-122"/>
                 <a:cs typeface="Aptos" pitchFamily="34" charset="-120"/>
               </a:rPr>
-              <a:t>Use the assignment to test whether you can explain the concept, apply it to a realistic public health situation, and identify what would need review before the work moves forward.</a:t>
-            </a:r>
-            <a:endParaRPr lang="en-US" sz="1550" dirty="0"/>
+              <a:t>Use the assignment to test whether you can explain the concept, apply it to a realistic public health situation, and.</a:t>
+            </a:r>
+            <a:endParaRPr lang="en-US" sz="1320" dirty="0"/>
           </a:p>
         </p:txBody>
       </p:sp>
@@ -14633,49 +14866,58 @@
           <a:ln/>
         </p:spPr>
         <p:txBody>
-          <a:bodyPr wrap="square" lIns="635" tIns="635" rIns="635" bIns="635" rtlCol="0" anchor="t">
+          <a:bodyPr wrap="square" lIns="1016" tIns="1016" rIns="1016" bIns="1016" rtlCol="0" anchor="t">
             <a:normAutofit/>
           </a:bodyPr>
           <a:lstStyle/>
           <a:p>
+            <a:pPr indent="0" marL="0">
+              <a:buNone/>
+            </a:pPr>
             <a:r>
               <a:rPr lang="en-US" sz="2100" dirty="0">
                 <a:solidFill>
-                  <a:srgbClr val="17364A"/>
-                </a:solidFill>
-                <a:latin typeface="Aptos" pitchFamily="34" charset="0"/>
-                <a:ea typeface="Aptos" pitchFamily="34" charset="-122"/>
-                <a:cs typeface="Aptos" pitchFamily="34" charset="-120"/>
-              </a:rPr>
-              <a:t>This module focuses on creating, approving, implementing, and updating internal AI policies.</a:t>
+                  <a:srgbClr val="003A63"/>
+                </a:solidFill>
+                <a:latin typeface="Aptos" pitchFamily="34" charset="0"/>
+                <a:ea typeface="Aptos" pitchFamily="34" charset="-122"/>
+                <a:cs typeface="Aptos" pitchFamily="34" charset="-120"/>
+              </a:rPr>
+              <a:t>• This module focuses on creating, approving, implementing, and updating internal AI policies.</a:t>
             </a:r>
             <a:endParaRPr lang="en-US" sz="2100" dirty="0"/>
           </a:p>
           <a:p>
+            <a:pPr indent="0" marL="0">
+              <a:buNone/>
+            </a:pPr>
             <a:r>
               <a:rPr lang="en-US" sz="2100" dirty="0">
                 <a:solidFill>
-                  <a:srgbClr val="17364A"/>
-                </a:solidFill>
-                <a:latin typeface="Aptos" pitchFamily="34" charset="0"/>
-                <a:ea typeface="Aptos" pitchFamily="34" charset="-122"/>
-                <a:cs typeface="Aptos" pitchFamily="34" charset="-120"/>
-              </a:rPr>
-              <a:t>It is designed for public health staff who must translate responsible AI principles into repeatable.</a:t>
+                  <a:srgbClr val="003A63"/>
+                </a:solidFill>
+                <a:latin typeface="Aptos" pitchFamily="34" charset="0"/>
+                <a:ea typeface="Aptos" pitchFamily="34" charset="-122"/>
+                <a:cs typeface="Aptos" pitchFamily="34" charset="-120"/>
+              </a:rPr>
+              <a:t>• It is designed for public health staff who must translate responsible AI principles into.</a:t>
             </a:r>
             <a:endParaRPr lang="en-US" sz="2100" dirty="0"/>
           </a:p>
           <a:p>
+            <a:pPr indent="0" marL="0">
+              <a:buNone/>
+            </a:pPr>
             <a:r>
               <a:rPr lang="en-US" sz="2100" dirty="0">
                 <a:solidFill>
-                  <a:srgbClr val="17364A"/>
-                </a:solidFill>
-                <a:latin typeface="Aptos" pitchFamily="34" charset="0"/>
-                <a:ea typeface="Aptos" pitchFamily="34" charset="-122"/>
-                <a:cs typeface="Aptos" pitchFamily="34" charset="-120"/>
-              </a:rPr>
-              <a:t>The module helps learners move beyond general awareness by producing a practical artifact that can be.</a:t>
+                  <a:srgbClr val="003A63"/>
+                </a:solidFill>
+                <a:latin typeface="Aptos" pitchFamily="34" charset="0"/>
+                <a:ea typeface="Aptos" pitchFamily="34" charset="-122"/>
+                <a:cs typeface="Aptos" pitchFamily="34" charset="-120"/>
+              </a:rPr>
+              <a:t>• The module helps learners move beyond general awareness by producing a practical artifact that.</a:t>
             </a:r>
             <a:endParaRPr lang="en-US" sz="2100" dirty="0"/>
           </a:p>
@@ -14755,17 +14997,17 @@
         </p:nvSpPr>
         <p:spPr>
           <a:xfrm>
-            <a:off x="7799832" y="1828800"/>
-            <a:ext cx="3145536" cy="685800"/>
-          </a:xfrm>
-          <a:prstGeom prst="rect">
-            <a:avLst/>
-          </a:prstGeom>
-          <a:noFill/>
-          <a:ln/>
-        </p:spPr>
-        <p:txBody>
-          <a:bodyPr wrap="square" lIns="0" tIns="0" rIns="0" bIns="0" rtlCol="0" anchor="t">
+            <a:off x="7799832" y="1801368"/>
+            <a:ext cx="3145536" cy="758952"/>
+          </a:xfrm>
+          <a:prstGeom prst="rect">
+            <a:avLst/>
+          </a:prstGeom>
+          <a:noFill/>
+          <a:ln/>
+        </p:spPr>
+        <p:txBody>
+          <a:bodyPr wrap="square" lIns="254" tIns="254" rIns="254" bIns="254" rtlCol="0" anchor="t">
             <a:normAutofit/>
           </a:bodyPr>
           <a:lstStyle/>
@@ -14774,7 +15016,7 @@
               <a:buNone/>
             </a:pPr>
             <a:r>
-              <a:rPr lang="en-US" sz="1550" dirty="0">
+              <a:rPr lang="en-US" sz="1320" dirty="0">
                 <a:solidFill>
                   <a:srgbClr val="17364A"/>
                 </a:solidFill>
@@ -14784,7 +15026,7 @@
               </a:rPr>
               <a:t>This module focuses on creating, approving, implementing, and updating internal AI policies.</a:t>
             </a:r>
-            <a:endParaRPr lang="en-US" sz="1550" dirty="0"/>
+            <a:endParaRPr lang="en-US" sz="1320" dirty="0"/>
           </a:p>
         </p:txBody>
       </p:sp>
@@ -14872,13 +15114,16 @@
           <a:ln/>
         </p:spPr>
         <p:txBody>
-          <a:bodyPr wrap="square" lIns="254" tIns="254" rIns="254" bIns="254" rtlCol="0" anchor="t">
+          <a:bodyPr wrap="square" lIns="508" tIns="508" rIns="508" bIns="508" rtlCol="0" anchor="t">
             <a:normAutofit/>
           </a:bodyPr>
           <a:lstStyle/>
           <a:p>
-            <a:r>
-              <a:rPr lang="en-US" sz="1380" dirty="0">
+            <a:pPr indent="0" marL="0">
+              <a:buNone/>
+            </a:pPr>
+            <a:r>
+              <a:rPr lang="en-US" sz="1220" dirty="0">
                 <a:solidFill>
                   <a:srgbClr val="17364A"/>
                 </a:solidFill>
@@ -14886,13 +15131,16 @@
                 <a:ea typeface="Aptos" pitchFamily="34" charset="-122"/>
                 <a:cs typeface="Aptos" pitchFamily="34" charset="-120"/>
               </a:rPr>
-              <a:t>It is designed for public health staff who must translate responsible AI principles into.</a:t>
-            </a:r>
-            <a:endParaRPr lang="en-US" sz="1380" dirty="0"/>
-          </a:p>
-          <a:p>
-            <a:r>
-              <a:rPr lang="en-US" sz="1380" dirty="0">
+              <a:t>It is designed for public health staff who must translate.</a:t>
+            </a:r>
+            <a:endParaRPr lang="en-US" sz="1220" dirty="0"/>
+          </a:p>
+          <a:p>
+            <a:pPr indent="0" marL="0">
+              <a:buNone/>
+            </a:pPr>
+            <a:r>
+              <a:rPr lang="en-US" sz="1220" dirty="0">
                 <a:solidFill>
                   <a:srgbClr val="17364A"/>
                 </a:solidFill>
@@ -14900,13 +15148,16 @@
                 <a:ea typeface="Aptos" pitchFamily="34" charset="-122"/>
                 <a:cs typeface="Aptos" pitchFamily="34" charset="-120"/>
               </a:rPr>
-              <a:t>The module helps learners move beyond general awareness by producing a practical artifact.</a:t>
-            </a:r>
-            <a:endParaRPr lang="en-US" sz="1380" dirty="0"/>
-          </a:p>
-          <a:p>
-            <a:r>
-              <a:rPr lang="en-US" sz="1380" dirty="0">
+              <a:t>The module helps learners move beyond general awareness by.</a:t>
+            </a:r>
+            <a:endParaRPr lang="en-US" sz="1220" dirty="0"/>
+          </a:p>
+          <a:p>
+            <a:pPr indent="0" marL="0">
+              <a:buNone/>
+            </a:pPr>
+            <a:r>
+              <a:rPr lang="en-US" sz="1220" dirty="0">
                 <a:solidFill>
                   <a:srgbClr val="17364A"/>
                 </a:solidFill>
@@ -14914,9 +15165,9 @@
                 <a:ea typeface="Aptos" pitchFamily="34" charset="-122"/>
                 <a:cs typeface="Aptos" pitchFamily="34" charset="-120"/>
               </a:rPr>
-              <a:t>It emphasizes paragraph-based reasoning, defined responsibilities, and documentation that.</a:t>
-            </a:r>
-            <a:endParaRPr lang="en-US" sz="1380" dirty="0"/>
+              <a:t>It emphasizes paragraph-based reasoning, defined responsibilities,.</a:t>
+            </a:r>
+            <a:endParaRPr lang="en-US" sz="1220" dirty="0"/>
           </a:p>
         </p:txBody>
       </p:sp>
@@ -14994,17 +15245,17 @@
         </p:nvSpPr>
         <p:spPr>
           <a:xfrm>
-            <a:off x="7799832" y="5001768"/>
-            <a:ext cx="3145536" cy="502920"/>
-          </a:xfrm>
-          <a:prstGeom prst="rect">
-            <a:avLst/>
-          </a:prstGeom>
-          <a:noFill/>
-          <a:ln/>
-        </p:spPr>
-        <p:txBody>
-          <a:bodyPr wrap="square" lIns="0" tIns="0" rIns="0" bIns="0" rtlCol="0" anchor="t">
+            <a:off x="7799832" y="4974336"/>
+            <a:ext cx="3145536" cy="576072"/>
+          </a:xfrm>
+          <a:prstGeom prst="rect">
+            <a:avLst/>
+          </a:prstGeom>
+          <a:noFill/>
+          <a:ln/>
+        </p:spPr>
+        <p:txBody>
+          <a:bodyPr wrap="square" lIns="254" tIns="254" rIns="254" bIns="254" rtlCol="0" anchor="t">
             <a:normAutofit/>
           </a:bodyPr>
           <a:lstStyle/>
@@ -15013,7 +15264,7 @@
               <a:buNone/>
             </a:pPr>
             <a:r>
-              <a:rPr lang="en-US" sz="1550" dirty="0">
+              <a:rPr lang="en-US" sz="1320" dirty="0">
                 <a:solidFill>
                   <a:srgbClr val="17364A"/>
                 </a:solidFill>
@@ -15021,9 +15272,9 @@
                 <a:ea typeface="Aptos" pitchFamily="34" charset="-122"/>
                 <a:cs typeface="Aptos" pitchFamily="34" charset="-120"/>
               </a:rPr>
-              <a:t>Translate this concept into clear decision rights, review steps, documentation expectations, and escalation paths before an AI-supported workflow is approved.</a:t>
-            </a:r>
-            <a:endParaRPr lang="en-US" sz="1550" dirty="0"/>
+              <a:t>Translate this concept into clear decision rights, review steps, documentation expectations, and escalation paths before.</a:t>
+            </a:r>
+            <a:endParaRPr lang="en-US" sz="1320" dirty="0"/>
           </a:p>
         </p:txBody>
       </p:sp>
@@ -15324,49 +15575,58 @@
           <a:ln/>
         </p:spPr>
         <p:txBody>
-          <a:bodyPr wrap="square" lIns="635" tIns="635" rIns="635" bIns="635" rtlCol="0" anchor="t">
+          <a:bodyPr wrap="square" lIns="1016" tIns="1016" rIns="1016" bIns="1016" rtlCol="0" anchor="t">
             <a:normAutofit/>
           </a:bodyPr>
           <a:lstStyle/>
           <a:p>
+            <a:pPr indent="0" marL="0">
+              <a:buNone/>
+            </a:pPr>
             <a:r>
               <a:rPr lang="en-US" sz="2100" dirty="0">
                 <a:solidFill>
-                  <a:srgbClr val="17364A"/>
-                </a:solidFill>
-                <a:latin typeface="Aptos" pitchFamily="34" charset="0"/>
-                <a:ea typeface="Aptos" pitchFamily="34" charset="-122"/>
-                <a:cs typeface="Aptos" pitchFamily="34" charset="-120"/>
-              </a:rPr>
-              <a:t>Decision right: The authority to approve, deny, modify, pause, or escalate an AI use case or.</a:t>
+                  <a:srgbClr val="003A63"/>
+                </a:solidFill>
+                <a:latin typeface="Aptos" pitchFamily="34" charset="0"/>
+                <a:ea typeface="Aptos" pitchFamily="34" charset="-122"/>
+                <a:cs typeface="Aptos" pitchFamily="34" charset="-120"/>
+              </a:rPr>
+              <a:t>• Decision right: The authority to approve, deny, modify, pause, or escalate an AI use case or.</a:t>
             </a:r>
             <a:endParaRPr lang="en-US" sz="2100" dirty="0"/>
           </a:p>
           <a:p>
+            <a:pPr indent="0" marL="0">
+              <a:buNone/>
+            </a:pPr>
             <a:r>
               <a:rPr lang="en-US" sz="2100" dirty="0">
                 <a:solidFill>
-                  <a:srgbClr val="17364A"/>
-                </a:solidFill>
-                <a:latin typeface="Aptos" pitchFamily="34" charset="0"/>
-                <a:ea typeface="Aptos" pitchFamily="34" charset="-122"/>
-                <a:cs typeface="Aptos" pitchFamily="34" charset="-120"/>
-              </a:rPr>
-              <a:t>Evidence artifact: A document, log, checklist, test result, approval record, or review note that.</a:t>
+                  <a:srgbClr val="003A63"/>
+                </a:solidFill>
+                <a:latin typeface="Aptos" pitchFamily="34" charset="0"/>
+                <a:ea typeface="Aptos" pitchFamily="34" charset="-122"/>
+                <a:cs typeface="Aptos" pitchFamily="34" charset="-120"/>
+              </a:rPr>
+              <a:t>• Evidence artifact: A document, log, checklist, test result, approval record, or review note.</a:t>
             </a:r>
             <a:endParaRPr lang="en-US" sz="2100" dirty="0"/>
           </a:p>
           <a:p>
+            <a:pPr indent="0" marL="0">
+              <a:buNone/>
+            </a:pPr>
             <a:r>
               <a:rPr lang="en-US" sz="2100" dirty="0">
                 <a:solidFill>
-                  <a:srgbClr val="17364A"/>
-                </a:solidFill>
-                <a:latin typeface="Aptos" pitchFamily="34" charset="0"/>
-                <a:ea typeface="Aptos" pitchFamily="34" charset="-122"/>
-                <a:cs typeface="Aptos" pitchFamily="34" charset="-120"/>
-              </a:rPr>
-              <a:t>Escalation pathway: A defined route for raising concerns to the appropriate reviewer or decision-maker.</a:t>
+                  <a:srgbClr val="003A63"/>
+                </a:solidFill>
+                <a:latin typeface="Aptos" pitchFamily="34" charset="0"/>
+                <a:ea typeface="Aptos" pitchFamily="34" charset="-122"/>
+                <a:cs typeface="Aptos" pitchFamily="34" charset="-120"/>
+              </a:rPr>
+              <a:t>• Escalation pathway: A defined route for raising concerns to the appropriate reviewer or.</a:t>
             </a:r>
             <a:endParaRPr lang="en-US" sz="2100" dirty="0"/>
           </a:p>
@@ -15446,17 +15706,17 @@
         </p:nvSpPr>
         <p:spPr>
           <a:xfrm>
-            <a:off x="7799832" y="1828800"/>
-            <a:ext cx="3145536" cy="685800"/>
-          </a:xfrm>
-          <a:prstGeom prst="rect">
-            <a:avLst/>
-          </a:prstGeom>
-          <a:noFill/>
-          <a:ln/>
-        </p:spPr>
-        <p:txBody>
-          <a:bodyPr wrap="square" lIns="0" tIns="0" rIns="0" bIns="0" rtlCol="0" anchor="t">
+            <a:off x="7799832" y="1801368"/>
+            <a:ext cx="3145536" cy="758952"/>
+          </a:xfrm>
+          <a:prstGeom prst="rect">
+            <a:avLst/>
+          </a:prstGeom>
+          <a:noFill/>
+          <a:ln/>
+        </p:spPr>
+        <p:txBody>
+          <a:bodyPr wrap="square" lIns="254" tIns="254" rIns="254" bIns="254" rtlCol="0" anchor="t">
             <a:normAutofit/>
           </a:bodyPr>
           <a:lstStyle/>
@@ -15465,7 +15725,7 @@
               <a:buNone/>
             </a:pPr>
             <a:r>
-              <a:rPr lang="en-US" sz="1550" dirty="0">
+              <a:rPr lang="en-US" sz="1320" dirty="0">
                 <a:solidFill>
                   <a:srgbClr val="17364A"/>
                 </a:solidFill>
@@ -15475,7 +15735,7 @@
               </a:rPr>
               <a:t>Decision right: The authority to approve, deny, modify, pause, or escalate an AI use case or.</a:t>
             </a:r>
-            <a:endParaRPr lang="en-US" sz="1550" dirty="0"/>
+            <a:endParaRPr lang="en-US" sz="1320" dirty="0"/>
           </a:p>
         </p:txBody>
       </p:sp>
@@ -15563,13 +15823,16 @@
           <a:ln/>
         </p:spPr>
         <p:txBody>
-          <a:bodyPr wrap="square" lIns="254" tIns="254" rIns="254" bIns="254" rtlCol="0" anchor="t">
+          <a:bodyPr wrap="square" lIns="508" tIns="508" rIns="508" bIns="508" rtlCol="0" anchor="t">
             <a:normAutofit/>
           </a:bodyPr>
           <a:lstStyle/>
           <a:p>
-            <a:r>
-              <a:rPr lang="en-US" sz="1380" dirty="0">
+            <a:pPr indent="0" marL="0">
+              <a:buNone/>
+            </a:pPr>
+            <a:r>
+              <a:rPr lang="en-US" sz="1220" dirty="0">
                 <a:solidFill>
                   <a:srgbClr val="17364A"/>
                 </a:solidFill>
@@ -15577,13 +15840,16 @@
                 <a:ea typeface="Aptos" pitchFamily="34" charset="-122"/>
                 <a:cs typeface="Aptos" pitchFamily="34" charset="-120"/>
               </a:rPr>
-              <a:t>Decision right: The authority to approve, deny, modify, pause, or escalate an AI use case.</a:t>
-            </a:r>
-            <a:endParaRPr lang="en-US" sz="1380" dirty="0"/>
-          </a:p>
-          <a:p>
-            <a:r>
-              <a:rPr lang="en-US" sz="1380" dirty="0">
+              <a:t>Decision right: The authority to approve, deny, modify, pause, or.</a:t>
+            </a:r>
+            <a:endParaRPr lang="en-US" sz="1220" dirty="0"/>
+          </a:p>
+          <a:p>
+            <a:pPr indent="0" marL="0">
+              <a:buNone/>
+            </a:pPr>
+            <a:r>
+              <a:rPr lang="en-US" sz="1220" dirty="0">
                 <a:solidFill>
                   <a:srgbClr val="17364A"/>
                 </a:solidFill>
@@ -15591,13 +15857,16 @@
                 <a:ea typeface="Aptos" pitchFamily="34" charset="-122"/>
                 <a:cs typeface="Aptos" pitchFamily="34" charset="-120"/>
               </a:rPr>
-              <a:t>Evidence artifact: A document, log, checklist, test result, approval record, or review.</a:t>
-            </a:r>
-            <a:endParaRPr lang="en-US" sz="1380" dirty="0"/>
-          </a:p>
-          <a:p>
-            <a:r>
-              <a:rPr lang="en-US" sz="1380" dirty="0">
+              <a:t>Evidence artifact: A document, log, checklist, test result,.</a:t>
+            </a:r>
+            <a:endParaRPr lang="en-US" sz="1220" dirty="0"/>
+          </a:p>
+          <a:p>
+            <a:pPr indent="0" marL="0">
+              <a:buNone/>
+            </a:pPr>
+            <a:r>
+              <a:rPr lang="en-US" sz="1220" dirty="0">
                 <a:solidFill>
                   <a:srgbClr val="17364A"/>
                 </a:solidFill>
@@ -15605,9 +15874,9 @@
                 <a:ea typeface="Aptos" pitchFamily="34" charset="-122"/>
                 <a:cs typeface="Aptos" pitchFamily="34" charset="-120"/>
               </a:rPr>
-              <a:t>Accountability owner: The person or role responsible for ensuring that an AI use case is.</a:t>
-            </a:r>
-            <a:endParaRPr lang="en-US" sz="1380" dirty="0"/>
+              <a:t>Accountability owner: The person or role responsible for ensuring.</a:t>
+            </a:r>
+            <a:endParaRPr lang="en-US" sz="1220" dirty="0"/>
           </a:p>
         </p:txBody>
       </p:sp>
@@ -15685,17 +15954,17 @@
         </p:nvSpPr>
         <p:spPr>
           <a:xfrm>
-            <a:off x="7799832" y="5001768"/>
-            <a:ext cx="3145536" cy="502920"/>
-          </a:xfrm>
-          <a:prstGeom prst="rect">
-            <a:avLst/>
-          </a:prstGeom>
-          <a:noFill/>
-          <a:ln/>
-        </p:spPr>
-        <p:txBody>
-          <a:bodyPr wrap="square" lIns="0" tIns="0" rIns="0" bIns="0" rtlCol="0" anchor="t">
+            <a:off x="7799832" y="4974336"/>
+            <a:ext cx="3145536" cy="576072"/>
+          </a:xfrm>
+          <a:prstGeom prst="rect">
+            <a:avLst/>
+          </a:prstGeom>
+          <a:noFill/>
+          <a:ln/>
+        </p:spPr>
+        <p:txBody>
+          <a:bodyPr wrap="square" lIns="254" tIns="254" rIns="254" bIns="254" rtlCol="0" anchor="t">
             <a:normAutofit/>
           </a:bodyPr>
           <a:lstStyle/>
@@ -15704,7 +15973,7 @@
               <a:buNone/>
             </a:pPr>
             <a:r>
-              <a:rPr lang="en-US" sz="1550" dirty="0">
+              <a:rPr lang="en-US" sz="1320" dirty="0">
                 <a:solidFill>
                   <a:srgbClr val="17364A"/>
                 </a:solidFill>
@@ -15712,9 +15981,9 @@
                 <a:ea typeface="Aptos" pitchFamily="34" charset="-122"/>
                 <a:cs typeface="Aptos" pitchFamily="34" charset="-120"/>
               </a:rPr>
-              <a:t>Translate this concept into clear decision rights, review steps, documentation expectations, and escalation paths before an AI-supported workflow is approved.</a:t>
-            </a:r>
-            <a:endParaRPr lang="en-US" sz="1550" dirty="0"/>
+              <a:t>Translate this concept into clear decision rights, review steps, documentation expectations, and escalation paths before.</a:t>
+            </a:r>
+            <a:endParaRPr lang="en-US" sz="1320" dirty="0"/>
           </a:p>
         </p:txBody>
       </p:sp>
@@ -16015,49 +16284,58 @@
           <a:ln/>
         </p:spPr>
         <p:txBody>
-          <a:bodyPr wrap="square" lIns="635" tIns="635" rIns="635" bIns="635" rtlCol="0" anchor="t">
+          <a:bodyPr wrap="square" lIns="1016" tIns="1016" rIns="1016" bIns="1016" rtlCol="0" anchor="t">
             <a:normAutofit/>
           </a:bodyPr>
           <a:lstStyle/>
           <a:p>
+            <a:pPr indent="0" marL="0">
+              <a:buNone/>
+            </a:pPr>
             <a:r>
               <a:rPr lang="en-US" sz="2100" dirty="0">
                 <a:solidFill>
-                  <a:srgbClr val="17364A"/>
-                </a:solidFill>
-                <a:latin typeface="Aptos" pitchFamily="34" charset="0"/>
-                <a:ea typeface="Aptos" pitchFamily="34" charset="-122"/>
-                <a:cs typeface="Aptos" pitchFamily="34" charset="-120"/>
-              </a:rPr>
-              <a:t>This module provides national-level training guidance for public health agencies and partners.</a:t>
+                  <a:srgbClr val="003A63"/>
+                </a:solidFill>
+                <a:latin typeface="Aptos" pitchFamily="34" charset="0"/>
+                <a:ea typeface="Aptos" pitchFamily="34" charset="-122"/>
+                <a:cs typeface="Aptos" pitchFamily="34" charset="-120"/>
+              </a:rPr>
+              <a:t>• This module provides national-level training guidance for public health agencies and partners.</a:t>
             </a:r>
             <a:endParaRPr lang="en-US" sz="2100" dirty="0"/>
           </a:p>
           <a:p>
+            <a:pPr indent="0" marL="0">
+              <a:buNone/>
+            </a:pPr>
             <a:r>
               <a:rPr lang="en-US" sz="2100" dirty="0">
                 <a:solidFill>
-                  <a:srgbClr val="17364A"/>
-                </a:solidFill>
-                <a:latin typeface="Aptos" pitchFamily="34" charset="0"/>
-                <a:ea typeface="Aptos" pitchFamily="34" charset="-122"/>
-                <a:cs typeface="Aptos" pitchFamily="34" charset="-120"/>
-              </a:rPr>
-              <a:t>It is not legal advice and does not replace review by agency legal counsel, privacy officers,.</a:t>
+                  <a:srgbClr val="003A63"/>
+                </a:solidFill>
+                <a:latin typeface="Aptos" pitchFamily="34" charset="0"/>
+                <a:ea typeface="Aptos" pitchFamily="34" charset="-122"/>
+                <a:cs typeface="Aptos" pitchFamily="34" charset="-120"/>
+              </a:rPr>
+              <a:t>• It is not legal advice and does not replace review by agency legal counsel, privacy officers,.</a:t>
             </a:r>
             <a:endParaRPr lang="en-US" sz="2100" dirty="0"/>
           </a:p>
           <a:p>
+            <a:pPr indent="0" marL="0">
+              <a:buNone/>
+            </a:pPr>
             <a:r>
               <a:rPr lang="en-US" sz="2100" dirty="0">
                 <a:solidFill>
-                  <a:srgbClr val="17364A"/>
-                </a:solidFill>
-                <a:latin typeface="Aptos" pitchFamily="34" charset="0"/>
-                <a:ea typeface="Aptos" pitchFamily="34" charset="-122"/>
-                <a:cs typeface="Aptos" pitchFamily="34" charset="-120"/>
-              </a:rPr>
-              <a:t>Requirements may vary by state, locality, territory, Tribe, agency, funding source, data-sharing.</a:t>
+                  <a:srgbClr val="003A63"/>
+                </a:solidFill>
+                <a:latin typeface="Aptos" pitchFamily="34" charset="0"/>
+                <a:ea typeface="Aptos" pitchFamily="34" charset="-122"/>
+                <a:cs typeface="Aptos" pitchFamily="34" charset="-120"/>
+              </a:rPr>
+              <a:t>• Requirements may vary by state, locality, territory, Tribe, agency, funding source,.</a:t>
             </a:r>
             <a:endParaRPr lang="en-US" sz="2100" dirty="0"/>
           </a:p>
@@ -16137,17 +16415,17 @@
         </p:nvSpPr>
         <p:spPr>
           <a:xfrm>
-            <a:off x="7799832" y="1828800"/>
-            <a:ext cx="3145536" cy="685800"/>
-          </a:xfrm>
-          <a:prstGeom prst="rect">
-            <a:avLst/>
-          </a:prstGeom>
-          <a:noFill/>
-          <a:ln/>
-        </p:spPr>
-        <p:txBody>
-          <a:bodyPr wrap="square" lIns="0" tIns="0" rIns="0" bIns="0" rtlCol="0" anchor="t">
+            <a:off x="7799832" y="1801368"/>
+            <a:ext cx="3145536" cy="758952"/>
+          </a:xfrm>
+          <a:prstGeom prst="rect">
+            <a:avLst/>
+          </a:prstGeom>
+          <a:noFill/>
+          <a:ln/>
+        </p:spPr>
+        <p:txBody>
+          <a:bodyPr wrap="square" lIns="254" tIns="254" rIns="254" bIns="254" rtlCol="0" anchor="t">
             <a:normAutofit/>
           </a:bodyPr>
           <a:lstStyle/>
@@ -16156,7 +16434,7 @@
               <a:buNone/>
             </a:pPr>
             <a:r>
-              <a:rPr lang="en-US" sz="1550" dirty="0">
+              <a:rPr lang="en-US" sz="1320" dirty="0">
                 <a:solidFill>
                   <a:srgbClr val="17364A"/>
                 </a:solidFill>
@@ -16166,7 +16444,7 @@
               </a:rPr>
               <a:t>This module provides national-level training guidance for public health agencies and partners.</a:t>
             </a:r>
-            <a:endParaRPr lang="en-US" sz="1550" dirty="0"/>
+            <a:endParaRPr lang="en-US" sz="1320" dirty="0"/>
           </a:p>
         </p:txBody>
       </p:sp>
@@ -16254,13 +16532,16 @@
           <a:ln/>
         </p:spPr>
         <p:txBody>
-          <a:bodyPr wrap="square" lIns="254" tIns="254" rIns="254" bIns="254" rtlCol="0" anchor="t">
+          <a:bodyPr wrap="square" lIns="508" tIns="508" rIns="508" bIns="508" rtlCol="0" anchor="t">
             <a:normAutofit/>
           </a:bodyPr>
           <a:lstStyle/>
           <a:p>
-            <a:r>
-              <a:rPr lang="en-US" sz="1380" dirty="0">
+            <a:pPr indent="0" marL="0">
+              <a:buNone/>
+            </a:pPr>
+            <a:r>
+              <a:rPr lang="en-US" sz="1220" dirty="0">
                 <a:solidFill>
                   <a:srgbClr val="17364A"/>
                 </a:solidFill>
@@ -16268,13 +16549,16 @@
                 <a:ea typeface="Aptos" pitchFamily="34" charset="-122"/>
                 <a:cs typeface="Aptos" pitchFamily="34" charset="-120"/>
               </a:rPr>
-              <a:t>It is not legal advice and does not replace review by agency legal counsel, privacy.</a:t>
-            </a:r>
-            <a:endParaRPr lang="en-US" sz="1380" dirty="0"/>
-          </a:p>
-          <a:p>
-            <a:r>
-              <a:rPr lang="en-US" sz="1380" dirty="0">
+              <a:t>It is not legal advice and does not replace review by agency legal.</a:t>
+            </a:r>
+            <a:endParaRPr lang="en-US" sz="1220" dirty="0"/>
+          </a:p>
+          <a:p>
+            <a:pPr indent="0" marL="0">
+              <a:buNone/>
+            </a:pPr>
+            <a:r>
+              <a:rPr lang="en-US" sz="1220" dirty="0">
                 <a:solidFill>
                   <a:srgbClr val="17364A"/>
                 </a:solidFill>
@@ -16282,13 +16566,16 @@
                 <a:ea typeface="Aptos" pitchFamily="34" charset="-122"/>
                 <a:cs typeface="Aptos" pitchFamily="34" charset="-120"/>
               </a:rPr>
-              <a:t>Requirements may vary by state, locality, territory, Tribe, agency, funding source,.</a:t>
-            </a:r>
-            <a:endParaRPr lang="en-US" sz="1380" dirty="0"/>
-          </a:p>
-          <a:p>
-            <a:r>
-              <a:rPr lang="en-US" sz="1380" dirty="0">
+              <a:t>Requirements may vary by state, locality, territory, Tribe,.</a:t>
+            </a:r>
+            <a:endParaRPr lang="en-US" sz="1220" dirty="0"/>
+          </a:p>
+          <a:p>
+            <a:pPr indent="0" marL="0">
+              <a:buNone/>
+            </a:pPr>
+            <a:r>
+              <a:rPr lang="en-US" sz="1220" dirty="0">
                 <a:solidFill>
                   <a:srgbClr val="17364A"/>
                 </a:solidFill>
@@ -16296,9 +16583,9 @@
                 <a:ea typeface="Aptos" pitchFamily="34" charset="-122"/>
                 <a:cs typeface="Aptos" pitchFamily="34" charset="-120"/>
               </a:rPr>
-              <a:t>Learners should use this module to identify the issues that require review and should.</a:t>
-            </a:r>
-            <a:endParaRPr lang="en-US" sz="1380" dirty="0"/>
+              <a:t>Learners should use this module to identify the issues that.</a:t>
+            </a:r>
+            <a:endParaRPr lang="en-US" sz="1220" dirty="0"/>
           </a:p>
         </p:txBody>
       </p:sp>
@@ -16376,17 +16663,17 @@
         </p:nvSpPr>
         <p:spPr>
           <a:xfrm>
-            <a:off x="7799832" y="5001768"/>
-            <a:ext cx="3145536" cy="502920"/>
-          </a:xfrm>
-          <a:prstGeom prst="rect">
-            <a:avLst/>
-          </a:prstGeom>
-          <a:noFill/>
-          <a:ln/>
-        </p:spPr>
-        <p:txBody>
-          <a:bodyPr wrap="square" lIns="0" tIns="0" rIns="0" bIns="0" rtlCol="0" anchor="t">
+            <a:off x="7799832" y="4974336"/>
+            <a:ext cx="3145536" cy="576072"/>
+          </a:xfrm>
+          <a:prstGeom prst="rect">
+            <a:avLst/>
+          </a:prstGeom>
+          <a:noFill/>
+          <a:ln/>
+        </p:spPr>
+        <p:txBody>
+          <a:bodyPr wrap="square" lIns="254" tIns="254" rIns="254" bIns="254" rtlCol="0" anchor="t">
             <a:normAutofit/>
           </a:bodyPr>
           <a:lstStyle/>
@@ -16395,7 +16682,7 @@
               <a:buNone/>
             </a:pPr>
             <a:r>
-              <a:rPr lang="en-US" sz="1550" dirty="0">
+              <a:rPr lang="en-US" sz="1320" dirty="0">
                 <a:solidFill>
                   <a:srgbClr val="17364A"/>
                 </a:solidFill>
@@ -16403,9 +16690,9 @@
                 <a:ea typeface="Aptos" pitchFamily="34" charset="-122"/>
                 <a:cs typeface="Aptos" pitchFamily="34" charset="-120"/>
               </a:rPr>
-              <a:t>Translate this concept into clear decision rights, review steps, documentation expectations, and escalation paths before an AI-supported workflow is approved.</a:t>
-            </a:r>
-            <a:endParaRPr lang="en-US" sz="1550" dirty="0"/>
+              <a:t>Translate this concept into clear decision rights, review steps, documentation expectations, and escalation paths before.</a:t>
+            </a:r>
+            <a:endParaRPr lang="en-US" sz="1320" dirty="0"/>
           </a:p>
         </p:txBody>
       </p:sp>
@@ -16706,49 +16993,58 @@
           <a:ln/>
         </p:spPr>
         <p:txBody>
-          <a:bodyPr wrap="square" lIns="635" tIns="635" rIns="635" bIns="635" rtlCol="0" anchor="t">
+          <a:bodyPr wrap="square" lIns="1016" tIns="1016" rIns="1016" bIns="1016" rtlCol="0" anchor="t">
             <a:normAutofit/>
           </a:bodyPr>
           <a:lstStyle/>
           <a:p>
+            <a:pPr indent="0" marL="0">
+              <a:buNone/>
+            </a:pPr>
             <a:r>
               <a:rPr lang="en-US" sz="2100" dirty="0">
                 <a:solidFill>
-                  <a:srgbClr val="17364A"/>
-                </a:solidFill>
-                <a:latin typeface="Aptos" pitchFamily="34" charset="0"/>
-                <a:ea typeface="Aptos" pitchFamily="34" charset="-122"/>
-                <a:cs typeface="Aptos" pitchFamily="34" charset="-120"/>
-              </a:rPr>
-              <a:t>AI Policy Development and Approval Workflow matters because AI adoption changes how public health.</a:t>
+                  <a:srgbClr val="003A63"/>
+                </a:solidFill>
+                <a:latin typeface="Aptos" pitchFamily="34" charset="0"/>
+                <a:ea typeface="Aptos" pitchFamily="34" charset="-122"/>
+                <a:cs typeface="Aptos" pitchFamily="34" charset="-120"/>
+              </a:rPr>
+              <a:t>• AI Policy Development and Approval Workflow matters because AI adoption changes how public.</a:t>
             </a:r>
             <a:endParaRPr lang="en-US" sz="2100" dirty="0"/>
           </a:p>
           <a:p>
+            <a:pPr indent="0" marL="0">
+              <a:buNone/>
+            </a:pPr>
             <a:r>
               <a:rPr lang="en-US" sz="2100" dirty="0">
                 <a:solidFill>
-                  <a:srgbClr val="17364A"/>
-                </a:solidFill>
-                <a:latin typeface="Aptos" pitchFamily="34" charset="0"/>
-                <a:ea typeface="Aptos" pitchFamily="34" charset="-122"/>
-                <a:cs typeface="Aptos" pitchFamily="34" charset="-120"/>
-              </a:rPr>
-              <a:t>Without a structured approach, staff may rely on informal practices, vendor assurances, or one-time.</a:t>
+                  <a:srgbClr val="003A63"/>
+                </a:solidFill>
+                <a:latin typeface="Aptos" pitchFamily="34" charset="0"/>
+                <a:ea typeface="Aptos" pitchFamily="34" charset="-122"/>
+                <a:cs typeface="Aptos" pitchFamily="34" charset="-120"/>
+              </a:rPr>
+              <a:t>• Without a structured approach, staff may rely on informal practices, vendor assurances, or.</a:t>
             </a:r>
             <a:endParaRPr lang="en-US" sz="2100" dirty="0"/>
           </a:p>
           <a:p>
+            <a:pPr indent="0" marL="0">
+              <a:buNone/>
+            </a:pPr>
             <a:r>
               <a:rPr lang="en-US" sz="2100" dirty="0">
                 <a:solidFill>
-                  <a:srgbClr val="17364A"/>
-                </a:solidFill>
-                <a:latin typeface="Aptos" pitchFamily="34" charset="0"/>
-                <a:ea typeface="Aptos" pitchFamily="34" charset="-122"/>
-                <a:cs typeface="Aptos" pitchFamily="34" charset="-120"/>
-              </a:rPr>
-              <a:t>Public health agencies operate under legal authorities, public accountability, resource constraints,.</a:t>
+                  <a:srgbClr val="003A63"/>
+                </a:solidFill>
+                <a:latin typeface="Aptos" pitchFamily="34" charset="0"/>
+                <a:ea typeface="Aptos" pitchFamily="34" charset="-122"/>
+                <a:cs typeface="Aptos" pitchFamily="34" charset="-120"/>
+              </a:rPr>
+              <a:t>• Public health agencies operate under legal authorities, public accountability, resource.</a:t>
             </a:r>
             <a:endParaRPr lang="en-US" sz="2100" dirty="0"/>
           </a:p>
@@ -16828,17 +17124,17 @@
         </p:nvSpPr>
         <p:spPr>
           <a:xfrm>
-            <a:off x="7799832" y="1828800"/>
-            <a:ext cx="3145536" cy="685800"/>
-          </a:xfrm>
-          <a:prstGeom prst="rect">
-            <a:avLst/>
-          </a:prstGeom>
-          <a:noFill/>
-          <a:ln/>
-        </p:spPr>
-        <p:txBody>
-          <a:bodyPr wrap="square" lIns="0" tIns="0" rIns="0" bIns="0" rtlCol="0" anchor="t">
+            <a:off x="7799832" y="1801368"/>
+            <a:ext cx="3145536" cy="758952"/>
+          </a:xfrm>
+          <a:prstGeom prst="rect">
+            <a:avLst/>
+          </a:prstGeom>
+          <a:noFill/>
+          <a:ln/>
+        </p:spPr>
+        <p:txBody>
+          <a:bodyPr wrap="square" lIns="254" tIns="254" rIns="254" bIns="254" rtlCol="0" anchor="t">
             <a:normAutofit/>
           </a:bodyPr>
           <a:lstStyle/>
@@ -16847,7 +17143,7 @@
               <a:buNone/>
             </a:pPr>
             <a:r>
-              <a:rPr lang="en-US" sz="1550" dirty="0">
+              <a:rPr lang="en-US" sz="1320" dirty="0">
                 <a:solidFill>
                   <a:srgbClr val="17364A"/>
                 </a:solidFill>
@@ -16857,7 +17153,7 @@
               </a:rPr>
               <a:t>AI Policy Development and Approval Workflow matters because AI adoption changes how public health.</a:t>
             </a:r>
-            <a:endParaRPr lang="en-US" sz="1550" dirty="0"/>
+            <a:endParaRPr lang="en-US" sz="1320" dirty="0"/>
           </a:p>
         </p:txBody>
       </p:sp>
@@ -16945,13 +17241,16 @@
           <a:ln/>
         </p:spPr>
         <p:txBody>
-          <a:bodyPr wrap="square" lIns="254" tIns="254" rIns="254" bIns="254" rtlCol="0" anchor="t">
+          <a:bodyPr wrap="square" lIns="508" tIns="508" rIns="508" bIns="508" rtlCol="0" anchor="t">
             <a:normAutofit/>
           </a:bodyPr>
           <a:lstStyle/>
           <a:p>
-            <a:r>
-              <a:rPr lang="en-US" sz="1380" dirty="0">
+            <a:pPr indent="0" marL="0">
+              <a:buNone/>
+            </a:pPr>
+            <a:r>
+              <a:rPr lang="en-US" sz="1220" dirty="0">
                 <a:solidFill>
                   <a:srgbClr val="17364A"/>
                 </a:solidFill>
@@ -16959,13 +17258,16 @@
                 <a:ea typeface="Aptos" pitchFamily="34" charset="-122"/>
                 <a:cs typeface="Aptos" pitchFamily="34" charset="-120"/>
               </a:rPr>
-              <a:t>AI Policy Development and Approval Workflow matters because AI adoption changes how public.</a:t>
-            </a:r>
-            <a:endParaRPr lang="en-US" sz="1380" dirty="0"/>
-          </a:p>
-          <a:p>
-            <a:r>
-              <a:rPr lang="en-US" sz="1380" dirty="0">
+              <a:t>AI Policy Development and Approval Workflow matters because AI.</a:t>
+            </a:r>
+            <a:endParaRPr lang="en-US" sz="1220" dirty="0"/>
+          </a:p>
+          <a:p>
+            <a:pPr indent="0" marL="0">
+              <a:buNone/>
+            </a:pPr>
+            <a:r>
+              <a:rPr lang="en-US" sz="1220" dirty="0">
                 <a:solidFill>
                   <a:srgbClr val="17364A"/>
                 </a:solidFill>
@@ -16973,13 +17275,16 @@
                 <a:ea typeface="Aptos" pitchFamily="34" charset="-122"/>
                 <a:cs typeface="Aptos" pitchFamily="34" charset="-120"/>
               </a:rPr>
-              <a:t>Without a structured approach, staff may rely on informal practices, vendor assurances, or.</a:t>
-            </a:r>
-            <a:endParaRPr lang="en-US" sz="1380" dirty="0"/>
-          </a:p>
-          <a:p>
-            <a:r>
-              <a:rPr lang="en-US" sz="1380" dirty="0">
+              <a:t>Without a structured approach, staff may rely on informal.</a:t>
+            </a:r>
+            <a:endParaRPr lang="en-US" sz="1220" dirty="0"/>
+          </a:p>
+          <a:p>
+            <a:pPr indent="0" marL="0">
+              <a:buNone/>
+            </a:pPr>
+            <a:r>
+              <a:rPr lang="en-US" sz="1220" dirty="0">
                 <a:solidFill>
                   <a:srgbClr val="17364A"/>
                 </a:solidFill>
@@ -16987,9 +17292,9 @@
                 <a:ea typeface="Aptos" pitchFamily="34" charset="-122"/>
                 <a:cs typeface="Aptos" pitchFamily="34" charset="-120"/>
               </a:rPr>
-              <a:t>Public health agencies operate under legal authorities, public accountability, resource.</a:t>
-            </a:r>
-            <a:endParaRPr lang="en-US" sz="1380" dirty="0"/>
+              <a:t>Public health agencies operate under legal authorities, public.</a:t>
+            </a:r>
+            <a:endParaRPr lang="en-US" sz="1220" dirty="0"/>
           </a:p>
         </p:txBody>
       </p:sp>
@@ -17067,17 +17372,17 @@
         </p:nvSpPr>
         <p:spPr>
           <a:xfrm>
-            <a:off x="7799832" y="5001768"/>
-            <a:ext cx="3145536" cy="502920"/>
-          </a:xfrm>
-          <a:prstGeom prst="rect">
-            <a:avLst/>
-          </a:prstGeom>
-          <a:noFill/>
-          <a:ln/>
-        </p:spPr>
-        <p:txBody>
-          <a:bodyPr wrap="square" lIns="0" tIns="0" rIns="0" bIns="0" rtlCol="0" anchor="t">
+            <a:off x="7799832" y="4974336"/>
+            <a:ext cx="3145536" cy="576072"/>
+          </a:xfrm>
+          <a:prstGeom prst="rect">
+            <a:avLst/>
+          </a:prstGeom>
+          <a:noFill/>
+          <a:ln/>
+        </p:spPr>
+        <p:txBody>
+          <a:bodyPr wrap="square" lIns="254" tIns="254" rIns="254" bIns="254" rtlCol="0" anchor="t">
             <a:normAutofit/>
           </a:bodyPr>
           <a:lstStyle/>
@@ -17086,7 +17391,7 @@
               <a:buNone/>
             </a:pPr>
             <a:r>
-              <a:rPr lang="en-US" sz="1550" dirty="0">
+              <a:rPr lang="en-US" sz="1320" dirty="0">
                 <a:solidFill>
                   <a:srgbClr val="17364A"/>
                 </a:solidFill>
@@ -17094,9 +17399,9 @@
                 <a:ea typeface="Aptos" pitchFamily="34" charset="-122"/>
                 <a:cs typeface="Aptos" pitchFamily="34" charset="-120"/>
               </a:rPr>
-              <a:t>Translate this concept into clear decision rights, review steps, documentation expectations, and escalation paths before an AI-supported workflow is approved.</a:t>
-            </a:r>
-            <a:endParaRPr lang="en-US" sz="1550" dirty="0"/>
+              <a:t>Translate this concept into clear decision rights, review steps, documentation expectations, and escalation paths before.</a:t>
+            </a:r>
+            <a:endParaRPr lang="en-US" sz="1320" dirty="0"/>
           </a:p>
         </p:txBody>
       </p:sp>

--- a/downloads/presentations/modules/pol-310.pptx
+++ b/downloads/presentations/modules/pol-310.pptx
@@ -3421,11 +3421,11 @@
         <p:spPr>
           <a:xfrm>
             <a:off x="7635240" y="1325880"/>
-            <a:ext cx="3474720" cy="1325880"/>
+            <a:ext cx="3474720" cy="1207008"/>
           </a:xfrm>
           <a:prstGeom prst="roundRect">
             <a:avLst>
-              <a:gd name="adj" fmla="val 8276"/>
+              <a:gd name="adj" fmla="val 9091"/>
             </a:avLst>
           </a:prstGeom>
           <a:solidFill>
@@ -3487,7 +3487,7 @@
         <p:spPr>
           <a:xfrm>
             <a:off x="7799832" y="1801368"/>
-            <a:ext cx="3145536" cy="758952"/>
+            <a:ext cx="3145536" cy="640080"/>
           </a:xfrm>
           <a:prstGeom prst="rect">
             <a:avLst/>
@@ -3513,7 +3513,7 @@
                 <a:ea typeface="Aptos" pitchFamily="34" charset="-122"/>
                 <a:cs typeface="Aptos" pitchFamily="34" charset="-120"/>
               </a:rPr>
-              <a:t>A public health agency is preparing to use AI in a workflow related to creating, approving,.</a:t>
+              <a:t>A public health agency is preparing to use AI in a workflow related to creating,.</a:t>
             </a:r>
             <a:endParaRPr lang="en-US" sz="1320" dirty="0"/>
           </a:p>
@@ -3527,12 +3527,12 @@
         </p:nvSpPr>
         <p:spPr>
           <a:xfrm>
-            <a:off x="7635240" y="2788920"/>
-            <a:ext cx="3474720" cy="1536192"/>
+            <a:off x="7635240" y="2670048"/>
+            <a:ext cx="3474720" cy="1377086"/>
           </a:xfrm>
           <a:prstGeom prst="roundRect">
             <a:avLst>
-              <a:gd name="adj" fmla="val 7143"/>
+              <a:gd name="adj" fmla="val 7968"/>
             </a:avLst>
           </a:prstGeom>
           <a:solidFill>
@@ -3554,7 +3554,7 @@
         </p:nvSpPr>
         <p:spPr>
           <a:xfrm>
-            <a:off x="7799832" y="2935224"/>
+            <a:off x="7799832" y="2816352"/>
             <a:ext cx="3145536" cy="256032"/>
           </a:xfrm>
           <a:prstGeom prst="rect">
@@ -3593,8 +3593,8 @@
         </p:nvSpPr>
         <p:spPr>
           <a:xfrm>
-            <a:off x="7818120" y="3300984"/>
-            <a:ext cx="3090672" cy="877824"/>
+            <a:off x="7818120" y="3182112"/>
+            <a:ext cx="3090672" cy="718718"/>
           </a:xfrm>
           <a:prstGeom prst="rect">
             <a:avLst/>
@@ -3668,12 +3668,12 @@
         </p:nvSpPr>
         <p:spPr>
           <a:xfrm>
-            <a:off x="7635240" y="4498848"/>
-            <a:ext cx="3474720" cy="1143000"/>
+            <a:off x="7635240" y="4184294"/>
+            <a:ext cx="3474720" cy="1466698"/>
           </a:xfrm>
           <a:prstGeom prst="roundRect">
             <a:avLst>
-              <a:gd name="adj" fmla="val 9600"/>
+              <a:gd name="adj" fmla="val 7481"/>
             </a:avLst>
           </a:prstGeom>
           <a:solidFill>
@@ -3695,7 +3695,7 @@
         </p:nvSpPr>
         <p:spPr>
           <a:xfrm>
-            <a:off x="7799832" y="4645152"/>
+            <a:off x="7799832" y="4330598"/>
             <a:ext cx="3145536" cy="256032"/>
           </a:xfrm>
           <a:prstGeom prst="rect">
@@ -3734,8 +3734,8 @@
         </p:nvSpPr>
         <p:spPr>
           <a:xfrm>
-            <a:off x="7799832" y="4974336"/>
-            <a:ext cx="3145536" cy="576072"/>
+            <a:off x="7799832" y="4659782"/>
+            <a:ext cx="3145536" cy="899770"/>
           </a:xfrm>
           <a:prstGeom prst="rect">
             <a:avLst/>
@@ -3761,7 +3761,7 @@
                 <a:ea typeface="Aptos" pitchFamily="34" charset="-122"/>
                 <a:cs typeface="Aptos" pitchFamily="34" charset="-120"/>
               </a:rPr>
-              <a:t>Translate this concept into clear decision rights, review steps, documentation expectations, and escalation paths before.</a:t>
+              <a:t>Translate this concept into clear decision rights, review steps, documentation expectations, and escalation paths before an AI-supported workflow is approved.</a:t>
             </a:r>
             <a:endParaRPr lang="en-US" sz="1320" dirty="0"/>
           </a:p>
@@ -4130,11 +4130,11 @@
         <p:spPr>
           <a:xfrm>
             <a:off x="7635240" y="1325880"/>
-            <a:ext cx="3474720" cy="1325880"/>
+            <a:ext cx="3474720" cy="1207008"/>
           </a:xfrm>
           <a:prstGeom prst="roundRect">
             <a:avLst>
-              <a:gd name="adj" fmla="val 8276"/>
+              <a:gd name="adj" fmla="val 9091"/>
             </a:avLst>
           </a:prstGeom>
           <a:solidFill>
@@ -4196,7 +4196,7 @@
         <p:spPr>
           <a:xfrm>
             <a:off x="7799832" y="1801368"/>
-            <a:ext cx="3145536" cy="758952"/>
+            <a:ext cx="3145536" cy="640080"/>
           </a:xfrm>
           <a:prstGeom prst="rect">
             <a:avLst/>
@@ -4236,12 +4236,12 @@
         </p:nvSpPr>
         <p:spPr>
           <a:xfrm>
-            <a:off x="7635240" y="2788920"/>
-            <a:ext cx="3474720" cy="1536192"/>
+            <a:off x="7635240" y="2670048"/>
+            <a:ext cx="3474720" cy="1377086"/>
           </a:xfrm>
           <a:prstGeom prst="roundRect">
             <a:avLst>
-              <a:gd name="adj" fmla="val 7143"/>
+              <a:gd name="adj" fmla="val 7968"/>
             </a:avLst>
           </a:prstGeom>
           <a:solidFill>
@@ -4263,7 +4263,7 @@
         </p:nvSpPr>
         <p:spPr>
           <a:xfrm>
-            <a:off x="7799832" y="2935224"/>
+            <a:off x="7799832" y="2816352"/>
             <a:ext cx="3145536" cy="256032"/>
           </a:xfrm>
           <a:prstGeom prst="rect">
@@ -4302,8 +4302,8 @@
         </p:nvSpPr>
         <p:spPr>
           <a:xfrm>
-            <a:off x="7818120" y="3300984"/>
-            <a:ext cx="3090672" cy="877824"/>
+            <a:off x="7818120" y="3182112"/>
+            <a:ext cx="3090672" cy="718718"/>
           </a:xfrm>
           <a:prstGeom prst="rect">
             <a:avLst/>
@@ -4377,12 +4377,12 @@
         </p:nvSpPr>
         <p:spPr>
           <a:xfrm>
-            <a:off x="7635240" y="4498848"/>
-            <a:ext cx="3474720" cy="1143000"/>
+            <a:off x="7635240" y="4184294"/>
+            <a:ext cx="3474720" cy="1466698"/>
           </a:xfrm>
           <a:prstGeom prst="roundRect">
             <a:avLst>
-              <a:gd name="adj" fmla="val 9600"/>
+              <a:gd name="adj" fmla="val 7481"/>
             </a:avLst>
           </a:prstGeom>
           <a:solidFill>
@@ -4404,7 +4404,7 @@
         </p:nvSpPr>
         <p:spPr>
           <a:xfrm>
-            <a:off x="7799832" y="4645152"/>
+            <a:off x="7799832" y="4330598"/>
             <a:ext cx="3145536" cy="256032"/>
           </a:xfrm>
           <a:prstGeom prst="rect">
@@ -4443,8 +4443,8 @@
         </p:nvSpPr>
         <p:spPr>
           <a:xfrm>
-            <a:off x="7799832" y="4974336"/>
-            <a:ext cx="3145536" cy="576072"/>
+            <a:off x="7799832" y="4659782"/>
+            <a:ext cx="3145536" cy="899770"/>
           </a:xfrm>
           <a:prstGeom prst="rect">
             <a:avLst/>
@@ -4470,7 +4470,7 @@
                 <a:ea typeface="Aptos" pitchFamily="34" charset="-122"/>
                 <a:cs typeface="Aptos" pitchFamily="34" charset="-120"/>
               </a:rPr>
-              <a:t>Translate this concept into clear decision rights, review steps, documentation expectations, and escalation paths before.</a:t>
+              <a:t>Translate this concept into clear decision rights, review steps, documentation expectations, and escalation paths before an AI-supported workflow is approved.</a:t>
             </a:r>
             <a:endParaRPr lang="en-US" sz="1320" dirty="0"/>
           </a:p>
@@ -4839,11 +4839,11 @@
         <p:spPr>
           <a:xfrm>
             <a:off x="7635240" y="1325880"/>
-            <a:ext cx="3474720" cy="1325880"/>
+            <a:ext cx="3474720" cy="1207008"/>
           </a:xfrm>
           <a:prstGeom prst="roundRect">
             <a:avLst>
-              <a:gd name="adj" fmla="val 8276"/>
+              <a:gd name="adj" fmla="val 9091"/>
             </a:avLst>
           </a:prstGeom>
           <a:solidFill>
@@ -4905,7 +4905,7 @@
         <p:spPr>
           <a:xfrm>
             <a:off x="7799832" y="1801368"/>
-            <a:ext cx="3145536" cy="758952"/>
+            <a:ext cx="3145536" cy="640080"/>
           </a:xfrm>
           <a:prstGeom prst="rect">
             <a:avLst/>
@@ -4945,12 +4945,12 @@
         </p:nvSpPr>
         <p:spPr>
           <a:xfrm>
-            <a:off x="7635240" y="2788920"/>
-            <a:ext cx="3474720" cy="1536192"/>
+            <a:off x="7635240" y="2670048"/>
+            <a:ext cx="3474720" cy="1377086"/>
           </a:xfrm>
           <a:prstGeom prst="roundRect">
             <a:avLst>
-              <a:gd name="adj" fmla="val 7143"/>
+              <a:gd name="adj" fmla="val 7968"/>
             </a:avLst>
           </a:prstGeom>
           <a:solidFill>
@@ -4972,7 +4972,7 @@
         </p:nvSpPr>
         <p:spPr>
           <a:xfrm>
-            <a:off x="7799832" y="2935224"/>
+            <a:off x="7799832" y="2816352"/>
             <a:ext cx="3145536" cy="256032"/>
           </a:xfrm>
           <a:prstGeom prst="rect">
@@ -5011,8 +5011,8 @@
         </p:nvSpPr>
         <p:spPr>
           <a:xfrm>
-            <a:off x="7818120" y="3300984"/>
-            <a:ext cx="3090672" cy="877824"/>
+            <a:off x="7818120" y="3182112"/>
+            <a:ext cx="3090672" cy="718718"/>
           </a:xfrm>
           <a:prstGeom prst="rect">
             <a:avLst/>
@@ -5086,12 +5086,12 @@
         </p:nvSpPr>
         <p:spPr>
           <a:xfrm>
-            <a:off x="7635240" y="4498848"/>
-            <a:ext cx="3474720" cy="1143000"/>
+            <a:off x="7635240" y="4184294"/>
+            <a:ext cx="3474720" cy="1466698"/>
           </a:xfrm>
           <a:prstGeom prst="roundRect">
             <a:avLst>
-              <a:gd name="adj" fmla="val 9600"/>
+              <a:gd name="adj" fmla="val 7481"/>
             </a:avLst>
           </a:prstGeom>
           <a:solidFill>
@@ -5113,7 +5113,7 @@
         </p:nvSpPr>
         <p:spPr>
           <a:xfrm>
-            <a:off x="7799832" y="4645152"/>
+            <a:off x="7799832" y="4330598"/>
             <a:ext cx="3145536" cy="256032"/>
           </a:xfrm>
           <a:prstGeom prst="rect">
@@ -5152,8 +5152,8 @@
         </p:nvSpPr>
         <p:spPr>
           <a:xfrm>
-            <a:off x="7799832" y="4974336"/>
-            <a:ext cx="3145536" cy="576072"/>
+            <a:off x="7799832" y="4659782"/>
+            <a:ext cx="3145536" cy="899770"/>
           </a:xfrm>
           <a:prstGeom prst="rect">
             <a:avLst/>
@@ -5179,7 +5179,7 @@
                 <a:ea typeface="Aptos" pitchFamily="34" charset="-122"/>
                 <a:cs typeface="Aptos" pitchFamily="34" charset="-120"/>
               </a:rPr>
-              <a:t>Translate this concept into clear decision rights, review steps, documentation expectations, and escalation paths before.</a:t>
+              <a:t>Translate this concept into clear decision rights, review steps, documentation expectations, and escalation paths before an AI-supported workflow is approved.</a:t>
             </a:r>
             <a:endParaRPr lang="en-US" sz="1320" dirty="0"/>
           </a:p>
@@ -5531,11 +5531,11 @@
         <p:spPr>
           <a:xfrm>
             <a:off x="7635240" y="1325880"/>
-            <a:ext cx="3474720" cy="1325880"/>
+            <a:ext cx="3474720" cy="1255471"/>
           </a:xfrm>
           <a:prstGeom prst="roundRect">
             <a:avLst>
-              <a:gd name="adj" fmla="val 8276"/>
+              <a:gd name="adj" fmla="val 8740"/>
             </a:avLst>
           </a:prstGeom>
           <a:solidFill>
@@ -5597,7 +5597,7 @@
         <p:spPr>
           <a:xfrm>
             <a:off x="7799832" y="1801368"/>
-            <a:ext cx="3145536" cy="758952"/>
+            <a:ext cx="3145536" cy="688543"/>
           </a:xfrm>
           <a:prstGeom prst="rect">
             <a:avLst/>
@@ -5637,12 +5637,12 @@
         </p:nvSpPr>
         <p:spPr>
           <a:xfrm>
-            <a:off x="7635240" y="2788920"/>
-            <a:ext cx="3474720" cy="1536192"/>
+            <a:off x="7635240" y="2718511"/>
+            <a:ext cx="3474720" cy="1328623"/>
           </a:xfrm>
           <a:prstGeom prst="roundRect">
             <a:avLst>
-              <a:gd name="adj" fmla="val 7143"/>
+              <a:gd name="adj" fmla="val 8259"/>
             </a:avLst>
           </a:prstGeom>
           <a:solidFill>
@@ -5664,7 +5664,7 @@
         </p:nvSpPr>
         <p:spPr>
           <a:xfrm>
-            <a:off x="7799832" y="2935224"/>
+            <a:off x="7799832" y="2864815"/>
             <a:ext cx="3145536" cy="256032"/>
           </a:xfrm>
           <a:prstGeom prst="rect">
@@ -5703,8 +5703,8 @@
         </p:nvSpPr>
         <p:spPr>
           <a:xfrm>
-            <a:off x="7818120" y="3300984"/>
-            <a:ext cx="3090672" cy="877824"/>
+            <a:off x="7818120" y="3230575"/>
+            <a:ext cx="3090672" cy="670255"/>
           </a:xfrm>
           <a:prstGeom prst="rect">
             <a:avLst/>
@@ -5761,12 +5761,12 @@
         </p:nvSpPr>
         <p:spPr>
           <a:xfrm>
-            <a:off x="7635240" y="4498848"/>
-            <a:ext cx="3474720" cy="1143000"/>
+            <a:off x="7635240" y="4184294"/>
+            <a:ext cx="3474720" cy="1466698"/>
           </a:xfrm>
           <a:prstGeom prst="roundRect">
             <a:avLst>
-              <a:gd name="adj" fmla="val 9600"/>
+              <a:gd name="adj" fmla="val 7481"/>
             </a:avLst>
           </a:prstGeom>
           <a:solidFill>
@@ -5788,7 +5788,7 @@
         </p:nvSpPr>
         <p:spPr>
           <a:xfrm>
-            <a:off x="7799832" y="4645152"/>
+            <a:off x="7799832" y="4330598"/>
             <a:ext cx="3145536" cy="256032"/>
           </a:xfrm>
           <a:prstGeom prst="rect">
@@ -5827,8 +5827,8 @@
         </p:nvSpPr>
         <p:spPr>
           <a:xfrm>
-            <a:off x="7799832" y="4974336"/>
-            <a:ext cx="3145536" cy="576072"/>
+            <a:off x="7799832" y="4659782"/>
+            <a:ext cx="3145536" cy="899770"/>
           </a:xfrm>
           <a:prstGeom prst="rect">
             <a:avLst/>
@@ -5854,7 +5854,7 @@
                 <a:ea typeface="Aptos" pitchFamily="34" charset="-122"/>
                 <a:cs typeface="Aptos" pitchFamily="34" charset="-120"/>
               </a:rPr>
-              <a:t>Translate this concept into clear decision rights, review steps, documentation expectations, and escalation paths before.</a:t>
+              <a:t>Translate this concept into clear decision rights, review steps, documentation expectations, and escalation paths before an AI-supported workflow is approved.</a:t>
             </a:r>
             <a:endParaRPr lang="en-US" sz="1320" dirty="0"/>
           </a:p>
@@ -6223,11 +6223,11 @@
         <p:spPr>
           <a:xfrm>
             <a:off x="7635240" y="1325880"/>
-            <a:ext cx="3474720" cy="1325880"/>
+            <a:ext cx="3474720" cy="1207008"/>
           </a:xfrm>
           <a:prstGeom prst="roundRect">
             <a:avLst>
-              <a:gd name="adj" fmla="val 8276"/>
+              <a:gd name="adj" fmla="val 9091"/>
             </a:avLst>
           </a:prstGeom>
           <a:solidFill>
@@ -6289,7 +6289,7 @@
         <p:spPr>
           <a:xfrm>
             <a:off x="7799832" y="1801368"/>
-            <a:ext cx="3145536" cy="758952"/>
+            <a:ext cx="3145536" cy="640080"/>
           </a:xfrm>
           <a:prstGeom prst="rect">
             <a:avLst/>
@@ -6329,12 +6329,12 @@
         </p:nvSpPr>
         <p:spPr>
           <a:xfrm>
-            <a:off x="7635240" y="2788920"/>
-            <a:ext cx="3474720" cy="1536192"/>
+            <a:off x="7635240" y="2670048"/>
+            <a:ext cx="3474720" cy="1377086"/>
           </a:xfrm>
           <a:prstGeom prst="roundRect">
             <a:avLst>
-              <a:gd name="adj" fmla="val 7143"/>
+              <a:gd name="adj" fmla="val 7968"/>
             </a:avLst>
           </a:prstGeom>
           <a:solidFill>
@@ -6356,7 +6356,7 @@
         </p:nvSpPr>
         <p:spPr>
           <a:xfrm>
-            <a:off x="7799832" y="2935224"/>
+            <a:off x="7799832" y="2816352"/>
             <a:ext cx="3145536" cy="256032"/>
           </a:xfrm>
           <a:prstGeom prst="rect">
@@ -6395,8 +6395,8 @@
         </p:nvSpPr>
         <p:spPr>
           <a:xfrm>
-            <a:off x="7818120" y="3300984"/>
-            <a:ext cx="3090672" cy="877824"/>
+            <a:off x="7818120" y="3182112"/>
+            <a:ext cx="3090672" cy="718718"/>
           </a:xfrm>
           <a:prstGeom prst="rect">
             <a:avLst/>
@@ -6470,12 +6470,12 @@
         </p:nvSpPr>
         <p:spPr>
           <a:xfrm>
-            <a:off x="7635240" y="4498848"/>
-            <a:ext cx="3474720" cy="1143000"/>
+            <a:off x="7635240" y="4184294"/>
+            <a:ext cx="3474720" cy="1466698"/>
           </a:xfrm>
           <a:prstGeom prst="roundRect">
             <a:avLst>
-              <a:gd name="adj" fmla="val 9600"/>
+              <a:gd name="adj" fmla="val 7481"/>
             </a:avLst>
           </a:prstGeom>
           <a:solidFill>
@@ -6497,7 +6497,7 @@
         </p:nvSpPr>
         <p:spPr>
           <a:xfrm>
-            <a:off x="7799832" y="4645152"/>
+            <a:off x="7799832" y="4330598"/>
             <a:ext cx="3145536" cy="256032"/>
           </a:xfrm>
           <a:prstGeom prst="rect">
@@ -6536,8 +6536,8 @@
         </p:nvSpPr>
         <p:spPr>
           <a:xfrm>
-            <a:off x="7799832" y="4974336"/>
-            <a:ext cx="3145536" cy="576072"/>
+            <a:off x="7799832" y="4659782"/>
+            <a:ext cx="3145536" cy="899770"/>
           </a:xfrm>
           <a:prstGeom prst="rect">
             <a:avLst/>
@@ -6563,7 +6563,7 @@
                 <a:ea typeface="Aptos" pitchFamily="34" charset="-122"/>
                 <a:cs typeface="Aptos" pitchFamily="34" charset="-120"/>
               </a:rPr>
-              <a:t>Translate this concept into clear decision rights, review steps, documentation expectations, and escalation paths before.</a:t>
+              <a:t>Translate this concept into clear decision rights, review steps, documentation expectations, and escalation paths before an AI-supported workflow is approved.</a:t>
             </a:r>
             <a:endParaRPr lang="en-US" sz="1320" dirty="0"/>
           </a:p>
@@ -6915,11 +6915,11 @@
         <p:spPr>
           <a:xfrm>
             <a:off x="7635240" y="1325880"/>
-            <a:ext cx="3474720" cy="1325880"/>
+            <a:ext cx="3474720" cy="1207008"/>
           </a:xfrm>
           <a:prstGeom prst="roundRect">
             <a:avLst>
-              <a:gd name="adj" fmla="val 8276"/>
+              <a:gd name="adj" fmla="val 9091"/>
             </a:avLst>
           </a:prstGeom>
           <a:solidFill>
@@ -6981,7 +6981,7 @@
         <p:spPr>
           <a:xfrm>
             <a:off x="7799832" y="1801368"/>
-            <a:ext cx="3145536" cy="758952"/>
+            <a:ext cx="3145536" cy="640080"/>
           </a:xfrm>
           <a:prstGeom prst="rect">
             <a:avLst/>
@@ -7021,12 +7021,12 @@
         </p:nvSpPr>
         <p:spPr>
           <a:xfrm>
-            <a:off x="7635240" y="2788920"/>
-            <a:ext cx="3474720" cy="1536192"/>
+            <a:off x="7635240" y="2670048"/>
+            <a:ext cx="3474720" cy="1377086"/>
           </a:xfrm>
           <a:prstGeom prst="roundRect">
             <a:avLst>
-              <a:gd name="adj" fmla="val 7143"/>
+              <a:gd name="adj" fmla="val 7968"/>
             </a:avLst>
           </a:prstGeom>
           <a:solidFill>
@@ -7048,7 +7048,7 @@
         </p:nvSpPr>
         <p:spPr>
           <a:xfrm>
-            <a:off x="7799832" y="2935224"/>
+            <a:off x="7799832" y="2816352"/>
             <a:ext cx="3145536" cy="256032"/>
           </a:xfrm>
           <a:prstGeom prst="rect">
@@ -7087,8 +7087,8 @@
         </p:nvSpPr>
         <p:spPr>
           <a:xfrm>
-            <a:off x="7818120" y="3300984"/>
-            <a:ext cx="3090672" cy="877824"/>
+            <a:off x="7818120" y="3182112"/>
+            <a:ext cx="3090672" cy="718718"/>
           </a:xfrm>
           <a:prstGeom prst="rect">
             <a:avLst/>
@@ -7145,12 +7145,12 @@
         </p:nvSpPr>
         <p:spPr>
           <a:xfrm>
-            <a:off x="7635240" y="4498848"/>
-            <a:ext cx="3474720" cy="1143000"/>
+            <a:off x="7635240" y="4184294"/>
+            <a:ext cx="3474720" cy="1466698"/>
           </a:xfrm>
           <a:prstGeom prst="roundRect">
             <a:avLst>
-              <a:gd name="adj" fmla="val 9600"/>
+              <a:gd name="adj" fmla="val 7481"/>
             </a:avLst>
           </a:prstGeom>
           <a:solidFill>
@@ -7172,7 +7172,7 @@
         </p:nvSpPr>
         <p:spPr>
           <a:xfrm>
-            <a:off x="7799832" y="4645152"/>
+            <a:off x="7799832" y="4330598"/>
             <a:ext cx="3145536" cy="256032"/>
           </a:xfrm>
           <a:prstGeom prst="rect">
@@ -7211,8 +7211,8 @@
         </p:nvSpPr>
         <p:spPr>
           <a:xfrm>
-            <a:off x="7799832" y="4974336"/>
-            <a:ext cx="3145536" cy="576072"/>
+            <a:off x="7799832" y="4659782"/>
+            <a:ext cx="3145536" cy="899770"/>
           </a:xfrm>
           <a:prstGeom prst="rect">
             <a:avLst/>
@@ -7238,7 +7238,7 @@
                 <a:ea typeface="Aptos" pitchFamily="34" charset="-122"/>
                 <a:cs typeface="Aptos" pitchFamily="34" charset="-120"/>
               </a:rPr>
-              <a:t>Translate this concept into clear decision rights, review steps, documentation expectations, and escalation paths before.</a:t>
+              <a:t>Translate this concept into clear decision rights, review steps, documentation expectations, and escalation paths before an AI-supported workflow is approved.</a:t>
             </a:r>
             <a:endParaRPr lang="en-US" sz="1320" dirty="0"/>
           </a:p>
@@ -7590,11 +7590,11 @@
         <p:spPr>
           <a:xfrm>
             <a:off x="7635240" y="1325880"/>
-            <a:ext cx="3474720" cy="1325880"/>
+            <a:ext cx="3474720" cy="1255471"/>
           </a:xfrm>
           <a:prstGeom prst="roundRect">
             <a:avLst>
-              <a:gd name="adj" fmla="val 8276"/>
+              <a:gd name="adj" fmla="val 8740"/>
             </a:avLst>
           </a:prstGeom>
           <a:solidFill>
@@ -7656,7 +7656,7 @@
         <p:spPr>
           <a:xfrm>
             <a:off x="7799832" y="1801368"/>
-            <a:ext cx="3145536" cy="758952"/>
+            <a:ext cx="3145536" cy="688543"/>
           </a:xfrm>
           <a:prstGeom prst="rect">
             <a:avLst/>
@@ -7696,12 +7696,12 @@
         </p:nvSpPr>
         <p:spPr>
           <a:xfrm>
-            <a:off x="7635240" y="2788920"/>
-            <a:ext cx="3474720" cy="1536192"/>
+            <a:off x="7635240" y="2718511"/>
+            <a:ext cx="3474720" cy="1328623"/>
           </a:xfrm>
           <a:prstGeom prst="roundRect">
             <a:avLst>
-              <a:gd name="adj" fmla="val 7143"/>
+              <a:gd name="adj" fmla="val 8259"/>
             </a:avLst>
           </a:prstGeom>
           <a:solidFill>
@@ -7723,7 +7723,7 @@
         </p:nvSpPr>
         <p:spPr>
           <a:xfrm>
-            <a:off x="7799832" y="2935224"/>
+            <a:off x="7799832" y="2864815"/>
             <a:ext cx="3145536" cy="256032"/>
           </a:xfrm>
           <a:prstGeom prst="rect">
@@ -7762,8 +7762,8 @@
         </p:nvSpPr>
         <p:spPr>
           <a:xfrm>
-            <a:off x="7818120" y="3300984"/>
-            <a:ext cx="3090672" cy="877824"/>
+            <a:off x="7818120" y="3230575"/>
+            <a:ext cx="3090672" cy="670255"/>
           </a:xfrm>
           <a:prstGeom prst="rect">
             <a:avLst/>
@@ -7820,12 +7820,12 @@
         </p:nvSpPr>
         <p:spPr>
           <a:xfrm>
-            <a:off x="7635240" y="4498848"/>
-            <a:ext cx="3474720" cy="1143000"/>
+            <a:off x="7635240" y="4184294"/>
+            <a:ext cx="3474720" cy="1466698"/>
           </a:xfrm>
           <a:prstGeom prst="roundRect">
             <a:avLst>
-              <a:gd name="adj" fmla="val 9600"/>
+              <a:gd name="adj" fmla="val 7481"/>
             </a:avLst>
           </a:prstGeom>
           <a:solidFill>
@@ -7847,7 +7847,7 @@
         </p:nvSpPr>
         <p:spPr>
           <a:xfrm>
-            <a:off x="7799832" y="4645152"/>
+            <a:off x="7799832" y="4330598"/>
             <a:ext cx="3145536" cy="256032"/>
           </a:xfrm>
           <a:prstGeom prst="rect">
@@ -7886,8 +7886,8 @@
         </p:nvSpPr>
         <p:spPr>
           <a:xfrm>
-            <a:off x="7799832" y="4974336"/>
-            <a:ext cx="3145536" cy="576072"/>
+            <a:off x="7799832" y="4659782"/>
+            <a:ext cx="3145536" cy="899770"/>
           </a:xfrm>
           <a:prstGeom prst="rect">
             <a:avLst/>
@@ -7913,7 +7913,7 @@
                 <a:ea typeface="Aptos" pitchFamily="34" charset="-122"/>
                 <a:cs typeface="Aptos" pitchFamily="34" charset="-120"/>
               </a:rPr>
-              <a:t>Use the assignment to test whether you can explain the concept, apply it to a realistic public health situation, and.</a:t>
+              <a:t>Use the assignment to test whether you can explain the concept, apply it to a realistic public health situation, and identify what would need review before the work moves forward.</a:t>
             </a:r>
             <a:endParaRPr lang="en-US" sz="1320" dirty="0"/>
           </a:p>
@@ -8282,11 +8282,11 @@
         <p:spPr>
           <a:xfrm>
             <a:off x="7635240" y="1325880"/>
-            <a:ext cx="3474720" cy="1325880"/>
+            <a:ext cx="3474720" cy="1207008"/>
           </a:xfrm>
           <a:prstGeom prst="roundRect">
             <a:avLst>
-              <a:gd name="adj" fmla="val 8276"/>
+              <a:gd name="adj" fmla="val 9091"/>
             </a:avLst>
           </a:prstGeom>
           <a:solidFill>
@@ -8348,7 +8348,7 @@
         <p:spPr>
           <a:xfrm>
             <a:off x="7799832" y="1801368"/>
-            <a:ext cx="3145536" cy="758952"/>
+            <a:ext cx="3145536" cy="640080"/>
           </a:xfrm>
           <a:prstGeom prst="rect">
             <a:avLst/>
@@ -8388,12 +8388,12 @@
         </p:nvSpPr>
         <p:spPr>
           <a:xfrm>
-            <a:off x="7635240" y="2788920"/>
-            <a:ext cx="3474720" cy="1536192"/>
+            <a:off x="7635240" y="2670048"/>
+            <a:ext cx="3474720" cy="1377086"/>
           </a:xfrm>
           <a:prstGeom prst="roundRect">
             <a:avLst>
-              <a:gd name="adj" fmla="val 7143"/>
+              <a:gd name="adj" fmla="val 7968"/>
             </a:avLst>
           </a:prstGeom>
           <a:solidFill>
@@ -8415,7 +8415,7 @@
         </p:nvSpPr>
         <p:spPr>
           <a:xfrm>
-            <a:off x="7799832" y="2935224"/>
+            <a:off x="7799832" y="2816352"/>
             <a:ext cx="3145536" cy="256032"/>
           </a:xfrm>
           <a:prstGeom prst="rect">
@@ -8454,8 +8454,8 @@
         </p:nvSpPr>
         <p:spPr>
           <a:xfrm>
-            <a:off x="7818120" y="3300984"/>
-            <a:ext cx="3090672" cy="877824"/>
+            <a:off x="7818120" y="3182112"/>
+            <a:ext cx="3090672" cy="718718"/>
           </a:xfrm>
           <a:prstGeom prst="rect">
             <a:avLst/>
@@ -8529,12 +8529,12 @@
         </p:nvSpPr>
         <p:spPr>
           <a:xfrm>
-            <a:off x="7635240" y="4498848"/>
-            <a:ext cx="3474720" cy="1143000"/>
+            <a:off x="7635240" y="4184294"/>
+            <a:ext cx="3474720" cy="1466698"/>
           </a:xfrm>
           <a:prstGeom prst="roundRect">
             <a:avLst>
-              <a:gd name="adj" fmla="val 9600"/>
+              <a:gd name="adj" fmla="val 7481"/>
             </a:avLst>
           </a:prstGeom>
           <a:solidFill>
@@ -8556,7 +8556,7 @@
         </p:nvSpPr>
         <p:spPr>
           <a:xfrm>
-            <a:off x="7799832" y="4645152"/>
+            <a:off x="7799832" y="4330598"/>
             <a:ext cx="3145536" cy="256032"/>
           </a:xfrm>
           <a:prstGeom prst="rect">
@@ -8595,8 +8595,8 @@
         </p:nvSpPr>
         <p:spPr>
           <a:xfrm>
-            <a:off x="7799832" y="4974336"/>
-            <a:ext cx="3145536" cy="576072"/>
+            <a:off x="7799832" y="4659782"/>
+            <a:ext cx="3145536" cy="899770"/>
           </a:xfrm>
           <a:prstGeom prst="rect">
             <a:avLst/>
@@ -8622,7 +8622,7 @@
                 <a:ea typeface="Aptos" pitchFamily="34" charset="-122"/>
                 <a:cs typeface="Aptos" pitchFamily="34" charset="-120"/>
               </a:rPr>
-              <a:t>Translate this concept into clear decision rights, review steps, documentation expectations, and escalation paths before.</a:t>
+              <a:t>Translate this concept into clear decision rights, review steps, documentation expectations, and escalation paths before an AI-supported workflow is approved.</a:t>
             </a:r>
             <a:endParaRPr lang="en-US" sz="1320" dirty="0"/>
           </a:p>
@@ -8974,11 +8974,11 @@
         <p:spPr>
           <a:xfrm>
             <a:off x="7635240" y="1325880"/>
-            <a:ext cx="3474720" cy="1325880"/>
+            <a:ext cx="3474720" cy="1207008"/>
           </a:xfrm>
           <a:prstGeom prst="roundRect">
             <a:avLst>
-              <a:gd name="adj" fmla="val 8276"/>
+              <a:gd name="adj" fmla="val 9091"/>
             </a:avLst>
           </a:prstGeom>
           <a:solidFill>
@@ -9040,7 +9040,7 @@
         <p:spPr>
           <a:xfrm>
             <a:off x="7799832" y="1801368"/>
-            <a:ext cx="3145536" cy="758952"/>
+            <a:ext cx="3145536" cy="640080"/>
           </a:xfrm>
           <a:prstGeom prst="rect">
             <a:avLst/>
@@ -9080,12 +9080,12 @@
         </p:nvSpPr>
         <p:spPr>
           <a:xfrm>
-            <a:off x="7635240" y="2788920"/>
-            <a:ext cx="3474720" cy="1536192"/>
+            <a:off x="7635240" y="2670048"/>
+            <a:ext cx="3474720" cy="1377086"/>
           </a:xfrm>
           <a:prstGeom prst="roundRect">
             <a:avLst>
-              <a:gd name="adj" fmla="val 7143"/>
+              <a:gd name="adj" fmla="val 7968"/>
             </a:avLst>
           </a:prstGeom>
           <a:solidFill>
@@ -9107,7 +9107,7 @@
         </p:nvSpPr>
         <p:spPr>
           <a:xfrm>
-            <a:off x="7799832" y="2935224"/>
+            <a:off x="7799832" y="2816352"/>
             <a:ext cx="3145536" cy="256032"/>
           </a:xfrm>
           <a:prstGeom prst="rect">
@@ -9146,8 +9146,8 @@
         </p:nvSpPr>
         <p:spPr>
           <a:xfrm>
-            <a:off x="7818120" y="3300984"/>
-            <a:ext cx="3090672" cy="877824"/>
+            <a:off x="7818120" y="3182112"/>
+            <a:ext cx="3090672" cy="718718"/>
           </a:xfrm>
           <a:prstGeom prst="rect">
             <a:avLst/>
@@ -9204,12 +9204,12 @@
         </p:nvSpPr>
         <p:spPr>
           <a:xfrm>
-            <a:off x="7635240" y="4498848"/>
-            <a:ext cx="3474720" cy="1143000"/>
+            <a:off x="7635240" y="4184294"/>
+            <a:ext cx="3474720" cy="1466698"/>
           </a:xfrm>
           <a:prstGeom prst="roundRect">
             <a:avLst>
-              <a:gd name="adj" fmla="val 9600"/>
+              <a:gd name="adj" fmla="val 7481"/>
             </a:avLst>
           </a:prstGeom>
           <a:solidFill>
@@ -9231,7 +9231,7 @@
         </p:nvSpPr>
         <p:spPr>
           <a:xfrm>
-            <a:off x="7799832" y="4645152"/>
+            <a:off x="7799832" y="4330598"/>
             <a:ext cx="3145536" cy="256032"/>
           </a:xfrm>
           <a:prstGeom prst="rect">
@@ -9270,8 +9270,8 @@
         </p:nvSpPr>
         <p:spPr>
           <a:xfrm>
-            <a:off x="7799832" y="4974336"/>
-            <a:ext cx="3145536" cy="576072"/>
+            <a:off x="7799832" y="4659782"/>
+            <a:ext cx="3145536" cy="899770"/>
           </a:xfrm>
           <a:prstGeom prst="rect">
             <a:avLst/>
@@ -9297,7 +9297,7 @@
                 <a:ea typeface="Aptos" pitchFamily="34" charset="-122"/>
                 <a:cs typeface="Aptos" pitchFamily="34" charset="-120"/>
               </a:rPr>
-              <a:t>Translate this concept into clear decision rights, review steps, documentation expectations, and escalation paths before.</a:t>
+              <a:t>Translate this concept into clear decision rights, review steps, documentation expectations, and escalation paths before an AI-supported workflow is approved.</a:t>
             </a:r>
             <a:endParaRPr lang="en-US" sz="1320" dirty="0"/>
           </a:p>
@@ -9666,11 +9666,11 @@
         <p:spPr>
           <a:xfrm>
             <a:off x="7635240" y="1325880"/>
-            <a:ext cx="3474720" cy="1325880"/>
+            <a:ext cx="3474720" cy="1207008"/>
           </a:xfrm>
           <a:prstGeom prst="roundRect">
             <a:avLst>
-              <a:gd name="adj" fmla="val 8276"/>
+              <a:gd name="adj" fmla="val 9091"/>
             </a:avLst>
           </a:prstGeom>
           <a:solidFill>
@@ -9732,7 +9732,7 @@
         <p:spPr>
           <a:xfrm>
             <a:off x="7799832" y="1801368"/>
-            <a:ext cx="3145536" cy="758952"/>
+            <a:ext cx="3145536" cy="640080"/>
           </a:xfrm>
           <a:prstGeom prst="rect">
             <a:avLst/>
@@ -9772,12 +9772,12 @@
         </p:nvSpPr>
         <p:spPr>
           <a:xfrm>
-            <a:off x="7635240" y="2788920"/>
-            <a:ext cx="3474720" cy="1536192"/>
+            <a:off x="7635240" y="2670048"/>
+            <a:ext cx="3474720" cy="1377086"/>
           </a:xfrm>
           <a:prstGeom prst="roundRect">
             <a:avLst>
-              <a:gd name="adj" fmla="val 7143"/>
+              <a:gd name="adj" fmla="val 7968"/>
             </a:avLst>
           </a:prstGeom>
           <a:solidFill>
@@ -9799,7 +9799,7 @@
         </p:nvSpPr>
         <p:spPr>
           <a:xfrm>
-            <a:off x="7799832" y="2935224"/>
+            <a:off x="7799832" y="2816352"/>
             <a:ext cx="3145536" cy="256032"/>
           </a:xfrm>
           <a:prstGeom prst="rect">
@@ -9838,8 +9838,8 @@
         </p:nvSpPr>
         <p:spPr>
           <a:xfrm>
-            <a:off x="7818120" y="3300984"/>
-            <a:ext cx="3090672" cy="877824"/>
+            <a:off x="7818120" y="3182112"/>
+            <a:ext cx="3090672" cy="718718"/>
           </a:xfrm>
           <a:prstGeom prst="rect">
             <a:avLst/>
@@ -9896,12 +9896,12 @@
         </p:nvSpPr>
         <p:spPr>
           <a:xfrm>
-            <a:off x="7635240" y="4498848"/>
-            <a:ext cx="3474720" cy="1143000"/>
+            <a:off x="7635240" y="4184294"/>
+            <a:ext cx="3474720" cy="1466698"/>
           </a:xfrm>
           <a:prstGeom prst="roundRect">
             <a:avLst>
-              <a:gd name="adj" fmla="val 9600"/>
+              <a:gd name="adj" fmla="val 7481"/>
             </a:avLst>
           </a:prstGeom>
           <a:solidFill>
@@ -9923,7 +9923,7 @@
         </p:nvSpPr>
         <p:spPr>
           <a:xfrm>
-            <a:off x="7799832" y="4645152"/>
+            <a:off x="7799832" y="4330598"/>
             <a:ext cx="3145536" cy="256032"/>
           </a:xfrm>
           <a:prstGeom prst="rect">
@@ -9962,8 +9962,8 @@
         </p:nvSpPr>
         <p:spPr>
           <a:xfrm>
-            <a:off x="7799832" y="4974336"/>
-            <a:ext cx="3145536" cy="576072"/>
+            <a:off x="7799832" y="4659782"/>
+            <a:ext cx="3145536" cy="899770"/>
           </a:xfrm>
           <a:prstGeom prst="rect">
             <a:avLst/>
@@ -9989,7 +9989,7 @@
                 <a:ea typeface="Aptos" pitchFamily="34" charset="-122"/>
                 <a:cs typeface="Aptos" pitchFamily="34" charset="-120"/>
               </a:rPr>
-              <a:t>Use the assignment to test whether you can explain the concept, apply it to a realistic public health situation, and.</a:t>
+              <a:t>Use the assignment to test whether you can explain the concept, apply it to a realistic public health situation, and identify what would need review before the work moves forward.</a:t>
             </a:r>
             <a:endParaRPr lang="en-US" sz="1320" dirty="0"/>
           </a:p>
@@ -10450,7 +10450,7 @@
                 <a:ea typeface="Aptos" pitchFamily="34" charset="-122"/>
                 <a:cs typeface="Aptos" pitchFamily="34" charset="-120"/>
               </a:rPr>
-              <a:t>Level: intermediate/practitioner Primary track: Policy Role-Based Track Appears in tracks: governance-security, policy,.</a:t>
+              <a:t>Level: intermediate/practitioner Primary track: Policy Role-Based Track Appears in tracks: governance-security, policy, public-health-executive-leadership</a:t>
             </a:r>
             <a:endParaRPr lang="en-US" sz="1320" dirty="0"/>
           </a:p>
@@ -10960,11 +10960,11 @@
         <p:spPr>
           <a:xfrm>
             <a:off x="7635240" y="1325880"/>
-            <a:ext cx="3474720" cy="1325880"/>
+            <a:ext cx="3474720" cy="1255471"/>
           </a:xfrm>
           <a:prstGeom prst="roundRect">
             <a:avLst>
-              <a:gd name="adj" fmla="val 8276"/>
+              <a:gd name="adj" fmla="val 8740"/>
             </a:avLst>
           </a:prstGeom>
           <a:solidFill>
@@ -11026,7 +11026,7 @@
         <p:spPr>
           <a:xfrm>
             <a:off x="7799832" y="1801368"/>
-            <a:ext cx="3145536" cy="758952"/>
+            <a:ext cx="3145536" cy="688543"/>
           </a:xfrm>
           <a:prstGeom prst="rect">
             <a:avLst/>
@@ -11066,12 +11066,12 @@
         </p:nvSpPr>
         <p:spPr>
           <a:xfrm>
-            <a:off x="7635240" y="2788920"/>
-            <a:ext cx="3474720" cy="1536192"/>
+            <a:off x="7635240" y="2718511"/>
+            <a:ext cx="3474720" cy="1328623"/>
           </a:xfrm>
           <a:prstGeom prst="roundRect">
             <a:avLst>
-              <a:gd name="adj" fmla="val 7143"/>
+              <a:gd name="adj" fmla="val 8259"/>
             </a:avLst>
           </a:prstGeom>
           <a:solidFill>
@@ -11093,7 +11093,7 @@
         </p:nvSpPr>
         <p:spPr>
           <a:xfrm>
-            <a:off x="7799832" y="2935224"/>
+            <a:off x="7799832" y="2864815"/>
             <a:ext cx="3145536" cy="256032"/>
           </a:xfrm>
           <a:prstGeom prst="rect">
@@ -11132,8 +11132,8 @@
         </p:nvSpPr>
         <p:spPr>
           <a:xfrm>
-            <a:off x="7818120" y="3300984"/>
-            <a:ext cx="3090672" cy="877824"/>
+            <a:off x="7818120" y="3230575"/>
+            <a:ext cx="3090672" cy="670255"/>
           </a:xfrm>
           <a:prstGeom prst="rect">
             <a:avLst/>
@@ -11207,12 +11207,12 @@
         </p:nvSpPr>
         <p:spPr>
           <a:xfrm>
-            <a:off x="7635240" y="4498848"/>
-            <a:ext cx="3474720" cy="1143000"/>
+            <a:off x="7635240" y="4184294"/>
+            <a:ext cx="3474720" cy="1466698"/>
           </a:xfrm>
           <a:prstGeom prst="roundRect">
             <a:avLst>
-              <a:gd name="adj" fmla="val 9600"/>
+              <a:gd name="adj" fmla="val 7481"/>
             </a:avLst>
           </a:prstGeom>
           <a:solidFill>
@@ -11234,7 +11234,7 @@
         </p:nvSpPr>
         <p:spPr>
           <a:xfrm>
-            <a:off x="7799832" y="4645152"/>
+            <a:off x="7799832" y="4330598"/>
             <a:ext cx="3145536" cy="256032"/>
           </a:xfrm>
           <a:prstGeom prst="rect">
@@ -11273,8 +11273,8 @@
         </p:nvSpPr>
         <p:spPr>
           <a:xfrm>
-            <a:off x="7799832" y="4974336"/>
-            <a:ext cx="3145536" cy="576072"/>
+            <a:off x="7799832" y="4659782"/>
+            <a:ext cx="3145536" cy="899770"/>
           </a:xfrm>
           <a:prstGeom prst="rect">
             <a:avLst/>
@@ -11300,7 +11300,7 @@
                 <a:ea typeface="Aptos" pitchFamily="34" charset="-122"/>
                 <a:cs typeface="Aptos" pitchFamily="34" charset="-120"/>
               </a:rPr>
-              <a:t>Use the assignment to test whether you can explain the concept, apply it to a realistic public health situation, and.</a:t>
+              <a:t>Use the assignment to test whether you can explain the concept, apply it to a realistic public health situation, and identify what would need review before the work moves forward.</a:t>
             </a:r>
             <a:endParaRPr lang="en-US" sz="1320" dirty="0"/>
           </a:p>
@@ -11669,11 +11669,11 @@
         <p:spPr>
           <a:xfrm>
             <a:off x="7635240" y="1325880"/>
-            <a:ext cx="3474720" cy="1325880"/>
+            <a:ext cx="3474720" cy="1207008"/>
           </a:xfrm>
           <a:prstGeom prst="roundRect">
             <a:avLst>
-              <a:gd name="adj" fmla="val 8276"/>
+              <a:gd name="adj" fmla="val 9091"/>
             </a:avLst>
           </a:prstGeom>
           <a:solidFill>
@@ -11735,7 +11735,7 @@
         <p:spPr>
           <a:xfrm>
             <a:off x="7799832" y="1801368"/>
-            <a:ext cx="3145536" cy="758952"/>
+            <a:ext cx="3145536" cy="640080"/>
           </a:xfrm>
           <a:prstGeom prst="rect">
             <a:avLst/>
@@ -11775,12 +11775,12 @@
         </p:nvSpPr>
         <p:spPr>
           <a:xfrm>
-            <a:off x="7635240" y="2788920"/>
-            <a:ext cx="3474720" cy="1536192"/>
+            <a:off x="7635240" y="2670048"/>
+            <a:ext cx="3474720" cy="1377086"/>
           </a:xfrm>
           <a:prstGeom prst="roundRect">
             <a:avLst>
-              <a:gd name="adj" fmla="val 7143"/>
+              <a:gd name="adj" fmla="val 7968"/>
             </a:avLst>
           </a:prstGeom>
           <a:solidFill>
@@ -11802,7 +11802,7 @@
         </p:nvSpPr>
         <p:spPr>
           <a:xfrm>
-            <a:off x="7799832" y="2935224"/>
+            <a:off x="7799832" y="2816352"/>
             <a:ext cx="3145536" cy="256032"/>
           </a:xfrm>
           <a:prstGeom prst="rect">
@@ -11841,8 +11841,8 @@
         </p:nvSpPr>
         <p:spPr>
           <a:xfrm>
-            <a:off x="7818120" y="3300984"/>
-            <a:ext cx="3090672" cy="877824"/>
+            <a:off x="7818120" y="3182112"/>
+            <a:ext cx="3090672" cy="718718"/>
           </a:xfrm>
           <a:prstGeom prst="rect">
             <a:avLst/>
@@ -11899,12 +11899,12 @@
         </p:nvSpPr>
         <p:spPr>
           <a:xfrm>
-            <a:off x="7635240" y="4498848"/>
-            <a:ext cx="3474720" cy="1143000"/>
+            <a:off x="7635240" y="4184294"/>
+            <a:ext cx="3474720" cy="1466698"/>
           </a:xfrm>
           <a:prstGeom prst="roundRect">
             <a:avLst>
-              <a:gd name="adj" fmla="val 9600"/>
+              <a:gd name="adj" fmla="val 7481"/>
             </a:avLst>
           </a:prstGeom>
           <a:solidFill>
@@ -11926,7 +11926,7 @@
         </p:nvSpPr>
         <p:spPr>
           <a:xfrm>
-            <a:off x="7799832" y="4645152"/>
+            <a:off x="7799832" y="4330598"/>
             <a:ext cx="3145536" cy="256032"/>
           </a:xfrm>
           <a:prstGeom prst="rect">
@@ -11965,8 +11965,8 @@
         </p:nvSpPr>
         <p:spPr>
           <a:xfrm>
-            <a:off x="7799832" y="4974336"/>
-            <a:ext cx="3145536" cy="576072"/>
+            <a:off x="7799832" y="4659782"/>
+            <a:ext cx="3145536" cy="899770"/>
           </a:xfrm>
           <a:prstGeom prst="rect">
             <a:avLst/>
@@ -11992,7 +11992,7 @@
                 <a:ea typeface="Aptos" pitchFamily="34" charset="-122"/>
                 <a:cs typeface="Aptos" pitchFamily="34" charset="-120"/>
               </a:rPr>
-              <a:t>Translate this concept into clear decision rights, review steps, documentation expectations, and escalation paths before.</a:t>
+              <a:t>Translate this concept into clear decision rights, review steps, documentation expectations, and escalation paths before an AI-supported workflow is approved.</a:t>
             </a:r>
             <a:endParaRPr lang="en-US" sz="1320" dirty="0"/>
           </a:p>
@@ -12327,11 +12327,11 @@
         <p:spPr>
           <a:xfrm>
             <a:off x="7635240" y="1325880"/>
-            <a:ext cx="3474720" cy="1325880"/>
+            <a:ext cx="3474720" cy="1255471"/>
           </a:xfrm>
           <a:prstGeom prst="roundRect">
             <a:avLst>
-              <a:gd name="adj" fmla="val 8276"/>
+              <a:gd name="adj" fmla="val 8740"/>
             </a:avLst>
           </a:prstGeom>
           <a:solidFill>
@@ -12393,7 +12393,7 @@
         <p:spPr>
           <a:xfrm>
             <a:off x="7799832" y="1801368"/>
-            <a:ext cx="3145536" cy="758952"/>
+            <a:ext cx="3145536" cy="688543"/>
           </a:xfrm>
           <a:prstGeom prst="rect">
             <a:avLst/>
@@ -12433,12 +12433,12 @@
         </p:nvSpPr>
         <p:spPr>
           <a:xfrm>
-            <a:off x="7635240" y="2788920"/>
-            <a:ext cx="3474720" cy="1536192"/>
+            <a:off x="7635240" y="2718511"/>
+            <a:ext cx="3474720" cy="1328623"/>
           </a:xfrm>
           <a:prstGeom prst="roundRect">
             <a:avLst>
-              <a:gd name="adj" fmla="val 7143"/>
+              <a:gd name="adj" fmla="val 8259"/>
             </a:avLst>
           </a:prstGeom>
           <a:solidFill>
@@ -12460,7 +12460,7 @@
         </p:nvSpPr>
         <p:spPr>
           <a:xfrm>
-            <a:off x="7799832" y="2935224"/>
+            <a:off x="7799832" y="2864815"/>
             <a:ext cx="3145536" cy="256032"/>
           </a:xfrm>
           <a:prstGeom prst="rect">
@@ -12499,8 +12499,8 @@
         </p:nvSpPr>
         <p:spPr>
           <a:xfrm>
-            <a:off x="7818120" y="3300984"/>
-            <a:ext cx="3090672" cy="877824"/>
+            <a:off x="7818120" y="3230575"/>
+            <a:ext cx="3090672" cy="670255"/>
           </a:xfrm>
           <a:prstGeom prst="rect">
             <a:avLst/>
@@ -12540,12 +12540,12 @@
         </p:nvSpPr>
         <p:spPr>
           <a:xfrm>
-            <a:off x="7635240" y="4498848"/>
-            <a:ext cx="3474720" cy="1143000"/>
+            <a:off x="7635240" y="4184294"/>
+            <a:ext cx="3474720" cy="1466698"/>
           </a:xfrm>
           <a:prstGeom prst="roundRect">
             <a:avLst>
-              <a:gd name="adj" fmla="val 9600"/>
+              <a:gd name="adj" fmla="val 7481"/>
             </a:avLst>
           </a:prstGeom>
           <a:solidFill>
@@ -12567,7 +12567,7 @@
         </p:nvSpPr>
         <p:spPr>
           <a:xfrm>
-            <a:off x="7799832" y="4645152"/>
+            <a:off x="7799832" y="4330598"/>
             <a:ext cx="3145536" cy="256032"/>
           </a:xfrm>
           <a:prstGeom prst="rect">
@@ -12606,8 +12606,8 @@
         </p:nvSpPr>
         <p:spPr>
           <a:xfrm>
-            <a:off x="7799832" y="4974336"/>
-            <a:ext cx="3145536" cy="576072"/>
+            <a:off x="7799832" y="4659782"/>
+            <a:ext cx="3145536" cy="899770"/>
           </a:xfrm>
           <a:prstGeom prst="rect">
             <a:avLst/>
@@ -12633,7 +12633,7 @@
                 <a:ea typeface="Aptos" pitchFamily="34" charset="-122"/>
                 <a:cs typeface="Aptos" pitchFamily="34" charset="-120"/>
               </a:rPr>
-              <a:t>Translate this concept into clear decision rights, review steps, documentation expectations, and escalation paths before.</a:t>
+              <a:t>Translate this concept into clear decision rights, review steps, documentation expectations, and escalation paths before an AI-supported workflow is approved.</a:t>
             </a:r>
             <a:endParaRPr lang="en-US" sz="1320" dirty="0"/>
           </a:p>
@@ -13111,7 +13111,7 @@
                 <a:ea typeface="Aptos" pitchFamily="34" charset="-122"/>
                 <a:cs typeface="Aptos" pitchFamily="34" charset="-120"/>
               </a:rPr>
-              <a:t>Use the related plays to identify decisions, participants, timing, approvals, and documentation needed for responsible.</a:t>
+              <a:t>Use the related plays to identify decisions, participants, timing, approvals, and documentation needed for responsible implementation.</a:t>
             </a:r>
             <a:endParaRPr lang="en-US" sz="1320" dirty="0"/>
           </a:p>
@@ -13730,7 +13730,7 @@
                 <a:ea typeface="Aptos" pitchFamily="34" charset="-122"/>
                 <a:cs typeface="Aptos" pitchFamily="34" charset="-120"/>
               </a:rPr>
-              <a:t>Use linked tools when your department needs a structured worksheet, template, checklist, review process, or.</a:t>
+              <a:t>Use linked tools when your department needs a structured worksheet, template, checklist, review process, or documentation artifact.</a:t>
             </a:r>
             <a:endParaRPr lang="en-US" sz="1320" dirty="0"/>
           </a:p>
@@ -14240,11 +14240,11 @@
         <p:spPr>
           <a:xfrm>
             <a:off x="7635240" y="1325880"/>
-            <a:ext cx="3474720" cy="1325880"/>
+            <a:ext cx="3474720" cy="1207008"/>
           </a:xfrm>
           <a:prstGeom prst="roundRect">
             <a:avLst>
-              <a:gd name="adj" fmla="val 8276"/>
+              <a:gd name="adj" fmla="val 9091"/>
             </a:avLst>
           </a:prstGeom>
           <a:solidFill>
@@ -14306,7 +14306,7 @@
         <p:spPr>
           <a:xfrm>
             <a:off x="7799832" y="1801368"/>
-            <a:ext cx="3145536" cy="758952"/>
+            <a:ext cx="3145536" cy="640080"/>
           </a:xfrm>
           <a:prstGeom prst="rect">
             <a:avLst/>
@@ -14346,12 +14346,12 @@
         </p:nvSpPr>
         <p:spPr>
           <a:xfrm>
-            <a:off x="7635240" y="2788920"/>
-            <a:ext cx="3474720" cy="1536192"/>
+            <a:off x="7635240" y="2670048"/>
+            <a:ext cx="3474720" cy="1377086"/>
           </a:xfrm>
           <a:prstGeom prst="roundRect">
             <a:avLst>
-              <a:gd name="adj" fmla="val 7143"/>
+              <a:gd name="adj" fmla="val 7968"/>
             </a:avLst>
           </a:prstGeom>
           <a:solidFill>
@@ -14373,7 +14373,7 @@
         </p:nvSpPr>
         <p:spPr>
           <a:xfrm>
-            <a:off x="7799832" y="2935224"/>
+            <a:off x="7799832" y="2816352"/>
             <a:ext cx="3145536" cy="256032"/>
           </a:xfrm>
           <a:prstGeom prst="rect">
@@ -14412,8 +14412,8 @@
         </p:nvSpPr>
         <p:spPr>
           <a:xfrm>
-            <a:off x="7818120" y="3300984"/>
-            <a:ext cx="3090672" cy="877824"/>
+            <a:off x="7818120" y="3182112"/>
+            <a:ext cx="3090672" cy="718718"/>
           </a:xfrm>
           <a:prstGeom prst="rect">
             <a:avLst/>
@@ -14470,12 +14470,12 @@
         </p:nvSpPr>
         <p:spPr>
           <a:xfrm>
-            <a:off x="7635240" y="4498848"/>
-            <a:ext cx="3474720" cy="1143000"/>
+            <a:off x="7635240" y="4184294"/>
+            <a:ext cx="3474720" cy="1466698"/>
           </a:xfrm>
           <a:prstGeom prst="roundRect">
             <a:avLst>
-              <a:gd name="adj" fmla="val 9600"/>
+              <a:gd name="adj" fmla="val 7481"/>
             </a:avLst>
           </a:prstGeom>
           <a:solidFill>
@@ -14497,7 +14497,7 @@
         </p:nvSpPr>
         <p:spPr>
           <a:xfrm>
-            <a:off x="7799832" y="4645152"/>
+            <a:off x="7799832" y="4330598"/>
             <a:ext cx="3145536" cy="256032"/>
           </a:xfrm>
           <a:prstGeom prst="rect">
@@ -14536,8 +14536,8 @@
         </p:nvSpPr>
         <p:spPr>
           <a:xfrm>
-            <a:off x="7799832" y="4974336"/>
-            <a:ext cx="3145536" cy="576072"/>
+            <a:off x="7799832" y="4659782"/>
+            <a:ext cx="3145536" cy="899770"/>
           </a:xfrm>
           <a:prstGeom prst="rect">
             <a:avLst/>
@@ -14563,7 +14563,7 @@
                 <a:ea typeface="Aptos" pitchFamily="34" charset="-122"/>
                 <a:cs typeface="Aptos" pitchFamily="34" charset="-120"/>
               </a:rPr>
-              <a:t>Use the assignment to test whether you can explain the concept, apply it to a realistic public health situation, and.</a:t>
+              <a:t>Use the assignment to test whether you can explain the concept, apply it to a realistic public health situation, and identify what would need review before the work moves forward.</a:t>
             </a:r>
             <a:endParaRPr lang="en-US" sz="1320" dirty="0"/>
           </a:p>
@@ -14932,11 +14932,11 @@
         <p:spPr>
           <a:xfrm>
             <a:off x="7635240" y="1325880"/>
-            <a:ext cx="3474720" cy="1325880"/>
+            <a:ext cx="3474720" cy="1207008"/>
           </a:xfrm>
           <a:prstGeom prst="roundRect">
             <a:avLst>
-              <a:gd name="adj" fmla="val 8276"/>
+              <a:gd name="adj" fmla="val 9091"/>
             </a:avLst>
           </a:prstGeom>
           <a:solidFill>
@@ -14998,7 +14998,7 @@
         <p:spPr>
           <a:xfrm>
             <a:off x="7799832" y="1801368"/>
-            <a:ext cx="3145536" cy="758952"/>
+            <a:ext cx="3145536" cy="640080"/>
           </a:xfrm>
           <a:prstGeom prst="rect">
             <a:avLst/>
@@ -15024,7 +15024,7 @@
                 <a:ea typeface="Aptos" pitchFamily="34" charset="-122"/>
                 <a:cs typeface="Aptos" pitchFamily="34" charset="-120"/>
               </a:rPr>
-              <a:t>This module focuses on creating, approving, implementing, and updating internal AI policies.</a:t>
+              <a:t>This module focuses on creating, approving, implementing, and updating internal AI.</a:t>
             </a:r>
             <a:endParaRPr lang="en-US" sz="1320" dirty="0"/>
           </a:p>
@@ -15038,12 +15038,12 @@
         </p:nvSpPr>
         <p:spPr>
           <a:xfrm>
-            <a:off x="7635240" y="2788920"/>
-            <a:ext cx="3474720" cy="1536192"/>
+            <a:off x="7635240" y="2670048"/>
+            <a:ext cx="3474720" cy="1377086"/>
           </a:xfrm>
           <a:prstGeom prst="roundRect">
             <a:avLst>
-              <a:gd name="adj" fmla="val 7143"/>
+              <a:gd name="adj" fmla="val 7968"/>
             </a:avLst>
           </a:prstGeom>
           <a:solidFill>
@@ -15065,8 +15065,8 @@
         </p:nvSpPr>
         <p:spPr>
           <a:xfrm>
-            <a:off x="7799832" y="2935224"/>
-            <a:ext cx="3145536" cy="256032"/>
+            <a:off x="7799832" y="2798064"/>
+            <a:ext cx="3145536" cy="237744"/>
           </a:xfrm>
           <a:prstGeom prst="rect">
             <a:avLst/>
@@ -15082,7 +15082,7 @@
               <a:buNone/>
             </a:pPr>
             <a:r>
-              <a:rPr lang="en-US" sz="1300" b="1" dirty="0">
+              <a:rPr lang="en-US" sz="1250" b="1" dirty="0">
                 <a:solidFill>
                   <a:srgbClr val="0068B7"/>
                 </a:solidFill>
@@ -15090,101 +15090,317 @@
                 <a:ea typeface="Aptos" pitchFamily="34" charset="-122"/>
                 <a:cs typeface="Aptos" pitchFamily="34" charset="-120"/>
               </a:rPr>
-              <a:t>Concept checkpoints</a:t>
-            </a:r>
-            <a:endParaRPr lang="en-US" sz="1300" dirty="0"/>
-          </a:p>
-        </p:txBody>
-      </p:sp>
-      <p:sp>
-        <p:nvSpPr>
-          <p:cNvPr id="15" name="Text 13"/>
-          <p:cNvSpPr/>
-          <p:nvPr/>
-        </p:nvSpPr>
-        <p:spPr>
-          <a:xfrm>
-            <a:off x="7818120" y="3300984"/>
-            <a:ext cx="3090672" cy="877824"/>
-          </a:xfrm>
-          <a:prstGeom prst="rect">
-            <a:avLst/>
-          </a:prstGeom>
-          <a:noFill/>
-          <a:ln/>
-        </p:spPr>
-        <p:txBody>
-          <a:bodyPr wrap="square" lIns="508" tIns="508" rIns="508" bIns="508" rtlCol="0" anchor="t">
+              <a:t>Governance pathway</a:t>
+            </a:r>
+            <a:endParaRPr lang="en-US" sz="1250" dirty="0"/>
+          </a:p>
+        </p:txBody>
+      </p:sp>
+      <p:sp>
+        <p:nvSpPr>
+          <p:cNvPr id="15" name="Shape 13"/>
+          <p:cNvSpPr/>
+          <p:nvPr/>
+        </p:nvSpPr>
+        <p:spPr>
+          <a:xfrm>
+            <a:off x="8763000" y="3351276"/>
+            <a:ext cx="164592" cy="0"/>
+          </a:xfrm>
+          <a:prstGeom prst="line">
+            <a:avLst/>
+          </a:prstGeom>
+          <a:noFill/>
+          <a:ln w="15240">
+            <a:solidFill>
+              <a:srgbClr val="8ABBD8"/>
+            </a:solidFill>
+            <a:prstDash val="solid"/>
+          </a:ln>
+        </p:spPr>
+      </p:sp>
+      <p:sp>
+        <p:nvSpPr>
+          <p:cNvPr id="16" name="Shape 14"/>
+          <p:cNvSpPr/>
+          <p:nvPr/>
+        </p:nvSpPr>
+        <p:spPr>
+          <a:xfrm>
+            <a:off x="7872984" y="3200400"/>
+            <a:ext cx="890016" cy="301752"/>
+          </a:xfrm>
+          <a:prstGeom prst="roundRect">
+            <a:avLst>
+              <a:gd name="adj" fmla="val 24242"/>
+            </a:avLst>
+          </a:prstGeom>
+          <a:solidFill>
+            <a:srgbClr val="0068B7"/>
+          </a:solidFill>
+          <a:ln w="12700">
+            <a:solidFill>
+              <a:srgbClr val="0068B7"/>
+            </a:solidFill>
+            <a:prstDash val="solid"/>
+          </a:ln>
+        </p:spPr>
+      </p:sp>
+      <p:sp>
+        <p:nvSpPr>
+          <p:cNvPr id="17" name="Text 15"/>
+          <p:cNvSpPr/>
+          <p:nvPr/>
+        </p:nvSpPr>
+        <p:spPr>
+          <a:xfrm>
+            <a:off x="7909560" y="3273552"/>
+            <a:ext cx="816864" cy="146304"/>
+          </a:xfrm>
+          <a:prstGeom prst="rect">
+            <a:avLst/>
+          </a:prstGeom>
+          <a:noFill/>
+          <a:ln/>
+        </p:spPr>
+        <p:txBody>
+          <a:bodyPr wrap="square" lIns="0" tIns="0" rIns="0" bIns="0" rtlCol="0" anchor="ctr">
             <a:normAutofit/>
           </a:bodyPr>
           <a:lstStyle/>
           <a:p>
-            <a:pPr indent="0" marL="0">
-              <a:buNone/>
-            </a:pPr>
-            <a:r>
-              <a:rPr lang="en-US" sz="1220" dirty="0">
-                <a:solidFill>
-                  <a:srgbClr val="17364A"/>
-                </a:solidFill>
-                <a:latin typeface="Aptos" pitchFamily="34" charset="0"/>
-                <a:ea typeface="Aptos" pitchFamily="34" charset="-122"/>
-                <a:cs typeface="Aptos" pitchFamily="34" charset="-120"/>
-              </a:rPr>
-              <a:t>It is designed for public health staff who must translate.</a:t>
-            </a:r>
-            <a:endParaRPr lang="en-US" sz="1220" dirty="0"/>
-          </a:p>
-          <a:p>
-            <a:pPr indent="0" marL="0">
-              <a:buNone/>
-            </a:pPr>
-            <a:r>
-              <a:rPr lang="en-US" sz="1220" dirty="0">
-                <a:solidFill>
-                  <a:srgbClr val="17364A"/>
-                </a:solidFill>
-                <a:latin typeface="Aptos" pitchFamily="34" charset="0"/>
-                <a:ea typeface="Aptos" pitchFamily="34" charset="-122"/>
-                <a:cs typeface="Aptos" pitchFamily="34" charset="-120"/>
-              </a:rPr>
-              <a:t>The module helps learners move beyond general awareness by.</a:t>
-            </a:r>
-            <a:endParaRPr lang="en-US" sz="1220" dirty="0"/>
-          </a:p>
-          <a:p>
-            <a:pPr indent="0" marL="0">
-              <a:buNone/>
-            </a:pPr>
-            <a:r>
-              <a:rPr lang="en-US" sz="1220" dirty="0">
-                <a:solidFill>
-                  <a:srgbClr val="17364A"/>
-                </a:solidFill>
-                <a:latin typeface="Aptos" pitchFamily="34" charset="0"/>
-                <a:ea typeface="Aptos" pitchFamily="34" charset="-122"/>
-                <a:cs typeface="Aptos" pitchFamily="34" charset="-120"/>
-              </a:rPr>
-              <a:t>It emphasizes paragraph-based reasoning, defined responsibilities,.</a:t>
-            </a:r>
-            <a:endParaRPr lang="en-US" sz="1220" dirty="0"/>
-          </a:p>
-        </p:txBody>
-      </p:sp>
-      <p:sp>
-        <p:nvSpPr>
-          <p:cNvPr id="16" name="Shape 14"/>
-          <p:cNvSpPr/>
-          <p:nvPr/>
-        </p:nvSpPr>
-        <p:spPr>
-          <a:xfrm>
-            <a:off x="7635240" y="4498848"/>
-            <a:ext cx="3474720" cy="1143000"/>
+            <a:pPr algn="ctr" indent="0" marL="0">
+              <a:buNone/>
+            </a:pPr>
+            <a:r>
+              <a:rPr lang="en-US" sz="880" b="1" dirty="0">
+                <a:solidFill>
+                  <a:srgbClr val="FFFFFF"/>
+                </a:solidFill>
+                <a:latin typeface="Aptos" pitchFamily="34" charset="0"/>
+                <a:ea typeface="Aptos" pitchFamily="34" charset="-122"/>
+                <a:cs typeface="Aptos" pitchFamily="34" charset="-120"/>
+              </a:rPr>
+              <a:t>Submit</a:t>
+            </a:r>
+            <a:endParaRPr lang="en-US" sz="880" dirty="0"/>
+          </a:p>
+        </p:txBody>
+      </p:sp>
+      <p:sp>
+        <p:nvSpPr>
+          <p:cNvPr id="18" name="Shape 16"/>
+          <p:cNvSpPr/>
+          <p:nvPr/>
+        </p:nvSpPr>
+        <p:spPr>
+          <a:xfrm>
+            <a:off x="9817608" y="3351276"/>
+            <a:ext cx="164592" cy="0"/>
+          </a:xfrm>
+          <a:prstGeom prst="line">
+            <a:avLst/>
+          </a:prstGeom>
+          <a:noFill/>
+          <a:ln w="15240">
+            <a:solidFill>
+              <a:srgbClr val="8ABBD8"/>
+            </a:solidFill>
+            <a:prstDash val="solid"/>
+          </a:ln>
+        </p:spPr>
+      </p:sp>
+      <p:sp>
+        <p:nvSpPr>
+          <p:cNvPr id="19" name="Shape 17"/>
+          <p:cNvSpPr/>
+          <p:nvPr/>
+        </p:nvSpPr>
+        <p:spPr>
+          <a:xfrm>
+            <a:off x="8927592" y="3200400"/>
+            <a:ext cx="890016" cy="301752"/>
           </a:xfrm>
           <a:prstGeom prst="roundRect">
             <a:avLst>
-              <a:gd name="adj" fmla="val 9600"/>
+              <a:gd name="adj" fmla="val 24242"/>
+            </a:avLst>
+          </a:prstGeom>
+          <a:solidFill>
+            <a:srgbClr val="2F8A28"/>
+          </a:solidFill>
+          <a:ln w="12700">
+            <a:solidFill>
+              <a:srgbClr val="2F8A28"/>
+            </a:solidFill>
+            <a:prstDash val="solid"/>
+          </a:ln>
+        </p:spPr>
+      </p:sp>
+      <p:sp>
+        <p:nvSpPr>
+          <p:cNvPr id="20" name="Text 18"/>
+          <p:cNvSpPr/>
+          <p:nvPr/>
+        </p:nvSpPr>
+        <p:spPr>
+          <a:xfrm>
+            <a:off x="8964168" y="3273552"/>
+            <a:ext cx="816864" cy="146304"/>
+          </a:xfrm>
+          <a:prstGeom prst="rect">
+            <a:avLst/>
+          </a:prstGeom>
+          <a:noFill/>
+          <a:ln/>
+        </p:spPr>
+        <p:txBody>
+          <a:bodyPr wrap="square" lIns="0" tIns="0" rIns="0" bIns="0" rtlCol="0" anchor="ctr">
+            <a:normAutofit/>
+          </a:bodyPr>
+          <a:lstStyle/>
+          <a:p>
+            <a:pPr algn="ctr" indent="0" marL="0">
+              <a:buNone/>
+            </a:pPr>
+            <a:r>
+              <a:rPr lang="en-US" sz="880" b="1" dirty="0">
+                <a:solidFill>
+                  <a:srgbClr val="FFFFFF"/>
+                </a:solidFill>
+                <a:latin typeface="Aptos" pitchFamily="34" charset="0"/>
+                <a:ea typeface="Aptos" pitchFamily="34" charset="-122"/>
+                <a:cs typeface="Aptos" pitchFamily="34" charset="-120"/>
+              </a:rPr>
+              <a:t>Review</a:t>
+            </a:r>
+            <a:endParaRPr lang="en-US" sz="880" dirty="0"/>
+          </a:p>
+        </p:txBody>
+      </p:sp>
+      <p:sp>
+        <p:nvSpPr>
+          <p:cNvPr id="21" name="Shape 19"/>
+          <p:cNvSpPr/>
+          <p:nvPr/>
+        </p:nvSpPr>
+        <p:spPr>
+          <a:xfrm>
+            <a:off x="9982200" y="3200400"/>
+            <a:ext cx="890016" cy="301752"/>
+          </a:xfrm>
+          <a:prstGeom prst="roundRect">
+            <a:avLst>
+              <a:gd name="adj" fmla="val 24242"/>
+            </a:avLst>
+          </a:prstGeom>
+          <a:solidFill>
+            <a:srgbClr val="6A4CA3"/>
+          </a:solidFill>
+          <a:ln w="12700">
+            <a:solidFill>
+              <a:srgbClr val="6A4CA3"/>
+            </a:solidFill>
+            <a:prstDash val="solid"/>
+          </a:ln>
+        </p:spPr>
+      </p:sp>
+      <p:sp>
+        <p:nvSpPr>
+          <p:cNvPr id="22" name="Text 20"/>
+          <p:cNvSpPr/>
+          <p:nvPr/>
+        </p:nvSpPr>
+        <p:spPr>
+          <a:xfrm>
+            <a:off x="10018776" y="3273552"/>
+            <a:ext cx="816864" cy="146304"/>
+          </a:xfrm>
+          <a:prstGeom prst="rect">
+            <a:avLst/>
+          </a:prstGeom>
+          <a:noFill/>
+          <a:ln/>
+        </p:spPr>
+        <p:txBody>
+          <a:bodyPr wrap="square" lIns="0" tIns="0" rIns="0" bIns="0" rtlCol="0" anchor="ctr">
+            <a:normAutofit/>
+          </a:bodyPr>
+          <a:lstStyle/>
+          <a:p>
+            <a:pPr algn="ctr" indent="0" marL="0">
+              <a:buNone/>
+            </a:pPr>
+            <a:r>
+              <a:rPr lang="en-US" sz="880" b="1" dirty="0">
+                <a:solidFill>
+                  <a:srgbClr val="FFFFFF"/>
+                </a:solidFill>
+                <a:latin typeface="Aptos" pitchFamily="34" charset="0"/>
+                <a:ea typeface="Aptos" pitchFamily="34" charset="-122"/>
+                <a:cs typeface="Aptos" pitchFamily="34" charset="-120"/>
+              </a:rPr>
+              <a:t>Oversee</a:t>
+            </a:r>
+            <a:endParaRPr lang="en-US" sz="880" dirty="0"/>
+          </a:p>
+        </p:txBody>
+      </p:sp>
+      <p:sp>
+        <p:nvSpPr>
+          <p:cNvPr id="23" name="Text 21"/>
+          <p:cNvSpPr/>
+          <p:nvPr/>
+        </p:nvSpPr>
+        <p:spPr>
+          <a:xfrm>
+            <a:off x="7854696" y="3694176"/>
+            <a:ext cx="3035808" cy="206654"/>
+          </a:xfrm>
+          <a:prstGeom prst="rect">
+            <a:avLst/>
+          </a:prstGeom>
+          <a:noFill/>
+          <a:ln/>
+        </p:spPr>
+        <p:txBody>
+          <a:bodyPr wrap="square" lIns="254" tIns="254" rIns="254" bIns="254" rtlCol="0" anchor="t">
+            <a:normAutofit/>
+          </a:bodyPr>
+          <a:lstStyle/>
+          <a:p>
+            <a:pPr indent="0" marL="0">
+              <a:buNone/>
+            </a:pPr>
+            <a:r>
+              <a:rPr lang="en-US" sz="1120" dirty="0">
+                <a:solidFill>
+                  <a:srgbClr val="17364A"/>
+                </a:solidFill>
+                <a:latin typeface="Aptos" pitchFamily="34" charset="0"/>
+                <a:ea typeface="Aptos" pitchFamily="34" charset="-122"/>
+                <a:cs typeface="Aptos" pitchFamily="34" charset="-120"/>
+              </a:rPr>
+              <a:t>A proposed AI use should move through documented review before it becomes an operational workflow.</a:t>
+            </a:r>
+            <a:endParaRPr lang="en-US" sz="1120" dirty="0"/>
+          </a:p>
+        </p:txBody>
+      </p:sp>
+      <p:sp>
+        <p:nvSpPr>
+          <p:cNvPr id="24" name="Shape 22"/>
+          <p:cNvSpPr/>
+          <p:nvPr/>
+        </p:nvSpPr>
+        <p:spPr>
+          <a:xfrm>
+            <a:off x="7635240" y="4184294"/>
+            <a:ext cx="3474720" cy="1466698"/>
+          </a:xfrm>
+          <a:prstGeom prst="roundRect">
+            <a:avLst>
+              <a:gd name="adj" fmla="val 7481"/>
             </a:avLst>
           </a:prstGeom>
           <a:solidFill>
@@ -15200,13 +15416,13 @@
       </p:sp>
       <p:sp>
         <p:nvSpPr>
-          <p:cNvPr id="17" name="Text 15"/>
-          <p:cNvSpPr/>
-          <p:nvPr/>
-        </p:nvSpPr>
-        <p:spPr>
-          <a:xfrm>
-            <a:off x="7799832" y="4645152"/>
+          <p:cNvPr id="25" name="Text 23"/>
+          <p:cNvSpPr/>
+          <p:nvPr/>
+        </p:nvSpPr>
+        <p:spPr>
+          <a:xfrm>
+            <a:off x="7799832" y="4330598"/>
             <a:ext cx="3145536" cy="256032"/>
           </a:xfrm>
           <a:prstGeom prst="rect">
@@ -15239,14 +15455,14 @@
       </p:sp>
       <p:sp>
         <p:nvSpPr>
-          <p:cNvPr id="18" name="Text 16"/>
-          <p:cNvSpPr/>
-          <p:nvPr/>
-        </p:nvSpPr>
-        <p:spPr>
-          <a:xfrm>
-            <a:off x="7799832" y="4974336"/>
-            <a:ext cx="3145536" cy="576072"/>
+          <p:cNvPr id="26" name="Text 24"/>
+          <p:cNvSpPr/>
+          <p:nvPr/>
+        </p:nvSpPr>
+        <p:spPr>
+          <a:xfrm>
+            <a:off x="7799832" y="4659782"/>
+            <a:ext cx="3145536" cy="899770"/>
           </a:xfrm>
           <a:prstGeom prst="rect">
             <a:avLst/>
@@ -15272,7 +15488,7 @@
                 <a:ea typeface="Aptos" pitchFamily="34" charset="-122"/>
                 <a:cs typeface="Aptos" pitchFamily="34" charset="-120"/>
               </a:rPr>
-              <a:t>Translate this concept into clear decision rights, review steps, documentation expectations, and escalation paths before.</a:t>
+              <a:t>Translate this concept into clear decision rights, review steps, documentation expectations, and escalation paths before an AI-supported workflow is approved.</a:t>
             </a:r>
             <a:endParaRPr lang="en-US" sz="1320" dirty="0"/>
           </a:p>
@@ -15641,11 +15857,11 @@
         <p:spPr>
           <a:xfrm>
             <a:off x="7635240" y="1325880"/>
-            <a:ext cx="3474720" cy="1325880"/>
+            <a:ext cx="3474720" cy="1207008"/>
           </a:xfrm>
           <a:prstGeom prst="roundRect">
             <a:avLst>
-              <a:gd name="adj" fmla="val 8276"/>
+              <a:gd name="adj" fmla="val 9091"/>
             </a:avLst>
           </a:prstGeom>
           <a:solidFill>
@@ -15707,7 +15923,7 @@
         <p:spPr>
           <a:xfrm>
             <a:off x="7799832" y="1801368"/>
-            <a:ext cx="3145536" cy="758952"/>
+            <a:ext cx="3145536" cy="640080"/>
           </a:xfrm>
           <a:prstGeom prst="rect">
             <a:avLst/>
@@ -15733,7 +15949,7 @@
                 <a:ea typeface="Aptos" pitchFamily="34" charset="-122"/>
                 <a:cs typeface="Aptos" pitchFamily="34" charset="-120"/>
               </a:rPr>
-              <a:t>Decision right: The authority to approve, deny, modify, pause, or escalate an AI use case or.</a:t>
+              <a:t>Decision right: The authority to approve, deny, modify, pause, or escalate an AI use.</a:t>
             </a:r>
             <a:endParaRPr lang="en-US" sz="1320" dirty="0"/>
           </a:p>
@@ -15747,12 +15963,12 @@
         </p:nvSpPr>
         <p:spPr>
           <a:xfrm>
-            <a:off x="7635240" y="2788920"/>
-            <a:ext cx="3474720" cy="1536192"/>
+            <a:off x="7635240" y="2670048"/>
+            <a:ext cx="3474720" cy="1377086"/>
           </a:xfrm>
           <a:prstGeom prst="roundRect">
             <a:avLst>
-              <a:gd name="adj" fmla="val 7143"/>
+              <a:gd name="adj" fmla="val 7968"/>
             </a:avLst>
           </a:prstGeom>
           <a:solidFill>
@@ -15774,7 +15990,7 @@
         </p:nvSpPr>
         <p:spPr>
           <a:xfrm>
-            <a:off x="7799832" y="2935224"/>
+            <a:off x="7799832" y="2816352"/>
             <a:ext cx="3145536" cy="256032"/>
           </a:xfrm>
           <a:prstGeom prst="rect">
@@ -15813,8 +16029,8 @@
         </p:nvSpPr>
         <p:spPr>
           <a:xfrm>
-            <a:off x="7818120" y="3300984"/>
-            <a:ext cx="3090672" cy="877824"/>
+            <a:off x="7818120" y="3182112"/>
+            <a:ext cx="3090672" cy="718718"/>
           </a:xfrm>
           <a:prstGeom prst="rect">
             <a:avLst/>
@@ -15888,12 +16104,12 @@
         </p:nvSpPr>
         <p:spPr>
           <a:xfrm>
-            <a:off x="7635240" y="4498848"/>
-            <a:ext cx="3474720" cy="1143000"/>
+            <a:off x="7635240" y="4184294"/>
+            <a:ext cx="3474720" cy="1466698"/>
           </a:xfrm>
           <a:prstGeom prst="roundRect">
             <a:avLst>
-              <a:gd name="adj" fmla="val 9600"/>
+              <a:gd name="adj" fmla="val 7481"/>
             </a:avLst>
           </a:prstGeom>
           <a:solidFill>
@@ -15915,7 +16131,7 @@
         </p:nvSpPr>
         <p:spPr>
           <a:xfrm>
-            <a:off x="7799832" y="4645152"/>
+            <a:off x="7799832" y="4330598"/>
             <a:ext cx="3145536" cy="256032"/>
           </a:xfrm>
           <a:prstGeom prst="rect">
@@ -15954,8 +16170,8 @@
         </p:nvSpPr>
         <p:spPr>
           <a:xfrm>
-            <a:off x="7799832" y="4974336"/>
-            <a:ext cx="3145536" cy="576072"/>
+            <a:off x="7799832" y="4659782"/>
+            <a:ext cx="3145536" cy="899770"/>
           </a:xfrm>
           <a:prstGeom prst="rect">
             <a:avLst/>
@@ -15981,7 +16197,7 @@
                 <a:ea typeface="Aptos" pitchFamily="34" charset="-122"/>
                 <a:cs typeface="Aptos" pitchFamily="34" charset="-120"/>
               </a:rPr>
-              <a:t>Translate this concept into clear decision rights, review steps, documentation expectations, and escalation paths before.</a:t>
+              <a:t>Translate this concept into clear decision rights, review steps, documentation expectations, and escalation paths before an AI-supported workflow is approved.</a:t>
             </a:r>
             <a:endParaRPr lang="en-US" sz="1320" dirty="0"/>
           </a:p>
@@ -16350,11 +16566,11 @@
         <p:spPr>
           <a:xfrm>
             <a:off x="7635240" y="1325880"/>
-            <a:ext cx="3474720" cy="1325880"/>
+            <a:ext cx="3474720" cy="1207008"/>
           </a:xfrm>
           <a:prstGeom prst="roundRect">
             <a:avLst>
-              <a:gd name="adj" fmla="val 8276"/>
+              <a:gd name="adj" fmla="val 9091"/>
             </a:avLst>
           </a:prstGeom>
           <a:solidFill>
@@ -16416,7 +16632,7 @@
         <p:spPr>
           <a:xfrm>
             <a:off x="7799832" y="1801368"/>
-            <a:ext cx="3145536" cy="758952"/>
+            <a:ext cx="3145536" cy="640080"/>
           </a:xfrm>
           <a:prstGeom prst="rect">
             <a:avLst/>
@@ -16442,7 +16658,7 @@
                 <a:ea typeface="Aptos" pitchFamily="34" charset="-122"/>
                 <a:cs typeface="Aptos" pitchFamily="34" charset="-120"/>
               </a:rPr>
-              <a:t>This module provides national-level training guidance for public health agencies and partners.</a:t>
+              <a:t>This module provides national-level training guidance for public health agencies and.</a:t>
             </a:r>
             <a:endParaRPr lang="en-US" sz="1320" dirty="0"/>
           </a:p>
@@ -16456,12 +16672,12 @@
         </p:nvSpPr>
         <p:spPr>
           <a:xfrm>
-            <a:off x="7635240" y="2788920"/>
-            <a:ext cx="3474720" cy="1536192"/>
+            <a:off x="7635240" y="2670048"/>
+            <a:ext cx="3474720" cy="1377086"/>
           </a:xfrm>
           <a:prstGeom prst="roundRect">
             <a:avLst>
-              <a:gd name="adj" fmla="val 7143"/>
+              <a:gd name="adj" fmla="val 7968"/>
             </a:avLst>
           </a:prstGeom>
           <a:solidFill>
@@ -16483,8 +16699,8 @@
         </p:nvSpPr>
         <p:spPr>
           <a:xfrm>
-            <a:off x="7799832" y="2935224"/>
-            <a:ext cx="3145536" cy="256032"/>
+            <a:off x="7799832" y="2798064"/>
+            <a:ext cx="3145536" cy="237744"/>
           </a:xfrm>
           <a:prstGeom prst="rect">
             <a:avLst/>
@@ -16500,7 +16716,7 @@
               <a:buNone/>
             </a:pPr>
             <a:r>
-              <a:rPr lang="en-US" sz="1300" b="1" dirty="0">
+              <a:rPr lang="en-US" sz="1250" b="1" dirty="0">
                 <a:solidFill>
                   <a:srgbClr val="0068B7"/>
                 </a:solidFill>
@@ -16508,101 +16724,317 @@
                 <a:ea typeface="Aptos" pitchFamily="34" charset="-122"/>
                 <a:cs typeface="Aptos" pitchFamily="34" charset="-120"/>
               </a:rPr>
-              <a:t>Concept checkpoints</a:t>
-            </a:r>
-            <a:endParaRPr lang="en-US" sz="1300" dirty="0"/>
-          </a:p>
-        </p:txBody>
-      </p:sp>
-      <p:sp>
-        <p:nvSpPr>
-          <p:cNvPr id="15" name="Text 13"/>
-          <p:cNvSpPr/>
-          <p:nvPr/>
-        </p:nvSpPr>
-        <p:spPr>
-          <a:xfrm>
-            <a:off x="7818120" y="3300984"/>
-            <a:ext cx="3090672" cy="877824"/>
-          </a:xfrm>
-          <a:prstGeom prst="rect">
-            <a:avLst/>
-          </a:prstGeom>
-          <a:noFill/>
-          <a:ln/>
-        </p:spPr>
-        <p:txBody>
-          <a:bodyPr wrap="square" lIns="508" tIns="508" rIns="508" bIns="508" rtlCol="0" anchor="t">
+              <a:t>Governance pathway</a:t>
+            </a:r>
+            <a:endParaRPr lang="en-US" sz="1250" dirty="0"/>
+          </a:p>
+        </p:txBody>
+      </p:sp>
+      <p:sp>
+        <p:nvSpPr>
+          <p:cNvPr id="15" name="Shape 13"/>
+          <p:cNvSpPr/>
+          <p:nvPr/>
+        </p:nvSpPr>
+        <p:spPr>
+          <a:xfrm>
+            <a:off x="8763000" y="3351276"/>
+            <a:ext cx="164592" cy="0"/>
+          </a:xfrm>
+          <a:prstGeom prst="line">
+            <a:avLst/>
+          </a:prstGeom>
+          <a:noFill/>
+          <a:ln w="15240">
+            <a:solidFill>
+              <a:srgbClr val="8ABBD8"/>
+            </a:solidFill>
+            <a:prstDash val="solid"/>
+          </a:ln>
+        </p:spPr>
+      </p:sp>
+      <p:sp>
+        <p:nvSpPr>
+          <p:cNvPr id="16" name="Shape 14"/>
+          <p:cNvSpPr/>
+          <p:nvPr/>
+        </p:nvSpPr>
+        <p:spPr>
+          <a:xfrm>
+            <a:off x="7872984" y="3200400"/>
+            <a:ext cx="890016" cy="301752"/>
+          </a:xfrm>
+          <a:prstGeom prst="roundRect">
+            <a:avLst>
+              <a:gd name="adj" fmla="val 24242"/>
+            </a:avLst>
+          </a:prstGeom>
+          <a:solidFill>
+            <a:srgbClr val="0068B7"/>
+          </a:solidFill>
+          <a:ln w="12700">
+            <a:solidFill>
+              <a:srgbClr val="0068B7"/>
+            </a:solidFill>
+            <a:prstDash val="solid"/>
+          </a:ln>
+        </p:spPr>
+      </p:sp>
+      <p:sp>
+        <p:nvSpPr>
+          <p:cNvPr id="17" name="Text 15"/>
+          <p:cNvSpPr/>
+          <p:nvPr/>
+        </p:nvSpPr>
+        <p:spPr>
+          <a:xfrm>
+            <a:off x="7909560" y="3273552"/>
+            <a:ext cx="816864" cy="146304"/>
+          </a:xfrm>
+          <a:prstGeom prst="rect">
+            <a:avLst/>
+          </a:prstGeom>
+          <a:noFill/>
+          <a:ln/>
+        </p:spPr>
+        <p:txBody>
+          <a:bodyPr wrap="square" lIns="0" tIns="0" rIns="0" bIns="0" rtlCol="0" anchor="ctr">
             <a:normAutofit/>
           </a:bodyPr>
           <a:lstStyle/>
           <a:p>
-            <a:pPr indent="0" marL="0">
-              <a:buNone/>
-            </a:pPr>
-            <a:r>
-              <a:rPr lang="en-US" sz="1220" dirty="0">
-                <a:solidFill>
-                  <a:srgbClr val="17364A"/>
-                </a:solidFill>
-                <a:latin typeface="Aptos" pitchFamily="34" charset="0"/>
-                <a:ea typeface="Aptos" pitchFamily="34" charset="-122"/>
-                <a:cs typeface="Aptos" pitchFamily="34" charset="-120"/>
-              </a:rPr>
-              <a:t>It is not legal advice and does not replace review by agency legal.</a:t>
-            </a:r>
-            <a:endParaRPr lang="en-US" sz="1220" dirty="0"/>
-          </a:p>
-          <a:p>
-            <a:pPr indent="0" marL="0">
-              <a:buNone/>
-            </a:pPr>
-            <a:r>
-              <a:rPr lang="en-US" sz="1220" dirty="0">
-                <a:solidFill>
-                  <a:srgbClr val="17364A"/>
-                </a:solidFill>
-                <a:latin typeface="Aptos" pitchFamily="34" charset="0"/>
-                <a:ea typeface="Aptos" pitchFamily="34" charset="-122"/>
-                <a:cs typeface="Aptos" pitchFamily="34" charset="-120"/>
-              </a:rPr>
-              <a:t>Requirements may vary by state, locality, territory, Tribe,.</a:t>
-            </a:r>
-            <a:endParaRPr lang="en-US" sz="1220" dirty="0"/>
-          </a:p>
-          <a:p>
-            <a:pPr indent="0" marL="0">
-              <a:buNone/>
-            </a:pPr>
-            <a:r>
-              <a:rPr lang="en-US" sz="1220" dirty="0">
-                <a:solidFill>
-                  <a:srgbClr val="17364A"/>
-                </a:solidFill>
-                <a:latin typeface="Aptos" pitchFamily="34" charset="0"/>
-                <a:ea typeface="Aptos" pitchFamily="34" charset="-122"/>
-                <a:cs typeface="Aptos" pitchFamily="34" charset="-120"/>
-              </a:rPr>
-              <a:t>Learners should use this module to identify the issues that.</a:t>
-            </a:r>
-            <a:endParaRPr lang="en-US" sz="1220" dirty="0"/>
-          </a:p>
-        </p:txBody>
-      </p:sp>
-      <p:sp>
-        <p:nvSpPr>
-          <p:cNvPr id="16" name="Shape 14"/>
-          <p:cNvSpPr/>
-          <p:nvPr/>
-        </p:nvSpPr>
-        <p:spPr>
-          <a:xfrm>
-            <a:off x="7635240" y="4498848"/>
-            <a:ext cx="3474720" cy="1143000"/>
+            <a:pPr algn="ctr" indent="0" marL="0">
+              <a:buNone/>
+            </a:pPr>
+            <a:r>
+              <a:rPr lang="en-US" sz="880" b="1" dirty="0">
+                <a:solidFill>
+                  <a:srgbClr val="FFFFFF"/>
+                </a:solidFill>
+                <a:latin typeface="Aptos" pitchFamily="34" charset="0"/>
+                <a:ea typeface="Aptos" pitchFamily="34" charset="-122"/>
+                <a:cs typeface="Aptos" pitchFamily="34" charset="-120"/>
+              </a:rPr>
+              <a:t>Submit</a:t>
+            </a:r>
+            <a:endParaRPr lang="en-US" sz="880" dirty="0"/>
+          </a:p>
+        </p:txBody>
+      </p:sp>
+      <p:sp>
+        <p:nvSpPr>
+          <p:cNvPr id="18" name="Shape 16"/>
+          <p:cNvSpPr/>
+          <p:nvPr/>
+        </p:nvSpPr>
+        <p:spPr>
+          <a:xfrm>
+            <a:off x="9817608" y="3351276"/>
+            <a:ext cx="164592" cy="0"/>
+          </a:xfrm>
+          <a:prstGeom prst="line">
+            <a:avLst/>
+          </a:prstGeom>
+          <a:noFill/>
+          <a:ln w="15240">
+            <a:solidFill>
+              <a:srgbClr val="8ABBD8"/>
+            </a:solidFill>
+            <a:prstDash val="solid"/>
+          </a:ln>
+        </p:spPr>
+      </p:sp>
+      <p:sp>
+        <p:nvSpPr>
+          <p:cNvPr id="19" name="Shape 17"/>
+          <p:cNvSpPr/>
+          <p:nvPr/>
+        </p:nvSpPr>
+        <p:spPr>
+          <a:xfrm>
+            <a:off x="8927592" y="3200400"/>
+            <a:ext cx="890016" cy="301752"/>
           </a:xfrm>
           <a:prstGeom prst="roundRect">
             <a:avLst>
-              <a:gd name="adj" fmla="val 9600"/>
+              <a:gd name="adj" fmla="val 24242"/>
+            </a:avLst>
+          </a:prstGeom>
+          <a:solidFill>
+            <a:srgbClr val="2F8A28"/>
+          </a:solidFill>
+          <a:ln w="12700">
+            <a:solidFill>
+              <a:srgbClr val="2F8A28"/>
+            </a:solidFill>
+            <a:prstDash val="solid"/>
+          </a:ln>
+        </p:spPr>
+      </p:sp>
+      <p:sp>
+        <p:nvSpPr>
+          <p:cNvPr id="20" name="Text 18"/>
+          <p:cNvSpPr/>
+          <p:nvPr/>
+        </p:nvSpPr>
+        <p:spPr>
+          <a:xfrm>
+            <a:off x="8964168" y="3273552"/>
+            <a:ext cx="816864" cy="146304"/>
+          </a:xfrm>
+          <a:prstGeom prst="rect">
+            <a:avLst/>
+          </a:prstGeom>
+          <a:noFill/>
+          <a:ln/>
+        </p:spPr>
+        <p:txBody>
+          <a:bodyPr wrap="square" lIns="0" tIns="0" rIns="0" bIns="0" rtlCol="0" anchor="ctr">
+            <a:normAutofit/>
+          </a:bodyPr>
+          <a:lstStyle/>
+          <a:p>
+            <a:pPr algn="ctr" indent="0" marL="0">
+              <a:buNone/>
+            </a:pPr>
+            <a:r>
+              <a:rPr lang="en-US" sz="880" b="1" dirty="0">
+                <a:solidFill>
+                  <a:srgbClr val="FFFFFF"/>
+                </a:solidFill>
+                <a:latin typeface="Aptos" pitchFamily="34" charset="0"/>
+                <a:ea typeface="Aptos" pitchFamily="34" charset="-122"/>
+                <a:cs typeface="Aptos" pitchFamily="34" charset="-120"/>
+              </a:rPr>
+              <a:t>Review</a:t>
+            </a:r>
+            <a:endParaRPr lang="en-US" sz="880" dirty="0"/>
+          </a:p>
+        </p:txBody>
+      </p:sp>
+      <p:sp>
+        <p:nvSpPr>
+          <p:cNvPr id="21" name="Shape 19"/>
+          <p:cNvSpPr/>
+          <p:nvPr/>
+        </p:nvSpPr>
+        <p:spPr>
+          <a:xfrm>
+            <a:off x="9982200" y="3200400"/>
+            <a:ext cx="890016" cy="301752"/>
+          </a:xfrm>
+          <a:prstGeom prst="roundRect">
+            <a:avLst>
+              <a:gd name="adj" fmla="val 24242"/>
+            </a:avLst>
+          </a:prstGeom>
+          <a:solidFill>
+            <a:srgbClr val="6A4CA3"/>
+          </a:solidFill>
+          <a:ln w="12700">
+            <a:solidFill>
+              <a:srgbClr val="6A4CA3"/>
+            </a:solidFill>
+            <a:prstDash val="solid"/>
+          </a:ln>
+        </p:spPr>
+      </p:sp>
+      <p:sp>
+        <p:nvSpPr>
+          <p:cNvPr id="22" name="Text 20"/>
+          <p:cNvSpPr/>
+          <p:nvPr/>
+        </p:nvSpPr>
+        <p:spPr>
+          <a:xfrm>
+            <a:off x="10018776" y="3273552"/>
+            <a:ext cx="816864" cy="146304"/>
+          </a:xfrm>
+          <a:prstGeom prst="rect">
+            <a:avLst/>
+          </a:prstGeom>
+          <a:noFill/>
+          <a:ln/>
+        </p:spPr>
+        <p:txBody>
+          <a:bodyPr wrap="square" lIns="0" tIns="0" rIns="0" bIns="0" rtlCol="0" anchor="ctr">
+            <a:normAutofit/>
+          </a:bodyPr>
+          <a:lstStyle/>
+          <a:p>
+            <a:pPr algn="ctr" indent="0" marL="0">
+              <a:buNone/>
+            </a:pPr>
+            <a:r>
+              <a:rPr lang="en-US" sz="880" b="1" dirty="0">
+                <a:solidFill>
+                  <a:srgbClr val="FFFFFF"/>
+                </a:solidFill>
+                <a:latin typeface="Aptos" pitchFamily="34" charset="0"/>
+                <a:ea typeface="Aptos" pitchFamily="34" charset="-122"/>
+                <a:cs typeface="Aptos" pitchFamily="34" charset="-120"/>
+              </a:rPr>
+              <a:t>Oversee</a:t>
+            </a:r>
+            <a:endParaRPr lang="en-US" sz="880" dirty="0"/>
+          </a:p>
+        </p:txBody>
+      </p:sp>
+      <p:sp>
+        <p:nvSpPr>
+          <p:cNvPr id="23" name="Text 21"/>
+          <p:cNvSpPr/>
+          <p:nvPr/>
+        </p:nvSpPr>
+        <p:spPr>
+          <a:xfrm>
+            <a:off x="7854696" y="3694176"/>
+            <a:ext cx="3035808" cy="206654"/>
+          </a:xfrm>
+          <a:prstGeom prst="rect">
+            <a:avLst/>
+          </a:prstGeom>
+          <a:noFill/>
+          <a:ln/>
+        </p:spPr>
+        <p:txBody>
+          <a:bodyPr wrap="square" lIns="254" tIns="254" rIns="254" bIns="254" rtlCol="0" anchor="t">
+            <a:normAutofit/>
+          </a:bodyPr>
+          <a:lstStyle/>
+          <a:p>
+            <a:pPr indent="0" marL="0">
+              <a:buNone/>
+            </a:pPr>
+            <a:r>
+              <a:rPr lang="en-US" sz="1120" dirty="0">
+                <a:solidFill>
+                  <a:srgbClr val="17364A"/>
+                </a:solidFill>
+                <a:latin typeface="Aptos" pitchFamily="34" charset="0"/>
+                <a:ea typeface="Aptos" pitchFamily="34" charset="-122"/>
+                <a:cs typeface="Aptos" pitchFamily="34" charset="-120"/>
+              </a:rPr>
+              <a:t>A proposed AI use should move through documented review before it becomes an operational workflow.</a:t>
+            </a:r>
+            <a:endParaRPr lang="en-US" sz="1120" dirty="0"/>
+          </a:p>
+        </p:txBody>
+      </p:sp>
+      <p:sp>
+        <p:nvSpPr>
+          <p:cNvPr id="24" name="Shape 22"/>
+          <p:cNvSpPr/>
+          <p:nvPr/>
+        </p:nvSpPr>
+        <p:spPr>
+          <a:xfrm>
+            <a:off x="7635240" y="4184294"/>
+            <a:ext cx="3474720" cy="1466698"/>
+          </a:xfrm>
+          <a:prstGeom prst="roundRect">
+            <a:avLst>
+              <a:gd name="adj" fmla="val 7481"/>
             </a:avLst>
           </a:prstGeom>
           <a:solidFill>
@@ -16618,13 +17050,13 @@
       </p:sp>
       <p:sp>
         <p:nvSpPr>
-          <p:cNvPr id="17" name="Text 15"/>
-          <p:cNvSpPr/>
-          <p:nvPr/>
-        </p:nvSpPr>
-        <p:spPr>
-          <a:xfrm>
-            <a:off x="7799832" y="4645152"/>
+          <p:cNvPr id="25" name="Text 23"/>
+          <p:cNvSpPr/>
+          <p:nvPr/>
+        </p:nvSpPr>
+        <p:spPr>
+          <a:xfrm>
+            <a:off x="7799832" y="4330598"/>
             <a:ext cx="3145536" cy="256032"/>
           </a:xfrm>
           <a:prstGeom prst="rect">
@@ -16657,14 +17089,14 @@
       </p:sp>
       <p:sp>
         <p:nvSpPr>
-          <p:cNvPr id="18" name="Text 16"/>
-          <p:cNvSpPr/>
-          <p:nvPr/>
-        </p:nvSpPr>
-        <p:spPr>
-          <a:xfrm>
-            <a:off x="7799832" y="4974336"/>
-            <a:ext cx="3145536" cy="576072"/>
+          <p:cNvPr id="26" name="Text 24"/>
+          <p:cNvSpPr/>
+          <p:nvPr/>
+        </p:nvSpPr>
+        <p:spPr>
+          <a:xfrm>
+            <a:off x="7799832" y="4659782"/>
+            <a:ext cx="3145536" cy="899770"/>
           </a:xfrm>
           <a:prstGeom prst="rect">
             <a:avLst/>
@@ -16690,7 +17122,7 @@
                 <a:ea typeface="Aptos" pitchFamily="34" charset="-122"/>
                 <a:cs typeface="Aptos" pitchFamily="34" charset="-120"/>
               </a:rPr>
-              <a:t>Translate this concept into clear decision rights, review steps, documentation expectations, and escalation paths before.</a:t>
+              <a:t>Translate this concept into clear decision rights, review steps, documentation expectations, and escalation paths before an AI-supported workflow is approved.</a:t>
             </a:r>
             <a:endParaRPr lang="en-US" sz="1320" dirty="0"/>
           </a:p>
@@ -17059,11 +17491,11 @@
         <p:spPr>
           <a:xfrm>
             <a:off x="7635240" y="1325880"/>
-            <a:ext cx="3474720" cy="1325880"/>
+            <a:ext cx="3474720" cy="1255471"/>
           </a:xfrm>
           <a:prstGeom prst="roundRect">
             <a:avLst>
-              <a:gd name="adj" fmla="val 8276"/>
+              <a:gd name="adj" fmla="val 8740"/>
             </a:avLst>
           </a:prstGeom>
           <a:solidFill>
@@ -17125,7 +17557,7 @@
         <p:spPr>
           <a:xfrm>
             <a:off x="7799832" y="1801368"/>
-            <a:ext cx="3145536" cy="758952"/>
+            <a:ext cx="3145536" cy="688543"/>
           </a:xfrm>
           <a:prstGeom prst="rect">
             <a:avLst/>
@@ -17165,12 +17597,12 @@
         </p:nvSpPr>
         <p:spPr>
           <a:xfrm>
-            <a:off x="7635240" y="2788920"/>
-            <a:ext cx="3474720" cy="1536192"/>
+            <a:off x="7635240" y="2718511"/>
+            <a:ext cx="3474720" cy="1328623"/>
           </a:xfrm>
           <a:prstGeom prst="roundRect">
             <a:avLst>
-              <a:gd name="adj" fmla="val 7143"/>
+              <a:gd name="adj" fmla="val 8259"/>
             </a:avLst>
           </a:prstGeom>
           <a:solidFill>
@@ -17192,8 +17624,8 @@
         </p:nvSpPr>
         <p:spPr>
           <a:xfrm>
-            <a:off x="7799832" y="2935224"/>
-            <a:ext cx="3145536" cy="256032"/>
+            <a:off x="7799832" y="2846527"/>
+            <a:ext cx="3145536" cy="237744"/>
           </a:xfrm>
           <a:prstGeom prst="rect">
             <a:avLst/>
@@ -17209,7 +17641,7 @@
               <a:buNone/>
             </a:pPr>
             <a:r>
-              <a:rPr lang="en-US" sz="1300" b="1" dirty="0">
+              <a:rPr lang="en-US" sz="1250" b="1" dirty="0">
                 <a:solidFill>
                   <a:srgbClr val="0068B7"/>
                 </a:solidFill>
@@ -17217,101 +17649,317 @@
                 <a:ea typeface="Aptos" pitchFamily="34" charset="-122"/>
                 <a:cs typeface="Aptos" pitchFamily="34" charset="-120"/>
               </a:rPr>
-              <a:t>Concept checkpoints</a:t>
-            </a:r>
-            <a:endParaRPr lang="en-US" sz="1300" dirty="0"/>
-          </a:p>
-        </p:txBody>
-      </p:sp>
-      <p:sp>
-        <p:nvSpPr>
-          <p:cNvPr id="15" name="Text 13"/>
-          <p:cNvSpPr/>
-          <p:nvPr/>
-        </p:nvSpPr>
-        <p:spPr>
-          <a:xfrm>
-            <a:off x="7818120" y="3300984"/>
-            <a:ext cx="3090672" cy="877824"/>
-          </a:xfrm>
-          <a:prstGeom prst="rect">
-            <a:avLst/>
-          </a:prstGeom>
-          <a:noFill/>
-          <a:ln/>
-        </p:spPr>
-        <p:txBody>
-          <a:bodyPr wrap="square" lIns="508" tIns="508" rIns="508" bIns="508" rtlCol="0" anchor="t">
+              <a:t>Governance pathway</a:t>
+            </a:r>
+            <a:endParaRPr lang="en-US" sz="1250" dirty="0"/>
+          </a:p>
+        </p:txBody>
+      </p:sp>
+      <p:sp>
+        <p:nvSpPr>
+          <p:cNvPr id="15" name="Shape 13"/>
+          <p:cNvSpPr/>
+          <p:nvPr/>
+        </p:nvSpPr>
+        <p:spPr>
+          <a:xfrm>
+            <a:off x="8763000" y="3399739"/>
+            <a:ext cx="164592" cy="0"/>
+          </a:xfrm>
+          <a:prstGeom prst="line">
+            <a:avLst/>
+          </a:prstGeom>
+          <a:noFill/>
+          <a:ln w="15240">
+            <a:solidFill>
+              <a:srgbClr val="8ABBD8"/>
+            </a:solidFill>
+            <a:prstDash val="solid"/>
+          </a:ln>
+        </p:spPr>
+      </p:sp>
+      <p:sp>
+        <p:nvSpPr>
+          <p:cNvPr id="16" name="Shape 14"/>
+          <p:cNvSpPr/>
+          <p:nvPr/>
+        </p:nvSpPr>
+        <p:spPr>
+          <a:xfrm>
+            <a:off x="7872984" y="3248863"/>
+            <a:ext cx="890016" cy="301752"/>
+          </a:xfrm>
+          <a:prstGeom prst="roundRect">
+            <a:avLst>
+              <a:gd name="adj" fmla="val 24242"/>
+            </a:avLst>
+          </a:prstGeom>
+          <a:solidFill>
+            <a:srgbClr val="0068B7"/>
+          </a:solidFill>
+          <a:ln w="12700">
+            <a:solidFill>
+              <a:srgbClr val="0068B7"/>
+            </a:solidFill>
+            <a:prstDash val="solid"/>
+          </a:ln>
+        </p:spPr>
+      </p:sp>
+      <p:sp>
+        <p:nvSpPr>
+          <p:cNvPr id="17" name="Text 15"/>
+          <p:cNvSpPr/>
+          <p:nvPr/>
+        </p:nvSpPr>
+        <p:spPr>
+          <a:xfrm>
+            <a:off x="7909560" y="3322015"/>
+            <a:ext cx="816864" cy="146304"/>
+          </a:xfrm>
+          <a:prstGeom prst="rect">
+            <a:avLst/>
+          </a:prstGeom>
+          <a:noFill/>
+          <a:ln/>
+        </p:spPr>
+        <p:txBody>
+          <a:bodyPr wrap="square" lIns="0" tIns="0" rIns="0" bIns="0" rtlCol="0" anchor="ctr">
             <a:normAutofit/>
           </a:bodyPr>
           <a:lstStyle/>
           <a:p>
-            <a:pPr indent="0" marL="0">
-              <a:buNone/>
-            </a:pPr>
-            <a:r>
-              <a:rPr lang="en-US" sz="1220" dirty="0">
-                <a:solidFill>
-                  <a:srgbClr val="17364A"/>
-                </a:solidFill>
-                <a:latin typeface="Aptos" pitchFamily="34" charset="0"/>
-                <a:ea typeface="Aptos" pitchFamily="34" charset="-122"/>
-                <a:cs typeface="Aptos" pitchFamily="34" charset="-120"/>
-              </a:rPr>
-              <a:t>AI Policy Development and Approval Workflow matters because AI.</a:t>
-            </a:r>
-            <a:endParaRPr lang="en-US" sz="1220" dirty="0"/>
-          </a:p>
-          <a:p>
-            <a:pPr indent="0" marL="0">
-              <a:buNone/>
-            </a:pPr>
-            <a:r>
-              <a:rPr lang="en-US" sz="1220" dirty="0">
-                <a:solidFill>
-                  <a:srgbClr val="17364A"/>
-                </a:solidFill>
-                <a:latin typeface="Aptos" pitchFamily="34" charset="0"/>
-                <a:ea typeface="Aptos" pitchFamily="34" charset="-122"/>
-                <a:cs typeface="Aptos" pitchFamily="34" charset="-120"/>
-              </a:rPr>
-              <a:t>Without a structured approach, staff may rely on informal.</a:t>
-            </a:r>
-            <a:endParaRPr lang="en-US" sz="1220" dirty="0"/>
-          </a:p>
-          <a:p>
-            <a:pPr indent="0" marL="0">
-              <a:buNone/>
-            </a:pPr>
-            <a:r>
-              <a:rPr lang="en-US" sz="1220" dirty="0">
-                <a:solidFill>
-                  <a:srgbClr val="17364A"/>
-                </a:solidFill>
-                <a:latin typeface="Aptos" pitchFamily="34" charset="0"/>
-                <a:ea typeface="Aptos" pitchFamily="34" charset="-122"/>
-                <a:cs typeface="Aptos" pitchFamily="34" charset="-120"/>
-              </a:rPr>
-              <a:t>Public health agencies operate under legal authorities, public.</a:t>
-            </a:r>
-            <a:endParaRPr lang="en-US" sz="1220" dirty="0"/>
-          </a:p>
-        </p:txBody>
-      </p:sp>
-      <p:sp>
-        <p:nvSpPr>
-          <p:cNvPr id="16" name="Shape 14"/>
-          <p:cNvSpPr/>
-          <p:nvPr/>
-        </p:nvSpPr>
-        <p:spPr>
-          <a:xfrm>
-            <a:off x="7635240" y="4498848"/>
-            <a:ext cx="3474720" cy="1143000"/>
+            <a:pPr algn="ctr" indent="0" marL="0">
+              <a:buNone/>
+            </a:pPr>
+            <a:r>
+              <a:rPr lang="en-US" sz="880" b="1" dirty="0">
+                <a:solidFill>
+                  <a:srgbClr val="FFFFFF"/>
+                </a:solidFill>
+                <a:latin typeface="Aptos" pitchFamily="34" charset="0"/>
+                <a:ea typeface="Aptos" pitchFamily="34" charset="-122"/>
+                <a:cs typeface="Aptos" pitchFamily="34" charset="-120"/>
+              </a:rPr>
+              <a:t>Submit</a:t>
+            </a:r>
+            <a:endParaRPr lang="en-US" sz="880" dirty="0"/>
+          </a:p>
+        </p:txBody>
+      </p:sp>
+      <p:sp>
+        <p:nvSpPr>
+          <p:cNvPr id="18" name="Shape 16"/>
+          <p:cNvSpPr/>
+          <p:nvPr/>
+        </p:nvSpPr>
+        <p:spPr>
+          <a:xfrm>
+            <a:off x="9817608" y="3399739"/>
+            <a:ext cx="164592" cy="0"/>
+          </a:xfrm>
+          <a:prstGeom prst="line">
+            <a:avLst/>
+          </a:prstGeom>
+          <a:noFill/>
+          <a:ln w="15240">
+            <a:solidFill>
+              <a:srgbClr val="8ABBD8"/>
+            </a:solidFill>
+            <a:prstDash val="solid"/>
+          </a:ln>
+        </p:spPr>
+      </p:sp>
+      <p:sp>
+        <p:nvSpPr>
+          <p:cNvPr id="19" name="Shape 17"/>
+          <p:cNvSpPr/>
+          <p:nvPr/>
+        </p:nvSpPr>
+        <p:spPr>
+          <a:xfrm>
+            <a:off x="8927592" y="3248863"/>
+            <a:ext cx="890016" cy="301752"/>
           </a:xfrm>
           <a:prstGeom prst="roundRect">
             <a:avLst>
-              <a:gd name="adj" fmla="val 9600"/>
+              <a:gd name="adj" fmla="val 24242"/>
+            </a:avLst>
+          </a:prstGeom>
+          <a:solidFill>
+            <a:srgbClr val="2F8A28"/>
+          </a:solidFill>
+          <a:ln w="12700">
+            <a:solidFill>
+              <a:srgbClr val="2F8A28"/>
+            </a:solidFill>
+            <a:prstDash val="solid"/>
+          </a:ln>
+        </p:spPr>
+      </p:sp>
+      <p:sp>
+        <p:nvSpPr>
+          <p:cNvPr id="20" name="Text 18"/>
+          <p:cNvSpPr/>
+          <p:nvPr/>
+        </p:nvSpPr>
+        <p:spPr>
+          <a:xfrm>
+            <a:off x="8964168" y="3322015"/>
+            <a:ext cx="816864" cy="146304"/>
+          </a:xfrm>
+          <a:prstGeom prst="rect">
+            <a:avLst/>
+          </a:prstGeom>
+          <a:noFill/>
+          <a:ln/>
+        </p:spPr>
+        <p:txBody>
+          <a:bodyPr wrap="square" lIns="0" tIns="0" rIns="0" bIns="0" rtlCol="0" anchor="ctr">
+            <a:normAutofit/>
+          </a:bodyPr>
+          <a:lstStyle/>
+          <a:p>
+            <a:pPr algn="ctr" indent="0" marL="0">
+              <a:buNone/>
+            </a:pPr>
+            <a:r>
+              <a:rPr lang="en-US" sz="880" b="1" dirty="0">
+                <a:solidFill>
+                  <a:srgbClr val="FFFFFF"/>
+                </a:solidFill>
+                <a:latin typeface="Aptos" pitchFamily="34" charset="0"/>
+                <a:ea typeface="Aptos" pitchFamily="34" charset="-122"/>
+                <a:cs typeface="Aptos" pitchFamily="34" charset="-120"/>
+              </a:rPr>
+              <a:t>Review</a:t>
+            </a:r>
+            <a:endParaRPr lang="en-US" sz="880" dirty="0"/>
+          </a:p>
+        </p:txBody>
+      </p:sp>
+      <p:sp>
+        <p:nvSpPr>
+          <p:cNvPr id="21" name="Shape 19"/>
+          <p:cNvSpPr/>
+          <p:nvPr/>
+        </p:nvSpPr>
+        <p:spPr>
+          <a:xfrm>
+            <a:off x="9982200" y="3248863"/>
+            <a:ext cx="890016" cy="301752"/>
+          </a:xfrm>
+          <a:prstGeom prst="roundRect">
+            <a:avLst>
+              <a:gd name="adj" fmla="val 24242"/>
+            </a:avLst>
+          </a:prstGeom>
+          <a:solidFill>
+            <a:srgbClr val="6A4CA3"/>
+          </a:solidFill>
+          <a:ln w="12700">
+            <a:solidFill>
+              <a:srgbClr val="6A4CA3"/>
+            </a:solidFill>
+            <a:prstDash val="solid"/>
+          </a:ln>
+        </p:spPr>
+      </p:sp>
+      <p:sp>
+        <p:nvSpPr>
+          <p:cNvPr id="22" name="Text 20"/>
+          <p:cNvSpPr/>
+          <p:nvPr/>
+        </p:nvSpPr>
+        <p:spPr>
+          <a:xfrm>
+            <a:off x="10018776" y="3322015"/>
+            <a:ext cx="816864" cy="146304"/>
+          </a:xfrm>
+          <a:prstGeom prst="rect">
+            <a:avLst/>
+          </a:prstGeom>
+          <a:noFill/>
+          <a:ln/>
+        </p:spPr>
+        <p:txBody>
+          <a:bodyPr wrap="square" lIns="0" tIns="0" rIns="0" bIns="0" rtlCol="0" anchor="ctr">
+            <a:normAutofit/>
+          </a:bodyPr>
+          <a:lstStyle/>
+          <a:p>
+            <a:pPr algn="ctr" indent="0" marL="0">
+              <a:buNone/>
+            </a:pPr>
+            <a:r>
+              <a:rPr lang="en-US" sz="880" b="1" dirty="0">
+                <a:solidFill>
+                  <a:srgbClr val="FFFFFF"/>
+                </a:solidFill>
+                <a:latin typeface="Aptos" pitchFamily="34" charset="0"/>
+                <a:ea typeface="Aptos" pitchFamily="34" charset="-122"/>
+                <a:cs typeface="Aptos" pitchFamily="34" charset="-120"/>
+              </a:rPr>
+              <a:t>Oversee</a:t>
+            </a:r>
+            <a:endParaRPr lang="en-US" sz="880" dirty="0"/>
+          </a:p>
+        </p:txBody>
+      </p:sp>
+      <p:sp>
+        <p:nvSpPr>
+          <p:cNvPr id="23" name="Text 21"/>
+          <p:cNvSpPr/>
+          <p:nvPr/>
+        </p:nvSpPr>
+        <p:spPr>
+          <a:xfrm>
+            <a:off x="7854696" y="3742639"/>
+            <a:ext cx="3035808" cy="158191"/>
+          </a:xfrm>
+          <a:prstGeom prst="rect">
+            <a:avLst/>
+          </a:prstGeom>
+          <a:noFill/>
+          <a:ln/>
+        </p:spPr>
+        <p:txBody>
+          <a:bodyPr wrap="square" lIns="254" tIns="254" rIns="254" bIns="254" rtlCol="0" anchor="t">
+            <a:normAutofit/>
+          </a:bodyPr>
+          <a:lstStyle/>
+          <a:p>
+            <a:pPr indent="0" marL="0">
+              <a:buNone/>
+            </a:pPr>
+            <a:r>
+              <a:rPr lang="en-US" sz="1120" dirty="0">
+                <a:solidFill>
+                  <a:srgbClr val="17364A"/>
+                </a:solidFill>
+                <a:latin typeface="Aptos" pitchFamily="34" charset="0"/>
+                <a:ea typeface="Aptos" pitchFamily="34" charset="-122"/>
+                <a:cs typeface="Aptos" pitchFamily="34" charset="-120"/>
+              </a:rPr>
+              <a:t>A proposed AI use should move through documented review before it becomes an operational workflow.</a:t>
+            </a:r>
+            <a:endParaRPr lang="en-US" sz="1120" dirty="0"/>
+          </a:p>
+        </p:txBody>
+      </p:sp>
+      <p:sp>
+        <p:nvSpPr>
+          <p:cNvPr id="24" name="Shape 22"/>
+          <p:cNvSpPr/>
+          <p:nvPr/>
+        </p:nvSpPr>
+        <p:spPr>
+          <a:xfrm>
+            <a:off x="7635240" y="4184294"/>
+            <a:ext cx="3474720" cy="1466698"/>
+          </a:xfrm>
+          <a:prstGeom prst="roundRect">
+            <a:avLst>
+              <a:gd name="adj" fmla="val 7481"/>
             </a:avLst>
           </a:prstGeom>
           <a:solidFill>
@@ -17327,13 +17975,13 @@
       </p:sp>
       <p:sp>
         <p:nvSpPr>
-          <p:cNvPr id="17" name="Text 15"/>
-          <p:cNvSpPr/>
-          <p:nvPr/>
-        </p:nvSpPr>
-        <p:spPr>
-          <a:xfrm>
-            <a:off x="7799832" y="4645152"/>
+          <p:cNvPr id="25" name="Text 23"/>
+          <p:cNvSpPr/>
+          <p:nvPr/>
+        </p:nvSpPr>
+        <p:spPr>
+          <a:xfrm>
+            <a:off x="7799832" y="4330598"/>
             <a:ext cx="3145536" cy="256032"/>
           </a:xfrm>
           <a:prstGeom prst="rect">
@@ -17366,14 +18014,14 @@
       </p:sp>
       <p:sp>
         <p:nvSpPr>
-          <p:cNvPr id="18" name="Text 16"/>
-          <p:cNvSpPr/>
-          <p:nvPr/>
-        </p:nvSpPr>
-        <p:spPr>
-          <a:xfrm>
-            <a:off x="7799832" y="4974336"/>
-            <a:ext cx="3145536" cy="576072"/>
+          <p:cNvPr id="26" name="Text 24"/>
+          <p:cNvSpPr/>
+          <p:nvPr/>
+        </p:nvSpPr>
+        <p:spPr>
+          <a:xfrm>
+            <a:off x="7799832" y="4659782"/>
+            <a:ext cx="3145536" cy="899770"/>
           </a:xfrm>
           <a:prstGeom prst="rect">
             <a:avLst/>
@@ -17399,7 +18047,7 @@
                 <a:ea typeface="Aptos" pitchFamily="34" charset="-122"/>
                 <a:cs typeface="Aptos" pitchFamily="34" charset="-120"/>
               </a:rPr>
-              <a:t>Translate this concept into clear decision rights, review steps, documentation expectations, and escalation paths before.</a:t>
+              <a:t>Translate this concept into clear decision rights, review steps, documentation expectations, and escalation paths before an AI-supported workflow is approved.</a:t>
             </a:r>
             <a:endParaRPr lang="en-US" sz="1320" dirty="0"/>
           </a:p>

--- a/downloads/presentations/modules/pol-310.pptx
+++ b/downloads/presentations/modules/pol-310.pptx
@@ -3345,8 +3345,8 @@
         </p:nvSpPr>
         <p:spPr>
           <a:xfrm>
-            <a:off x="868680" y="1508760"/>
-            <a:ext cx="6309360" cy="4160520"/>
+            <a:off x="822960" y="1463040"/>
+            <a:ext cx="6565392" cy="4343400"/>
           </a:xfrm>
           <a:prstGeom prst="rect">
             <a:avLst/>
@@ -3364,7 +3364,7 @@
               <a:buNone/>
             </a:pPr>
             <a:r>
-              <a:rPr lang="en-US" sz="2100" dirty="0">
+              <a:rPr lang="en-US" sz="1920" dirty="0">
                 <a:solidFill>
                   <a:srgbClr val="003A63"/>
                 </a:solidFill>
@@ -3372,16 +3372,16 @@
                 <a:ea typeface="Aptos" pitchFamily="34" charset="-122"/>
                 <a:cs typeface="Aptos" pitchFamily="34" charset="-120"/>
               </a:rPr>
-              <a:t>• A public health agency is preparing to use AI in a workflow related to creating, approving,.</a:t>
-            </a:r>
-            <a:endParaRPr lang="en-US" sz="2100" dirty="0"/>
-          </a:p>
-          <a:p>
-            <a:pPr indent="0" marL="0">
-              <a:buNone/>
-            </a:pPr>
-            <a:r>
-              <a:rPr lang="en-US" sz="2100" dirty="0">
+              <a:t>• A public health agency is preparing to use AI in a workflow related to.</a:t>
+            </a:r>
+            <a:endParaRPr lang="en-US" sz="1920" dirty="0"/>
+          </a:p>
+          <a:p>
+            <a:pPr indent="0" marL="0">
+              <a:buNone/>
+            </a:pPr>
+            <a:r>
+              <a:rPr lang="en-US" sz="1920" dirty="0">
                 <a:solidFill>
                   <a:srgbClr val="003A63"/>
                 </a:solidFill>
@@ -3389,16 +3389,16 @@
                 <a:ea typeface="Aptos" pitchFamily="34" charset="-122"/>
                 <a:cs typeface="Aptos" pitchFamily="34" charset="-120"/>
               </a:rPr>
-              <a:t>• The project team initially treats the tool as a helpful efficiency aid, but governance.</a:t>
-            </a:r>
-            <a:endParaRPr lang="en-US" sz="2100" dirty="0"/>
-          </a:p>
-          <a:p>
-            <a:pPr indent="0" marL="0">
-              <a:buNone/>
-            </a:pPr>
-            <a:r>
-              <a:rPr lang="en-US" sz="2100" dirty="0">
+              <a:t>• The project team initially treats the tool as a helpful efficiency aid, but.</a:t>
+            </a:r>
+            <a:endParaRPr lang="en-US" sz="1920" dirty="0"/>
+          </a:p>
+          <a:p>
+            <a:pPr indent="0" marL="0">
+              <a:buNone/>
+            </a:pPr>
+            <a:r>
+              <a:rPr lang="en-US" sz="1920" dirty="0">
                 <a:solidFill>
                   <a:srgbClr val="003A63"/>
                 </a:solidFill>
@@ -3406,9 +3406,9 @@
                 <a:ea typeface="Aptos" pitchFamily="34" charset="-122"/>
                 <a:cs typeface="Aptos" pitchFamily="34" charset="-120"/>
               </a:rPr>
-              <a:t>• The agency responds by creating a clear artifact that defines intended use, prohibited use,.</a:t>
-            </a:r>
-            <a:endParaRPr lang="en-US" sz="2100" dirty="0"/>
+              <a:t>• The agency responds by creating a clear artifact that defines intended use,.</a:t>
+            </a:r>
+            <a:endParaRPr lang="en-US" sz="1920" dirty="0"/>
           </a:p>
         </p:txBody>
       </p:sp>
@@ -3420,12 +3420,12 @@
         </p:nvSpPr>
         <p:spPr>
           <a:xfrm>
-            <a:off x="7635240" y="1325880"/>
-            <a:ext cx="3474720" cy="1207008"/>
+            <a:off x="7543800" y="1325880"/>
+            <a:ext cx="3611880" cy="1261872"/>
           </a:xfrm>
           <a:prstGeom prst="roundRect">
             <a:avLst>
-              <a:gd name="adj" fmla="val 9091"/>
+              <a:gd name="adj" fmla="val 8696"/>
             </a:avLst>
           </a:prstGeom>
           <a:solidFill>
@@ -3447,8 +3447,8 @@
         </p:nvSpPr>
         <p:spPr>
           <a:xfrm>
-            <a:off x="7799832" y="1472184"/>
-            <a:ext cx="3145536" cy="256032"/>
+            <a:off x="7708392" y="1453896"/>
+            <a:ext cx="3282696" cy="228600"/>
           </a:xfrm>
           <a:prstGeom prst="rect">
             <a:avLst/>
@@ -3464,7 +3464,7 @@
               <a:buNone/>
             </a:pPr>
             <a:r>
-              <a:rPr lang="en-US" sz="1300" b="1" dirty="0">
+              <a:rPr lang="en-US" sz="1220" b="1" dirty="0">
                 <a:solidFill>
                   <a:srgbClr val="0068B7"/>
                 </a:solidFill>
@@ -3474,7 +3474,7 @@
               </a:rPr>
               <a:t>Governance lens</a:t>
             </a:r>
-            <a:endParaRPr lang="en-US" sz="1300" dirty="0"/>
+            <a:endParaRPr lang="en-US" sz="1220" dirty="0"/>
           </a:p>
         </p:txBody>
       </p:sp>
@@ -3486,8 +3486,8 @@
         </p:nvSpPr>
         <p:spPr>
           <a:xfrm>
-            <a:off x="7799832" y="1801368"/>
-            <a:ext cx="3145536" cy="640080"/>
+            <a:off x="7708392" y="1764792"/>
+            <a:ext cx="3282696" cy="749808"/>
           </a:xfrm>
           <a:prstGeom prst="rect">
             <a:avLst/>
@@ -3505,7 +3505,7 @@
               <a:buNone/>
             </a:pPr>
             <a:r>
-              <a:rPr lang="en-US" sz="1320" dirty="0">
+              <a:rPr lang="en-US" sz="1220" dirty="0">
                 <a:solidFill>
                   <a:srgbClr val="17364A"/>
                 </a:solidFill>
@@ -3515,7 +3515,7 @@
               </a:rPr>
               <a:t>A public health agency is preparing to use AI in a workflow related to creating,.</a:t>
             </a:r>
-            <a:endParaRPr lang="en-US" sz="1320" dirty="0"/>
+            <a:endParaRPr lang="en-US" sz="1220" dirty="0"/>
           </a:p>
         </p:txBody>
       </p:sp>
@@ -3527,12 +3527,12 @@
         </p:nvSpPr>
         <p:spPr>
           <a:xfrm>
-            <a:off x="7635240" y="2670048"/>
-            <a:ext cx="3474720" cy="1377086"/>
+            <a:off x="7543800" y="2724912"/>
+            <a:ext cx="3611880" cy="1527048"/>
           </a:xfrm>
           <a:prstGeom prst="roundRect">
             <a:avLst>
-              <a:gd name="adj" fmla="val 7968"/>
+              <a:gd name="adj" fmla="val 7186"/>
             </a:avLst>
           </a:prstGeom>
           <a:solidFill>
@@ -3554,8 +3554,8 @@
         </p:nvSpPr>
         <p:spPr>
           <a:xfrm>
-            <a:off x="7799832" y="2816352"/>
-            <a:ext cx="3145536" cy="256032"/>
+            <a:off x="7708392" y="2852928"/>
+            <a:ext cx="3282696" cy="228600"/>
           </a:xfrm>
           <a:prstGeom prst="rect">
             <a:avLst/>
@@ -3571,7 +3571,7 @@
               <a:buNone/>
             </a:pPr>
             <a:r>
-              <a:rPr lang="en-US" sz="1300" b="1" dirty="0">
+              <a:rPr lang="en-US" sz="1220" b="1" dirty="0">
                 <a:solidFill>
                   <a:srgbClr val="0068B7"/>
                 </a:solidFill>
@@ -3581,7 +3581,7 @@
               </a:rPr>
               <a:t>Concept checkpoints</a:t>
             </a:r>
-            <a:endParaRPr lang="en-US" sz="1300" dirty="0"/>
+            <a:endParaRPr lang="en-US" sz="1220" dirty="0"/>
           </a:p>
         </p:txBody>
       </p:sp>
@@ -3593,8 +3593,8 @@
         </p:nvSpPr>
         <p:spPr>
           <a:xfrm>
-            <a:off x="7818120" y="3182112"/>
-            <a:ext cx="3090672" cy="718718"/>
+            <a:off x="7726680" y="3182112"/>
+            <a:ext cx="3227832" cy="960120"/>
           </a:xfrm>
           <a:prstGeom prst="rect">
             <a:avLst/>
@@ -3612,7 +3612,7 @@
               <a:buNone/>
             </a:pPr>
             <a:r>
-              <a:rPr lang="en-US" sz="1220" dirty="0">
+              <a:rPr lang="en-US" sz="1140" dirty="0">
                 <a:solidFill>
                   <a:srgbClr val="17364A"/>
                 </a:solidFill>
@@ -3620,16 +3620,16 @@
                 <a:ea typeface="Aptos" pitchFamily="34" charset="-122"/>
                 <a:cs typeface="Aptos" pitchFamily="34" charset="-120"/>
               </a:rPr>
-              <a:t>A public health agency is preparing to use AI in a workflow.</a:t>
-            </a:r>
-            <a:endParaRPr lang="en-US" sz="1220" dirty="0"/>
-          </a:p>
-          <a:p>
-            <a:pPr indent="0" marL="0">
-              <a:buNone/>
-            </a:pPr>
-            <a:r>
-              <a:rPr lang="en-US" sz="1220" dirty="0">
+              <a:t>A public health agency is preparing to use AI in a.</a:t>
+            </a:r>
+            <a:endParaRPr lang="en-US" sz="1140" dirty="0"/>
+          </a:p>
+          <a:p>
+            <a:pPr indent="0" marL="0">
+              <a:buNone/>
+            </a:pPr>
+            <a:r>
+              <a:rPr lang="en-US" sz="1140" dirty="0">
                 <a:solidFill>
                   <a:srgbClr val="17364A"/>
                 </a:solidFill>
@@ -3637,16 +3637,16 @@
                 <a:ea typeface="Aptos" pitchFamily="34" charset="-122"/>
                 <a:cs typeface="Aptos" pitchFamily="34" charset="-120"/>
               </a:rPr>
-              <a:t>The project team initially treats the tool as a helpful efficiency.</a:t>
-            </a:r>
-            <a:endParaRPr lang="en-US" sz="1220" dirty="0"/>
-          </a:p>
-          <a:p>
-            <a:pPr indent="0" marL="0">
-              <a:buNone/>
-            </a:pPr>
-            <a:r>
-              <a:rPr lang="en-US" sz="1220" dirty="0">
+              <a:t>The project team initially treats the tool as a.</a:t>
+            </a:r>
+            <a:endParaRPr lang="en-US" sz="1140" dirty="0"/>
+          </a:p>
+          <a:p>
+            <a:pPr indent="0" marL="0">
+              <a:buNone/>
+            </a:pPr>
+            <a:r>
+              <a:rPr lang="en-US" sz="1140" dirty="0">
                 <a:solidFill>
                   <a:srgbClr val="17364A"/>
                 </a:solidFill>
@@ -3654,9 +3654,9 @@
                 <a:ea typeface="Aptos" pitchFamily="34" charset="-122"/>
                 <a:cs typeface="Aptos" pitchFamily="34" charset="-120"/>
               </a:rPr>
-              <a:t>The agency responds by creating a clear artifact that defines.</a:t>
-            </a:r>
-            <a:endParaRPr lang="en-US" sz="1220" dirty="0"/>
+              <a:t>The agency responds by creating a clear artifact.</a:t>
+            </a:r>
+            <a:endParaRPr lang="en-US" sz="1140" dirty="0"/>
           </a:p>
         </p:txBody>
       </p:sp>
@@ -3668,12 +3668,12 @@
         </p:nvSpPr>
         <p:spPr>
           <a:xfrm>
-            <a:off x="7635240" y="4184294"/>
-            <a:ext cx="3474720" cy="1466698"/>
+            <a:off x="7543800" y="4389120"/>
+            <a:ext cx="3611880" cy="1261872"/>
           </a:xfrm>
           <a:prstGeom prst="roundRect">
             <a:avLst>
-              <a:gd name="adj" fmla="val 7481"/>
+              <a:gd name="adj" fmla="val 8696"/>
             </a:avLst>
           </a:prstGeom>
           <a:solidFill>
@@ -3695,8 +3695,8 @@
         </p:nvSpPr>
         <p:spPr>
           <a:xfrm>
-            <a:off x="7799832" y="4330598"/>
-            <a:ext cx="3145536" cy="256032"/>
+            <a:off x="7708392" y="4517136"/>
+            <a:ext cx="3282696" cy="228600"/>
           </a:xfrm>
           <a:prstGeom prst="rect">
             <a:avLst/>
@@ -3712,7 +3712,7 @@
               <a:buNone/>
             </a:pPr>
             <a:r>
-              <a:rPr lang="en-US" sz="1300" b="1" dirty="0">
+              <a:rPr lang="en-US" sz="1220" b="1" dirty="0">
                 <a:solidFill>
                   <a:srgbClr val="0068B7"/>
                 </a:solidFill>
@@ -3722,7 +3722,7 @@
               </a:rPr>
               <a:t>What to document</a:t>
             </a:r>
-            <a:endParaRPr lang="en-US" sz="1300" dirty="0"/>
+            <a:endParaRPr lang="en-US" sz="1220" dirty="0"/>
           </a:p>
         </p:txBody>
       </p:sp>
@@ -3734,8 +3734,8 @@
         </p:nvSpPr>
         <p:spPr>
           <a:xfrm>
-            <a:off x="7799832" y="4659782"/>
-            <a:ext cx="3145536" cy="899770"/>
+            <a:off x="7708392" y="4828032"/>
+            <a:ext cx="3282696" cy="749808"/>
           </a:xfrm>
           <a:prstGeom prst="rect">
             <a:avLst/>
@@ -3753,7 +3753,7 @@
               <a:buNone/>
             </a:pPr>
             <a:r>
-              <a:rPr lang="en-US" sz="1320" dirty="0">
+              <a:rPr lang="en-US" sz="1220" dirty="0">
                 <a:solidFill>
                   <a:srgbClr val="17364A"/>
                 </a:solidFill>
@@ -3761,9 +3761,9 @@
                 <a:ea typeface="Aptos" pitchFamily="34" charset="-122"/>
                 <a:cs typeface="Aptos" pitchFamily="34" charset="-120"/>
               </a:rPr>
-              <a:t>Translate this concept into clear decision rights, review steps, documentation expectations, and escalation paths before an AI-supported workflow is approved.</a:t>
-            </a:r>
-            <a:endParaRPr lang="en-US" sz="1320" dirty="0"/>
+              <a:t>Translate this concept into clear decision rights, review steps, documentation.</a:t>
+            </a:r>
+            <a:endParaRPr lang="en-US" sz="1220" dirty="0"/>
           </a:p>
         </p:txBody>
       </p:sp>
@@ -4054,8 +4054,8 @@
         </p:nvSpPr>
         <p:spPr>
           <a:xfrm>
-            <a:off x="868680" y="1508760"/>
-            <a:ext cx="6309360" cy="4160520"/>
+            <a:off x="822960" y="1463040"/>
+            <a:ext cx="6565392" cy="4343400"/>
           </a:xfrm>
           <a:prstGeom prst="rect">
             <a:avLst/>
@@ -4073,7 +4073,7 @@
               <a:buNone/>
             </a:pPr>
             <a:r>
-              <a:rPr lang="en-US" sz="2100" dirty="0">
+              <a:rPr lang="en-US" sz="1920" dirty="0">
                 <a:solidFill>
                   <a:srgbClr val="003A63"/>
                 </a:solidFill>
@@ -4083,14 +4083,14 @@
               </a:rPr>
               <a:t>• The first step in this topic is to define the decision or workflow clearly.</a:t>
             </a:r>
-            <a:endParaRPr lang="en-US" sz="2100" dirty="0"/>
-          </a:p>
-          <a:p>
-            <a:pPr indent="0" marL="0">
-              <a:buNone/>
-            </a:pPr>
-            <a:r>
-              <a:rPr lang="en-US" sz="2100" dirty="0">
+            <a:endParaRPr lang="en-US" sz="1920" dirty="0"/>
+          </a:p>
+          <a:p>
+            <a:pPr indent="0" marL="0">
+              <a:buNone/>
+            </a:pPr>
+            <a:r>
+              <a:rPr lang="en-US" sz="1920" dirty="0">
                 <a:solidFill>
                   <a:srgbClr val="003A63"/>
                 </a:solidFill>
@@ -4098,16 +4098,16 @@
                 <a:ea typeface="Aptos" pitchFamily="34" charset="-122"/>
                 <a:cs typeface="Aptos" pitchFamily="34" charset="-120"/>
               </a:rPr>
-              <a:t>• Staff should identify who is affected, what data are used, what AI output is produced, who.</a:t>
-            </a:r>
-            <a:endParaRPr lang="en-US" sz="2100" dirty="0"/>
-          </a:p>
-          <a:p>
-            <a:pPr indent="0" marL="0">
-              <a:buNone/>
-            </a:pPr>
-            <a:r>
-              <a:rPr lang="en-US" sz="2100" dirty="0">
+              <a:t>• Staff should identify who is affected, what data are used, what AI output is.</a:t>
+            </a:r>
+            <a:endParaRPr lang="en-US" sz="1920" dirty="0"/>
+          </a:p>
+          <a:p>
+            <a:pPr indent="0" marL="0">
+              <a:buNone/>
+            </a:pPr>
+            <a:r>
+              <a:rPr lang="en-US" sz="1920" dirty="0">
                 <a:solidFill>
                   <a:srgbClr val="003A63"/>
                 </a:solidFill>
@@ -4115,9 +4115,9 @@
                 <a:ea typeface="Aptos" pitchFamily="34" charset="-122"/>
                 <a:cs typeface="Aptos" pitchFamily="34" charset="-120"/>
               </a:rPr>
-              <a:t>• This prevents the module from becoming abstract and anchors the work in public health practice.</a:t>
-            </a:r>
-            <a:endParaRPr lang="en-US" sz="2100" dirty="0"/>
+              <a:t>• This prevents the module from becoming abstract and anchors the work in.</a:t>
+            </a:r>
+            <a:endParaRPr lang="en-US" sz="1920" dirty="0"/>
           </a:p>
         </p:txBody>
       </p:sp>
@@ -4129,12 +4129,12 @@
         </p:nvSpPr>
         <p:spPr>
           <a:xfrm>
-            <a:off x="7635240" y="1325880"/>
-            <a:ext cx="3474720" cy="1207008"/>
+            <a:off x="7543800" y="1325880"/>
+            <a:ext cx="3611880" cy="1261872"/>
           </a:xfrm>
           <a:prstGeom prst="roundRect">
             <a:avLst>
-              <a:gd name="adj" fmla="val 9091"/>
+              <a:gd name="adj" fmla="val 8696"/>
             </a:avLst>
           </a:prstGeom>
           <a:solidFill>
@@ -4156,8 +4156,8 @@
         </p:nvSpPr>
         <p:spPr>
           <a:xfrm>
-            <a:off x="7799832" y="1472184"/>
-            <a:ext cx="3145536" cy="256032"/>
+            <a:off x="7708392" y="1453896"/>
+            <a:ext cx="3282696" cy="228600"/>
           </a:xfrm>
           <a:prstGeom prst="rect">
             <a:avLst/>
@@ -4173,7 +4173,7 @@
               <a:buNone/>
             </a:pPr>
             <a:r>
-              <a:rPr lang="en-US" sz="1300" b="1" dirty="0">
+              <a:rPr lang="en-US" sz="1220" b="1" dirty="0">
                 <a:solidFill>
                   <a:srgbClr val="0068B7"/>
                 </a:solidFill>
@@ -4183,7 +4183,7 @@
               </a:rPr>
               <a:t>Governance lens</a:t>
             </a:r>
-            <a:endParaRPr lang="en-US" sz="1300" dirty="0"/>
+            <a:endParaRPr lang="en-US" sz="1220" dirty="0"/>
           </a:p>
         </p:txBody>
       </p:sp>
@@ -4195,8 +4195,8 @@
         </p:nvSpPr>
         <p:spPr>
           <a:xfrm>
-            <a:off x="7799832" y="1801368"/>
-            <a:ext cx="3145536" cy="640080"/>
+            <a:off x="7708392" y="1764792"/>
+            <a:ext cx="3282696" cy="749808"/>
           </a:xfrm>
           <a:prstGeom prst="rect">
             <a:avLst/>
@@ -4214,7 +4214,7 @@
               <a:buNone/>
             </a:pPr>
             <a:r>
-              <a:rPr lang="en-US" sz="1320" dirty="0">
+              <a:rPr lang="en-US" sz="1220" dirty="0">
                 <a:solidFill>
                   <a:srgbClr val="17364A"/>
                 </a:solidFill>
@@ -4224,7 +4224,7 @@
               </a:rPr>
               <a:t>The first step in this topic is to define the decision or workflow clearly.</a:t>
             </a:r>
-            <a:endParaRPr lang="en-US" sz="1320" dirty="0"/>
+            <a:endParaRPr lang="en-US" sz="1220" dirty="0"/>
           </a:p>
         </p:txBody>
       </p:sp>
@@ -4236,12 +4236,12 @@
         </p:nvSpPr>
         <p:spPr>
           <a:xfrm>
-            <a:off x="7635240" y="2670048"/>
-            <a:ext cx="3474720" cy="1377086"/>
+            <a:off x="7543800" y="2724912"/>
+            <a:ext cx="3611880" cy="1527048"/>
           </a:xfrm>
           <a:prstGeom prst="roundRect">
             <a:avLst>
-              <a:gd name="adj" fmla="val 7968"/>
+              <a:gd name="adj" fmla="val 7186"/>
             </a:avLst>
           </a:prstGeom>
           <a:solidFill>
@@ -4263,8 +4263,8 @@
         </p:nvSpPr>
         <p:spPr>
           <a:xfrm>
-            <a:off x="7799832" y="2816352"/>
-            <a:ext cx="3145536" cy="256032"/>
+            <a:off x="7708392" y="2852928"/>
+            <a:ext cx="3282696" cy="228600"/>
           </a:xfrm>
           <a:prstGeom prst="rect">
             <a:avLst/>
@@ -4280,7 +4280,7 @@
               <a:buNone/>
             </a:pPr>
             <a:r>
-              <a:rPr lang="en-US" sz="1300" b="1" dirty="0">
+              <a:rPr lang="en-US" sz="1220" b="1" dirty="0">
                 <a:solidFill>
                   <a:srgbClr val="0068B7"/>
                 </a:solidFill>
@@ -4290,7 +4290,7 @@
               </a:rPr>
               <a:t>Concept checkpoints</a:t>
             </a:r>
-            <a:endParaRPr lang="en-US" sz="1300" dirty="0"/>
+            <a:endParaRPr lang="en-US" sz="1220" dirty="0"/>
           </a:p>
         </p:txBody>
       </p:sp>
@@ -4302,8 +4302,8 @@
         </p:nvSpPr>
         <p:spPr>
           <a:xfrm>
-            <a:off x="7818120" y="3182112"/>
-            <a:ext cx="3090672" cy="718718"/>
+            <a:off x="7726680" y="3182112"/>
+            <a:ext cx="3227832" cy="960120"/>
           </a:xfrm>
           <a:prstGeom prst="rect">
             <a:avLst/>
@@ -4321,7 +4321,7 @@
               <a:buNone/>
             </a:pPr>
             <a:r>
-              <a:rPr lang="en-US" sz="1220" dirty="0">
+              <a:rPr lang="en-US" sz="1140" dirty="0">
                 <a:solidFill>
                   <a:srgbClr val="17364A"/>
                 </a:solidFill>
@@ -4329,16 +4329,16 @@
                 <a:ea typeface="Aptos" pitchFamily="34" charset="-122"/>
                 <a:cs typeface="Aptos" pitchFamily="34" charset="-120"/>
               </a:rPr>
-              <a:t>Staff should identify who is affected, what data are used, what AI.</a:t>
-            </a:r>
-            <a:endParaRPr lang="en-US" sz="1220" dirty="0"/>
-          </a:p>
-          <a:p>
-            <a:pPr indent="0" marL="0">
-              <a:buNone/>
-            </a:pPr>
-            <a:r>
-              <a:rPr lang="en-US" sz="1220" dirty="0">
+              <a:t>Staff should identify who is affected, what data.</a:t>
+            </a:r>
+            <a:endParaRPr lang="en-US" sz="1140" dirty="0"/>
+          </a:p>
+          <a:p>
+            <a:pPr indent="0" marL="0">
+              <a:buNone/>
+            </a:pPr>
+            <a:r>
+              <a:rPr lang="en-US" sz="1140" dirty="0">
                 <a:solidFill>
                   <a:srgbClr val="17364A"/>
                 </a:solidFill>
@@ -4348,14 +4348,14 @@
               </a:rPr>
               <a:t>The second step is to assign responsibilities.</a:t>
             </a:r>
-            <a:endParaRPr lang="en-US" sz="1220" dirty="0"/>
-          </a:p>
-          <a:p>
-            <a:pPr indent="0" marL="0">
-              <a:buNone/>
-            </a:pPr>
-            <a:r>
-              <a:rPr lang="en-US" sz="1220" dirty="0">
+            <a:endParaRPr lang="en-US" sz="1140" dirty="0"/>
+          </a:p>
+          <a:p>
+            <a:pPr indent="0" marL="0">
+              <a:buNone/>
+            </a:pPr>
+            <a:r>
+              <a:rPr lang="en-US" sz="1140" dirty="0">
                 <a:solidFill>
                   <a:srgbClr val="17364A"/>
                 </a:solidFill>
@@ -4363,9 +4363,9 @@
                 <a:ea typeface="Aptos" pitchFamily="34" charset="-122"/>
                 <a:cs typeface="Aptos" pitchFamily="34" charset="-120"/>
               </a:rPr>
-              <a:t>AI-supported workflows often cross program, IT, legal, privacy,.</a:t>
-            </a:r>
-            <a:endParaRPr lang="en-US" sz="1220" dirty="0"/>
+              <a:t>AI-supported workflows often cross program, IT,.</a:t>
+            </a:r>
+            <a:endParaRPr lang="en-US" sz="1140" dirty="0"/>
           </a:p>
         </p:txBody>
       </p:sp>
@@ -4377,12 +4377,12 @@
         </p:nvSpPr>
         <p:spPr>
           <a:xfrm>
-            <a:off x="7635240" y="4184294"/>
-            <a:ext cx="3474720" cy="1466698"/>
+            <a:off x="7543800" y="4389120"/>
+            <a:ext cx="3611880" cy="1261872"/>
           </a:xfrm>
           <a:prstGeom prst="roundRect">
             <a:avLst>
-              <a:gd name="adj" fmla="val 7481"/>
+              <a:gd name="adj" fmla="val 8696"/>
             </a:avLst>
           </a:prstGeom>
           <a:solidFill>
@@ -4404,8 +4404,8 @@
         </p:nvSpPr>
         <p:spPr>
           <a:xfrm>
-            <a:off x="7799832" y="4330598"/>
-            <a:ext cx="3145536" cy="256032"/>
+            <a:off x="7708392" y="4517136"/>
+            <a:ext cx="3282696" cy="228600"/>
           </a:xfrm>
           <a:prstGeom prst="rect">
             <a:avLst/>
@@ -4421,7 +4421,7 @@
               <a:buNone/>
             </a:pPr>
             <a:r>
-              <a:rPr lang="en-US" sz="1300" b="1" dirty="0">
+              <a:rPr lang="en-US" sz="1220" b="1" dirty="0">
                 <a:solidFill>
                   <a:srgbClr val="0068B7"/>
                 </a:solidFill>
@@ -4431,7 +4431,7 @@
               </a:rPr>
               <a:t>What to document</a:t>
             </a:r>
-            <a:endParaRPr lang="en-US" sz="1300" dirty="0"/>
+            <a:endParaRPr lang="en-US" sz="1220" dirty="0"/>
           </a:p>
         </p:txBody>
       </p:sp>
@@ -4443,8 +4443,8 @@
         </p:nvSpPr>
         <p:spPr>
           <a:xfrm>
-            <a:off x="7799832" y="4659782"/>
-            <a:ext cx="3145536" cy="899770"/>
+            <a:off x="7708392" y="4828032"/>
+            <a:ext cx="3282696" cy="749808"/>
           </a:xfrm>
           <a:prstGeom prst="rect">
             <a:avLst/>
@@ -4462,7 +4462,7 @@
               <a:buNone/>
             </a:pPr>
             <a:r>
-              <a:rPr lang="en-US" sz="1320" dirty="0">
+              <a:rPr lang="en-US" sz="1220" dirty="0">
                 <a:solidFill>
                   <a:srgbClr val="17364A"/>
                 </a:solidFill>
@@ -4470,9 +4470,9 @@
                 <a:ea typeface="Aptos" pitchFamily="34" charset="-122"/>
                 <a:cs typeface="Aptos" pitchFamily="34" charset="-120"/>
               </a:rPr>
-              <a:t>Translate this concept into clear decision rights, review steps, documentation expectations, and escalation paths before an AI-supported workflow is approved.</a:t>
-            </a:r>
-            <a:endParaRPr lang="en-US" sz="1320" dirty="0"/>
+              <a:t>Translate this concept into clear decision rights, review steps, documentation.</a:t>
+            </a:r>
+            <a:endParaRPr lang="en-US" sz="1220" dirty="0"/>
           </a:p>
         </p:txBody>
       </p:sp>
@@ -4763,8 +4763,8 @@
         </p:nvSpPr>
         <p:spPr>
           <a:xfrm>
-            <a:off x="868680" y="1508760"/>
-            <a:ext cx="6309360" cy="4160520"/>
+            <a:off x="822960" y="1463040"/>
+            <a:ext cx="6565392" cy="4343400"/>
           </a:xfrm>
           <a:prstGeom prst="rect">
             <a:avLst/>
@@ -4782,7 +4782,7 @@
               <a:buNone/>
             </a:pPr>
             <a:r>
-              <a:rPr lang="en-US" sz="2100" dirty="0">
+              <a:rPr lang="en-US" sz="1920" dirty="0">
                 <a:solidFill>
                   <a:srgbClr val="003A63"/>
                 </a:solidFill>
@@ -4792,14 +4792,14 @@
               </a:rPr>
               <a:t>• A common failure mode is treating the topic as a one-time checklist.</a:t>
             </a:r>
-            <a:endParaRPr lang="en-US" sz="2100" dirty="0"/>
-          </a:p>
-          <a:p>
-            <a:pPr indent="0" marL="0">
-              <a:buNone/>
-            </a:pPr>
-            <a:r>
-              <a:rPr lang="en-US" sz="2100" dirty="0">
+            <a:endParaRPr lang="en-US" sz="1920" dirty="0"/>
+          </a:p>
+          <a:p>
+            <a:pPr indent="0" marL="0">
+              <a:buNone/>
+            </a:pPr>
+            <a:r>
+              <a:rPr lang="en-US" sz="1920" dirty="0">
                 <a:solidFill>
                   <a:srgbClr val="003A63"/>
                 </a:solidFill>
@@ -4807,16 +4807,16 @@
                 <a:ea typeface="Aptos" pitchFamily="34" charset="-122"/>
                 <a:cs typeface="Aptos" pitchFamily="34" charset="-120"/>
               </a:rPr>
-              <a:t>• AI risks can change when data sources, models, vendors, policies, users, or public.</a:t>
-            </a:r>
-            <a:endParaRPr lang="en-US" sz="2100" dirty="0"/>
-          </a:p>
-          <a:p>
-            <a:pPr indent="0" marL="0">
-              <a:buNone/>
-            </a:pPr>
-            <a:r>
-              <a:rPr lang="en-US" sz="2100" dirty="0">
+              <a:t>• AI risks can change when data sources, models, vendors, policies, users, or.</a:t>
+            </a:r>
+            <a:endParaRPr lang="en-US" sz="1920" dirty="0"/>
+          </a:p>
+          <a:p>
+            <a:pPr indent="0" marL="0">
+              <a:buNone/>
+            </a:pPr>
+            <a:r>
+              <a:rPr lang="en-US" sz="1920" dirty="0">
                 <a:solidFill>
                   <a:srgbClr val="003A63"/>
                 </a:solidFill>
@@ -4826,7 +4826,7 @@
               </a:rPr>
               <a:t>• A guardrail is to define review intervals and change triggers.</a:t>
             </a:r>
-            <a:endParaRPr lang="en-US" sz="2100" dirty="0"/>
+            <a:endParaRPr lang="en-US" sz="1920" dirty="0"/>
           </a:p>
         </p:txBody>
       </p:sp>
@@ -4838,12 +4838,12 @@
         </p:nvSpPr>
         <p:spPr>
           <a:xfrm>
-            <a:off x="7635240" y="1325880"/>
-            <a:ext cx="3474720" cy="1207008"/>
+            <a:off x="7543800" y="1325880"/>
+            <a:ext cx="3611880" cy="1261872"/>
           </a:xfrm>
           <a:prstGeom prst="roundRect">
             <a:avLst>
-              <a:gd name="adj" fmla="val 9091"/>
+              <a:gd name="adj" fmla="val 8696"/>
             </a:avLst>
           </a:prstGeom>
           <a:solidFill>
@@ -4865,8 +4865,8 @@
         </p:nvSpPr>
         <p:spPr>
           <a:xfrm>
-            <a:off x="7799832" y="1472184"/>
-            <a:ext cx="3145536" cy="256032"/>
+            <a:off x="7708392" y="1453896"/>
+            <a:ext cx="3282696" cy="228600"/>
           </a:xfrm>
           <a:prstGeom prst="rect">
             <a:avLst/>
@@ -4882,7 +4882,7 @@
               <a:buNone/>
             </a:pPr>
             <a:r>
-              <a:rPr lang="en-US" sz="1300" b="1" dirty="0">
+              <a:rPr lang="en-US" sz="1220" b="1" dirty="0">
                 <a:solidFill>
                   <a:srgbClr val="0068B7"/>
                 </a:solidFill>
@@ -4892,7 +4892,7 @@
               </a:rPr>
               <a:t>Governance lens</a:t>
             </a:r>
-            <a:endParaRPr lang="en-US" sz="1300" dirty="0"/>
+            <a:endParaRPr lang="en-US" sz="1220" dirty="0"/>
           </a:p>
         </p:txBody>
       </p:sp>
@@ -4904,8 +4904,8 @@
         </p:nvSpPr>
         <p:spPr>
           <a:xfrm>
-            <a:off x="7799832" y="1801368"/>
-            <a:ext cx="3145536" cy="640080"/>
+            <a:off x="7708392" y="1764792"/>
+            <a:ext cx="3282696" cy="749808"/>
           </a:xfrm>
           <a:prstGeom prst="rect">
             <a:avLst/>
@@ -4923,7 +4923,7 @@
               <a:buNone/>
             </a:pPr>
             <a:r>
-              <a:rPr lang="en-US" sz="1320" dirty="0">
+              <a:rPr lang="en-US" sz="1220" dirty="0">
                 <a:solidFill>
                   <a:srgbClr val="17364A"/>
                 </a:solidFill>
@@ -4933,7 +4933,7 @@
               </a:rPr>
               <a:t>A common failure mode is treating the topic as a one-time checklist.</a:t>
             </a:r>
-            <a:endParaRPr lang="en-US" sz="1320" dirty="0"/>
+            <a:endParaRPr lang="en-US" sz="1220" dirty="0"/>
           </a:p>
         </p:txBody>
       </p:sp>
@@ -4945,12 +4945,12 @@
         </p:nvSpPr>
         <p:spPr>
           <a:xfrm>
-            <a:off x="7635240" y="2670048"/>
-            <a:ext cx="3474720" cy="1377086"/>
+            <a:off x="7543800" y="2724912"/>
+            <a:ext cx="3611880" cy="1527048"/>
           </a:xfrm>
           <a:prstGeom prst="roundRect">
             <a:avLst>
-              <a:gd name="adj" fmla="val 7968"/>
+              <a:gd name="adj" fmla="val 7186"/>
             </a:avLst>
           </a:prstGeom>
           <a:solidFill>
@@ -4972,8 +4972,8 @@
         </p:nvSpPr>
         <p:spPr>
           <a:xfrm>
-            <a:off x="7799832" y="2816352"/>
-            <a:ext cx="3145536" cy="256032"/>
+            <a:off x="7708392" y="2852928"/>
+            <a:ext cx="3282696" cy="228600"/>
           </a:xfrm>
           <a:prstGeom prst="rect">
             <a:avLst/>
@@ -4989,7 +4989,7 @@
               <a:buNone/>
             </a:pPr>
             <a:r>
-              <a:rPr lang="en-US" sz="1300" b="1" dirty="0">
+              <a:rPr lang="en-US" sz="1220" b="1" dirty="0">
                 <a:solidFill>
                   <a:srgbClr val="0068B7"/>
                 </a:solidFill>
@@ -4999,7 +4999,7 @@
               </a:rPr>
               <a:t>Concept checkpoints</a:t>
             </a:r>
-            <a:endParaRPr lang="en-US" sz="1300" dirty="0"/>
+            <a:endParaRPr lang="en-US" sz="1220" dirty="0"/>
           </a:p>
         </p:txBody>
       </p:sp>
@@ -5011,8 +5011,8 @@
         </p:nvSpPr>
         <p:spPr>
           <a:xfrm>
-            <a:off x="7818120" y="3182112"/>
-            <a:ext cx="3090672" cy="718718"/>
+            <a:off x="7726680" y="3182112"/>
+            <a:ext cx="3227832" cy="960120"/>
           </a:xfrm>
           <a:prstGeom prst="rect">
             <a:avLst/>
@@ -5030,7 +5030,7 @@
               <a:buNone/>
             </a:pPr>
             <a:r>
-              <a:rPr lang="en-US" sz="1220" dirty="0">
+              <a:rPr lang="en-US" sz="1140" dirty="0">
                 <a:solidFill>
                   <a:srgbClr val="17364A"/>
                 </a:solidFill>
@@ -5040,14 +5040,14 @@
               </a:rPr>
               <a:t>Another failure mode is unclear ownership.</a:t>
             </a:r>
-            <a:endParaRPr lang="en-US" sz="1220" dirty="0"/>
-          </a:p>
-          <a:p>
-            <a:pPr indent="0" marL="0">
-              <a:buNone/>
-            </a:pPr>
-            <a:r>
-              <a:rPr lang="en-US" sz="1220" dirty="0">
+            <a:endParaRPr lang="en-US" sz="1140" dirty="0"/>
+          </a:p>
+          <a:p>
+            <a:pPr indent="0" marL="0">
+              <a:buNone/>
+            </a:pPr>
+            <a:r>
+              <a:rPr lang="en-US" sz="1140" dirty="0">
                 <a:solidFill>
                   <a:srgbClr val="17364A"/>
                 </a:solidFill>
@@ -5055,16 +5055,16 @@
                 <a:ea typeface="Aptos" pitchFamily="34" charset="-122"/>
                 <a:cs typeface="Aptos" pitchFamily="34" charset="-120"/>
               </a:rPr>
-              <a:t>When everyone is responsible in general, no one may be responsible.</a:t>
-            </a:r>
-            <a:endParaRPr lang="en-US" sz="1220" dirty="0"/>
-          </a:p>
-          <a:p>
-            <a:pPr indent="0" marL="0">
-              <a:buNone/>
-            </a:pPr>
-            <a:r>
-              <a:rPr lang="en-US" sz="1220" dirty="0">
+              <a:t>When everyone is responsible in general, no one.</a:t>
+            </a:r>
+            <a:endParaRPr lang="en-US" sz="1140" dirty="0"/>
+          </a:p>
+          <a:p>
+            <a:pPr indent="0" marL="0">
+              <a:buNone/>
+            </a:pPr>
+            <a:r>
+              <a:rPr lang="en-US" sz="1140" dirty="0">
                 <a:solidFill>
                   <a:srgbClr val="17364A"/>
                 </a:solidFill>
@@ -5072,9 +5072,9 @@
                 <a:ea typeface="Aptos" pitchFamily="34" charset="-122"/>
                 <a:cs typeface="Aptos" pitchFamily="34" charset="-120"/>
               </a:rPr>
-              <a:t>A guardrail is to assign an accountability owner and name.</a:t>
-            </a:r>
-            <a:endParaRPr lang="en-US" sz="1220" dirty="0"/>
+              <a:t>A guardrail is to assign an accountability owner.</a:t>
+            </a:r>
+            <a:endParaRPr lang="en-US" sz="1140" dirty="0"/>
           </a:p>
         </p:txBody>
       </p:sp>
@@ -5086,12 +5086,12 @@
         </p:nvSpPr>
         <p:spPr>
           <a:xfrm>
-            <a:off x="7635240" y="4184294"/>
-            <a:ext cx="3474720" cy="1466698"/>
+            <a:off x="7543800" y="4389120"/>
+            <a:ext cx="3611880" cy="1261872"/>
           </a:xfrm>
           <a:prstGeom prst="roundRect">
             <a:avLst>
-              <a:gd name="adj" fmla="val 7481"/>
+              <a:gd name="adj" fmla="val 8696"/>
             </a:avLst>
           </a:prstGeom>
           <a:solidFill>
@@ -5113,8 +5113,8 @@
         </p:nvSpPr>
         <p:spPr>
           <a:xfrm>
-            <a:off x="7799832" y="4330598"/>
-            <a:ext cx="3145536" cy="256032"/>
+            <a:off x="7708392" y="4517136"/>
+            <a:ext cx="3282696" cy="228600"/>
           </a:xfrm>
           <a:prstGeom prst="rect">
             <a:avLst/>
@@ -5130,7 +5130,7 @@
               <a:buNone/>
             </a:pPr>
             <a:r>
-              <a:rPr lang="en-US" sz="1300" b="1" dirty="0">
+              <a:rPr lang="en-US" sz="1220" b="1" dirty="0">
                 <a:solidFill>
                   <a:srgbClr val="0068B7"/>
                 </a:solidFill>
@@ -5140,7 +5140,7 @@
               </a:rPr>
               <a:t>What to document</a:t>
             </a:r>
-            <a:endParaRPr lang="en-US" sz="1300" dirty="0"/>
+            <a:endParaRPr lang="en-US" sz="1220" dirty="0"/>
           </a:p>
         </p:txBody>
       </p:sp>
@@ -5152,8 +5152,8 @@
         </p:nvSpPr>
         <p:spPr>
           <a:xfrm>
-            <a:off x="7799832" y="4659782"/>
-            <a:ext cx="3145536" cy="899770"/>
+            <a:off x="7708392" y="4828032"/>
+            <a:ext cx="3282696" cy="749808"/>
           </a:xfrm>
           <a:prstGeom prst="rect">
             <a:avLst/>
@@ -5171,7 +5171,7 @@
               <a:buNone/>
             </a:pPr>
             <a:r>
-              <a:rPr lang="en-US" sz="1320" dirty="0">
+              <a:rPr lang="en-US" sz="1220" dirty="0">
                 <a:solidFill>
                   <a:srgbClr val="17364A"/>
                 </a:solidFill>
@@ -5179,9 +5179,9 @@
                 <a:ea typeface="Aptos" pitchFamily="34" charset="-122"/>
                 <a:cs typeface="Aptos" pitchFamily="34" charset="-120"/>
               </a:rPr>
-              <a:t>Translate this concept into clear decision rights, review steps, documentation expectations, and escalation paths before an AI-supported workflow is approved.</a:t>
-            </a:r>
-            <a:endParaRPr lang="en-US" sz="1320" dirty="0"/>
+              <a:t>Translate this concept into clear decision rights, review steps, documentation.</a:t>
+            </a:r>
+            <a:endParaRPr lang="en-US" sz="1220" dirty="0"/>
           </a:p>
         </p:txBody>
       </p:sp>
@@ -5472,8 +5472,8 @@
         </p:nvSpPr>
         <p:spPr>
           <a:xfrm>
-            <a:off x="868680" y="1508760"/>
-            <a:ext cx="6309360" cy="4160520"/>
+            <a:off x="822960" y="1463040"/>
+            <a:ext cx="6565392" cy="4343400"/>
           </a:xfrm>
           <a:prstGeom prst="rect">
             <a:avLst/>
@@ -5491,7 +5491,7 @@
               <a:buNone/>
             </a:pPr>
             <a:r>
-              <a:rPr lang="en-US" sz="2100" dirty="0">
+              <a:rPr lang="en-US" sz="1920" dirty="0">
                 <a:solidFill>
                   <a:srgbClr val="003A63"/>
                 </a:solidFill>
@@ -5499,16 +5499,16 @@
                 <a:ea typeface="Aptos" pitchFamily="34" charset="-122"/>
                 <a:cs typeface="Aptos" pitchFamily="34" charset="-120"/>
               </a:rPr>
-              <a:t>• This topic applies across generative AI, predictive analytics, NLP, RAG, automation, and.</a:t>
-            </a:r>
-            <a:endParaRPr lang="en-US" sz="2100" dirty="0"/>
-          </a:p>
-          <a:p>
-            <a:pPr indent="0" marL="0">
-              <a:buNone/>
-            </a:pPr>
-            <a:r>
-              <a:rPr lang="en-US" sz="2100" dirty="0">
+              <a:t>• This topic applies across generative AI, predictive analytics, NLP, RAG,.</a:t>
+            </a:r>
+            <a:endParaRPr lang="en-US" sz="1920" dirty="0"/>
+          </a:p>
+          <a:p>
+            <a:pPr indent="0" marL="0">
+              <a:buNone/>
+            </a:pPr>
+            <a:r>
+              <a:rPr lang="en-US" sz="1920" dirty="0">
                 <a:solidFill>
                   <a:srgbClr val="003A63"/>
                 </a:solidFill>
@@ -5516,9 +5516,9 @@
                 <a:ea typeface="Aptos" pitchFamily="34" charset="-122"/>
                 <a:cs typeface="Aptos" pitchFamily="34" charset="-120"/>
               </a:rPr>
-              <a:t>• The more sensitive the data, the more consequential the output, or the more automated the.</a:t>
-            </a:r>
-            <a:endParaRPr lang="en-US" sz="2100" dirty="0"/>
+              <a:t>• The more sensitive the data, the more consequential the output, or the more.</a:t>
+            </a:r>
+            <a:endParaRPr lang="en-US" sz="1920" dirty="0"/>
           </a:p>
         </p:txBody>
       </p:sp>
@@ -5530,12 +5530,12 @@
         </p:nvSpPr>
         <p:spPr>
           <a:xfrm>
-            <a:off x="7635240" y="1325880"/>
-            <a:ext cx="3474720" cy="1255471"/>
+            <a:off x="7543800" y="1325880"/>
+            <a:ext cx="3611880" cy="1261872"/>
           </a:xfrm>
           <a:prstGeom prst="roundRect">
             <a:avLst>
-              <a:gd name="adj" fmla="val 8740"/>
+              <a:gd name="adj" fmla="val 8696"/>
             </a:avLst>
           </a:prstGeom>
           <a:solidFill>
@@ -5557,8 +5557,8 @@
         </p:nvSpPr>
         <p:spPr>
           <a:xfrm>
-            <a:off x="7799832" y="1472184"/>
-            <a:ext cx="3145536" cy="256032"/>
+            <a:off x="7708392" y="1453896"/>
+            <a:ext cx="3282696" cy="228600"/>
           </a:xfrm>
           <a:prstGeom prst="rect">
             <a:avLst/>
@@ -5574,7 +5574,7 @@
               <a:buNone/>
             </a:pPr>
             <a:r>
-              <a:rPr lang="en-US" sz="1300" b="1" dirty="0">
+              <a:rPr lang="en-US" sz="1220" b="1" dirty="0">
                 <a:solidFill>
                   <a:srgbClr val="0068B7"/>
                 </a:solidFill>
@@ -5584,7 +5584,7 @@
               </a:rPr>
               <a:t>Governance lens</a:t>
             </a:r>
-            <a:endParaRPr lang="en-US" sz="1300" dirty="0"/>
+            <a:endParaRPr lang="en-US" sz="1220" dirty="0"/>
           </a:p>
         </p:txBody>
       </p:sp>
@@ -5596,8 +5596,8 @@
         </p:nvSpPr>
         <p:spPr>
           <a:xfrm>
-            <a:off x="7799832" y="1801368"/>
-            <a:ext cx="3145536" cy="688543"/>
+            <a:off x="7708392" y="1764792"/>
+            <a:ext cx="3282696" cy="749808"/>
           </a:xfrm>
           <a:prstGeom prst="rect">
             <a:avLst/>
@@ -5615,7 +5615,7 @@
               <a:buNone/>
             </a:pPr>
             <a:r>
-              <a:rPr lang="en-US" sz="1320" dirty="0">
+              <a:rPr lang="en-US" sz="1220" dirty="0">
                 <a:solidFill>
                   <a:srgbClr val="17364A"/>
                 </a:solidFill>
@@ -5623,9 +5623,9 @@
                 <a:ea typeface="Aptos" pitchFamily="34" charset="-122"/>
                 <a:cs typeface="Aptos" pitchFamily="34" charset="-120"/>
               </a:rPr>
-              <a:t>This topic applies across generative AI, predictive analytics, NLP, RAG, automation, and agentic.</a:t>
-            </a:r>
-            <a:endParaRPr lang="en-US" sz="1320" dirty="0"/>
+              <a:t>This topic applies across generative AI, predictive analytics, NLP, RAG,.</a:t>
+            </a:r>
+            <a:endParaRPr lang="en-US" sz="1220" dirty="0"/>
           </a:p>
         </p:txBody>
       </p:sp>
@@ -5637,12 +5637,12 @@
         </p:nvSpPr>
         <p:spPr>
           <a:xfrm>
-            <a:off x="7635240" y="2718511"/>
-            <a:ext cx="3474720" cy="1328623"/>
+            <a:off x="7543800" y="2724912"/>
+            <a:ext cx="3611880" cy="1527048"/>
           </a:xfrm>
           <a:prstGeom prst="roundRect">
             <a:avLst>
-              <a:gd name="adj" fmla="val 8259"/>
+              <a:gd name="adj" fmla="val 7186"/>
             </a:avLst>
           </a:prstGeom>
           <a:solidFill>
@@ -5664,8 +5664,8 @@
         </p:nvSpPr>
         <p:spPr>
           <a:xfrm>
-            <a:off x="7799832" y="2864815"/>
-            <a:ext cx="3145536" cy="256032"/>
+            <a:off x="7708392" y="2852928"/>
+            <a:ext cx="3282696" cy="228600"/>
           </a:xfrm>
           <a:prstGeom prst="rect">
             <a:avLst/>
@@ -5681,7 +5681,7 @@
               <a:buNone/>
             </a:pPr>
             <a:r>
-              <a:rPr lang="en-US" sz="1300" b="1" dirty="0">
+              <a:rPr lang="en-US" sz="1220" b="1" dirty="0">
                 <a:solidFill>
                   <a:srgbClr val="0068B7"/>
                 </a:solidFill>
@@ -5691,7 +5691,7 @@
               </a:rPr>
               <a:t>Concept checkpoints</a:t>
             </a:r>
-            <a:endParaRPr lang="en-US" sz="1300" dirty="0"/>
+            <a:endParaRPr lang="en-US" sz="1220" dirty="0"/>
           </a:p>
         </p:txBody>
       </p:sp>
@@ -5703,8 +5703,8 @@
         </p:nvSpPr>
         <p:spPr>
           <a:xfrm>
-            <a:off x="7818120" y="3230575"/>
-            <a:ext cx="3090672" cy="670255"/>
+            <a:off x="7726680" y="3182112"/>
+            <a:ext cx="3227832" cy="960120"/>
           </a:xfrm>
           <a:prstGeom prst="rect">
             <a:avLst/>
@@ -5722,7 +5722,7 @@
               <a:buNone/>
             </a:pPr>
             <a:r>
-              <a:rPr lang="en-US" sz="1220" dirty="0">
+              <a:rPr lang="en-US" sz="1140" dirty="0">
                 <a:solidFill>
                   <a:srgbClr val="17364A"/>
                 </a:solidFill>
@@ -5730,16 +5730,16 @@
                 <a:ea typeface="Aptos" pitchFamily="34" charset="-122"/>
                 <a:cs typeface="Aptos" pitchFamily="34" charset="-120"/>
               </a:rPr>
-              <a:t>This topic applies across generative AI, predictive analytics,.</a:t>
-            </a:r>
-            <a:endParaRPr lang="en-US" sz="1220" dirty="0"/>
-          </a:p>
-          <a:p>
-            <a:pPr indent="0" marL="0">
-              <a:buNone/>
-            </a:pPr>
-            <a:r>
-              <a:rPr lang="en-US" sz="1220" dirty="0">
+              <a:t>This topic applies across generative AI,.</a:t>
+            </a:r>
+            <a:endParaRPr lang="en-US" sz="1140" dirty="0"/>
+          </a:p>
+          <a:p>
+            <a:pPr indent="0" marL="0">
+              <a:buNone/>
+            </a:pPr>
+            <a:r>
+              <a:rPr lang="en-US" sz="1140" dirty="0">
                 <a:solidFill>
                   <a:srgbClr val="17364A"/>
                 </a:solidFill>
@@ -5747,9 +5747,9 @@
                 <a:ea typeface="Aptos" pitchFamily="34" charset="-122"/>
                 <a:cs typeface="Aptos" pitchFamily="34" charset="-120"/>
               </a:rPr>
-              <a:t>The more sensitive the data, the more consequential the output, or.</a:t>
-            </a:r>
-            <a:endParaRPr lang="en-US" sz="1220" dirty="0"/>
+              <a:t>The more sensitive the data, the more.</a:t>
+            </a:r>
+            <a:endParaRPr lang="en-US" sz="1140" dirty="0"/>
           </a:p>
         </p:txBody>
       </p:sp>
@@ -5761,12 +5761,12 @@
         </p:nvSpPr>
         <p:spPr>
           <a:xfrm>
-            <a:off x="7635240" y="4184294"/>
-            <a:ext cx="3474720" cy="1466698"/>
+            <a:off x="7543800" y="4389120"/>
+            <a:ext cx="3611880" cy="1261872"/>
           </a:xfrm>
           <a:prstGeom prst="roundRect">
             <a:avLst>
-              <a:gd name="adj" fmla="val 7481"/>
+              <a:gd name="adj" fmla="val 8696"/>
             </a:avLst>
           </a:prstGeom>
           <a:solidFill>
@@ -5788,8 +5788,8 @@
         </p:nvSpPr>
         <p:spPr>
           <a:xfrm>
-            <a:off x="7799832" y="4330598"/>
-            <a:ext cx="3145536" cy="256032"/>
+            <a:off x="7708392" y="4517136"/>
+            <a:ext cx="3282696" cy="228600"/>
           </a:xfrm>
           <a:prstGeom prst="rect">
             <a:avLst/>
@@ -5805,7 +5805,7 @@
               <a:buNone/>
             </a:pPr>
             <a:r>
-              <a:rPr lang="en-US" sz="1300" b="1" dirty="0">
+              <a:rPr lang="en-US" sz="1220" b="1" dirty="0">
                 <a:solidFill>
                   <a:srgbClr val="0068B7"/>
                 </a:solidFill>
@@ -5815,7 +5815,7 @@
               </a:rPr>
               <a:t>What to document</a:t>
             </a:r>
-            <a:endParaRPr lang="en-US" sz="1300" dirty="0"/>
+            <a:endParaRPr lang="en-US" sz="1220" dirty="0"/>
           </a:p>
         </p:txBody>
       </p:sp>
@@ -5827,8 +5827,8 @@
         </p:nvSpPr>
         <p:spPr>
           <a:xfrm>
-            <a:off x="7799832" y="4659782"/>
-            <a:ext cx="3145536" cy="899770"/>
+            <a:off x="7708392" y="4828032"/>
+            <a:ext cx="3282696" cy="749808"/>
           </a:xfrm>
           <a:prstGeom prst="rect">
             <a:avLst/>
@@ -5846,7 +5846,7 @@
               <a:buNone/>
             </a:pPr>
             <a:r>
-              <a:rPr lang="en-US" sz="1320" dirty="0">
+              <a:rPr lang="en-US" sz="1220" dirty="0">
                 <a:solidFill>
                   <a:srgbClr val="17364A"/>
                 </a:solidFill>
@@ -5854,9 +5854,9 @@
                 <a:ea typeface="Aptos" pitchFamily="34" charset="-122"/>
                 <a:cs typeface="Aptos" pitchFamily="34" charset="-120"/>
               </a:rPr>
-              <a:t>Translate this concept into clear decision rights, review steps, documentation expectations, and escalation paths before an AI-supported workflow is approved.</a:t>
-            </a:r>
-            <a:endParaRPr lang="en-US" sz="1320" dirty="0"/>
+              <a:t>Translate this concept into clear decision rights, review steps, documentation.</a:t>
+            </a:r>
+            <a:endParaRPr lang="en-US" sz="1220" dirty="0"/>
           </a:p>
         </p:txBody>
       </p:sp>
@@ -6147,8 +6147,8 @@
         </p:nvSpPr>
         <p:spPr>
           <a:xfrm>
-            <a:off x="868680" y="1508760"/>
-            <a:ext cx="6309360" cy="4160520"/>
+            <a:off x="822960" y="1463040"/>
+            <a:ext cx="6565392" cy="4343400"/>
           </a:xfrm>
           <a:prstGeom prst="rect">
             <a:avLst/>
@@ -6166,7 +6166,7 @@
               <a:buNone/>
             </a:pPr>
             <a:r>
-              <a:rPr lang="en-US" sz="2100" dirty="0">
+              <a:rPr lang="en-US" sz="1920" dirty="0">
                 <a:solidFill>
                   <a:srgbClr val="003A63"/>
                 </a:solidFill>
@@ -6176,14 +6176,14 @@
               </a:rPr>
               <a:t>• What public health decision or workflow does this topic affect?</a:t>
             </a:r>
-            <a:endParaRPr lang="en-US" sz="2100" dirty="0"/>
-          </a:p>
-          <a:p>
-            <a:pPr indent="0" marL="0">
-              <a:buNone/>
-            </a:pPr>
-            <a:r>
-              <a:rPr lang="en-US" sz="2100" dirty="0">
+            <a:endParaRPr lang="en-US" sz="1920" dirty="0"/>
+          </a:p>
+          <a:p>
+            <a:pPr indent="0" marL="0">
+              <a:buNone/>
+            </a:pPr>
+            <a:r>
+              <a:rPr lang="en-US" sz="1920" dirty="0">
                 <a:solidFill>
                   <a:srgbClr val="003A63"/>
                 </a:solidFill>
@@ -6193,14 +6193,14 @@
               </a:rPr>
               <a:t>• Who has authority to approve or pause the work?</a:t>
             </a:r>
-            <a:endParaRPr lang="en-US" sz="2100" dirty="0"/>
-          </a:p>
-          <a:p>
-            <a:pPr indent="0" marL="0">
-              <a:buNone/>
-            </a:pPr>
-            <a:r>
-              <a:rPr lang="en-US" sz="2100" dirty="0">
+            <a:endParaRPr lang="en-US" sz="1920" dirty="0"/>
+          </a:p>
+          <a:p>
+            <a:pPr indent="0" marL="0">
+              <a:buNone/>
+            </a:pPr>
+            <a:r>
+              <a:rPr lang="en-US" sz="1920" dirty="0">
                 <a:solidFill>
                   <a:srgbClr val="003A63"/>
                 </a:solidFill>
@@ -6210,7 +6210,7 @@
               </a:rPr>
               <a:t>• What evidence would show that the workflow is responsible and effective?</a:t>
             </a:r>
-            <a:endParaRPr lang="en-US" sz="2100" dirty="0"/>
+            <a:endParaRPr lang="en-US" sz="1920" dirty="0"/>
           </a:p>
         </p:txBody>
       </p:sp>
@@ -6222,12 +6222,12 @@
         </p:nvSpPr>
         <p:spPr>
           <a:xfrm>
-            <a:off x="7635240" y="1325880"/>
-            <a:ext cx="3474720" cy="1207008"/>
+            <a:off x="7543800" y="1325880"/>
+            <a:ext cx="3611880" cy="1261872"/>
           </a:xfrm>
           <a:prstGeom prst="roundRect">
             <a:avLst>
-              <a:gd name="adj" fmla="val 9091"/>
+              <a:gd name="adj" fmla="val 8696"/>
             </a:avLst>
           </a:prstGeom>
           <a:solidFill>
@@ -6249,8 +6249,8 @@
         </p:nvSpPr>
         <p:spPr>
           <a:xfrm>
-            <a:off x="7799832" y="1472184"/>
-            <a:ext cx="3145536" cy="256032"/>
+            <a:off x="7708392" y="1453896"/>
+            <a:ext cx="3282696" cy="228600"/>
           </a:xfrm>
           <a:prstGeom prst="rect">
             <a:avLst/>
@@ -6266,7 +6266,7 @@
               <a:buNone/>
             </a:pPr>
             <a:r>
-              <a:rPr lang="en-US" sz="1300" b="1" dirty="0">
+              <a:rPr lang="en-US" sz="1220" b="1" dirty="0">
                 <a:solidFill>
                   <a:srgbClr val="0068B7"/>
                 </a:solidFill>
@@ -6276,7 +6276,7 @@
               </a:rPr>
               <a:t>Governance lens</a:t>
             </a:r>
-            <a:endParaRPr lang="en-US" sz="1300" dirty="0"/>
+            <a:endParaRPr lang="en-US" sz="1220" dirty="0"/>
           </a:p>
         </p:txBody>
       </p:sp>
@@ -6288,8 +6288,8 @@
         </p:nvSpPr>
         <p:spPr>
           <a:xfrm>
-            <a:off x="7799832" y="1801368"/>
-            <a:ext cx="3145536" cy="640080"/>
+            <a:off x="7708392" y="1764792"/>
+            <a:ext cx="3282696" cy="749808"/>
           </a:xfrm>
           <a:prstGeom prst="rect">
             <a:avLst/>
@@ -6307,7 +6307,7 @@
               <a:buNone/>
             </a:pPr>
             <a:r>
-              <a:rPr lang="en-US" sz="1320" dirty="0">
+              <a:rPr lang="en-US" sz="1220" dirty="0">
                 <a:solidFill>
                   <a:srgbClr val="17364A"/>
                 </a:solidFill>
@@ -6317,7 +6317,7 @@
               </a:rPr>
               <a:t>What public health decision or workflow does this topic affect?</a:t>
             </a:r>
-            <a:endParaRPr lang="en-US" sz="1320" dirty="0"/>
+            <a:endParaRPr lang="en-US" sz="1220" dirty="0"/>
           </a:p>
         </p:txBody>
       </p:sp>
@@ -6329,12 +6329,12 @@
         </p:nvSpPr>
         <p:spPr>
           <a:xfrm>
-            <a:off x="7635240" y="2670048"/>
-            <a:ext cx="3474720" cy="1377086"/>
+            <a:off x="7543800" y="2724912"/>
+            <a:ext cx="3611880" cy="1527048"/>
           </a:xfrm>
           <a:prstGeom prst="roundRect">
             <a:avLst>
-              <a:gd name="adj" fmla="val 7968"/>
+              <a:gd name="adj" fmla="val 7186"/>
             </a:avLst>
           </a:prstGeom>
           <a:solidFill>
@@ -6356,8 +6356,8 @@
         </p:nvSpPr>
         <p:spPr>
           <a:xfrm>
-            <a:off x="7799832" y="2816352"/>
-            <a:ext cx="3145536" cy="256032"/>
+            <a:off x="7708392" y="2852928"/>
+            <a:ext cx="3282696" cy="228600"/>
           </a:xfrm>
           <a:prstGeom prst="rect">
             <a:avLst/>
@@ -6373,7 +6373,7 @@
               <a:buNone/>
             </a:pPr>
             <a:r>
-              <a:rPr lang="en-US" sz="1300" b="1" dirty="0">
+              <a:rPr lang="en-US" sz="1220" b="1" dirty="0">
                 <a:solidFill>
                   <a:srgbClr val="0068B7"/>
                 </a:solidFill>
@@ -6383,7 +6383,7 @@
               </a:rPr>
               <a:t>Concept checkpoints</a:t>
             </a:r>
-            <a:endParaRPr lang="en-US" sz="1300" dirty="0"/>
+            <a:endParaRPr lang="en-US" sz="1220" dirty="0"/>
           </a:p>
         </p:txBody>
       </p:sp>
@@ -6395,8 +6395,8 @@
         </p:nvSpPr>
         <p:spPr>
           <a:xfrm>
-            <a:off x="7818120" y="3182112"/>
-            <a:ext cx="3090672" cy="718718"/>
+            <a:off x="7726680" y="3182112"/>
+            <a:ext cx="3227832" cy="960120"/>
           </a:xfrm>
           <a:prstGeom prst="rect">
             <a:avLst/>
@@ -6414,7 +6414,7 @@
               <a:buNone/>
             </a:pPr>
             <a:r>
-              <a:rPr lang="en-US" sz="1220" dirty="0">
+              <a:rPr lang="en-US" sz="1140" dirty="0">
                 <a:solidFill>
                   <a:srgbClr val="17364A"/>
                 </a:solidFill>
@@ -6422,16 +6422,16 @@
                 <a:ea typeface="Aptos" pitchFamily="34" charset="-122"/>
                 <a:cs typeface="Aptos" pitchFamily="34" charset="-120"/>
               </a:rPr>
-              <a:t>What public health decision or workflow does this topic affect?</a:t>
-            </a:r>
-            <a:endParaRPr lang="en-US" sz="1220" dirty="0"/>
-          </a:p>
-          <a:p>
-            <a:pPr indent="0" marL="0">
-              <a:buNone/>
-            </a:pPr>
-            <a:r>
-              <a:rPr lang="en-US" sz="1220" dirty="0">
+              <a:t>What public health decision or workflow does this.</a:t>
+            </a:r>
+            <a:endParaRPr lang="en-US" sz="1140" dirty="0"/>
+          </a:p>
+          <a:p>
+            <a:pPr indent="0" marL="0">
+              <a:buNone/>
+            </a:pPr>
+            <a:r>
+              <a:rPr lang="en-US" sz="1140" dirty="0">
                 <a:solidFill>
                   <a:srgbClr val="17364A"/>
                 </a:solidFill>
@@ -6441,14 +6441,14 @@
               </a:rPr>
               <a:t>Who has authority to approve or pause the work?</a:t>
             </a:r>
-            <a:endParaRPr lang="en-US" sz="1220" dirty="0"/>
-          </a:p>
-          <a:p>
-            <a:pPr indent="0" marL="0">
-              <a:buNone/>
-            </a:pPr>
-            <a:r>
-              <a:rPr lang="en-US" sz="1220" dirty="0">
+            <a:endParaRPr lang="en-US" sz="1140" dirty="0"/>
+          </a:p>
+          <a:p>
+            <a:pPr indent="0" marL="0">
+              <a:buNone/>
+            </a:pPr>
+            <a:r>
+              <a:rPr lang="en-US" sz="1140" dirty="0">
                 <a:solidFill>
                   <a:srgbClr val="17364A"/>
                 </a:solidFill>
@@ -6456,9 +6456,9 @@
                 <a:ea typeface="Aptos" pitchFamily="34" charset="-122"/>
                 <a:cs typeface="Aptos" pitchFamily="34" charset="-120"/>
               </a:rPr>
-              <a:t>What evidence would show that the workflow is responsible and.</a:t>
-            </a:r>
-            <a:endParaRPr lang="en-US" sz="1220" dirty="0"/>
+              <a:t>What evidence would show that the workflow is.</a:t>
+            </a:r>
+            <a:endParaRPr lang="en-US" sz="1140" dirty="0"/>
           </a:p>
         </p:txBody>
       </p:sp>
@@ -6470,12 +6470,12 @@
         </p:nvSpPr>
         <p:spPr>
           <a:xfrm>
-            <a:off x="7635240" y="4184294"/>
-            <a:ext cx="3474720" cy="1466698"/>
+            <a:off x="7543800" y="4389120"/>
+            <a:ext cx="3611880" cy="1261872"/>
           </a:xfrm>
           <a:prstGeom prst="roundRect">
             <a:avLst>
-              <a:gd name="adj" fmla="val 7481"/>
+              <a:gd name="adj" fmla="val 8696"/>
             </a:avLst>
           </a:prstGeom>
           <a:solidFill>
@@ -6497,8 +6497,8 @@
         </p:nvSpPr>
         <p:spPr>
           <a:xfrm>
-            <a:off x="7799832" y="4330598"/>
-            <a:ext cx="3145536" cy="256032"/>
+            <a:off x="7708392" y="4517136"/>
+            <a:ext cx="3282696" cy="228600"/>
           </a:xfrm>
           <a:prstGeom prst="rect">
             <a:avLst/>
@@ -6514,7 +6514,7 @@
               <a:buNone/>
             </a:pPr>
             <a:r>
-              <a:rPr lang="en-US" sz="1300" b="1" dirty="0">
+              <a:rPr lang="en-US" sz="1220" b="1" dirty="0">
                 <a:solidFill>
                   <a:srgbClr val="0068B7"/>
                 </a:solidFill>
@@ -6524,7 +6524,7 @@
               </a:rPr>
               <a:t>What to document</a:t>
             </a:r>
-            <a:endParaRPr lang="en-US" sz="1300" dirty="0"/>
+            <a:endParaRPr lang="en-US" sz="1220" dirty="0"/>
           </a:p>
         </p:txBody>
       </p:sp>
@@ -6536,8 +6536,8 @@
         </p:nvSpPr>
         <p:spPr>
           <a:xfrm>
-            <a:off x="7799832" y="4659782"/>
-            <a:ext cx="3145536" cy="899770"/>
+            <a:off x="7708392" y="4828032"/>
+            <a:ext cx="3282696" cy="749808"/>
           </a:xfrm>
           <a:prstGeom prst="rect">
             <a:avLst/>
@@ -6555,7 +6555,7 @@
               <a:buNone/>
             </a:pPr>
             <a:r>
-              <a:rPr lang="en-US" sz="1320" dirty="0">
+              <a:rPr lang="en-US" sz="1220" dirty="0">
                 <a:solidFill>
                   <a:srgbClr val="17364A"/>
                 </a:solidFill>
@@ -6563,9 +6563,9 @@
                 <a:ea typeface="Aptos" pitchFamily="34" charset="-122"/>
                 <a:cs typeface="Aptos" pitchFamily="34" charset="-120"/>
               </a:rPr>
-              <a:t>Translate this concept into clear decision rights, review steps, documentation expectations, and escalation paths before an AI-supported workflow is approved.</a:t>
-            </a:r>
-            <a:endParaRPr lang="en-US" sz="1320" dirty="0"/>
+              <a:t>Translate this concept into clear decision rights, review steps, documentation.</a:t>
+            </a:r>
+            <a:endParaRPr lang="en-US" sz="1220" dirty="0"/>
           </a:p>
         </p:txBody>
       </p:sp>
@@ -6856,8 +6856,8 @@
         </p:nvSpPr>
         <p:spPr>
           <a:xfrm>
-            <a:off x="868680" y="1508760"/>
-            <a:ext cx="6309360" cy="4160520"/>
+            <a:off x="822960" y="1463040"/>
+            <a:ext cx="6565392" cy="4343400"/>
           </a:xfrm>
           <a:prstGeom prst="rect">
             <a:avLst/>
@@ -6875,7 +6875,7 @@
               <a:buNone/>
             </a:pPr>
             <a:r>
-              <a:rPr lang="en-US" sz="2100" dirty="0">
+              <a:rPr lang="en-US" sz="1920" dirty="0">
                 <a:solidFill>
                   <a:srgbClr val="003A63"/>
                 </a:solidFill>
@@ -6885,14 +6885,14 @@
               </a:rPr>
               <a:t>• What equity, privacy, legal, security, or public trust risks require review?</a:t>
             </a:r>
-            <a:endParaRPr lang="en-US" sz="2100" dirty="0"/>
-          </a:p>
-          <a:p>
-            <a:pPr indent="0" marL="0">
-              <a:buNone/>
-            </a:pPr>
-            <a:r>
-              <a:rPr lang="en-US" sz="2100" dirty="0">
+            <a:endParaRPr lang="en-US" sz="1920" dirty="0"/>
+          </a:p>
+          <a:p>
+            <a:pPr indent="0" marL="0">
+              <a:buNone/>
+            </a:pPr>
+            <a:r>
+              <a:rPr lang="en-US" sz="1920" dirty="0">
                 <a:solidFill>
                   <a:srgbClr val="003A63"/>
                 </a:solidFill>
@@ -6902,7 +6902,7 @@
               </a:rPr>
               <a:t>• How will the agency know when the workflow needs to be revised?</a:t>
             </a:r>
-            <a:endParaRPr lang="en-US" sz="2100" dirty="0"/>
+            <a:endParaRPr lang="en-US" sz="1920" dirty="0"/>
           </a:p>
         </p:txBody>
       </p:sp>
@@ -6914,12 +6914,12 @@
         </p:nvSpPr>
         <p:spPr>
           <a:xfrm>
-            <a:off x="7635240" y="1325880"/>
-            <a:ext cx="3474720" cy="1207008"/>
+            <a:off x="7543800" y="1325880"/>
+            <a:ext cx="3611880" cy="1261872"/>
           </a:xfrm>
           <a:prstGeom prst="roundRect">
             <a:avLst>
-              <a:gd name="adj" fmla="val 9091"/>
+              <a:gd name="adj" fmla="val 8696"/>
             </a:avLst>
           </a:prstGeom>
           <a:solidFill>
@@ -6941,8 +6941,8 @@
         </p:nvSpPr>
         <p:spPr>
           <a:xfrm>
-            <a:off x="7799832" y="1472184"/>
-            <a:ext cx="3145536" cy="256032"/>
+            <a:off x="7708392" y="1453896"/>
+            <a:ext cx="3282696" cy="228600"/>
           </a:xfrm>
           <a:prstGeom prst="rect">
             <a:avLst/>
@@ -6958,7 +6958,7 @@
               <a:buNone/>
             </a:pPr>
             <a:r>
-              <a:rPr lang="en-US" sz="1300" b="1" dirty="0">
+              <a:rPr lang="en-US" sz="1220" b="1" dirty="0">
                 <a:solidFill>
                   <a:srgbClr val="0068B7"/>
                 </a:solidFill>
@@ -6968,7 +6968,7 @@
               </a:rPr>
               <a:t>Governance lens</a:t>
             </a:r>
-            <a:endParaRPr lang="en-US" sz="1300" dirty="0"/>
+            <a:endParaRPr lang="en-US" sz="1220" dirty="0"/>
           </a:p>
         </p:txBody>
       </p:sp>
@@ -6980,8 +6980,8 @@
         </p:nvSpPr>
         <p:spPr>
           <a:xfrm>
-            <a:off x="7799832" y="1801368"/>
-            <a:ext cx="3145536" cy="640080"/>
+            <a:off x="7708392" y="1764792"/>
+            <a:ext cx="3282696" cy="749808"/>
           </a:xfrm>
           <a:prstGeom prst="rect">
             <a:avLst/>
@@ -6999,7 +6999,7 @@
               <a:buNone/>
             </a:pPr>
             <a:r>
-              <a:rPr lang="en-US" sz="1320" dirty="0">
+              <a:rPr lang="en-US" sz="1220" dirty="0">
                 <a:solidFill>
                   <a:srgbClr val="17364A"/>
                 </a:solidFill>
@@ -7009,7 +7009,7 @@
               </a:rPr>
               <a:t>What equity, privacy, legal, security, or public trust risks require review?</a:t>
             </a:r>
-            <a:endParaRPr lang="en-US" sz="1320" dirty="0"/>
+            <a:endParaRPr lang="en-US" sz="1220" dirty="0"/>
           </a:p>
         </p:txBody>
       </p:sp>
@@ -7021,12 +7021,12 @@
         </p:nvSpPr>
         <p:spPr>
           <a:xfrm>
-            <a:off x="7635240" y="2670048"/>
-            <a:ext cx="3474720" cy="1377086"/>
+            <a:off x="7543800" y="2724912"/>
+            <a:ext cx="3611880" cy="1527048"/>
           </a:xfrm>
           <a:prstGeom prst="roundRect">
             <a:avLst>
-              <a:gd name="adj" fmla="val 7968"/>
+              <a:gd name="adj" fmla="val 7186"/>
             </a:avLst>
           </a:prstGeom>
           <a:solidFill>
@@ -7048,8 +7048,8 @@
         </p:nvSpPr>
         <p:spPr>
           <a:xfrm>
-            <a:off x="7799832" y="2816352"/>
-            <a:ext cx="3145536" cy="256032"/>
+            <a:off x="7708392" y="2852928"/>
+            <a:ext cx="3282696" cy="228600"/>
           </a:xfrm>
           <a:prstGeom prst="rect">
             <a:avLst/>
@@ -7065,7 +7065,7 @@
               <a:buNone/>
             </a:pPr>
             <a:r>
-              <a:rPr lang="en-US" sz="1300" b="1" dirty="0">
+              <a:rPr lang="en-US" sz="1220" b="1" dirty="0">
                 <a:solidFill>
                   <a:srgbClr val="0068B7"/>
                 </a:solidFill>
@@ -7075,7 +7075,7 @@
               </a:rPr>
               <a:t>Concept checkpoints</a:t>
             </a:r>
-            <a:endParaRPr lang="en-US" sz="1300" dirty="0"/>
+            <a:endParaRPr lang="en-US" sz="1220" dirty="0"/>
           </a:p>
         </p:txBody>
       </p:sp>
@@ -7087,8 +7087,8 @@
         </p:nvSpPr>
         <p:spPr>
           <a:xfrm>
-            <a:off x="7818120" y="3182112"/>
-            <a:ext cx="3090672" cy="718718"/>
+            <a:off x="7726680" y="3182112"/>
+            <a:ext cx="3227832" cy="960120"/>
           </a:xfrm>
           <a:prstGeom prst="rect">
             <a:avLst/>
@@ -7106,7 +7106,7 @@
               <a:buNone/>
             </a:pPr>
             <a:r>
-              <a:rPr lang="en-US" sz="1220" dirty="0">
+              <a:rPr lang="en-US" sz="1140" dirty="0">
                 <a:solidFill>
                   <a:srgbClr val="17364A"/>
                 </a:solidFill>
@@ -7114,16 +7114,16 @@
                 <a:ea typeface="Aptos" pitchFamily="34" charset="-122"/>
                 <a:cs typeface="Aptos" pitchFamily="34" charset="-120"/>
               </a:rPr>
-              <a:t>What equity, privacy, legal, security, or public trust risks.</a:t>
-            </a:r>
-            <a:endParaRPr lang="en-US" sz="1220" dirty="0"/>
-          </a:p>
-          <a:p>
-            <a:pPr indent="0" marL="0">
-              <a:buNone/>
-            </a:pPr>
-            <a:r>
-              <a:rPr lang="en-US" sz="1220" dirty="0">
+              <a:t>What equity, privacy, legal, security, or public.</a:t>
+            </a:r>
+            <a:endParaRPr lang="en-US" sz="1140" dirty="0"/>
+          </a:p>
+          <a:p>
+            <a:pPr indent="0" marL="0">
+              <a:buNone/>
+            </a:pPr>
+            <a:r>
+              <a:rPr lang="en-US" sz="1140" dirty="0">
                 <a:solidFill>
                   <a:srgbClr val="17364A"/>
                 </a:solidFill>
@@ -7131,9 +7131,9 @@
                 <a:ea typeface="Aptos" pitchFamily="34" charset="-122"/>
                 <a:cs typeface="Aptos" pitchFamily="34" charset="-120"/>
               </a:rPr>
-              <a:t>How will the agency know when the workflow needs to be revised?</a:t>
-            </a:r>
-            <a:endParaRPr lang="en-US" sz="1220" dirty="0"/>
+              <a:t>How will the agency know when the workflow needs.</a:t>
+            </a:r>
+            <a:endParaRPr lang="en-US" sz="1140" dirty="0"/>
           </a:p>
         </p:txBody>
       </p:sp>
@@ -7145,12 +7145,12 @@
         </p:nvSpPr>
         <p:spPr>
           <a:xfrm>
-            <a:off x="7635240" y="4184294"/>
-            <a:ext cx="3474720" cy="1466698"/>
+            <a:off x="7543800" y="4389120"/>
+            <a:ext cx="3611880" cy="1261872"/>
           </a:xfrm>
           <a:prstGeom prst="roundRect">
             <a:avLst>
-              <a:gd name="adj" fmla="val 7481"/>
+              <a:gd name="adj" fmla="val 8696"/>
             </a:avLst>
           </a:prstGeom>
           <a:solidFill>
@@ -7172,8 +7172,8 @@
         </p:nvSpPr>
         <p:spPr>
           <a:xfrm>
-            <a:off x="7799832" y="4330598"/>
-            <a:ext cx="3145536" cy="256032"/>
+            <a:off x="7708392" y="4517136"/>
+            <a:ext cx="3282696" cy="228600"/>
           </a:xfrm>
           <a:prstGeom prst="rect">
             <a:avLst/>
@@ -7189,7 +7189,7 @@
               <a:buNone/>
             </a:pPr>
             <a:r>
-              <a:rPr lang="en-US" sz="1300" b="1" dirty="0">
+              <a:rPr lang="en-US" sz="1220" b="1" dirty="0">
                 <a:solidFill>
                   <a:srgbClr val="0068B7"/>
                 </a:solidFill>
@@ -7199,7 +7199,7 @@
               </a:rPr>
               <a:t>What to document</a:t>
             </a:r>
-            <a:endParaRPr lang="en-US" sz="1300" dirty="0"/>
+            <a:endParaRPr lang="en-US" sz="1220" dirty="0"/>
           </a:p>
         </p:txBody>
       </p:sp>
@@ -7211,8 +7211,8 @@
         </p:nvSpPr>
         <p:spPr>
           <a:xfrm>
-            <a:off x="7799832" y="4659782"/>
-            <a:ext cx="3145536" cy="899770"/>
+            <a:off x="7708392" y="4828032"/>
+            <a:ext cx="3282696" cy="749808"/>
           </a:xfrm>
           <a:prstGeom prst="rect">
             <a:avLst/>
@@ -7230,7 +7230,7 @@
               <a:buNone/>
             </a:pPr>
             <a:r>
-              <a:rPr lang="en-US" sz="1320" dirty="0">
+              <a:rPr lang="en-US" sz="1220" dirty="0">
                 <a:solidFill>
                   <a:srgbClr val="17364A"/>
                 </a:solidFill>
@@ -7238,9 +7238,9 @@
                 <a:ea typeface="Aptos" pitchFamily="34" charset="-122"/>
                 <a:cs typeface="Aptos" pitchFamily="34" charset="-120"/>
               </a:rPr>
-              <a:t>Translate this concept into clear decision rights, review steps, documentation expectations, and escalation paths before an AI-supported workflow is approved.</a:t>
-            </a:r>
-            <a:endParaRPr lang="en-US" sz="1320" dirty="0"/>
+              <a:t>Translate this concept into clear decision rights, review steps, documentation.</a:t>
+            </a:r>
+            <a:endParaRPr lang="en-US" sz="1220" dirty="0"/>
           </a:p>
         </p:txBody>
       </p:sp>
@@ -7531,8 +7531,8 @@
         </p:nvSpPr>
         <p:spPr>
           <a:xfrm>
-            <a:off x="868680" y="1508760"/>
-            <a:ext cx="6309360" cy="4160520"/>
+            <a:off x="822960" y="1463040"/>
+            <a:ext cx="6565392" cy="4343400"/>
           </a:xfrm>
           <a:prstGeom prst="rect">
             <a:avLst/>
@@ -7550,7 +7550,7 @@
               <a:buNone/>
             </a:pPr>
             <a:r>
-              <a:rPr lang="en-US" sz="2100" dirty="0">
+              <a:rPr lang="en-US" sz="1920" dirty="0">
                 <a:solidFill>
                   <a:srgbClr val="003A63"/>
                 </a:solidFill>
@@ -7558,16 +7558,16 @@
                 <a:ea typeface="Aptos" pitchFamily="34" charset="-122"/>
                 <a:cs typeface="Aptos" pitchFamily="34" charset="-120"/>
               </a:rPr>
-              <a:t>• Create a practical ai policy development and approval workflow artifact for one AI-supported.</a:t>
-            </a:r>
-            <a:endParaRPr lang="en-US" sz="2100" dirty="0"/>
-          </a:p>
-          <a:p>
-            <a:pPr indent="0" marL="0">
-              <a:buNone/>
-            </a:pPr>
-            <a:r>
-              <a:rPr lang="en-US" sz="2100" dirty="0">
+              <a:t>• Create a practical ai policy development and approval workflow artifact for.</a:t>
+            </a:r>
+            <a:endParaRPr lang="en-US" sz="1920" dirty="0"/>
+          </a:p>
+          <a:p>
+            <a:pPr indent="0" marL="0">
+              <a:buNone/>
+            </a:pPr>
+            <a:r>
+              <a:rPr lang="en-US" sz="1920" dirty="0">
                 <a:solidFill>
                   <a:srgbClr val="003A63"/>
                 </a:solidFill>
@@ -7575,9 +7575,9 @@
                 <a:ea typeface="Aptos" pitchFamily="34" charset="-122"/>
                 <a:cs typeface="Aptos" pitchFamily="34" charset="-120"/>
               </a:rPr>
-              <a:t>• The artifact should define the use case, affected roles, review criteria, safeguards,.</a:t>
-            </a:r>
-            <a:endParaRPr lang="en-US" sz="2100" dirty="0"/>
+              <a:t>• The artifact should define the use case, affected roles, review criteria,.</a:t>
+            </a:r>
+            <a:endParaRPr lang="en-US" sz="1920" dirty="0"/>
           </a:p>
         </p:txBody>
       </p:sp>
@@ -7589,12 +7589,12 @@
         </p:nvSpPr>
         <p:spPr>
           <a:xfrm>
-            <a:off x="7635240" y="1325880"/>
-            <a:ext cx="3474720" cy="1255471"/>
+            <a:off x="7543800" y="1325880"/>
+            <a:ext cx="3611880" cy="1261872"/>
           </a:xfrm>
           <a:prstGeom prst="roundRect">
             <a:avLst>
-              <a:gd name="adj" fmla="val 8740"/>
+              <a:gd name="adj" fmla="val 8696"/>
             </a:avLst>
           </a:prstGeom>
           <a:solidFill>
@@ -7616,8 +7616,8 @@
         </p:nvSpPr>
         <p:spPr>
           <a:xfrm>
-            <a:off x="7799832" y="1472184"/>
-            <a:ext cx="3145536" cy="256032"/>
+            <a:off x="7708392" y="1453896"/>
+            <a:ext cx="3282696" cy="228600"/>
           </a:xfrm>
           <a:prstGeom prst="rect">
             <a:avLst/>
@@ -7633,7 +7633,7 @@
               <a:buNone/>
             </a:pPr>
             <a:r>
-              <a:rPr lang="en-US" sz="1300" b="1" dirty="0">
+              <a:rPr lang="en-US" sz="1220" b="1" dirty="0">
                 <a:solidFill>
                   <a:srgbClr val="0068B7"/>
                 </a:solidFill>
@@ -7643,7 +7643,7 @@
               </a:rPr>
               <a:t>Governance lens</a:t>
             </a:r>
-            <a:endParaRPr lang="en-US" sz="1300" dirty="0"/>
+            <a:endParaRPr lang="en-US" sz="1220" dirty="0"/>
           </a:p>
         </p:txBody>
       </p:sp>
@@ -7655,8 +7655,8 @@
         </p:nvSpPr>
         <p:spPr>
           <a:xfrm>
-            <a:off x="7799832" y="1801368"/>
-            <a:ext cx="3145536" cy="688543"/>
+            <a:off x="7708392" y="1764792"/>
+            <a:ext cx="3282696" cy="749808"/>
           </a:xfrm>
           <a:prstGeom prst="rect">
             <a:avLst/>
@@ -7674,7 +7674,7 @@
               <a:buNone/>
             </a:pPr>
             <a:r>
-              <a:rPr lang="en-US" sz="1320" dirty="0">
+              <a:rPr lang="en-US" sz="1220" dirty="0">
                 <a:solidFill>
                   <a:srgbClr val="17364A"/>
                 </a:solidFill>
@@ -7682,9 +7682,9 @@
                 <a:ea typeface="Aptos" pitchFamily="34" charset="-122"/>
                 <a:cs typeface="Aptos" pitchFamily="34" charset="-120"/>
               </a:rPr>
-              <a:t>Create a practical ai policy development and approval workflow artifact for one AI-supported public.</a:t>
-            </a:r>
-            <a:endParaRPr lang="en-US" sz="1320" dirty="0"/>
+              <a:t>Create a practical ai policy development and approval workflow artifact for one.</a:t>
+            </a:r>
+            <a:endParaRPr lang="en-US" sz="1220" dirty="0"/>
           </a:p>
         </p:txBody>
       </p:sp>
@@ -7696,12 +7696,12 @@
         </p:nvSpPr>
         <p:spPr>
           <a:xfrm>
-            <a:off x="7635240" y="2718511"/>
-            <a:ext cx="3474720" cy="1328623"/>
+            <a:off x="7543800" y="2724912"/>
+            <a:ext cx="3611880" cy="1527048"/>
           </a:xfrm>
           <a:prstGeom prst="roundRect">
             <a:avLst>
-              <a:gd name="adj" fmla="val 8259"/>
+              <a:gd name="adj" fmla="val 7186"/>
             </a:avLst>
           </a:prstGeom>
           <a:solidFill>
@@ -7723,8 +7723,8 @@
         </p:nvSpPr>
         <p:spPr>
           <a:xfrm>
-            <a:off x="7799832" y="2864815"/>
-            <a:ext cx="3145536" cy="256032"/>
+            <a:off x="7708392" y="2852928"/>
+            <a:ext cx="3282696" cy="228600"/>
           </a:xfrm>
           <a:prstGeom prst="rect">
             <a:avLst/>
@@ -7740,7 +7740,7 @@
               <a:buNone/>
             </a:pPr>
             <a:r>
-              <a:rPr lang="en-US" sz="1300" b="1" dirty="0">
+              <a:rPr lang="en-US" sz="1220" b="1" dirty="0">
                 <a:solidFill>
                   <a:srgbClr val="0068B7"/>
                 </a:solidFill>
@@ -7750,7 +7750,7 @@
               </a:rPr>
               <a:t>Concept checkpoints</a:t>
             </a:r>
-            <a:endParaRPr lang="en-US" sz="1300" dirty="0"/>
+            <a:endParaRPr lang="en-US" sz="1220" dirty="0"/>
           </a:p>
         </p:txBody>
       </p:sp>
@@ -7762,8 +7762,8 @@
         </p:nvSpPr>
         <p:spPr>
           <a:xfrm>
-            <a:off x="7818120" y="3230575"/>
-            <a:ext cx="3090672" cy="670255"/>
+            <a:off x="7726680" y="3182112"/>
+            <a:ext cx="3227832" cy="960120"/>
           </a:xfrm>
           <a:prstGeom prst="rect">
             <a:avLst/>
@@ -7781,7 +7781,7 @@
               <a:buNone/>
             </a:pPr>
             <a:r>
-              <a:rPr lang="en-US" sz="1220" dirty="0">
+              <a:rPr lang="en-US" sz="1140" dirty="0">
                 <a:solidFill>
                   <a:srgbClr val="17364A"/>
                 </a:solidFill>
@@ -7789,16 +7789,16 @@
                 <a:ea typeface="Aptos" pitchFamily="34" charset="-122"/>
                 <a:cs typeface="Aptos" pitchFamily="34" charset="-120"/>
               </a:rPr>
-              <a:t>Create a practical ai policy development and approval workflow.</a:t>
-            </a:r>
-            <a:endParaRPr lang="en-US" sz="1220" dirty="0"/>
-          </a:p>
-          <a:p>
-            <a:pPr indent="0" marL="0">
-              <a:buNone/>
-            </a:pPr>
-            <a:r>
-              <a:rPr lang="en-US" sz="1220" dirty="0">
+              <a:t>Create a practical ai policy development and.</a:t>
+            </a:r>
+            <a:endParaRPr lang="en-US" sz="1140" dirty="0"/>
+          </a:p>
+          <a:p>
+            <a:pPr indent="0" marL="0">
+              <a:buNone/>
+            </a:pPr>
+            <a:r>
+              <a:rPr lang="en-US" sz="1140" dirty="0">
                 <a:solidFill>
                   <a:srgbClr val="17364A"/>
                 </a:solidFill>
@@ -7806,9 +7806,9 @@
                 <a:ea typeface="Aptos" pitchFamily="34" charset="-122"/>
                 <a:cs typeface="Aptos" pitchFamily="34" charset="-120"/>
               </a:rPr>
-              <a:t>The artifact should define the use case, affected roles, review.</a:t>
-            </a:r>
-            <a:endParaRPr lang="en-US" sz="1220" dirty="0"/>
+              <a:t>The artifact should define the use case, affected.</a:t>
+            </a:r>
+            <a:endParaRPr lang="en-US" sz="1140" dirty="0"/>
           </a:p>
         </p:txBody>
       </p:sp>
@@ -7820,12 +7820,12 @@
         </p:nvSpPr>
         <p:spPr>
           <a:xfrm>
-            <a:off x="7635240" y="4184294"/>
-            <a:ext cx="3474720" cy="1466698"/>
+            <a:off x="7543800" y="4389120"/>
+            <a:ext cx="3611880" cy="1261872"/>
           </a:xfrm>
           <a:prstGeom prst="roundRect">
             <a:avLst>
-              <a:gd name="adj" fmla="val 7481"/>
+              <a:gd name="adj" fmla="val 8696"/>
             </a:avLst>
           </a:prstGeom>
           <a:solidFill>
@@ -7847,8 +7847,8 @@
         </p:nvSpPr>
         <p:spPr>
           <a:xfrm>
-            <a:off x="7799832" y="4330598"/>
-            <a:ext cx="3145536" cy="256032"/>
+            <a:off x="7708392" y="4517136"/>
+            <a:ext cx="3282696" cy="228600"/>
           </a:xfrm>
           <a:prstGeom prst="rect">
             <a:avLst/>
@@ -7864,7 +7864,7 @@
               <a:buNone/>
             </a:pPr>
             <a:r>
-              <a:rPr lang="en-US" sz="1300" b="1" dirty="0">
+              <a:rPr lang="en-US" sz="1220" b="1" dirty="0">
                 <a:solidFill>
                   <a:srgbClr val="0068B7"/>
                 </a:solidFill>
@@ -7874,7 +7874,7 @@
               </a:rPr>
               <a:t>What to document</a:t>
             </a:r>
-            <a:endParaRPr lang="en-US" sz="1300" dirty="0"/>
+            <a:endParaRPr lang="en-US" sz="1220" dirty="0"/>
           </a:p>
         </p:txBody>
       </p:sp>
@@ -7886,8 +7886,8 @@
         </p:nvSpPr>
         <p:spPr>
           <a:xfrm>
-            <a:off x="7799832" y="4659782"/>
-            <a:ext cx="3145536" cy="899770"/>
+            <a:off x="7708392" y="4828032"/>
+            <a:ext cx="3282696" cy="749808"/>
           </a:xfrm>
           <a:prstGeom prst="rect">
             <a:avLst/>
@@ -7905,7 +7905,7 @@
               <a:buNone/>
             </a:pPr>
             <a:r>
-              <a:rPr lang="en-US" sz="1320" dirty="0">
+              <a:rPr lang="en-US" sz="1220" dirty="0">
                 <a:solidFill>
                   <a:srgbClr val="17364A"/>
                 </a:solidFill>
@@ -7913,9 +7913,9 @@
                 <a:ea typeface="Aptos" pitchFamily="34" charset="-122"/>
                 <a:cs typeface="Aptos" pitchFamily="34" charset="-120"/>
               </a:rPr>
-              <a:t>Use the assignment to test whether you can explain the concept, apply it to a realistic public health situation, and identify what would need review before the work moves forward.</a:t>
-            </a:r>
-            <a:endParaRPr lang="en-US" sz="1320" dirty="0"/>
+              <a:t>Use the assignment to test whether you can explain the concept, apply it to a.</a:t>
+            </a:r>
+            <a:endParaRPr lang="en-US" sz="1220" dirty="0"/>
           </a:p>
         </p:txBody>
       </p:sp>
@@ -8206,8 +8206,8 @@
         </p:nvSpPr>
         <p:spPr>
           <a:xfrm>
-            <a:off x="868680" y="1508760"/>
-            <a:ext cx="6309360" cy="4160520"/>
+            <a:off x="822960" y="1463040"/>
+            <a:ext cx="6565392" cy="4343400"/>
           </a:xfrm>
           <a:prstGeom prst="rect">
             <a:avLst/>
@@ -8225,7 +8225,7 @@
               <a:buNone/>
             </a:pPr>
             <a:r>
-              <a:rPr lang="en-US" sz="2100" dirty="0">
+              <a:rPr lang="en-US" sz="1920" dirty="0">
                 <a:solidFill>
                   <a:srgbClr val="003A63"/>
                 </a:solidFill>
@@ -8235,14 +8235,14 @@
               </a:rPr>
               <a:t>• AI Policy Development and Approval Workflow artifact</a:t>
             </a:r>
-            <a:endParaRPr lang="en-US" sz="2100" dirty="0"/>
-          </a:p>
-          <a:p>
-            <a:pPr indent="0" marL="0">
-              <a:buNone/>
-            </a:pPr>
-            <a:r>
-              <a:rPr lang="en-US" sz="2100" dirty="0">
+            <a:endParaRPr lang="en-US" sz="1920" dirty="0"/>
+          </a:p>
+          <a:p>
+            <a:pPr indent="0" marL="0">
+              <a:buNone/>
+            </a:pPr>
+            <a:r>
+              <a:rPr lang="en-US" sz="1920" dirty="0">
                 <a:solidFill>
                   <a:srgbClr val="003A63"/>
                 </a:solidFill>
@@ -8252,14 +8252,14 @@
               </a:rPr>
               <a:t>• Role and responsibility table</a:t>
             </a:r>
-            <a:endParaRPr lang="en-US" sz="2100" dirty="0"/>
-          </a:p>
-          <a:p>
-            <a:pPr indent="0" marL="0">
-              <a:buNone/>
-            </a:pPr>
-            <a:r>
-              <a:rPr lang="en-US" sz="2100" dirty="0">
+            <a:endParaRPr lang="en-US" sz="1920" dirty="0"/>
+          </a:p>
+          <a:p>
+            <a:pPr indent="0" marL="0">
+              <a:buNone/>
+            </a:pPr>
+            <a:r>
+              <a:rPr lang="en-US" sz="1920" dirty="0">
                 <a:solidFill>
                   <a:srgbClr val="003A63"/>
                 </a:solidFill>
@@ -8269,7 +8269,7 @@
               </a:rPr>
               <a:t>• Risk and safeguard summary</a:t>
             </a:r>
-            <a:endParaRPr lang="en-US" sz="2100" dirty="0"/>
+            <a:endParaRPr lang="en-US" sz="1920" dirty="0"/>
           </a:p>
         </p:txBody>
       </p:sp>
@@ -8281,12 +8281,12 @@
         </p:nvSpPr>
         <p:spPr>
           <a:xfrm>
-            <a:off x="7635240" y="1325880"/>
-            <a:ext cx="3474720" cy="1207008"/>
+            <a:off x="7543800" y="1325880"/>
+            <a:ext cx="3611880" cy="1261872"/>
           </a:xfrm>
           <a:prstGeom prst="roundRect">
             <a:avLst>
-              <a:gd name="adj" fmla="val 9091"/>
+              <a:gd name="adj" fmla="val 8696"/>
             </a:avLst>
           </a:prstGeom>
           <a:solidFill>
@@ -8308,8 +8308,8 @@
         </p:nvSpPr>
         <p:spPr>
           <a:xfrm>
-            <a:off x="7799832" y="1472184"/>
-            <a:ext cx="3145536" cy="256032"/>
+            <a:off x="7708392" y="1453896"/>
+            <a:ext cx="3282696" cy="228600"/>
           </a:xfrm>
           <a:prstGeom prst="rect">
             <a:avLst/>
@@ -8325,7 +8325,7 @@
               <a:buNone/>
             </a:pPr>
             <a:r>
-              <a:rPr lang="en-US" sz="1300" b="1" dirty="0">
+              <a:rPr lang="en-US" sz="1220" b="1" dirty="0">
                 <a:solidFill>
                   <a:srgbClr val="0068B7"/>
                 </a:solidFill>
@@ -8335,7 +8335,7 @@
               </a:rPr>
               <a:t>Governance lens</a:t>
             </a:r>
-            <a:endParaRPr lang="en-US" sz="1300" dirty="0"/>
+            <a:endParaRPr lang="en-US" sz="1220" dirty="0"/>
           </a:p>
         </p:txBody>
       </p:sp>
@@ -8347,8 +8347,8 @@
         </p:nvSpPr>
         <p:spPr>
           <a:xfrm>
-            <a:off x="7799832" y="1801368"/>
-            <a:ext cx="3145536" cy="640080"/>
+            <a:off x="7708392" y="1764792"/>
+            <a:ext cx="3282696" cy="749808"/>
           </a:xfrm>
           <a:prstGeom prst="rect">
             <a:avLst/>
@@ -8366,7 +8366,7 @@
               <a:buNone/>
             </a:pPr>
             <a:r>
-              <a:rPr lang="en-US" sz="1320" dirty="0">
+              <a:rPr lang="en-US" sz="1220" dirty="0">
                 <a:solidFill>
                   <a:srgbClr val="17364A"/>
                 </a:solidFill>
@@ -8376,7 +8376,7 @@
               </a:rPr>
               <a:t>AI Policy Development and Approval Workflow artifact</a:t>
             </a:r>
-            <a:endParaRPr lang="en-US" sz="1320" dirty="0"/>
+            <a:endParaRPr lang="en-US" sz="1220" dirty="0"/>
           </a:p>
         </p:txBody>
       </p:sp>
@@ -8388,12 +8388,12 @@
         </p:nvSpPr>
         <p:spPr>
           <a:xfrm>
-            <a:off x="7635240" y="2670048"/>
-            <a:ext cx="3474720" cy="1377086"/>
+            <a:off x="7543800" y="2724912"/>
+            <a:ext cx="3611880" cy="1527048"/>
           </a:xfrm>
           <a:prstGeom prst="roundRect">
             <a:avLst>
-              <a:gd name="adj" fmla="val 7968"/>
+              <a:gd name="adj" fmla="val 7186"/>
             </a:avLst>
           </a:prstGeom>
           <a:solidFill>
@@ -8415,8 +8415,8 @@
         </p:nvSpPr>
         <p:spPr>
           <a:xfrm>
-            <a:off x="7799832" y="2816352"/>
-            <a:ext cx="3145536" cy="256032"/>
+            <a:off x="7708392" y="2852928"/>
+            <a:ext cx="3282696" cy="228600"/>
           </a:xfrm>
           <a:prstGeom prst="rect">
             <a:avLst/>
@@ -8432,7 +8432,7 @@
               <a:buNone/>
             </a:pPr>
             <a:r>
-              <a:rPr lang="en-US" sz="1300" b="1" dirty="0">
+              <a:rPr lang="en-US" sz="1220" b="1" dirty="0">
                 <a:solidFill>
                   <a:srgbClr val="0068B7"/>
                 </a:solidFill>
@@ -8442,7 +8442,7 @@
               </a:rPr>
               <a:t>Concept checkpoints</a:t>
             </a:r>
-            <a:endParaRPr lang="en-US" sz="1300" dirty="0"/>
+            <a:endParaRPr lang="en-US" sz="1220" dirty="0"/>
           </a:p>
         </p:txBody>
       </p:sp>
@@ -8454,8 +8454,8 @@
         </p:nvSpPr>
         <p:spPr>
           <a:xfrm>
-            <a:off x="7818120" y="3182112"/>
-            <a:ext cx="3090672" cy="718718"/>
+            <a:off x="7726680" y="3182112"/>
+            <a:ext cx="3227832" cy="960120"/>
           </a:xfrm>
           <a:prstGeom prst="rect">
             <a:avLst/>
@@ -8473,7 +8473,7 @@
               <a:buNone/>
             </a:pPr>
             <a:r>
-              <a:rPr lang="en-US" sz="1220" dirty="0">
+              <a:rPr lang="en-US" sz="1140" dirty="0">
                 <a:solidFill>
                   <a:srgbClr val="17364A"/>
                 </a:solidFill>
@@ -8483,14 +8483,14 @@
               </a:rPr>
               <a:t>AI Policy Development and Approval Workflow artifact</a:t>
             </a:r>
-            <a:endParaRPr lang="en-US" sz="1220" dirty="0"/>
-          </a:p>
-          <a:p>
-            <a:pPr indent="0" marL="0">
-              <a:buNone/>
-            </a:pPr>
-            <a:r>
-              <a:rPr lang="en-US" sz="1220" dirty="0">
+            <a:endParaRPr lang="en-US" sz="1140" dirty="0"/>
+          </a:p>
+          <a:p>
+            <a:pPr indent="0" marL="0">
+              <a:buNone/>
+            </a:pPr>
+            <a:r>
+              <a:rPr lang="en-US" sz="1140" dirty="0">
                 <a:solidFill>
                   <a:srgbClr val="17364A"/>
                 </a:solidFill>
@@ -8500,14 +8500,14 @@
               </a:rPr>
               <a:t>Role and responsibility table</a:t>
             </a:r>
-            <a:endParaRPr lang="en-US" sz="1220" dirty="0"/>
-          </a:p>
-          <a:p>
-            <a:pPr indent="0" marL="0">
-              <a:buNone/>
-            </a:pPr>
-            <a:r>
-              <a:rPr lang="en-US" sz="1220" dirty="0">
+            <a:endParaRPr lang="en-US" sz="1140" dirty="0"/>
+          </a:p>
+          <a:p>
+            <a:pPr indent="0" marL="0">
+              <a:buNone/>
+            </a:pPr>
+            <a:r>
+              <a:rPr lang="en-US" sz="1140" dirty="0">
                 <a:solidFill>
                   <a:srgbClr val="17364A"/>
                 </a:solidFill>
@@ -8517,7 +8517,7 @@
               </a:rPr>
               <a:t>Risk and safeguard summary</a:t>
             </a:r>
-            <a:endParaRPr lang="en-US" sz="1220" dirty="0"/>
+            <a:endParaRPr lang="en-US" sz="1140" dirty="0"/>
           </a:p>
         </p:txBody>
       </p:sp>
@@ -8529,12 +8529,12 @@
         </p:nvSpPr>
         <p:spPr>
           <a:xfrm>
-            <a:off x="7635240" y="4184294"/>
-            <a:ext cx="3474720" cy="1466698"/>
+            <a:off x="7543800" y="4389120"/>
+            <a:ext cx="3611880" cy="1261872"/>
           </a:xfrm>
           <a:prstGeom prst="roundRect">
             <a:avLst>
-              <a:gd name="adj" fmla="val 7481"/>
+              <a:gd name="adj" fmla="val 8696"/>
             </a:avLst>
           </a:prstGeom>
           <a:solidFill>
@@ -8556,8 +8556,8 @@
         </p:nvSpPr>
         <p:spPr>
           <a:xfrm>
-            <a:off x="7799832" y="4330598"/>
-            <a:ext cx="3145536" cy="256032"/>
+            <a:off x="7708392" y="4517136"/>
+            <a:ext cx="3282696" cy="228600"/>
           </a:xfrm>
           <a:prstGeom prst="rect">
             <a:avLst/>
@@ -8573,7 +8573,7 @@
               <a:buNone/>
             </a:pPr>
             <a:r>
-              <a:rPr lang="en-US" sz="1300" b="1" dirty="0">
+              <a:rPr lang="en-US" sz="1220" b="1" dirty="0">
                 <a:solidFill>
                   <a:srgbClr val="0068B7"/>
                 </a:solidFill>
@@ -8583,7 +8583,7 @@
               </a:rPr>
               <a:t>What to document</a:t>
             </a:r>
-            <a:endParaRPr lang="en-US" sz="1300" dirty="0"/>
+            <a:endParaRPr lang="en-US" sz="1220" dirty="0"/>
           </a:p>
         </p:txBody>
       </p:sp>
@@ -8595,8 +8595,8 @@
         </p:nvSpPr>
         <p:spPr>
           <a:xfrm>
-            <a:off x="7799832" y="4659782"/>
-            <a:ext cx="3145536" cy="899770"/>
+            <a:off x="7708392" y="4828032"/>
+            <a:ext cx="3282696" cy="749808"/>
           </a:xfrm>
           <a:prstGeom prst="rect">
             <a:avLst/>
@@ -8614,7 +8614,7 @@
               <a:buNone/>
             </a:pPr>
             <a:r>
-              <a:rPr lang="en-US" sz="1320" dirty="0">
+              <a:rPr lang="en-US" sz="1220" dirty="0">
                 <a:solidFill>
                   <a:srgbClr val="17364A"/>
                 </a:solidFill>
@@ -8622,9 +8622,9 @@
                 <a:ea typeface="Aptos" pitchFamily="34" charset="-122"/>
                 <a:cs typeface="Aptos" pitchFamily="34" charset="-120"/>
               </a:rPr>
-              <a:t>Translate this concept into clear decision rights, review steps, documentation expectations, and escalation paths before an AI-supported workflow is approved.</a:t>
-            </a:r>
-            <a:endParaRPr lang="en-US" sz="1320" dirty="0"/>
+              <a:t>Translate this concept into clear decision rights, review steps, documentation.</a:t>
+            </a:r>
+            <a:endParaRPr lang="en-US" sz="1220" dirty="0"/>
           </a:p>
         </p:txBody>
       </p:sp>
@@ -8915,8 +8915,8 @@
         </p:nvSpPr>
         <p:spPr>
           <a:xfrm>
-            <a:off x="868680" y="1508760"/>
-            <a:ext cx="6309360" cy="4160520"/>
+            <a:off x="822960" y="1463040"/>
+            <a:ext cx="6565392" cy="4343400"/>
           </a:xfrm>
           <a:prstGeom prst="rect">
             <a:avLst/>
@@ -8934,7 +8934,7 @@
               <a:buNone/>
             </a:pPr>
             <a:r>
-              <a:rPr lang="en-US" sz="2100" dirty="0">
+              <a:rPr lang="en-US" sz="1920" dirty="0">
                 <a:solidFill>
                   <a:srgbClr val="003A63"/>
                 </a:solidFill>
@@ -8944,14 +8944,14 @@
               </a:rPr>
               <a:t>• Escalation and monitoring plan</a:t>
             </a:r>
-            <a:endParaRPr lang="en-US" sz="2100" dirty="0"/>
-          </a:p>
-          <a:p>
-            <a:pPr indent="0" marL="0">
-              <a:buNone/>
-            </a:pPr>
-            <a:r>
-              <a:rPr lang="en-US" sz="2100" dirty="0">
+            <a:endParaRPr lang="en-US" sz="1920" dirty="0"/>
+          </a:p>
+          <a:p>
+            <a:pPr indent="0" marL="0">
+              <a:buNone/>
+            </a:pPr>
+            <a:r>
+              <a:rPr lang="en-US" sz="1920" dirty="0">
                 <a:solidFill>
                   <a:srgbClr val="003A63"/>
                 </a:solidFill>
@@ -8961,7 +8961,7 @@
               </a:rPr>
               <a:t>• Approval or review note</a:t>
             </a:r>
-            <a:endParaRPr lang="en-US" sz="2100" dirty="0"/>
+            <a:endParaRPr lang="en-US" sz="1920" dirty="0"/>
           </a:p>
         </p:txBody>
       </p:sp>
@@ -8973,12 +8973,12 @@
         </p:nvSpPr>
         <p:spPr>
           <a:xfrm>
-            <a:off x="7635240" y="1325880"/>
-            <a:ext cx="3474720" cy="1207008"/>
+            <a:off x="7543800" y="1325880"/>
+            <a:ext cx="3611880" cy="1261872"/>
           </a:xfrm>
           <a:prstGeom prst="roundRect">
             <a:avLst>
-              <a:gd name="adj" fmla="val 9091"/>
+              <a:gd name="adj" fmla="val 8696"/>
             </a:avLst>
           </a:prstGeom>
           <a:solidFill>
@@ -9000,8 +9000,8 @@
         </p:nvSpPr>
         <p:spPr>
           <a:xfrm>
-            <a:off x="7799832" y="1472184"/>
-            <a:ext cx="3145536" cy="256032"/>
+            <a:off x="7708392" y="1453896"/>
+            <a:ext cx="3282696" cy="228600"/>
           </a:xfrm>
           <a:prstGeom prst="rect">
             <a:avLst/>
@@ -9017,7 +9017,7 @@
               <a:buNone/>
             </a:pPr>
             <a:r>
-              <a:rPr lang="en-US" sz="1300" b="1" dirty="0">
+              <a:rPr lang="en-US" sz="1220" b="1" dirty="0">
                 <a:solidFill>
                   <a:srgbClr val="0068B7"/>
                 </a:solidFill>
@@ -9027,7 +9027,7 @@
               </a:rPr>
               <a:t>Governance lens</a:t>
             </a:r>
-            <a:endParaRPr lang="en-US" sz="1300" dirty="0"/>
+            <a:endParaRPr lang="en-US" sz="1220" dirty="0"/>
           </a:p>
         </p:txBody>
       </p:sp>
@@ -9039,8 +9039,8 @@
         </p:nvSpPr>
         <p:spPr>
           <a:xfrm>
-            <a:off x="7799832" y="1801368"/>
-            <a:ext cx="3145536" cy="640080"/>
+            <a:off x="7708392" y="1764792"/>
+            <a:ext cx="3282696" cy="749808"/>
           </a:xfrm>
           <a:prstGeom prst="rect">
             <a:avLst/>
@@ -9058,7 +9058,7 @@
               <a:buNone/>
             </a:pPr>
             <a:r>
-              <a:rPr lang="en-US" sz="1320" dirty="0">
+              <a:rPr lang="en-US" sz="1220" dirty="0">
                 <a:solidFill>
                   <a:srgbClr val="17364A"/>
                 </a:solidFill>
@@ -9068,7 +9068,7 @@
               </a:rPr>
               <a:t>Escalation and monitoring plan</a:t>
             </a:r>
-            <a:endParaRPr lang="en-US" sz="1320" dirty="0"/>
+            <a:endParaRPr lang="en-US" sz="1220" dirty="0"/>
           </a:p>
         </p:txBody>
       </p:sp>
@@ -9080,12 +9080,12 @@
         </p:nvSpPr>
         <p:spPr>
           <a:xfrm>
-            <a:off x="7635240" y="2670048"/>
-            <a:ext cx="3474720" cy="1377086"/>
+            <a:off x="7543800" y="2724912"/>
+            <a:ext cx="3611880" cy="1527048"/>
           </a:xfrm>
           <a:prstGeom prst="roundRect">
             <a:avLst>
-              <a:gd name="adj" fmla="val 7968"/>
+              <a:gd name="adj" fmla="val 7186"/>
             </a:avLst>
           </a:prstGeom>
           <a:solidFill>
@@ -9107,8 +9107,8 @@
         </p:nvSpPr>
         <p:spPr>
           <a:xfrm>
-            <a:off x="7799832" y="2816352"/>
-            <a:ext cx="3145536" cy="256032"/>
+            <a:off x="7708392" y="2852928"/>
+            <a:ext cx="3282696" cy="228600"/>
           </a:xfrm>
           <a:prstGeom prst="rect">
             <a:avLst/>
@@ -9124,7 +9124,7 @@
               <a:buNone/>
             </a:pPr>
             <a:r>
-              <a:rPr lang="en-US" sz="1300" b="1" dirty="0">
+              <a:rPr lang="en-US" sz="1220" b="1" dirty="0">
                 <a:solidFill>
                   <a:srgbClr val="0068B7"/>
                 </a:solidFill>
@@ -9134,7 +9134,7 @@
               </a:rPr>
               <a:t>Concept checkpoints</a:t>
             </a:r>
-            <a:endParaRPr lang="en-US" sz="1300" dirty="0"/>
+            <a:endParaRPr lang="en-US" sz="1220" dirty="0"/>
           </a:p>
         </p:txBody>
       </p:sp>
@@ -9146,8 +9146,8 @@
         </p:nvSpPr>
         <p:spPr>
           <a:xfrm>
-            <a:off x="7818120" y="3182112"/>
-            <a:ext cx="3090672" cy="718718"/>
+            <a:off x="7726680" y="3182112"/>
+            <a:ext cx="3227832" cy="960120"/>
           </a:xfrm>
           <a:prstGeom prst="rect">
             <a:avLst/>
@@ -9165,7 +9165,7 @@
               <a:buNone/>
             </a:pPr>
             <a:r>
-              <a:rPr lang="en-US" sz="1220" dirty="0">
+              <a:rPr lang="en-US" sz="1140" dirty="0">
                 <a:solidFill>
                   <a:srgbClr val="17364A"/>
                 </a:solidFill>
@@ -9175,14 +9175,14 @@
               </a:rPr>
               <a:t>Escalation and monitoring plan</a:t>
             </a:r>
-            <a:endParaRPr lang="en-US" sz="1220" dirty="0"/>
-          </a:p>
-          <a:p>
-            <a:pPr indent="0" marL="0">
-              <a:buNone/>
-            </a:pPr>
-            <a:r>
-              <a:rPr lang="en-US" sz="1220" dirty="0">
+            <a:endParaRPr lang="en-US" sz="1140" dirty="0"/>
+          </a:p>
+          <a:p>
+            <a:pPr indent="0" marL="0">
+              <a:buNone/>
+            </a:pPr>
+            <a:r>
+              <a:rPr lang="en-US" sz="1140" dirty="0">
                 <a:solidFill>
                   <a:srgbClr val="17364A"/>
                 </a:solidFill>
@@ -9192,7 +9192,7 @@
               </a:rPr>
               <a:t>Approval or review note</a:t>
             </a:r>
-            <a:endParaRPr lang="en-US" sz="1220" dirty="0"/>
+            <a:endParaRPr lang="en-US" sz="1140" dirty="0"/>
           </a:p>
         </p:txBody>
       </p:sp>
@@ -9204,12 +9204,12 @@
         </p:nvSpPr>
         <p:spPr>
           <a:xfrm>
-            <a:off x="7635240" y="4184294"/>
-            <a:ext cx="3474720" cy="1466698"/>
+            <a:off x="7543800" y="4389120"/>
+            <a:ext cx="3611880" cy="1261872"/>
           </a:xfrm>
           <a:prstGeom prst="roundRect">
             <a:avLst>
-              <a:gd name="adj" fmla="val 7481"/>
+              <a:gd name="adj" fmla="val 8696"/>
             </a:avLst>
           </a:prstGeom>
           <a:solidFill>
@@ -9231,8 +9231,8 @@
         </p:nvSpPr>
         <p:spPr>
           <a:xfrm>
-            <a:off x="7799832" y="4330598"/>
-            <a:ext cx="3145536" cy="256032"/>
+            <a:off x="7708392" y="4517136"/>
+            <a:ext cx="3282696" cy="228600"/>
           </a:xfrm>
           <a:prstGeom prst="rect">
             <a:avLst/>
@@ -9248,7 +9248,7 @@
               <a:buNone/>
             </a:pPr>
             <a:r>
-              <a:rPr lang="en-US" sz="1300" b="1" dirty="0">
+              <a:rPr lang="en-US" sz="1220" b="1" dirty="0">
                 <a:solidFill>
                   <a:srgbClr val="0068B7"/>
                 </a:solidFill>
@@ -9258,7 +9258,7 @@
               </a:rPr>
               <a:t>What to document</a:t>
             </a:r>
-            <a:endParaRPr lang="en-US" sz="1300" dirty="0"/>
+            <a:endParaRPr lang="en-US" sz="1220" dirty="0"/>
           </a:p>
         </p:txBody>
       </p:sp>
@@ -9270,8 +9270,8 @@
         </p:nvSpPr>
         <p:spPr>
           <a:xfrm>
-            <a:off x="7799832" y="4659782"/>
-            <a:ext cx="3145536" cy="899770"/>
+            <a:off x="7708392" y="4828032"/>
+            <a:ext cx="3282696" cy="749808"/>
           </a:xfrm>
           <a:prstGeom prst="rect">
             <a:avLst/>
@@ -9289,7 +9289,7 @@
               <a:buNone/>
             </a:pPr>
             <a:r>
-              <a:rPr lang="en-US" sz="1320" dirty="0">
+              <a:rPr lang="en-US" sz="1220" dirty="0">
                 <a:solidFill>
                   <a:srgbClr val="17364A"/>
                 </a:solidFill>
@@ -9297,9 +9297,9 @@
                 <a:ea typeface="Aptos" pitchFamily="34" charset="-122"/>
                 <a:cs typeface="Aptos" pitchFamily="34" charset="-120"/>
               </a:rPr>
-              <a:t>Translate this concept into clear decision rights, review steps, documentation expectations, and escalation paths before an AI-supported workflow is approved.</a:t>
-            </a:r>
-            <a:endParaRPr lang="en-US" sz="1320" dirty="0"/>
+              <a:t>Translate this concept into clear decision rights, review steps, documentation.</a:t>
+            </a:r>
+            <a:endParaRPr lang="en-US" sz="1220" dirty="0"/>
           </a:p>
         </p:txBody>
       </p:sp>
@@ -9590,8 +9590,8 @@
         </p:nvSpPr>
         <p:spPr>
           <a:xfrm>
-            <a:off x="868680" y="1508760"/>
-            <a:ext cx="6309360" cy="4160520"/>
+            <a:off x="822960" y="1463040"/>
+            <a:ext cx="6565392" cy="4343400"/>
           </a:xfrm>
           <a:prstGeom prst="rect">
             <a:avLst/>
@@ -9609,7 +9609,7 @@
               <a:buNone/>
             </a:pPr>
             <a:r>
-              <a:rPr lang="en-US" sz="2100" dirty="0">
+              <a:rPr lang="en-US" sz="1920" dirty="0">
                 <a:solidFill>
                   <a:srgbClr val="003A63"/>
                 </a:solidFill>
@@ -9619,14 +9619,14 @@
               </a:rPr>
               <a:t>• AI Policy Development and Approval Workflow artifact</a:t>
             </a:r>
-            <a:endParaRPr lang="en-US" sz="2100" dirty="0"/>
-          </a:p>
-          <a:p>
-            <a:pPr indent="0" marL="0">
-              <a:buNone/>
-            </a:pPr>
-            <a:r>
-              <a:rPr lang="en-US" sz="2100" dirty="0">
+            <a:endParaRPr lang="en-US" sz="1920" dirty="0"/>
+          </a:p>
+          <a:p>
+            <a:pPr indent="0" marL="0">
+              <a:buNone/>
+            </a:pPr>
+            <a:r>
+              <a:rPr lang="en-US" sz="1920" dirty="0">
                 <a:solidFill>
                   <a:srgbClr val="003A63"/>
                 </a:solidFill>
@@ -9636,14 +9636,14 @@
               </a:rPr>
               <a:t>• Role and responsibility table</a:t>
             </a:r>
-            <a:endParaRPr lang="en-US" sz="2100" dirty="0"/>
-          </a:p>
-          <a:p>
-            <a:pPr indent="0" marL="0">
-              <a:buNone/>
-            </a:pPr>
-            <a:r>
-              <a:rPr lang="en-US" sz="2100" dirty="0">
+            <a:endParaRPr lang="en-US" sz="1920" dirty="0"/>
+          </a:p>
+          <a:p>
+            <a:pPr indent="0" marL="0">
+              <a:buNone/>
+            </a:pPr>
+            <a:r>
+              <a:rPr lang="en-US" sz="1920" dirty="0">
                 <a:solidFill>
                   <a:srgbClr val="003A63"/>
                 </a:solidFill>
@@ -9653,7 +9653,7 @@
               </a:rPr>
               <a:t>• Risk and safeguard summary</a:t>
             </a:r>
-            <a:endParaRPr lang="en-US" sz="2100" dirty="0"/>
+            <a:endParaRPr lang="en-US" sz="1920" dirty="0"/>
           </a:p>
         </p:txBody>
       </p:sp>
@@ -9665,12 +9665,12 @@
         </p:nvSpPr>
         <p:spPr>
           <a:xfrm>
-            <a:off x="7635240" y="1325880"/>
-            <a:ext cx="3474720" cy="1207008"/>
+            <a:off x="7543800" y="1325880"/>
+            <a:ext cx="3611880" cy="1261872"/>
           </a:xfrm>
           <a:prstGeom prst="roundRect">
             <a:avLst>
-              <a:gd name="adj" fmla="val 9091"/>
+              <a:gd name="adj" fmla="val 8696"/>
             </a:avLst>
           </a:prstGeom>
           <a:solidFill>
@@ -9692,8 +9692,8 @@
         </p:nvSpPr>
         <p:spPr>
           <a:xfrm>
-            <a:off x="7799832" y="1472184"/>
-            <a:ext cx="3145536" cy="256032"/>
+            <a:off x="7708392" y="1453896"/>
+            <a:ext cx="3282696" cy="228600"/>
           </a:xfrm>
           <a:prstGeom prst="rect">
             <a:avLst/>
@@ -9709,7 +9709,7 @@
               <a:buNone/>
             </a:pPr>
             <a:r>
-              <a:rPr lang="en-US" sz="1300" b="1" dirty="0">
+              <a:rPr lang="en-US" sz="1220" b="1" dirty="0">
                 <a:solidFill>
                   <a:srgbClr val="0068B7"/>
                 </a:solidFill>
@@ -9719,7 +9719,7 @@
               </a:rPr>
               <a:t>Governance lens</a:t>
             </a:r>
-            <a:endParaRPr lang="en-US" sz="1300" dirty="0"/>
+            <a:endParaRPr lang="en-US" sz="1220" dirty="0"/>
           </a:p>
         </p:txBody>
       </p:sp>
@@ -9731,8 +9731,8 @@
         </p:nvSpPr>
         <p:spPr>
           <a:xfrm>
-            <a:off x="7799832" y="1801368"/>
-            <a:ext cx="3145536" cy="640080"/>
+            <a:off x="7708392" y="1764792"/>
+            <a:ext cx="3282696" cy="749808"/>
           </a:xfrm>
           <a:prstGeom prst="rect">
             <a:avLst/>
@@ -9750,7 +9750,7 @@
               <a:buNone/>
             </a:pPr>
             <a:r>
-              <a:rPr lang="en-US" sz="1320" dirty="0">
+              <a:rPr lang="en-US" sz="1220" dirty="0">
                 <a:solidFill>
                   <a:srgbClr val="17364A"/>
                 </a:solidFill>
@@ -9760,7 +9760,7 @@
               </a:rPr>
               <a:t>AI Policy Development and Approval Workflow artifact</a:t>
             </a:r>
-            <a:endParaRPr lang="en-US" sz="1320" dirty="0"/>
+            <a:endParaRPr lang="en-US" sz="1220" dirty="0"/>
           </a:p>
         </p:txBody>
       </p:sp>
@@ -9772,12 +9772,12 @@
         </p:nvSpPr>
         <p:spPr>
           <a:xfrm>
-            <a:off x="7635240" y="2670048"/>
-            <a:ext cx="3474720" cy="1377086"/>
+            <a:off x="7543800" y="2724912"/>
+            <a:ext cx="3611880" cy="1527048"/>
           </a:xfrm>
           <a:prstGeom prst="roundRect">
             <a:avLst>
-              <a:gd name="adj" fmla="val 7968"/>
+              <a:gd name="adj" fmla="val 7186"/>
             </a:avLst>
           </a:prstGeom>
           <a:solidFill>
@@ -9799,8 +9799,8 @@
         </p:nvSpPr>
         <p:spPr>
           <a:xfrm>
-            <a:off x="7799832" y="2816352"/>
-            <a:ext cx="3145536" cy="256032"/>
+            <a:off x="7708392" y="2852928"/>
+            <a:ext cx="3282696" cy="228600"/>
           </a:xfrm>
           <a:prstGeom prst="rect">
             <a:avLst/>
@@ -9816,7 +9816,7 @@
               <a:buNone/>
             </a:pPr>
             <a:r>
-              <a:rPr lang="en-US" sz="1300" b="1" dirty="0">
+              <a:rPr lang="en-US" sz="1220" b="1" dirty="0">
                 <a:solidFill>
                   <a:srgbClr val="0068B7"/>
                 </a:solidFill>
@@ -9826,7 +9826,7 @@
               </a:rPr>
               <a:t>Concept checkpoints</a:t>
             </a:r>
-            <a:endParaRPr lang="en-US" sz="1300" dirty="0"/>
+            <a:endParaRPr lang="en-US" sz="1220" dirty="0"/>
           </a:p>
         </p:txBody>
       </p:sp>
@@ -9838,8 +9838,8 @@
         </p:nvSpPr>
         <p:spPr>
           <a:xfrm>
-            <a:off x="7818120" y="3182112"/>
-            <a:ext cx="3090672" cy="718718"/>
+            <a:off x="7726680" y="3182112"/>
+            <a:ext cx="3227832" cy="960120"/>
           </a:xfrm>
           <a:prstGeom prst="rect">
             <a:avLst/>
@@ -9857,7 +9857,7 @@
               <a:buNone/>
             </a:pPr>
             <a:r>
-              <a:rPr lang="en-US" sz="1220" dirty="0">
+              <a:rPr lang="en-US" sz="1140" dirty="0">
                 <a:solidFill>
                   <a:srgbClr val="17364A"/>
                 </a:solidFill>
@@ -9867,14 +9867,14 @@
               </a:rPr>
               <a:t>Escalation and monitoring plan</a:t>
             </a:r>
-            <a:endParaRPr lang="en-US" sz="1220" dirty="0"/>
-          </a:p>
-          <a:p>
-            <a:pPr indent="0" marL="0">
-              <a:buNone/>
-            </a:pPr>
-            <a:r>
-              <a:rPr lang="en-US" sz="1220" dirty="0">
+            <a:endParaRPr lang="en-US" sz="1140" dirty="0"/>
+          </a:p>
+          <a:p>
+            <a:pPr indent="0" marL="0">
+              <a:buNone/>
+            </a:pPr>
+            <a:r>
+              <a:rPr lang="en-US" sz="1140" dirty="0">
                 <a:solidFill>
                   <a:srgbClr val="17364A"/>
                 </a:solidFill>
@@ -9884,7 +9884,7 @@
               </a:rPr>
               <a:t>Approval or review note</a:t>
             </a:r>
-            <a:endParaRPr lang="en-US" sz="1220" dirty="0"/>
+            <a:endParaRPr lang="en-US" sz="1140" dirty="0"/>
           </a:p>
         </p:txBody>
       </p:sp>
@@ -9896,12 +9896,12 @@
         </p:nvSpPr>
         <p:spPr>
           <a:xfrm>
-            <a:off x="7635240" y="4184294"/>
-            <a:ext cx="3474720" cy="1466698"/>
+            <a:off x="7543800" y="4389120"/>
+            <a:ext cx="3611880" cy="1261872"/>
           </a:xfrm>
           <a:prstGeom prst="roundRect">
             <a:avLst>
-              <a:gd name="adj" fmla="val 7481"/>
+              <a:gd name="adj" fmla="val 8696"/>
             </a:avLst>
           </a:prstGeom>
           <a:solidFill>
@@ -9923,8 +9923,8 @@
         </p:nvSpPr>
         <p:spPr>
           <a:xfrm>
-            <a:off x="7799832" y="4330598"/>
-            <a:ext cx="3145536" cy="256032"/>
+            <a:off x="7708392" y="4517136"/>
+            <a:ext cx="3282696" cy="228600"/>
           </a:xfrm>
           <a:prstGeom prst="rect">
             <a:avLst/>
@@ -9940,7 +9940,7 @@
               <a:buNone/>
             </a:pPr>
             <a:r>
-              <a:rPr lang="en-US" sz="1300" b="1" dirty="0">
+              <a:rPr lang="en-US" sz="1220" b="1" dirty="0">
                 <a:solidFill>
                   <a:srgbClr val="0068B7"/>
                 </a:solidFill>
@@ -9950,7 +9950,7 @@
               </a:rPr>
               <a:t>What to document</a:t>
             </a:r>
-            <a:endParaRPr lang="en-US" sz="1300" dirty="0"/>
+            <a:endParaRPr lang="en-US" sz="1220" dirty="0"/>
           </a:p>
         </p:txBody>
       </p:sp>
@@ -9962,8 +9962,8 @@
         </p:nvSpPr>
         <p:spPr>
           <a:xfrm>
-            <a:off x="7799832" y="4659782"/>
-            <a:ext cx="3145536" cy="899770"/>
+            <a:off x="7708392" y="4828032"/>
+            <a:ext cx="3282696" cy="749808"/>
           </a:xfrm>
           <a:prstGeom prst="rect">
             <a:avLst/>
@@ -9981,7 +9981,7 @@
               <a:buNone/>
             </a:pPr>
             <a:r>
-              <a:rPr lang="en-US" sz="1320" dirty="0">
+              <a:rPr lang="en-US" sz="1220" dirty="0">
                 <a:solidFill>
                   <a:srgbClr val="17364A"/>
                 </a:solidFill>
@@ -9989,9 +9989,9 @@
                 <a:ea typeface="Aptos" pitchFamily="34" charset="-122"/>
                 <a:cs typeface="Aptos" pitchFamily="34" charset="-120"/>
               </a:rPr>
-              <a:t>Use the assignment to test whether you can explain the concept, apply it to a realistic public health situation, and identify what would need review before the work moves forward.</a:t>
-            </a:r>
-            <a:endParaRPr lang="en-US" sz="1320" dirty="0"/>
+              <a:t>Use the assignment to test whether you can explain the concept, apply it to a.</a:t>
+            </a:r>
+            <a:endParaRPr lang="en-US" sz="1220" dirty="0"/>
           </a:p>
         </p:txBody>
       </p:sp>
@@ -10309,7 +10309,7 @@
                 <a:ea typeface="Aptos" pitchFamily="34" charset="-122"/>
                 <a:cs typeface="Aptos" pitchFamily="34" charset="-120"/>
               </a:rPr>
-              <a:t>• This module focuses on creating, approving, implementing, and updating internal AI policies.</a:t>
+              <a:t>• This module focuses on creating, approving, implementing, and updating.</a:t>
             </a:r>
             <a:endParaRPr lang="en-US" sz="2100" dirty="0"/>
           </a:p>
@@ -10326,7 +10326,7 @@
                 <a:ea typeface="Aptos" pitchFamily="34" charset="-122"/>
                 <a:cs typeface="Aptos" pitchFamily="34" charset="-120"/>
               </a:rPr>
-              <a:t>• It is designed for public health staff who must translate responsible AI principles into.</a:t>
+              <a:t>• It is designed for public health staff who must translate responsible AI.</a:t>
             </a:r>
             <a:endParaRPr lang="en-US" sz="2100" dirty="0"/>
           </a:p>
@@ -10343,7 +10343,7 @@
                 <a:ea typeface="Aptos" pitchFamily="34" charset="-122"/>
                 <a:cs typeface="Aptos" pitchFamily="34" charset="-120"/>
               </a:rPr>
-              <a:t>• The module helps learners move beyond general awareness by producing a practical artifact that.</a:t>
+              <a:t>• The module helps learners move beyond general awareness by producing a.</a:t>
             </a:r>
             <a:endParaRPr lang="en-US" sz="2100" dirty="0"/>
           </a:p>
@@ -10384,8 +10384,8 @@
         </p:nvSpPr>
         <p:spPr>
           <a:xfrm>
-            <a:off x="8074152" y="1563624"/>
-            <a:ext cx="2825496" cy="256032"/>
+            <a:off x="8074152" y="1545336"/>
+            <a:ext cx="2825496" cy="228600"/>
           </a:xfrm>
           <a:prstGeom prst="rect">
             <a:avLst/>
@@ -10401,7 +10401,7 @@
               <a:buNone/>
             </a:pPr>
             <a:r>
-              <a:rPr lang="en-US" sz="1300" b="1" dirty="0">
+              <a:rPr lang="en-US" sz="1220" b="1" dirty="0">
                 <a:solidFill>
                   <a:srgbClr val="0068B7"/>
                 </a:solidFill>
@@ -10411,7 +10411,7 @@
               </a:rPr>
               <a:t>Module details</a:t>
             </a:r>
-            <a:endParaRPr lang="en-US" sz="1300" dirty="0"/>
+            <a:endParaRPr lang="en-US" sz="1220" dirty="0"/>
           </a:p>
         </p:txBody>
       </p:sp>
@@ -10423,8 +10423,8 @@
         </p:nvSpPr>
         <p:spPr>
           <a:xfrm>
-            <a:off x="8074152" y="1892808"/>
-            <a:ext cx="2825496" cy="1353312"/>
+            <a:off x="8074152" y="1856232"/>
+            <a:ext cx="2825496" cy="1408176"/>
           </a:xfrm>
           <a:prstGeom prst="rect">
             <a:avLst/>
@@ -10442,7 +10442,7 @@
               <a:buNone/>
             </a:pPr>
             <a:r>
-              <a:rPr lang="en-US" sz="1320" dirty="0">
+              <a:rPr lang="en-US" sz="1220" dirty="0">
                 <a:solidFill>
                   <a:srgbClr val="17364A"/>
                 </a:solidFill>
@@ -10450,9 +10450,9 @@
                 <a:ea typeface="Aptos" pitchFamily="34" charset="-122"/>
                 <a:cs typeface="Aptos" pitchFamily="34" charset="-120"/>
               </a:rPr>
-              <a:t>Level: intermediate/practitioner Primary track: Policy Role-Based Track Appears in tracks: governance-security, policy, public-health-executive-leadership</a:t>
-            </a:r>
-            <a:endParaRPr lang="en-US" sz="1320" dirty="0"/>
+              <a:t>Level: intermediate/practitioner Primary track: Policy Role-Based Track Appears.</a:t>
+            </a:r>
+            <a:endParaRPr lang="en-US" sz="1220" dirty="0"/>
           </a:p>
         </p:txBody>
       </p:sp>
@@ -10491,8 +10491,8 @@
         </p:nvSpPr>
         <p:spPr>
           <a:xfrm>
-            <a:off x="8074152" y="3822192"/>
-            <a:ext cx="2825496" cy="256032"/>
+            <a:off x="8074152" y="3803904"/>
+            <a:ext cx="2825496" cy="228600"/>
           </a:xfrm>
           <a:prstGeom prst="rect">
             <a:avLst/>
@@ -10508,7 +10508,7 @@
               <a:buNone/>
             </a:pPr>
             <a:r>
-              <a:rPr lang="en-US" sz="1300" b="1" dirty="0">
+              <a:rPr lang="en-US" sz="1220" b="1" dirty="0">
                 <a:solidFill>
                   <a:srgbClr val="0068B7"/>
                 </a:solidFill>
@@ -10518,7 +10518,7 @@
               </a:rPr>
               <a:t>Learning sequence</a:t>
             </a:r>
-            <a:endParaRPr lang="en-US" sz="1300" dirty="0"/>
+            <a:endParaRPr lang="en-US" sz="1220" dirty="0"/>
           </a:p>
         </p:txBody>
       </p:sp>
@@ -10530,8 +10530,8 @@
         </p:nvSpPr>
         <p:spPr>
           <a:xfrm>
-            <a:off x="8092440" y="4187952"/>
-            <a:ext cx="2770632" cy="1033272"/>
+            <a:off x="8092440" y="4133088"/>
+            <a:ext cx="2770632" cy="1124712"/>
           </a:xfrm>
           <a:prstGeom prst="rect">
             <a:avLst/>
@@ -10549,7 +10549,7 @@
               <a:buNone/>
             </a:pPr>
             <a:r>
-              <a:rPr lang="en-US" sz="1220" dirty="0">
+              <a:rPr lang="en-US" sz="1140" dirty="0">
                 <a:solidFill>
                   <a:srgbClr val="17364A"/>
                 </a:solidFill>
@@ -10559,14 +10559,14 @@
               </a:rPr>
               <a:t>Read the module for shared vocabulary and context.</a:t>
             </a:r>
-            <a:endParaRPr lang="en-US" sz="1220" dirty="0"/>
-          </a:p>
-          <a:p>
-            <a:pPr indent="0" marL="0">
-              <a:buNone/>
-            </a:pPr>
-            <a:r>
-              <a:rPr lang="en-US" sz="1220" dirty="0">
+            <a:endParaRPr lang="en-US" sz="1140" dirty="0"/>
+          </a:p>
+          <a:p>
+            <a:pPr indent="0" marL="0">
+              <a:buNone/>
+            </a:pPr>
+            <a:r>
+              <a:rPr lang="en-US" sz="1140" dirty="0">
                 <a:solidFill>
                   <a:srgbClr val="17364A"/>
                 </a:solidFill>
@@ -10574,16 +10574,16 @@
                 <a:ea typeface="Aptos" pitchFamily="34" charset="-122"/>
                 <a:cs typeface="Aptos" pitchFamily="34" charset="-120"/>
               </a:rPr>
-              <a:t>Complete the practical exercise to apply the concept.</a:t>
-            </a:r>
-            <a:endParaRPr lang="en-US" sz="1220" dirty="0"/>
-          </a:p>
-          <a:p>
-            <a:pPr indent="0" marL="0">
-              <a:buNone/>
-            </a:pPr>
-            <a:r>
-              <a:rPr lang="en-US" sz="1220" dirty="0">
+              <a:t>Complete the practical exercise to apply the.</a:t>
+            </a:r>
+            <a:endParaRPr lang="en-US" sz="1140" dirty="0"/>
+          </a:p>
+          <a:p>
+            <a:pPr indent="0" marL="0">
+              <a:buNone/>
+            </a:pPr>
+            <a:r>
+              <a:rPr lang="en-US" sz="1140" dirty="0">
                 <a:solidFill>
                   <a:srgbClr val="17364A"/>
                 </a:solidFill>
@@ -10593,7 +10593,7 @@
               </a:rPr>
               <a:t>Use the notes and references for deeper review.</a:t>
             </a:r>
-            <a:endParaRPr lang="en-US" sz="1220" dirty="0"/>
+            <a:endParaRPr lang="en-US" sz="1140" dirty="0"/>
           </a:p>
         </p:txBody>
       </p:sp>
@@ -10884,8 +10884,8 @@
         </p:nvSpPr>
         <p:spPr>
           <a:xfrm>
-            <a:off x="868680" y="1508760"/>
-            <a:ext cx="6309360" cy="4160520"/>
+            <a:off x="822960" y="1463040"/>
+            <a:ext cx="6565392" cy="4343400"/>
           </a:xfrm>
           <a:prstGeom prst="rect">
             <a:avLst/>
@@ -10903,7 +10903,7 @@
               <a:buNone/>
             </a:pPr>
             <a:r>
-              <a:rPr lang="en-US" sz="2100" dirty="0">
+              <a:rPr lang="en-US" sz="1920" dirty="0">
                 <a:solidFill>
                   <a:srgbClr val="003A63"/>
                 </a:solidFill>
@@ -10911,16 +10911,16 @@
                 <a:ea typeface="Aptos" pitchFamily="34" charset="-122"/>
                 <a:cs typeface="Aptos" pitchFamily="34" charset="-120"/>
               </a:rPr>
-              <a:t>• 1. What is the strongest evidence that ai policy development and approval workflow has been.</a:t>
-            </a:r>
-            <a:endParaRPr lang="en-US" sz="2100" dirty="0"/>
-          </a:p>
-          <a:p>
-            <a:pPr indent="0" marL="0">
-              <a:buNone/>
-            </a:pPr>
-            <a:r>
-              <a:rPr lang="en-US" sz="2100" dirty="0">
+              <a:t>• 1. What is the strongest evidence that ai policy development and approval.</a:t>
+            </a:r>
+            <a:endParaRPr lang="en-US" sz="1920" dirty="0"/>
+          </a:p>
+          <a:p>
+            <a:pPr indent="0" marL="0">
+              <a:buNone/>
+            </a:pPr>
+            <a:r>
+              <a:rPr lang="en-US" sz="1920" dirty="0">
                 <a:solidFill>
                   <a:srgbClr val="003A63"/>
                 </a:solidFill>
@@ -10930,14 +10930,14 @@
               </a:rPr>
               <a:t>• 2. What is the best reason to assign an accountability owner?</a:t>
             </a:r>
-            <a:endParaRPr lang="en-US" sz="2100" dirty="0"/>
-          </a:p>
-          <a:p>
-            <a:pPr indent="0" marL="0">
-              <a:buNone/>
-            </a:pPr>
-            <a:r>
-              <a:rPr lang="en-US" sz="2100" dirty="0">
+            <a:endParaRPr lang="en-US" sz="1920" dirty="0"/>
+          </a:p>
+          <a:p>
+            <a:pPr indent="0" marL="0">
+              <a:buNone/>
+            </a:pPr>
+            <a:r>
+              <a:rPr lang="en-US" sz="1920" dirty="0">
                 <a:solidFill>
                   <a:srgbClr val="003A63"/>
                 </a:solidFill>
@@ -10947,7 +10947,7 @@
               </a:rPr>
               <a:t>• 3. When should an AI-supported workflow be escalated for review?</a:t>
             </a:r>
-            <a:endParaRPr lang="en-US" sz="2100" dirty="0"/>
+            <a:endParaRPr lang="en-US" sz="1920" dirty="0"/>
           </a:p>
         </p:txBody>
       </p:sp>
@@ -10959,12 +10959,12 @@
         </p:nvSpPr>
         <p:spPr>
           <a:xfrm>
-            <a:off x="7635240" y="1325880"/>
-            <a:ext cx="3474720" cy="1255471"/>
+            <a:off x="7543800" y="1325880"/>
+            <a:ext cx="3611880" cy="1261872"/>
           </a:xfrm>
           <a:prstGeom prst="roundRect">
             <a:avLst>
-              <a:gd name="adj" fmla="val 8740"/>
+              <a:gd name="adj" fmla="val 8696"/>
             </a:avLst>
           </a:prstGeom>
           <a:solidFill>
@@ -10986,8 +10986,8 @@
         </p:nvSpPr>
         <p:spPr>
           <a:xfrm>
-            <a:off x="7799832" y="1472184"/>
-            <a:ext cx="3145536" cy="256032"/>
+            <a:off x="7708392" y="1453896"/>
+            <a:ext cx="3282696" cy="228600"/>
           </a:xfrm>
           <a:prstGeom prst="rect">
             <a:avLst/>
@@ -11003,7 +11003,7 @@
               <a:buNone/>
             </a:pPr>
             <a:r>
-              <a:rPr lang="en-US" sz="1300" b="1" dirty="0">
+              <a:rPr lang="en-US" sz="1220" b="1" dirty="0">
                 <a:solidFill>
                   <a:srgbClr val="0068B7"/>
                 </a:solidFill>
@@ -11013,7 +11013,7 @@
               </a:rPr>
               <a:t>Governance lens</a:t>
             </a:r>
-            <a:endParaRPr lang="en-US" sz="1300" dirty="0"/>
+            <a:endParaRPr lang="en-US" sz="1220" dirty="0"/>
           </a:p>
         </p:txBody>
       </p:sp>
@@ -11025,8 +11025,8 @@
         </p:nvSpPr>
         <p:spPr>
           <a:xfrm>
-            <a:off x="7799832" y="1801368"/>
-            <a:ext cx="3145536" cy="688543"/>
+            <a:off x="7708392" y="1764792"/>
+            <a:ext cx="3282696" cy="749808"/>
           </a:xfrm>
           <a:prstGeom prst="rect">
             <a:avLst/>
@@ -11044,7 +11044,7 @@
               <a:buNone/>
             </a:pPr>
             <a:r>
-              <a:rPr lang="en-US" sz="1320" dirty="0">
+              <a:rPr lang="en-US" sz="1220" dirty="0">
                 <a:solidFill>
                   <a:srgbClr val="17364A"/>
                 </a:solidFill>
@@ -11052,9 +11052,9 @@
                 <a:ea typeface="Aptos" pitchFamily="34" charset="-122"/>
                 <a:cs typeface="Aptos" pitchFamily="34" charset="-120"/>
               </a:rPr>
-              <a:t>1. What is the strongest evidence that ai policy development and approval workflow has been applied.</a:t>
-            </a:r>
-            <a:endParaRPr lang="en-US" sz="1320" dirty="0"/>
+              <a:t>1. What is the strongest evidence that ai policy development and approval.</a:t>
+            </a:r>
+            <a:endParaRPr lang="en-US" sz="1220" dirty="0"/>
           </a:p>
         </p:txBody>
       </p:sp>
@@ -11066,12 +11066,12 @@
         </p:nvSpPr>
         <p:spPr>
           <a:xfrm>
-            <a:off x="7635240" y="2718511"/>
-            <a:ext cx="3474720" cy="1328623"/>
+            <a:off x="7543800" y="2724912"/>
+            <a:ext cx="3611880" cy="1527048"/>
           </a:xfrm>
           <a:prstGeom prst="roundRect">
             <a:avLst>
-              <a:gd name="adj" fmla="val 8259"/>
+              <a:gd name="adj" fmla="val 7186"/>
             </a:avLst>
           </a:prstGeom>
           <a:solidFill>
@@ -11093,8 +11093,8 @@
         </p:nvSpPr>
         <p:spPr>
           <a:xfrm>
-            <a:off x="7799832" y="2864815"/>
-            <a:ext cx="3145536" cy="256032"/>
+            <a:off x="7708392" y="2852928"/>
+            <a:ext cx="3282696" cy="228600"/>
           </a:xfrm>
           <a:prstGeom prst="rect">
             <a:avLst/>
@@ -11110,7 +11110,7 @@
               <a:buNone/>
             </a:pPr>
             <a:r>
-              <a:rPr lang="en-US" sz="1300" b="1" dirty="0">
+              <a:rPr lang="en-US" sz="1220" b="1" dirty="0">
                 <a:solidFill>
                   <a:srgbClr val="0068B7"/>
                 </a:solidFill>
@@ -11120,7 +11120,7 @@
               </a:rPr>
               <a:t>Concept checkpoints</a:t>
             </a:r>
-            <a:endParaRPr lang="en-US" sz="1300" dirty="0"/>
+            <a:endParaRPr lang="en-US" sz="1220" dirty="0"/>
           </a:p>
         </p:txBody>
       </p:sp>
@@ -11132,8 +11132,8 @@
         </p:nvSpPr>
         <p:spPr>
           <a:xfrm>
-            <a:off x="7818120" y="3230575"/>
-            <a:ext cx="3090672" cy="670255"/>
+            <a:off x="7726680" y="3182112"/>
+            <a:ext cx="3227832" cy="960120"/>
           </a:xfrm>
           <a:prstGeom prst="rect">
             <a:avLst/>
@@ -11151,7 +11151,7 @@
               <a:buNone/>
             </a:pPr>
             <a:r>
-              <a:rPr lang="en-US" sz="1220" dirty="0">
+              <a:rPr lang="en-US" sz="1140" dirty="0">
                 <a:solidFill>
                   <a:srgbClr val="17364A"/>
                 </a:solidFill>
@@ -11161,14 +11161,14 @@
               </a:rPr>
               <a:t>1.</a:t>
             </a:r>
-            <a:endParaRPr lang="en-US" sz="1220" dirty="0"/>
-          </a:p>
-          <a:p>
-            <a:pPr indent="0" marL="0">
-              <a:buNone/>
-            </a:pPr>
-            <a:r>
-              <a:rPr lang="en-US" sz="1220" dirty="0">
+            <a:endParaRPr lang="en-US" sz="1140" dirty="0"/>
+          </a:p>
+          <a:p>
+            <a:pPr indent="0" marL="0">
+              <a:buNone/>
+            </a:pPr>
+            <a:r>
+              <a:rPr lang="en-US" sz="1140" dirty="0">
                 <a:solidFill>
                   <a:srgbClr val="17364A"/>
                 </a:solidFill>
@@ -11176,16 +11176,16 @@
                 <a:ea typeface="Aptos" pitchFamily="34" charset="-122"/>
                 <a:cs typeface="Aptos" pitchFamily="34" charset="-120"/>
               </a:rPr>
-              <a:t>What is the strongest evidence that ai policy development and.</a:t>
-            </a:r>
-            <a:endParaRPr lang="en-US" sz="1220" dirty="0"/>
-          </a:p>
-          <a:p>
-            <a:pPr indent="0" marL="0">
-              <a:buNone/>
-            </a:pPr>
-            <a:r>
-              <a:rPr lang="en-US" sz="1220" dirty="0">
+              <a:t>What is the strongest evidence that ai policy.</a:t>
+            </a:r>
+            <a:endParaRPr lang="en-US" sz="1140" dirty="0"/>
+          </a:p>
+          <a:p>
+            <a:pPr indent="0" marL="0">
+              <a:buNone/>
+            </a:pPr>
+            <a:r>
+              <a:rPr lang="en-US" sz="1140" dirty="0">
                 <a:solidFill>
                   <a:srgbClr val="17364A"/>
                 </a:solidFill>
@@ -11195,7 +11195,7 @@
               </a:rPr>
               <a:t>2.</a:t>
             </a:r>
-            <a:endParaRPr lang="en-US" sz="1220" dirty="0"/>
+            <a:endParaRPr lang="en-US" sz="1140" dirty="0"/>
           </a:p>
         </p:txBody>
       </p:sp>
@@ -11207,12 +11207,12 @@
         </p:nvSpPr>
         <p:spPr>
           <a:xfrm>
-            <a:off x="7635240" y="4184294"/>
-            <a:ext cx="3474720" cy="1466698"/>
+            <a:off x="7543800" y="4389120"/>
+            <a:ext cx="3611880" cy="1261872"/>
           </a:xfrm>
           <a:prstGeom prst="roundRect">
             <a:avLst>
-              <a:gd name="adj" fmla="val 7481"/>
+              <a:gd name="adj" fmla="val 8696"/>
             </a:avLst>
           </a:prstGeom>
           <a:solidFill>
@@ -11234,8 +11234,8 @@
         </p:nvSpPr>
         <p:spPr>
           <a:xfrm>
-            <a:off x="7799832" y="4330598"/>
-            <a:ext cx="3145536" cy="256032"/>
+            <a:off x="7708392" y="4517136"/>
+            <a:ext cx="3282696" cy="228600"/>
           </a:xfrm>
           <a:prstGeom prst="rect">
             <a:avLst/>
@@ -11251,7 +11251,7 @@
               <a:buNone/>
             </a:pPr>
             <a:r>
-              <a:rPr lang="en-US" sz="1300" b="1" dirty="0">
+              <a:rPr lang="en-US" sz="1220" b="1" dirty="0">
                 <a:solidFill>
                   <a:srgbClr val="0068B7"/>
                 </a:solidFill>
@@ -11261,7 +11261,7 @@
               </a:rPr>
               <a:t>What to document</a:t>
             </a:r>
-            <a:endParaRPr lang="en-US" sz="1300" dirty="0"/>
+            <a:endParaRPr lang="en-US" sz="1220" dirty="0"/>
           </a:p>
         </p:txBody>
       </p:sp>
@@ -11273,8 +11273,8 @@
         </p:nvSpPr>
         <p:spPr>
           <a:xfrm>
-            <a:off x="7799832" y="4659782"/>
-            <a:ext cx="3145536" cy="899770"/>
+            <a:off x="7708392" y="4828032"/>
+            <a:ext cx="3282696" cy="749808"/>
           </a:xfrm>
           <a:prstGeom prst="rect">
             <a:avLst/>
@@ -11292,7 +11292,7 @@
               <a:buNone/>
             </a:pPr>
             <a:r>
-              <a:rPr lang="en-US" sz="1320" dirty="0">
+              <a:rPr lang="en-US" sz="1220" dirty="0">
                 <a:solidFill>
                   <a:srgbClr val="17364A"/>
                 </a:solidFill>
@@ -11300,9 +11300,9 @@
                 <a:ea typeface="Aptos" pitchFamily="34" charset="-122"/>
                 <a:cs typeface="Aptos" pitchFamily="34" charset="-120"/>
               </a:rPr>
-              <a:t>Use the assignment to test whether you can explain the concept, apply it to a realistic public health situation, and identify what would need review before the work moves forward.</a:t>
-            </a:r>
-            <a:endParaRPr lang="en-US" sz="1320" dirty="0"/>
+              <a:t>Use the assignment to test whether you can explain the concept, apply it to a.</a:t>
+            </a:r>
+            <a:endParaRPr lang="en-US" sz="1220" dirty="0"/>
           </a:p>
         </p:txBody>
       </p:sp>
@@ -11593,8 +11593,8 @@
         </p:nvSpPr>
         <p:spPr>
           <a:xfrm>
-            <a:off x="868680" y="1508760"/>
-            <a:ext cx="6309360" cy="4160520"/>
+            <a:off x="822960" y="1463040"/>
+            <a:ext cx="6565392" cy="4343400"/>
           </a:xfrm>
           <a:prstGeom prst="rect">
             <a:avLst/>
@@ -11612,7 +11612,7 @@
               <a:buNone/>
             </a:pPr>
             <a:r>
-              <a:rPr lang="en-US" sz="2100" dirty="0">
+              <a:rPr lang="en-US" sz="1920" dirty="0">
                 <a:solidFill>
                   <a:srgbClr val="003A63"/>
                 </a:solidFill>
@@ -11622,14 +11622,14 @@
               </a:rPr>
               <a:t>• CDC Public Health Data Strategy and Data Modernization resources:.</a:t>
             </a:r>
-            <a:endParaRPr lang="en-US" sz="2100" dirty="0"/>
-          </a:p>
-          <a:p>
-            <a:pPr indent="0" marL="0">
-              <a:buNone/>
-            </a:pPr>
-            <a:r>
-              <a:rPr lang="en-US" sz="2100" dirty="0">
+            <a:endParaRPr lang="en-US" sz="1920" dirty="0"/>
+          </a:p>
+          <a:p>
+            <a:pPr indent="0" marL="0">
+              <a:buNone/>
+            </a:pPr>
+            <a:r>
+              <a:rPr lang="en-US" sz="1920" dirty="0">
                 <a:solidFill>
                   <a:srgbClr val="003A63"/>
                 </a:solidFill>
@@ -11637,16 +11637,16 @@
                 <a:ea typeface="Aptos" pitchFamily="34" charset="-122"/>
                 <a:cs typeface="Aptos" pitchFamily="34" charset="-120"/>
               </a:rPr>
-              <a:t>• NIST Artificial Intelligence Risk Management Framework and NIST Generative AI Profile:.</a:t>
-            </a:r>
-            <a:endParaRPr lang="en-US" sz="2100" dirty="0"/>
-          </a:p>
-          <a:p>
-            <a:pPr indent="0" marL="0">
-              <a:buNone/>
-            </a:pPr>
-            <a:r>
-              <a:rPr lang="en-US" sz="2100" dirty="0">
+              <a:t>• NIST Artificial Intelligence Risk Management Framework and NIST Generative.</a:t>
+            </a:r>
+            <a:endParaRPr lang="en-US" sz="1920" dirty="0"/>
+          </a:p>
+          <a:p>
+            <a:pPr indent="0" marL="0">
+              <a:buNone/>
+            </a:pPr>
+            <a:r>
+              <a:rPr lang="en-US" sz="1920" dirty="0">
                 <a:solidFill>
                   <a:srgbClr val="003A63"/>
                 </a:solidFill>
@@ -11656,7 +11656,7 @@
               </a:rPr>
               <a:t>• WHO Ethics and Governance of Artificial Intelligence for Health guidance:.</a:t>
             </a:r>
-            <a:endParaRPr lang="en-US" sz="2100" dirty="0"/>
+            <a:endParaRPr lang="en-US" sz="1920" dirty="0"/>
           </a:p>
         </p:txBody>
       </p:sp>
@@ -11668,12 +11668,12 @@
         </p:nvSpPr>
         <p:spPr>
           <a:xfrm>
-            <a:off x="7635240" y="1325880"/>
-            <a:ext cx="3474720" cy="1207008"/>
+            <a:off x="7543800" y="1325880"/>
+            <a:ext cx="3611880" cy="1261872"/>
           </a:xfrm>
           <a:prstGeom prst="roundRect">
             <a:avLst>
-              <a:gd name="adj" fmla="val 9091"/>
+              <a:gd name="adj" fmla="val 8696"/>
             </a:avLst>
           </a:prstGeom>
           <a:solidFill>
@@ -11695,8 +11695,8 @@
         </p:nvSpPr>
         <p:spPr>
           <a:xfrm>
-            <a:off x="7799832" y="1472184"/>
-            <a:ext cx="3145536" cy="256032"/>
+            <a:off x="7708392" y="1453896"/>
+            <a:ext cx="3282696" cy="228600"/>
           </a:xfrm>
           <a:prstGeom prst="rect">
             <a:avLst/>
@@ -11712,7 +11712,7 @@
               <a:buNone/>
             </a:pPr>
             <a:r>
-              <a:rPr lang="en-US" sz="1300" b="1" dirty="0">
+              <a:rPr lang="en-US" sz="1220" b="1" dirty="0">
                 <a:solidFill>
                   <a:srgbClr val="0068B7"/>
                 </a:solidFill>
@@ -11722,7 +11722,7 @@
               </a:rPr>
               <a:t>Governance lens</a:t>
             </a:r>
-            <a:endParaRPr lang="en-US" sz="1300" dirty="0"/>
+            <a:endParaRPr lang="en-US" sz="1220" dirty="0"/>
           </a:p>
         </p:txBody>
       </p:sp>
@@ -11734,8 +11734,8 @@
         </p:nvSpPr>
         <p:spPr>
           <a:xfrm>
-            <a:off x="7799832" y="1801368"/>
-            <a:ext cx="3145536" cy="640080"/>
+            <a:off x="7708392" y="1764792"/>
+            <a:ext cx="3282696" cy="749808"/>
           </a:xfrm>
           <a:prstGeom prst="rect">
             <a:avLst/>
@@ -11753,7 +11753,7 @@
               <a:buNone/>
             </a:pPr>
             <a:r>
-              <a:rPr lang="en-US" sz="1320" dirty="0">
+              <a:rPr lang="en-US" sz="1220" dirty="0">
                 <a:solidFill>
                   <a:srgbClr val="17364A"/>
                 </a:solidFill>
@@ -11763,7 +11763,7 @@
               </a:rPr>
               <a:t>CDC Public Health Data Strategy and Data Modernization resources:.</a:t>
             </a:r>
-            <a:endParaRPr lang="en-US" sz="1320" dirty="0"/>
+            <a:endParaRPr lang="en-US" sz="1220" dirty="0"/>
           </a:p>
         </p:txBody>
       </p:sp>
@@ -11775,12 +11775,12 @@
         </p:nvSpPr>
         <p:spPr>
           <a:xfrm>
-            <a:off x="7635240" y="2670048"/>
-            <a:ext cx="3474720" cy="1377086"/>
+            <a:off x="7543800" y="2724912"/>
+            <a:ext cx="3611880" cy="1527048"/>
           </a:xfrm>
           <a:prstGeom prst="roundRect">
             <a:avLst>
-              <a:gd name="adj" fmla="val 7968"/>
+              <a:gd name="adj" fmla="val 7186"/>
             </a:avLst>
           </a:prstGeom>
           <a:solidFill>
@@ -11802,8 +11802,8 @@
         </p:nvSpPr>
         <p:spPr>
           <a:xfrm>
-            <a:off x="7799832" y="2816352"/>
-            <a:ext cx="3145536" cy="256032"/>
+            <a:off x="7708392" y="2852928"/>
+            <a:ext cx="3282696" cy="228600"/>
           </a:xfrm>
           <a:prstGeom prst="rect">
             <a:avLst/>
@@ -11819,7 +11819,7 @@
               <a:buNone/>
             </a:pPr>
             <a:r>
-              <a:rPr lang="en-US" sz="1300" b="1" dirty="0">
+              <a:rPr lang="en-US" sz="1220" b="1" dirty="0">
                 <a:solidFill>
                   <a:srgbClr val="0068B7"/>
                 </a:solidFill>
@@ -11829,7 +11829,7 @@
               </a:rPr>
               <a:t>Concept checkpoints</a:t>
             </a:r>
-            <a:endParaRPr lang="en-US" sz="1300" dirty="0"/>
+            <a:endParaRPr lang="en-US" sz="1220" dirty="0"/>
           </a:p>
         </p:txBody>
       </p:sp>
@@ -11841,8 +11841,8 @@
         </p:nvSpPr>
         <p:spPr>
           <a:xfrm>
-            <a:off x="7818120" y="3182112"/>
-            <a:ext cx="3090672" cy="718718"/>
+            <a:off x="7726680" y="3182112"/>
+            <a:ext cx="3227832" cy="960120"/>
           </a:xfrm>
           <a:prstGeom prst="rect">
             <a:avLst/>
@@ -11860,7 +11860,7 @@
               <a:buNone/>
             </a:pPr>
             <a:r>
-              <a:rPr lang="en-US" sz="1220" dirty="0">
+              <a:rPr lang="en-US" sz="1140" dirty="0">
                 <a:solidFill>
                   <a:srgbClr val="17364A"/>
                 </a:solidFill>
@@ -11870,14 +11870,14 @@
               </a:rPr>
               <a:t>OWASP Top 10 for Large Language Model Applications:.</a:t>
             </a:r>
-            <a:endParaRPr lang="en-US" sz="1220" dirty="0"/>
-          </a:p>
-          <a:p>
-            <a:pPr indent="0" marL="0">
-              <a:buNone/>
-            </a:pPr>
-            <a:r>
-              <a:rPr lang="en-US" sz="1220" dirty="0">
+            <a:endParaRPr lang="en-US" sz="1140" dirty="0"/>
+          </a:p>
+          <a:p>
+            <a:pPr indent="0" marL="0">
+              <a:buNone/>
+            </a:pPr>
+            <a:r>
+              <a:rPr lang="en-US" sz="1140" dirty="0">
                 <a:solidFill>
                   <a:srgbClr val="17364A"/>
                 </a:solidFill>
@@ -11885,9 +11885,9 @@
                 <a:ea typeface="Aptos" pitchFamily="34" charset="-122"/>
                 <a:cs typeface="Aptos" pitchFamily="34" charset="-120"/>
               </a:rPr>
-              <a:t>ONC health IT, interoperability, and information blocking.</a:t>
-            </a:r>
-            <a:endParaRPr lang="en-US" sz="1220" dirty="0"/>
+              <a:t>ONC health IT, interoperability, and information.</a:t>
+            </a:r>
+            <a:endParaRPr lang="en-US" sz="1140" dirty="0"/>
           </a:p>
         </p:txBody>
       </p:sp>
@@ -11899,12 +11899,12 @@
         </p:nvSpPr>
         <p:spPr>
           <a:xfrm>
-            <a:off x="7635240" y="4184294"/>
-            <a:ext cx="3474720" cy="1466698"/>
+            <a:off x="7543800" y="4389120"/>
+            <a:ext cx="3611880" cy="1261872"/>
           </a:xfrm>
           <a:prstGeom prst="roundRect">
             <a:avLst>
-              <a:gd name="adj" fmla="val 7481"/>
+              <a:gd name="adj" fmla="val 8696"/>
             </a:avLst>
           </a:prstGeom>
           <a:solidFill>
@@ -11926,8 +11926,8 @@
         </p:nvSpPr>
         <p:spPr>
           <a:xfrm>
-            <a:off x="7799832" y="4330598"/>
-            <a:ext cx="3145536" cy="256032"/>
+            <a:off x="7708392" y="4517136"/>
+            <a:ext cx="3282696" cy="228600"/>
           </a:xfrm>
           <a:prstGeom prst="rect">
             <a:avLst/>
@@ -11943,7 +11943,7 @@
               <a:buNone/>
             </a:pPr>
             <a:r>
-              <a:rPr lang="en-US" sz="1300" b="1" dirty="0">
+              <a:rPr lang="en-US" sz="1220" b="1" dirty="0">
                 <a:solidFill>
                   <a:srgbClr val="0068B7"/>
                 </a:solidFill>
@@ -11953,7 +11953,7 @@
               </a:rPr>
               <a:t>What to document</a:t>
             </a:r>
-            <a:endParaRPr lang="en-US" sz="1300" dirty="0"/>
+            <a:endParaRPr lang="en-US" sz="1220" dirty="0"/>
           </a:p>
         </p:txBody>
       </p:sp>
@@ -11965,8 +11965,8 @@
         </p:nvSpPr>
         <p:spPr>
           <a:xfrm>
-            <a:off x="7799832" y="4659782"/>
-            <a:ext cx="3145536" cy="899770"/>
+            <a:off x="7708392" y="4828032"/>
+            <a:ext cx="3282696" cy="749808"/>
           </a:xfrm>
           <a:prstGeom prst="rect">
             <a:avLst/>
@@ -11984,7 +11984,7 @@
               <a:buNone/>
             </a:pPr>
             <a:r>
-              <a:rPr lang="en-US" sz="1320" dirty="0">
+              <a:rPr lang="en-US" sz="1220" dirty="0">
                 <a:solidFill>
                   <a:srgbClr val="17364A"/>
                 </a:solidFill>
@@ -11992,9 +11992,9 @@
                 <a:ea typeface="Aptos" pitchFamily="34" charset="-122"/>
                 <a:cs typeface="Aptos" pitchFamily="34" charset="-120"/>
               </a:rPr>
-              <a:t>Translate this concept into clear decision rights, review steps, documentation expectations, and escalation paths before an AI-supported workflow is approved.</a:t>
-            </a:r>
-            <a:endParaRPr lang="en-US" sz="1320" dirty="0"/>
+              <a:t>Translate this concept into clear decision rights, review steps, documentation.</a:t>
+            </a:r>
+            <a:endParaRPr lang="en-US" sz="1220" dirty="0"/>
           </a:p>
         </p:txBody>
       </p:sp>
@@ -12285,8 +12285,8 @@
         </p:nvSpPr>
         <p:spPr>
           <a:xfrm>
-            <a:off x="868680" y="1508760"/>
-            <a:ext cx="6309360" cy="4160520"/>
+            <a:off x="822960" y="1463040"/>
+            <a:ext cx="6565392" cy="4343400"/>
           </a:xfrm>
           <a:prstGeom prst="rect">
             <a:avLst/>
@@ -12304,7 +12304,7 @@
               <a:buNone/>
             </a:pPr>
             <a:r>
-              <a:rPr lang="en-US" sz="2100" dirty="0">
+              <a:rPr lang="en-US" sz="1920" dirty="0">
                 <a:solidFill>
                   <a:srgbClr val="003A63"/>
                 </a:solidFill>
@@ -12312,9 +12312,9 @@
                 <a:ea typeface="Aptos" pitchFamily="34" charset="-122"/>
                 <a:cs typeface="Aptos" pitchFamily="34" charset="-120"/>
               </a:rPr>
-              <a:t>• Agency policies for privacy, public records, cybersecurity, procurement, civil rights,.</a:t>
-            </a:r>
-            <a:endParaRPr lang="en-US" sz="2100" dirty="0"/>
+              <a:t>• Agency policies for privacy, public records, cybersecurity, procurement,.</a:t>
+            </a:r>
+            <a:endParaRPr lang="en-US" sz="1920" dirty="0"/>
           </a:p>
         </p:txBody>
       </p:sp>
@@ -12326,12 +12326,12 @@
         </p:nvSpPr>
         <p:spPr>
           <a:xfrm>
-            <a:off x="7635240" y="1325880"/>
-            <a:ext cx="3474720" cy="1255471"/>
+            <a:off x="7543800" y="1325880"/>
+            <a:ext cx="3611880" cy="1261872"/>
           </a:xfrm>
           <a:prstGeom prst="roundRect">
             <a:avLst>
-              <a:gd name="adj" fmla="val 8740"/>
+              <a:gd name="adj" fmla="val 8696"/>
             </a:avLst>
           </a:prstGeom>
           <a:solidFill>
@@ -12353,8 +12353,8 @@
         </p:nvSpPr>
         <p:spPr>
           <a:xfrm>
-            <a:off x="7799832" y="1472184"/>
-            <a:ext cx="3145536" cy="256032"/>
+            <a:off x="7708392" y="1453896"/>
+            <a:ext cx="3282696" cy="228600"/>
           </a:xfrm>
           <a:prstGeom prst="rect">
             <a:avLst/>
@@ -12370,7 +12370,7 @@
               <a:buNone/>
             </a:pPr>
             <a:r>
-              <a:rPr lang="en-US" sz="1300" b="1" dirty="0">
+              <a:rPr lang="en-US" sz="1220" b="1" dirty="0">
                 <a:solidFill>
                   <a:srgbClr val="0068B7"/>
                 </a:solidFill>
@@ -12380,7 +12380,7 @@
               </a:rPr>
               <a:t>Governance lens</a:t>
             </a:r>
-            <a:endParaRPr lang="en-US" sz="1300" dirty="0"/>
+            <a:endParaRPr lang="en-US" sz="1220" dirty="0"/>
           </a:p>
         </p:txBody>
       </p:sp>
@@ -12392,8 +12392,8 @@
         </p:nvSpPr>
         <p:spPr>
           <a:xfrm>
-            <a:off x="7799832" y="1801368"/>
-            <a:ext cx="3145536" cy="688543"/>
+            <a:off x="7708392" y="1764792"/>
+            <a:ext cx="3282696" cy="749808"/>
           </a:xfrm>
           <a:prstGeom prst="rect">
             <a:avLst/>
@@ -12411,7 +12411,7 @@
               <a:buNone/>
             </a:pPr>
             <a:r>
-              <a:rPr lang="en-US" sz="1320" dirty="0">
+              <a:rPr lang="en-US" sz="1220" dirty="0">
                 <a:solidFill>
                   <a:srgbClr val="17364A"/>
                 </a:solidFill>
@@ -12419,9 +12419,9 @@
                 <a:ea typeface="Aptos" pitchFamily="34" charset="-122"/>
                 <a:cs typeface="Aptos" pitchFamily="34" charset="-120"/>
               </a:rPr>
-              <a:t>Agency policies for privacy, public records, cybersecurity, procurement, civil rights, accessibility,.</a:t>
-            </a:r>
-            <a:endParaRPr lang="en-US" sz="1320" dirty="0"/>
+              <a:t>Agency policies for privacy, public records, cybersecurity, procurement, civil.</a:t>
+            </a:r>
+            <a:endParaRPr lang="en-US" sz="1220" dirty="0"/>
           </a:p>
         </p:txBody>
       </p:sp>
@@ -12433,12 +12433,12 @@
         </p:nvSpPr>
         <p:spPr>
           <a:xfrm>
-            <a:off x="7635240" y="2718511"/>
-            <a:ext cx="3474720" cy="1328623"/>
+            <a:off x="7543800" y="2724912"/>
+            <a:ext cx="3611880" cy="1527048"/>
           </a:xfrm>
           <a:prstGeom prst="roundRect">
             <a:avLst>
-              <a:gd name="adj" fmla="val 8259"/>
+              <a:gd name="adj" fmla="val 7186"/>
             </a:avLst>
           </a:prstGeom>
           <a:solidFill>
@@ -12460,8 +12460,8 @@
         </p:nvSpPr>
         <p:spPr>
           <a:xfrm>
-            <a:off x="7799832" y="2864815"/>
-            <a:ext cx="3145536" cy="256032"/>
+            <a:off x="7708392" y="2852928"/>
+            <a:ext cx="3282696" cy="228600"/>
           </a:xfrm>
           <a:prstGeom prst="rect">
             <a:avLst/>
@@ -12477,7 +12477,7 @@
               <a:buNone/>
             </a:pPr>
             <a:r>
-              <a:rPr lang="en-US" sz="1300" b="1" dirty="0">
+              <a:rPr lang="en-US" sz="1220" b="1" dirty="0">
                 <a:solidFill>
                   <a:srgbClr val="0068B7"/>
                 </a:solidFill>
@@ -12487,7 +12487,7 @@
               </a:rPr>
               <a:t>Concept checkpoints</a:t>
             </a:r>
-            <a:endParaRPr lang="en-US" sz="1300" dirty="0"/>
+            <a:endParaRPr lang="en-US" sz="1220" dirty="0"/>
           </a:p>
         </p:txBody>
       </p:sp>
@@ -12499,8 +12499,8 @@
         </p:nvSpPr>
         <p:spPr>
           <a:xfrm>
-            <a:off x="7818120" y="3230575"/>
-            <a:ext cx="3090672" cy="670255"/>
+            <a:off x="7726680" y="3182112"/>
+            <a:ext cx="3227832" cy="960120"/>
           </a:xfrm>
           <a:prstGeom prst="rect">
             <a:avLst/>
@@ -12518,7 +12518,7 @@
               <a:buNone/>
             </a:pPr>
             <a:r>
-              <a:rPr lang="en-US" sz="1220" dirty="0">
+              <a:rPr lang="en-US" sz="1140" dirty="0">
                 <a:solidFill>
                   <a:srgbClr val="17364A"/>
                 </a:solidFill>
@@ -12526,9 +12526,9 @@
                 <a:ea typeface="Aptos" pitchFamily="34" charset="-122"/>
                 <a:cs typeface="Aptos" pitchFamily="34" charset="-120"/>
               </a:rPr>
-              <a:t>Agency policies for privacy, public records, cybersecurity,.</a:t>
-            </a:r>
-            <a:endParaRPr lang="en-US" sz="1220" dirty="0"/>
+              <a:t>Agency policies for privacy, public records,.</a:t>
+            </a:r>
+            <a:endParaRPr lang="en-US" sz="1140" dirty="0"/>
           </a:p>
         </p:txBody>
       </p:sp>
@@ -12540,12 +12540,12 @@
         </p:nvSpPr>
         <p:spPr>
           <a:xfrm>
-            <a:off x="7635240" y="4184294"/>
-            <a:ext cx="3474720" cy="1466698"/>
+            <a:off x="7543800" y="4389120"/>
+            <a:ext cx="3611880" cy="1261872"/>
           </a:xfrm>
           <a:prstGeom prst="roundRect">
             <a:avLst>
-              <a:gd name="adj" fmla="val 7481"/>
+              <a:gd name="adj" fmla="val 8696"/>
             </a:avLst>
           </a:prstGeom>
           <a:solidFill>
@@ -12567,8 +12567,8 @@
         </p:nvSpPr>
         <p:spPr>
           <a:xfrm>
-            <a:off x="7799832" y="4330598"/>
-            <a:ext cx="3145536" cy="256032"/>
+            <a:off x="7708392" y="4517136"/>
+            <a:ext cx="3282696" cy="228600"/>
           </a:xfrm>
           <a:prstGeom prst="rect">
             <a:avLst/>
@@ -12584,7 +12584,7 @@
               <a:buNone/>
             </a:pPr>
             <a:r>
-              <a:rPr lang="en-US" sz="1300" b="1" dirty="0">
+              <a:rPr lang="en-US" sz="1220" b="1" dirty="0">
                 <a:solidFill>
                   <a:srgbClr val="0068B7"/>
                 </a:solidFill>
@@ -12594,7 +12594,7 @@
               </a:rPr>
               <a:t>What to document</a:t>
             </a:r>
-            <a:endParaRPr lang="en-US" sz="1300" dirty="0"/>
+            <a:endParaRPr lang="en-US" sz="1220" dirty="0"/>
           </a:p>
         </p:txBody>
       </p:sp>
@@ -12606,8 +12606,8 @@
         </p:nvSpPr>
         <p:spPr>
           <a:xfrm>
-            <a:off x="7799832" y="4659782"/>
-            <a:ext cx="3145536" cy="899770"/>
+            <a:off x="7708392" y="4828032"/>
+            <a:ext cx="3282696" cy="749808"/>
           </a:xfrm>
           <a:prstGeom prst="rect">
             <a:avLst/>
@@ -12625,7 +12625,7 @@
               <a:buNone/>
             </a:pPr>
             <a:r>
-              <a:rPr lang="en-US" sz="1320" dirty="0">
+              <a:rPr lang="en-US" sz="1220" dirty="0">
                 <a:solidFill>
                   <a:srgbClr val="17364A"/>
                 </a:solidFill>
@@ -12633,9 +12633,9 @@
                 <a:ea typeface="Aptos" pitchFamily="34" charset="-122"/>
                 <a:cs typeface="Aptos" pitchFamily="34" charset="-120"/>
               </a:rPr>
-              <a:t>Translate this concept into clear decision rights, review steps, documentation expectations, and escalation paths before an AI-supported workflow is approved.</a:t>
-            </a:r>
-            <a:endParaRPr lang="en-US" sz="1320" dirty="0"/>
+              <a:t>Translate this concept into clear decision rights, review steps, documentation.</a:t>
+            </a:r>
+            <a:endParaRPr lang="en-US" sz="1220" dirty="0"/>
           </a:p>
         </p:txBody>
       </p:sp>
@@ -12953,7 +12953,7 @@
                 <a:ea typeface="Aptos" pitchFamily="34" charset="-122"/>
                 <a:cs typeface="Aptos" pitchFamily="34" charset="-120"/>
               </a:rPr>
-              <a:t>• Play 11: Build and Deploy AI Solutions - This lesson informs Play 11 by helping learners.</a:t>
+              <a:t>• Play 11: Build and Deploy AI Solutions - This lesson informs Play 11 by.</a:t>
             </a:r>
             <a:endParaRPr lang="en-US" sz="1900" dirty="0"/>
           </a:p>
@@ -12970,7 +12970,7 @@
                 <a:ea typeface="Aptos" pitchFamily="34" charset="-122"/>
                 <a:cs typeface="Aptos" pitchFamily="34" charset="-120"/>
               </a:rPr>
-              <a:t>• Play 1: Vision &amp; Guardrails - This lesson informs Play 1 by helping learners connect the.</a:t>
+              <a:t>• Play 1: Vision &amp; Guardrails - This lesson informs Play 1 by helping learners.</a:t>
             </a:r>
             <a:endParaRPr lang="en-US" sz="1900" dirty="0"/>
           </a:p>
@@ -12987,7 +12987,7 @@
                 <a:ea typeface="Aptos" pitchFamily="34" charset="-122"/>
                 <a:cs typeface="Aptos" pitchFamily="34" charset="-120"/>
               </a:rPr>
-              <a:t>• Play 2: Readiness Assessment - This lesson informs Play 2 by helping learners connect the.</a:t>
+              <a:t>• Play 2: Readiness Assessment - This lesson informs Play 2 by helping.</a:t>
             </a:r>
             <a:endParaRPr lang="en-US" sz="1900" dirty="0"/>
           </a:p>
@@ -13004,7 +13004,7 @@
                 <a:ea typeface="Aptos" pitchFamily="34" charset="-122"/>
                 <a:cs typeface="Aptos" pitchFamily="34" charset="-120"/>
               </a:rPr>
-              <a:t>• Play 3: Establish AI Governance - This lesson informs Play 3 by helping learners connect the.</a:t>
+              <a:t>• Play 3: Establish AI Governance - This lesson informs Play 3 by helping.</a:t>
             </a:r>
             <a:endParaRPr lang="en-US" sz="1900" dirty="0"/>
           </a:p>
@@ -13045,8 +13045,8 @@
         </p:nvSpPr>
         <p:spPr>
           <a:xfrm>
-            <a:off x="8211312" y="1563624"/>
-            <a:ext cx="2734056" cy="256032"/>
+            <a:off x="8211312" y="1545336"/>
+            <a:ext cx="2734056" cy="228600"/>
           </a:xfrm>
           <a:prstGeom prst="rect">
             <a:avLst/>
@@ -13062,7 +13062,7 @@
               <a:buNone/>
             </a:pPr>
             <a:r>
-              <a:rPr lang="en-US" sz="1300" b="1" dirty="0">
+              <a:rPr lang="en-US" sz="1220" b="1" dirty="0">
                 <a:solidFill>
                   <a:srgbClr val="0068B7"/>
                 </a:solidFill>
@@ -13072,7 +13072,7 @@
               </a:rPr>
               <a:t>Apply the lesson</a:t>
             </a:r>
-            <a:endParaRPr lang="en-US" sz="1300" dirty="0"/>
+            <a:endParaRPr lang="en-US" sz="1220" dirty="0"/>
           </a:p>
         </p:txBody>
       </p:sp>
@@ -13084,8 +13084,8 @@
         </p:nvSpPr>
         <p:spPr>
           <a:xfrm>
-            <a:off x="8211312" y="1892808"/>
-            <a:ext cx="2734056" cy="1536192"/>
+            <a:off x="8211312" y="1856232"/>
+            <a:ext cx="2734056" cy="1591056"/>
           </a:xfrm>
           <a:prstGeom prst="rect">
             <a:avLst/>
@@ -13103,7 +13103,7 @@
               <a:buNone/>
             </a:pPr>
             <a:r>
-              <a:rPr lang="en-US" sz="1320" dirty="0">
+              <a:rPr lang="en-US" sz="1220" dirty="0">
                 <a:solidFill>
                   <a:srgbClr val="17364A"/>
                 </a:solidFill>
@@ -13111,9 +13111,9 @@
                 <a:ea typeface="Aptos" pitchFamily="34" charset="-122"/>
                 <a:cs typeface="Aptos" pitchFamily="34" charset="-120"/>
               </a:rPr>
-              <a:t>Use the related plays to identify decisions, participants, timing, approvals, and documentation needed for responsible implementation.</a:t>
-            </a:r>
-            <a:endParaRPr lang="en-US" sz="1320" dirty="0"/>
+              <a:t>Use the related plays to identify decisions, participants, timing, approvals,.</a:t>
+            </a:r>
+            <a:endParaRPr lang="en-US" sz="1220" dirty="0"/>
           </a:p>
         </p:txBody>
       </p:sp>
@@ -13152,8 +13152,8 @@
         </p:nvSpPr>
         <p:spPr>
           <a:xfrm>
-            <a:off x="8211312" y="3941064"/>
-            <a:ext cx="2734056" cy="256032"/>
+            <a:off x="8211312" y="3922776"/>
+            <a:ext cx="2734056" cy="228600"/>
           </a:xfrm>
           <a:prstGeom prst="rect">
             <a:avLst/>
@@ -13169,7 +13169,7 @@
               <a:buNone/>
             </a:pPr>
             <a:r>
-              <a:rPr lang="en-US" sz="1300" b="1" dirty="0">
+              <a:rPr lang="en-US" sz="1220" b="1" dirty="0">
                 <a:solidFill>
                   <a:srgbClr val="0068B7"/>
                 </a:solidFill>
@@ -13179,7 +13179,7 @@
               </a:rPr>
               <a:t>Use the play links to</a:t>
             </a:r>
-            <a:endParaRPr lang="en-US" sz="1300" dirty="0"/>
+            <a:endParaRPr lang="en-US" sz="1220" dirty="0"/>
           </a:p>
         </p:txBody>
       </p:sp>
@@ -13191,8 +13191,8 @@
         </p:nvSpPr>
         <p:spPr>
           <a:xfrm>
-            <a:off x="8229600" y="4306824"/>
-            <a:ext cx="2679192" cy="941832"/>
+            <a:off x="8229600" y="4251960"/>
+            <a:ext cx="2679192" cy="1033272"/>
           </a:xfrm>
           <a:prstGeom prst="rect">
             <a:avLst/>
@@ -13210,7 +13210,7 @@
               <a:buNone/>
             </a:pPr>
             <a:r>
-              <a:rPr lang="en-US" sz="1220" dirty="0">
+              <a:rPr lang="en-US" sz="1140" dirty="0">
                 <a:solidFill>
                   <a:srgbClr val="17364A"/>
                 </a:solidFill>
@@ -13220,14 +13220,14 @@
               </a:rPr>
               <a:t>Locate the decision point in the playbook sequence.</a:t>
             </a:r>
-            <a:endParaRPr lang="en-US" sz="1220" dirty="0"/>
-          </a:p>
-          <a:p>
-            <a:pPr indent="0" marL="0">
-              <a:buNone/>
-            </a:pPr>
-            <a:r>
-              <a:rPr lang="en-US" sz="1220" dirty="0">
+            <a:endParaRPr lang="en-US" sz="1140" dirty="0"/>
+          </a:p>
+          <a:p>
+            <a:pPr indent="0" marL="0">
+              <a:buNone/>
+            </a:pPr>
+            <a:r>
+              <a:rPr lang="en-US" sz="1140" dirty="0">
                 <a:solidFill>
                   <a:srgbClr val="17364A"/>
                 </a:solidFill>
@@ -13237,14 +13237,14 @@
               </a:rPr>
               <a:t>Identify who should participate in the work.</a:t>
             </a:r>
-            <a:endParaRPr lang="en-US" sz="1220" dirty="0"/>
-          </a:p>
-          <a:p>
-            <a:pPr indent="0" marL="0">
-              <a:buNone/>
-            </a:pPr>
-            <a:r>
-              <a:rPr lang="en-US" sz="1220" dirty="0">
+            <a:endParaRPr lang="en-US" sz="1140" dirty="0"/>
+          </a:p>
+          <a:p>
+            <a:pPr indent="0" marL="0">
+              <a:buNone/>
+            </a:pPr>
+            <a:r>
+              <a:rPr lang="en-US" sz="1140" dirty="0">
                 <a:solidFill>
                   <a:srgbClr val="17364A"/>
                 </a:solidFill>
@@ -13252,9 +13252,9 @@
                 <a:ea typeface="Aptos" pitchFamily="34" charset="-122"/>
                 <a:cs typeface="Aptos" pitchFamily="34" charset="-120"/>
               </a:rPr>
-              <a:t>Document the review, approval, or implementation step.</a:t>
-            </a:r>
-            <a:endParaRPr lang="en-US" sz="1220" dirty="0"/>
+              <a:t>Document the review, approval, or implementation.</a:t>
+            </a:r>
+            <a:endParaRPr lang="en-US" sz="1140" dirty="0"/>
           </a:p>
         </p:txBody>
       </p:sp>
@@ -13572,7 +13572,7 @@
                 <a:ea typeface="Aptos" pitchFamily="34" charset="-122"/>
                 <a:cs typeface="Aptos" pitchFamily="34" charset="-120"/>
               </a:rPr>
-              <a:t>• Tool 1: AI Vision &amp; Principles Workshop (Workshop) - Use AI Vision &amp; Principles Workshop to.</a:t>
+              <a:t>• Tool 1: AI Vision &amp; Principles Workshop (Workshop) - Use AI Vision &amp;.</a:t>
             </a:r>
             <a:endParaRPr lang="en-US" sz="1850" dirty="0"/>
           </a:p>
@@ -13589,7 +13589,7 @@
                 <a:ea typeface="Aptos" pitchFamily="34" charset="-122"/>
                 <a:cs typeface="Aptos" pitchFamily="34" charset="-120"/>
               </a:rPr>
-              <a:t>• Tool 4: AI Policy Landscape Scan (Worksheet) - Use AI Policy Landscape Scan to translate this.</a:t>
+              <a:t>• Tool 4: AI Policy Landscape Scan (Worksheet) - Use AI Policy Landscape Scan.</a:t>
             </a:r>
             <a:endParaRPr lang="en-US" sz="1850" dirty="0"/>
           </a:p>
@@ -13606,7 +13606,7 @@
                 <a:ea typeface="Aptos" pitchFamily="34" charset="-122"/>
                 <a:cs typeface="Aptos" pitchFamily="34" charset="-120"/>
               </a:rPr>
-              <a:t>• Tool 5: AI Environmental and Resource Impact Review (Checklist) - Use AI Environmental and.</a:t>
+              <a:t>• Tool 5: AI Environmental and Resource Impact Review (Checklist) - Use AI.</a:t>
             </a:r>
             <a:endParaRPr lang="en-US" sz="1850" dirty="0"/>
           </a:p>
@@ -13623,7 +13623,7 @@
                 <a:ea typeface="Aptos" pitchFamily="34" charset="-122"/>
                 <a:cs typeface="Aptos" pitchFamily="34" charset="-120"/>
               </a:rPr>
-              <a:t>• Tool 6: Human-Centered AI Decision Rule Checklist (Checklist) - Use Human-Centered AI Decision.</a:t>
+              <a:t>• Tool 6: Human-Centered AI Decision Rule Checklist (Checklist) - Use.</a:t>
             </a:r>
             <a:endParaRPr lang="en-US" sz="1850" dirty="0"/>
           </a:p>
@@ -13664,8 +13664,8 @@
         </p:nvSpPr>
         <p:spPr>
           <a:xfrm>
-            <a:off x="8211312" y="1563624"/>
-            <a:ext cx="2734056" cy="256032"/>
+            <a:off x="8211312" y="1545336"/>
+            <a:ext cx="2734056" cy="228600"/>
           </a:xfrm>
           <a:prstGeom prst="rect">
             <a:avLst/>
@@ -13681,7 +13681,7 @@
               <a:buNone/>
             </a:pPr>
             <a:r>
-              <a:rPr lang="en-US" sz="1300" b="1" dirty="0">
+              <a:rPr lang="en-US" sz="1220" b="1" dirty="0">
                 <a:solidFill>
                   <a:srgbClr val="0068B7"/>
                 </a:solidFill>
@@ -13691,7 +13691,7 @@
               </a:rPr>
               <a:t>Use the tools</a:t>
             </a:r>
-            <a:endParaRPr lang="en-US" sz="1300" dirty="0"/>
+            <a:endParaRPr lang="en-US" sz="1220" dirty="0"/>
           </a:p>
         </p:txBody>
       </p:sp>
@@ -13703,8 +13703,8 @@
         </p:nvSpPr>
         <p:spPr>
           <a:xfrm>
-            <a:off x="8211312" y="1892808"/>
-            <a:ext cx="2734056" cy="1536192"/>
+            <a:off x="8211312" y="1856232"/>
+            <a:ext cx="2734056" cy="1591056"/>
           </a:xfrm>
           <a:prstGeom prst="rect">
             <a:avLst/>
@@ -13722,7 +13722,7 @@
               <a:buNone/>
             </a:pPr>
             <a:r>
-              <a:rPr lang="en-US" sz="1320" dirty="0">
+              <a:rPr lang="en-US" sz="1220" dirty="0">
                 <a:solidFill>
                   <a:srgbClr val="17364A"/>
                 </a:solidFill>
@@ -13730,9 +13730,9 @@
                 <a:ea typeface="Aptos" pitchFamily="34" charset="-122"/>
                 <a:cs typeface="Aptos" pitchFamily="34" charset="-120"/>
               </a:rPr>
-              <a:t>Use linked tools when your department needs a structured worksheet, template, checklist, review process, or documentation artifact.</a:t>
-            </a:r>
-            <a:endParaRPr lang="en-US" sz="1320" dirty="0"/>
+              <a:t>Use linked tools when your department needs a structured worksheet, template,.</a:t>
+            </a:r>
+            <a:endParaRPr lang="en-US" sz="1220" dirty="0"/>
           </a:p>
         </p:txBody>
       </p:sp>
@@ -13771,8 +13771,8 @@
         </p:nvSpPr>
         <p:spPr>
           <a:xfrm>
-            <a:off x="8211312" y="3941064"/>
-            <a:ext cx="2734056" cy="256032"/>
+            <a:off x="8211312" y="3922776"/>
+            <a:ext cx="2734056" cy="228600"/>
           </a:xfrm>
           <a:prstGeom prst="rect">
             <a:avLst/>
@@ -13788,7 +13788,7 @@
               <a:buNone/>
             </a:pPr>
             <a:r>
-              <a:rPr lang="en-US" sz="1300" b="1" dirty="0">
+              <a:rPr lang="en-US" sz="1220" b="1" dirty="0">
                 <a:solidFill>
                   <a:srgbClr val="0068B7"/>
                 </a:solidFill>
@@ -13798,7 +13798,7 @@
               </a:rPr>
               <a:t>Tool selection cues</a:t>
             </a:r>
-            <a:endParaRPr lang="en-US" sz="1300" dirty="0"/>
+            <a:endParaRPr lang="en-US" sz="1220" dirty="0"/>
           </a:p>
         </p:txBody>
       </p:sp>
@@ -13810,8 +13810,8 @@
         </p:nvSpPr>
         <p:spPr>
           <a:xfrm>
-            <a:off x="8229600" y="4306824"/>
-            <a:ext cx="2679192" cy="941832"/>
+            <a:off x="8229600" y="4251960"/>
+            <a:ext cx="2679192" cy="1033272"/>
           </a:xfrm>
           <a:prstGeom prst="rect">
             <a:avLst/>
@@ -13829,7 +13829,7 @@
               <a:buNone/>
             </a:pPr>
             <a:r>
-              <a:rPr lang="en-US" sz="1220" dirty="0">
+              <a:rPr lang="en-US" sz="1140" dirty="0">
                 <a:solidFill>
                   <a:srgbClr val="17364A"/>
                 </a:solidFill>
@@ -13839,14 +13839,14 @@
               </a:rPr>
               <a:t>Use a tool when no comparable local process exists.</a:t>
             </a:r>
-            <a:endParaRPr lang="en-US" sz="1220" dirty="0"/>
-          </a:p>
-          <a:p>
-            <a:pPr indent="0" marL="0">
-              <a:buNone/>
-            </a:pPr>
-            <a:r>
-              <a:rPr lang="en-US" sz="1220" dirty="0">
+            <a:endParaRPr lang="en-US" sz="1140" dirty="0"/>
+          </a:p>
+          <a:p>
+            <a:pPr indent="0" marL="0">
+              <a:buNone/>
+            </a:pPr>
+            <a:r>
+              <a:rPr lang="en-US" sz="1140" dirty="0">
                 <a:solidFill>
                   <a:srgbClr val="17364A"/>
                 </a:solidFill>
@@ -13854,16 +13854,16 @@
                 <a:ea typeface="Aptos" pitchFamily="34" charset="-122"/>
                 <a:cs typeface="Aptos" pitchFamily="34" charset="-120"/>
               </a:rPr>
-              <a:t>Adapt existing department templates when they already fit the.</a:t>
-            </a:r>
-            <a:endParaRPr lang="en-US" sz="1220" dirty="0"/>
-          </a:p>
-          <a:p>
-            <a:pPr indent="0" marL="0">
-              <a:buNone/>
-            </a:pPr>
-            <a:r>
-              <a:rPr lang="en-US" sz="1220" dirty="0">
+              <a:t>Adapt existing department templates when they.</a:t>
+            </a:r>
+            <a:endParaRPr lang="en-US" sz="1140" dirty="0"/>
+          </a:p>
+          <a:p>
+            <a:pPr indent="0" marL="0">
+              <a:buNone/>
+            </a:pPr>
+            <a:r>
+              <a:rPr lang="en-US" sz="1140" dirty="0">
                 <a:solidFill>
                   <a:srgbClr val="17364A"/>
                 </a:solidFill>
@@ -13871,9 +13871,9 @@
                 <a:ea typeface="Aptos" pitchFamily="34" charset="-122"/>
                 <a:cs typeface="Aptos" pitchFamily="34" charset="-120"/>
               </a:rPr>
-              <a:t>Save the completed artifact as evidence of the decision.</a:t>
-            </a:r>
-            <a:endParaRPr lang="en-US" sz="1220" dirty="0"/>
+              <a:t>Save the completed artifact as evidence of the.</a:t>
+            </a:r>
+            <a:endParaRPr lang="en-US" sz="1140" dirty="0"/>
           </a:p>
         </p:txBody>
       </p:sp>
@@ -14164,8 +14164,8 @@
         </p:nvSpPr>
         <p:spPr>
           <a:xfrm>
-            <a:off x="868680" y="1508760"/>
-            <a:ext cx="6309360" cy="4160520"/>
+            <a:off x="822960" y="1463040"/>
+            <a:ext cx="6565392" cy="4343400"/>
           </a:xfrm>
           <a:prstGeom prst="rect">
             <a:avLst/>
@@ -14183,7 +14183,7 @@
               <a:buNone/>
             </a:pPr>
             <a:r>
-              <a:rPr lang="en-US" sz="2100" dirty="0">
+              <a:rPr lang="en-US" sz="1920" dirty="0">
                 <a:solidFill>
                   <a:srgbClr val="003A63"/>
                 </a:solidFill>
@@ -14191,16 +14191,16 @@
                 <a:ea typeface="Aptos" pitchFamily="34" charset="-122"/>
                 <a:cs typeface="Aptos" pitchFamily="34" charset="-120"/>
               </a:rPr>
-              <a:t>• Explain the purpose of ai policy development and approval workflow in public health AI.</a:t>
-            </a:r>
-            <a:endParaRPr lang="en-US" sz="2100" dirty="0"/>
-          </a:p>
-          <a:p>
-            <a:pPr indent="0" marL="0">
-              <a:buNone/>
-            </a:pPr>
-            <a:r>
-              <a:rPr lang="en-US" sz="2100" dirty="0">
+              <a:t>• Explain the purpose of ai policy development and approval workflow in public.</a:t>
+            </a:r>
+            <a:endParaRPr lang="en-US" sz="1920" dirty="0"/>
+          </a:p>
+          <a:p>
+            <a:pPr indent="0" marL="0">
+              <a:buNone/>
+            </a:pPr>
+            <a:r>
+              <a:rPr lang="en-US" sz="1920" dirty="0">
                 <a:solidFill>
                   <a:srgbClr val="003A63"/>
                 </a:solidFill>
@@ -14210,14 +14210,14 @@
               </a:rPr>
               <a:t>• Identify the roles, decisions, risks, and documentation needed for the topic.</a:t>
             </a:r>
-            <a:endParaRPr lang="en-US" sz="2100" dirty="0"/>
-          </a:p>
-          <a:p>
-            <a:pPr indent="0" marL="0">
-              <a:buNone/>
-            </a:pPr>
-            <a:r>
-              <a:rPr lang="en-US" sz="2100" dirty="0">
+            <a:endParaRPr lang="en-US" sz="1920" dirty="0"/>
+          </a:p>
+          <a:p>
+            <a:pPr indent="0" marL="0">
+              <a:buNone/>
+            </a:pPr>
+            <a:r>
+              <a:rPr lang="en-US" sz="1920" dirty="0">
                 <a:solidFill>
                   <a:srgbClr val="003A63"/>
                 </a:solidFill>
@@ -14227,7 +14227,7 @@
               </a:rPr>
               <a:t>• Apply the topic to a real or realistic public health workflow or decision.</a:t>
             </a:r>
-            <a:endParaRPr lang="en-US" sz="2100" dirty="0"/>
+            <a:endParaRPr lang="en-US" sz="1920" dirty="0"/>
           </a:p>
         </p:txBody>
       </p:sp>
@@ -14239,12 +14239,12 @@
         </p:nvSpPr>
         <p:spPr>
           <a:xfrm>
-            <a:off x="7635240" y="1325880"/>
-            <a:ext cx="3474720" cy="1207008"/>
+            <a:off x="7543800" y="1325880"/>
+            <a:ext cx="3611880" cy="1261872"/>
           </a:xfrm>
           <a:prstGeom prst="roundRect">
             <a:avLst>
-              <a:gd name="adj" fmla="val 9091"/>
+              <a:gd name="adj" fmla="val 8696"/>
             </a:avLst>
           </a:prstGeom>
           <a:solidFill>
@@ -14266,8 +14266,8 @@
         </p:nvSpPr>
         <p:spPr>
           <a:xfrm>
-            <a:off x="7799832" y="1472184"/>
-            <a:ext cx="3145536" cy="256032"/>
+            <a:off x="7708392" y="1453896"/>
+            <a:ext cx="3282696" cy="228600"/>
           </a:xfrm>
           <a:prstGeom prst="rect">
             <a:avLst/>
@@ -14283,7 +14283,7 @@
               <a:buNone/>
             </a:pPr>
             <a:r>
-              <a:rPr lang="en-US" sz="1300" b="1" dirty="0">
+              <a:rPr lang="en-US" sz="1220" b="1" dirty="0">
                 <a:solidFill>
                   <a:srgbClr val="0068B7"/>
                 </a:solidFill>
@@ -14293,7 +14293,7 @@
               </a:rPr>
               <a:t>Governance lens</a:t>
             </a:r>
-            <a:endParaRPr lang="en-US" sz="1300" dirty="0"/>
+            <a:endParaRPr lang="en-US" sz="1220" dirty="0"/>
           </a:p>
         </p:txBody>
       </p:sp>
@@ -14305,8 +14305,8 @@
         </p:nvSpPr>
         <p:spPr>
           <a:xfrm>
-            <a:off x="7799832" y="1801368"/>
-            <a:ext cx="3145536" cy="640080"/>
+            <a:off x="7708392" y="1764792"/>
+            <a:ext cx="3282696" cy="749808"/>
           </a:xfrm>
           <a:prstGeom prst="rect">
             <a:avLst/>
@@ -14324,7 +14324,7 @@
               <a:buNone/>
             </a:pPr>
             <a:r>
-              <a:rPr lang="en-US" sz="1320" dirty="0">
+              <a:rPr lang="en-US" sz="1220" dirty="0">
                 <a:solidFill>
                   <a:srgbClr val="17364A"/>
                 </a:solidFill>
@@ -14332,9 +14332,9 @@
                 <a:ea typeface="Aptos" pitchFamily="34" charset="-122"/>
                 <a:cs typeface="Aptos" pitchFamily="34" charset="-120"/>
               </a:rPr>
-              <a:t>Explain the purpose of ai policy development and approval workflow in public health AI.</a:t>
-            </a:r>
-            <a:endParaRPr lang="en-US" sz="1320" dirty="0"/>
+              <a:t>Explain the purpose of ai policy development and approval workflow in public.</a:t>
+            </a:r>
+            <a:endParaRPr lang="en-US" sz="1220" dirty="0"/>
           </a:p>
         </p:txBody>
       </p:sp>
@@ -14346,12 +14346,12 @@
         </p:nvSpPr>
         <p:spPr>
           <a:xfrm>
-            <a:off x="7635240" y="2670048"/>
-            <a:ext cx="3474720" cy="1377086"/>
+            <a:off x="7543800" y="2724912"/>
+            <a:ext cx="3611880" cy="1527048"/>
           </a:xfrm>
           <a:prstGeom prst="roundRect">
             <a:avLst>
-              <a:gd name="adj" fmla="val 7968"/>
+              <a:gd name="adj" fmla="val 7186"/>
             </a:avLst>
           </a:prstGeom>
           <a:solidFill>
@@ -14373,8 +14373,8 @@
         </p:nvSpPr>
         <p:spPr>
           <a:xfrm>
-            <a:off x="7799832" y="2816352"/>
-            <a:ext cx="3145536" cy="256032"/>
+            <a:off x="7708392" y="2852928"/>
+            <a:ext cx="3282696" cy="228600"/>
           </a:xfrm>
           <a:prstGeom prst="rect">
             <a:avLst/>
@@ -14390,7 +14390,7 @@
               <a:buNone/>
             </a:pPr>
             <a:r>
-              <a:rPr lang="en-US" sz="1300" b="1" dirty="0">
+              <a:rPr lang="en-US" sz="1220" b="1" dirty="0">
                 <a:solidFill>
                   <a:srgbClr val="0068B7"/>
                 </a:solidFill>
@@ -14400,7 +14400,7 @@
               </a:rPr>
               <a:t>Concept checkpoints</a:t>
             </a:r>
-            <a:endParaRPr lang="en-US" sz="1300" dirty="0"/>
+            <a:endParaRPr lang="en-US" sz="1220" dirty="0"/>
           </a:p>
         </p:txBody>
       </p:sp>
@@ -14412,8 +14412,8 @@
         </p:nvSpPr>
         <p:spPr>
           <a:xfrm>
-            <a:off x="7818120" y="3182112"/>
-            <a:ext cx="3090672" cy="718718"/>
+            <a:off x="7726680" y="3182112"/>
+            <a:ext cx="3227832" cy="960120"/>
           </a:xfrm>
           <a:prstGeom prst="rect">
             <a:avLst/>
@@ -14431,7 +14431,7 @@
               <a:buNone/>
             </a:pPr>
             <a:r>
-              <a:rPr lang="en-US" sz="1220" dirty="0">
+              <a:rPr lang="en-US" sz="1140" dirty="0">
                 <a:solidFill>
                   <a:srgbClr val="17364A"/>
                 </a:solidFill>
@@ -14439,16 +14439,16 @@
                 <a:ea typeface="Aptos" pitchFamily="34" charset="-122"/>
                 <a:cs typeface="Aptos" pitchFamily="34" charset="-120"/>
               </a:rPr>
-              <a:t>Recognize equity, privacy, security, legal, operational, and.</a:t>
-            </a:r>
-            <a:endParaRPr lang="en-US" sz="1220" dirty="0"/>
-          </a:p>
-          <a:p>
-            <a:pPr indent="0" marL="0">
-              <a:buNone/>
-            </a:pPr>
-            <a:r>
-              <a:rPr lang="en-US" sz="1220" dirty="0">
+              <a:t>Recognize equity, privacy, security, legal,.</a:t>
+            </a:r>
+            <a:endParaRPr lang="en-US" sz="1140" dirty="0"/>
+          </a:p>
+          <a:p>
+            <a:pPr indent="0" marL="0">
+              <a:buNone/>
+            </a:pPr>
+            <a:r>
+              <a:rPr lang="en-US" sz="1140" dirty="0">
                 <a:solidFill>
                   <a:srgbClr val="17364A"/>
                 </a:solidFill>
@@ -14456,9 +14456,9 @@
                 <a:ea typeface="Aptos" pitchFamily="34" charset="-122"/>
                 <a:cs typeface="Aptos" pitchFamily="34" charset="-120"/>
               </a:rPr>
-              <a:t>Produce a practical artifact that supports readiness, governance,.</a:t>
-            </a:r>
-            <a:endParaRPr lang="en-US" sz="1220" dirty="0"/>
+              <a:t>Produce a practical artifact that supports.</a:t>
+            </a:r>
+            <a:endParaRPr lang="en-US" sz="1140" dirty="0"/>
           </a:p>
         </p:txBody>
       </p:sp>
@@ -14470,12 +14470,12 @@
         </p:nvSpPr>
         <p:spPr>
           <a:xfrm>
-            <a:off x="7635240" y="4184294"/>
-            <a:ext cx="3474720" cy="1466698"/>
+            <a:off x="7543800" y="4389120"/>
+            <a:ext cx="3611880" cy="1261872"/>
           </a:xfrm>
           <a:prstGeom prst="roundRect">
             <a:avLst>
-              <a:gd name="adj" fmla="val 7481"/>
+              <a:gd name="adj" fmla="val 8696"/>
             </a:avLst>
           </a:prstGeom>
           <a:solidFill>
@@ -14497,8 +14497,8 @@
         </p:nvSpPr>
         <p:spPr>
           <a:xfrm>
-            <a:off x="7799832" y="4330598"/>
-            <a:ext cx="3145536" cy="256032"/>
+            <a:off x="7708392" y="4517136"/>
+            <a:ext cx="3282696" cy="228600"/>
           </a:xfrm>
           <a:prstGeom prst="rect">
             <a:avLst/>
@@ -14514,7 +14514,7 @@
               <a:buNone/>
             </a:pPr>
             <a:r>
-              <a:rPr lang="en-US" sz="1300" b="1" dirty="0">
+              <a:rPr lang="en-US" sz="1220" b="1" dirty="0">
                 <a:solidFill>
                   <a:srgbClr val="0068B7"/>
                 </a:solidFill>
@@ -14524,7 +14524,7 @@
               </a:rPr>
               <a:t>What to document</a:t>
             </a:r>
-            <a:endParaRPr lang="en-US" sz="1300" dirty="0"/>
+            <a:endParaRPr lang="en-US" sz="1220" dirty="0"/>
           </a:p>
         </p:txBody>
       </p:sp>
@@ -14536,8 +14536,8 @@
         </p:nvSpPr>
         <p:spPr>
           <a:xfrm>
-            <a:off x="7799832" y="4659782"/>
-            <a:ext cx="3145536" cy="899770"/>
+            <a:off x="7708392" y="4828032"/>
+            <a:ext cx="3282696" cy="749808"/>
           </a:xfrm>
           <a:prstGeom prst="rect">
             <a:avLst/>
@@ -14555,7 +14555,7 @@
               <a:buNone/>
             </a:pPr>
             <a:r>
-              <a:rPr lang="en-US" sz="1320" dirty="0">
+              <a:rPr lang="en-US" sz="1220" dirty="0">
                 <a:solidFill>
                   <a:srgbClr val="17364A"/>
                 </a:solidFill>
@@ -14563,9 +14563,9 @@
                 <a:ea typeface="Aptos" pitchFamily="34" charset="-122"/>
                 <a:cs typeface="Aptos" pitchFamily="34" charset="-120"/>
               </a:rPr>
-              <a:t>Use the assignment to test whether you can explain the concept, apply it to a realistic public health situation, and identify what would need review before the work moves forward.</a:t>
-            </a:r>
-            <a:endParaRPr lang="en-US" sz="1320" dirty="0"/>
+              <a:t>Use the assignment to test whether you can explain the concept, apply it to a.</a:t>
+            </a:r>
+            <a:endParaRPr lang="en-US" sz="1220" dirty="0"/>
           </a:p>
         </p:txBody>
       </p:sp>
@@ -14856,8 +14856,8 @@
         </p:nvSpPr>
         <p:spPr>
           <a:xfrm>
-            <a:off x="868680" y="1508760"/>
-            <a:ext cx="6309360" cy="4160520"/>
+            <a:off x="822960" y="1463040"/>
+            <a:ext cx="6565392" cy="4343400"/>
           </a:xfrm>
           <a:prstGeom prst="rect">
             <a:avLst/>
@@ -14875,7 +14875,7 @@
               <a:buNone/>
             </a:pPr>
             <a:r>
-              <a:rPr lang="en-US" sz="2100" dirty="0">
+              <a:rPr lang="en-US" sz="1920" dirty="0">
                 <a:solidFill>
                   <a:srgbClr val="003A63"/>
                 </a:solidFill>
@@ -14883,16 +14883,16 @@
                 <a:ea typeface="Aptos" pitchFamily="34" charset="-122"/>
                 <a:cs typeface="Aptos" pitchFamily="34" charset="-120"/>
               </a:rPr>
-              <a:t>• This module focuses on creating, approving, implementing, and updating internal AI policies.</a:t>
-            </a:r>
-            <a:endParaRPr lang="en-US" sz="2100" dirty="0"/>
-          </a:p>
-          <a:p>
-            <a:pPr indent="0" marL="0">
-              <a:buNone/>
-            </a:pPr>
-            <a:r>
-              <a:rPr lang="en-US" sz="2100" dirty="0">
+              <a:t>• This module focuses on creating, approving, implementing, and updating.</a:t>
+            </a:r>
+            <a:endParaRPr lang="en-US" sz="1920" dirty="0"/>
+          </a:p>
+          <a:p>
+            <a:pPr indent="0" marL="0">
+              <a:buNone/>
+            </a:pPr>
+            <a:r>
+              <a:rPr lang="en-US" sz="1920" dirty="0">
                 <a:solidFill>
                   <a:srgbClr val="003A63"/>
                 </a:solidFill>
@@ -14900,16 +14900,16 @@
                 <a:ea typeface="Aptos" pitchFamily="34" charset="-122"/>
                 <a:cs typeface="Aptos" pitchFamily="34" charset="-120"/>
               </a:rPr>
-              <a:t>• It is designed for public health staff who must translate responsible AI principles into.</a:t>
-            </a:r>
-            <a:endParaRPr lang="en-US" sz="2100" dirty="0"/>
-          </a:p>
-          <a:p>
-            <a:pPr indent="0" marL="0">
-              <a:buNone/>
-            </a:pPr>
-            <a:r>
-              <a:rPr lang="en-US" sz="2100" dirty="0">
+              <a:t>• It is designed for public health staff who must translate responsible AI.</a:t>
+            </a:r>
+            <a:endParaRPr lang="en-US" sz="1920" dirty="0"/>
+          </a:p>
+          <a:p>
+            <a:pPr indent="0" marL="0">
+              <a:buNone/>
+            </a:pPr>
+            <a:r>
+              <a:rPr lang="en-US" sz="1920" dirty="0">
                 <a:solidFill>
                   <a:srgbClr val="003A63"/>
                 </a:solidFill>
@@ -14917,9 +14917,9 @@
                 <a:ea typeface="Aptos" pitchFamily="34" charset="-122"/>
                 <a:cs typeface="Aptos" pitchFamily="34" charset="-120"/>
               </a:rPr>
-              <a:t>• The module helps learners move beyond general awareness by producing a practical artifact that.</a:t>
-            </a:r>
-            <a:endParaRPr lang="en-US" sz="2100" dirty="0"/>
+              <a:t>• The module helps learners move beyond general awareness by producing a.</a:t>
+            </a:r>
+            <a:endParaRPr lang="en-US" sz="1920" dirty="0"/>
           </a:p>
         </p:txBody>
       </p:sp>
@@ -14931,12 +14931,12 @@
         </p:nvSpPr>
         <p:spPr>
           <a:xfrm>
-            <a:off x="7635240" y="1325880"/>
-            <a:ext cx="3474720" cy="1207008"/>
+            <a:off x="7543800" y="1325880"/>
+            <a:ext cx="3611880" cy="1261872"/>
           </a:xfrm>
           <a:prstGeom prst="roundRect">
             <a:avLst>
-              <a:gd name="adj" fmla="val 9091"/>
+              <a:gd name="adj" fmla="val 8696"/>
             </a:avLst>
           </a:prstGeom>
           <a:solidFill>
@@ -14958,8 +14958,8 @@
         </p:nvSpPr>
         <p:spPr>
           <a:xfrm>
-            <a:off x="7799832" y="1472184"/>
-            <a:ext cx="3145536" cy="256032"/>
+            <a:off x="7708392" y="1453896"/>
+            <a:ext cx="3282696" cy="228600"/>
           </a:xfrm>
           <a:prstGeom prst="rect">
             <a:avLst/>
@@ -14975,7 +14975,7 @@
               <a:buNone/>
             </a:pPr>
             <a:r>
-              <a:rPr lang="en-US" sz="1300" b="1" dirty="0">
+              <a:rPr lang="en-US" sz="1220" b="1" dirty="0">
                 <a:solidFill>
                   <a:srgbClr val="0068B7"/>
                 </a:solidFill>
@@ -14985,7 +14985,7 @@
               </a:rPr>
               <a:t>Governance lens</a:t>
             </a:r>
-            <a:endParaRPr lang="en-US" sz="1300" dirty="0"/>
+            <a:endParaRPr lang="en-US" sz="1220" dirty="0"/>
           </a:p>
         </p:txBody>
       </p:sp>
@@ -14997,8 +14997,8 @@
         </p:nvSpPr>
         <p:spPr>
           <a:xfrm>
-            <a:off x="7799832" y="1801368"/>
-            <a:ext cx="3145536" cy="640080"/>
+            <a:off x="7708392" y="1764792"/>
+            <a:ext cx="3282696" cy="749808"/>
           </a:xfrm>
           <a:prstGeom prst="rect">
             <a:avLst/>
@@ -15016,7 +15016,7 @@
               <a:buNone/>
             </a:pPr>
             <a:r>
-              <a:rPr lang="en-US" sz="1320" dirty="0">
+              <a:rPr lang="en-US" sz="1220" dirty="0">
                 <a:solidFill>
                   <a:srgbClr val="17364A"/>
                 </a:solidFill>
@@ -15024,9 +15024,9 @@
                 <a:ea typeface="Aptos" pitchFamily="34" charset="-122"/>
                 <a:cs typeface="Aptos" pitchFamily="34" charset="-120"/>
               </a:rPr>
-              <a:t>This module focuses on creating, approving, implementing, and updating internal AI.</a:t>
-            </a:r>
-            <a:endParaRPr lang="en-US" sz="1320" dirty="0"/>
+              <a:t>This module focuses on creating, approving, implementing, and updating internal.</a:t>
+            </a:r>
+            <a:endParaRPr lang="en-US" sz="1220" dirty="0"/>
           </a:p>
         </p:txBody>
       </p:sp>
@@ -15038,12 +15038,12 @@
         </p:nvSpPr>
         <p:spPr>
           <a:xfrm>
-            <a:off x="7635240" y="2670048"/>
-            <a:ext cx="3474720" cy="1377086"/>
+            <a:off x="7543800" y="2724912"/>
+            <a:ext cx="3611880" cy="1527048"/>
           </a:xfrm>
           <a:prstGeom prst="roundRect">
             <a:avLst>
-              <a:gd name="adj" fmla="val 7968"/>
+              <a:gd name="adj" fmla="val 7186"/>
             </a:avLst>
           </a:prstGeom>
           <a:solidFill>
@@ -15065,24 +15065,26 @@
         </p:nvSpPr>
         <p:spPr>
           <a:xfrm>
-            <a:off x="7799832" y="2798064"/>
-            <a:ext cx="3145536" cy="237744"/>
-          </a:xfrm>
-          <a:prstGeom prst="rect">
-            <a:avLst/>
-          </a:prstGeom>
-          <a:noFill/>
-          <a:ln/>
-        </p:spPr>
-        <p:txBody>
-          <a:bodyPr wrap="square" lIns="0" tIns="0" rIns="0" bIns="0" rtlCol="0" anchor="ctr"/>
-          <a:lstStyle/>
-          <a:p>
-            <a:pPr indent="0" marL="0">
-              <a:buNone/>
-            </a:pPr>
-            <a:r>
-              <a:rPr lang="en-US" sz="1250" b="1" dirty="0">
+            <a:off x="7708392" y="2852928"/>
+            <a:ext cx="3282696" cy="219456"/>
+          </a:xfrm>
+          <a:prstGeom prst="rect">
+            <a:avLst/>
+          </a:prstGeom>
+          <a:noFill/>
+          <a:ln/>
+        </p:spPr>
+        <p:txBody>
+          <a:bodyPr wrap="square" lIns="0" tIns="0" rIns="0" bIns="0" rtlCol="0" anchor="ctr">
+            <a:normAutofit/>
+          </a:bodyPr>
+          <a:lstStyle/>
+          <a:p>
+            <a:pPr indent="0" marL="0">
+              <a:buNone/>
+            </a:pPr>
+            <a:r>
+              <a:rPr lang="en-US" sz="1160" b="1" dirty="0">
                 <a:solidFill>
                   <a:srgbClr val="0068B7"/>
                 </a:solidFill>
@@ -15092,7 +15094,7 @@
               </a:rPr>
               <a:t>Governance pathway</a:t>
             </a:r>
-            <a:endParaRPr lang="en-US" sz="1250" dirty="0"/>
+            <a:endParaRPr lang="en-US" sz="1160" dirty="0"/>
           </a:p>
         </p:txBody>
       </p:sp>
@@ -15104,7 +15106,7 @@
         </p:nvSpPr>
         <p:spPr>
           <a:xfrm>
-            <a:off x="8763000" y="3351276"/>
+            <a:off x="8717280" y="3406140"/>
             <a:ext cx="164592" cy="0"/>
           </a:xfrm>
           <a:prstGeom prst="line">
@@ -15127,8 +15129,8 @@
         </p:nvSpPr>
         <p:spPr>
           <a:xfrm>
-            <a:off x="7872984" y="3200400"/>
-            <a:ext cx="890016" cy="301752"/>
+            <a:off x="7781544" y="3255264"/>
+            <a:ext cx="935736" cy="301752"/>
           </a:xfrm>
           <a:prstGeom prst="roundRect">
             <a:avLst>
@@ -15154,8 +15156,8 @@
         </p:nvSpPr>
         <p:spPr>
           <a:xfrm>
-            <a:off x="7909560" y="3273552"/>
-            <a:ext cx="816864" cy="146304"/>
+            <a:off x="7818120" y="3328416"/>
+            <a:ext cx="862584" cy="146304"/>
           </a:xfrm>
           <a:prstGeom prst="rect">
             <a:avLst/>
@@ -15195,7 +15197,7 @@
         </p:nvSpPr>
         <p:spPr>
           <a:xfrm>
-            <a:off x="9817608" y="3351276"/>
+            <a:off x="9817608" y="3406140"/>
             <a:ext cx="164592" cy="0"/>
           </a:xfrm>
           <a:prstGeom prst="line">
@@ -15218,8 +15220,8 @@
         </p:nvSpPr>
         <p:spPr>
           <a:xfrm>
-            <a:off x="8927592" y="3200400"/>
-            <a:ext cx="890016" cy="301752"/>
+            <a:off x="8881872" y="3255264"/>
+            <a:ext cx="935736" cy="301752"/>
           </a:xfrm>
           <a:prstGeom prst="roundRect">
             <a:avLst>
@@ -15245,8 +15247,8 @@
         </p:nvSpPr>
         <p:spPr>
           <a:xfrm>
-            <a:off x="8964168" y="3273552"/>
-            <a:ext cx="816864" cy="146304"/>
+            <a:off x="8918448" y="3328416"/>
+            <a:ext cx="862584" cy="146304"/>
           </a:xfrm>
           <a:prstGeom prst="rect">
             <a:avLst/>
@@ -15286,8 +15288,8 @@
         </p:nvSpPr>
         <p:spPr>
           <a:xfrm>
-            <a:off x="9982200" y="3200400"/>
-            <a:ext cx="890016" cy="301752"/>
+            <a:off x="9982200" y="3255264"/>
+            <a:ext cx="935736" cy="301752"/>
           </a:xfrm>
           <a:prstGeom prst="roundRect">
             <a:avLst>
@@ -15313,8 +15315,8 @@
         </p:nvSpPr>
         <p:spPr>
           <a:xfrm>
-            <a:off x="10018776" y="3273552"/>
-            <a:ext cx="816864" cy="146304"/>
+            <a:off x="10018776" y="3328416"/>
+            <a:ext cx="862584" cy="146304"/>
           </a:xfrm>
           <a:prstGeom prst="rect">
             <a:avLst/>
@@ -15354,8 +15356,8 @@
         </p:nvSpPr>
         <p:spPr>
           <a:xfrm>
-            <a:off x="7854696" y="3694176"/>
-            <a:ext cx="3035808" cy="206654"/>
+            <a:off x="7763256" y="3749040"/>
+            <a:ext cx="3172968" cy="356616"/>
           </a:xfrm>
           <a:prstGeom prst="rect">
             <a:avLst/>
@@ -15373,7 +15375,7 @@
               <a:buNone/>
             </a:pPr>
             <a:r>
-              <a:rPr lang="en-US" sz="1120" dirty="0">
+              <a:rPr lang="en-US" sz="1040" dirty="0">
                 <a:solidFill>
                   <a:srgbClr val="17364A"/>
                 </a:solidFill>
@@ -15381,9 +15383,9 @@
                 <a:ea typeface="Aptos" pitchFamily="34" charset="-122"/>
                 <a:cs typeface="Aptos" pitchFamily="34" charset="-120"/>
               </a:rPr>
-              <a:t>A proposed AI use should move through documented review before it becomes an operational workflow.</a:t>
-            </a:r>
-            <a:endParaRPr lang="en-US" sz="1120" dirty="0"/>
+              <a:t>A proposed AI use should move through documented review before it.</a:t>
+            </a:r>
+            <a:endParaRPr lang="en-US" sz="1040" dirty="0"/>
           </a:p>
         </p:txBody>
       </p:sp>
@@ -15395,12 +15397,12 @@
         </p:nvSpPr>
         <p:spPr>
           <a:xfrm>
-            <a:off x="7635240" y="4184294"/>
-            <a:ext cx="3474720" cy="1466698"/>
+            <a:off x="7543800" y="4389120"/>
+            <a:ext cx="3611880" cy="1261872"/>
           </a:xfrm>
           <a:prstGeom prst="roundRect">
             <a:avLst>
-              <a:gd name="adj" fmla="val 7481"/>
+              <a:gd name="adj" fmla="val 8696"/>
             </a:avLst>
           </a:prstGeom>
           <a:solidFill>
@@ -15422,8 +15424,8 @@
         </p:nvSpPr>
         <p:spPr>
           <a:xfrm>
-            <a:off x="7799832" y="4330598"/>
-            <a:ext cx="3145536" cy="256032"/>
+            <a:off x="7708392" y="4517136"/>
+            <a:ext cx="3282696" cy="228600"/>
           </a:xfrm>
           <a:prstGeom prst="rect">
             <a:avLst/>
@@ -15439,7 +15441,7 @@
               <a:buNone/>
             </a:pPr>
             <a:r>
-              <a:rPr lang="en-US" sz="1300" b="1" dirty="0">
+              <a:rPr lang="en-US" sz="1220" b="1" dirty="0">
                 <a:solidFill>
                   <a:srgbClr val="0068B7"/>
                 </a:solidFill>
@@ -15449,7 +15451,7 @@
               </a:rPr>
               <a:t>What to document</a:t>
             </a:r>
-            <a:endParaRPr lang="en-US" sz="1300" dirty="0"/>
+            <a:endParaRPr lang="en-US" sz="1220" dirty="0"/>
           </a:p>
         </p:txBody>
       </p:sp>
@@ -15461,8 +15463,8 @@
         </p:nvSpPr>
         <p:spPr>
           <a:xfrm>
-            <a:off x="7799832" y="4659782"/>
-            <a:ext cx="3145536" cy="899770"/>
+            <a:off x="7708392" y="4828032"/>
+            <a:ext cx="3282696" cy="749808"/>
           </a:xfrm>
           <a:prstGeom prst="rect">
             <a:avLst/>
@@ -15480,7 +15482,7 @@
               <a:buNone/>
             </a:pPr>
             <a:r>
-              <a:rPr lang="en-US" sz="1320" dirty="0">
+              <a:rPr lang="en-US" sz="1220" dirty="0">
                 <a:solidFill>
                   <a:srgbClr val="17364A"/>
                 </a:solidFill>
@@ -15488,9 +15490,9 @@
                 <a:ea typeface="Aptos" pitchFamily="34" charset="-122"/>
                 <a:cs typeface="Aptos" pitchFamily="34" charset="-120"/>
               </a:rPr>
-              <a:t>Translate this concept into clear decision rights, review steps, documentation expectations, and escalation paths before an AI-supported workflow is approved.</a:t>
-            </a:r>
-            <a:endParaRPr lang="en-US" sz="1320" dirty="0"/>
+              <a:t>Translate this concept into clear decision rights, review steps, documentation.</a:t>
+            </a:r>
+            <a:endParaRPr lang="en-US" sz="1220" dirty="0"/>
           </a:p>
         </p:txBody>
       </p:sp>
@@ -15781,8 +15783,8 @@
         </p:nvSpPr>
         <p:spPr>
           <a:xfrm>
-            <a:off x="868680" y="1508760"/>
-            <a:ext cx="6309360" cy="4160520"/>
+            <a:off x="822960" y="1463040"/>
+            <a:ext cx="6565392" cy="4343400"/>
           </a:xfrm>
           <a:prstGeom prst="rect">
             <a:avLst/>
@@ -15800,7 +15802,7 @@
               <a:buNone/>
             </a:pPr>
             <a:r>
-              <a:rPr lang="en-US" sz="2100" dirty="0">
+              <a:rPr lang="en-US" sz="1920" dirty="0">
                 <a:solidFill>
                   <a:srgbClr val="003A63"/>
                 </a:solidFill>
@@ -15808,16 +15810,16 @@
                 <a:ea typeface="Aptos" pitchFamily="34" charset="-122"/>
                 <a:cs typeface="Aptos" pitchFamily="34" charset="-120"/>
               </a:rPr>
-              <a:t>• Decision right: The authority to approve, deny, modify, pause, or escalate an AI use case or.</a:t>
-            </a:r>
-            <a:endParaRPr lang="en-US" sz="2100" dirty="0"/>
-          </a:p>
-          <a:p>
-            <a:pPr indent="0" marL="0">
-              <a:buNone/>
-            </a:pPr>
-            <a:r>
-              <a:rPr lang="en-US" sz="2100" dirty="0">
+              <a:t>• Decision right: The authority to approve, deny, modify, pause, or escalate.</a:t>
+            </a:r>
+            <a:endParaRPr lang="en-US" sz="1920" dirty="0"/>
+          </a:p>
+          <a:p>
+            <a:pPr indent="0" marL="0">
+              <a:buNone/>
+            </a:pPr>
+            <a:r>
+              <a:rPr lang="en-US" sz="1920" dirty="0">
                 <a:solidFill>
                   <a:srgbClr val="003A63"/>
                 </a:solidFill>
@@ -15825,16 +15827,16 @@
                 <a:ea typeface="Aptos" pitchFamily="34" charset="-122"/>
                 <a:cs typeface="Aptos" pitchFamily="34" charset="-120"/>
               </a:rPr>
-              <a:t>• Evidence artifact: A document, log, checklist, test result, approval record, or review note.</a:t>
-            </a:r>
-            <a:endParaRPr lang="en-US" sz="2100" dirty="0"/>
-          </a:p>
-          <a:p>
-            <a:pPr indent="0" marL="0">
-              <a:buNone/>
-            </a:pPr>
-            <a:r>
-              <a:rPr lang="en-US" sz="2100" dirty="0">
+              <a:t>• Evidence artifact: A document, log, checklist, test result, approval record,.</a:t>
+            </a:r>
+            <a:endParaRPr lang="en-US" sz="1920" dirty="0"/>
+          </a:p>
+          <a:p>
+            <a:pPr indent="0" marL="0">
+              <a:buNone/>
+            </a:pPr>
+            <a:r>
+              <a:rPr lang="en-US" sz="1920" dirty="0">
                 <a:solidFill>
                   <a:srgbClr val="003A63"/>
                 </a:solidFill>
@@ -15842,9 +15844,9 @@
                 <a:ea typeface="Aptos" pitchFamily="34" charset="-122"/>
                 <a:cs typeface="Aptos" pitchFamily="34" charset="-120"/>
               </a:rPr>
-              <a:t>• Escalation pathway: A defined route for raising concerns to the appropriate reviewer or.</a:t>
-            </a:r>
-            <a:endParaRPr lang="en-US" sz="2100" dirty="0"/>
+              <a:t>• Escalation pathway: A defined route for raising concerns to the appropriate.</a:t>
+            </a:r>
+            <a:endParaRPr lang="en-US" sz="1920" dirty="0"/>
           </a:p>
         </p:txBody>
       </p:sp>
@@ -15856,12 +15858,12 @@
         </p:nvSpPr>
         <p:spPr>
           <a:xfrm>
-            <a:off x="7635240" y="1325880"/>
-            <a:ext cx="3474720" cy="1207008"/>
+            <a:off x="7543800" y="1325880"/>
+            <a:ext cx="3611880" cy="1261872"/>
           </a:xfrm>
           <a:prstGeom prst="roundRect">
             <a:avLst>
-              <a:gd name="adj" fmla="val 9091"/>
+              <a:gd name="adj" fmla="val 8696"/>
             </a:avLst>
           </a:prstGeom>
           <a:solidFill>
@@ -15883,8 +15885,8 @@
         </p:nvSpPr>
         <p:spPr>
           <a:xfrm>
-            <a:off x="7799832" y="1472184"/>
-            <a:ext cx="3145536" cy="256032"/>
+            <a:off x="7708392" y="1453896"/>
+            <a:ext cx="3282696" cy="228600"/>
           </a:xfrm>
           <a:prstGeom prst="rect">
             <a:avLst/>
@@ -15900,7 +15902,7 @@
               <a:buNone/>
             </a:pPr>
             <a:r>
-              <a:rPr lang="en-US" sz="1300" b="1" dirty="0">
+              <a:rPr lang="en-US" sz="1220" b="1" dirty="0">
                 <a:solidFill>
                   <a:srgbClr val="0068B7"/>
                 </a:solidFill>
@@ -15910,7 +15912,7 @@
               </a:rPr>
               <a:t>Governance lens</a:t>
             </a:r>
-            <a:endParaRPr lang="en-US" sz="1300" dirty="0"/>
+            <a:endParaRPr lang="en-US" sz="1220" dirty="0"/>
           </a:p>
         </p:txBody>
       </p:sp>
@@ -15922,8 +15924,8 @@
         </p:nvSpPr>
         <p:spPr>
           <a:xfrm>
-            <a:off x="7799832" y="1801368"/>
-            <a:ext cx="3145536" cy="640080"/>
+            <a:off x="7708392" y="1764792"/>
+            <a:ext cx="3282696" cy="749808"/>
           </a:xfrm>
           <a:prstGeom prst="rect">
             <a:avLst/>
@@ -15941,7 +15943,7 @@
               <a:buNone/>
             </a:pPr>
             <a:r>
-              <a:rPr lang="en-US" sz="1320" dirty="0">
+              <a:rPr lang="en-US" sz="1220" dirty="0">
                 <a:solidFill>
                   <a:srgbClr val="17364A"/>
                 </a:solidFill>
@@ -15949,9 +15951,9 @@
                 <a:ea typeface="Aptos" pitchFamily="34" charset="-122"/>
                 <a:cs typeface="Aptos" pitchFamily="34" charset="-120"/>
               </a:rPr>
-              <a:t>Decision right: The authority to approve, deny, modify, pause, or escalate an AI use.</a:t>
-            </a:r>
-            <a:endParaRPr lang="en-US" sz="1320" dirty="0"/>
+              <a:t>Decision right: The authority to approve, deny, modify, pause, or escalate an AI.</a:t>
+            </a:r>
+            <a:endParaRPr lang="en-US" sz="1220" dirty="0"/>
           </a:p>
         </p:txBody>
       </p:sp>
@@ -15963,12 +15965,12 @@
         </p:nvSpPr>
         <p:spPr>
           <a:xfrm>
-            <a:off x="7635240" y="2670048"/>
-            <a:ext cx="3474720" cy="1377086"/>
+            <a:off x="7543800" y="2724912"/>
+            <a:ext cx="3611880" cy="1527048"/>
           </a:xfrm>
           <a:prstGeom prst="roundRect">
             <a:avLst>
-              <a:gd name="adj" fmla="val 7968"/>
+              <a:gd name="adj" fmla="val 7186"/>
             </a:avLst>
           </a:prstGeom>
           <a:solidFill>
@@ -15990,8 +15992,8 @@
         </p:nvSpPr>
         <p:spPr>
           <a:xfrm>
-            <a:off x="7799832" y="2816352"/>
-            <a:ext cx="3145536" cy="256032"/>
+            <a:off x="7708392" y="2852928"/>
+            <a:ext cx="3282696" cy="228600"/>
           </a:xfrm>
           <a:prstGeom prst="rect">
             <a:avLst/>
@@ -16007,7 +16009,7 @@
               <a:buNone/>
             </a:pPr>
             <a:r>
-              <a:rPr lang="en-US" sz="1300" b="1" dirty="0">
+              <a:rPr lang="en-US" sz="1220" b="1" dirty="0">
                 <a:solidFill>
                   <a:srgbClr val="0068B7"/>
                 </a:solidFill>
@@ -16017,7 +16019,7 @@
               </a:rPr>
               <a:t>Concept checkpoints</a:t>
             </a:r>
-            <a:endParaRPr lang="en-US" sz="1300" dirty="0"/>
+            <a:endParaRPr lang="en-US" sz="1220" dirty="0"/>
           </a:p>
         </p:txBody>
       </p:sp>
@@ -16029,8 +16031,8 @@
         </p:nvSpPr>
         <p:spPr>
           <a:xfrm>
-            <a:off x="7818120" y="3182112"/>
-            <a:ext cx="3090672" cy="718718"/>
+            <a:off x="7726680" y="3182112"/>
+            <a:ext cx="3227832" cy="960120"/>
           </a:xfrm>
           <a:prstGeom prst="rect">
             <a:avLst/>
@@ -16048,7 +16050,7 @@
               <a:buNone/>
             </a:pPr>
             <a:r>
-              <a:rPr lang="en-US" sz="1220" dirty="0">
+              <a:rPr lang="en-US" sz="1140" dirty="0">
                 <a:solidFill>
                   <a:srgbClr val="17364A"/>
                 </a:solidFill>
@@ -16056,16 +16058,16 @@
                 <a:ea typeface="Aptos" pitchFamily="34" charset="-122"/>
                 <a:cs typeface="Aptos" pitchFamily="34" charset="-120"/>
               </a:rPr>
-              <a:t>Decision right: The authority to approve, deny, modify, pause, or.</a:t>
-            </a:r>
-            <a:endParaRPr lang="en-US" sz="1220" dirty="0"/>
-          </a:p>
-          <a:p>
-            <a:pPr indent="0" marL="0">
-              <a:buNone/>
-            </a:pPr>
-            <a:r>
-              <a:rPr lang="en-US" sz="1220" dirty="0">
+              <a:t>Decision right: The authority to approve, deny,.</a:t>
+            </a:r>
+            <a:endParaRPr lang="en-US" sz="1140" dirty="0"/>
+          </a:p>
+          <a:p>
+            <a:pPr indent="0" marL="0">
+              <a:buNone/>
+            </a:pPr>
+            <a:r>
+              <a:rPr lang="en-US" sz="1140" dirty="0">
                 <a:solidFill>
                   <a:srgbClr val="17364A"/>
                 </a:solidFill>
@@ -16073,16 +16075,16 @@
                 <a:ea typeface="Aptos" pitchFamily="34" charset="-122"/>
                 <a:cs typeface="Aptos" pitchFamily="34" charset="-120"/>
               </a:rPr>
-              <a:t>Evidence artifact: A document, log, checklist, test result,.</a:t>
-            </a:r>
-            <a:endParaRPr lang="en-US" sz="1220" dirty="0"/>
-          </a:p>
-          <a:p>
-            <a:pPr indent="0" marL="0">
-              <a:buNone/>
-            </a:pPr>
-            <a:r>
-              <a:rPr lang="en-US" sz="1220" dirty="0">
+              <a:t>Evidence artifact: A document, log, checklist,.</a:t>
+            </a:r>
+            <a:endParaRPr lang="en-US" sz="1140" dirty="0"/>
+          </a:p>
+          <a:p>
+            <a:pPr indent="0" marL="0">
+              <a:buNone/>
+            </a:pPr>
+            <a:r>
+              <a:rPr lang="en-US" sz="1140" dirty="0">
                 <a:solidFill>
                   <a:srgbClr val="17364A"/>
                 </a:solidFill>
@@ -16090,9 +16092,9 @@
                 <a:ea typeface="Aptos" pitchFamily="34" charset="-122"/>
                 <a:cs typeface="Aptos" pitchFamily="34" charset="-120"/>
               </a:rPr>
-              <a:t>Accountability owner: The person or role responsible for ensuring.</a:t>
-            </a:r>
-            <a:endParaRPr lang="en-US" sz="1220" dirty="0"/>
+              <a:t>Accountability owner: The person or role.</a:t>
+            </a:r>
+            <a:endParaRPr lang="en-US" sz="1140" dirty="0"/>
           </a:p>
         </p:txBody>
       </p:sp>
@@ -16104,12 +16106,12 @@
         </p:nvSpPr>
         <p:spPr>
           <a:xfrm>
-            <a:off x="7635240" y="4184294"/>
-            <a:ext cx="3474720" cy="1466698"/>
+            <a:off x="7543800" y="4389120"/>
+            <a:ext cx="3611880" cy="1261872"/>
           </a:xfrm>
           <a:prstGeom prst="roundRect">
             <a:avLst>
-              <a:gd name="adj" fmla="val 7481"/>
+              <a:gd name="adj" fmla="val 8696"/>
             </a:avLst>
           </a:prstGeom>
           <a:solidFill>
@@ -16131,8 +16133,8 @@
         </p:nvSpPr>
         <p:spPr>
           <a:xfrm>
-            <a:off x="7799832" y="4330598"/>
-            <a:ext cx="3145536" cy="256032"/>
+            <a:off x="7708392" y="4517136"/>
+            <a:ext cx="3282696" cy="228600"/>
           </a:xfrm>
           <a:prstGeom prst="rect">
             <a:avLst/>
@@ -16148,7 +16150,7 @@
               <a:buNone/>
             </a:pPr>
             <a:r>
-              <a:rPr lang="en-US" sz="1300" b="1" dirty="0">
+              <a:rPr lang="en-US" sz="1220" b="1" dirty="0">
                 <a:solidFill>
                   <a:srgbClr val="0068B7"/>
                 </a:solidFill>
@@ -16158,7 +16160,7 @@
               </a:rPr>
               <a:t>What to document</a:t>
             </a:r>
-            <a:endParaRPr lang="en-US" sz="1300" dirty="0"/>
+            <a:endParaRPr lang="en-US" sz="1220" dirty="0"/>
           </a:p>
         </p:txBody>
       </p:sp>
@@ -16170,8 +16172,8 @@
         </p:nvSpPr>
         <p:spPr>
           <a:xfrm>
-            <a:off x="7799832" y="4659782"/>
-            <a:ext cx="3145536" cy="899770"/>
+            <a:off x="7708392" y="4828032"/>
+            <a:ext cx="3282696" cy="749808"/>
           </a:xfrm>
           <a:prstGeom prst="rect">
             <a:avLst/>
@@ -16189,7 +16191,7 @@
               <a:buNone/>
             </a:pPr>
             <a:r>
-              <a:rPr lang="en-US" sz="1320" dirty="0">
+              <a:rPr lang="en-US" sz="1220" dirty="0">
                 <a:solidFill>
                   <a:srgbClr val="17364A"/>
                 </a:solidFill>
@@ -16197,9 +16199,9 @@
                 <a:ea typeface="Aptos" pitchFamily="34" charset="-122"/>
                 <a:cs typeface="Aptos" pitchFamily="34" charset="-120"/>
               </a:rPr>
-              <a:t>Translate this concept into clear decision rights, review steps, documentation expectations, and escalation paths before an AI-supported workflow is approved.</a:t>
-            </a:r>
-            <a:endParaRPr lang="en-US" sz="1320" dirty="0"/>
+              <a:t>Translate this concept into clear decision rights, review steps, documentation.</a:t>
+            </a:r>
+            <a:endParaRPr lang="en-US" sz="1220" dirty="0"/>
           </a:p>
         </p:txBody>
       </p:sp>
@@ -16490,8 +16492,8 @@
         </p:nvSpPr>
         <p:spPr>
           <a:xfrm>
-            <a:off x="868680" y="1508760"/>
-            <a:ext cx="6309360" cy="4160520"/>
+            <a:off x="822960" y="1463040"/>
+            <a:ext cx="6565392" cy="4343400"/>
           </a:xfrm>
           <a:prstGeom prst="rect">
             <a:avLst/>
@@ -16509,7 +16511,7 @@
               <a:buNone/>
             </a:pPr>
             <a:r>
-              <a:rPr lang="en-US" sz="2100" dirty="0">
+              <a:rPr lang="en-US" sz="1920" dirty="0">
                 <a:solidFill>
                   <a:srgbClr val="003A63"/>
                 </a:solidFill>
@@ -16517,16 +16519,16 @@
                 <a:ea typeface="Aptos" pitchFamily="34" charset="-122"/>
                 <a:cs typeface="Aptos" pitchFamily="34" charset="-120"/>
               </a:rPr>
-              <a:t>• This module provides national-level training guidance for public health agencies and partners.</a:t>
-            </a:r>
-            <a:endParaRPr lang="en-US" sz="2100" dirty="0"/>
-          </a:p>
-          <a:p>
-            <a:pPr indent="0" marL="0">
-              <a:buNone/>
-            </a:pPr>
-            <a:r>
-              <a:rPr lang="en-US" sz="2100" dirty="0">
+              <a:t>• This module provides national-level training guidance for public health.</a:t>
+            </a:r>
+            <a:endParaRPr lang="en-US" sz="1920" dirty="0"/>
+          </a:p>
+          <a:p>
+            <a:pPr indent="0" marL="0">
+              <a:buNone/>
+            </a:pPr>
+            <a:r>
+              <a:rPr lang="en-US" sz="1920" dirty="0">
                 <a:solidFill>
                   <a:srgbClr val="003A63"/>
                 </a:solidFill>
@@ -16534,16 +16536,16 @@
                 <a:ea typeface="Aptos" pitchFamily="34" charset="-122"/>
                 <a:cs typeface="Aptos" pitchFamily="34" charset="-120"/>
               </a:rPr>
-              <a:t>• It is not legal advice and does not replace review by agency legal counsel, privacy officers,.</a:t>
-            </a:r>
-            <a:endParaRPr lang="en-US" sz="2100" dirty="0"/>
-          </a:p>
-          <a:p>
-            <a:pPr indent="0" marL="0">
-              <a:buNone/>
-            </a:pPr>
-            <a:r>
-              <a:rPr lang="en-US" sz="2100" dirty="0">
+              <a:t>• It is not legal advice and does not replace review by agency legal counsel,.</a:t>
+            </a:r>
+            <a:endParaRPr lang="en-US" sz="1920" dirty="0"/>
+          </a:p>
+          <a:p>
+            <a:pPr indent="0" marL="0">
+              <a:buNone/>
+            </a:pPr>
+            <a:r>
+              <a:rPr lang="en-US" sz="1920" dirty="0">
                 <a:solidFill>
                   <a:srgbClr val="003A63"/>
                 </a:solidFill>
@@ -16551,9 +16553,9 @@
                 <a:ea typeface="Aptos" pitchFamily="34" charset="-122"/>
                 <a:cs typeface="Aptos" pitchFamily="34" charset="-120"/>
               </a:rPr>
-              <a:t>• Requirements may vary by state, locality, territory, Tribe, agency, funding source,.</a:t>
-            </a:r>
-            <a:endParaRPr lang="en-US" sz="2100" dirty="0"/>
+              <a:t>• Requirements may vary by state, locality, territory, Tribe, agency, funding.</a:t>
+            </a:r>
+            <a:endParaRPr lang="en-US" sz="1920" dirty="0"/>
           </a:p>
         </p:txBody>
       </p:sp>
@@ -16565,12 +16567,12 @@
         </p:nvSpPr>
         <p:spPr>
           <a:xfrm>
-            <a:off x="7635240" y="1325880"/>
-            <a:ext cx="3474720" cy="1207008"/>
+            <a:off x="7543800" y="1325880"/>
+            <a:ext cx="3611880" cy="1261872"/>
           </a:xfrm>
           <a:prstGeom prst="roundRect">
             <a:avLst>
-              <a:gd name="adj" fmla="val 9091"/>
+              <a:gd name="adj" fmla="val 8696"/>
             </a:avLst>
           </a:prstGeom>
           <a:solidFill>
@@ -16592,8 +16594,8 @@
         </p:nvSpPr>
         <p:spPr>
           <a:xfrm>
-            <a:off x="7799832" y="1472184"/>
-            <a:ext cx="3145536" cy="256032"/>
+            <a:off x="7708392" y="1453896"/>
+            <a:ext cx="3282696" cy="228600"/>
           </a:xfrm>
           <a:prstGeom prst="rect">
             <a:avLst/>
@@ -16609,7 +16611,7 @@
               <a:buNone/>
             </a:pPr>
             <a:r>
-              <a:rPr lang="en-US" sz="1300" b="1" dirty="0">
+              <a:rPr lang="en-US" sz="1220" b="1" dirty="0">
                 <a:solidFill>
                   <a:srgbClr val="0068B7"/>
                 </a:solidFill>
@@ -16619,7 +16621,7 @@
               </a:rPr>
               <a:t>Governance lens</a:t>
             </a:r>
-            <a:endParaRPr lang="en-US" sz="1300" dirty="0"/>
+            <a:endParaRPr lang="en-US" sz="1220" dirty="0"/>
           </a:p>
         </p:txBody>
       </p:sp>
@@ -16631,8 +16633,8 @@
         </p:nvSpPr>
         <p:spPr>
           <a:xfrm>
-            <a:off x="7799832" y="1801368"/>
-            <a:ext cx="3145536" cy="640080"/>
+            <a:off x="7708392" y="1764792"/>
+            <a:ext cx="3282696" cy="749808"/>
           </a:xfrm>
           <a:prstGeom prst="rect">
             <a:avLst/>
@@ -16650,7 +16652,7 @@
               <a:buNone/>
             </a:pPr>
             <a:r>
-              <a:rPr lang="en-US" sz="1320" dirty="0">
+              <a:rPr lang="en-US" sz="1220" dirty="0">
                 <a:solidFill>
                   <a:srgbClr val="17364A"/>
                 </a:solidFill>
@@ -16658,9 +16660,9 @@
                 <a:ea typeface="Aptos" pitchFamily="34" charset="-122"/>
                 <a:cs typeface="Aptos" pitchFamily="34" charset="-120"/>
               </a:rPr>
-              <a:t>This module provides national-level training guidance for public health agencies and.</a:t>
-            </a:r>
-            <a:endParaRPr lang="en-US" sz="1320" dirty="0"/>
+              <a:t>This module provides national-level training guidance for public health agencies.</a:t>
+            </a:r>
+            <a:endParaRPr lang="en-US" sz="1220" dirty="0"/>
           </a:p>
         </p:txBody>
       </p:sp>
@@ -16672,12 +16674,12 @@
         </p:nvSpPr>
         <p:spPr>
           <a:xfrm>
-            <a:off x="7635240" y="2670048"/>
-            <a:ext cx="3474720" cy="1377086"/>
+            <a:off x="7543800" y="2724912"/>
+            <a:ext cx="3611880" cy="1527048"/>
           </a:xfrm>
           <a:prstGeom prst="roundRect">
             <a:avLst>
-              <a:gd name="adj" fmla="val 7968"/>
+              <a:gd name="adj" fmla="val 7186"/>
             </a:avLst>
           </a:prstGeom>
           <a:solidFill>
@@ -16699,24 +16701,26 @@
         </p:nvSpPr>
         <p:spPr>
           <a:xfrm>
-            <a:off x="7799832" y="2798064"/>
-            <a:ext cx="3145536" cy="237744"/>
-          </a:xfrm>
-          <a:prstGeom prst="rect">
-            <a:avLst/>
-          </a:prstGeom>
-          <a:noFill/>
-          <a:ln/>
-        </p:spPr>
-        <p:txBody>
-          <a:bodyPr wrap="square" lIns="0" tIns="0" rIns="0" bIns="0" rtlCol="0" anchor="ctr"/>
-          <a:lstStyle/>
-          <a:p>
-            <a:pPr indent="0" marL="0">
-              <a:buNone/>
-            </a:pPr>
-            <a:r>
-              <a:rPr lang="en-US" sz="1250" b="1" dirty="0">
+            <a:off x="7708392" y="2852928"/>
+            <a:ext cx="3282696" cy="219456"/>
+          </a:xfrm>
+          <a:prstGeom prst="rect">
+            <a:avLst/>
+          </a:prstGeom>
+          <a:noFill/>
+          <a:ln/>
+        </p:spPr>
+        <p:txBody>
+          <a:bodyPr wrap="square" lIns="0" tIns="0" rIns="0" bIns="0" rtlCol="0" anchor="ctr">
+            <a:normAutofit/>
+          </a:bodyPr>
+          <a:lstStyle/>
+          <a:p>
+            <a:pPr indent="0" marL="0">
+              <a:buNone/>
+            </a:pPr>
+            <a:r>
+              <a:rPr lang="en-US" sz="1160" b="1" dirty="0">
                 <a:solidFill>
                   <a:srgbClr val="0068B7"/>
                 </a:solidFill>
@@ -16726,7 +16730,7 @@
               </a:rPr>
               <a:t>Governance pathway</a:t>
             </a:r>
-            <a:endParaRPr lang="en-US" sz="1250" dirty="0"/>
+            <a:endParaRPr lang="en-US" sz="1160" dirty="0"/>
           </a:p>
         </p:txBody>
       </p:sp>
@@ -16738,7 +16742,7 @@
         </p:nvSpPr>
         <p:spPr>
           <a:xfrm>
-            <a:off x="8763000" y="3351276"/>
+            <a:off x="8717280" y="3406140"/>
             <a:ext cx="164592" cy="0"/>
           </a:xfrm>
           <a:prstGeom prst="line">
@@ -16761,8 +16765,8 @@
         </p:nvSpPr>
         <p:spPr>
           <a:xfrm>
-            <a:off x="7872984" y="3200400"/>
-            <a:ext cx="890016" cy="301752"/>
+            <a:off x="7781544" y="3255264"/>
+            <a:ext cx="935736" cy="301752"/>
           </a:xfrm>
           <a:prstGeom prst="roundRect">
             <a:avLst>
@@ -16788,8 +16792,8 @@
         </p:nvSpPr>
         <p:spPr>
           <a:xfrm>
-            <a:off x="7909560" y="3273552"/>
-            <a:ext cx="816864" cy="146304"/>
+            <a:off x="7818120" y="3328416"/>
+            <a:ext cx="862584" cy="146304"/>
           </a:xfrm>
           <a:prstGeom prst="rect">
             <a:avLst/>
@@ -16829,7 +16833,7 @@
         </p:nvSpPr>
         <p:spPr>
           <a:xfrm>
-            <a:off x="9817608" y="3351276"/>
+            <a:off x="9817608" y="3406140"/>
             <a:ext cx="164592" cy="0"/>
           </a:xfrm>
           <a:prstGeom prst="line">
@@ -16852,8 +16856,8 @@
         </p:nvSpPr>
         <p:spPr>
           <a:xfrm>
-            <a:off x="8927592" y="3200400"/>
-            <a:ext cx="890016" cy="301752"/>
+            <a:off x="8881872" y="3255264"/>
+            <a:ext cx="935736" cy="301752"/>
           </a:xfrm>
           <a:prstGeom prst="roundRect">
             <a:avLst>
@@ -16879,8 +16883,8 @@
         </p:nvSpPr>
         <p:spPr>
           <a:xfrm>
-            <a:off x="8964168" y="3273552"/>
-            <a:ext cx="816864" cy="146304"/>
+            <a:off x="8918448" y="3328416"/>
+            <a:ext cx="862584" cy="146304"/>
           </a:xfrm>
           <a:prstGeom prst="rect">
             <a:avLst/>
@@ -16920,8 +16924,8 @@
         </p:nvSpPr>
         <p:spPr>
           <a:xfrm>
-            <a:off x="9982200" y="3200400"/>
-            <a:ext cx="890016" cy="301752"/>
+            <a:off x="9982200" y="3255264"/>
+            <a:ext cx="935736" cy="301752"/>
           </a:xfrm>
           <a:prstGeom prst="roundRect">
             <a:avLst>
@@ -16947,8 +16951,8 @@
         </p:nvSpPr>
         <p:spPr>
           <a:xfrm>
-            <a:off x="10018776" y="3273552"/>
-            <a:ext cx="816864" cy="146304"/>
+            <a:off x="10018776" y="3328416"/>
+            <a:ext cx="862584" cy="146304"/>
           </a:xfrm>
           <a:prstGeom prst="rect">
             <a:avLst/>
@@ -16988,8 +16992,8 @@
         </p:nvSpPr>
         <p:spPr>
           <a:xfrm>
-            <a:off x="7854696" y="3694176"/>
-            <a:ext cx="3035808" cy="206654"/>
+            <a:off x="7763256" y="3749040"/>
+            <a:ext cx="3172968" cy="356616"/>
           </a:xfrm>
           <a:prstGeom prst="rect">
             <a:avLst/>
@@ -17007,7 +17011,7 @@
               <a:buNone/>
             </a:pPr>
             <a:r>
-              <a:rPr lang="en-US" sz="1120" dirty="0">
+              <a:rPr lang="en-US" sz="1040" dirty="0">
                 <a:solidFill>
                   <a:srgbClr val="17364A"/>
                 </a:solidFill>
@@ -17015,9 +17019,9 @@
                 <a:ea typeface="Aptos" pitchFamily="34" charset="-122"/>
                 <a:cs typeface="Aptos" pitchFamily="34" charset="-120"/>
               </a:rPr>
-              <a:t>A proposed AI use should move through documented review before it becomes an operational workflow.</a:t>
-            </a:r>
-            <a:endParaRPr lang="en-US" sz="1120" dirty="0"/>
+              <a:t>A proposed AI use should move through documented review before it.</a:t>
+            </a:r>
+            <a:endParaRPr lang="en-US" sz="1040" dirty="0"/>
           </a:p>
         </p:txBody>
       </p:sp>
@@ -17029,12 +17033,12 @@
         </p:nvSpPr>
         <p:spPr>
           <a:xfrm>
-            <a:off x="7635240" y="4184294"/>
-            <a:ext cx="3474720" cy="1466698"/>
+            <a:off x="7543800" y="4389120"/>
+            <a:ext cx="3611880" cy="1261872"/>
           </a:xfrm>
           <a:prstGeom prst="roundRect">
             <a:avLst>
-              <a:gd name="adj" fmla="val 7481"/>
+              <a:gd name="adj" fmla="val 8696"/>
             </a:avLst>
           </a:prstGeom>
           <a:solidFill>
@@ -17056,8 +17060,8 @@
         </p:nvSpPr>
         <p:spPr>
           <a:xfrm>
-            <a:off x="7799832" y="4330598"/>
-            <a:ext cx="3145536" cy="256032"/>
+            <a:off x="7708392" y="4517136"/>
+            <a:ext cx="3282696" cy="228600"/>
           </a:xfrm>
           <a:prstGeom prst="rect">
             <a:avLst/>
@@ -17073,7 +17077,7 @@
               <a:buNone/>
             </a:pPr>
             <a:r>
-              <a:rPr lang="en-US" sz="1300" b="1" dirty="0">
+              <a:rPr lang="en-US" sz="1220" b="1" dirty="0">
                 <a:solidFill>
                   <a:srgbClr val="0068B7"/>
                 </a:solidFill>
@@ -17083,7 +17087,7 @@
               </a:rPr>
               <a:t>What to document</a:t>
             </a:r>
-            <a:endParaRPr lang="en-US" sz="1300" dirty="0"/>
+            <a:endParaRPr lang="en-US" sz="1220" dirty="0"/>
           </a:p>
         </p:txBody>
       </p:sp>
@@ -17095,8 +17099,8 @@
         </p:nvSpPr>
         <p:spPr>
           <a:xfrm>
-            <a:off x="7799832" y="4659782"/>
-            <a:ext cx="3145536" cy="899770"/>
+            <a:off x="7708392" y="4828032"/>
+            <a:ext cx="3282696" cy="749808"/>
           </a:xfrm>
           <a:prstGeom prst="rect">
             <a:avLst/>
@@ -17114,7 +17118,7 @@
               <a:buNone/>
             </a:pPr>
             <a:r>
-              <a:rPr lang="en-US" sz="1320" dirty="0">
+              <a:rPr lang="en-US" sz="1220" dirty="0">
                 <a:solidFill>
                   <a:srgbClr val="17364A"/>
                 </a:solidFill>
@@ -17122,9 +17126,9 @@
                 <a:ea typeface="Aptos" pitchFamily="34" charset="-122"/>
                 <a:cs typeface="Aptos" pitchFamily="34" charset="-120"/>
               </a:rPr>
-              <a:t>Translate this concept into clear decision rights, review steps, documentation expectations, and escalation paths before an AI-supported workflow is approved.</a:t>
-            </a:r>
-            <a:endParaRPr lang="en-US" sz="1320" dirty="0"/>
+              <a:t>Translate this concept into clear decision rights, review steps, documentation.</a:t>
+            </a:r>
+            <a:endParaRPr lang="en-US" sz="1220" dirty="0"/>
           </a:p>
         </p:txBody>
       </p:sp>
@@ -17415,8 +17419,8 @@
         </p:nvSpPr>
         <p:spPr>
           <a:xfrm>
-            <a:off x="868680" y="1508760"/>
-            <a:ext cx="6309360" cy="4160520"/>
+            <a:off x="822960" y="1463040"/>
+            <a:ext cx="6565392" cy="4343400"/>
           </a:xfrm>
           <a:prstGeom prst="rect">
             <a:avLst/>
@@ -17434,7 +17438,7 @@
               <a:buNone/>
             </a:pPr>
             <a:r>
-              <a:rPr lang="en-US" sz="2100" dirty="0">
+              <a:rPr lang="en-US" sz="1920" dirty="0">
                 <a:solidFill>
                   <a:srgbClr val="003A63"/>
                 </a:solidFill>
@@ -17442,16 +17446,16 @@
                 <a:ea typeface="Aptos" pitchFamily="34" charset="-122"/>
                 <a:cs typeface="Aptos" pitchFamily="34" charset="-120"/>
               </a:rPr>
-              <a:t>• AI Policy Development and Approval Workflow matters because AI adoption changes how public.</a:t>
-            </a:r>
-            <a:endParaRPr lang="en-US" sz="2100" dirty="0"/>
-          </a:p>
-          <a:p>
-            <a:pPr indent="0" marL="0">
-              <a:buNone/>
-            </a:pPr>
-            <a:r>
-              <a:rPr lang="en-US" sz="2100" dirty="0">
+              <a:t>• AI Policy Development and Approval Workflow matters because AI adoption.</a:t>
+            </a:r>
+            <a:endParaRPr lang="en-US" sz="1920" dirty="0"/>
+          </a:p>
+          <a:p>
+            <a:pPr indent="0" marL="0">
+              <a:buNone/>
+            </a:pPr>
+            <a:r>
+              <a:rPr lang="en-US" sz="1920" dirty="0">
                 <a:solidFill>
                   <a:srgbClr val="003A63"/>
                 </a:solidFill>
@@ -17459,16 +17463,16 @@
                 <a:ea typeface="Aptos" pitchFamily="34" charset="-122"/>
                 <a:cs typeface="Aptos" pitchFamily="34" charset="-120"/>
               </a:rPr>
-              <a:t>• Without a structured approach, staff may rely on informal practices, vendor assurances, or.</a:t>
-            </a:r>
-            <a:endParaRPr lang="en-US" sz="2100" dirty="0"/>
-          </a:p>
-          <a:p>
-            <a:pPr indent="0" marL="0">
-              <a:buNone/>
-            </a:pPr>
-            <a:r>
-              <a:rPr lang="en-US" sz="2100" dirty="0">
+              <a:t>• Without a structured approach, staff may rely on informal practices, vendor.</a:t>
+            </a:r>
+            <a:endParaRPr lang="en-US" sz="1920" dirty="0"/>
+          </a:p>
+          <a:p>
+            <a:pPr indent="0" marL="0">
+              <a:buNone/>
+            </a:pPr>
+            <a:r>
+              <a:rPr lang="en-US" sz="1920" dirty="0">
                 <a:solidFill>
                   <a:srgbClr val="003A63"/>
                 </a:solidFill>
@@ -17476,9 +17480,9 @@
                 <a:ea typeface="Aptos" pitchFamily="34" charset="-122"/>
                 <a:cs typeface="Aptos" pitchFamily="34" charset="-120"/>
               </a:rPr>
-              <a:t>• Public health agencies operate under legal authorities, public accountability, resource.</a:t>
-            </a:r>
-            <a:endParaRPr lang="en-US" sz="2100" dirty="0"/>
+              <a:t>• Public health agencies operate under legal authorities, public.</a:t>
+            </a:r>
+            <a:endParaRPr lang="en-US" sz="1920" dirty="0"/>
           </a:p>
         </p:txBody>
       </p:sp>
@@ -17490,12 +17494,12 @@
         </p:nvSpPr>
         <p:spPr>
           <a:xfrm>
-            <a:off x="7635240" y="1325880"/>
-            <a:ext cx="3474720" cy="1255471"/>
+            <a:off x="7543800" y="1325880"/>
+            <a:ext cx="3611880" cy="1261872"/>
           </a:xfrm>
           <a:prstGeom prst="roundRect">
             <a:avLst>
-              <a:gd name="adj" fmla="val 8740"/>
+              <a:gd name="adj" fmla="val 8696"/>
             </a:avLst>
           </a:prstGeom>
           <a:solidFill>
@@ -17517,8 +17521,8 @@
         </p:nvSpPr>
         <p:spPr>
           <a:xfrm>
-            <a:off x="7799832" y="1472184"/>
-            <a:ext cx="3145536" cy="256032"/>
+            <a:off x="7708392" y="1453896"/>
+            <a:ext cx="3282696" cy="228600"/>
           </a:xfrm>
           <a:prstGeom prst="rect">
             <a:avLst/>
@@ -17534,7 +17538,7 @@
               <a:buNone/>
             </a:pPr>
             <a:r>
-              <a:rPr lang="en-US" sz="1300" b="1" dirty="0">
+              <a:rPr lang="en-US" sz="1220" b="1" dirty="0">
                 <a:solidFill>
                   <a:srgbClr val="0068B7"/>
                 </a:solidFill>
@@ -17544,7 +17548,7 @@
               </a:rPr>
               <a:t>Governance lens</a:t>
             </a:r>
-            <a:endParaRPr lang="en-US" sz="1300" dirty="0"/>
+            <a:endParaRPr lang="en-US" sz="1220" dirty="0"/>
           </a:p>
         </p:txBody>
       </p:sp>
@@ -17556,8 +17560,8 @@
         </p:nvSpPr>
         <p:spPr>
           <a:xfrm>
-            <a:off x="7799832" y="1801368"/>
-            <a:ext cx="3145536" cy="688543"/>
+            <a:off x="7708392" y="1764792"/>
+            <a:ext cx="3282696" cy="749808"/>
           </a:xfrm>
           <a:prstGeom prst="rect">
             <a:avLst/>
@@ -17575,7 +17579,7 @@
               <a:buNone/>
             </a:pPr>
             <a:r>
-              <a:rPr lang="en-US" sz="1320" dirty="0">
+              <a:rPr lang="en-US" sz="1220" dirty="0">
                 <a:solidFill>
                   <a:srgbClr val="17364A"/>
                 </a:solidFill>
@@ -17583,9 +17587,9 @@
                 <a:ea typeface="Aptos" pitchFamily="34" charset="-122"/>
                 <a:cs typeface="Aptos" pitchFamily="34" charset="-120"/>
               </a:rPr>
-              <a:t>AI Policy Development and Approval Workflow matters because AI adoption changes how public health.</a:t>
-            </a:r>
-            <a:endParaRPr lang="en-US" sz="1320" dirty="0"/>
+              <a:t>AI Policy Development and Approval Workflow matters because AI adoption changes.</a:t>
+            </a:r>
+            <a:endParaRPr lang="en-US" sz="1220" dirty="0"/>
           </a:p>
         </p:txBody>
       </p:sp>
@@ -17597,12 +17601,12 @@
         </p:nvSpPr>
         <p:spPr>
           <a:xfrm>
-            <a:off x="7635240" y="2718511"/>
-            <a:ext cx="3474720" cy="1328623"/>
+            <a:off x="7543800" y="2724912"/>
+            <a:ext cx="3611880" cy="1527048"/>
           </a:xfrm>
           <a:prstGeom prst="roundRect">
             <a:avLst>
-              <a:gd name="adj" fmla="val 8259"/>
+              <a:gd name="adj" fmla="val 7186"/>
             </a:avLst>
           </a:prstGeom>
           <a:solidFill>
@@ -17624,24 +17628,26 @@
         </p:nvSpPr>
         <p:spPr>
           <a:xfrm>
-            <a:off x="7799832" y="2846527"/>
-            <a:ext cx="3145536" cy="237744"/>
-          </a:xfrm>
-          <a:prstGeom prst="rect">
-            <a:avLst/>
-          </a:prstGeom>
-          <a:noFill/>
-          <a:ln/>
-        </p:spPr>
-        <p:txBody>
-          <a:bodyPr wrap="square" lIns="0" tIns="0" rIns="0" bIns="0" rtlCol="0" anchor="ctr"/>
-          <a:lstStyle/>
-          <a:p>
-            <a:pPr indent="0" marL="0">
-              <a:buNone/>
-            </a:pPr>
-            <a:r>
-              <a:rPr lang="en-US" sz="1250" b="1" dirty="0">
+            <a:off x="7708392" y="2852928"/>
+            <a:ext cx="3282696" cy="219456"/>
+          </a:xfrm>
+          <a:prstGeom prst="rect">
+            <a:avLst/>
+          </a:prstGeom>
+          <a:noFill/>
+          <a:ln/>
+        </p:spPr>
+        <p:txBody>
+          <a:bodyPr wrap="square" lIns="0" tIns="0" rIns="0" bIns="0" rtlCol="0" anchor="ctr">
+            <a:normAutofit/>
+          </a:bodyPr>
+          <a:lstStyle/>
+          <a:p>
+            <a:pPr indent="0" marL="0">
+              <a:buNone/>
+            </a:pPr>
+            <a:r>
+              <a:rPr lang="en-US" sz="1160" b="1" dirty="0">
                 <a:solidFill>
                   <a:srgbClr val="0068B7"/>
                 </a:solidFill>
@@ -17651,7 +17657,7 @@
               </a:rPr>
               <a:t>Governance pathway</a:t>
             </a:r>
-            <a:endParaRPr lang="en-US" sz="1250" dirty="0"/>
+            <a:endParaRPr lang="en-US" sz="1160" dirty="0"/>
           </a:p>
         </p:txBody>
       </p:sp>
@@ -17663,7 +17669,7 @@
         </p:nvSpPr>
         <p:spPr>
           <a:xfrm>
-            <a:off x="8763000" y="3399739"/>
+            <a:off x="8717280" y="3406140"/>
             <a:ext cx="164592" cy="0"/>
           </a:xfrm>
           <a:prstGeom prst="line">
@@ -17686,8 +17692,8 @@
         </p:nvSpPr>
         <p:spPr>
           <a:xfrm>
-            <a:off x="7872984" y="3248863"/>
-            <a:ext cx="890016" cy="301752"/>
+            <a:off x="7781544" y="3255264"/>
+            <a:ext cx="935736" cy="301752"/>
           </a:xfrm>
           <a:prstGeom prst="roundRect">
             <a:avLst>
@@ -17713,8 +17719,8 @@
         </p:nvSpPr>
         <p:spPr>
           <a:xfrm>
-            <a:off x="7909560" y="3322015"/>
-            <a:ext cx="816864" cy="146304"/>
+            <a:off x="7818120" y="3328416"/>
+            <a:ext cx="862584" cy="146304"/>
           </a:xfrm>
           <a:prstGeom prst="rect">
             <a:avLst/>
@@ -17754,7 +17760,7 @@
         </p:nvSpPr>
         <p:spPr>
           <a:xfrm>
-            <a:off x="9817608" y="3399739"/>
+            <a:off x="9817608" y="3406140"/>
             <a:ext cx="164592" cy="0"/>
           </a:xfrm>
           <a:prstGeom prst="line">
@@ -17777,8 +17783,8 @@
         </p:nvSpPr>
         <p:spPr>
           <a:xfrm>
-            <a:off x="8927592" y="3248863"/>
-            <a:ext cx="890016" cy="301752"/>
+            <a:off x="8881872" y="3255264"/>
+            <a:ext cx="935736" cy="301752"/>
           </a:xfrm>
           <a:prstGeom prst="roundRect">
             <a:avLst>
@@ -17804,8 +17810,8 @@
         </p:nvSpPr>
         <p:spPr>
           <a:xfrm>
-            <a:off x="8964168" y="3322015"/>
-            <a:ext cx="816864" cy="146304"/>
+            <a:off x="8918448" y="3328416"/>
+            <a:ext cx="862584" cy="146304"/>
           </a:xfrm>
           <a:prstGeom prst="rect">
             <a:avLst/>
@@ -17845,8 +17851,8 @@
         </p:nvSpPr>
         <p:spPr>
           <a:xfrm>
-            <a:off x="9982200" y="3248863"/>
-            <a:ext cx="890016" cy="301752"/>
+            <a:off x="9982200" y="3255264"/>
+            <a:ext cx="935736" cy="301752"/>
           </a:xfrm>
           <a:prstGeom prst="roundRect">
             <a:avLst>
@@ -17872,8 +17878,8 @@
         </p:nvSpPr>
         <p:spPr>
           <a:xfrm>
-            <a:off x="10018776" y="3322015"/>
-            <a:ext cx="816864" cy="146304"/>
+            <a:off x="10018776" y="3328416"/>
+            <a:ext cx="862584" cy="146304"/>
           </a:xfrm>
           <a:prstGeom prst="rect">
             <a:avLst/>
@@ -17913,8 +17919,8 @@
         </p:nvSpPr>
         <p:spPr>
           <a:xfrm>
-            <a:off x="7854696" y="3742639"/>
-            <a:ext cx="3035808" cy="158191"/>
+            <a:off x="7763256" y="3749040"/>
+            <a:ext cx="3172968" cy="356616"/>
           </a:xfrm>
           <a:prstGeom prst="rect">
             <a:avLst/>
@@ -17932,7 +17938,7 @@
               <a:buNone/>
             </a:pPr>
             <a:r>
-              <a:rPr lang="en-US" sz="1120" dirty="0">
+              <a:rPr lang="en-US" sz="1040" dirty="0">
                 <a:solidFill>
                   <a:srgbClr val="17364A"/>
                 </a:solidFill>
@@ -17940,9 +17946,9 @@
                 <a:ea typeface="Aptos" pitchFamily="34" charset="-122"/>
                 <a:cs typeface="Aptos" pitchFamily="34" charset="-120"/>
               </a:rPr>
-              <a:t>A proposed AI use should move through documented review before it becomes an operational workflow.</a:t>
-            </a:r>
-            <a:endParaRPr lang="en-US" sz="1120" dirty="0"/>
+              <a:t>A proposed AI use should move through documented review before it.</a:t>
+            </a:r>
+            <a:endParaRPr lang="en-US" sz="1040" dirty="0"/>
           </a:p>
         </p:txBody>
       </p:sp>
@@ -17954,12 +17960,12 @@
         </p:nvSpPr>
         <p:spPr>
           <a:xfrm>
-            <a:off x="7635240" y="4184294"/>
-            <a:ext cx="3474720" cy="1466698"/>
+            <a:off x="7543800" y="4389120"/>
+            <a:ext cx="3611880" cy="1261872"/>
           </a:xfrm>
           <a:prstGeom prst="roundRect">
             <a:avLst>
-              <a:gd name="adj" fmla="val 7481"/>
+              <a:gd name="adj" fmla="val 8696"/>
             </a:avLst>
           </a:prstGeom>
           <a:solidFill>
@@ -17981,8 +17987,8 @@
         </p:nvSpPr>
         <p:spPr>
           <a:xfrm>
-            <a:off x="7799832" y="4330598"/>
-            <a:ext cx="3145536" cy="256032"/>
+            <a:off x="7708392" y="4517136"/>
+            <a:ext cx="3282696" cy="228600"/>
           </a:xfrm>
           <a:prstGeom prst="rect">
             <a:avLst/>
@@ -17998,7 +18004,7 @@
               <a:buNone/>
             </a:pPr>
             <a:r>
-              <a:rPr lang="en-US" sz="1300" b="1" dirty="0">
+              <a:rPr lang="en-US" sz="1220" b="1" dirty="0">
                 <a:solidFill>
                   <a:srgbClr val="0068B7"/>
                 </a:solidFill>
@@ -18008,7 +18014,7 @@
               </a:rPr>
               <a:t>What to document</a:t>
             </a:r>
-            <a:endParaRPr lang="en-US" sz="1300" dirty="0"/>
+            <a:endParaRPr lang="en-US" sz="1220" dirty="0"/>
           </a:p>
         </p:txBody>
       </p:sp>
@@ -18020,8 +18026,8 @@
         </p:nvSpPr>
         <p:spPr>
           <a:xfrm>
-            <a:off x="7799832" y="4659782"/>
-            <a:ext cx="3145536" cy="899770"/>
+            <a:off x="7708392" y="4828032"/>
+            <a:ext cx="3282696" cy="749808"/>
           </a:xfrm>
           <a:prstGeom prst="rect">
             <a:avLst/>
@@ -18039,7 +18045,7 @@
               <a:buNone/>
             </a:pPr>
             <a:r>
-              <a:rPr lang="en-US" sz="1320" dirty="0">
+              <a:rPr lang="en-US" sz="1220" dirty="0">
                 <a:solidFill>
                   <a:srgbClr val="17364A"/>
                 </a:solidFill>
@@ -18047,9 +18053,9 @@
                 <a:ea typeface="Aptos" pitchFamily="34" charset="-122"/>
                 <a:cs typeface="Aptos" pitchFamily="34" charset="-120"/>
               </a:rPr>
-              <a:t>Translate this concept into clear decision rights, review steps, documentation expectations, and escalation paths before an AI-supported workflow is approved.</a:t>
-            </a:r>
-            <a:endParaRPr lang="en-US" sz="1320" dirty="0"/>
+              <a:t>Translate this concept into clear decision rights, review steps, documentation.</a:t>
+            </a:r>
+            <a:endParaRPr lang="en-US" sz="1220" dirty="0"/>
           </a:p>
         </p:txBody>
       </p:sp>

--- a/downloads/presentations/modules/pol-310.pptx
+++ b/downloads/presentations/modules/pol-310.pptx
@@ -10911,7 +10911,7 @@
                 <a:ea typeface="Aptos" pitchFamily="34" charset="-122"/>
                 <a:cs typeface="Aptos" pitchFamily="34" charset="-120"/>
               </a:rPr>
-              <a:t>• 1. What is the strongest evidence that ai policy development and approval.</a:t>
+              <a:t>1. What is the strongest evidence that ai policy development and approval.</a:t>
             </a:r>
             <a:endParaRPr lang="en-US" sz="1920" dirty="0"/>
           </a:p>
@@ -10928,7 +10928,7 @@
                 <a:ea typeface="Aptos" pitchFamily="34" charset="-122"/>
                 <a:cs typeface="Aptos" pitchFamily="34" charset="-120"/>
               </a:rPr>
-              <a:t>• 2. What is the best reason to assign an accountability owner?</a:t>
+              <a:t>2. What is the best reason to assign an accountability owner?</a:t>
             </a:r>
             <a:endParaRPr lang="en-US" sz="1920" dirty="0"/>
           </a:p>
@@ -10945,7 +10945,7 @@
                 <a:ea typeface="Aptos" pitchFamily="34" charset="-122"/>
                 <a:cs typeface="Aptos" pitchFamily="34" charset="-120"/>
               </a:rPr>
-              <a:t>• 3. When should an AI-supported workflow be escalated for review?</a:t>
+              <a:t>3. When should an AI-supported workflow be escalated for review?</a:t>
             </a:r>
             <a:endParaRPr lang="en-US" sz="1920" dirty="0"/>
           </a:p>
@@ -11052,7 +11052,7 @@
                 <a:ea typeface="Aptos" pitchFamily="34" charset="-122"/>
                 <a:cs typeface="Aptos" pitchFamily="34" charset="-120"/>
               </a:rPr>
-              <a:t>1. What is the strongest evidence that ai policy development and approval.</a:t>
+              <a:t>What is the strongest evidence that ai policy development and approval workflow.</a:t>
             </a:r>
             <a:endParaRPr lang="en-US" sz="1220" dirty="0"/>
           </a:p>
@@ -11159,41 +11159,7 @@
                 <a:ea typeface="Aptos" pitchFamily="34" charset="-122"/>
                 <a:cs typeface="Aptos" pitchFamily="34" charset="-120"/>
               </a:rPr>
-              <a:t>1.</a:t>
-            </a:r>
-            <a:endParaRPr lang="en-US" sz="1140" dirty="0"/>
-          </a:p>
-          <a:p>
-            <a:pPr indent="0" marL="0">
-              <a:buNone/>
-            </a:pPr>
-            <a:r>
-              <a:rPr lang="en-US" sz="1140" dirty="0">
-                <a:solidFill>
-                  <a:srgbClr val="17364A"/>
-                </a:solidFill>
-                <a:latin typeface="Aptos" pitchFamily="34" charset="0"/>
-                <a:ea typeface="Aptos" pitchFamily="34" charset="-122"/>
-                <a:cs typeface="Aptos" pitchFamily="34" charset="-120"/>
-              </a:rPr>
               <a:t>What is the strongest evidence that ai policy.</a:t>
-            </a:r>
-            <a:endParaRPr lang="en-US" sz="1140" dirty="0"/>
-          </a:p>
-          <a:p>
-            <a:pPr indent="0" marL="0">
-              <a:buNone/>
-            </a:pPr>
-            <a:r>
-              <a:rPr lang="en-US" sz="1140" dirty="0">
-                <a:solidFill>
-                  <a:srgbClr val="17364A"/>
-                </a:solidFill>
-                <a:latin typeface="Aptos" pitchFamily="34" charset="0"/>
-                <a:ea typeface="Aptos" pitchFamily="34" charset="-122"/>
-                <a:cs typeface="Aptos" pitchFamily="34" charset="-120"/>
-              </a:rPr>
-              <a:t>2.</a:t>
             </a:r>
             <a:endParaRPr lang="en-US" sz="1140" dirty="0"/>
           </a:p>
